--- a/docs/lecture_slides/Week 2/Week2_Lecture5_slides_1_19_2024.pptx
+++ b/docs/lecture_slides/Week 2/Week2_Lecture5_slides_1_19_2024.pptx
@@ -3636,7 +3636,7 @@
     </p:spTree>
     <p:extLst>
       <p:ext uri="{BB962C8B-B14F-4D97-AF65-F5344CB8AC3E}">
-        <p14:creationId xmlns:p14="http://schemas.microsoft.com/office/powerpoint/2010/main" val="2882306300"/>
+        <p14:creationId xmlns:p14="http://schemas.microsoft.com/office/powerpoint/2010/main" val="1872709583"/>
       </p:ext>
     </p:extLst>
   </p:cSld>
@@ -3784,7 +3784,7 @@
     </p:spTree>
     <p:extLst>
       <p:ext uri="{BB962C8B-B14F-4D97-AF65-F5344CB8AC3E}">
-        <p14:creationId xmlns:p14="http://schemas.microsoft.com/office/powerpoint/2010/main" val="2433185399"/>
+        <p14:creationId xmlns:p14="http://schemas.microsoft.com/office/powerpoint/2010/main" val="1462869705"/>
       </p:ext>
     </p:extLst>
   </p:cSld>
@@ -4816,7 +4816,7 @@
     </p:spTree>
     <p:extLst>
       <p:ext uri="{BB962C8B-B14F-4D97-AF65-F5344CB8AC3E}">
-        <p14:creationId xmlns:p14="http://schemas.microsoft.com/office/powerpoint/2010/main" val="1661603988"/>
+        <p14:creationId xmlns:p14="http://schemas.microsoft.com/office/powerpoint/2010/main" val="165304605"/>
       </p:ext>
     </p:extLst>
   </p:cSld>
@@ -4958,7 +4958,7 @@
     </p:spTree>
     <p:extLst>
       <p:ext uri="{BB962C8B-B14F-4D97-AF65-F5344CB8AC3E}">
-        <p14:creationId xmlns:p14="http://schemas.microsoft.com/office/powerpoint/2010/main" val="4170938275"/>
+        <p14:creationId xmlns:p14="http://schemas.microsoft.com/office/powerpoint/2010/main" val="2940681080"/>
       </p:ext>
     </p:extLst>
   </p:cSld>
@@ -5018,7 +5018,7 @@
     </p:spTree>
     <p:extLst>
       <p:ext uri="{BB962C8B-B14F-4D97-AF65-F5344CB8AC3E}">
-        <p14:creationId xmlns:p14="http://schemas.microsoft.com/office/powerpoint/2010/main" val="587893769"/>
+        <p14:creationId xmlns:p14="http://schemas.microsoft.com/office/powerpoint/2010/main" val="2134092552"/>
       </p:ext>
     </p:extLst>
   </p:cSld>
@@ -5426,7 +5426,7 @@
     </p:spTree>
     <p:extLst>
       <p:ext uri="{BB962C8B-B14F-4D97-AF65-F5344CB8AC3E}">
-        <p14:creationId xmlns:p14="http://schemas.microsoft.com/office/powerpoint/2010/main" val="3372766809"/>
+        <p14:creationId xmlns:p14="http://schemas.microsoft.com/office/powerpoint/2010/main" val="1672991489"/>
       </p:ext>
     </p:extLst>
   </p:cSld>
@@ -5995,7 +5995,7 @@
     </p:spTree>
     <p:extLst>
       <p:ext uri="{BB962C8B-B14F-4D97-AF65-F5344CB8AC3E}">
-        <p14:creationId xmlns:p14="http://schemas.microsoft.com/office/powerpoint/2010/main" val="3474604953"/>
+        <p14:creationId xmlns:p14="http://schemas.microsoft.com/office/powerpoint/2010/main" val="1737068264"/>
       </p:ext>
     </p:extLst>
   </p:cSld>
@@ -6910,7 +6910,7 @@
     </p:spTree>
     <p:extLst>
       <p:ext uri="{BB962C8B-B14F-4D97-AF65-F5344CB8AC3E}">
-        <p14:creationId xmlns:p14="http://schemas.microsoft.com/office/powerpoint/2010/main" val="1866486794"/>
+        <p14:creationId xmlns:p14="http://schemas.microsoft.com/office/powerpoint/2010/main" val="2465021212"/>
       </p:ext>
     </p:extLst>
   </p:cSld>
@@ -7386,7 +7386,7 @@
     </p:spTree>
     <p:extLst>
       <p:ext uri="{BB962C8B-B14F-4D97-AF65-F5344CB8AC3E}">
-        <p14:creationId xmlns:p14="http://schemas.microsoft.com/office/powerpoint/2010/main" val="3381239205"/>
+        <p14:creationId xmlns:p14="http://schemas.microsoft.com/office/powerpoint/2010/main" val="2075252588"/>
       </p:ext>
     </p:extLst>
   </p:cSld>
@@ -7701,7 +7701,7 @@
     </p:spTree>
     <p:extLst>
       <p:ext uri="{BB962C8B-B14F-4D97-AF65-F5344CB8AC3E}">
-        <p14:creationId xmlns:p14="http://schemas.microsoft.com/office/powerpoint/2010/main" val="275491056"/>
+        <p14:creationId xmlns:p14="http://schemas.microsoft.com/office/powerpoint/2010/main" val="3043135837"/>
       </p:ext>
     </p:extLst>
   </p:cSld>
@@ -9130,7 +9130,7 @@
     </p:spTree>
     <p:extLst>
       <p:ext uri="{BB962C8B-B14F-4D97-AF65-F5344CB8AC3E}">
-        <p14:creationId xmlns:p14="http://schemas.microsoft.com/office/powerpoint/2010/main" val="2860374262"/>
+        <p14:creationId xmlns:p14="http://schemas.microsoft.com/office/powerpoint/2010/main" val="1339374432"/>
       </p:ext>
     </p:extLst>
   </p:cSld>
@@ -9398,7 +9398,7 @@
     </p:spTree>
     <p:extLst>
       <p:ext uri="{BB962C8B-B14F-4D97-AF65-F5344CB8AC3E}">
-        <p14:creationId xmlns:p14="http://schemas.microsoft.com/office/powerpoint/2010/main" val="1181264920"/>
+        <p14:creationId xmlns:p14="http://schemas.microsoft.com/office/powerpoint/2010/main" val="1025040394"/>
       </p:ext>
     </p:extLst>
   </p:cSld>
@@ -10886,7 +10886,7 @@
     </p:spTree>
     <p:extLst>
       <p:ext uri="{BB962C8B-B14F-4D97-AF65-F5344CB8AC3E}">
-        <p14:creationId xmlns:p14="http://schemas.microsoft.com/office/powerpoint/2010/main" val="3969543990"/>
+        <p14:creationId xmlns:p14="http://schemas.microsoft.com/office/powerpoint/2010/main" val="919873286"/>
       </p:ext>
     </p:extLst>
   </p:cSld>
@@ -11011,7 +11011,7 @@
     </p:spTree>
     <p:extLst>
       <p:ext uri="{BB962C8B-B14F-4D97-AF65-F5344CB8AC3E}">
-        <p14:creationId xmlns:p14="http://schemas.microsoft.com/office/powerpoint/2010/main" val="2328300319"/>
+        <p14:creationId xmlns:p14="http://schemas.microsoft.com/office/powerpoint/2010/main" val="4076174346"/>
       </p:ext>
     </p:extLst>
   </p:cSld>
@@ -11099,7 +11099,7 @@
     </p:spTree>
     <p:extLst>
       <p:ext uri="{BB962C8B-B14F-4D97-AF65-F5344CB8AC3E}">
-        <p14:creationId xmlns:p14="http://schemas.microsoft.com/office/powerpoint/2010/main" val="1985037083"/>
+        <p14:creationId xmlns:p14="http://schemas.microsoft.com/office/powerpoint/2010/main" val="1917626945"/>
       </p:ext>
     </p:extLst>
   </p:cSld>
@@ -11315,7 +11315,7 @@
     </p:spTree>
     <p:extLst>
       <p:ext uri="{BB962C8B-B14F-4D97-AF65-F5344CB8AC3E}">
-        <p14:creationId xmlns:p14="http://schemas.microsoft.com/office/powerpoint/2010/main" val="751844891"/>
+        <p14:creationId xmlns:p14="http://schemas.microsoft.com/office/powerpoint/2010/main" val="3336169193"/>
       </p:ext>
     </p:extLst>
   </p:cSld>
@@ -11569,7 +11569,7 @@
     </p:spTree>
     <p:extLst>
       <p:ext uri="{BB962C8B-B14F-4D97-AF65-F5344CB8AC3E}">
-        <p14:creationId xmlns:p14="http://schemas.microsoft.com/office/powerpoint/2010/main" val="2757094478"/>
+        <p14:creationId xmlns:p14="http://schemas.microsoft.com/office/powerpoint/2010/main" val="3939556708"/>
       </p:ext>
     </p:extLst>
   </p:cSld>
@@ -11673,7 +11673,7 @@
     </p:spTree>
     <p:extLst>
       <p:ext uri="{BB962C8B-B14F-4D97-AF65-F5344CB8AC3E}">
-        <p14:creationId xmlns:p14="http://schemas.microsoft.com/office/powerpoint/2010/main" val="453027852"/>
+        <p14:creationId xmlns:p14="http://schemas.microsoft.com/office/powerpoint/2010/main" val="236921382"/>
       </p:ext>
     </p:extLst>
   </p:cSld>
@@ -11853,7 +11853,7 @@
     </p:spTree>
     <p:extLst>
       <p:ext uri="{BB962C8B-B14F-4D97-AF65-F5344CB8AC3E}">
-        <p14:creationId xmlns:p14="http://schemas.microsoft.com/office/powerpoint/2010/main" val="1844292270"/>
+        <p14:creationId xmlns:p14="http://schemas.microsoft.com/office/powerpoint/2010/main" val="1386231900"/>
       </p:ext>
     </p:extLst>
   </p:cSld>
@@ -11913,7 +11913,7 @@
     </p:spTree>
     <p:extLst>
       <p:ext uri="{BB962C8B-B14F-4D97-AF65-F5344CB8AC3E}">
-        <p14:creationId xmlns:p14="http://schemas.microsoft.com/office/powerpoint/2010/main" val="2458905175"/>
+        <p14:creationId xmlns:p14="http://schemas.microsoft.com/office/powerpoint/2010/main" val="867768209"/>
       </p:ext>
     </p:extLst>
   </p:cSld>
@@ -11945,7 +11945,7 @@
           <p:cNvPr id="2" name="Title 1">
             <a:extLst>
               <a:ext uri="{FF2B5EF4-FFF2-40B4-BE49-F238E27FC236}">
-                <a16:creationId xmlns:a16="http://schemas.microsoft.com/office/drawing/2014/main" id="{E2F05537-368C-F876-2D38-F08825FC2E07}"/>
+                <a16:creationId xmlns:a16="http://schemas.microsoft.com/office/drawing/2014/main" id="{602EA695-3AC8-A481-E49D-28C2DE376D09}"/>
               </a:ext>
             </a:extLst>
           </p:cNvPr>
@@ -11963,7 +11963,7 @@
           <a:p>
             <a:r>
               <a:rPr lang="en-US"/>
-              <a:t>Review: one small dataset</a:t>
+              <a:t>Review: ten video games</a:t>
             </a:r>
           </a:p>
         </p:txBody>
@@ -11973,7 +11973,7 @@
           <p:cNvPr id="3" name="Content Placeholder 2">
             <a:extLst>
               <a:ext uri="{FF2B5EF4-FFF2-40B4-BE49-F238E27FC236}">
-                <a16:creationId xmlns:a16="http://schemas.microsoft.com/office/drawing/2014/main" id="{BA2DD419-6B4D-A2B7-82E5-B99E445B4F74}"/>
+                <a16:creationId xmlns:a16="http://schemas.microsoft.com/office/drawing/2014/main" id="{21B7095C-11DB-7936-5FB4-845A466B7D33}"/>
               </a:ext>
             </a:extLst>
           </p:cNvPr>
@@ -11986,8 +11986,8 @@
         </p:nvSpPr>
         <p:spPr>
           <a:xfrm>
-            <a:off x="762000" y="1270000"/>
-            <a:ext cx="10795000" cy="584200"/>
+            <a:off x="762000" y="1244600"/>
+            <a:ext cx="10795000" cy="482600"/>
           </a:xfrm>
         </p:spPr>
         <p:txBody>
@@ -12001,7 +12001,7 @@
             </a:pPr>
             <a:r>
               <a:rPr lang="en-US" sz="1600"/>
-              <a:t>x = waiting time between eruptions of Old Faithful (minutes), for a random sample of n = 10 eruptions.</a:t>
+              <a:t>x = Metacritic critic score, for a random sample of n = 10 best-selling video games.</a:t>
             </a:r>
           </a:p>
         </p:txBody>
@@ -12011,7 +12011,7 @@
           <p:cNvPr id="4" name="Values">
             <a:extLst>
               <a:ext uri="{FF2B5EF4-FFF2-40B4-BE49-F238E27FC236}">
-                <a16:creationId xmlns:a16="http://schemas.microsoft.com/office/drawing/2014/main" id="{89593ED8-70E3-F0EB-DE16-964F6188179E}"/>
+                <a16:creationId xmlns:a16="http://schemas.microsoft.com/office/drawing/2014/main" id="{843B934A-AF59-02EF-8995-47A653C8EF1E}"/>
               </a:ext>
             </a:extLst>
           </p:cNvPr>
@@ -12020,8 +12020,8 @@
         </p:nvSpPr>
         <p:spPr>
           <a:xfrm>
-            <a:off x="762000" y="1854200"/>
-            <a:ext cx="10795000" cy="369332"/>
+            <a:off x="762000" y="1752600"/>
+            <a:ext cx="10795000" cy="381000"/>
           </a:xfrm>
           <a:prstGeom prst="rect">
             <a:avLst/>
@@ -12038,7 +12038,7 @@
               <a:rPr lang="en-US" b="1">
                 <a:latin typeface="Consolas" panose="020B0609020204030204" pitchFamily="49" charset="0"/>
               </a:rPr>
-              <a:t>x = { 45,  51,  52,  56,  77,  78,  78,  78,  79,  84 }</a:t>
+              <a:t>x = { 68,  72,  76,  76,  76,  83,  85,  87,  92,  95 }</a:t>
             </a:r>
           </a:p>
         </p:txBody>
@@ -12048,7 +12048,7 @@
           <p:cNvPr id="6" name="Picture 5">
             <a:extLst>
               <a:ext uri="{FF2B5EF4-FFF2-40B4-BE49-F238E27FC236}">
-                <a16:creationId xmlns:a16="http://schemas.microsoft.com/office/drawing/2014/main" id="{11726840-09C8-C9CB-EB29-3C6605F538AA}"/>
+                <a16:creationId xmlns:a16="http://schemas.microsoft.com/office/drawing/2014/main" id="{00A12CEC-6AE4-7530-386E-A62105F9D069}"/>
               </a:ext>
             </a:extLst>
           </p:cNvPr>
@@ -12071,8 +12071,44 @@
         </p:blipFill>
         <p:spPr>
           <a:xfrm>
-            <a:off x="2159000" y="2438400"/>
-            <a:ext cx="7874000" cy="3505200"/>
+            <a:off x="508000" y="2235200"/>
+            <a:ext cx="5969000" cy="3708400"/>
+          </a:xfrm>
+          <a:prstGeom prst="rect">
+            <a:avLst/>
+          </a:prstGeom>
+        </p:spPr>
+      </p:pic>
+      <p:pic>
+        <p:nvPicPr>
+          <p:cNvPr id="8" name="Picture 7">
+            <a:extLst>
+              <a:ext uri="{FF2B5EF4-FFF2-40B4-BE49-F238E27FC236}">
+                <a16:creationId xmlns:a16="http://schemas.microsoft.com/office/drawing/2014/main" id="{03F605A8-66A2-41B0-4B9F-85FA855F95A2}"/>
+              </a:ext>
+            </a:extLst>
+          </p:cNvPr>
+          <p:cNvPicPr>
+            <a:picLocks/>
+          </p:cNvPicPr>
+          <p:nvPr/>
+        </p:nvPicPr>
+        <p:blipFill>
+          <a:blip r:embed="rId3">
+            <a:extLst>
+              <a:ext uri="{28A0092B-C50C-407E-A947-70E740481C1C}">
+                <a14:useLocalDpi xmlns:a14="http://schemas.microsoft.com/office/drawing/2010/main" val="0"/>
+              </a:ext>
+            </a:extLst>
+          </a:blip>
+          <a:stretch>
+            <a:fillRect/>
+          </a:stretch>
+        </p:blipFill>
+        <p:spPr>
+          <a:xfrm>
+            <a:off x="6858000" y="2235200"/>
+            <a:ext cx="4826000" cy="2349500"/>
           </a:xfrm>
           <a:prstGeom prst="rect">
             <a:avLst/>
@@ -12081,10 +12117,10 @@
       </p:pic>
       <p:sp>
         <p:nvSpPr>
-          <p:cNvPr id="7" name="TextBox 6">
+          <p:cNvPr id="9" name="TextBox 8">
             <a:extLst>
               <a:ext uri="{FF2B5EF4-FFF2-40B4-BE49-F238E27FC236}">
-                <a16:creationId xmlns:a16="http://schemas.microsoft.com/office/drawing/2014/main" id="{267B0811-F0B8-E752-BDB3-0897DFC6CDF7}"/>
+                <a16:creationId xmlns:a16="http://schemas.microsoft.com/office/drawing/2014/main" id="{CE541DD7-04E3-2643-4511-B3A7406B9876}"/>
               </a:ext>
             </a:extLst>
           </p:cNvPr>
@@ -12093,8 +12129,43 @@
         </p:nvSpPr>
         <p:spPr>
           <a:xfrm>
-            <a:off x="762000" y="6070600"/>
-            <a:ext cx="10795000" cy="307777"/>
+            <a:off x="6858000" y="4800600"/>
+            <a:ext cx="4826000" cy="492443"/>
+          </a:xfrm>
+          <a:prstGeom prst="rect">
+            <a:avLst/>
+          </a:prstGeom>
+          <a:noFill/>
+        </p:spPr>
+        <p:txBody>
+          <a:bodyPr vert="horz" wrap="square" rtlCol="0">
+            <a:spAutoFit/>
+          </a:bodyPr>
+          <a:lstStyle/>
+          <a:p>
+            <a:r>
+              <a:rPr lang="en-US" sz="1300" i="1"/>
+              <a:t>Four bins of width 10. Most of these games score in the 70s, with a few running up into the 90s.</a:t>
+            </a:r>
+          </a:p>
+        </p:txBody>
+      </p:sp>
+      <p:sp>
+        <p:nvSpPr>
+          <p:cNvPr id="10" name="TextBox 9">
+            <a:extLst>
+              <a:ext uri="{FF2B5EF4-FFF2-40B4-BE49-F238E27FC236}">
+                <a16:creationId xmlns:a16="http://schemas.microsoft.com/office/drawing/2014/main" id="{BD195836-C2AF-8978-1148-2171E77D2E25}"/>
+              </a:ext>
+            </a:extLst>
+          </p:cNvPr>
+          <p:cNvSpPr txBox="1"/>
+          <p:nvPr/>
+        </p:nvSpPr>
+        <p:spPr>
+          <a:xfrm>
+            <a:off x="508000" y="6451600"/>
+            <a:ext cx="11176000" cy="246221"/>
           </a:xfrm>
           <a:prstGeom prst="rect">
             <a:avLst/>
@@ -12108,8 +12179,12 @@
           <a:lstStyle/>
           <a:p>
             <a:r>
-              <a:rPr lang="en-US" sz="1400" i="1"/>
-              <a:t>Five bins of width 10. Notice the bin that came out empty.</a:t>
+              <a:rPr lang="en-US" sz="1000" i="1">
+                <a:solidFill>
+                  <a:srgbClr val="666666"/>
+                </a:solidFill>
+              </a:rPr>
+              <a:t>Data: VGChartz sales joined to Metacritic ratings, restricted to titles selling 5 million copies or more (127 games).</a:t>
             </a:r>
           </a:p>
         </p:txBody>
@@ -12117,7 +12192,7 @@
     </p:spTree>
     <p:extLst>
       <p:ext uri="{BB962C8B-B14F-4D97-AF65-F5344CB8AC3E}">
-        <p14:creationId xmlns:p14="http://schemas.microsoft.com/office/powerpoint/2010/main" val="1881088174"/>
+        <p14:creationId xmlns:p14="http://schemas.microsoft.com/office/powerpoint/2010/main" val="3538760259"/>
       </p:ext>
     </p:extLst>
   </p:cSld>
@@ -13414,7 +13489,7 @@
     </p:spTree>
     <p:extLst>
       <p:ext uri="{BB962C8B-B14F-4D97-AF65-F5344CB8AC3E}">
-        <p14:creationId xmlns:p14="http://schemas.microsoft.com/office/powerpoint/2010/main" val="3888045774"/>
+        <p14:creationId xmlns:p14="http://schemas.microsoft.com/office/powerpoint/2010/main" val="1205830479"/>
       </p:ext>
     </p:extLst>
   </p:cSld>
@@ -13524,7 +13599,7 @@
     </p:spTree>
     <p:extLst>
       <p:ext uri="{BB962C8B-B14F-4D97-AF65-F5344CB8AC3E}">
-        <p14:creationId xmlns:p14="http://schemas.microsoft.com/office/powerpoint/2010/main" val="3907875898"/>
+        <p14:creationId xmlns:p14="http://schemas.microsoft.com/office/powerpoint/2010/main" val="722022185"/>
       </p:ext>
     </p:extLst>
   </p:cSld>
@@ -13664,7 +13739,7 @@
     </p:spTree>
     <p:extLst>
       <p:ext uri="{BB962C8B-B14F-4D97-AF65-F5344CB8AC3E}">
-        <p14:creationId xmlns:p14="http://schemas.microsoft.com/office/powerpoint/2010/main" val="2998955756"/>
+        <p14:creationId xmlns:p14="http://schemas.microsoft.com/office/powerpoint/2010/main" val="461962410"/>
       </p:ext>
     </p:extLst>
   </p:cSld>
@@ -13968,7 +14043,7 @@
     </p:spTree>
     <p:extLst>
       <p:ext uri="{BB962C8B-B14F-4D97-AF65-F5344CB8AC3E}">
-        <p14:creationId xmlns:p14="http://schemas.microsoft.com/office/powerpoint/2010/main" val="1845746374"/>
+        <p14:creationId xmlns:p14="http://schemas.microsoft.com/office/powerpoint/2010/main" val="1347518694"/>
       </p:ext>
     </p:extLst>
   </p:cSld>
@@ -14551,7 +14626,7 @@
     </p:spTree>
     <p:extLst>
       <p:ext uri="{BB962C8B-B14F-4D97-AF65-F5344CB8AC3E}">
-        <p14:creationId xmlns:p14="http://schemas.microsoft.com/office/powerpoint/2010/main" val="1489309008"/>
+        <p14:creationId xmlns:p14="http://schemas.microsoft.com/office/powerpoint/2010/main" val="745170016"/>
       </p:ext>
     </p:extLst>
   </p:cSld>
@@ -15309,7 +15384,7 @@
     </p:spTree>
     <p:extLst>
       <p:ext uri="{BB962C8B-B14F-4D97-AF65-F5344CB8AC3E}">
-        <p14:creationId xmlns:p14="http://schemas.microsoft.com/office/powerpoint/2010/main" val="301570501"/>
+        <p14:creationId xmlns:p14="http://schemas.microsoft.com/office/powerpoint/2010/main" val="3613932169"/>
       </p:ext>
     </p:extLst>
   </p:cSld>
@@ -15780,7 +15855,7 @@
     </p:spTree>
     <p:extLst>
       <p:ext uri="{BB962C8B-B14F-4D97-AF65-F5344CB8AC3E}">
-        <p14:creationId xmlns:p14="http://schemas.microsoft.com/office/powerpoint/2010/main" val="347452439"/>
+        <p14:creationId xmlns:p14="http://schemas.microsoft.com/office/powerpoint/2010/main" val="2779751728"/>
       </p:ext>
     </p:extLst>
   </p:cSld>
@@ -16144,7 +16219,7 @@
     </p:spTree>
     <p:extLst>
       <p:ext uri="{BB962C8B-B14F-4D97-AF65-F5344CB8AC3E}">
-        <p14:creationId xmlns:p14="http://schemas.microsoft.com/office/powerpoint/2010/main" val="1627617725"/>
+        <p14:creationId xmlns:p14="http://schemas.microsoft.com/office/powerpoint/2010/main" val="253553745"/>
       </p:ext>
     </p:extLst>
   </p:cSld>
@@ -17101,7 +17176,7 @@
     </p:spTree>
     <p:extLst>
       <p:ext uri="{BB962C8B-B14F-4D97-AF65-F5344CB8AC3E}">
-        <p14:creationId xmlns:p14="http://schemas.microsoft.com/office/powerpoint/2010/main" val="2606279526"/>
+        <p14:creationId xmlns:p14="http://schemas.microsoft.com/office/powerpoint/2010/main" val="3275667608"/>
       </p:ext>
     </p:extLst>
   </p:cSld>
@@ -17133,7 +17208,7 @@
           <p:cNvPr id="2" name="Title 1">
             <a:extLst>
               <a:ext uri="{FF2B5EF4-FFF2-40B4-BE49-F238E27FC236}">
-                <a16:creationId xmlns:a16="http://schemas.microsoft.com/office/drawing/2014/main" id="{9CB0ADC1-B5BD-B5C2-B389-C675FC3679A9}"/>
+                <a16:creationId xmlns:a16="http://schemas.microsoft.com/office/drawing/2014/main" id="{2F7BD5D9-2535-EECF-DCF2-5C4D1AA7FF27}"/>
               </a:ext>
             </a:extLst>
           </p:cNvPr>
@@ -17161,7 +17236,7 @@
           <p:cNvPr id="3" name="Content Placeholder 2">
             <a:extLst>
               <a:ext uri="{FF2B5EF4-FFF2-40B4-BE49-F238E27FC236}">
-                <a16:creationId xmlns:a16="http://schemas.microsoft.com/office/drawing/2014/main" id="{1CB34267-EDAB-874B-71BA-FA862A615CA5}"/>
+                <a16:creationId xmlns:a16="http://schemas.microsoft.com/office/drawing/2014/main" id="{7352D86D-59F2-0877-48AC-A1FA29DA7BA6}"/>
               </a:ext>
             </a:extLst>
           </p:cNvPr>
@@ -17200,7 +17275,7 @@
               <a:rPr lang="en-US" sz="1600">
                 <a:latin typeface="Consolas" panose="020B0609020204030204" pitchFamily="49" charset="0"/>
               </a:rPr>
-              <a:t>x = { 45,  51,  52,  56,  77,  78,  78,  78,  79,  84 }</a:t>
+              <a:t>x = { 68,  72,  76,  76,  76,  83,  85,  87,  92,  95 }</a:t>
             </a:r>
           </a:p>
         </p:txBody>
@@ -17210,7 +17285,7 @@
           <p:cNvPr id="5" name="Picture 4">
             <a:extLst>
               <a:ext uri="{FF2B5EF4-FFF2-40B4-BE49-F238E27FC236}">
-                <a16:creationId xmlns:a16="http://schemas.microsoft.com/office/drawing/2014/main" id="{B7850916-1C01-F2B8-D474-3083FD62C858}"/>
+                <a16:creationId xmlns:a16="http://schemas.microsoft.com/office/drawing/2014/main" id="{144AAA1B-CC9B-B135-0C5F-539FEB542E6D}"/>
               </a:ext>
             </a:extLst>
           </p:cNvPr>
@@ -17244,7 +17319,7 @@
     </p:spTree>
     <p:extLst>
       <p:ext uri="{BB962C8B-B14F-4D97-AF65-F5344CB8AC3E}">
-        <p14:creationId xmlns:p14="http://schemas.microsoft.com/office/powerpoint/2010/main" val="413037631"/>
+        <p14:creationId xmlns:p14="http://schemas.microsoft.com/office/powerpoint/2010/main" val="4132901345"/>
       </p:ext>
     </p:extLst>
   </p:cSld>
@@ -17410,7 +17485,7 @@
           <p:cNvPr id="2" name="Title 1">
             <a:extLst>
               <a:ext uri="{FF2B5EF4-FFF2-40B4-BE49-F238E27FC236}">
-                <a16:creationId xmlns:a16="http://schemas.microsoft.com/office/drawing/2014/main" id="{8F6611E1-F939-75B7-626B-3C25B95DF48D}"/>
+                <a16:creationId xmlns:a16="http://schemas.microsoft.com/office/drawing/2014/main" id="{5F0475DD-C30A-CE5B-5EDC-FB6630F130AE}"/>
               </a:ext>
             </a:extLst>
           </p:cNvPr>
@@ -17438,7 +17513,7 @@
           <p:cNvPr id="3" name="Content Placeholder 2">
             <a:extLst>
               <a:ext uri="{FF2B5EF4-FFF2-40B4-BE49-F238E27FC236}">
-                <a16:creationId xmlns:a16="http://schemas.microsoft.com/office/drawing/2014/main" id="{DCB68017-25CA-2491-A25A-42EE761B4CC6}"/>
+                <a16:creationId xmlns:a16="http://schemas.microsoft.com/office/drawing/2014/main" id="{7A65835C-7512-11EE-A3ED-D5A3584C0CA8}"/>
               </a:ext>
             </a:extLst>
           </p:cNvPr>
@@ -17477,7 +17552,7 @@
               <a:rPr lang="en-US" sz="1600">
                 <a:latin typeface="Consolas" panose="020B0609020204030204" pitchFamily="49" charset="0"/>
               </a:rPr>
-              <a:t>x = { 45,  51,  52,  56,  77,  78,  78,  78,  79,  84 }</a:t>
+              <a:t>x = { 68,  72,  76,  76,  76,  83,  85,  87,  92,  95 }</a:t>
             </a:r>
           </a:p>
         </p:txBody>
@@ -17487,7 +17562,7 @@
           <p:cNvPr id="4" name="Stem and leaf">
             <a:extLst>
               <a:ext uri="{FF2B5EF4-FFF2-40B4-BE49-F238E27FC236}">
-                <a16:creationId xmlns:a16="http://schemas.microsoft.com/office/drawing/2014/main" id="{27EDD21C-3939-195D-582C-7D48A4577E52}"/>
+                <a16:creationId xmlns:a16="http://schemas.microsoft.com/office/drawing/2014/main" id="{989826F4-77DC-8262-AD82-17EC8B1B478C}"/>
               </a:ext>
             </a:extLst>
           </p:cNvPr>
@@ -17497,7 +17572,7 @@
         <p:spPr>
           <a:xfrm>
             <a:off x="3810000" y="2667000"/>
-            <a:ext cx="4826000" cy="2862322"/>
+            <a:ext cx="4826000" cy="2554545"/>
           </a:xfrm>
           <a:prstGeom prst="rect">
             <a:avLst/>
@@ -17522,7 +17597,7 @@
               <a:rPr lang="en-US" sz="2000">
                 <a:latin typeface="Consolas" panose="020B0609020204030204" pitchFamily="49" charset="0"/>
               </a:rPr>
-              <a:t>-----+---------</a:t>
+              <a:t>-----+------------</a:t>
             </a:r>
           </a:p>
           <a:p>
@@ -17530,7 +17605,7 @@
               <a:rPr lang="en-US" sz="2000">
                 <a:latin typeface="Consolas" panose="020B0609020204030204" pitchFamily="49" charset="0"/>
               </a:rPr>
-              <a:t>   4 | 5</a:t>
+              <a:t>   6 | 8</a:t>
             </a:r>
           </a:p>
           <a:p>
@@ -17538,7 +17613,7 @@
               <a:rPr lang="en-US" sz="2000">
                 <a:latin typeface="Consolas" panose="020B0609020204030204" pitchFamily="49" charset="0"/>
               </a:rPr>
-              <a:t>   5 | 1  2  6</a:t>
+              <a:t>   7 | 2  6  6  6</a:t>
             </a:r>
           </a:p>
           <a:p>
@@ -17546,7 +17621,7 @@
               <a:rPr lang="en-US" sz="2000">
                 <a:latin typeface="Consolas" panose="020B0609020204030204" pitchFamily="49" charset="0"/>
               </a:rPr>
-              <a:t>   6 |</a:t>
+              <a:t>   8 | 3  5  7</a:t>
             </a:r>
           </a:p>
           <a:p>
@@ -17554,28 +17629,20 @@
               <a:rPr lang="en-US" sz="2000">
                 <a:latin typeface="Consolas" panose="020B0609020204030204" pitchFamily="49" charset="0"/>
               </a:rPr>
-              <a:t>   7 | 7  8  8  8  9</a:t>
-            </a:r>
+              <a:t>   9 | 2  5</a:t>
+            </a:r>
+          </a:p>
+          <a:p>
+            <a:endParaRPr lang="en-US" sz="2000">
+              <a:latin typeface="Consolas" panose="020B0609020204030204" pitchFamily="49" charset="0"/>
+            </a:endParaRPr>
           </a:p>
           <a:p>
             <a:r>
               <a:rPr lang="en-US" sz="2000">
                 <a:latin typeface="Consolas" panose="020B0609020204030204" pitchFamily="49" charset="0"/>
               </a:rPr>
-              <a:t>   8 | 4</a:t>
-            </a:r>
-          </a:p>
-          <a:p>
-            <a:endParaRPr lang="en-US" sz="2000">
-              <a:latin typeface="Consolas" panose="020B0609020204030204" pitchFamily="49" charset="0"/>
-            </a:endParaRPr>
-          </a:p>
-          <a:p>
-            <a:r>
-              <a:rPr lang="en-US" sz="2000">
-                <a:latin typeface="Consolas" panose="020B0609020204030204" pitchFamily="49" charset="0"/>
-              </a:rPr>
-              <a:t>Key:  4 | 5  =  45 minutes</a:t>
+              <a:t>Key:  6 | 8  =  68</a:t>
             </a:r>
           </a:p>
         </p:txBody>
@@ -17583,7 +17650,7 @@
     </p:spTree>
     <p:extLst>
       <p:ext uri="{BB962C8B-B14F-4D97-AF65-F5344CB8AC3E}">
-        <p14:creationId xmlns:p14="http://schemas.microsoft.com/office/powerpoint/2010/main" val="184801336"/>
+        <p14:creationId xmlns:p14="http://schemas.microsoft.com/office/powerpoint/2010/main" val="67675782"/>
       </p:ext>
     </p:extLst>
   </p:cSld>
@@ -17752,7 +17819,7 @@
           <p:cNvPr id="2" name="Title 1">
             <a:extLst>
               <a:ext uri="{FF2B5EF4-FFF2-40B4-BE49-F238E27FC236}">
-                <a16:creationId xmlns:a16="http://schemas.microsoft.com/office/drawing/2014/main" id="{3451078B-7BA4-2FB9-8D35-283E519841F8}"/>
+                <a16:creationId xmlns:a16="http://schemas.microsoft.com/office/drawing/2014/main" id="{4C233810-2BA1-BBFF-C4AF-A6B03EABC814}"/>
               </a:ext>
             </a:extLst>
           </p:cNvPr>
@@ -17780,7 +17847,7 @@
           <p:cNvPr id="3" name="Content Placeholder 2">
             <a:extLst>
               <a:ext uri="{FF2B5EF4-FFF2-40B4-BE49-F238E27FC236}">
-                <a16:creationId xmlns:a16="http://schemas.microsoft.com/office/drawing/2014/main" id="{BDF0C8BC-A5C4-AD5D-2B7F-B148D85577DF}"/>
+                <a16:creationId xmlns:a16="http://schemas.microsoft.com/office/drawing/2014/main" id="{C2C7BE89-9A11-492D-92EE-899492E00DA3}"/>
               </a:ext>
             </a:extLst>
           </p:cNvPr>
@@ -17808,7 +17875,7 @@
             </a:pPr>
             <a:r>
               <a:rPr lang="en-US" sz="1600"/>
-              <a:t>Draw the histogram using the five bins from the frequency table.</a:t>
+              <a:t>Draw the histogram using the four bins from the frequency table.</a:t>
             </a:r>
           </a:p>
           <a:p>
@@ -17819,7 +17886,7 @@
               <a:rPr lang="en-US" sz="1600">
                 <a:latin typeface="Consolas" panose="020B0609020204030204" pitchFamily="49" charset="0"/>
               </a:rPr>
-              <a:t>x = { 45,  51,  52,  56,  77,  78,  78,  78,  79,  84 }</a:t>
+              <a:t>x = { 68,  72,  76,  76,  76,  83,  85,  87,  92,  95 }</a:t>
             </a:r>
           </a:p>
         </p:txBody>
@@ -17829,7 +17896,7 @@
           <p:cNvPr id="5" name="Picture 4">
             <a:extLst>
               <a:ext uri="{FF2B5EF4-FFF2-40B4-BE49-F238E27FC236}">
-                <a16:creationId xmlns:a16="http://schemas.microsoft.com/office/drawing/2014/main" id="{9422DD68-8DA5-D0FE-DA7A-3D50ED3AFA25}"/>
+                <a16:creationId xmlns:a16="http://schemas.microsoft.com/office/drawing/2014/main" id="{BF7C214F-F2DD-3FBF-2BA2-0ACDBD8DD428}"/>
               </a:ext>
             </a:extLst>
           </p:cNvPr>
@@ -17863,7 +17930,7 @@
     </p:spTree>
     <p:extLst>
       <p:ext uri="{BB962C8B-B14F-4D97-AF65-F5344CB8AC3E}">
-        <p14:creationId xmlns:p14="http://schemas.microsoft.com/office/powerpoint/2010/main" val="432316385"/>
+        <p14:creationId xmlns:p14="http://schemas.microsoft.com/office/powerpoint/2010/main" val="1039857790"/>
       </p:ext>
     </p:extLst>
   </p:cSld>
@@ -18029,7 +18096,7 @@
           <p:cNvPr id="2" name="Title 1">
             <a:extLst>
               <a:ext uri="{FF2B5EF4-FFF2-40B4-BE49-F238E27FC236}">
-                <a16:creationId xmlns:a16="http://schemas.microsoft.com/office/drawing/2014/main" id="{F8F173EA-121A-2F41-A73E-7CFE7991B044}"/>
+                <a16:creationId xmlns:a16="http://schemas.microsoft.com/office/drawing/2014/main" id="{001C9DB3-F6DF-A637-1E82-3A0AEC330394}"/>
               </a:ext>
             </a:extLst>
           </p:cNvPr>
@@ -18057,7 +18124,7 @@
           <p:cNvPr id="3" name="Content Placeholder 2">
             <a:extLst>
               <a:ext uri="{FF2B5EF4-FFF2-40B4-BE49-F238E27FC236}">
-                <a16:creationId xmlns:a16="http://schemas.microsoft.com/office/drawing/2014/main" id="{8844EDC5-46AE-3590-51DE-DAB87611EB65}"/>
+                <a16:creationId xmlns:a16="http://schemas.microsoft.com/office/drawing/2014/main" id="{C651B011-D291-C98B-272F-10A4905F450D}"/>
               </a:ext>
             </a:extLst>
           </p:cNvPr>
@@ -18077,39 +18144,32 @@
           <a:p>
             <a:r>
               <a:rPr lang="en-US" sz="1700"/>
-              <a:t>All three show the same gap: not one waiting time between 60 and 70 minutes</a:t>
-            </a:r>
-          </a:p>
-          <a:p>
+              <a:t>All three show the same shape: a peak in the 70s with a tail running up into the 90s</a:t>
+            </a:r>
+          </a:p>
+          <a:p>
+            <a:pPr lvl="1"/>
             <a:r>
               <a:rPr lang="en-US" sz="1700"/>
-              <a:t>Two clusters, around 50 minutes and around 78</a:t>
-            </a:r>
-          </a:p>
-          <a:p>
-            <a:pPr lvl="1"/>
+              <a:t>That is skewed right, the shape we met on Wednesday</a:t>
+            </a:r>
+          </a:p>
+          <a:p>
             <a:r>
               <a:rPr lang="en-US" sz="1700"/>
-              <a:t>The same two humps we saw on Wednesday in all 272 eruptions</a:t>
+              <a:t>Three games tie at 76, so the plots have a clear tallest point</a:t>
             </a:r>
           </a:p>
           <a:p>
             <a:r>
               <a:rPr lang="en-US" sz="1700"/>
-              <a:t>But with n = 10 the shape is faint. With n = 272 it was unmistakable</a:t>
-            </a:r>
-          </a:p>
-          <a:p>
-            <a:pPr lvl="1"/>
+              <a:t>But how skewed? Where exactly is the center? The picture will not say</a:t>
+            </a:r>
+          </a:p>
+          <a:p>
             <a:r>
               <a:rPr lang="en-US" sz="1700"/>
-              <a:t>A small sample can hide a feature that is really there</a:t>
-            </a:r>
-          </a:p>
-          <a:p>
-            <a:r>
-              <a:rPr lang="en-US" sz="1700"/>
-              <a:t>So eyeballing a picture only takes us so far. Now we compute numbers</a:t>
+              <a:t>Eyeballing a plot gets us the shape. Numbers make it precise</a:t>
             </a:r>
           </a:p>
           <a:p>
@@ -18131,7 +18191,7 @@
     </p:spTree>
     <p:extLst>
       <p:ext uri="{BB962C8B-B14F-4D97-AF65-F5344CB8AC3E}">
-        <p14:creationId xmlns:p14="http://schemas.microsoft.com/office/powerpoint/2010/main" val="3598768133"/>
+        <p14:creationId xmlns:p14="http://schemas.microsoft.com/office/powerpoint/2010/main" val="2260463354"/>
       </p:ext>
     </p:extLst>
   </p:cSld>
@@ -18574,7 +18634,7 @@
     </p:spTree>
     <p:extLst>
       <p:ext uri="{BB962C8B-B14F-4D97-AF65-F5344CB8AC3E}">
-        <p14:creationId xmlns:p14="http://schemas.microsoft.com/office/powerpoint/2010/main" val="1909890601"/>
+        <p14:creationId xmlns:p14="http://schemas.microsoft.com/office/powerpoint/2010/main" val="955869114"/>
       </p:ext>
     </p:extLst>
   </p:cSld>
@@ -18731,7 +18791,7 @@
     </p:spTree>
     <p:extLst>
       <p:ext uri="{BB962C8B-B14F-4D97-AF65-F5344CB8AC3E}">
-        <p14:creationId xmlns:p14="http://schemas.microsoft.com/office/powerpoint/2010/main" val="270827147"/>
+        <p14:creationId xmlns:p14="http://schemas.microsoft.com/office/powerpoint/2010/main" val="828261146"/>
       </p:ext>
     </p:extLst>
   </p:cSld>

--- a/docs/lecture_slides/Week 2/Week2_Lecture5_slides_1_19_2024.pptx
+++ b/docs/lecture_slides/Week 2/Week2_Lecture5_slides_1_19_2024.pptx
@@ -3389,17 +3389,33 @@
           <a:lstStyle/>
           <a:p>
             <a:r>
-              <a:rPr lang="en-US"/>
+              <a:rPr lang="en-US">
+                <a:solidFill>
+                  <a:srgbClr val="1F3864"/>
+                </a:solidFill>
+              </a:rPr>
               <a:t>Lecture 5</a:t>
             </a:r>
             <a:br>
-              <a:rPr lang="en-US"/>
+              <a:rPr lang="en-US">
+                <a:solidFill>
+                  <a:srgbClr val="1F3864"/>
+                </a:solidFill>
+              </a:rPr>
             </a:br>
             <a:r>
-              <a:rPr lang="en-US"/>
+              <a:rPr lang="en-US">
+                <a:solidFill>
+                  <a:srgbClr val="1F3864"/>
+                </a:solidFill>
+              </a:rPr>
               <a:t>Measures of Location and Position</a:t>
             </a:r>
-            <a:endParaRPr lang="en-US" dirty="0"/>
+            <a:endParaRPr lang="en-US" dirty="0">
+              <a:solidFill>
+                <a:srgbClr val="1F3864"/>
+              </a:solidFill>
+            </a:endParaRPr>
           </a:p>
         </p:txBody>
       </p:sp>
@@ -3435,6 +3451,62 @@
       </p:grpSpPr>
       <p:sp>
         <p:nvSpPr>
+          <p:cNvPr id="6" name="Body card">
+            <a:extLst>
+              <a:ext uri="{FF2B5EF4-FFF2-40B4-BE49-F238E27FC236}">
+                <a16:creationId xmlns:a16="http://schemas.microsoft.com/office/drawing/2014/main" id="{EA41BED6-3730-9ED7-AB86-789C45DD3A32}"/>
+              </a:ext>
+            </a:extLst>
+          </p:cNvPr>
+          <p:cNvSpPr/>
+          <p:nvPr/>
+        </p:nvSpPr>
+        <p:spPr>
+          <a:xfrm>
+            <a:off x="635000" y="1676400"/>
+            <a:ext cx="10922000" cy="711200"/>
+          </a:xfrm>
+          <a:prstGeom prst="roundRect">
+            <a:avLst>
+              <a:gd name="adj" fmla="val 3000"/>
+            </a:avLst>
+          </a:prstGeom>
+          <a:solidFill>
+            <a:srgbClr val="F2F6FC"/>
+          </a:solidFill>
+          <a:ln w="19050">
+            <a:solidFill>
+              <a:srgbClr val="4472C4"/>
+            </a:solidFill>
+          </a:ln>
+        </p:spPr>
+        <p:style>
+          <a:lnRef idx="2">
+            <a:schemeClr val="accent1">
+              <a:shade val="15000"/>
+            </a:schemeClr>
+          </a:lnRef>
+          <a:fillRef idx="1">
+            <a:schemeClr val="accent1"/>
+          </a:fillRef>
+          <a:effectRef idx="0">
+            <a:schemeClr val="accent1"/>
+          </a:effectRef>
+          <a:fontRef idx="minor">
+            <a:schemeClr val="lt1"/>
+          </a:fontRef>
+        </p:style>
+        <p:txBody>
+          <a:bodyPr rtlCol="0" anchor="ctr"/>
+          <a:lstStyle/>
+          <a:p>
+            <a:pPr algn="ctr"/>
+            <a:endParaRPr lang="en-US"/>
+          </a:p>
+        </p:txBody>
+      </p:sp>
+      <p:sp>
+        <p:nvSpPr>
           <p:cNvPr id="2" name="Title 1">
             <a:extLst>
               <a:ext uri="{FF2B5EF4-FFF2-40B4-BE49-F238E27FC236}">
@@ -3455,7 +3527,11 @@
           <a:lstStyle/>
           <a:p>
             <a:r>
-              <a:rPr lang="en-US" dirty="0"/>
+              <a:rPr lang="en-US" dirty="0">
+                <a:solidFill>
+                  <a:srgbClr val="1F3864"/>
+                </a:solidFill>
+              </a:rPr>
               <a:t>Mean and median treat outliers differently</a:t>
             </a:r>
           </a:p>
@@ -3545,6 +3621,116 @@
           </p:sp>
         </mc:Fallback>
       </mc:AlternateContent>
+      <p:sp>
+        <p:nvSpPr>
+          <p:cNvPr id="4" name="Slide number">
+            <a:extLst>
+              <a:ext uri="{FF2B5EF4-FFF2-40B4-BE49-F238E27FC236}">
+                <a16:creationId xmlns:a16="http://schemas.microsoft.com/office/drawing/2014/main" id="{A4986B61-1E35-88EA-9E49-EE508A359783}"/>
+              </a:ext>
+            </a:extLst>
+          </p:cNvPr>
+          <p:cNvSpPr txBox="1"/>
+          <p:nvPr/>
+        </p:nvSpPr>
+        <p:spPr>
+          <a:xfrm>
+            <a:off x="11723488" y="6477000"/>
+            <a:ext cx="316112" cy="246221"/>
+          </a:xfrm>
+          <a:prstGeom prst="rect">
+            <a:avLst/>
+          </a:prstGeom>
+          <a:solidFill>
+            <a:srgbClr val="FFFFFF"/>
+          </a:solidFill>
+        </p:spPr>
+        <p:txBody>
+          <a:bodyPr vert="horz" wrap="none" rtlCol="0">
+            <a:spAutoFit/>
+          </a:bodyPr>
+          <a:lstStyle/>
+          <a:p>
+            <a:pPr algn="r"/>
+            <a:r>
+              <a:rPr lang="en-US" sz="1000">
+                <a:solidFill>
+                  <a:srgbClr val="808080"/>
+                </a:solidFill>
+              </a:rPr>
+              <a:t>10</a:t>
+            </a:r>
+          </a:p>
+        </p:txBody>
+      </p:sp>
+      <p:sp>
+        <p:nvSpPr>
+          <p:cNvPr id="5" name="Title rule">
+            <a:extLst>
+              <a:ext uri="{FF2B5EF4-FFF2-40B4-BE49-F238E27FC236}">
+                <a16:creationId xmlns:a16="http://schemas.microsoft.com/office/drawing/2014/main" id="{597A61AE-23D2-053C-1636-4C88BF5E0D4D}"/>
+              </a:ext>
+            </a:extLst>
+          </p:cNvPr>
+          <p:cNvSpPr/>
+          <p:nvPr/>
+        </p:nvSpPr>
+        <p:spPr>
+          <a:xfrm>
+            <a:off x="838200" y="1600200"/>
+            <a:ext cx="10515600" cy="38100"/>
+          </a:xfrm>
+          <a:prstGeom prst="rect">
+            <a:avLst/>
+          </a:prstGeom>
+          <a:solidFill>
+            <a:srgbClr val="4472C4"/>
+          </a:solidFill>
+          <a:ln w="12700" cap="flat" cmpd="sng" algn="ctr">
+            <a:noFill/>
+            <a:prstDash val="solid"/>
+            <a:miter lim="800000"/>
+          </a:ln>
+          <a:effectLst/>
+          <a:extLst>
+            <a:ext uri="{91240B29-F687-4F45-9708-019B960494DF}">
+              <a14:hiddenLine xmlns:a14="http://schemas.microsoft.com/office/drawing/2010/main" w="12700" cap="flat" cmpd="sng" algn="ctr">
+                <a:solidFill>
+                  <a:schemeClr val="accent1">
+                    <a:shade val="15000"/>
+                  </a:schemeClr>
+                </a:solidFill>
+                <a:prstDash val="solid"/>
+                <a:miter lim="800000"/>
+              </a14:hiddenLine>
+            </a:ext>
+          </a:extLst>
+        </p:spPr>
+        <p:style>
+          <a:lnRef idx="2">
+            <a:schemeClr val="accent1">
+              <a:shade val="15000"/>
+            </a:schemeClr>
+          </a:lnRef>
+          <a:fillRef idx="1">
+            <a:schemeClr val="accent1"/>
+          </a:fillRef>
+          <a:effectRef idx="0">
+            <a:schemeClr val="accent1"/>
+          </a:effectRef>
+          <a:fontRef idx="minor">
+            <a:schemeClr val="lt1"/>
+          </a:fontRef>
+        </p:style>
+        <p:txBody>
+          <a:bodyPr rtlCol="0" anchor="ctr"/>
+          <a:lstStyle/>
+          <a:p>
+            <a:pPr algn="ctr"/>
+            <a:endParaRPr lang="en-US"/>
+          </a:p>
+        </p:txBody>
+      </p:sp>
     </p:spTree>
     <p:extLst>
       <p:ext uri="{BB962C8B-B14F-4D97-AF65-F5344CB8AC3E}">
@@ -3605,6 +3791,48 @@
           </a:prstGeom>
         </p:spPr>
       </p:pic>
+      <p:sp>
+        <p:nvSpPr>
+          <p:cNvPr id="2" name="Slide number">
+            <a:extLst>
+              <a:ext uri="{FF2B5EF4-FFF2-40B4-BE49-F238E27FC236}">
+                <a16:creationId xmlns:a16="http://schemas.microsoft.com/office/drawing/2014/main" id="{D2F1A861-60A5-0F97-EB26-4E038CFFC5D3}"/>
+              </a:ext>
+            </a:extLst>
+          </p:cNvPr>
+          <p:cNvSpPr txBox="1"/>
+          <p:nvPr/>
+        </p:nvSpPr>
+        <p:spPr>
+          <a:xfrm>
+            <a:off x="11723488" y="6477000"/>
+            <a:ext cx="316112" cy="246221"/>
+          </a:xfrm>
+          <a:prstGeom prst="rect">
+            <a:avLst/>
+          </a:prstGeom>
+          <a:solidFill>
+            <a:srgbClr val="FFFFFF"/>
+          </a:solidFill>
+        </p:spPr>
+        <p:txBody>
+          <a:bodyPr vert="horz" wrap="none" rtlCol="0">
+            <a:spAutoFit/>
+          </a:bodyPr>
+          <a:lstStyle/>
+          <a:p>
+            <a:pPr algn="r"/>
+            <a:r>
+              <a:rPr lang="en-US" sz="1000">
+                <a:solidFill>
+                  <a:srgbClr val="808080"/>
+                </a:solidFill>
+              </a:rPr>
+              <a:t>11</a:t>
+            </a:r>
+          </a:p>
+        </p:txBody>
+      </p:sp>
     </p:spTree>
     <p:extLst>
       <p:ext uri="{BB962C8B-B14F-4D97-AF65-F5344CB8AC3E}">
@@ -3637,6 +3865,62 @@
       </p:grpSpPr>
       <p:sp>
         <p:nvSpPr>
+          <p:cNvPr id="6" name="Body card">
+            <a:extLst>
+              <a:ext uri="{FF2B5EF4-FFF2-40B4-BE49-F238E27FC236}">
+                <a16:creationId xmlns:a16="http://schemas.microsoft.com/office/drawing/2014/main" id="{67764CF5-673D-B4D9-A1D6-C5DA04FD5E23}"/>
+              </a:ext>
+            </a:extLst>
+          </p:cNvPr>
+          <p:cNvSpPr/>
+          <p:nvPr/>
+        </p:nvSpPr>
+        <p:spPr>
+          <a:xfrm>
+            <a:off x="635000" y="1676400"/>
+            <a:ext cx="10922000" cy="3568700"/>
+          </a:xfrm>
+          <a:prstGeom prst="roundRect">
+            <a:avLst>
+              <a:gd name="adj" fmla="val 3000"/>
+            </a:avLst>
+          </a:prstGeom>
+          <a:solidFill>
+            <a:srgbClr val="F2F6FC"/>
+          </a:solidFill>
+          <a:ln w="19050">
+            <a:solidFill>
+              <a:srgbClr val="4472C4"/>
+            </a:solidFill>
+          </a:ln>
+        </p:spPr>
+        <p:style>
+          <a:lnRef idx="2">
+            <a:schemeClr val="accent1">
+              <a:shade val="15000"/>
+            </a:schemeClr>
+          </a:lnRef>
+          <a:fillRef idx="1">
+            <a:schemeClr val="accent1"/>
+          </a:fillRef>
+          <a:effectRef idx="0">
+            <a:schemeClr val="accent1"/>
+          </a:effectRef>
+          <a:fontRef idx="minor">
+            <a:schemeClr val="lt1"/>
+          </a:fontRef>
+        </p:style>
+        <p:txBody>
+          <a:bodyPr rtlCol="0" anchor="ctr"/>
+          <a:lstStyle/>
+          <a:p>
+            <a:pPr algn="ctr"/>
+            <a:endParaRPr lang="en-US"/>
+          </a:p>
+        </p:txBody>
+      </p:sp>
+      <p:sp>
+        <p:nvSpPr>
           <p:cNvPr id="2" name="Title 1">
             <a:extLst>
               <a:ext uri="{FF2B5EF4-FFF2-40B4-BE49-F238E27FC236}">
@@ -3657,7 +3941,11 @@
           <a:lstStyle/>
           <a:p>
             <a:r>
-              <a:rPr lang="en-US" dirty="0"/>
+              <a:rPr lang="en-US" dirty="0">
+                <a:solidFill>
+                  <a:srgbClr val="1F3864"/>
+                </a:solidFill>
+              </a:rPr>
               <a:t>Alternative formulas for the mean</a:t>
             </a:r>
           </a:p>
@@ -4013,6 +4301,116 @@
           </p:sp>
         </mc:Fallback>
       </mc:AlternateContent>
+      <p:sp>
+        <p:nvSpPr>
+          <p:cNvPr id="4" name="Slide number">
+            <a:extLst>
+              <a:ext uri="{FF2B5EF4-FFF2-40B4-BE49-F238E27FC236}">
+                <a16:creationId xmlns:a16="http://schemas.microsoft.com/office/drawing/2014/main" id="{81083513-72E2-BC23-E589-D8CC1441D960}"/>
+              </a:ext>
+            </a:extLst>
+          </p:cNvPr>
+          <p:cNvSpPr txBox="1"/>
+          <p:nvPr/>
+        </p:nvSpPr>
+        <p:spPr>
+          <a:xfrm>
+            <a:off x="11723488" y="6477000"/>
+            <a:ext cx="316112" cy="246221"/>
+          </a:xfrm>
+          <a:prstGeom prst="rect">
+            <a:avLst/>
+          </a:prstGeom>
+          <a:solidFill>
+            <a:srgbClr val="FFFFFF"/>
+          </a:solidFill>
+        </p:spPr>
+        <p:txBody>
+          <a:bodyPr vert="horz" wrap="none" rtlCol="0">
+            <a:spAutoFit/>
+          </a:bodyPr>
+          <a:lstStyle/>
+          <a:p>
+            <a:pPr algn="r"/>
+            <a:r>
+              <a:rPr lang="en-US" sz="1000">
+                <a:solidFill>
+                  <a:srgbClr val="808080"/>
+                </a:solidFill>
+              </a:rPr>
+              <a:t>12</a:t>
+            </a:r>
+          </a:p>
+        </p:txBody>
+      </p:sp>
+      <p:sp>
+        <p:nvSpPr>
+          <p:cNvPr id="5" name="Title rule">
+            <a:extLst>
+              <a:ext uri="{FF2B5EF4-FFF2-40B4-BE49-F238E27FC236}">
+                <a16:creationId xmlns:a16="http://schemas.microsoft.com/office/drawing/2014/main" id="{0AF00A67-D92B-7391-ADED-86AED46870B9}"/>
+              </a:ext>
+            </a:extLst>
+          </p:cNvPr>
+          <p:cNvSpPr/>
+          <p:nvPr/>
+        </p:nvSpPr>
+        <p:spPr>
+          <a:xfrm>
+            <a:off x="838200" y="1600200"/>
+            <a:ext cx="10515600" cy="38100"/>
+          </a:xfrm>
+          <a:prstGeom prst="rect">
+            <a:avLst/>
+          </a:prstGeom>
+          <a:solidFill>
+            <a:srgbClr val="4472C4"/>
+          </a:solidFill>
+          <a:ln w="12700" cap="flat" cmpd="sng" algn="ctr">
+            <a:noFill/>
+            <a:prstDash val="solid"/>
+            <a:miter lim="800000"/>
+          </a:ln>
+          <a:effectLst/>
+          <a:extLst>
+            <a:ext uri="{91240B29-F687-4F45-9708-019B960494DF}">
+              <a14:hiddenLine xmlns:a14="http://schemas.microsoft.com/office/drawing/2010/main" w="12700" cap="flat" cmpd="sng" algn="ctr">
+                <a:solidFill>
+                  <a:schemeClr val="accent1">
+                    <a:shade val="15000"/>
+                  </a:schemeClr>
+                </a:solidFill>
+                <a:prstDash val="solid"/>
+                <a:miter lim="800000"/>
+              </a14:hiddenLine>
+            </a:ext>
+          </a:extLst>
+        </p:spPr>
+        <p:style>
+          <a:lnRef idx="2">
+            <a:schemeClr val="accent1">
+              <a:shade val="15000"/>
+            </a:schemeClr>
+          </a:lnRef>
+          <a:fillRef idx="1">
+            <a:schemeClr val="accent1"/>
+          </a:fillRef>
+          <a:effectRef idx="0">
+            <a:schemeClr val="accent1"/>
+          </a:effectRef>
+          <a:fontRef idx="minor">
+            <a:schemeClr val="lt1"/>
+          </a:fontRef>
+        </p:style>
+        <p:txBody>
+          <a:bodyPr rtlCol="0" anchor="ctr"/>
+          <a:lstStyle/>
+          <a:p>
+            <a:pPr algn="ctr"/>
+            <a:endParaRPr lang="en-US"/>
+          </a:p>
+        </p:txBody>
+      </p:sp>
     </p:spTree>
     <p:extLst>
       <p:ext uri="{BB962C8B-B14F-4D97-AF65-F5344CB8AC3E}">
@@ -4065,7 +4463,11 @@
           <a:lstStyle/>
           <a:p>
             <a:r>
-              <a:rPr lang="en-US" dirty="0"/>
+              <a:rPr lang="en-US" dirty="0">
+                <a:solidFill>
+                  <a:srgbClr val="1F3864"/>
+                </a:solidFill>
+              </a:rPr>
               <a:t>Example: Computing the mean from a frequency table</a:t>
             </a:r>
           </a:p>
@@ -4582,6 +4984,48 @@
           </a:graphicData>
         </a:graphic>
       </p:graphicFrame>
+      <p:sp>
+        <p:nvSpPr>
+          <p:cNvPr id="3" name="Slide number">
+            <a:extLst>
+              <a:ext uri="{FF2B5EF4-FFF2-40B4-BE49-F238E27FC236}">
+                <a16:creationId xmlns:a16="http://schemas.microsoft.com/office/drawing/2014/main" id="{94F07727-A98D-8A04-1C7F-D7489392107A}"/>
+              </a:ext>
+            </a:extLst>
+          </p:cNvPr>
+          <p:cNvSpPr txBox="1"/>
+          <p:nvPr/>
+        </p:nvSpPr>
+        <p:spPr>
+          <a:xfrm>
+            <a:off x="11723488" y="6477000"/>
+            <a:ext cx="316112" cy="246221"/>
+          </a:xfrm>
+          <a:prstGeom prst="rect">
+            <a:avLst/>
+          </a:prstGeom>
+          <a:solidFill>
+            <a:srgbClr val="FFFFFF"/>
+          </a:solidFill>
+        </p:spPr>
+        <p:txBody>
+          <a:bodyPr vert="horz" wrap="none" rtlCol="0">
+            <a:spAutoFit/>
+          </a:bodyPr>
+          <a:lstStyle/>
+          <a:p>
+            <a:pPr algn="r"/>
+            <a:r>
+              <a:rPr lang="en-US" sz="1000">
+                <a:solidFill>
+                  <a:srgbClr val="808080"/>
+                </a:solidFill>
+              </a:rPr>
+              <a:t>13</a:t>
+            </a:r>
+          </a:p>
+        </p:txBody>
+      </p:sp>
     </p:spTree>
     <p:extLst>
       <p:ext uri="{BB962C8B-B14F-4D97-AF65-F5344CB8AC3E}">
@@ -4634,10 +5078,18 @@
           <a:lstStyle/>
           <a:p>
             <a:r>
-              <a:rPr lang="en-US"/>
+              <a:rPr lang="en-US">
+                <a:solidFill>
+                  <a:srgbClr val="1F3864"/>
+                </a:solidFill>
+              </a:rPr>
               <a:t>The mode</a:t>
             </a:r>
-            <a:endParaRPr lang="en-US" dirty="0"/>
+            <a:endParaRPr lang="en-US" dirty="0">
+              <a:solidFill>
+                <a:srgbClr val="1F3864"/>
+              </a:solidFill>
+            </a:endParaRPr>
           </a:p>
         </p:txBody>
       </p:sp>
@@ -4674,7 +5126,11 @@
               <a:t>The </a:t>
             </a:r>
             <a:r>
-              <a:rPr lang="en-US" b="1" dirty="0"/>
+              <a:rPr lang="en-US" b="1" dirty="0">
+                <a:solidFill>
+                  <a:srgbClr val="C00000"/>
+                </a:solidFill>
+              </a:rPr>
               <a:t>mode </a:t>
             </a:r>
             <a:r>
@@ -4757,7 +5213,11 @@
               <a:buChar char="-"/>
             </a:pPr>
             <a:r>
-              <a:rPr lang="en-US" b="1" u="sng" dirty="0"/>
+              <a:rPr lang="en-US" b="1" u="sng" dirty="0">
+                <a:solidFill>
+                  <a:srgbClr val="C00000"/>
+                </a:solidFill>
+              </a:rPr>
               <a:t>Caution</a:t>
             </a:r>
             <a:r>
@@ -5497,6 +5957,48 @@
           </a:p>
         </p:txBody>
       </p:sp>
+      <p:sp>
+        <p:nvSpPr>
+          <p:cNvPr id="8" name="Slide number">
+            <a:extLst>
+              <a:ext uri="{FF2B5EF4-FFF2-40B4-BE49-F238E27FC236}">
+                <a16:creationId xmlns:a16="http://schemas.microsoft.com/office/drawing/2014/main" id="{A51E2228-E737-82A2-C013-DA659621EFB1}"/>
+              </a:ext>
+            </a:extLst>
+          </p:cNvPr>
+          <p:cNvSpPr txBox="1"/>
+          <p:nvPr/>
+        </p:nvSpPr>
+        <p:spPr>
+          <a:xfrm>
+            <a:off x="11723488" y="6477000"/>
+            <a:ext cx="316112" cy="246221"/>
+          </a:xfrm>
+          <a:prstGeom prst="rect">
+            <a:avLst/>
+          </a:prstGeom>
+          <a:solidFill>
+            <a:srgbClr val="FFFFFF"/>
+          </a:solidFill>
+        </p:spPr>
+        <p:txBody>
+          <a:bodyPr vert="horz" wrap="none" rtlCol="0">
+            <a:spAutoFit/>
+          </a:bodyPr>
+          <a:lstStyle/>
+          <a:p>
+            <a:pPr algn="r"/>
+            <a:r>
+              <a:rPr lang="en-US" sz="1000">
+                <a:solidFill>
+                  <a:srgbClr val="808080"/>
+                </a:solidFill>
+              </a:rPr>
+              <a:t>14</a:t>
+            </a:r>
+          </a:p>
+        </p:txBody>
+      </p:sp>
     </p:spTree>
     <p:extLst>
       <p:ext uri="{BB962C8B-B14F-4D97-AF65-F5344CB8AC3E}">
@@ -5549,7 +6051,11 @@
           <a:lstStyle/>
           <a:p>
             <a:r>
-              <a:rPr lang="en-US" dirty="0"/>
+              <a:rPr lang="en-US" dirty="0">
+                <a:solidFill>
+                  <a:srgbClr val="1F3864"/>
+                </a:solidFill>
+              </a:rPr>
               <a:t>Practice:</a:t>
             </a:r>
           </a:p>
@@ -5770,7 +6276,7 @@
                   <a:noFill/>
                 </a:ln>
                 <a:solidFill>
-                  <a:prstClr val="black"/>
+                  <a:srgbClr val="C00000"/>
                 </a:solidFill>
                 <a:effectLst/>
                 <a:uLnTx/>
@@ -5873,7 +6379,7 @@
                   <a:noFill/>
                 </a:ln>
                 <a:solidFill>
-                  <a:prstClr val="black"/>
+                  <a:srgbClr val="C00000"/>
                 </a:solidFill>
                 <a:effectLst/>
                 <a:uLnTx/>
@@ -5959,7 +6465,7 @@
                   <a:noFill/>
                 </a:ln>
                 <a:solidFill>
-                  <a:prstClr val="black"/>
+                  <a:srgbClr val="C00000"/>
                 </a:solidFill>
                 <a:effectLst/>
                 <a:uLnTx/>
@@ -5969,6 +6475,48 @@
                 <a:cs typeface="+mn-cs"/>
               </a:rPr>
               <a:t>mode </a:t>
+            </a:r>
+          </a:p>
+        </p:txBody>
+      </p:sp>
+      <p:sp>
+        <p:nvSpPr>
+          <p:cNvPr id="4" name="Slide number">
+            <a:extLst>
+              <a:ext uri="{FF2B5EF4-FFF2-40B4-BE49-F238E27FC236}">
+                <a16:creationId xmlns:a16="http://schemas.microsoft.com/office/drawing/2014/main" id="{D186FE1F-50CA-EFE0-B18A-75CB7CE1AF47}"/>
+              </a:ext>
+            </a:extLst>
+          </p:cNvPr>
+          <p:cNvSpPr txBox="1"/>
+          <p:nvPr/>
+        </p:nvSpPr>
+        <p:spPr>
+          <a:xfrm>
+            <a:off x="11723488" y="6477000"/>
+            <a:ext cx="316112" cy="246221"/>
+          </a:xfrm>
+          <a:prstGeom prst="rect">
+            <a:avLst/>
+          </a:prstGeom>
+          <a:solidFill>
+            <a:srgbClr val="FFFFFF"/>
+          </a:solidFill>
+        </p:spPr>
+        <p:txBody>
+          <a:bodyPr vert="horz" wrap="none" rtlCol="0">
+            <a:spAutoFit/>
+          </a:bodyPr>
+          <a:lstStyle/>
+          <a:p>
+            <a:pPr algn="r"/>
+            <a:r>
+              <a:rPr lang="en-US" sz="1000">
+                <a:solidFill>
+                  <a:srgbClr val="808080"/>
+                </a:solidFill>
+              </a:rPr>
+              <a:t>15</a:t>
             </a:r>
           </a:p>
         </p:txBody>
@@ -6005,6 +6553,62 @@
       </p:grpSpPr>
       <p:sp>
         <p:nvSpPr>
+          <p:cNvPr id="6" name="Body card">
+            <a:extLst>
+              <a:ext uri="{FF2B5EF4-FFF2-40B4-BE49-F238E27FC236}">
+                <a16:creationId xmlns:a16="http://schemas.microsoft.com/office/drawing/2014/main" id="{BFDC15B0-F248-059B-2E64-BAD285BCB86B}"/>
+              </a:ext>
+            </a:extLst>
+          </p:cNvPr>
+          <p:cNvSpPr/>
+          <p:nvPr/>
+        </p:nvSpPr>
+        <p:spPr>
+          <a:xfrm>
+            <a:off x="635000" y="1676400"/>
+            <a:ext cx="10922000" cy="4406900"/>
+          </a:xfrm>
+          <a:prstGeom prst="roundRect">
+            <a:avLst>
+              <a:gd name="adj" fmla="val 3000"/>
+            </a:avLst>
+          </a:prstGeom>
+          <a:solidFill>
+            <a:srgbClr val="F2F6FC"/>
+          </a:solidFill>
+          <a:ln w="19050">
+            <a:solidFill>
+              <a:srgbClr val="4472C4"/>
+            </a:solidFill>
+          </a:ln>
+        </p:spPr>
+        <p:style>
+          <a:lnRef idx="2">
+            <a:schemeClr val="accent1">
+              <a:shade val="15000"/>
+            </a:schemeClr>
+          </a:lnRef>
+          <a:fillRef idx="1">
+            <a:schemeClr val="accent1"/>
+          </a:fillRef>
+          <a:effectRef idx="0">
+            <a:schemeClr val="accent1"/>
+          </a:effectRef>
+          <a:fontRef idx="minor">
+            <a:schemeClr val="lt1"/>
+          </a:fontRef>
+        </p:style>
+        <p:txBody>
+          <a:bodyPr rtlCol="0" anchor="ctr"/>
+          <a:lstStyle/>
+          <a:p>
+            <a:pPr algn="ctr"/>
+            <a:endParaRPr lang="en-US"/>
+          </a:p>
+        </p:txBody>
+      </p:sp>
+      <p:sp>
+        <p:nvSpPr>
           <p:cNvPr id="2" name="Title 1">
             <a:extLst>
               <a:ext uri="{FF2B5EF4-FFF2-40B4-BE49-F238E27FC236}">
@@ -6025,14 +6629,18 @@
           <a:lstStyle/>
           <a:p>
             <a:r>
-              <a:rPr lang="en-US" dirty="0"/>
+              <a:rPr lang="en-US" dirty="0">
+                <a:solidFill>
+                  <a:srgbClr val="1F3864"/>
+                </a:solidFill>
+              </a:rPr>
               <a:t>Measures of Location: Quartiles and Percentiles</a:t>
             </a:r>
           </a:p>
         </p:txBody>
       </p:sp>
-      <mc:AlternateContent xmlns:mc="http://schemas.openxmlformats.org/markup-compatibility/2006" xmlns:a14="http://schemas.microsoft.com/office/drawing/2010/main">
-        <mc:Choice Requires="a14">
+      <mc:AlternateContent xmlns:mc="http://schemas.openxmlformats.org/markup-compatibility/2006">
+        <mc:Choice xmlns:a14="http://schemas.microsoft.com/office/drawing/2010/main" Requires="a14">
           <p:sp>
             <p:nvSpPr>
               <p:cNvPr id="3" name="Content Placeholder 2">
@@ -6066,6 +6674,9 @@
                       <m:sSupPr>
                         <m:ctrlPr>
                           <a:rPr lang="en-US" b="1" i="1" smtClean="0">
+                            <a:solidFill>
+                              <a:srgbClr val="C00000"/>
+                            </a:solidFill>
                             <a:latin typeface="Cambria Math" panose="02040503050406030204" pitchFamily="18" charset="0"/>
                           </a:rPr>
                         </m:ctrlPr>
@@ -6073,6 +6684,9 @@
                       <m:e>
                         <m:r>
                           <a:rPr lang="en-US" b="1" i="1" smtClean="0">
+                            <a:solidFill>
+                              <a:srgbClr val="C00000"/>
+                            </a:solidFill>
                             <a:latin typeface="Cambria Math" panose="02040503050406030204" pitchFamily="18" charset="0"/>
                           </a:rPr>
                           <m:t>𝒑</m:t>
@@ -6081,6 +6695,9 @@
                       <m:sup>
                         <m:r>
                           <a:rPr lang="en-US" b="1" i="1" smtClean="0">
+                            <a:solidFill>
+                              <a:srgbClr val="C00000"/>
+                            </a:solidFill>
                             <a:latin typeface="Cambria Math" panose="02040503050406030204" pitchFamily="18" charset="0"/>
                           </a:rPr>
                           <m:t>𝒕𝒉</m:t>
@@ -6090,7 +6707,11 @@
                   </m:oMath>
                 </a14:m>
                 <a:r>
-                  <a:rPr lang="en-US" b="1" dirty="0"/>
+                  <a:rPr lang="en-US" b="1" dirty="0">
+                    <a:solidFill>
+                      <a:srgbClr val="C00000"/>
+                    </a:solidFill>
+                  </a:rPr>
                   <a:t> percentile </a:t>
                 </a:r>
                 <a:r>
@@ -6146,7 +6767,11 @@
                   <a:t>Three useful percentiles of a distribution are the </a:t>
                 </a:r>
                 <a:r>
-                  <a:rPr lang="en-US" b="1" dirty="0"/>
+                  <a:rPr lang="en-US" b="1" dirty="0">
+                    <a:solidFill>
+                      <a:srgbClr val="C00000"/>
+                    </a:solidFill>
+                  </a:rPr>
                   <a:t>quartiles</a:t>
                 </a:r>
               </a:p>
@@ -6160,7 +6785,11 @@
                   <a:t>The first </a:t>
                 </a:r>
                 <a:r>
-                  <a:rPr lang="en-US" b="1" dirty="0"/>
+                  <a:rPr lang="en-US" b="1" dirty="0">
+                    <a:solidFill>
+                      <a:srgbClr val="C00000"/>
+                    </a:solidFill>
+                  </a:rPr>
                   <a:t>quartile Q1</a:t>
                 </a:r>
                 <a:r>
@@ -6186,7 +6815,11 @@
                   <a:t>The second </a:t>
                 </a:r>
                 <a:r>
-                  <a:rPr lang="en-US" b="1" dirty="0"/>
+                  <a:rPr lang="en-US" b="1" dirty="0">
+                    <a:solidFill>
+                      <a:srgbClr val="C00000"/>
+                    </a:solidFill>
+                  </a:rPr>
                   <a:t>quartile Q2</a:t>
                 </a:r>
                 <a:r>
@@ -6212,7 +6845,11 @@
                   <a:t>The third </a:t>
                 </a:r>
                 <a:r>
-                  <a:rPr lang="en-US" b="1" dirty="0"/>
+                  <a:rPr lang="en-US" b="1" dirty="0">
+                    <a:solidFill>
+                      <a:srgbClr val="C00000"/>
+                    </a:solidFill>
+                  </a:rPr>
                   <a:t>quartile Q3</a:t>
                 </a:r>
                 <a:r>
@@ -6248,7 +6885,7 @@
             </p:txBody>
           </p:sp>
         </mc:Choice>
-        <mc:Fallback xmlns="">
+        <mc:Fallback>
           <p:sp>
             <p:nvSpPr>
               <p:cNvPr id="3" name="Content Placeholder 2">
@@ -6288,6 +6925,116 @@
           </p:sp>
         </mc:Fallback>
       </mc:AlternateContent>
+      <p:sp>
+        <p:nvSpPr>
+          <p:cNvPr id="4" name="Slide number">
+            <a:extLst>
+              <a:ext uri="{FF2B5EF4-FFF2-40B4-BE49-F238E27FC236}">
+                <a16:creationId xmlns:a16="http://schemas.microsoft.com/office/drawing/2014/main" id="{8BC77056-A577-6FD3-8D6C-98BF965C42E1}"/>
+              </a:ext>
+            </a:extLst>
+          </p:cNvPr>
+          <p:cNvSpPr txBox="1"/>
+          <p:nvPr/>
+        </p:nvSpPr>
+        <p:spPr>
+          <a:xfrm>
+            <a:off x="11723488" y="6477000"/>
+            <a:ext cx="316112" cy="246221"/>
+          </a:xfrm>
+          <a:prstGeom prst="rect">
+            <a:avLst/>
+          </a:prstGeom>
+          <a:solidFill>
+            <a:srgbClr val="FFFFFF"/>
+          </a:solidFill>
+        </p:spPr>
+        <p:txBody>
+          <a:bodyPr vert="horz" wrap="none" rtlCol="0">
+            <a:spAutoFit/>
+          </a:bodyPr>
+          <a:lstStyle/>
+          <a:p>
+            <a:pPr algn="r"/>
+            <a:r>
+              <a:rPr lang="en-US" sz="1000">
+                <a:solidFill>
+                  <a:srgbClr val="808080"/>
+                </a:solidFill>
+              </a:rPr>
+              <a:t>16</a:t>
+            </a:r>
+          </a:p>
+        </p:txBody>
+      </p:sp>
+      <p:sp>
+        <p:nvSpPr>
+          <p:cNvPr id="5" name="Title rule">
+            <a:extLst>
+              <a:ext uri="{FF2B5EF4-FFF2-40B4-BE49-F238E27FC236}">
+                <a16:creationId xmlns:a16="http://schemas.microsoft.com/office/drawing/2014/main" id="{99ADE643-B8DE-21EE-2CB0-00E87D4D3FB5}"/>
+              </a:ext>
+            </a:extLst>
+          </p:cNvPr>
+          <p:cNvSpPr/>
+          <p:nvPr/>
+        </p:nvSpPr>
+        <p:spPr>
+          <a:xfrm>
+            <a:off x="838200" y="1600200"/>
+            <a:ext cx="10515600" cy="38100"/>
+          </a:xfrm>
+          <a:prstGeom prst="rect">
+            <a:avLst/>
+          </a:prstGeom>
+          <a:solidFill>
+            <a:srgbClr val="4472C4"/>
+          </a:solidFill>
+          <a:ln w="12700" cap="flat" cmpd="sng" algn="ctr">
+            <a:noFill/>
+            <a:prstDash val="solid"/>
+            <a:miter lim="800000"/>
+          </a:ln>
+          <a:effectLst/>
+          <a:extLst>
+            <a:ext uri="{91240B29-F687-4F45-9708-019B960494DF}">
+              <a14:hiddenLine xmlns:a14="http://schemas.microsoft.com/office/drawing/2010/main" w="12700" cap="flat" cmpd="sng" algn="ctr">
+                <a:solidFill>
+                  <a:schemeClr val="accent1">
+                    <a:shade val="15000"/>
+                  </a:schemeClr>
+                </a:solidFill>
+                <a:prstDash val="solid"/>
+                <a:miter lim="800000"/>
+              </a14:hiddenLine>
+            </a:ext>
+          </a:extLst>
+        </p:spPr>
+        <p:style>
+          <a:lnRef idx="2">
+            <a:schemeClr val="accent1">
+              <a:shade val="15000"/>
+            </a:schemeClr>
+          </a:lnRef>
+          <a:fillRef idx="1">
+            <a:schemeClr val="accent1"/>
+          </a:fillRef>
+          <a:effectRef idx="0">
+            <a:schemeClr val="accent1"/>
+          </a:effectRef>
+          <a:fontRef idx="minor">
+            <a:schemeClr val="lt1"/>
+          </a:fontRef>
+        </p:style>
+        <p:txBody>
+          <a:bodyPr rtlCol="0" anchor="ctr"/>
+          <a:lstStyle/>
+          <a:p>
+            <a:pPr algn="ctr"/>
+            <a:endParaRPr lang="en-US"/>
+          </a:p>
+        </p:txBody>
+      </p:sp>
     </p:spTree>
     <p:extLst>
       <p:ext uri="{BB962C8B-B14F-4D97-AF65-F5344CB8AC3E}">
@@ -6347,7 +7094,11 @@
           <a:lstStyle/>
           <a:p>
             <a:r>
-              <a:rPr lang="en-US" sz="4000" dirty="0"/>
+              <a:rPr lang="en-US" sz="4000" dirty="0">
+                <a:solidFill>
+                  <a:srgbClr val="1F3864"/>
+                </a:solidFill>
+              </a:rPr>
               <a:t>Measures of Position: Quartiles and Percentiles</a:t>
             </a:r>
           </a:p>
@@ -6889,7 +7640,7 @@
                   <a:noFill/>
                 </a:ln>
                 <a:solidFill>
-                  <a:srgbClr val="00B050"/>
+                  <a:srgbClr val="C00000"/>
                 </a:solidFill>
                 <a:effectLst/>
                 <a:uLnTx/>
@@ -6899,6 +7650,48 @@
                 <a:cs typeface="+mn-cs"/>
               </a:rPr>
               <a:t>Median</a:t>
+            </a:r>
+          </a:p>
+        </p:txBody>
+      </p:sp>
+      <p:sp>
+        <p:nvSpPr>
+          <p:cNvPr id="3" name="Slide number">
+            <a:extLst>
+              <a:ext uri="{FF2B5EF4-FFF2-40B4-BE49-F238E27FC236}">
+                <a16:creationId xmlns:a16="http://schemas.microsoft.com/office/drawing/2014/main" id="{06B09A87-2DEB-3E20-2696-1CF5A92BEE26}"/>
+              </a:ext>
+            </a:extLst>
+          </p:cNvPr>
+          <p:cNvSpPr txBox="1"/>
+          <p:nvPr/>
+        </p:nvSpPr>
+        <p:spPr>
+          <a:xfrm>
+            <a:off x="11723488" y="6477000"/>
+            <a:ext cx="316112" cy="246221"/>
+          </a:xfrm>
+          <a:prstGeom prst="rect">
+            <a:avLst/>
+          </a:prstGeom>
+          <a:solidFill>
+            <a:srgbClr val="FFFFFF"/>
+          </a:solidFill>
+        </p:spPr>
+        <p:txBody>
+          <a:bodyPr vert="horz" wrap="none" rtlCol="0">
+            <a:spAutoFit/>
+          </a:bodyPr>
+          <a:lstStyle/>
+          <a:p>
+            <a:pPr algn="r"/>
+            <a:r>
+              <a:rPr lang="en-US" sz="1000">
+                <a:solidFill>
+                  <a:srgbClr val="808080"/>
+                </a:solidFill>
+              </a:rPr>
+              <a:t>17</a:t>
             </a:r>
           </a:p>
         </p:txBody>
@@ -6935,6 +7728,62 @@
       </p:grpSpPr>
       <p:sp>
         <p:nvSpPr>
+          <p:cNvPr id="6" name="Body card">
+            <a:extLst>
+              <a:ext uri="{FF2B5EF4-FFF2-40B4-BE49-F238E27FC236}">
+                <a16:creationId xmlns:a16="http://schemas.microsoft.com/office/drawing/2014/main" id="{71ABEA1F-4E8C-BA6B-A550-FEB9A48B8922}"/>
+              </a:ext>
+            </a:extLst>
+          </p:cNvPr>
+          <p:cNvSpPr/>
+          <p:nvPr/>
+        </p:nvSpPr>
+        <p:spPr>
+          <a:xfrm>
+            <a:off x="635000" y="1676400"/>
+            <a:ext cx="10922000" cy="3733800"/>
+          </a:xfrm>
+          <a:prstGeom prst="roundRect">
+            <a:avLst>
+              <a:gd name="adj" fmla="val 3000"/>
+            </a:avLst>
+          </a:prstGeom>
+          <a:solidFill>
+            <a:srgbClr val="F2F6FC"/>
+          </a:solidFill>
+          <a:ln w="19050">
+            <a:solidFill>
+              <a:srgbClr val="4472C4"/>
+            </a:solidFill>
+          </a:ln>
+        </p:spPr>
+        <p:style>
+          <a:lnRef idx="2">
+            <a:schemeClr val="accent1">
+              <a:shade val="15000"/>
+            </a:schemeClr>
+          </a:lnRef>
+          <a:fillRef idx="1">
+            <a:schemeClr val="accent1"/>
+          </a:fillRef>
+          <a:effectRef idx="0">
+            <a:schemeClr val="accent1"/>
+          </a:effectRef>
+          <a:fontRef idx="minor">
+            <a:schemeClr val="lt1"/>
+          </a:fontRef>
+        </p:style>
+        <p:txBody>
+          <a:bodyPr rtlCol="0" anchor="ctr"/>
+          <a:lstStyle/>
+          <a:p>
+            <a:pPr algn="ctr"/>
+            <a:endParaRPr lang="en-US"/>
+          </a:p>
+        </p:txBody>
+      </p:sp>
+      <p:sp>
+        <p:nvSpPr>
           <p:cNvPr id="2" name="Title 1">
             <a:extLst>
               <a:ext uri="{FF2B5EF4-FFF2-40B4-BE49-F238E27FC236}">
@@ -6955,15 +7804,23 @@
           <a:lstStyle/>
           <a:p>
             <a:r>
-              <a:rPr lang="en-US"/>
+              <a:rPr lang="en-US">
+                <a:solidFill>
+                  <a:srgbClr val="1F3864"/>
+                </a:solidFill>
+              </a:rPr>
               <a:t>Computing the Quartiles</a:t>
             </a:r>
-            <a:endParaRPr lang="en-US" dirty="0"/>
+            <a:endParaRPr lang="en-US" dirty="0">
+              <a:solidFill>
+                <a:srgbClr val="1F3864"/>
+              </a:solidFill>
+            </a:endParaRPr>
           </a:p>
         </p:txBody>
       </p:sp>
-      <mc:AlternateContent xmlns:mc="http://schemas.openxmlformats.org/markup-compatibility/2006" xmlns:a14="http://schemas.microsoft.com/office/drawing/2010/main">
-        <mc:Choice Requires="a14">
+      <mc:AlternateContent xmlns:mc="http://schemas.openxmlformats.org/markup-compatibility/2006">
+        <mc:Choice xmlns:a14="http://schemas.microsoft.com/office/drawing/2010/main" Requires="a14">
           <p:sp>
             <p:nvSpPr>
               <p:cNvPr id="3" name="Content Placeholder 2">
@@ -7012,7 +7869,11 @@
                   <a:t>Find the median and label as </a:t>
                 </a:r>
                 <a:r>
-                  <a:rPr lang="en-US" b="1" dirty="0"/>
+                  <a:rPr lang="en-US" b="1" dirty="0">
+                    <a:solidFill>
+                      <a:srgbClr val="C00000"/>
+                    </a:solidFill>
+                  </a:rPr>
                   <a:t>Q2</a:t>
                 </a:r>
               </a:p>
@@ -7066,7 +7927,11 @@
                   <a:t> of the observations and label as </a:t>
                 </a:r>
                 <a:r>
-                  <a:rPr lang="en-US" b="1" dirty="0"/>
+                  <a:rPr lang="en-US" b="1" dirty="0">
+                    <a:solidFill>
+                      <a:srgbClr val="C00000"/>
+                    </a:solidFill>
+                  </a:rPr>
                   <a:t>Q1</a:t>
                 </a:r>
               </a:p>
@@ -7124,15 +7989,23 @@
                   <a:t> of the observations and label as </a:t>
                 </a:r>
                 <a:r>
-                  <a:rPr lang="en-US" b="1" dirty="0"/>
+                  <a:rPr lang="en-US" b="1" dirty="0">
+                    <a:solidFill>
+                      <a:srgbClr val="C00000"/>
+                    </a:solidFill>
+                  </a:rPr>
                   <a:t>Q3</a:t>
                 </a:r>
-                <a:endParaRPr lang="en-US" dirty="0"/>
+                <a:endParaRPr lang="en-US" dirty="0">
+                  <a:solidFill>
+                    <a:srgbClr val="C00000"/>
+                  </a:solidFill>
+                </a:endParaRPr>
               </a:p>
             </p:txBody>
           </p:sp>
         </mc:Choice>
-        <mc:Fallback xmlns="">
+        <mc:Fallback>
           <p:sp>
             <p:nvSpPr>
               <p:cNvPr id="3" name="Content Placeholder 2">
@@ -7172,6 +8045,116 @@
           </p:sp>
         </mc:Fallback>
       </mc:AlternateContent>
+      <p:sp>
+        <p:nvSpPr>
+          <p:cNvPr id="4" name="Slide number">
+            <a:extLst>
+              <a:ext uri="{FF2B5EF4-FFF2-40B4-BE49-F238E27FC236}">
+                <a16:creationId xmlns:a16="http://schemas.microsoft.com/office/drawing/2014/main" id="{526604F2-791A-0126-62A8-E73EB39ECABB}"/>
+              </a:ext>
+            </a:extLst>
+          </p:cNvPr>
+          <p:cNvSpPr txBox="1"/>
+          <p:nvPr/>
+        </p:nvSpPr>
+        <p:spPr>
+          <a:xfrm>
+            <a:off x="11723488" y="6477000"/>
+            <a:ext cx="316112" cy="246221"/>
+          </a:xfrm>
+          <a:prstGeom prst="rect">
+            <a:avLst/>
+          </a:prstGeom>
+          <a:solidFill>
+            <a:srgbClr val="FFFFFF"/>
+          </a:solidFill>
+        </p:spPr>
+        <p:txBody>
+          <a:bodyPr vert="horz" wrap="none" rtlCol="0">
+            <a:spAutoFit/>
+          </a:bodyPr>
+          <a:lstStyle/>
+          <a:p>
+            <a:pPr algn="r"/>
+            <a:r>
+              <a:rPr lang="en-US" sz="1000">
+                <a:solidFill>
+                  <a:srgbClr val="808080"/>
+                </a:solidFill>
+              </a:rPr>
+              <a:t>18</a:t>
+            </a:r>
+          </a:p>
+        </p:txBody>
+      </p:sp>
+      <p:sp>
+        <p:nvSpPr>
+          <p:cNvPr id="5" name="Title rule">
+            <a:extLst>
+              <a:ext uri="{FF2B5EF4-FFF2-40B4-BE49-F238E27FC236}">
+                <a16:creationId xmlns:a16="http://schemas.microsoft.com/office/drawing/2014/main" id="{ACC5E83D-BF76-1F6C-5444-AAF5B79079EA}"/>
+              </a:ext>
+            </a:extLst>
+          </p:cNvPr>
+          <p:cNvSpPr/>
+          <p:nvPr/>
+        </p:nvSpPr>
+        <p:spPr>
+          <a:xfrm>
+            <a:off x="838200" y="1600200"/>
+            <a:ext cx="10515600" cy="38100"/>
+          </a:xfrm>
+          <a:prstGeom prst="rect">
+            <a:avLst/>
+          </a:prstGeom>
+          <a:solidFill>
+            <a:srgbClr val="4472C4"/>
+          </a:solidFill>
+          <a:ln w="12700" cap="flat" cmpd="sng" algn="ctr">
+            <a:noFill/>
+            <a:prstDash val="solid"/>
+            <a:miter lim="800000"/>
+          </a:ln>
+          <a:effectLst/>
+          <a:extLst>
+            <a:ext uri="{91240B29-F687-4F45-9708-019B960494DF}">
+              <a14:hiddenLine xmlns:a14="http://schemas.microsoft.com/office/drawing/2010/main" w="12700" cap="flat" cmpd="sng" algn="ctr">
+                <a:solidFill>
+                  <a:schemeClr val="accent1">
+                    <a:shade val="15000"/>
+                  </a:schemeClr>
+                </a:solidFill>
+                <a:prstDash val="solid"/>
+                <a:miter lim="800000"/>
+              </a14:hiddenLine>
+            </a:ext>
+          </a:extLst>
+        </p:spPr>
+        <p:style>
+          <a:lnRef idx="2">
+            <a:schemeClr val="accent1">
+              <a:shade val="15000"/>
+            </a:schemeClr>
+          </a:lnRef>
+          <a:fillRef idx="1">
+            <a:schemeClr val="accent1"/>
+          </a:fillRef>
+          <a:effectRef idx="0">
+            <a:schemeClr val="accent1"/>
+          </a:effectRef>
+          <a:fontRef idx="minor">
+            <a:schemeClr val="lt1"/>
+          </a:fontRef>
+        </p:style>
+        <p:txBody>
+          <a:bodyPr rtlCol="0" anchor="ctr"/>
+          <a:lstStyle/>
+          <a:p>
+            <a:pPr algn="ctr"/>
+            <a:endParaRPr lang="en-US"/>
+          </a:p>
+        </p:txBody>
+      </p:sp>
     </p:spTree>
     <p:extLst>
       <p:ext uri="{BB962C8B-B14F-4D97-AF65-F5344CB8AC3E}">
@@ -7202,8 +8185,8 @@
           <a:chExt cx="0" cy="0"/>
         </a:xfrm>
       </p:grpSpPr>
-      <mc:AlternateContent xmlns:mc="http://schemas.openxmlformats.org/markup-compatibility/2006" xmlns:a14="http://schemas.microsoft.com/office/drawing/2010/main">
-        <mc:Choice Requires="a14">
+      <mc:AlternateContent xmlns:mc="http://schemas.openxmlformats.org/markup-compatibility/2006">
+        <mc:Choice xmlns:a14="http://schemas.microsoft.com/office/drawing/2010/main" Requires="a14">
           <p:sp>
             <p:nvSpPr>
               <p:cNvPr id="4" name="Content Placeholder 2">
@@ -7745,7 +8728,7 @@
                       <a:noFill/>
                     </a:ln>
                     <a:solidFill>
-                      <a:srgbClr val="0070C0"/>
+                      <a:srgbClr val="C00000"/>
                     </a:solidFill>
                     <a:effectLst/>
                     <a:uLnTx/>
@@ -7779,7 +8762,7 @@
                       <a:noFill/>
                     </a:ln>
                     <a:solidFill>
-                      <a:srgbClr val="00B050"/>
+                      <a:srgbClr val="C00000"/>
                     </a:solidFill>
                     <a:effectLst/>
                     <a:uLnTx/>
@@ -7813,7 +8796,7 @@
                       <a:noFill/>
                     </a:ln>
                     <a:solidFill>
-                      <a:srgbClr val="FF0000"/>
+                      <a:srgbClr val="C00000"/>
                     </a:solidFill>
                     <a:effectLst/>
                     <a:uLnTx/>
@@ -8399,7 +9382,7 @@
             </p:txBody>
           </p:sp>
         </mc:Choice>
-        <mc:Fallback xmlns="">
+        <mc:Fallback>
           <p:sp>
             <p:nvSpPr>
               <p:cNvPr id="4" name="Content Placeholder 2">
@@ -8475,7 +9458,7 @@
             <a:r>
               <a:rPr lang="en-US" sz="4000" kern="1200" dirty="0">
                 <a:solidFill>
-                  <a:schemeClr val="tx1"/>
+                  <a:srgbClr val="1F3864"/>
                 </a:solidFill>
                 <a:latin typeface="+mj-lt"/>
                 <a:ea typeface="+mj-ea"/>
@@ -8484,12 +9467,16 @@
               <a:t>Ex. </a:t>
             </a:r>
             <a:r>
-              <a:rPr lang="en-US" sz="4000" dirty="0"/>
+              <a:rPr lang="en-US" sz="4000" dirty="0">
+                <a:solidFill>
+                  <a:srgbClr val="1F3864"/>
+                </a:solidFill>
+              </a:rPr>
               <a:t>Quartiles</a:t>
             </a:r>
             <a:endParaRPr lang="en-US" sz="4000" kern="1200" dirty="0">
               <a:solidFill>
-                <a:schemeClr val="tx1"/>
+                <a:srgbClr val="1F3864"/>
               </a:solidFill>
               <a:latin typeface="+mj-lt"/>
               <a:ea typeface="+mj-ea"/>
@@ -8657,6 +9644,48 @@
               <a:ea typeface="+mn-ea"/>
               <a:cs typeface="+mn-cs"/>
             </a:endParaRPr>
+          </a:p>
+        </p:txBody>
+      </p:sp>
+      <p:sp>
+        <p:nvSpPr>
+          <p:cNvPr id="5" name="Slide number">
+            <a:extLst>
+              <a:ext uri="{FF2B5EF4-FFF2-40B4-BE49-F238E27FC236}">
+                <a16:creationId xmlns:a16="http://schemas.microsoft.com/office/drawing/2014/main" id="{20C086A4-A934-6519-25AC-E05BFF5804C8}"/>
+              </a:ext>
+            </a:extLst>
+          </p:cNvPr>
+          <p:cNvSpPr txBox="1"/>
+          <p:nvPr/>
+        </p:nvSpPr>
+        <p:spPr>
+          <a:xfrm>
+            <a:off x="11723488" y="6477000"/>
+            <a:ext cx="316112" cy="246221"/>
+          </a:xfrm>
+          <a:prstGeom prst="rect">
+            <a:avLst/>
+          </a:prstGeom>
+          <a:solidFill>
+            <a:srgbClr val="FFFFFF"/>
+          </a:solidFill>
+        </p:spPr>
+        <p:txBody>
+          <a:bodyPr vert="horz" wrap="none" rtlCol="0">
+            <a:spAutoFit/>
+          </a:bodyPr>
+          <a:lstStyle/>
+          <a:p>
+            <a:pPr algn="r"/>
+            <a:r>
+              <a:rPr lang="en-US" sz="1000">
+                <a:solidFill>
+                  <a:srgbClr val="808080"/>
+                </a:solidFill>
+              </a:rPr>
+              <a:t>19</a:t>
+            </a:r>
           </a:p>
         </p:txBody>
       </p:sp>
@@ -8713,10 +9742,18 @@
           <a:lstStyle/>
           <a:p>
             <a:r>
-              <a:rPr lang="en-US"/>
+              <a:rPr lang="en-US">
+                <a:solidFill>
+                  <a:srgbClr val="1F3864"/>
+                </a:solidFill>
+              </a:rPr>
               <a:t>Review</a:t>
             </a:r>
-            <a:endParaRPr lang="en-US" dirty="0"/>
+            <a:endParaRPr lang="en-US" dirty="0">
+              <a:solidFill>
+                <a:srgbClr val="1F3864"/>
+              </a:solidFill>
+            </a:endParaRPr>
           </a:p>
         </p:txBody>
       </p:sp>
@@ -8757,7 +9794,7 @@
             <a:r>
               <a:rPr lang="en-US" b="1">
                 <a:solidFill>
-                  <a:srgbClr val="4472C4"/>
+                  <a:srgbClr val="C00000"/>
                 </a:solidFill>
               </a:rPr>
               <a:t>1   </a:t>
@@ -8848,7 +9885,7 @@
             <a:r>
               <a:rPr lang="en-US" b="1">
                 <a:solidFill>
-                  <a:srgbClr val="4472C4"/>
+                  <a:srgbClr val="C00000"/>
                 </a:solidFill>
               </a:rPr>
               <a:t>2   </a:t>
@@ -8939,7 +9976,7 @@
             <a:r>
               <a:rPr lang="en-US" b="1">
                 <a:solidFill>
-                  <a:srgbClr val="4472C4"/>
+                  <a:srgbClr val="C00000"/>
                 </a:solidFill>
               </a:rPr>
               <a:t>3   </a:t>
@@ -9030,7 +10067,7 @@
             <a:r>
               <a:rPr lang="en-US" b="1" dirty="0">
                 <a:solidFill>
-                  <a:srgbClr val="4472C4"/>
+                  <a:srgbClr val="C00000"/>
                 </a:solidFill>
               </a:rPr>
               <a:t>4   </a:t>
@@ -9074,6 +10111,48 @@
                 </a:solidFill>
               </a:rPr>
               <a:t>The histogram for large n. The stem and leaf plot keeps the original values. Dot plot also – when applied to discrete data. </a:t>
+            </a:r>
+          </a:p>
+        </p:txBody>
+      </p:sp>
+      <p:sp>
+        <p:nvSpPr>
+          <p:cNvPr id="11" name="Slide number">
+            <a:extLst>
+              <a:ext uri="{FF2B5EF4-FFF2-40B4-BE49-F238E27FC236}">
+                <a16:creationId xmlns:a16="http://schemas.microsoft.com/office/drawing/2014/main" id="{ADB06977-D5AF-C441-0AE4-2679EC5A1BCE}"/>
+              </a:ext>
+            </a:extLst>
+          </p:cNvPr>
+          <p:cNvSpPr txBox="1"/>
+          <p:nvPr/>
+        </p:nvSpPr>
+        <p:spPr>
+          <a:xfrm>
+            <a:off x="11789211" y="6477000"/>
+            <a:ext cx="250389" cy="246221"/>
+          </a:xfrm>
+          <a:prstGeom prst="rect">
+            <a:avLst/>
+          </a:prstGeom>
+          <a:solidFill>
+            <a:srgbClr val="FFFFFF"/>
+          </a:solidFill>
+        </p:spPr>
+        <p:txBody>
+          <a:bodyPr vert="horz" wrap="none" rtlCol="0">
+            <a:spAutoFit/>
+          </a:bodyPr>
+          <a:lstStyle/>
+          <a:p>
+            <a:pPr algn="r"/>
+            <a:r>
+              <a:rPr lang="en-US" sz="1000">
+                <a:solidFill>
+                  <a:srgbClr val="808080"/>
+                </a:solidFill>
+              </a:rPr>
+              <a:t>2</a:t>
             </a:r>
           </a:p>
         </p:txBody>
@@ -9500,6 +10579,62 @@
       </p:grpSpPr>
       <p:sp>
         <p:nvSpPr>
+          <p:cNvPr id="6" name="Body card">
+            <a:extLst>
+              <a:ext uri="{FF2B5EF4-FFF2-40B4-BE49-F238E27FC236}">
+                <a16:creationId xmlns:a16="http://schemas.microsoft.com/office/drawing/2014/main" id="{D935A494-1C08-FCA2-A357-21200E99E193}"/>
+              </a:ext>
+            </a:extLst>
+          </p:cNvPr>
+          <p:cNvSpPr/>
+          <p:nvPr/>
+        </p:nvSpPr>
+        <p:spPr>
+          <a:xfrm>
+            <a:off x="635000" y="1676400"/>
+            <a:ext cx="10922000" cy="3263900"/>
+          </a:xfrm>
+          <a:prstGeom prst="roundRect">
+            <a:avLst>
+              <a:gd name="adj" fmla="val 3000"/>
+            </a:avLst>
+          </a:prstGeom>
+          <a:solidFill>
+            <a:srgbClr val="F2F6FC"/>
+          </a:solidFill>
+          <a:ln w="19050">
+            <a:solidFill>
+              <a:srgbClr val="4472C4"/>
+            </a:solidFill>
+          </a:ln>
+        </p:spPr>
+        <p:style>
+          <a:lnRef idx="2">
+            <a:schemeClr val="accent1">
+              <a:shade val="15000"/>
+            </a:schemeClr>
+          </a:lnRef>
+          <a:fillRef idx="1">
+            <a:schemeClr val="accent1"/>
+          </a:fillRef>
+          <a:effectRef idx="0">
+            <a:schemeClr val="accent1"/>
+          </a:effectRef>
+          <a:fontRef idx="minor">
+            <a:schemeClr val="lt1"/>
+          </a:fontRef>
+        </p:style>
+        <p:txBody>
+          <a:bodyPr rtlCol="0" anchor="ctr"/>
+          <a:lstStyle/>
+          <a:p>
+            <a:pPr algn="ctr"/>
+            <a:endParaRPr lang="en-US"/>
+          </a:p>
+        </p:txBody>
+      </p:sp>
+      <p:sp>
+        <p:nvSpPr>
           <p:cNvPr id="2" name="Title 1">
             <a:extLst>
               <a:ext uri="{FF2B5EF4-FFF2-40B4-BE49-F238E27FC236}">
@@ -9520,10 +10655,18 @@
           <a:lstStyle/>
           <a:p>
             <a:r>
-              <a:rPr lang="en-US"/>
+              <a:rPr lang="en-US">
+                <a:solidFill>
+                  <a:srgbClr val="1F3864"/>
+                </a:solidFill>
+              </a:rPr>
               <a:t>Practice: Quartiles from Exam Scores</a:t>
             </a:r>
-            <a:endParaRPr lang="en-US" dirty="0"/>
+            <a:endParaRPr lang="en-US" dirty="0">
+              <a:solidFill>
+                <a:srgbClr val="1F3864"/>
+              </a:solidFill>
+            </a:endParaRPr>
           </a:p>
         </p:txBody>
       </p:sp>
@@ -9591,6 +10734,116 @@
               <a:rPr lang="en-US" dirty="0"/>
               <a:t>Compute the 3 quartiles Q1, Q2, and Q3</a:t>
             </a:r>
+          </a:p>
+        </p:txBody>
+      </p:sp>
+      <p:sp>
+        <p:nvSpPr>
+          <p:cNvPr id="4" name="Slide number">
+            <a:extLst>
+              <a:ext uri="{FF2B5EF4-FFF2-40B4-BE49-F238E27FC236}">
+                <a16:creationId xmlns:a16="http://schemas.microsoft.com/office/drawing/2014/main" id="{08B8C9F6-95B8-3302-3E20-66BE68720CAB}"/>
+              </a:ext>
+            </a:extLst>
+          </p:cNvPr>
+          <p:cNvSpPr txBox="1"/>
+          <p:nvPr/>
+        </p:nvSpPr>
+        <p:spPr>
+          <a:xfrm>
+            <a:off x="11723488" y="6477000"/>
+            <a:ext cx="316112" cy="246221"/>
+          </a:xfrm>
+          <a:prstGeom prst="rect">
+            <a:avLst/>
+          </a:prstGeom>
+          <a:solidFill>
+            <a:srgbClr val="FFFFFF"/>
+          </a:solidFill>
+        </p:spPr>
+        <p:txBody>
+          <a:bodyPr vert="horz" wrap="none" rtlCol="0">
+            <a:spAutoFit/>
+          </a:bodyPr>
+          <a:lstStyle/>
+          <a:p>
+            <a:pPr algn="r"/>
+            <a:r>
+              <a:rPr lang="en-US" sz="1000">
+                <a:solidFill>
+                  <a:srgbClr val="808080"/>
+                </a:solidFill>
+              </a:rPr>
+              <a:t>20</a:t>
+            </a:r>
+          </a:p>
+        </p:txBody>
+      </p:sp>
+      <p:sp>
+        <p:nvSpPr>
+          <p:cNvPr id="5" name="Title rule">
+            <a:extLst>
+              <a:ext uri="{FF2B5EF4-FFF2-40B4-BE49-F238E27FC236}">
+                <a16:creationId xmlns:a16="http://schemas.microsoft.com/office/drawing/2014/main" id="{D0E04E23-DA0F-C42C-1DFA-4ACEDB7D4532}"/>
+              </a:ext>
+            </a:extLst>
+          </p:cNvPr>
+          <p:cNvSpPr/>
+          <p:nvPr/>
+        </p:nvSpPr>
+        <p:spPr>
+          <a:xfrm>
+            <a:off x="838200" y="1600200"/>
+            <a:ext cx="10515600" cy="38100"/>
+          </a:xfrm>
+          <a:prstGeom prst="rect">
+            <a:avLst/>
+          </a:prstGeom>
+          <a:solidFill>
+            <a:srgbClr val="4472C4"/>
+          </a:solidFill>
+          <a:ln w="12700" cap="flat" cmpd="sng" algn="ctr">
+            <a:noFill/>
+            <a:prstDash val="solid"/>
+            <a:miter lim="800000"/>
+          </a:ln>
+          <a:effectLst/>
+          <a:extLst>
+            <a:ext uri="{91240B29-F687-4F45-9708-019B960494DF}">
+              <a14:hiddenLine xmlns:a14="http://schemas.microsoft.com/office/drawing/2010/main" w="12700" cap="flat" cmpd="sng" algn="ctr">
+                <a:solidFill>
+                  <a:schemeClr val="accent1">
+                    <a:shade val="15000"/>
+                  </a:schemeClr>
+                </a:solidFill>
+                <a:prstDash val="solid"/>
+                <a:miter lim="800000"/>
+              </a14:hiddenLine>
+            </a:ext>
+          </a:extLst>
+        </p:spPr>
+        <p:style>
+          <a:lnRef idx="2">
+            <a:schemeClr val="accent1">
+              <a:shade val="15000"/>
+            </a:schemeClr>
+          </a:lnRef>
+          <a:fillRef idx="1">
+            <a:schemeClr val="accent1"/>
+          </a:fillRef>
+          <a:effectRef idx="0">
+            <a:schemeClr val="accent1"/>
+          </a:effectRef>
+          <a:fontRef idx="minor">
+            <a:schemeClr val="lt1"/>
+          </a:fontRef>
+        </p:style>
+        <p:txBody>
+          <a:bodyPr rtlCol="0" anchor="ctr"/>
+          <a:lstStyle/>
+          <a:p>
+            <a:pPr algn="ctr"/>
+            <a:endParaRPr lang="en-US"/>
           </a:p>
         </p:txBody>
       </p:sp>
@@ -9646,7 +10899,11 @@
           <a:lstStyle/>
           <a:p>
             <a:r>
-              <a:rPr lang="en-US" dirty="0"/>
+              <a:rPr lang="en-US" dirty="0">
+                <a:solidFill>
+                  <a:srgbClr val="1F3864"/>
+                </a:solidFill>
+              </a:rPr>
               <a:t>Variability of A Distribution: Measures of Spread</a:t>
             </a:r>
           </a:p>
@@ -9682,6 +10939,48 @@
           </a:prstGeom>
         </p:spPr>
       </p:pic>
+      <p:sp>
+        <p:nvSpPr>
+          <p:cNvPr id="3" name="Slide number">
+            <a:extLst>
+              <a:ext uri="{FF2B5EF4-FFF2-40B4-BE49-F238E27FC236}">
+                <a16:creationId xmlns:a16="http://schemas.microsoft.com/office/drawing/2014/main" id="{74C6E1AC-A647-59A1-43D2-66F0FE0B5AB5}"/>
+              </a:ext>
+            </a:extLst>
+          </p:cNvPr>
+          <p:cNvSpPr txBox="1"/>
+          <p:nvPr/>
+        </p:nvSpPr>
+        <p:spPr>
+          <a:xfrm>
+            <a:off x="11723488" y="6477000"/>
+            <a:ext cx="316112" cy="246221"/>
+          </a:xfrm>
+          <a:prstGeom prst="rect">
+            <a:avLst/>
+          </a:prstGeom>
+          <a:solidFill>
+            <a:srgbClr val="FFFFFF"/>
+          </a:solidFill>
+        </p:spPr>
+        <p:txBody>
+          <a:bodyPr vert="horz" wrap="none" rtlCol="0">
+            <a:spAutoFit/>
+          </a:bodyPr>
+          <a:lstStyle/>
+          <a:p>
+            <a:pPr algn="r"/>
+            <a:r>
+              <a:rPr lang="en-US" sz="1000">
+                <a:solidFill>
+                  <a:srgbClr val="808080"/>
+                </a:solidFill>
+              </a:rPr>
+              <a:t>21</a:t>
+            </a:r>
+          </a:p>
+        </p:txBody>
+      </p:sp>
     </p:spTree>
     <p:extLst>
       <p:ext uri="{BB962C8B-B14F-4D97-AF65-F5344CB8AC3E}">
@@ -9775,7 +11074,11 @@
               <a:t>The </a:t>
             </a:r>
             <a:r>
-              <a:rPr lang="en-US" b="1" dirty="0"/>
+              <a:rPr lang="en-US" b="1" dirty="0">
+                <a:solidFill>
+                  <a:srgbClr val="C00000"/>
+                </a:solidFill>
+              </a:rPr>
               <a:t>range</a:t>
             </a:r>
             <a:r>
@@ -9892,8 +11195,54 @@
           <a:lstStyle/>
           <a:p>
             <a:r>
-              <a:rPr lang="en-US" dirty="0"/>
+              <a:rPr lang="en-US" dirty="0">
+                <a:solidFill>
+                  <a:srgbClr val="1F3864"/>
+                </a:solidFill>
+              </a:rPr>
               <a:t>Measures of Spread: Range</a:t>
+            </a:r>
+          </a:p>
+        </p:txBody>
+      </p:sp>
+      <p:sp>
+        <p:nvSpPr>
+          <p:cNvPr id="4" name="Slide number">
+            <a:extLst>
+              <a:ext uri="{FF2B5EF4-FFF2-40B4-BE49-F238E27FC236}">
+                <a16:creationId xmlns:a16="http://schemas.microsoft.com/office/drawing/2014/main" id="{AA76F1BA-B50B-9DA6-D1A9-B8016A432F67}"/>
+              </a:ext>
+            </a:extLst>
+          </p:cNvPr>
+          <p:cNvSpPr txBox="1"/>
+          <p:nvPr/>
+        </p:nvSpPr>
+        <p:spPr>
+          <a:xfrm>
+            <a:off x="11723488" y="6477000"/>
+            <a:ext cx="316112" cy="246221"/>
+          </a:xfrm>
+          <a:prstGeom prst="rect">
+            <a:avLst/>
+          </a:prstGeom>
+          <a:solidFill>
+            <a:srgbClr val="FFFFFF"/>
+          </a:solidFill>
+        </p:spPr>
+        <p:txBody>
+          <a:bodyPr vert="horz" wrap="none" rtlCol="0">
+            <a:spAutoFit/>
+          </a:bodyPr>
+          <a:lstStyle/>
+          <a:p>
+            <a:pPr algn="r"/>
+            <a:r>
+              <a:rPr lang="en-US" sz="1000">
+                <a:solidFill>
+                  <a:srgbClr val="808080"/>
+                </a:solidFill>
+              </a:rPr>
+              <a:t>22</a:t>
             </a:r>
           </a:p>
         </p:txBody>
@@ -9930,6 +11279,62 @@
       </p:grpSpPr>
       <p:sp>
         <p:nvSpPr>
+          <p:cNvPr id="6" name="Body card">
+            <a:extLst>
+              <a:ext uri="{FF2B5EF4-FFF2-40B4-BE49-F238E27FC236}">
+                <a16:creationId xmlns:a16="http://schemas.microsoft.com/office/drawing/2014/main" id="{EBDF4BC2-B488-2708-F9FE-81DA208D9DF3}"/>
+              </a:ext>
+            </a:extLst>
+          </p:cNvPr>
+          <p:cNvSpPr/>
+          <p:nvPr/>
+        </p:nvSpPr>
+        <p:spPr>
+          <a:xfrm>
+            <a:off x="635000" y="1676400"/>
+            <a:ext cx="10922000" cy="4749800"/>
+          </a:xfrm>
+          <a:prstGeom prst="roundRect">
+            <a:avLst>
+              <a:gd name="adj" fmla="val 3000"/>
+            </a:avLst>
+          </a:prstGeom>
+          <a:solidFill>
+            <a:srgbClr val="F2F6FC"/>
+          </a:solidFill>
+          <a:ln w="19050">
+            <a:solidFill>
+              <a:srgbClr val="4472C4"/>
+            </a:solidFill>
+          </a:ln>
+        </p:spPr>
+        <p:style>
+          <a:lnRef idx="2">
+            <a:schemeClr val="accent1">
+              <a:shade val="15000"/>
+            </a:schemeClr>
+          </a:lnRef>
+          <a:fillRef idx="1">
+            <a:schemeClr val="accent1"/>
+          </a:fillRef>
+          <a:effectRef idx="0">
+            <a:schemeClr val="accent1"/>
+          </a:effectRef>
+          <a:fontRef idx="minor">
+            <a:schemeClr val="lt1"/>
+          </a:fontRef>
+        </p:style>
+        <p:txBody>
+          <a:bodyPr rtlCol="0" anchor="ctr"/>
+          <a:lstStyle/>
+          <a:p>
+            <a:pPr algn="ctr"/>
+            <a:endParaRPr lang="en-US"/>
+          </a:p>
+        </p:txBody>
+      </p:sp>
+      <p:sp>
+        <p:nvSpPr>
           <p:cNvPr id="2" name="Title 1">
             <a:extLst>
               <a:ext uri="{FF2B5EF4-FFF2-40B4-BE49-F238E27FC236}">
@@ -9950,15 +11355,23 @@
           <a:lstStyle/>
           <a:p>
             <a:r>
-              <a:rPr lang="en-US" sz="4400" dirty="0"/>
+              <a:rPr lang="en-US" sz="4400" dirty="0">
+                <a:solidFill>
+                  <a:srgbClr val="1F3864"/>
+                </a:solidFill>
+              </a:rPr>
               <a:t>Measures of Spread: Interquartile Range</a:t>
             </a:r>
-            <a:endParaRPr lang="en-US" dirty="0"/>
+            <a:endParaRPr lang="en-US" dirty="0">
+              <a:solidFill>
+                <a:srgbClr val="1F3864"/>
+              </a:solidFill>
+            </a:endParaRPr>
           </a:p>
         </p:txBody>
       </p:sp>
-      <mc:AlternateContent xmlns:mc="http://schemas.openxmlformats.org/markup-compatibility/2006" xmlns:a14="http://schemas.microsoft.com/office/drawing/2010/main">
-        <mc:Choice Requires="a14">
+      <mc:AlternateContent xmlns:mc="http://schemas.openxmlformats.org/markup-compatibility/2006">
+        <mc:Choice xmlns:a14="http://schemas.microsoft.com/office/drawing/2010/main" Requires="a14">
           <p:sp>
             <p:nvSpPr>
               <p:cNvPr id="3" name="Content Placeholder 2">
@@ -9987,7 +11400,11 @@
                   <a:t>The </a:t>
                 </a:r>
                 <a:r>
-                  <a:rPr lang="en-US" b="1" dirty="0"/>
+                  <a:rPr lang="en-US" b="1" dirty="0">
+                    <a:solidFill>
+                      <a:srgbClr val="C00000"/>
+                    </a:solidFill>
+                  </a:rPr>
                   <a:t>interquartile range (IQR)</a:t>
                 </a:r>
                 <a:r>
@@ -10021,42 +11438,63 @@
                     <m:oMath>
                       <m:r>
                         <a:rPr lang="en-US" sz="2400" b="1" i="1" smtClean="0">
+                          <a:solidFill>
+                            <a:srgbClr val="C00000"/>
+                          </a:solidFill>
                           <a:latin typeface="Cambria Math" panose="02040503050406030204" pitchFamily="18" charset="0"/>
                         </a:rPr>
                         <m:t>𝑰𝑸𝑹</m:t>
                       </m:r>
                       <m:r>
                         <a:rPr lang="en-US" sz="2400" b="1" i="1" smtClean="0">
+                          <a:solidFill>
+                            <a:srgbClr val="C00000"/>
+                          </a:solidFill>
                           <a:latin typeface="Cambria Math" panose="02040503050406030204" pitchFamily="18" charset="0"/>
                         </a:rPr>
                         <m:t>=</m:t>
                       </m:r>
                       <m:r>
                         <a:rPr lang="en-US" sz="2400" b="1" i="1" smtClean="0">
+                          <a:solidFill>
+                            <a:srgbClr val="C00000"/>
+                          </a:solidFill>
                           <a:latin typeface="Cambria Math" panose="02040503050406030204" pitchFamily="18" charset="0"/>
                         </a:rPr>
                         <m:t>𝑸</m:t>
                       </m:r>
                       <m:r>
                         <a:rPr lang="en-US" sz="2400" b="1" i="1" smtClean="0">
+                          <a:solidFill>
+                            <a:srgbClr val="C00000"/>
+                          </a:solidFill>
                           <a:latin typeface="Cambria Math" panose="02040503050406030204" pitchFamily="18" charset="0"/>
                         </a:rPr>
                         <m:t>𝟑</m:t>
                       </m:r>
                       <m:r>
                         <a:rPr lang="en-US" sz="2400" b="1" i="1" smtClean="0">
+                          <a:solidFill>
+                            <a:srgbClr val="C00000"/>
+                          </a:solidFill>
                           <a:latin typeface="Cambria Math" panose="02040503050406030204" pitchFamily="18" charset="0"/>
                         </a:rPr>
                         <m:t> −</m:t>
                       </m:r>
                       <m:r>
                         <a:rPr lang="en-US" sz="2400" b="1" i="1" smtClean="0">
+                          <a:solidFill>
+                            <a:srgbClr val="C00000"/>
+                          </a:solidFill>
                           <a:latin typeface="Cambria Math" panose="02040503050406030204" pitchFamily="18" charset="0"/>
                         </a:rPr>
                         <m:t>𝑸</m:t>
                       </m:r>
                       <m:r>
                         <a:rPr lang="en-US" sz="2400" b="1" i="1" smtClean="0">
+                          <a:solidFill>
+                            <a:srgbClr val="C00000"/>
+                          </a:solidFill>
                           <a:latin typeface="Cambria Math" panose="02040503050406030204" pitchFamily="18" charset="0"/>
                         </a:rPr>
                         <m:t>𝟏</m:t>
@@ -10078,7 +11516,11 @@
                   <a:t>The more variability the larger the value of the </a:t>
                 </a:r>
                 <a:r>
-                  <a:rPr lang="en-US" sz="2400" b="1" dirty="0"/>
+                  <a:rPr lang="en-US" sz="2400" b="1" dirty="0">
+                    <a:solidFill>
+                      <a:srgbClr val="C00000"/>
+                    </a:solidFill>
+                  </a:rPr>
                   <a:t>IQR</a:t>
                 </a:r>
                 <a:r>
@@ -10091,7 +11533,11 @@
               </a:p>
               <a:p>
                 <a:r>
-                  <a:rPr lang="en-US" sz="2400" b="1" dirty="0"/>
+                  <a:rPr lang="en-US" sz="2400" b="1" dirty="0">
+                    <a:solidFill>
+                      <a:srgbClr val="C00000"/>
+                    </a:solidFill>
+                  </a:rPr>
                   <a:t>IQR </a:t>
                 </a:r>
                 <a:r>
@@ -10112,7 +11558,7 @@
             </p:txBody>
           </p:sp>
         </mc:Choice>
-        <mc:Fallback xmlns="">
+        <mc:Fallback>
           <p:sp>
             <p:nvSpPr>
               <p:cNvPr id="3" name="Content Placeholder 2">
@@ -10152,6 +11598,116 @@
           </p:sp>
         </mc:Fallback>
       </mc:AlternateContent>
+      <p:sp>
+        <p:nvSpPr>
+          <p:cNvPr id="4" name="Slide number">
+            <a:extLst>
+              <a:ext uri="{FF2B5EF4-FFF2-40B4-BE49-F238E27FC236}">
+                <a16:creationId xmlns:a16="http://schemas.microsoft.com/office/drawing/2014/main" id="{437AA998-75E3-6B35-9D01-D980D7508E0E}"/>
+              </a:ext>
+            </a:extLst>
+          </p:cNvPr>
+          <p:cNvSpPr txBox="1"/>
+          <p:nvPr/>
+        </p:nvSpPr>
+        <p:spPr>
+          <a:xfrm>
+            <a:off x="11723488" y="6477000"/>
+            <a:ext cx="316112" cy="246221"/>
+          </a:xfrm>
+          <a:prstGeom prst="rect">
+            <a:avLst/>
+          </a:prstGeom>
+          <a:solidFill>
+            <a:srgbClr val="FFFFFF"/>
+          </a:solidFill>
+        </p:spPr>
+        <p:txBody>
+          <a:bodyPr vert="horz" wrap="none" rtlCol="0">
+            <a:spAutoFit/>
+          </a:bodyPr>
+          <a:lstStyle/>
+          <a:p>
+            <a:pPr algn="r"/>
+            <a:r>
+              <a:rPr lang="en-US" sz="1000">
+                <a:solidFill>
+                  <a:srgbClr val="808080"/>
+                </a:solidFill>
+              </a:rPr>
+              <a:t>23</a:t>
+            </a:r>
+          </a:p>
+        </p:txBody>
+      </p:sp>
+      <p:sp>
+        <p:nvSpPr>
+          <p:cNvPr id="5" name="Title rule">
+            <a:extLst>
+              <a:ext uri="{FF2B5EF4-FFF2-40B4-BE49-F238E27FC236}">
+                <a16:creationId xmlns:a16="http://schemas.microsoft.com/office/drawing/2014/main" id="{40A52C12-63FB-46E7-3B70-6BB936DF0FA1}"/>
+              </a:ext>
+            </a:extLst>
+          </p:cNvPr>
+          <p:cNvSpPr/>
+          <p:nvPr/>
+        </p:nvSpPr>
+        <p:spPr>
+          <a:xfrm>
+            <a:off x="838200" y="1600200"/>
+            <a:ext cx="10515600" cy="38100"/>
+          </a:xfrm>
+          <a:prstGeom prst="rect">
+            <a:avLst/>
+          </a:prstGeom>
+          <a:solidFill>
+            <a:srgbClr val="4472C4"/>
+          </a:solidFill>
+          <a:ln w="12700" cap="flat" cmpd="sng" algn="ctr">
+            <a:noFill/>
+            <a:prstDash val="solid"/>
+            <a:miter lim="800000"/>
+          </a:ln>
+          <a:effectLst/>
+          <a:extLst>
+            <a:ext uri="{91240B29-F687-4F45-9708-019B960494DF}">
+              <a14:hiddenLine xmlns:a14="http://schemas.microsoft.com/office/drawing/2010/main" w="12700" cap="flat" cmpd="sng" algn="ctr">
+                <a:solidFill>
+                  <a:schemeClr val="accent1">
+                    <a:shade val="15000"/>
+                  </a:schemeClr>
+                </a:solidFill>
+                <a:prstDash val="solid"/>
+                <a:miter lim="800000"/>
+              </a14:hiddenLine>
+            </a:ext>
+          </a:extLst>
+        </p:spPr>
+        <p:style>
+          <a:lnRef idx="2">
+            <a:schemeClr val="accent1">
+              <a:shade val="15000"/>
+            </a:schemeClr>
+          </a:lnRef>
+          <a:fillRef idx="1">
+            <a:schemeClr val="accent1"/>
+          </a:fillRef>
+          <a:effectRef idx="0">
+            <a:schemeClr val="accent1"/>
+          </a:effectRef>
+          <a:fontRef idx="minor">
+            <a:schemeClr val="lt1"/>
+          </a:fontRef>
+        </p:style>
+        <p:txBody>
+          <a:bodyPr rtlCol="0" anchor="ctr"/>
+          <a:lstStyle/>
+          <a:p>
+            <a:pPr algn="ctr"/>
+            <a:endParaRPr lang="en-US"/>
+          </a:p>
+        </p:txBody>
+      </p:sp>
     </p:spTree>
     <p:extLst>
       <p:ext uri="{BB962C8B-B14F-4D97-AF65-F5344CB8AC3E}">
@@ -10184,6 +11740,62 @@
       </p:grpSpPr>
       <p:sp>
         <p:nvSpPr>
+          <p:cNvPr id="6" name="Body card">
+            <a:extLst>
+              <a:ext uri="{FF2B5EF4-FFF2-40B4-BE49-F238E27FC236}">
+                <a16:creationId xmlns:a16="http://schemas.microsoft.com/office/drawing/2014/main" id="{18488ADD-7491-CBBF-E2B2-A0EF2956441B}"/>
+              </a:ext>
+            </a:extLst>
+          </p:cNvPr>
+          <p:cNvSpPr/>
+          <p:nvPr/>
+        </p:nvSpPr>
+        <p:spPr>
+          <a:xfrm>
+            <a:off x="635000" y="1676400"/>
+            <a:ext cx="10922000" cy="1739900"/>
+          </a:xfrm>
+          <a:prstGeom prst="roundRect">
+            <a:avLst>
+              <a:gd name="adj" fmla="val 3000"/>
+            </a:avLst>
+          </a:prstGeom>
+          <a:solidFill>
+            <a:srgbClr val="F2F6FC"/>
+          </a:solidFill>
+          <a:ln w="19050">
+            <a:solidFill>
+              <a:srgbClr val="4472C4"/>
+            </a:solidFill>
+          </a:ln>
+        </p:spPr>
+        <p:style>
+          <a:lnRef idx="2">
+            <a:schemeClr val="accent1">
+              <a:shade val="15000"/>
+            </a:schemeClr>
+          </a:lnRef>
+          <a:fillRef idx="1">
+            <a:schemeClr val="accent1"/>
+          </a:fillRef>
+          <a:effectRef idx="0">
+            <a:schemeClr val="accent1"/>
+          </a:effectRef>
+          <a:fontRef idx="minor">
+            <a:schemeClr val="lt1"/>
+          </a:fontRef>
+        </p:style>
+        <p:txBody>
+          <a:bodyPr rtlCol="0" anchor="ctr"/>
+          <a:lstStyle/>
+          <a:p>
+            <a:pPr algn="ctr"/>
+            <a:endParaRPr lang="en-US"/>
+          </a:p>
+        </p:txBody>
+      </p:sp>
+      <p:sp>
+        <p:nvSpPr>
           <p:cNvPr id="2" name="Title 1">
             <a:extLst>
               <a:ext uri="{FF2B5EF4-FFF2-40B4-BE49-F238E27FC236}">
@@ -10204,7 +11816,11 @@
           <a:lstStyle/>
           <a:p>
             <a:r>
-              <a:rPr lang="en-US" dirty="0"/>
+              <a:rPr lang="en-US" dirty="0">
+                <a:solidFill>
+                  <a:srgbClr val="1F3864"/>
+                </a:solidFill>
+              </a:rPr>
               <a:t>Practice: Finding quartiles and IQR</a:t>
             </a:r>
           </a:p>
@@ -10253,6 +11869,116 @@
               <a:rPr lang="en-US" dirty="0"/>
               <a:t>Compute the IQR</a:t>
             </a:r>
+          </a:p>
+        </p:txBody>
+      </p:sp>
+      <p:sp>
+        <p:nvSpPr>
+          <p:cNvPr id="4" name="Slide number">
+            <a:extLst>
+              <a:ext uri="{FF2B5EF4-FFF2-40B4-BE49-F238E27FC236}">
+                <a16:creationId xmlns:a16="http://schemas.microsoft.com/office/drawing/2014/main" id="{C2177357-AB95-55CF-DCC0-97A5F8267DE9}"/>
+              </a:ext>
+            </a:extLst>
+          </p:cNvPr>
+          <p:cNvSpPr txBox="1"/>
+          <p:nvPr/>
+        </p:nvSpPr>
+        <p:spPr>
+          <a:xfrm>
+            <a:off x="11723488" y="6477000"/>
+            <a:ext cx="316112" cy="246221"/>
+          </a:xfrm>
+          <a:prstGeom prst="rect">
+            <a:avLst/>
+          </a:prstGeom>
+          <a:solidFill>
+            <a:srgbClr val="FFFFFF"/>
+          </a:solidFill>
+        </p:spPr>
+        <p:txBody>
+          <a:bodyPr vert="horz" wrap="none" rtlCol="0">
+            <a:spAutoFit/>
+          </a:bodyPr>
+          <a:lstStyle/>
+          <a:p>
+            <a:pPr algn="r"/>
+            <a:r>
+              <a:rPr lang="en-US" sz="1000">
+                <a:solidFill>
+                  <a:srgbClr val="808080"/>
+                </a:solidFill>
+              </a:rPr>
+              <a:t>24</a:t>
+            </a:r>
+          </a:p>
+        </p:txBody>
+      </p:sp>
+      <p:sp>
+        <p:nvSpPr>
+          <p:cNvPr id="5" name="Title rule">
+            <a:extLst>
+              <a:ext uri="{FF2B5EF4-FFF2-40B4-BE49-F238E27FC236}">
+                <a16:creationId xmlns:a16="http://schemas.microsoft.com/office/drawing/2014/main" id="{4C5B1C5B-C835-B511-E765-C1270FA1C592}"/>
+              </a:ext>
+            </a:extLst>
+          </p:cNvPr>
+          <p:cNvSpPr/>
+          <p:nvPr/>
+        </p:nvSpPr>
+        <p:spPr>
+          <a:xfrm>
+            <a:off x="838200" y="1600200"/>
+            <a:ext cx="10515600" cy="38100"/>
+          </a:xfrm>
+          <a:prstGeom prst="rect">
+            <a:avLst/>
+          </a:prstGeom>
+          <a:solidFill>
+            <a:srgbClr val="4472C4"/>
+          </a:solidFill>
+          <a:ln w="12700" cap="flat" cmpd="sng" algn="ctr">
+            <a:noFill/>
+            <a:prstDash val="solid"/>
+            <a:miter lim="800000"/>
+          </a:ln>
+          <a:effectLst/>
+          <a:extLst>
+            <a:ext uri="{91240B29-F687-4F45-9708-019B960494DF}">
+              <a14:hiddenLine xmlns:a14="http://schemas.microsoft.com/office/drawing/2010/main" w="12700" cap="flat" cmpd="sng" algn="ctr">
+                <a:solidFill>
+                  <a:schemeClr val="accent1">
+                    <a:shade val="15000"/>
+                  </a:schemeClr>
+                </a:solidFill>
+                <a:prstDash val="solid"/>
+                <a:miter lim="800000"/>
+              </a14:hiddenLine>
+            </a:ext>
+          </a:extLst>
+        </p:spPr>
+        <p:style>
+          <a:lnRef idx="2">
+            <a:schemeClr val="accent1">
+              <a:shade val="15000"/>
+            </a:schemeClr>
+          </a:lnRef>
+          <a:fillRef idx="1">
+            <a:schemeClr val="accent1"/>
+          </a:fillRef>
+          <a:effectRef idx="0">
+            <a:schemeClr val="accent1"/>
+          </a:effectRef>
+          <a:fontRef idx="minor">
+            <a:schemeClr val="lt1"/>
+          </a:fontRef>
+        </p:style>
+        <p:txBody>
+          <a:bodyPr rtlCol="0" anchor="ctr"/>
+          <a:lstStyle/>
+          <a:p>
+            <a:pPr algn="ctr"/>
+            <a:endParaRPr lang="en-US"/>
           </a:p>
         </p:txBody>
       </p:sp>
@@ -10315,7 +12041,11 @@
           <a:lstStyle/>
           <a:p>
             <a:r>
-              <a:rPr lang="en-US" sz="3600" dirty="0"/>
+              <a:rPr lang="en-US" sz="3600" dirty="0">
+                <a:solidFill>
+                  <a:srgbClr val="1F3864"/>
+                </a:solidFill>
+              </a:rPr>
               <a:t>The Boxplot (Box and Whisker Plot): A five number summary</a:t>
             </a:r>
           </a:p>
@@ -10436,6 +12166,48 @@
           </a:prstGeom>
         </p:spPr>
       </p:pic>
+      <p:sp>
+        <p:nvSpPr>
+          <p:cNvPr id="4" name="Slide number">
+            <a:extLst>
+              <a:ext uri="{FF2B5EF4-FFF2-40B4-BE49-F238E27FC236}">
+                <a16:creationId xmlns:a16="http://schemas.microsoft.com/office/drawing/2014/main" id="{FFDE0401-F197-C4BD-2921-8907B3C9998A}"/>
+              </a:ext>
+            </a:extLst>
+          </p:cNvPr>
+          <p:cNvSpPr txBox="1"/>
+          <p:nvPr/>
+        </p:nvSpPr>
+        <p:spPr>
+          <a:xfrm>
+            <a:off x="11723488" y="6477000"/>
+            <a:ext cx="316112" cy="246221"/>
+          </a:xfrm>
+          <a:prstGeom prst="rect">
+            <a:avLst/>
+          </a:prstGeom>
+          <a:solidFill>
+            <a:srgbClr val="FFFFFF"/>
+          </a:solidFill>
+        </p:spPr>
+        <p:txBody>
+          <a:bodyPr vert="horz" wrap="none" rtlCol="0">
+            <a:spAutoFit/>
+          </a:bodyPr>
+          <a:lstStyle/>
+          <a:p>
+            <a:pPr algn="r"/>
+            <a:r>
+              <a:rPr lang="en-US" sz="1000">
+                <a:solidFill>
+                  <a:srgbClr val="808080"/>
+                </a:solidFill>
+              </a:rPr>
+              <a:t>25</a:t>
+            </a:r>
+          </a:p>
+        </p:txBody>
+      </p:sp>
     </p:spTree>
     <p:extLst>
       <p:ext uri="{BB962C8B-B14F-4D97-AF65-F5344CB8AC3E}">
@@ -10496,6 +12268,48 @@
           </a:prstGeom>
         </p:spPr>
       </p:pic>
+      <p:sp>
+        <p:nvSpPr>
+          <p:cNvPr id="2" name="Slide number">
+            <a:extLst>
+              <a:ext uri="{FF2B5EF4-FFF2-40B4-BE49-F238E27FC236}">
+                <a16:creationId xmlns:a16="http://schemas.microsoft.com/office/drawing/2014/main" id="{0D1E790F-83B1-95DD-74B5-57F98A712858}"/>
+              </a:ext>
+            </a:extLst>
+          </p:cNvPr>
+          <p:cNvSpPr txBox="1"/>
+          <p:nvPr/>
+        </p:nvSpPr>
+        <p:spPr>
+          <a:xfrm>
+            <a:off x="11723488" y="6477000"/>
+            <a:ext cx="316112" cy="246221"/>
+          </a:xfrm>
+          <a:prstGeom prst="rect">
+            <a:avLst/>
+          </a:prstGeom>
+          <a:solidFill>
+            <a:srgbClr val="FFFFFF"/>
+          </a:solidFill>
+        </p:spPr>
+        <p:txBody>
+          <a:bodyPr vert="horz" wrap="none" rtlCol="0">
+            <a:spAutoFit/>
+          </a:bodyPr>
+          <a:lstStyle/>
+          <a:p>
+            <a:pPr algn="r"/>
+            <a:r>
+              <a:rPr lang="en-US" sz="1000">
+                <a:solidFill>
+                  <a:srgbClr val="808080"/>
+                </a:solidFill>
+              </a:rPr>
+              <a:t>26</a:t>
+            </a:r>
+          </a:p>
+        </p:txBody>
+      </p:sp>
     </p:spTree>
     <p:extLst>
       <p:ext uri="{BB962C8B-B14F-4D97-AF65-F5344CB8AC3E}">
@@ -10526,8 +12340,8 @@
           <a:chExt cx="0" cy="0"/>
         </a:xfrm>
       </p:grpSpPr>
-      <mc:AlternateContent xmlns:mc="http://schemas.openxmlformats.org/markup-compatibility/2006" xmlns:a14="http://schemas.microsoft.com/office/drawing/2010/main">
-        <mc:Choice Requires="a14">
+      <mc:AlternateContent xmlns:mc="http://schemas.openxmlformats.org/markup-compatibility/2006">
+        <mc:Choice xmlns:a14="http://schemas.microsoft.com/office/drawing/2010/main" Requires="a14">
           <p:sp>
             <p:nvSpPr>
               <p:cNvPr id="4" name="Content Placeholder 2">
@@ -11012,7 +12826,7 @@
                       <a:noFill/>
                     </a:ln>
                     <a:solidFill>
-                      <a:srgbClr val="0070C0"/>
+                      <a:srgbClr val="C00000"/>
                     </a:solidFill>
                     <a:effectLst/>
                     <a:uLnTx/>
@@ -11046,7 +12860,7 @@
                       <a:noFill/>
                     </a:ln>
                     <a:solidFill>
-                      <a:srgbClr val="00B050"/>
+                      <a:srgbClr val="C00000"/>
                     </a:solidFill>
                     <a:effectLst/>
                     <a:uLnTx/>
@@ -11080,7 +12894,7 @@
                       <a:noFill/>
                     </a:ln>
                     <a:solidFill>
-                      <a:srgbClr val="FF0000"/>
+                      <a:srgbClr val="C00000"/>
                     </a:solidFill>
                     <a:effectLst/>
                     <a:uLnTx/>
@@ -11590,7 +13404,7 @@
             </p:txBody>
           </p:sp>
         </mc:Choice>
-        <mc:Fallback xmlns="">
+        <mc:Fallback>
           <p:sp>
             <p:nvSpPr>
               <p:cNvPr id="4" name="Content Placeholder 2">
@@ -11666,7 +13480,7 @@
             <a:r>
               <a:rPr lang="en-US" sz="4000" kern="1200" dirty="0">
                 <a:solidFill>
-                  <a:schemeClr val="tx1"/>
+                  <a:srgbClr val="1F3864"/>
                 </a:solidFill>
                 <a:latin typeface="+mj-lt"/>
                 <a:ea typeface="+mj-ea"/>
@@ -11675,12 +13489,16 @@
               <a:t>Ex. </a:t>
             </a:r>
             <a:r>
-              <a:rPr lang="en-US" sz="4000" dirty="0"/>
+              <a:rPr lang="en-US" sz="4000" dirty="0">
+                <a:solidFill>
+                  <a:srgbClr val="1F3864"/>
+                </a:solidFill>
+              </a:rPr>
               <a:t>Construct a Boxplot</a:t>
             </a:r>
             <a:endParaRPr lang="en-US" sz="4000" kern="1200" dirty="0">
               <a:solidFill>
-                <a:schemeClr val="tx1"/>
+                <a:srgbClr val="1F3864"/>
               </a:solidFill>
               <a:latin typeface="+mj-lt"/>
               <a:ea typeface="+mj-ea"/>
@@ -11793,6 +13611,48 @@
           </a:p>
         </p:txBody>
       </p:sp>
+      <p:sp>
+        <p:nvSpPr>
+          <p:cNvPr id="5" name="Slide number">
+            <a:extLst>
+              <a:ext uri="{FF2B5EF4-FFF2-40B4-BE49-F238E27FC236}">
+                <a16:creationId xmlns:a16="http://schemas.microsoft.com/office/drawing/2014/main" id="{481AFD10-4976-0326-2226-4DC773162001}"/>
+              </a:ext>
+            </a:extLst>
+          </p:cNvPr>
+          <p:cNvSpPr txBox="1"/>
+          <p:nvPr/>
+        </p:nvSpPr>
+        <p:spPr>
+          <a:xfrm>
+            <a:off x="11723488" y="6477000"/>
+            <a:ext cx="316112" cy="246221"/>
+          </a:xfrm>
+          <a:prstGeom prst="rect">
+            <a:avLst/>
+          </a:prstGeom>
+          <a:solidFill>
+            <a:srgbClr val="FFFFFF"/>
+          </a:solidFill>
+        </p:spPr>
+        <p:txBody>
+          <a:bodyPr vert="horz" wrap="none" rtlCol="0">
+            <a:spAutoFit/>
+          </a:bodyPr>
+          <a:lstStyle/>
+          <a:p>
+            <a:pPr algn="r"/>
+            <a:r>
+              <a:rPr lang="en-US" sz="1000">
+                <a:solidFill>
+                  <a:srgbClr val="808080"/>
+                </a:solidFill>
+              </a:rPr>
+              <a:t>27</a:t>
+            </a:r>
+          </a:p>
+        </p:txBody>
+      </p:sp>
     </p:spTree>
     <p:extLst>
       <p:ext uri="{BB962C8B-B14F-4D97-AF65-F5344CB8AC3E}">
@@ -11825,6 +13685,62 @@
       </p:grpSpPr>
       <p:sp>
         <p:nvSpPr>
+          <p:cNvPr id="6" name="Body card">
+            <a:extLst>
+              <a:ext uri="{FF2B5EF4-FFF2-40B4-BE49-F238E27FC236}">
+                <a16:creationId xmlns:a16="http://schemas.microsoft.com/office/drawing/2014/main" id="{D444BFDE-9A10-99BC-F1E7-5EED67EFC337}"/>
+              </a:ext>
+            </a:extLst>
+          </p:cNvPr>
+          <p:cNvSpPr/>
+          <p:nvPr/>
+        </p:nvSpPr>
+        <p:spPr>
+          <a:xfrm>
+            <a:off x="635000" y="1676400"/>
+            <a:ext cx="10922000" cy="2247900"/>
+          </a:xfrm>
+          <a:prstGeom prst="roundRect">
+            <a:avLst>
+              <a:gd name="adj" fmla="val 3000"/>
+            </a:avLst>
+          </a:prstGeom>
+          <a:solidFill>
+            <a:srgbClr val="F2F6FC"/>
+          </a:solidFill>
+          <a:ln w="19050">
+            <a:solidFill>
+              <a:srgbClr val="4472C4"/>
+            </a:solidFill>
+          </a:ln>
+        </p:spPr>
+        <p:style>
+          <a:lnRef idx="2">
+            <a:schemeClr val="accent1">
+              <a:shade val="15000"/>
+            </a:schemeClr>
+          </a:lnRef>
+          <a:fillRef idx="1">
+            <a:schemeClr val="accent1"/>
+          </a:fillRef>
+          <a:effectRef idx="0">
+            <a:schemeClr val="accent1"/>
+          </a:effectRef>
+          <a:fontRef idx="minor">
+            <a:schemeClr val="lt1"/>
+          </a:fontRef>
+        </p:style>
+        <p:txBody>
+          <a:bodyPr rtlCol="0" anchor="ctr"/>
+          <a:lstStyle/>
+          <a:p>
+            <a:pPr algn="ctr"/>
+            <a:endParaRPr lang="en-US"/>
+          </a:p>
+        </p:txBody>
+      </p:sp>
+      <p:sp>
+        <p:nvSpPr>
           <p:cNvPr id="2" name="Title 1">
             <a:extLst>
               <a:ext uri="{FF2B5EF4-FFF2-40B4-BE49-F238E27FC236}">
@@ -11845,10 +13761,18 @@
           <a:lstStyle/>
           <a:p>
             <a:r>
-              <a:rPr lang="en-US"/>
+              <a:rPr lang="en-US">
+                <a:solidFill>
+                  <a:srgbClr val="1F3864"/>
+                </a:solidFill>
+              </a:rPr>
               <a:t>Practice: Construct a Boxplot</a:t>
             </a:r>
-            <a:endParaRPr lang="en-US" dirty="0"/>
+            <a:endParaRPr lang="en-US" dirty="0">
+              <a:solidFill>
+                <a:srgbClr val="1F3864"/>
+              </a:solidFill>
+            </a:endParaRPr>
           </a:p>
         </p:txBody>
       </p:sp>
@@ -11901,6 +13825,116 @@
               <a:buNone/>
             </a:pPr>
             <a:endParaRPr lang="en-US" dirty="0"/>
+          </a:p>
+        </p:txBody>
+      </p:sp>
+      <p:sp>
+        <p:nvSpPr>
+          <p:cNvPr id="4" name="Slide number">
+            <a:extLst>
+              <a:ext uri="{FF2B5EF4-FFF2-40B4-BE49-F238E27FC236}">
+                <a16:creationId xmlns:a16="http://schemas.microsoft.com/office/drawing/2014/main" id="{2F7ABBA2-A147-23F1-94D6-36B2E02605C0}"/>
+              </a:ext>
+            </a:extLst>
+          </p:cNvPr>
+          <p:cNvSpPr txBox="1"/>
+          <p:nvPr/>
+        </p:nvSpPr>
+        <p:spPr>
+          <a:xfrm>
+            <a:off x="11723488" y="6477000"/>
+            <a:ext cx="316112" cy="246221"/>
+          </a:xfrm>
+          <a:prstGeom prst="rect">
+            <a:avLst/>
+          </a:prstGeom>
+          <a:solidFill>
+            <a:srgbClr val="FFFFFF"/>
+          </a:solidFill>
+        </p:spPr>
+        <p:txBody>
+          <a:bodyPr vert="horz" wrap="none" rtlCol="0">
+            <a:spAutoFit/>
+          </a:bodyPr>
+          <a:lstStyle/>
+          <a:p>
+            <a:pPr algn="r"/>
+            <a:r>
+              <a:rPr lang="en-US" sz="1000">
+                <a:solidFill>
+                  <a:srgbClr val="808080"/>
+                </a:solidFill>
+              </a:rPr>
+              <a:t>28</a:t>
+            </a:r>
+          </a:p>
+        </p:txBody>
+      </p:sp>
+      <p:sp>
+        <p:nvSpPr>
+          <p:cNvPr id="5" name="Title rule">
+            <a:extLst>
+              <a:ext uri="{FF2B5EF4-FFF2-40B4-BE49-F238E27FC236}">
+                <a16:creationId xmlns:a16="http://schemas.microsoft.com/office/drawing/2014/main" id="{BD3E631D-BE03-DE2C-9485-81E80D527BC1}"/>
+              </a:ext>
+            </a:extLst>
+          </p:cNvPr>
+          <p:cNvSpPr/>
+          <p:nvPr/>
+        </p:nvSpPr>
+        <p:spPr>
+          <a:xfrm>
+            <a:off x="838200" y="1600200"/>
+            <a:ext cx="10515600" cy="38100"/>
+          </a:xfrm>
+          <a:prstGeom prst="rect">
+            <a:avLst/>
+          </a:prstGeom>
+          <a:solidFill>
+            <a:srgbClr val="4472C4"/>
+          </a:solidFill>
+          <a:ln w="12700" cap="flat" cmpd="sng" algn="ctr">
+            <a:noFill/>
+            <a:prstDash val="solid"/>
+            <a:miter lim="800000"/>
+          </a:ln>
+          <a:effectLst/>
+          <a:extLst>
+            <a:ext uri="{91240B29-F687-4F45-9708-019B960494DF}">
+              <a14:hiddenLine xmlns:a14="http://schemas.microsoft.com/office/drawing/2010/main" w="12700" cap="flat" cmpd="sng" algn="ctr">
+                <a:solidFill>
+                  <a:schemeClr val="accent1">
+                    <a:shade val="15000"/>
+                  </a:schemeClr>
+                </a:solidFill>
+                <a:prstDash val="solid"/>
+                <a:miter lim="800000"/>
+              </a14:hiddenLine>
+            </a:ext>
+          </a:extLst>
+        </p:spPr>
+        <p:style>
+          <a:lnRef idx="2">
+            <a:schemeClr val="accent1">
+              <a:shade val="15000"/>
+            </a:schemeClr>
+          </a:lnRef>
+          <a:fillRef idx="1">
+            <a:schemeClr val="accent1"/>
+          </a:fillRef>
+          <a:effectRef idx="0">
+            <a:schemeClr val="accent1"/>
+          </a:effectRef>
+          <a:fontRef idx="minor">
+            <a:schemeClr val="lt1"/>
+          </a:fontRef>
+        </p:style>
+        <p:txBody>
+          <a:bodyPr rtlCol="0" anchor="ctr"/>
+          <a:lstStyle/>
+          <a:p>
+            <a:pPr algn="ctr"/>
+            <a:endParaRPr lang="en-US"/>
           </a:p>
         </p:txBody>
       </p:sp>
@@ -11936,6 +13970,62 @@
       </p:grpSpPr>
       <p:sp>
         <p:nvSpPr>
+          <p:cNvPr id="6" name="Body card">
+            <a:extLst>
+              <a:ext uri="{FF2B5EF4-FFF2-40B4-BE49-F238E27FC236}">
+                <a16:creationId xmlns:a16="http://schemas.microsoft.com/office/drawing/2014/main" id="{B5373BF0-14E3-0C8F-5CE8-377A28DD7039}"/>
+              </a:ext>
+            </a:extLst>
+          </p:cNvPr>
+          <p:cNvSpPr/>
+          <p:nvPr/>
+        </p:nvSpPr>
+        <p:spPr>
+          <a:xfrm>
+            <a:off x="635000" y="1676400"/>
+            <a:ext cx="10922000" cy="3263900"/>
+          </a:xfrm>
+          <a:prstGeom prst="roundRect">
+            <a:avLst>
+              <a:gd name="adj" fmla="val 3000"/>
+            </a:avLst>
+          </a:prstGeom>
+          <a:solidFill>
+            <a:srgbClr val="F2F6FC"/>
+          </a:solidFill>
+          <a:ln w="19050">
+            <a:solidFill>
+              <a:srgbClr val="4472C4"/>
+            </a:solidFill>
+          </a:ln>
+        </p:spPr>
+        <p:style>
+          <a:lnRef idx="2">
+            <a:schemeClr val="accent1">
+              <a:shade val="15000"/>
+            </a:schemeClr>
+          </a:lnRef>
+          <a:fillRef idx="1">
+            <a:schemeClr val="accent1"/>
+          </a:fillRef>
+          <a:effectRef idx="0">
+            <a:schemeClr val="accent1"/>
+          </a:effectRef>
+          <a:fontRef idx="minor">
+            <a:schemeClr val="lt1"/>
+          </a:fontRef>
+        </p:style>
+        <p:txBody>
+          <a:bodyPr rtlCol="0" anchor="ctr"/>
+          <a:lstStyle/>
+          <a:p>
+            <a:pPr algn="ctr"/>
+            <a:endParaRPr lang="en-US"/>
+          </a:p>
+        </p:txBody>
+      </p:sp>
+      <p:sp>
+        <p:nvSpPr>
           <p:cNvPr id="2" name="Title 1">
             <a:extLst>
               <a:ext uri="{FF2B5EF4-FFF2-40B4-BE49-F238E27FC236}">
@@ -11958,7 +14048,7 @@
             <a:r>
               <a:rPr lang="en-US" sz="4400" kern="1200" dirty="0">
                 <a:solidFill>
-                  <a:schemeClr val="tx1"/>
+                  <a:srgbClr val="1F3864"/>
                 </a:solidFill>
                 <a:latin typeface="+mj-lt"/>
                 <a:ea typeface="+mj-ea"/>
@@ -11967,10 +14057,18 @@
               <a:t>Ex2. </a:t>
             </a:r>
             <a:r>
-              <a:rPr lang="en-US" sz="4400" dirty="0"/>
+              <a:rPr lang="en-US" sz="4400" dirty="0">
+                <a:solidFill>
+                  <a:srgbClr val="1F3864"/>
+                </a:solidFill>
+              </a:rPr>
               <a:t>Construct a Boxplot</a:t>
             </a:r>
-            <a:endParaRPr lang="en-US" dirty="0"/>
+            <a:endParaRPr lang="en-US" dirty="0">
+              <a:solidFill>
+                <a:srgbClr val="1F3864"/>
+              </a:solidFill>
+            </a:endParaRPr>
           </a:p>
         </p:txBody>
       </p:sp>
@@ -12041,6 +14139,116 @@
               <a:rPr lang="en-US" dirty="0"/>
               <a:t>Compare the IQR with the range</a:t>
             </a:r>
+          </a:p>
+        </p:txBody>
+      </p:sp>
+      <p:sp>
+        <p:nvSpPr>
+          <p:cNvPr id="4" name="Slide number">
+            <a:extLst>
+              <a:ext uri="{FF2B5EF4-FFF2-40B4-BE49-F238E27FC236}">
+                <a16:creationId xmlns:a16="http://schemas.microsoft.com/office/drawing/2014/main" id="{CD9FE94F-8C6D-61A0-5A58-CC806BF1EAE9}"/>
+              </a:ext>
+            </a:extLst>
+          </p:cNvPr>
+          <p:cNvSpPr txBox="1"/>
+          <p:nvPr/>
+        </p:nvSpPr>
+        <p:spPr>
+          <a:xfrm>
+            <a:off x="11723488" y="6477000"/>
+            <a:ext cx="316112" cy="246221"/>
+          </a:xfrm>
+          <a:prstGeom prst="rect">
+            <a:avLst/>
+          </a:prstGeom>
+          <a:solidFill>
+            <a:srgbClr val="FFFFFF"/>
+          </a:solidFill>
+        </p:spPr>
+        <p:txBody>
+          <a:bodyPr vert="horz" wrap="none" rtlCol="0">
+            <a:spAutoFit/>
+          </a:bodyPr>
+          <a:lstStyle/>
+          <a:p>
+            <a:pPr algn="r"/>
+            <a:r>
+              <a:rPr lang="en-US" sz="1000">
+                <a:solidFill>
+                  <a:srgbClr val="808080"/>
+                </a:solidFill>
+              </a:rPr>
+              <a:t>29</a:t>
+            </a:r>
+          </a:p>
+        </p:txBody>
+      </p:sp>
+      <p:sp>
+        <p:nvSpPr>
+          <p:cNvPr id="5" name="Title rule">
+            <a:extLst>
+              <a:ext uri="{FF2B5EF4-FFF2-40B4-BE49-F238E27FC236}">
+                <a16:creationId xmlns:a16="http://schemas.microsoft.com/office/drawing/2014/main" id="{A56509F8-2582-ADAA-5966-6F55A540488E}"/>
+              </a:ext>
+            </a:extLst>
+          </p:cNvPr>
+          <p:cNvSpPr/>
+          <p:nvPr/>
+        </p:nvSpPr>
+        <p:spPr>
+          <a:xfrm>
+            <a:off x="838200" y="1600200"/>
+            <a:ext cx="10515600" cy="38100"/>
+          </a:xfrm>
+          <a:prstGeom prst="rect">
+            <a:avLst/>
+          </a:prstGeom>
+          <a:solidFill>
+            <a:srgbClr val="4472C4"/>
+          </a:solidFill>
+          <a:ln w="12700" cap="flat" cmpd="sng" algn="ctr">
+            <a:noFill/>
+            <a:prstDash val="solid"/>
+            <a:miter lim="800000"/>
+          </a:ln>
+          <a:effectLst/>
+          <a:extLst>
+            <a:ext uri="{91240B29-F687-4F45-9708-019B960494DF}">
+              <a14:hiddenLine xmlns:a14="http://schemas.microsoft.com/office/drawing/2010/main" w="12700" cap="flat" cmpd="sng" algn="ctr">
+                <a:solidFill>
+                  <a:schemeClr val="accent1">
+                    <a:shade val="15000"/>
+                  </a:schemeClr>
+                </a:solidFill>
+                <a:prstDash val="solid"/>
+                <a:miter lim="800000"/>
+              </a14:hiddenLine>
+            </a:ext>
+          </a:extLst>
+        </p:spPr>
+        <p:style>
+          <a:lnRef idx="2">
+            <a:schemeClr val="accent1">
+              <a:shade val="15000"/>
+            </a:schemeClr>
+          </a:lnRef>
+          <a:fillRef idx="1">
+            <a:schemeClr val="accent1"/>
+          </a:fillRef>
+          <a:effectRef idx="0">
+            <a:schemeClr val="accent1"/>
+          </a:effectRef>
+          <a:fontRef idx="minor">
+            <a:schemeClr val="lt1"/>
+          </a:fontRef>
+        </p:style>
+        <p:txBody>
+          <a:bodyPr rtlCol="0" anchor="ctr"/>
+          <a:lstStyle/>
+          <a:p>
+            <a:pPr algn="ctr"/>
+            <a:endParaRPr lang="en-US"/>
           </a:p>
         </p:txBody>
       </p:sp>
@@ -12096,7 +14304,11 @@
           <a:lstStyle/>
           <a:p>
             <a:r>
-              <a:rPr lang="en-US"/>
+              <a:rPr lang="en-US">
+                <a:solidFill>
+                  <a:srgbClr val="1F3864"/>
+                </a:solidFill>
+              </a:rPr>
               <a:t>Review: ten video games</a:t>
             </a:r>
           </a:p>
@@ -12335,6 +14547,48 @@
                 </a:solidFill>
               </a:rPr>
               <a:t> sales joined to Metacritic ratings, restricted to titles selling 5 million copies or more (127 games).</a:t>
+            </a:r>
+          </a:p>
+        </p:txBody>
+      </p:sp>
+      <p:sp>
+        <p:nvSpPr>
+          <p:cNvPr id="5" name="Slide number">
+            <a:extLst>
+              <a:ext uri="{FF2B5EF4-FFF2-40B4-BE49-F238E27FC236}">
+                <a16:creationId xmlns:a16="http://schemas.microsoft.com/office/drawing/2014/main" id="{DE23C9B1-8514-83A7-B360-E40965FBF597}"/>
+              </a:ext>
+            </a:extLst>
+          </p:cNvPr>
+          <p:cNvSpPr txBox="1"/>
+          <p:nvPr/>
+        </p:nvSpPr>
+        <p:spPr>
+          <a:xfrm>
+            <a:off x="11789211" y="6477000"/>
+            <a:ext cx="250389" cy="246221"/>
+          </a:xfrm>
+          <a:prstGeom prst="rect">
+            <a:avLst/>
+          </a:prstGeom>
+          <a:solidFill>
+            <a:srgbClr val="FFFFFF"/>
+          </a:solidFill>
+        </p:spPr>
+        <p:txBody>
+          <a:bodyPr vert="horz" wrap="none" rtlCol="0">
+            <a:spAutoFit/>
+          </a:bodyPr>
+          <a:lstStyle/>
+          <a:p>
+            <a:pPr algn="r"/>
+            <a:r>
+              <a:rPr lang="en-US" sz="1000">
+                <a:solidFill>
+                  <a:srgbClr val="808080"/>
+                </a:solidFill>
+              </a:rPr>
+              <a:t>3</a:t>
             </a:r>
           </a:p>
         </p:txBody>
@@ -12476,6 +14730,62 @@
       </p:grpSpPr>
       <p:sp>
         <p:nvSpPr>
+          <p:cNvPr id="6" name="Body card">
+            <a:extLst>
+              <a:ext uri="{FF2B5EF4-FFF2-40B4-BE49-F238E27FC236}">
+                <a16:creationId xmlns:a16="http://schemas.microsoft.com/office/drawing/2014/main" id="{D6441F0C-5663-C97A-1315-64251549A2F4}"/>
+              </a:ext>
+            </a:extLst>
+          </p:cNvPr>
+          <p:cNvSpPr/>
+          <p:nvPr/>
+        </p:nvSpPr>
+        <p:spPr>
+          <a:xfrm>
+            <a:off x="635000" y="1676400"/>
+            <a:ext cx="10922000" cy="4749800"/>
+          </a:xfrm>
+          <a:prstGeom prst="roundRect">
+            <a:avLst>
+              <a:gd name="adj" fmla="val 3000"/>
+            </a:avLst>
+          </a:prstGeom>
+          <a:solidFill>
+            <a:srgbClr val="F2F6FC"/>
+          </a:solidFill>
+          <a:ln w="19050">
+            <a:solidFill>
+              <a:srgbClr val="4472C4"/>
+            </a:solidFill>
+          </a:ln>
+        </p:spPr>
+        <p:style>
+          <a:lnRef idx="2">
+            <a:schemeClr val="accent1">
+              <a:shade val="15000"/>
+            </a:schemeClr>
+          </a:lnRef>
+          <a:fillRef idx="1">
+            <a:schemeClr val="accent1"/>
+          </a:fillRef>
+          <a:effectRef idx="0">
+            <a:schemeClr val="accent1"/>
+          </a:effectRef>
+          <a:fontRef idx="minor">
+            <a:schemeClr val="lt1"/>
+          </a:fontRef>
+        </p:style>
+        <p:txBody>
+          <a:bodyPr rtlCol="0" anchor="ctr"/>
+          <a:lstStyle/>
+          <a:p>
+            <a:pPr algn="ctr"/>
+            <a:endParaRPr lang="en-US"/>
+          </a:p>
+        </p:txBody>
+      </p:sp>
+      <p:sp>
+        <p:nvSpPr>
           <p:cNvPr id="2" name="Title 1">
             <a:extLst>
               <a:ext uri="{FF2B5EF4-FFF2-40B4-BE49-F238E27FC236}">
@@ -12496,15 +14806,23 @@
           <a:lstStyle/>
           <a:p>
             <a:r>
-              <a:rPr lang="en-US"/>
+              <a:rPr lang="en-US">
+                <a:solidFill>
+                  <a:srgbClr val="1F3864"/>
+                </a:solidFill>
+              </a:rPr>
               <a:t>Measures of Spread: Deviation</a:t>
             </a:r>
-            <a:endParaRPr lang="en-US" dirty="0"/>
+            <a:endParaRPr lang="en-US" dirty="0">
+              <a:solidFill>
+                <a:srgbClr val="1F3864"/>
+              </a:solidFill>
+            </a:endParaRPr>
           </a:p>
         </p:txBody>
       </p:sp>
-      <mc:AlternateContent xmlns:mc="http://schemas.openxmlformats.org/markup-compatibility/2006" xmlns:a14="http://schemas.microsoft.com/office/drawing/2010/main">
-        <mc:Choice Requires="a14">
+      <mc:AlternateContent xmlns:mc="http://schemas.openxmlformats.org/markup-compatibility/2006">
+        <mc:Choice xmlns:a14="http://schemas.microsoft.com/office/drawing/2010/main" Requires="a14">
           <p:sp>
             <p:nvSpPr>
               <p:cNvPr id="3" name="Content Placeholder 2">
@@ -12546,17 +14864,29 @@
                   <a:t> the data is based on </a:t>
                 </a:r>
                 <a:r>
-                  <a:rPr lang="en-US" b="1" dirty="0"/>
+                  <a:rPr lang="en-US" b="1" dirty="0">
+                    <a:solidFill>
+                      <a:srgbClr val="C00000"/>
+                    </a:solidFill>
+                  </a:rPr>
                   <a:t>deviations</a:t>
                 </a:r>
-                <a:endParaRPr lang="en-US" dirty="0"/>
+                <a:endParaRPr lang="en-US" dirty="0">
+                  <a:solidFill>
+                    <a:srgbClr val="C00000"/>
+                  </a:solidFill>
+                </a:endParaRPr>
               </a:p>
               <a:p>
                 <a:endParaRPr lang="en-US" dirty="0"/>
               </a:p>
               <a:p>
                 <a:r>
-                  <a:rPr lang="en-US" b="1" dirty="0"/>
+                  <a:rPr lang="en-US" b="1" dirty="0">
+                    <a:solidFill>
+                      <a:srgbClr val="C00000"/>
+                    </a:solidFill>
+                  </a:rPr>
                   <a:t>deviations</a:t>
                 </a:r>
                 <a:r>
@@ -12705,7 +15035,7 @@
             </p:txBody>
           </p:sp>
         </mc:Choice>
-        <mc:Fallback xmlns="">
+        <mc:Fallback>
           <p:sp>
             <p:nvSpPr>
               <p:cNvPr id="3" name="Content Placeholder 2">
@@ -12749,6 +15079,116 @@
           </p:sp>
         </mc:Fallback>
       </mc:AlternateContent>
+      <p:sp>
+        <p:nvSpPr>
+          <p:cNvPr id="4" name="Slide number">
+            <a:extLst>
+              <a:ext uri="{FF2B5EF4-FFF2-40B4-BE49-F238E27FC236}">
+                <a16:creationId xmlns:a16="http://schemas.microsoft.com/office/drawing/2014/main" id="{48459415-56DA-C5A0-0A0D-D9C94591E830}"/>
+              </a:ext>
+            </a:extLst>
+          </p:cNvPr>
+          <p:cNvSpPr txBox="1"/>
+          <p:nvPr/>
+        </p:nvSpPr>
+        <p:spPr>
+          <a:xfrm>
+            <a:off x="11723488" y="6477000"/>
+            <a:ext cx="316112" cy="246221"/>
+          </a:xfrm>
+          <a:prstGeom prst="rect">
+            <a:avLst/>
+          </a:prstGeom>
+          <a:solidFill>
+            <a:srgbClr val="FFFFFF"/>
+          </a:solidFill>
+        </p:spPr>
+        <p:txBody>
+          <a:bodyPr vert="horz" wrap="none" rtlCol="0">
+            <a:spAutoFit/>
+          </a:bodyPr>
+          <a:lstStyle/>
+          <a:p>
+            <a:pPr algn="r"/>
+            <a:r>
+              <a:rPr lang="en-US" sz="1000">
+                <a:solidFill>
+                  <a:srgbClr val="808080"/>
+                </a:solidFill>
+              </a:rPr>
+              <a:t>30</a:t>
+            </a:r>
+          </a:p>
+        </p:txBody>
+      </p:sp>
+      <p:sp>
+        <p:nvSpPr>
+          <p:cNvPr id="5" name="Title rule">
+            <a:extLst>
+              <a:ext uri="{FF2B5EF4-FFF2-40B4-BE49-F238E27FC236}">
+                <a16:creationId xmlns:a16="http://schemas.microsoft.com/office/drawing/2014/main" id="{F62DD0DD-6CDE-AD93-910D-D0C308E4FF64}"/>
+              </a:ext>
+            </a:extLst>
+          </p:cNvPr>
+          <p:cNvSpPr/>
+          <p:nvPr/>
+        </p:nvSpPr>
+        <p:spPr>
+          <a:xfrm>
+            <a:off x="838200" y="1600200"/>
+            <a:ext cx="10515600" cy="38100"/>
+          </a:xfrm>
+          <a:prstGeom prst="rect">
+            <a:avLst/>
+          </a:prstGeom>
+          <a:solidFill>
+            <a:srgbClr val="4472C4"/>
+          </a:solidFill>
+          <a:ln w="12700" cap="flat" cmpd="sng" algn="ctr">
+            <a:noFill/>
+            <a:prstDash val="solid"/>
+            <a:miter lim="800000"/>
+          </a:ln>
+          <a:effectLst/>
+          <a:extLst>
+            <a:ext uri="{91240B29-F687-4F45-9708-019B960494DF}">
+              <a14:hiddenLine xmlns:a14="http://schemas.microsoft.com/office/drawing/2010/main" w="12700" cap="flat" cmpd="sng" algn="ctr">
+                <a:solidFill>
+                  <a:schemeClr val="accent1">
+                    <a:shade val="15000"/>
+                  </a:schemeClr>
+                </a:solidFill>
+                <a:prstDash val="solid"/>
+                <a:miter lim="800000"/>
+              </a14:hiddenLine>
+            </a:ext>
+          </a:extLst>
+        </p:spPr>
+        <p:style>
+          <a:lnRef idx="2">
+            <a:schemeClr val="accent1">
+              <a:shade val="15000"/>
+            </a:schemeClr>
+          </a:lnRef>
+          <a:fillRef idx="1">
+            <a:schemeClr val="accent1"/>
+          </a:fillRef>
+          <a:effectRef idx="0">
+            <a:schemeClr val="accent1"/>
+          </a:effectRef>
+          <a:fontRef idx="minor">
+            <a:schemeClr val="lt1"/>
+          </a:fontRef>
+        </p:style>
+        <p:txBody>
+          <a:bodyPr rtlCol="0" anchor="ctr"/>
+          <a:lstStyle/>
+          <a:p>
+            <a:pPr algn="ctr"/>
+            <a:endParaRPr lang="en-US"/>
+          </a:p>
+        </p:txBody>
+      </p:sp>
     </p:spTree>
     <p:extLst>
       <p:ext uri="{BB962C8B-B14F-4D97-AF65-F5344CB8AC3E}">
@@ -13332,6 +15772,48 @@
           </p:sp>
         </mc:Fallback>
       </mc:AlternateContent>
+      <p:sp>
+        <p:nvSpPr>
+          <p:cNvPr id="2" name="Slide number">
+            <a:extLst>
+              <a:ext uri="{FF2B5EF4-FFF2-40B4-BE49-F238E27FC236}">
+                <a16:creationId xmlns:a16="http://schemas.microsoft.com/office/drawing/2014/main" id="{B9EA5AA7-13ED-1755-C52C-28ADD124044E}"/>
+              </a:ext>
+            </a:extLst>
+          </p:cNvPr>
+          <p:cNvSpPr txBox="1"/>
+          <p:nvPr/>
+        </p:nvSpPr>
+        <p:spPr>
+          <a:xfrm>
+            <a:off x="11723488" y="6477000"/>
+            <a:ext cx="316112" cy="246221"/>
+          </a:xfrm>
+          <a:prstGeom prst="rect">
+            <a:avLst/>
+          </a:prstGeom>
+          <a:solidFill>
+            <a:srgbClr val="FFFFFF"/>
+          </a:solidFill>
+        </p:spPr>
+        <p:txBody>
+          <a:bodyPr vert="horz" wrap="none" rtlCol="0">
+            <a:spAutoFit/>
+          </a:bodyPr>
+          <a:lstStyle/>
+          <a:p>
+            <a:pPr algn="r"/>
+            <a:r>
+              <a:rPr lang="en-US" sz="1000">
+                <a:solidFill>
+                  <a:srgbClr val="808080"/>
+                </a:solidFill>
+              </a:rPr>
+              <a:t>31</a:t>
+            </a:r>
+          </a:p>
+        </p:txBody>
+      </p:sp>
     </p:spTree>
     <p:extLst>
       <p:ext uri="{BB962C8B-B14F-4D97-AF65-F5344CB8AC3E}">
@@ -13364,6 +15846,62 @@
       </p:grpSpPr>
       <p:sp>
         <p:nvSpPr>
+          <p:cNvPr id="6" name="Body card">
+            <a:extLst>
+              <a:ext uri="{FF2B5EF4-FFF2-40B4-BE49-F238E27FC236}">
+                <a16:creationId xmlns:a16="http://schemas.microsoft.com/office/drawing/2014/main" id="{D600EDA2-4870-D849-328B-26FC00312278}"/>
+              </a:ext>
+            </a:extLst>
+          </p:cNvPr>
+          <p:cNvSpPr/>
+          <p:nvPr/>
+        </p:nvSpPr>
+        <p:spPr>
+          <a:xfrm>
+            <a:off x="635000" y="1676400"/>
+            <a:ext cx="10922000" cy="4368800"/>
+          </a:xfrm>
+          <a:prstGeom prst="roundRect">
+            <a:avLst>
+              <a:gd name="adj" fmla="val 3000"/>
+            </a:avLst>
+          </a:prstGeom>
+          <a:solidFill>
+            <a:srgbClr val="F2F6FC"/>
+          </a:solidFill>
+          <a:ln w="19050">
+            <a:solidFill>
+              <a:srgbClr val="4472C4"/>
+            </a:solidFill>
+          </a:ln>
+        </p:spPr>
+        <p:style>
+          <a:lnRef idx="2">
+            <a:schemeClr val="accent1">
+              <a:shade val="15000"/>
+            </a:schemeClr>
+          </a:lnRef>
+          <a:fillRef idx="1">
+            <a:schemeClr val="accent1"/>
+          </a:fillRef>
+          <a:effectRef idx="0">
+            <a:schemeClr val="accent1"/>
+          </a:effectRef>
+          <a:fontRef idx="minor">
+            <a:schemeClr val="lt1"/>
+          </a:fontRef>
+        </p:style>
+        <p:txBody>
+          <a:bodyPr rtlCol="0" anchor="ctr"/>
+          <a:lstStyle/>
+          <a:p>
+            <a:pPr algn="ctr"/>
+            <a:endParaRPr lang="en-US"/>
+          </a:p>
+        </p:txBody>
+      </p:sp>
+      <p:sp>
+        <p:nvSpPr>
           <p:cNvPr id="2" name="Title 1">
             <a:extLst>
               <a:ext uri="{FF2B5EF4-FFF2-40B4-BE49-F238E27FC236}">
@@ -13384,14 +15922,18 @@
           <a:lstStyle/>
           <a:p>
             <a:r>
-              <a:rPr lang="en-US" dirty="0"/>
+              <a:rPr lang="en-US" dirty="0">
+                <a:solidFill>
+                  <a:srgbClr val="1F3864"/>
+                </a:solidFill>
+              </a:rPr>
               <a:t>Measures of Spread: Variance</a:t>
             </a:r>
           </a:p>
         </p:txBody>
       </p:sp>
-      <mc:AlternateContent xmlns:mc="http://schemas.openxmlformats.org/markup-compatibility/2006" xmlns:a14="http://schemas.microsoft.com/office/drawing/2010/main">
-        <mc:Choice Requires="a14">
+      <mc:AlternateContent xmlns:mc="http://schemas.openxmlformats.org/markup-compatibility/2006">
+        <mc:Choice xmlns:a14="http://schemas.microsoft.com/office/drawing/2010/main" Requires="a14">
           <p:sp>
             <p:nvSpPr>
               <p:cNvPr id="3" name="Content Placeholder 2">
@@ -13545,7 +16087,11 @@
                   <a:t>We typically use either the </a:t>
                 </a:r>
                 <a:r>
-                  <a:rPr lang="en-US" b="1" dirty="0"/>
+                  <a:rPr lang="en-US" b="1" dirty="0">
+                    <a:solidFill>
+                      <a:srgbClr val="C00000"/>
+                    </a:solidFill>
+                  </a:rPr>
                   <a:t>squared deviations</a:t>
                 </a:r>
                 <a:r>
@@ -13553,7 +16099,11 @@
                   <a:t> or their </a:t>
                 </a:r>
                 <a:r>
-                  <a:rPr lang="en-US" b="1" dirty="0"/>
+                  <a:rPr lang="en-US" b="1" dirty="0">
+                    <a:solidFill>
+                      <a:srgbClr val="C00000"/>
+                    </a:solidFill>
+                  </a:rPr>
                   <a:t>absolute value</a:t>
                 </a:r>
               </a:p>
@@ -13693,7 +16243,11 @@
                   <a:t>The </a:t>
                 </a:r>
                 <a:r>
-                  <a:rPr lang="en-US" b="1" dirty="0"/>
+                  <a:rPr lang="en-US" b="1" dirty="0">
+                    <a:solidFill>
+                      <a:srgbClr val="C00000"/>
+                    </a:solidFill>
+                  </a:rPr>
                   <a:t>Variance </a:t>
                 </a:r>
                 <a:r>
@@ -14038,7 +16592,7 @@
             </p:txBody>
           </p:sp>
         </mc:Choice>
-        <mc:Fallback xmlns="">
+        <mc:Fallback>
           <p:sp>
             <p:nvSpPr>
               <p:cNvPr id="3" name="Content Placeholder 2">
@@ -14078,6 +16632,116 @@
           </p:sp>
         </mc:Fallback>
       </mc:AlternateContent>
+      <p:sp>
+        <p:nvSpPr>
+          <p:cNvPr id="4" name="Slide number">
+            <a:extLst>
+              <a:ext uri="{FF2B5EF4-FFF2-40B4-BE49-F238E27FC236}">
+                <a16:creationId xmlns:a16="http://schemas.microsoft.com/office/drawing/2014/main" id="{00CB238D-419A-B497-5008-44959F96C5A3}"/>
+              </a:ext>
+            </a:extLst>
+          </p:cNvPr>
+          <p:cNvSpPr txBox="1"/>
+          <p:nvPr/>
+        </p:nvSpPr>
+        <p:spPr>
+          <a:xfrm>
+            <a:off x="11723488" y="6477000"/>
+            <a:ext cx="316112" cy="246221"/>
+          </a:xfrm>
+          <a:prstGeom prst="rect">
+            <a:avLst/>
+          </a:prstGeom>
+          <a:solidFill>
+            <a:srgbClr val="FFFFFF"/>
+          </a:solidFill>
+        </p:spPr>
+        <p:txBody>
+          <a:bodyPr vert="horz" wrap="none" rtlCol="0">
+            <a:spAutoFit/>
+          </a:bodyPr>
+          <a:lstStyle/>
+          <a:p>
+            <a:pPr algn="r"/>
+            <a:r>
+              <a:rPr lang="en-US" sz="1000">
+                <a:solidFill>
+                  <a:srgbClr val="808080"/>
+                </a:solidFill>
+              </a:rPr>
+              <a:t>32</a:t>
+            </a:r>
+          </a:p>
+        </p:txBody>
+      </p:sp>
+      <p:sp>
+        <p:nvSpPr>
+          <p:cNvPr id="5" name="Title rule">
+            <a:extLst>
+              <a:ext uri="{FF2B5EF4-FFF2-40B4-BE49-F238E27FC236}">
+                <a16:creationId xmlns:a16="http://schemas.microsoft.com/office/drawing/2014/main" id="{634162C4-DF46-14FE-BC00-82B9FF16B1D8}"/>
+              </a:ext>
+            </a:extLst>
+          </p:cNvPr>
+          <p:cNvSpPr/>
+          <p:nvPr/>
+        </p:nvSpPr>
+        <p:spPr>
+          <a:xfrm>
+            <a:off x="838200" y="1600200"/>
+            <a:ext cx="10515600" cy="38100"/>
+          </a:xfrm>
+          <a:prstGeom prst="rect">
+            <a:avLst/>
+          </a:prstGeom>
+          <a:solidFill>
+            <a:srgbClr val="4472C4"/>
+          </a:solidFill>
+          <a:ln w="12700" cap="flat" cmpd="sng" algn="ctr">
+            <a:noFill/>
+            <a:prstDash val="solid"/>
+            <a:miter lim="800000"/>
+          </a:ln>
+          <a:effectLst/>
+          <a:extLst>
+            <a:ext uri="{91240B29-F687-4F45-9708-019B960494DF}">
+              <a14:hiddenLine xmlns:a14="http://schemas.microsoft.com/office/drawing/2010/main" w="12700" cap="flat" cmpd="sng" algn="ctr">
+                <a:solidFill>
+                  <a:schemeClr val="accent1">
+                    <a:shade val="15000"/>
+                  </a:schemeClr>
+                </a:solidFill>
+                <a:prstDash val="solid"/>
+                <a:miter lim="800000"/>
+              </a14:hiddenLine>
+            </a:ext>
+          </a:extLst>
+        </p:spPr>
+        <p:style>
+          <a:lnRef idx="2">
+            <a:schemeClr val="accent1">
+              <a:shade val="15000"/>
+            </a:schemeClr>
+          </a:lnRef>
+          <a:fillRef idx="1">
+            <a:schemeClr val="accent1"/>
+          </a:fillRef>
+          <a:effectRef idx="0">
+            <a:schemeClr val="accent1"/>
+          </a:effectRef>
+          <a:fontRef idx="minor">
+            <a:schemeClr val="lt1"/>
+          </a:fontRef>
+        </p:style>
+        <p:txBody>
+          <a:bodyPr rtlCol="0" anchor="ctr"/>
+          <a:lstStyle/>
+          <a:p>
+            <a:pPr algn="ctr"/>
+            <a:endParaRPr lang="en-US"/>
+          </a:p>
+        </p:txBody>
+      </p:sp>
     </p:spTree>
     <p:extLst>
       <p:ext uri="{BB962C8B-B14F-4D97-AF65-F5344CB8AC3E}">
@@ -14110,6 +16774,62 @@
       </p:grpSpPr>
       <p:sp>
         <p:nvSpPr>
+          <p:cNvPr id="5" name="Body card">
+            <a:extLst>
+              <a:ext uri="{FF2B5EF4-FFF2-40B4-BE49-F238E27FC236}">
+                <a16:creationId xmlns:a16="http://schemas.microsoft.com/office/drawing/2014/main" id="{0B840953-89A8-DB92-995F-75AD32DCED89}"/>
+              </a:ext>
+            </a:extLst>
+          </p:cNvPr>
+          <p:cNvSpPr/>
+          <p:nvPr/>
+        </p:nvSpPr>
+        <p:spPr>
+          <a:xfrm>
+            <a:off x="635000" y="1397000"/>
+            <a:ext cx="10922000" cy="5029200"/>
+          </a:xfrm>
+          <a:prstGeom prst="roundRect">
+            <a:avLst>
+              <a:gd name="adj" fmla="val 3000"/>
+            </a:avLst>
+          </a:prstGeom>
+          <a:solidFill>
+            <a:srgbClr val="F2F6FC"/>
+          </a:solidFill>
+          <a:ln w="19050">
+            <a:solidFill>
+              <a:srgbClr val="4472C4"/>
+            </a:solidFill>
+          </a:ln>
+        </p:spPr>
+        <p:style>
+          <a:lnRef idx="2">
+            <a:schemeClr val="accent1">
+              <a:shade val="15000"/>
+            </a:schemeClr>
+          </a:lnRef>
+          <a:fillRef idx="1">
+            <a:schemeClr val="accent1"/>
+          </a:fillRef>
+          <a:effectRef idx="0">
+            <a:schemeClr val="accent1"/>
+          </a:effectRef>
+          <a:fontRef idx="minor">
+            <a:schemeClr val="lt1"/>
+          </a:fontRef>
+        </p:style>
+        <p:txBody>
+          <a:bodyPr rtlCol="0" anchor="ctr"/>
+          <a:lstStyle/>
+          <a:p>
+            <a:pPr algn="ctr"/>
+            <a:endParaRPr lang="en-US"/>
+          </a:p>
+        </p:txBody>
+      </p:sp>
+      <p:sp>
+        <p:nvSpPr>
           <p:cNvPr id="2" name="Title 1">
             <a:extLst>
               <a:ext uri="{FF2B5EF4-FFF2-40B4-BE49-F238E27FC236}">
@@ -14135,14 +16855,18 @@
           <a:lstStyle/>
           <a:p>
             <a:r>
-              <a:rPr lang="en-US" dirty="0"/>
+              <a:rPr lang="en-US" dirty="0">
+                <a:solidFill>
+                  <a:srgbClr val="1F3864"/>
+                </a:solidFill>
+              </a:rPr>
               <a:t>Measures of Spread: Standard Deviation</a:t>
             </a:r>
           </a:p>
         </p:txBody>
       </p:sp>
-      <mc:AlternateContent xmlns:mc="http://schemas.openxmlformats.org/markup-compatibility/2006" xmlns:a14="http://schemas.microsoft.com/office/drawing/2010/main">
-        <mc:Choice Requires="a14">
+      <mc:AlternateContent xmlns:mc="http://schemas.openxmlformats.org/markup-compatibility/2006">
+        <mc:Choice xmlns:a14="http://schemas.microsoft.com/office/drawing/2010/main" Requires="a14">
           <p:sp>
             <p:nvSpPr>
               <p:cNvPr id="3" name="Content Placeholder 2">
@@ -14176,12 +16900,20 @@
                   <a:t>Since the variance uses the squared deviation, we usually take its square root called the </a:t>
                 </a:r>
                 <a:r>
-                  <a:rPr lang="en-US" b="1" dirty="0"/>
+                  <a:rPr lang="en-US" b="1" dirty="0">
+                    <a:solidFill>
+                      <a:srgbClr val="C00000"/>
+                    </a:solidFill>
+                  </a:rPr>
                   <a:t>standard deviation</a:t>
                 </a:r>
               </a:p>
               <a:p>
-                <a:endParaRPr lang="en-US" b="1" dirty="0"/>
+                <a:endParaRPr lang="en-US" b="1" dirty="0">
+                  <a:solidFill>
+                    <a:srgbClr val="C00000"/>
+                  </a:solidFill>
+                </a:endParaRPr>
               </a:p>
               <a:p>
                 <a:pPr marL="914400" lvl="2" indent="0">
@@ -14505,7 +17237,7 @@
             </p:txBody>
           </p:sp>
         </mc:Choice>
-        <mc:Fallback xmlns="">
+        <mc:Fallback>
           <p:sp>
             <p:nvSpPr>
               <p:cNvPr id="3" name="Content Placeholder 2">
@@ -14549,6 +17281,48 @@
           </p:sp>
         </mc:Fallback>
       </mc:AlternateContent>
+      <p:sp>
+        <p:nvSpPr>
+          <p:cNvPr id="4" name="Slide number">
+            <a:extLst>
+              <a:ext uri="{FF2B5EF4-FFF2-40B4-BE49-F238E27FC236}">
+                <a16:creationId xmlns:a16="http://schemas.microsoft.com/office/drawing/2014/main" id="{841D5395-47BC-27F6-60DC-2244753117BE}"/>
+              </a:ext>
+            </a:extLst>
+          </p:cNvPr>
+          <p:cNvSpPr txBox="1"/>
+          <p:nvPr/>
+        </p:nvSpPr>
+        <p:spPr>
+          <a:xfrm>
+            <a:off x="11723488" y="6477000"/>
+            <a:ext cx="316112" cy="246221"/>
+          </a:xfrm>
+          <a:prstGeom prst="rect">
+            <a:avLst/>
+          </a:prstGeom>
+          <a:solidFill>
+            <a:srgbClr val="FFFFFF"/>
+          </a:solidFill>
+        </p:spPr>
+        <p:txBody>
+          <a:bodyPr vert="horz" wrap="none" rtlCol="0">
+            <a:spAutoFit/>
+          </a:bodyPr>
+          <a:lstStyle/>
+          <a:p>
+            <a:pPr algn="r"/>
+            <a:r>
+              <a:rPr lang="en-US" sz="1000">
+                <a:solidFill>
+                  <a:srgbClr val="808080"/>
+                </a:solidFill>
+              </a:rPr>
+              <a:t>33</a:t>
+            </a:r>
+          </a:p>
+        </p:txBody>
+      </p:sp>
     </p:spTree>
     <p:extLst>
       <p:ext uri="{BB962C8B-B14F-4D97-AF65-F5344CB8AC3E}">
@@ -14579,8 +17353,64 @@
           <a:chExt cx="0" cy="0"/>
         </a:xfrm>
       </p:grpSpPr>
-      <mc:AlternateContent xmlns:mc="http://schemas.openxmlformats.org/markup-compatibility/2006" xmlns:a14="http://schemas.microsoft.com/office/drawing/2010/main">
-        <mc:Choice Requires="a14">
+      <p:sp>
+        <p:nvSpPr>
+          <p:cNvPr id="6" name="Body card">
+            <a:extLst>
+              <a:ext uri="{FF2B5EF4-FFF2-40B4-BE49-F238E27FC236}">
+                <a16:creationId xmlns:a16="http://schemas.microsoft.com/office/drawing/2014/main" id="{F5C654FF-C1B2-3D28-217E-9923A2DCDE9F}"/>
+              </a:ext>
+            </a:extLst>
+          </p:cNvPr>
+          <p:cNvSpPr/>
+          <p:nvPr/>
+        </p:nvSpPr>
+        <p:spPr>
+          <a:xfrm>
+            <a:off x="635000" y="1676400"/>
+            <a:ext cx="10922000" cy="4229100"/>
+          </a:xfrm>
+          <a:prstGeom prst="roundRect">
+            <a:avLst>
+              <a:gd name="adj" fmla="val 3000"/>
+            </a:avLst>
+          </a:prstGeom>
+          <a:solidFill>
+            <a:srgbClr val="F2F6FC"/>
+          </a:solidFill>
+          <a:ln w="19050">
+            <a:solidFill>
+              <a:srgbClr val="4472C4"/>
+            </a:solidFill>
+          </a:ln>
+        </p:spPr>
+        <p:style>
+          <a:lnRef idx="2">
+            <a:schemeClr val="accent1">
+              <a:shade val="15000"/>
+            </a:schemeClr>
+          </a:lnRef>
+          <a:fillRef idx="1">
+            <a:schemeClr val="accent1"/>
+          </a:fillRef>
+          <a:effectRef idx="0">
+            <a:schemeClr val="accent1"/>
+          </a:effectRef>
+          <a:fontRef idx="minor">
+            <a:schemeClr val="lt1"/>
+          </a:fontRef>
+        </p:style>
+        <p:txBody>
+          <a:bodyPr rtlCol="0" anchor="ctr"/>
+          <a:lstStyle/>
+          <a:p>
+            <a:pPr algn="ctr"/>
+            <a:endParaRPr lang="en-US"/>
+          </a:p>
+        </p:txBody>
+      </p:sp>
+      <mc:AlternateContent xmlns:mc="http://schemas.openxmlformats.org/markup-compatibility/2006">
+        <mc:Choice xmlns:a14="http://schemas.microsoft.com/office/drawing/2010/main" Requires="a14">
           <p:sp>
             <p:nvSpPr>
               <p:cNvPr id="2" name="Title 1">
@@ -14603,19 +17433,29 @@
               <a:lstStyle/>
               <a:p>
                 <a:r>
-                  <a:rPr lang="en-US" dirty="0"/>
+                  <a:rPr lang="en-US" dirty="0">
+                    <a:solidFill>
+                      <a:srgbClr val="1F3864"/>
+                    </a:solidFill>
+                  </a:rPr>
                   <a:t>Why divide by </a:t>
                 </a:r>
                 <a14:m>
                   <m:oMath xmlns:m="http://schemas.openxmlformats.org/officeDocument/2006/math">
                     <m:r>
                       <a:rPr lang="en-US" b="0" i="1" smtClean="0">
+                        <a:solidFill>
+                          <a:srgbClr val="1F3864"/>
+                        </a:solidFill>
                         <a:latin typeface="Cambria Math" panose="02040503050406030204" pitchFamily="18" charset="0"/>
                       </a:rPr>
                       <m:t>𝑛</m:t>
                     </m:r>
                     <m:r>
                       <a:rPr lang="en-US" b="0" i="1" smtClean="0">
+                        <a:solidFill>
+                          <a:srgbClr val="1F3864"/>
+                        </a:solidFill>
                         <a:latin typeface="Cambria Math" panose="02040503050406030204" pitchFamily="18" charset="0"/>
                       </a:rPr>
                       <m:t>−1</m:t>
@@ -14623,14 +17463,18 @@
                   </m:oMath>
                 </a14:m>
                 <a:r>
-                  <a:rPr lang="en-US" dirty="0"/>
+                  <a:rPr lang="en-US" dirty="0">
+                    <a:solidFill>
+                      <a:srgbClr val="1F3864"/>
+                    </a:solidFill>
+                  </a:rPr>
                   <a:t> ?</a:t>
                 </a:r>
               </a:p>
             </p:txBody>
           </p:sp>
         </mc:Choice>
-        <mc:Fallback xmlns="">
+        <mc:Fallback>
           <p:sp>
             <p:nvSpPr>
               <p:cNvPr id="2" name="Title 1">
@@ -14913,6 +17757,116 @@
           </p:sp>
         </mc:Fallback>
       </mc:AlternateContent>
+      <p:sp>
+        <p:nvSpPr>
+          <p:cNvPr id="4" name="Slide number">
+            <a:extLst>
+              <a:ext uri="{FF2B5EF4-FFF2-40B4-BE49-F238E27FC236}">
+                <a16:creationId xmlns:a16="http://schemas.microsoft.com/office/drawing/2014/main" id="{1A9C7E72-AD16-DF59-248A-180BFB9E6F32}"/>
+              </a:ext>
+            </a:extLst>
+          </p:cNvPr>
+          <p:cNvSpPr txBox="1"/>
+          <p:nvPr/>
+        </p:nvSpPr>
+        <p:spPr>
+          <a:xfrm>
+            <a:off x="11723488" y="6477000"/>
+            <a:ext cx="316112" cy="246221"/>
+          </a:xfrm>
+          <a:prstGeom prst="rect">
+            <a:avLst/>
+          </a:prstGeom>
+          <a:solidFill>
+            <a:srgbClr val="FFFFFF"/>
+          </a:solidFill>
+        </p:spPr>
+        <p:txBody>
+          <a:bodyPr vert="horz" wrap="none" rtlCol="0">
+            <a:spAutoFit/>
+          </a:bodyPr>
+          <a:lstStyle/>
+          <a:p>
+            <a:pPr algn="r"/>
+            <a:r>
+              <a:rPr lang="en-US" sz="1000">
+                <a:solidFill>
+                  <a:srgbClr val="808080"/>
+                </a:solidFill>
+              </a:rPr>
+              <a:t>34</a:t>
+            </a:r>
+          </a:p>
+        </p:txBody>
+      </p:sp>
+      <p:sp>
+        <p:nvSpPr>
+          <p:cNvPr id="5" name="Title rule">
+            <a:extLst>
+              <a:ext uri="{FF2B5EF4-FFF2-40B4-BE49-F238E27FC236}">
+                <a16:creationId xmlns:a16="http://schemas.microsoft.com/office/drawing/2014/main" id="{E9673873-2725-1205-38FE-C01569CCA26B}"/>
+              </a:ext>
+            </a:extLst>
+          </p:cNvPr>
+          <p:cNvSpPr/>
+          <p:nvPr/>
+        </p:nvSpPr>
+        <p:spPr>
+          <a:xfrm>
+            <a:off x="838200" y="1600200"/>
+            <a:ext cx="10515600" cy="38100"/>
+          </a:xfrm>
+          <a:prstGeom prst="rect">
+            <a:avLst/>
+          </a:prstGeom>
+          <a:solidFill>
+            <a:srgbClr val="4472C4"/>
+          </a:solidFill>
+          <a:ln w="12700" cap="flat" cmpd="sng" algn="ctr">
+            <a:noFill/>
+            <a:prstDash val="solid"/>
+            <a:miter lim="800000"/>
+          </a:ln>
+          <a:effectLst/>
+          <a:extLst>
+            <a:ext uri="{91240B29-F687-4F45-9708-019B960494DF}">
+              <a14:hiddenLine xmlns:a14="http://schemas.microsoft.com/office/drawing/2010/main" w="12700" cap="flat" cmpd="sng" algn="ctr">
+                <a:solidFill>
+                  <a:schemeClr val="accent1">
+                    <a:shade val="15000"/>
+                  </a:schemeClr>
+                </a:solidFill>
+                <a:prstDash val="solid"/>
+                <a:miter lim="800000"/>
+              </a14:hiddenLine>
+            </a:ext>
+          </a:extLst>
+        </p:spPr>
+        <p:style>
+          <a:lnRef idx="2">
+            <a:schemeClr val="accent1">
+              <a:shade val="15000"/>
+            </a:schemeClr>
+          </a:lnRef>
+          <a:fillRef idx="1">
+            <a:schemeClr val="accent1"/>
+          </a:fillRef>
+          <a:effectRef idx="0">
+            <a:schemeClr val="accent1"/>
+          </a:effectRef>
+          <a:fontRef idx="minor">
+            <a:schemeClr val="lt1"/>
+          </a:fontRef>
+        </p:style>
+        <p:txBody>
+          <a:bodyPr rtlCol="0" anchor="ctr"/>
+          <a:lstStyle/>
+          <a:p>
+            <a:pPr algn="ctr"/>
+            <a:endParaRPr lang="en-US"/>
+          </a:p>
+        </p:txBody>
+      </p:sp>
     </p:spTree>
     <p:extLst>
       <p:ext uri="{BB962C8B-B14F-4D97-AF65-F5344CB8AC3E}">
@@ -15063,7 +18017,7 @@
             <a:r>
               <a:rPr lang="en-US" sz="4000" kern="1200">
                 <a:solidFill>
-                  <a:schemeClr val="tx1"/>
+                  <a:srgbClr val="1F3864"/>
                 </a:solidFill>
                 <a:latin typeface="+mj-lt"/>
                 <a:ea typeface="+mj-ea"/>
@@ -15073,7 +18027,7 @@
             </a:r>
             <a:endParaRPr lang="en-US" sz="4000" kern="1200" dirty="0">
               <a:solidFill>
-                <a:schemeClr val="tx1"/>
+                <a:srgbClr val="1F3864"/>
               </a:solidFill>
               <a:latin typeface="+mj-lt"/>
               <a:ea typeface="+mj-ea"/>
@@ -15750,6 +18704,48 @@
           </a:extLst>
         </p:spPr>
       </p:pic>
+      <p:sp>
+        <p:nvSpPr>
+          <p:cNvPr id="3" name="Slide number">
+            <a:extLst>
+              <a:ext uri="{FF2B5EF4-FFF2-40B4-BE49-F238E27FC236}">
+                <a16:creationId xmlns:a16="http://schemas.microsoft.com/office/drawing/2014/main" id="{CDB1AEFA-49B6-098B-1F32-8EC0CC1D3363}"/>
+              </a:ext>
+            </a:extLst>
+          </p:cNvPr>
+          <p:cNvSpPr txBox="1"/>
+          <p:nvPr/>
+        </p:nvSpPr>
+        <p:spPr>
+          <a:xfrm>
+            <a:off x="11723488" y="6477000"/>
+            <a:ext cx="316112" cy="246221"/>
+          </a:xfrm>
+          <a:prstGeom prst="rect">
+            <a:avLst/>
+          </a:prstGeom>
+          <a:solidFill>
+            <a:srgbClr val="FFFFFF"/>
+          </a:solidFill>
+        </p:spPr>
+        <p:txBody>
+          <a:bodyPr vert="horz" wrap="none" rtlCol="0">
+            <a:spAutoFit/>
+          </a:bodyPr>
+          <a:lstStyle/>
+          <a:p>
+            <a:pPr algn="r"/>
+            <a:r>
+              <a:rPr lang="en-US" sz="1000">
+                <a:solidFill>
+                  <a:srgbClr val="808080"/>
+                </a:solidFill>
+              </a:rPr>
+              <a:t>35</a:t>
+            </a:r>
+          </a:p>
+        </p:txBody>
+      </p:sp>
     </p:spTree>
     <p:extLst>
       <p:ext uri="{BB962C8B-B14F-4D97-AF65-F5344CB8AC3E}">
@@ -15782,6 +18778,62 @@
       </p:grpSpPr>
       <p:sp>
         <p:nvSpPr>
+          <p:cNvPr id="6" name="Body card">
+            <a:extLst>
+              <a:ext uri="{FF2B5EF4-FFF2-40B4-BE49-F238E27FC236}">
+                <a16:creationId xmlns:a16="http://schemas.microsoft.com/office/drawing/2014/main" id="{C82B21D3-8A17-AE06-2004-FF24D89726EA}"/>
+              </a:ext>
+            </a:extLst>
+          </p:cNvPr>
+          <p:cNvSpPr/>
+          <p:nvPr/>
+        </p:nvSpPr>
+        <p:spPr>
+          <a:xfrm>
+            <a:off x="635000" y="1676400"/>
+            <a:ext cx="10922000" cy="2540000"/>
+          </a:xfrm>
+          <a:prstGeom prst="roundRect">
+            <a:avLst>
+              <a:gd name="adj" fmla="val 3000"/>
+            </a:avLst>
+          </a:prstGeom>
+          <a:solidFill>
+            <a:srgbClr val="F2F6FC"/>
+          </a:solidFill>
+          <a:ln w="19050">
+            <a:solidFill>
+              <a:srgbClr val="4472C4"/>
+            </a:solidFill>
+          </a:ln>
+        </p:spPr>
+        <p:style>
+          <a:lnRef idx="2">
+            <a:schemeClr val="accent1">
+              <a:shade val="15000"/>
+            </a:schemeClr>
+          </a:lnRef>
+          <a:fillRef idx="1">
+            <a:schemeClr val="accent1"/>
+          </a:fillRef>
+          <a:effectRef idx="0">
+            <a:schemeClr val="accent1"/>
+          </a:effectRef>
+          <a:fontRef idx="minor">
+            <a:schemeClr val="lt1"/>
+          </a:fontRef>
+        </p:style>
+        <p:txBody>
+          <a:bodyPr rtlCol="0" anchor="ctr"/>
+          <a:lstStyle/>
+          <a:p>
+            <a:pPr algn="ctr"/>
+            <a:endParaRPr lang="en-US"/>
+          </a:p>
+        </p:txBody>
+      </p:sp>
+      <p:sp>
+        <p:nvSpPr>
           <p:cNvPr id="2" name="Title 1">
             <a:extLst>
               <a:ext uri="{FF2B5EF4-FFF2-40B4-BE49-F238E27FC236}">
@@ -15802,7 +18854,11 @@
           <a:lstStyle/>
           <a:p>
             <a:r>
-              <a:rPr lang="en-US"/>
+              <a:rPr lang="en-US">
+                <a:solidFill>
+                  <a:srgbClr val="1F3864"/>
+                </a:solidFill>
+              </a:rPr>
               <a:t>What the three plots agree on</a:t>
             </a:r>
           </a:p>
@@ -15874,6 +18930,116 @@
               <a:rPr lang="en-US" sz="1700"/>
               <a:t>Measures of position: where does one observation sit relative to the rest?</a:t>
             </a:r>
+          </a:p>
+        </p:txBody>
+      </p:sp>
+      <p:sp>
+        <p:nvSpPr>
+          <p:cNvPr id="4" name="Slide number">
+            <a:extLst>
+              <a:ext uri="{FF2B5EF4-FFF2-40B4-BE49-F238E27FC236}">
+                <a16:creationId xmlns:a16="http://schemas.microsoft.com/office/drawing/2014/main" id="{42E20DCC-AAAF-7E4C-B811-BF192B607943}"/>
+              </a:ext>
+            </a:extLst>
+          </p:cNvPr>
+          <p:cNvSpPr txBox="1"/>
+          <p:nvPr/>
+        </p:nvSpPr>
+        <p:spPr>
+          <a:xfrm>
+            <a:off x="11789211" y="6477000"/>
+            <a:ext cx="250389" cy="246221"/>
+          </a:xfrm>
+          <a:prstGeom prst="rect">
+            <a:avLst/>
+          </a:prstGeom>
+          <a:solidFill>
+            <a:srgbClr val="FFFFFF"/>
+          </a:solidFill>
+        </p:spPr>
+        <p:txBody>
+          <a:bodyPr vert="horz" wrap="none" rtlCol="0">
+            <a:spAutoFit/>
+          </a:bodyPr>
+          <a:lstStyle/>
+          <a:p>
+            <a:pPr algn="r"/>
+            <a:r>
+              <a:rPr lang="en-US" sz="1000">
+                <a:solidFill>
+                  <a:srgbClr val="808080"/>
+                </a:solidFill>
+              </a:rPr>
+              <a:t>4</a:t>
+            </a:r>
+          </a:p>
+        </p:txBody>
+      </p:sp>
+      <p:sp>
+        <p:nvSpPr>
+          <p:cNvPr id="5" name="Title rule">
+            <a:extLst>
+              <a:ext uri="{FF2B5EF4-FFF2-40B4-BE49-F238E27FC236}">
+                <a16:creationId xmlns:a16="http://schemas.microsoft.com/office/drawing/2014/main" id="{1BAF7B54-8883-C29F-0151-9A8E52D2E131}"/>
+              </a:ext>
+            </a:extLst>
+          </p:cNvPr>
+          <p:cNvSpPr/>
+          <p:nvPr/>
+        </p:nvSpPr>
+        <p:spPr>
+          <a:xfrm>
+            <a:off x="838200" y="1600200"/>
+            <a:ext cx="10515600" cy="38100"/>
+          </a:xfrm>
+          <a:prstGeom prst="rect">
+            <a:avLst/>
+          </a:prstGeom>
+          <a:solidFill>
+            <a:srgbClr val="4472C4"/>
+          </a:solidFill>
+          <a:ln w="12700" cap="flat" cmpd="sng" algn="ctr">
+            <a:noFill/>
+            <a:prstDash val="solid"/>
+            <a:miter lim="800000"/>
+          </a:ln>
+          <a:effectLst/>
+          <a:extLst>
+            <a:ext uri="{91240B29-F687-4F45-9708-019B960494DF}">
+              <a14:hiddenLine xmlns:a14="http://schemas.microsoft.com/office/drawing/2010/main" w="12700" cap="flat" cmpd="sng" algn="ctr">
+                <a:solidFill>
+                  <a:schemeClr val="accent1">
+                    <a:shade val="15000"/>
+                  </a:schemeClr>
+                </a:solidFill>
+                <a:prstDash val="solid"/>
+                <a:miter lim="800000"/>
+              </a14:hiddenLine>
+            </a:ext>
+          </a:extLst>
+        </p:spPr>
+        <p:style>
+          <a:lnRef idx="2">
+            <a:schemeClr val="accent1">
+              <a:shade val="15000"/>
+            </a:schemeClr>
+          </a:lnRef>
+          <a:fillRef idx="1">
+            <a:schemeClr val="accent1"/>
+          </a:fillRef>
+          <a:effectRef idx="0">
+            <a:schemeClr val="accent1"/>
+          </a:effectRef>
+          <a:fontRef idx="minor">
+            <a:schemeClr val="lt1"/>
+          </a:fontRef>
+        </p:style>
+        <p:txBody>
+          <a:bodyPr rtlCol="0" anchor="ctr"/>
+          <a:lstStyle/>
+          <a:p>
+            <a:pPr algn="ctr"/>
+            <a:endParaRPr lang="en-US"/>
           </a:p>
         </p:txBody>
       </p:sp>
@@ -15909,6 +19075,62 @@
       </p:grpSpPr>
       <p:sp>
         <p:nvSpPr>
+          <p:cNvPr id="5" name="Body card">
+            <a:extLst>
+              <a:ext uri="{FF2B5EF4-FFF2-40B4-BE49-F238E27FC236}">
+                <a16:creationId xmlns:a16="http://schemas.microsoft.com/office/drawing/2014/main" id="{0AD5B6EA-D120-3ADF-A9DD-BFE96DC3D41C}"/>
+              </a:ext>
+            </a:extLst>
+          </p:cNvPr>
+          <p:cNvSpPr/>
+          <p:nvPr/>
+        </p:nvSpPr>
+        <p:spPr>
+          <a:xfrm>
+            <a:off x="635000" y="1346200"/>
+            <a:ext cx="10922000" cy="3619500"/>
+          </a:xfrm>
+          <a:prstGeom prst="roundRect">
+            <a:avLst>
+              <a:gd name="adj" fmla="val 3000"/>
+            </a:avLst>
+          </a:prstGeom>
+          <a:solidFill>
+            <a:srgbClr val="F2F6FC"/>
+          </a:solidFill>
+          <a:ln w="19050">
+            <a:solidFill>
+              <a:srgbClr val="4472C4"/>
+            </a:solidFill>
+          </a:ln>
+        </p:spPr>
+        <p:style>
+          <a:lnRef idx="2">
+            <a:schemeClr val="accent1">
+              <a:shade val="15000"/>
+            </a:schemeClr>
+          </a:lnRef>
+          <a:fillRef idx="1">
+            <a:schemeClr val="accent1"/>
+          </a:fillRef>
+          <a:effectRef idx="0">
+            <a:schemeClr val="accent1"/>
+          </a:effectRef>
+          <a:fontRef idx="minor">
+            <a:schemeClr val="lt1"/>
+          </a:fontRef>
+        </p:style>
+        <p:txBody>
+          <a:bodyPr rtlCol="0" anchor="ctr"/>
+          <a:lstStyle/>
+          <a:p>
+            <a:pPr algn="ctr"/>
+            <a:endParaRPr lang="en-US"/>
+          </a:p>
+        </p:txBody>
+      </p:sp>
+      <p:sp>
+        <p:nvSpPr>
           <p:cNvPr id="2" name="Title 1">
             <a:extLst>
               <a:ext uri="{FF2B5EF4-FFF2-40B4-BE49-F238E27FC236}">
@@ -15934,10 +19156,18 @@
           <a:lstStyle/>
           <a:p>
             <a:r>
-              <a:rPr lang="en-US"/>
+              <a:rPr lang="en-US">
+                <a:solidFill>
+                  <a:srgbClr val="1F3864"/>
+                </a:solidFill>
+              </a:rPr>
               <a:t>Measures of Central Tendency: the Mean</a:t>
             </a:r>
-            <a:endParaRPr lang="en-US" dirty="0"/>
+            <a:endParaRPr lang="en-US" dirty="0">
+              <a:solidFill>
+                <a:srgbClr val="1F3864"/>
+              </a:solidFill>
+            </a:endParaRPr>
           </a:p>
         </p:txBody>
       </p:sp>
@@ -15976,7 +19206,11 @@
                   <a:t>The (arithmetic) </a:t>
                 </a:r>
                 <a:r>
-                  <a:rPr lang="en-US" sz="2400" b="1" dirty="0"/>
+                  <a:rPr lang="en-US" sz="2400" b="1" dirty="0">
+                    <a:solidFill>
+                      <a:srgbClr val="C00000"/>
+                    </a:solidFill>
+                  </a:rPr>
                   <a:t>mean </a:t>
                 </a:r>
                 <a:r>
@@ -16265,7 +19499,11 @@
                   <a:t>The mean is highly influenced by </a:t>
                 </a:r>
                 <a:r>
-                  <a:rPr lang="en-US" sz="2400" b="1" dirty="0"/>
+                  <a:rPr lang="en-US" sz="2400" b="1" dirty="0">
+                    <a:solidFill>
+                      <a:srgbClr val="C00000"/>
+                    </a:solidFill>
+                  </a:rPr>
                   <a:t>outliers </a:t>
                 </a:r>
                 <a:r>
@@ -16321,6 +19559,48 @@
           </p:sp>
         </mc:Fallback>
       </mc:AlternateContent>
+      <p:sp>
+        <p:nvSpPr>
+          <p:cNvPr id="4" name="Slide number">
+            <a:extLst>
+              <a:ext uri="{FF2B5EF4-FFF2-40B4-BE49-F238E27FC236}">
+                <a16:creationId xmlns:a16="http://schemas.microsoft.com/office/drawing/2014/main" id="{17E0C985-12F3-48AE-441F-943E9A6657A3}"/>
+              </a:ext>
+            </a:extLst>
+          </p:cNvPr>
+          <p:cNvSpPr txBox="1"/>
+          <p:nvPr/>
+        </p:nvSpPr>
+        <p:spPr>
+          <a:xfrm>
+            <a:off x="11789211" y="6477000"/>
+            <a:ext cx="250389" cy="246221"/>
+          </a:xfrm>
+          <a:prstGeom prst="rect">
+            <a:avLst/>
+          </a:prstGeom>
+          <a:solidFill>
+            <a:srgbClr val="FFFFFF"/>
+          </a:solidFill>
+        </p:spPr>
+        <p:txBody>
+          <a:bodyPr vert="horz" wrap="none" rtlCol="0">
+            <a:spAutoFit/>
+          </a:bodyPr>
+          <a:lstStyle/>
+          <a:p>
+            <a:pPr algn="r"/>
+            <a:r>
+              <a:rPr lang="en-US" sz="1000">
+                <a:solidFill>
+                  <a:srgbClr val="808080"/>
+                </a:solidFill>
+              </a:rPr>
+              <a:t>5</a:t>
+            </a:r>
+          </a:p>
+        </p:txBody>
+      </p:sp>
     </p:spTree>
     <p:extLst>
       <p:ext uri="{BB962C8B-B14F-4D97-AF65-F5344CB8AC3E}">
@@ -16353,6 +19633,62 @@
       </p:grpSpPr>
       <p:sp>
         <p:nvSpPr>
+          <p:cNvPr id="6" name="Body card">
+            <a:extLst>
+              <a:ext uri="{FF2B5EF4-FFF2-40B4-BE49-F238E27FC236}">
+                <a16:creationId xmlns:a16="http://schemas.microsoft.com/office/drawing/2014/main" id="{5C94FCB2-F4CB-9919-ECAA-514B3D121410}"/>
+              </a:ext>
+            </a:extLst>
+          </p:cNvPr>
+          <p:cNvSpPr/>
+          <p:nvPr/>
+        </p:nvSpPr>
+        <p:spPr>
+          <a:xfrm>
+            <a:off x="635000" y="1676400"/>
+            <a:ext cx="10922000" cy="711200"/>
+          </a:xfrm>
+          <a:prstGeom prst="roundRect">
+            <a:avLst>
+              <a:gd name="adj" fmla="val 3000"/>
+            </a:avLst>
+          </a:prstGeom>
+          <a:solidFill>
+            <a:srgbClr val="F2F6FC"/>
+          </a:solidFill>
+          <a:ln w="19050">
+            <a:solidFill>
+              <a:srgbClr val="4472C4"/>
+            </a:solidFill>
+          </a:ln>
+        </p:spPr>
+        <p:style>
+          <a:lnRef idx="2">
+            <a:schemeClr val="accent1">
+              <a:shade val="15000"/>
+            </a:schemeClr>
+          </a:lnRef>
+          <a:fillRef idx="1">
+            <a:schemeClr val="accent1"/>
+          </a:fillRef>
+          <a:effectRef idx="0">
+            <a:schemeClr val="accent1"/>
+          </a:effectRef>
+          <a:fontRef idx="minor">
+            <a:schemeClr val="lt1"/>
+          </a:fontRef>
+        </p:style>
+        <p:txBody>
+          <a:bodyPr rtlCol="0" anchor="ctr"/>
+          <a:lstStyle/>
+          <a:p>
+            <a:pPr algn="ctr"/>
+            <a:endParaRPr lang="en-US"/>
+          </a:p>
+        </p:txBody>
+      </p:sp>
+      <p:sp>
+        <p:nvSpPr>
           <p:cNvPr id="2" name="Title 1">
             <a:extLst>
               <a:ext uri="{FF2B5EF4-FFF2-40B4-BE49-F238E27FC236}">
@@ -16373,10 +19709,18 @@
           <a:lstStyle/>
           <a:p>
             <a:r>
-              <a:rPr lang="en-US"/>
+              <a:rPr lang="en-US">
+                <a:solidFill>
+                  <a:srgbClr val="1F3864"/>
+                </a:solidFill>
+              </a:rPr>
               <a:t>Practice: Calculate The Mean</a:t>
             </a:r>
-            <a:endParaRPr lang="en-US" dirty="0"/>
+            <a:endParaRPr lang="en-US" dirty="0">
+              <a:solidFill>
+                <a:srgbClr val="1F3864"/>
+              </a:solidFill>
+            </a:endParaRPr>
           </a:p>
         </p:txBody>
       </p:sp>
@@ -16473,6 +19817,116 @@
           </p:sp>
         </mc:Fallback>
       </mc:AlternateContent>
+      <p:sp>
+        <p:nvSpPr>
+          <p:cNvPr id="4" name="Slide number">
+            <a:extLst>
+              <a:ext uri="{FF2B5EF4-FFF2-40B4-BE49-F238E27FC236}">
+                <a16:creationId xmlns:a16="http://schemas.microsoft.com/office/drawing/2014/main" id="{5A68570A-C852-6E76-DE23-0FDED702F2E7}"/>
+              </a:ext>
+            </a:extLst>
+          </p:cNvPr>
+          <p:cNvSpPr txBox="1"/>
+          <p:nvPr/>
+        </p:nvSpPr>
+        <p:spPr>
+          <a:xfrm>
+            <a:off x="11789211" y="6477000"/>
+            <a:ext cx="250389" cy="246221"/>
+          </a:xfrm>
+          <a:prstGeom prst="rect">
+            <a:avLst/>
+          </a:prstGeom>
+          <a:solidFill>
+            <a:srgbClr val="FFFFFF"/>
+          </a:solidFill>
+        </p:spPr>
+        <p:txBody>
+          <a:bodyPr vert="horz" wrap="none" rtlCol="0">
+            <a:spAutoFit/>
+          </a:bodyPr>
+          <a:lstStyle/>
+          <a:p>
+            <a:pPr algn="r"/>
+            <a:r>
+              <a:rPr lang="en-US" sz="1000">
+                <a:solidFill>
+                  <a:srgbClr val="808080"/>
+                </a:solidFill>
+              </a:rPr>
+              <a:t>6</a:t>
+            </a:r>
+          </a:p>
+        </p:txBody>
+      </p:sp>
+      <p:sp>
+        <p:nvSpPr>
+          <p:cNvPr id="5" name="Title rule">
+            <a:extLst>
+              <a:ext uri="{FF2B5EF4-FFF2-40B4-BE49-F238E27FC236}">
+                <a16:creationId xmlns:a16="http://schemas.microsoft.com/office/drawing/2014/main" id="{1A423A2C-039C-F861-9B4E-CB61370CE99E}"/>
+              </a:ext>
+            </a:extLst>
+          </p:cNvPr>
+          <p:cNvSpPr/>
+          <p:nvPr/>
+        </p:nvSpPr>
+        <p:spPr>
+          <a:xfrm>
+            <a:off x="838200" y="1600200"/>
+            <a:ext cx="10515600" cy="38100"/>
+          </a:xfrm>
+          <a:prstGeom prst="rect">
+            <a:avLst/>
+          </a:prstGeom>
+          <a:solidFill>
+            <a:srgbClr val="4472C4"/>
+          </a:solidFill>
+          <a:ln w="12700" cap="flat" cmpd="sng" algn="ctr">
+            <a:noFill/>
+            <a:prstDash val="solid"/>
+            <a:miter lim="800000"/>
+          </a:ln>
+          <a:effectLst/>
+          <a:extLst>
+            <a:ext uri="{91240B29-F687-4F45-9708-019B960494DF}">
+              <a14:hiddenLine xmlns:a14="http://schemas.microsoft.com/office/drawing/2010/main" w="12700" cap="flat" cmpd="sng" algn="ctr">
+                <a:solidFill>
+                  <a:schemeClr val="accent1">
+                    <a:shade val="15000"/>
+                  </a:schemeClr>
+                </a:solidFill>
+                <a:prstDash val="solid"/>
+                <a:miter lim="800000"/>
+              </a14:hiddenLine>
+            </a:ext>
+          </a:extLst>
+        </p:spPr>
+        <p:style>
+          <a:lnRef idx="2">
+            <a:schemeClr val="accent1">
+              <a:shade val="15000"/>
+            </a:schemeClr>
+          </a:lnRef>
+          <a:fillRef idx="1">
+            <a:schemeClr val="accent1"/>
+          </a:fillRef>
+          <a:effectRef idx="0">
+            <a:schemeClr val="accent1"/>
+          </a:effectRef>
+          <a:fontRef idx="minor">
+            <a:schemeClr val="lt1"/>
+          </a:fontRef>
+        </p:style>
+        <p:txBody>
+          <a:bodyPr rtlCol="0" anchor="ctr"/>
+          <a:lstStyle/>
+          <a:p>
+            <a:pPr algn="ctr"/>
+            <a:endParaRPr lang="en-US"/>
+          </a:p>
+        </p:txBody>
+      </p:sp>
     </p:spTree>
     <p:extLst>
       <p:ext uri="{BB962C8B-B14F-4D97-AF65-F5344CB8AC3E}">
@@ -16505,6 +19959,62 @@
       </p:grpSpPr>
       <p:sp>
         <p:nvSpPr>
+          <p:cNvPr id="6" name="Body card">
+            <a:extLst>
+              <a:ext uri="{FF2B5EF4-FFF2-40B4-BE49-F238E27FC236}">
+                <a16:creationId xmlns:a16="http://schemas.microsoft.com/office/drawing/2014/main" id="{0C05D080-6164-F1E9-3AEA-C9666BCBE748}"/>
+              </a:ext>
+            </a:extLst>
+          </p:cNvPr>
+          <p:cNvSpPr/>
+          <p:nvPr/>
+        </p:nvSpPr>
+        <p:spPr>
+          <a:xfrm>
+            <a:off x="635000" y="1676400"/>
+            <a:ext cx="10922000" cy="4432300"/>
+          </a:xfrm>
+          <a:prstGeom prst="roundRect">
+            <a:avLst>
+              <a:gd name="adj" fmla="val 3000"/>
+            </a:avLst>
+          </a:prstGeom>
+          <a:solidFill>
+            <a:srgbClr val="F2F6FC"/>
+          </a:solidFill>
+          <a:ln w="19050">
+            <a:solidFill>
+              <a:srgbClr val="4472C4"/>
+            </a:solidFill>
+          </a:ln>
+        </p:spPr>
+        <p:style>
+          <a:lnRef idx="2">
+            <a:schemeClr val="accent1">
+              <a:shade val="15000"/>
+            </a:schemeClr>
+          </a:lnRef>
+          <a:fillRef idx="1">
+            <a:schemeClr val="accent1"/>
+          </a:fillRef>
+          <a:effectRef idx="0">
+            <a:schemeClr val="accent1"/>
+          </a:effectRef>
+          <a:fontRef idx="minor">
+            <a:schemeClr val="lt1"/>
+          </a:fontRef>
+        </p:style>
+        <p:txBody>
+          <a:bodyPr rtlCol="0" anchor="ctr"/>
+          <a:lstStyle/>
+          <a:p>
+            <a:pPr algn="ctr"/>
+            <a:endParaRPr lang="en-US"/>
+          </a:p>
+        </p:txBody>
+      </p:sp>
+      <p:sp>
+        <p:nvSpPr>
           <p:cNvPr id="2" name="Title 1">
             <a:extLst>
               <a:ext uri="{FF2B5EF4-FFF2-40B4-BE49-F238E27FC236}">
@@ -16525,15 +20035,23 @@
           <a:lstStyle/>
           <a:p>
             <a:r>
-              <a:rPr lang="en-US"/>
+              <a:rPr lang="en-US">
+                <a:solidFill>
+                  <a:srgbClr val="1F3864"/>
+                </a:solidFill>
+              </a:rPr>
               <a:t>Measures of Central Tendency: the Median</a:t>
             </a:r>
-            <a:endParaRPr lang="en-US" dirty="0"/>
+            <a:endParaRPr lang="en-US" dirty="0">
+              <a:solidFill>
+                <a:srgbClr val="1F3864"/>
+              </a:solidFill>
+            </a:endParaRPr>
           </a:p>
         </p:txBody>
       </p:sp>
-      <mc:AlternateContent xmlns:mc="http://schemas.openxmlformats.org/markup-compatibility/2006" xmlns:a14="http://schemas.microsoft.com/office/drawing/2010/main">
-        <mc:Choice Requires="a14">
+      <mc:AlternateContent xmlns:mc="http://schemas.openxmlformats.org/markup-compatibility/2006">
+        <mc:Choice xmlns:a14="http://schemas.microsoft.com/office/drawing/2010/main" Requires="a14">
           <p:sp>
             <p:nvSpPr>
               <p:cNvPr id="3" name="Content Placeholder 2">
@@ -16567,7 +20085,11 @@
                   <a:t>The </a:t>
                 </a:r>
                 <a:r>
-                  <a:rPr lang="en-US" b="1" dirty="0"/>
+                  <a:rPr lang="en-US" b="1" dirty="0">
+                    <a:solidFill>
+                      <a:srgbClr val="C00000"/>
+                    </a:solidFill>
+                  </a:rPr>
                   <a:t>median</a:t>
                 </a:r>
                 <a:r>
@@ -16657,7 +20179,7 @@
             </p:txBody>
           </p:sp>
         </mc:Choice>
-        <mc:Fallback xmlns="">
+        <mc:Fallback>
           <p:sp>
             <p:nvSpPr>
               <p:cNvPr id="3" name="Content Placeholder 2">
@@ -16701,6 +20223,116 @@
           </p:sp>
         </mc:Fallback>
       </mc:AlternateContent>
+      <p:sp>
+        <p:nvSpPr>
+          <p:cNvPr id="4" name="Slide number">
+            <a:extLst>
+              <a:ext uri="{FF2B5EF4-FFF2-40B4-BE49-F238E27FC236}">
+                <a16:creationId xmlns:a16="http://schemas.microsoft.com/office/drawing/2014/main" id="{320E5D8C-D953-129E-4366-E3E77E7E9814}"/>
+              </a:ext>
+            </a:extLst>
+          </p:cNvPr>
+          <p:cNvSpPr txBox="1"/>
+          <p:nvPr/>
+        </p:nvSpPr>
+        <p:spPr>
+          <a:xfrm>
+            <a:off x="11789211" y="6477000"/>
+            <a:ext cx="250389" cy="246221"/>
+          </a:xfrm>
+          <a:prstGeom prst="rect">
+            <a:avLst/>
+          </a:prstGeom>
+          <a:solidFill>
+            <a:srgbClr val="FFFFFF"/>
+          </a:solidFill>
+        </p:spPr>
+        <p:txBody>
+          <a:bodyPr vert="horz" wrap="none" rtlCol="0">
+            <a:spAutoFit/>
+          </a:bodyPr>
+          <a:lstStyle/>
+          <a:p>
+            <a:pPr algn="r"/>
+            <a:r>
+              <a:rPr lang="en-US" sz="1000">
+                <a:solidFill>
+                  <a:srgbClr val="808080"/>
+                </a:solidFill>
+              </a:rPr>
+              <a:t>7</a:t>
+            </a:r>
+          </a:p>
+        </p:txBody>
+      </p:sp>
+      <p:sp>
+        <p:nvSpPr>
+          <p:cNvPr id="5" name="Title rule">
+            <a:extLst>
+              <a:ext uri="{FF2B5EF4-FFF2-40B4-BE49-F238E27FC236}">
+                <a16:creationId xmlns:a16="http://schemas.microsoft.com/office/drawing/2014/main" id="{B37FE770-0FA2-564A-6CFC-6255068EFCB8}"/>
+              </a:ext>
+            </a:extLst>
+          </p:cNvPr>
+          <p:cNvSpPr/>
+          <p:nvPr/>
+        </p:nvSpPr>
+        <p:spPr>
+          <a:xfrm>
+            <a:off x="838200" y="1600200"/>
+            <a:ext cx="10515600" cy="38100"/>
+          </a:xfrm>
+          <a:prstGeom prst="rect">
+            <a:avLst/>
+          </a:prstGeom>
+          <a:solidFill>
+            <a:srgbClr val="4472C4"/>
+          </a:solidFill>
+          <a:ln w="12700" cap="flat" cmpd="sng" algn="ctr">
+            <a:noFill/>
+            <a:prstDash val="solid"/>
+            <a:miter lim="800000"/>
+          </a:ln>
+          <a:effectLst/>
+          <a:extLst>
+            <a:ext uri="{91240B29-F687-4F45-9708-019B960494DF}">
+              <a14:hiddenLine xmlns:a14="http://schemas.microsoft.com/office/drawing/2010/main" w="12700" cap="flat" cmpd="sng" algn="ctr">
+                <a:solidFill>
+                  <a:schemeClr val="accent1">
+                    <a:shade val="15000"/>
+                  </a:schemeClr>
+                </a:solidFill>
+                <a:prstDash val="solid"/>
+                <a:miter lim="800000"/>
+              </a14:hiddenLine>
+            </a:ext>
+          </a:extLst>
+        </p:spPr>
+        <p:style>
+          <a:lnRef idx="2">
+            <a:schemeClr val="accent1">
+              <a:shade val="15000"/>
+            </a:schemeClr>
+          </a:lnRef>
+          <a:fillRef idx="1">
+            <a:schemeClr val="accent1"/>
+          </a:fillRef>
+          <a:effectRef idx="0">
+            <a:schemeClr val="accent1"/>
+          </a:effectRef>
+          <a:fontRef idx="minor">
+            <a:schemeClr val="lt1"/>
+          </a:fontRef>
+        </p:style>
+        <p:txBody>
+          <a:bodyPr rtlCol="0" anchor="ctr"/>
+          <a:lstStyle/>
+          <a:p>
+            <a:pPr algn="ctr"/>
+            <a:endParaRPr lang="en-US"/>
+          </a:p>
+        </p:txBody>
+      </p:sp>
     </p:spTree>
     <p:extLst>
       <p:ext uri="{BB962C8B-B14F-4D97-AF65-F5344CB8AC3E}">
@@ -16733,6 +20365,62 @@
       </p:grpSpPr>
       <p:sp>
         <p:nvSpPr>
+          <p:cNvPr id="6" name="Body card">
+            <a:extLst>
+              <a:ext uri="{FF2B5EF4-FFF2-40B4-BE49-F238E27FC236}">
+                <a16:creationId xmlns:a16="http://schemas.microsoft.com/office/drawing/2014/main" id="{7FC159BE-A334-7155-F914-910EA569873B}"/>
+              </a:ext>
+            </a:extLst>
+          </p:cNvPr>
+          <p:cNvSpPr/>
+          <p:nvPr/>
+        </p:nvSpPr>
+        <p:spPr>
+          <a:xfrm>
+            <a:off x="635000" y="1676400"/>
+            <a:ext cx="10922000" cy="1219200"/>
+          </a:xfrm>
+          <a:prstGeom prst="roundRect">
+            <a:avLst>
+              <a:gd name="adj" fmla="val 3000"/>
+            </a:avLst>
+          </a:prstGeom>
+          <a:solidFill>
+            <a:srgbClr val="F2F6FC"/>
+          </a:solidFill>
+          <a:ln w="19050">
+            <a:solidFill>
+              <a:srgbClr val="4472C4"/>
+            </a:solidFill>
+          </a:ln>
+        </p:spPr>
+        <p:style>
+          <a:lnRef idx="2">
+            <a:schemeClr val="accent1">
+              <a:shade val="15000"/>
+            </a:schemeClr>
+          </a:lnRef>
+          <a:fillRef idx="1">
+            <a:schemeClr val="accent1"/>
+          </a:fillRef>
+          <a:effectRef idx="0">
+            <a:schemeClr val="accent1"/>
+          </a:effectRef>
+          <a:fontRef idx="minor">
+            <a:schemeClr val="lt1"/>
+          </a:fontRef>
+        </p:style>
+        <p:txBody>
+          <a:bodyPr rtlCol="0" anchor="ctr"/>
+          <a:lstStyle/>
+          <a:p>
+            <a:pPr algn="ctr"/>
+            <a:endParaRPr lang="en-US"/>
+          </a:p>
+        </p:txBody>
+      </p:sp>
+      <p:sp>
+        <p:nvSpPr>
           <p:cNvPr id="2" name="Title 1">
             <a:extLst>
               <a:ext uri="{FF2B5EF4-FFF2-40B4-BE49-F238E27FC236}">
@@ -16753,7 +20441,11 @@
           <a:lstStyle/>
           <a:p>
             <a:r>
-              <a:rPr lang="en-US" dirty="0"/>
+              <a:rPr lang="en-US" dirty="0">
+                <a:solidFill>
+                  <a:srgbClr val="1F3864"/>
+                </a:solidFill>
+              </a:rPr>
               <a:t>Practice: Calculate the Median</a:t>
             </a:r>
           </a:p>
@@ -16849,6 +20541,116 @@
           </p:sp>
         </mc:Fallback>
       </mc:AlternateContent>
+      <p:sp>
+        <p:nvSpPr>
+          <p:cNvPr id="4" name="Slide number">
+            <a:extLst>
+              <a:ext uri="{FF2B5EF4-FFF2-40B4-BE49-F238E27FC236}">
+                <a16:creationId xmlns:a16="http://schemas.microsoft.com/office/drawing/2014/main" id="{6DE908F3-DD81-AA14-24A9-07EADEBE2DF6}"/>
+              </a:ext>
+            </a:extLst>
+          </p:cNvPr>
+          <p:cNvSpPr txBox="1"/>
+          <p:nvPr/>
+        </p:nvSpPr>
+        <p:spPr>
+          <a:xfrm>
+            <a:off x="11789211" y="6477000"/>
+            <a:ext cx="250389" cy="246221"/>
+          </a:xfrm>
+          <a:prstGeom prst="rect">
+            <a:avLst/>
+          </a:prstGeom>
+          <a:solidFill>
+            <a:srgbClr val="FFFFFF"/>
+          </a:solidFill>
+        </p:spPr>
+        <p:txBody>
+          <a:bodyPr vert="horz" wrap="none" rtlCol="0">
+            <a:spAutoFit/>
+          </a:bodyPr>
+          <a:lstStyle/>
+          <a:p>
+            <a:pPr algn="r"/>
+            <a:r>
+              <a:rPr lang="en-US" sz="1000">
+                <a:solidFill>
+                  <a:srgbClr val="808080"/>
+                </a:solidFill>
+              </a:rPr>
+              <a:t>8</a:t>
+            </a:r>
+          </a:p>
+        </p:txBody>
+      </p:sp>
+      <p:sp>
+        <p:nvSpPr>
+          <p:cNvPr id="5" name="Title rule">
+            <a:extLst>
+              <a:ext uri="{FF2B5EF4-FFF2-40B4-BE49-F238E27FC236}">
+                <a16:creationId xmlns:a16="http://schemas.microsoft.com/office/drawing/2014/main" id="{45724276-28DD-B612-D968-43514A3D20B7}"/>
+              </a:ext>
+            </a:extLst>
+          </p:cNvPr>
+          <p:cNvSpPr/>
+          <p:nvPr/>
+        </p:nvSpPr>
+        <p:spPr>
+          <a:xfrm>
+            <a:off x="838200" y="1600200"/>
+            <a:ext cx="10515600" cy="38100"/>
+          </a:xfrm>
+          <a:prstGeom prst="rect">
+            <a:avLst/>
+          </a:prstGeom>
+          <a:solidFill>
+            <a:srgbClr val="4472C4"/>
+          </a:solidFill>
+          <a:ln w="12700" cap="flat" cmpd="sng" algn="ctr">
+            <a:noFill/>
+            <a:prstDash val="solid"/>
+            <a:miter lim="800000"/>
+          </a:ln>
+          <a:effectLst/>
+          <a:extLst>
+            <a:ext uri="{91240B29-F687-4F45-9708-019B960494DF}">
+              <a14:hiddenLine xmlns:a14="http://schemas.microsoft.com/office/drawing/2010/main" w="12700" cap="flat" cmpd="sng" algn="ctr">
+                <a:solidFill>
+                  <a:schemeClr val="accent1">
+                    <a:shade val="15000"/>
+                  </a:schemeClr>
+                </a:solidFill>
+                <a:prstDash val="solid"/>
+                <a:miter lim="800000"/>
+              </a14:hiddenLine>
+            </a:ext>
+          </a:extLst>
+        </p:spPr>
+        <p:style>
+          <a:lnRef idx="2">
+            <a:schemeClr val="accent1">
+              <a:shade val="15000"/>
+            </a:schemeClr>
+          </a:lnRef>
+          <a:fillRef idx="1">
+            <a:schemeClr val="accent1"/>
+          </a:fillRef>
+          <a:effectRef idx="0">
+            <a:schemeClr val="accent1"/>
+          </a:effectRef>
+          <a:fontRef idx="minor">
+            <a:schemeClr val="lt1"/>
+          </a:fontRef>
+        </p:style>
+        <p:txBody>
+          <a:bodyPr rtlCol="0" anchor="ctr"/>
+          <a:lstStyle/>
+          <a:p>
+            <a:pPr algn="ctr"/>
+            <a:endParaRPr lang="en-US"/>
+          </a:p>
+        </p:txBody>
+      </p:sp>
     </p:spTree>
     <p:extLst>
       <p:ext uri="{BB962C8B-B14F-4D97-AF65-F5344CB8AC3E}">
@@ -17881,6 +21683,48 @@
           </a:p>
         </p:txBody>
       </p:sp>
+      <p:sp>
+        <p:nvSpPr>
+          <p:cNvPr id="2" name="Slide number">
+            <a:extLst>
+              <a:ext uri="{FF2B5EF4-FFF2-40B4-BE49-F238E27FC236}">
+                <a16:creationId xmlns:a16="http://schemas.microsoft.com/office/drawing/2014/main" id="{254DFF7C-278E-D7FC-E1DF-D0D68AEC8E9E}"/>
+              </a:ext>
+            </a:extLst>
+          </p:cNvPr>
+          <p:cNvSpPr txBox="1"/>
+          <p:nvPr/>
+        </p:nvSpPr>
+        <p:spPr>
+          <a:xfrm>
+            <a:off x="11789211" y="6477000"/>
+            <a:ext cx="250389" cy="246221"/>
+          </a:xfrm>
+          <a:prstGeom prst="rect">
+            <a:avLst/>
+          </a:prstGeom>
+          <a:solidFill>
+            <a:srgbClr val="FFFFFF"/>
+          </a:solidFill>
+        </p:spPr>
+        <p:txBody>
+          <a:bodyPr vert="horz" wrap="none" rtlCol="0">
+            <a:spAutoFit/>
+          </a:bodyPr>
+          <a:lstStyle/>
+          <a:p>
+            <a:pPr algn="r"/>
+            <a:r>
+              <a:rPr lang="en-US" sz="1000">
+                <a:solidFill>
+                  <a:srgbClr val="808080"/>
+                </a:solidFill>
+              </a:rPr>
+              <a:t>9</a:t>
+            </a:r>
+          </a:p>
+        </p:txBody>
+      </p:sp>
     </p:spTree>
     <p:extLst>
       <p:ext uri="{BB962C8B-B14F-4D97-AF65-F5344CB8AC3E}">

--- a/docs/lecture_slides/Week 2/Week2_Lecture5_slides_1_19_2024.pptx
+++ b/docs/lecture_slides/Week 2/Week2_Lecture5_slides_1_19_2024.pptx
@@ -8,38 +8,37 @@
     <p:sldId id="256" r:id="rId2"/>
     <p:sldId id="331" r:id="rId3"/>
     <p:sldId id="332" r:id="rId4"/>
-    <p:sldId id="336" r:id="rId5"/>
-    <p:sldId id="304" r:id="rId6"/>
-    <p:sldId id="330" r:id="rId7"/>
-    <p:sldId id="307" r:id="rId8"/>
-    <p:sldId id="337" r:id="rId9"/>
-    <p:sldId id="305" r:id="rId10"/>
-    <p:sldId id="338" r:id="rId11"/>
-    <p:sldId id="340" r:id="rId12"/>
-    <p:sldId id="341" r:id="rId13"/>
-    <p:sldId id="339" r:id="rId14"/>
-    <p:sldId id="309" r:id="rId15"/>
-    <p:sldId id="308" r:id="rId16"/>
-    <p:sldId id="321" r:id="rId17"/>
-    <p:sldId id="320" r:id="rId18"/>
-    <p:sldId id="322" r:id="rId19"/>
-    <p:sldId id="324" r:id="rId20"/>
-    <p:sldId id="348" r:id="rId21"/>
-    <p:sldId id="303" r:id="rId22"/>
-    <p:sldId id="259" r:id="rId23"/>
-    <p:sldId id="325" r:id="rId24"/>
-    <p:sldId id="346" r:id="rId25"/>
-    <p:sldId id="349" r:id="rId26"/>
-    <p:sldId id="350" r:id="rId27"/>
-    <p:sldId id="351" r:id="rId28"/>
-    <p:sldId id="352" r:id="rId29"/>
-    <p:sldId id="345" r:id="rId30"/>
-    <p:sldId id="313" r:id="rId31"/>
-    <p:sldId id="314" r:id="rId32"/>
-    <p:sldId id="315" r:id="rId33"/>
-    <p:sldId id="316" r:id="rId34"/>
-    <p:sldId id="317" r:id="rId35"/>
-    <p:sldId id="283" r:id="rId36"/>
+    <p:sldId id="304" r:id="rId5"/>
+    <p:sldId id="330" r:id="rId6"/>
+    <p:sldId id="307" r:id="rId7"/>
+    <p:sldId id="337" r:id="rId8"/>
+    <p:sldId id="305" r:id="rId9"/>
+    <p:sldId id="338" r:id="rId10"/>
+    <p:sldId id="340" r:id="rId11"/>
+    <p:sldId id="341" r:id="rId12"/>
+    <p:sldId id="339" r:id="rId13"/>
+    <p:sldId id="309" r:id="rId14"/>
+    <p:sldId id="308" r:id="rId15"/>
+    <p:sldId id="321" r:id="rId16"/>
+    <p:sldId id="320" r:id="rId17"/>
+    <p:sldId id="322" r:id="rId18"/>
+    <p:sldId id="324" r:id="rId19"/>
+    <p:sldId id="348" r:id="rId20"/>
+    <p:sldId id="303" r:id="rId21"/>
+    <p:sldId id="259" r:id="rId22"/>
+    <p:sldId id="325" r:id="rId23"/>
+    <p:sldId id="346" r:id="rId24"/>
+    <p:sldId id="349" r:id="rId25"/>
+    <p:sldId id="350" r:id="rId26"/>
+    <p:sldId id="351" r:id="rId27"/>
+    <p:sldId id="352" r:id="rId28"/>
+    <p:sldId id="345" r:id="rId29"/>
+    <p:sldId id="313" r:id="rId30"/>
+    <p:sldId id="314" r:id="rId31"/>
+    <p:sldId id="315" r:id="rId32"/>
+    <p:sldId id="316" r:id="rId33"/>
+    <p:sldId id="317" r:id="rId34"/>
+    <p:sldId id="283" r:id="rId35"/>
   </p:sldIdLst>
   <p:sldSz cx="12192000" cy="6858000"/>
   <p:notesSz cx="6858000" cy="9144000"/>
@@ -3060,6 +3059,7 @@
     <p:sldLayoutId id="2147483658" r:id="rId10"/>
     <p:sldLayoutId id="2147483659" r:id="rId11"/>
   </p:sldLayoutIdLst>
+  <p:hf hdr="0" ftr="0" dt="0"/>
   <p:txStyles>
     <p:titleStyle>
       <a:lvl1pPr algn="l" defTabSz="914400" rtl="0" eaLnBrk="1" latinLnBrk="0" hangingPunct="1">
@@ -3449,318 +3449,6 @@
           <a:chExt cx="0" cy="0"/>
         </a:xfrm>
       </p:grpSpPr>
-      <p:sp>
-        <p:nvSpPr>
-          <p:cNvPr id="6" name="Body card">
-            <a:extLst>
-              <a:ext uri="{FF2B5EF4-FFF2-40B4-BE49-F238E27FC236}">
-                <a16:creationId xmlns:a16="http://schemas.microsoft.com/office/drawing/2014/main" id="{EA41BED6-3730-9ED7-AB86-789C45DD3A32}"/>
-              </a:ext>
-            </a:extLst>
-          </p:cNvPr>
-          <p:cNvSpPr/>
-          <p:nvPr/>
-        </p:nvSpPr>
-        <p:spPr>
-          <a:xfrm>
-            <a:off x="635000" y="1676400"/>
-            <a:ext cx="10922000" cy="711200"/>
-          </a:xfrm>
-          <a:prstGeom prst="roundRect">
-            <a:avLst>
-              <a:gd name="adj" fmla="val 3000"/>
-            </a:avLst>
-          </a:prstGeom>
-          <a:solidFill>
-            <a:srgbClr val="F2F6FC"/>
-          </a:solidFill>
-          <a:ln w="19050">
-            <a:solidFill>
-              <a:srgbClr val="4472C4"/>
-            </a:solidFill>
-          </a:ln>
-        </p:spPr>
-        <p:style>
-          <a:lnRef idx="2">
-            <a:schemeClr val="accent1">
-              <a:shade val="15000"/>
-            </a:schemeClr>
-          </a:lnRef>
-          <a:fillRef idx="1">
-            <a:schemeClr val="accent1"/>
-          </a:fillRef>
-          <a:effectRef idx="0">
-            <a:schemeClr val="accent1"/>
-          </a:effectRef>
-          <a:fontRef idx="minor">
-            <a:schemeClr val="lt1"/>
-          </a:fontRef>
-        </p:style>
-        <p:txBody>
-          <a:bodyPr rtlCol="0" anchor="ctr"/>
-          <a:lstStyle/>
-          <a:p>
-            <a:pPr algn="ctr"/>
-            <a:endParaRPr lang="en-US"/>
-          </a:p>
-        </p:txBody>
-      </p:sp>
-      <p:sp>
-        <p:nvSpPr>
-          <p:cNvPr id="2" name="Title 1">
-            <a:extLst>
-              <a:ext uri="{FF2B5EF4-FFF2-40B4-BE49-F238E27FC236}">
-                <a16:creationId xmlns:a16="http://schemas.microsoft.com/office/drawing/2014/main" id="{CE84DE6C-08A1-E5FC-FBD2-2A6CFB14937F}"/>
-              </a:ext>
-            </a:extLst>
-          </p:cNvPr>
-          <p:cNvSpPr>
-            <a:spLocks noGrp="1"/>
-          </p:cNvSpPr>
-          <p:nvPr>
-            <p:ph type="title"/>
-          </p:nvPr>
-        </p:nvSpPr>
-        <p:spPr/>
-        <p:txBody>
-          <a:bodyPr/>
-          <a:lstStyle/>
-          <a:p>
-            <a:r>
-              <a:rPr lang="en-US" dirty="0">
-                <a:solidFill>
-                  <a:srgbClr val="1F3864"/>
-                </a:solidFill>
-              </a:rPr>
-              <a:t>Mean and median treat outliers differently</a:t>
-            </a:r>
-          </a:p>
-        </p:txBody>
-      </p:sp>
-      <mc:AlternateContent xmlns:mc="http://schemas.openxmlformats.org/markup-compatibility/2006" xmlns:a14="http://schemas.microsoft.com/office/drawing/2010/main">
-        <mc:Choice Requires="a14">
-          <p:sp>
-            <p:nvSpPr>
-              <p:cNvPr id="3" name="Content Placeholder 2">
-                <a:extLst>
-                  <a:ext uri="{FF2B5EF4-FFF2-40B4-BE49-F238E27FC236}">
-                    <a16:creationId xmlns:a16="http://schemas.microsoft.com/office/drawing/2014/main" id="{D0FE07D2-A170-60BA-CCDC-92189FF4B0D1}"/>
-                  </a:ext>
-                </a:extLst>
-              </p:cNvPr>
-              <p:cNvSpPr>
-                <a:spLocks noGrp="1"/>
-              </p:cNvSpPr>
-              <p:nvPr>
-                <p:ph idx="1"/>
-              </p:nvPr>
-            </p:nvSpPr>
-            <p:spPr/>
-            <p:txBody>
-              <a:bodyPr/>
-              <a:lstStyle/>
-              <a:p>
-                <a14:m>
-                  <m:oMath xmlns:m="http://schemas.openxmlformats.org/officeDocument/2006/math">
-                    <m:r>
-                      <a:rPr lang="en-US" b="0" i="1" smtClean="0">
-                        <a:latin typeface="Cambria Math" panose="02040503050406030204" pitchFamily="18" charset="0"/>
-                      </a:rPr>
-                      <m:t>𝑋</m:t>
-                    </m:r>
-                    <m:r>
-                      <a:rPr lang="en-US" b="0" i="1" smtClean="0">
-                        <a:latin typeface="Cambria Math" panose="02040503050406030204" pitchFamily="18" charset="0"/>
-                      </a:rPr>
-                      <m:t>={1, 3, 5, 5, 6, 7, 7, 8, 32}</m:t>
-                    </m:r>
-                  </m:oMath>
-                </a14:m>
-                <a:endParaRPr lang="en-US" dirty="0"/>
-              </a:p>
-            </p:txBody>
-          </p:sp>
-        </mc:Choice>
-        <mc:Fallback xmlns="">
-          <p:sp>
-            <p:nvSpPr>
-              <p:cNvPr id="3" name="Content Placeholder 2">
-                <a:extLst>
-                  <a:ext uri="{FF2B5EF4-FFF2-40B4-BE49-F238E27FC236}">
-                    <a16:creationId xmlns:a16="http://schemas.microsoft.com/office/drawing/2014/main" id="{D0FE07D2-A170-60BA-CCDC-92189FF4B0D1}"/>
-                  </a:ext>
-                </a:extLst>
-              </p:cNvPr>
-              <p:cNvSpPr>
-                <a:spLocks noGrp="1" noRot="1" noChangeAspect="1" noMove="1" noResize="1" noEditPoints="1" noAdjustHandles="1" noChangeArrowheads="1" noChangeShapeType="1" noTextEdit="1"/>
-              </p:cNvSpPr>
-              <p:nvPr>
-                <p:ph idx="1"/>
-              </p:nvPr>
-            </p:nvSpPr>
-            <p:spPr>
-              <a:blipFill>
-                <a:blip r:embed="rId2"/>
-                <a:stretch>
-                  <a:fillRect/>
-                </a:stretch>
-              </a:blipFill>
-            </p:spPr>
-            <p:txBody>
-              <a:bodyPr/>
-              <a:lstStyle/>
-              <a:p>
-                <a:r>
-                  <a:rPr lang="en-US">
-                    <a:noFill/>
-                  </a:rPr>
-                  <a:t> </a:t>
-                </a:r>
-              </a:p>
-            </p:txBody>
-          </p:sp>
-        </mc:Fallback>
-      </mc:AlternateContent>
-      <p:sp>
-        <p:nvSpPr>
-          <p:cNvPr id="4" name="Slide number">
-            <a:extLst>
-              <a:ext uri="{FF2B5EF4-FFF2-40B4-BE49-F238E27FC236}">
-                <a16:creationId xmlns:a16="http://schemas.microsoft.com/office/drawing/2014/main" id="{A4986B61-1E35-88EA-9E49-EE508A359783}"/>
-              </a:ext>
-            </a:extLst>
-          </p:cNvPr>
-          <p:cNvSpPr txBox="1"/>
-          <p:nvPr/>
-        </p:nvSpPr>
-        <p:spPr>
-          <a:xfrm>
-            <a:off x="11723488" y="6477000"/>
-            <a:ext cx="316112" cy="246221"/>
-          </a:xfrm>
-          <a:prstGeom prst="rect">
-            <a:avLst/>
-          </a:prstGeom>
-          <a:solidFill>
-            <a:srgbClr val="FFFFFF"/>
-          </a:solidFill>
-        </p:spPr>
-        <p:txBody>
-          <a:bodyPr vert="horz" wrap="none" rtlCol="0">
-            <a:spAutoFit/>
-          </a:bodyPr>
-          <a:lstStyle/>
-          <a:p>
-            <a:pPr algn="r"/>
-            <a:r>
-              <a:rPr lang="en-US" sz="1000">
-                <a:solidFill>
-                  <a:srgbClr val="808080"/>
-                </a:solidFill>
-              </a:rPr>
-              <a:t>10</a:t>
-            </a:r>
-          </a:p>
-        </p:txBody>
-      </p:sp>
-      <p:sp>
-        <p:nvSpPr>
-          <p:cNvPr id="5" name="Title rule">
-            <a:extLst>
-              <a:ext uri="{FF2B5EF4-FFF2-40B4-BE49-F238E27FC236}">
-                <a16:creationId xmlns:a16="http://schemas.microsoft.com/office/drawing/2014/main" id="{597A61AE-23D2-053C-1636-4C88BF5E0D4D}"/>
-              </a:ext>
-            </a:extLst>
-          </p:cNvPr>
-          <p:cNvSpPr/>
-          <p:nvPr/>
-        </p:nvSpPr>
-        <p:spPr>
-          <a:xfrm>
-            <a:off x="838200" y="1600200"/>
-            <a:ext cx="10515600" cy="38100"/>
-          </a:xfrm>
-          <a:prstGeom prst="rect">
-            <a:avLst/>
-          </a:prstGeom>
-          <a:solidFill>
-            <a:srgbClr val="4472C4"/>
-          </a:solidFill>
-          <a:ln w="12700" cap="flat" cmpd="sng" algn="ctr">
-            <a:noFill/>
-            <a:prstDash val="solid"/>
-            <a:miter lim="800000"/>
-          </a:ln>
-          <a:effectLst/>
-          <a:extLst>
-            <a:ext uri="{91240B29-F687-4F45-9708-019B960494DF}">
-              <a14:hiddenLine xmlns:a14="http://schemas.microsoft.com/office/drawing/2010/main" w="12700" cap="flat" cmpd="sng" algn="ctr">
-                <a:solidFill>
-                  <a:schemeClr val="accent1">
-                    <a:shade val="15000"/>
-                  </a:schemeClr>
-                </a:solidFill>
-                <a:prstDash val="solid"/>
-                <a:miter lim="800000"/>
-              </a14:hiddenLine>
-            </a:ext>
-          </a:extLst>
-        </p:spPr>
-        <p:style>
-          <a:lnRef idx="2">
-            <a:schemeClr val="accent1">
-              <a:shade val="15000"/>
-            </a:schemeClr>
-          </a:lnRef>
-          <a:fillRef idx="1">
-            <a:schemeClr val="accent1"/>
-          </a:fillRef>
-          <a:effectRef idx="0">
-            <a:schemeClr val="accent1"/>
-          </a:effectRef>
-          <a:fontRef idx="minor">
-            <a:schemeClr val="lt1"/>
-          </a:fontRef>
-        </p:style>
-        <p:txBody>
-          <a:bodyPr rtlCol="0" anchor="ctr"/>
-          <a:lstStyle/>
-          <a:p>
-            <a:pPr algn="ctr"/>
-            <a:endParaRPr lang="en-US"/>
-          </a:p>
-        </p:txBody>
-      </p:sp>
-    </p:spTree>
-    <p:extLst>
-      <p:ext uri="{BB962C8B-B14F-4D97-AF65-F5344CB8AC3E}">
-        <p14:creationId xmlns:p14="http://schemas.microsoft.com/office/powerpoint/2010/main" val="2940681080"/>
-      </p:ext>
-    </p:extLst>
-  </p:cSld>
-  <p:clrMapOvr>
-    <a:masterClrMapping/>
-  </p:clrMapOvr>
-</p:sld>
-</file>
-
-<file path=ppt/slides/slide11.xml><?xml version="1.0" encoding="utf-8"?>
-<p:sld xmlns:a="http://schemas.openxmlformats.org/drawingml/2006/main" xmlns:r="http://schemas.openxmlformats.org/officeDocument/2006/relationships" xmlns:p="http://schemas.openxmlformats.org/presentationml/2006/main">
-  <p:cSld>
-    <p:spTree>
-      <p:nvGrpSpPr>
-        <p:cNvPr id="1" name=""/>
-        <p:cNvGrpSpPr/>
-        <p:nvPr/>
-      </p:nvGrpSpPr>
-      <p:grpSpPr>
-        <a:xfrm>
-          <a:off x="0" y="0"/>
-          <a:ext cx="0" cy="0"/>
-          <a:chOff x="0" y="0"/>
-          <a:chExt cx="0" cy="0"/>
-        </a:xfrm>
-      </p:grpSpPr>
       <p:pic>
         <p:nvPicPr>
           <p:cNvPr id="5" name="Picture 4">
@@ -3793,43 +3481,30 @@
       </p:pic>
       <p:sp>
         <p:nvSpPr>
-          <p:cNvPr id="2" name="Slide number">
+          <p:cNvPr id="3" name="Slide Number Placeholder 2">
             <a:extLst>
               <a:ext uri="{FF2B5EF4-FFF2-40B4-BE49-F238E27FC236}">
-                <a16:creationId xmlns:a16="http://schemas.microsoft.com/office/drawing/2014/main" id="{D2F1A861-60A5-0F97-EB26-4E038CFFC5D3}"/>
+                <a16:creationId xmlns:a16="http://schemas.microsoft.com/office/drawing/2014/main" id="{C161064D-98E5-E20F-9F3D-A4057B5CB2B5}"/>
               </a:ext>
             </a:extLst>
           </p:cNvPr>
-          <p:cNvSpPr txBox="1"/>
-          <p:nvPr/>
+          <p:cNvSpPr>
+            <a:spLocks noGrp="1"/>
+          </p:cNvSpPr>
+          <p:nvPr>
+            <p:ph type="sldNum" sz="quarter" idx="12"/>
+          </p:nvPr>
         </p:nvSpPr>
-        <p:spPr>
-          <a:xfrm>
-            <a:off x="11723488" y="6477000"/>
-            <a:ext cx="316112" cy="246221"/>
-          </a:xfrm>
-          <a:prstGeom prst="rect">
-            <a:avLst/>
-          </a:prstGeom>
-          <a:solidFill>
-            <a:srgbClr val="FFFFFF"/>
-          </a:solidFill>
-        </p:spPr>
+        <p:spPr/>
         <p:txBody>
-          <a:bodyPr vert="horz" wrap="none" rtlCol="0">
-            <a:spAutoFit/>
-          </a:bodyPr>
+          <a:bodyPr/>
           <a:lstStyle/>
           <a:p>
-            <a:pPr algn="r"/>
-            <a:r>
-              <a:rPr lang="en-US" sz="1000">
-                <a:solidFill>
-                  <a:srgbClr val="808080"/>
-                </a:solidFill>
-              </a:rPr>
-              <a:t>11</a:t>
-            </a:r>
+            <a:fld id="{A80A81DD-F10A-4B1C-963A-0ABBB4865886}" type="slidenum">
+              <a:rPr lang="en-US" smtClean="0"/>
+              <a:t>10</a:t>
+            </a:fld>
+            <a:endParaRPr lang="en-US"/>
           </a:p>
         </p:txBody>
       </p:sp>
@@ -3846,7 +3521,7 @@
 </p:sld>
 </file>
 
-<file path=ppt/slides/slide12.xml><?xml version="1.0" encoding="utf-8"?>
+<file path=ppt/slides/slide11.xml><?xml version="1.0" encoding="utf-8"?>
 <p:sld xmlns:a="http://schemas.openxmlformats.org/drawingml/2006/main" xmlns:r="http://schemas.openxmlformats.org/officeDocument/2006/relationships" xmlns:p="http://schemas.openxmlformats.org/presentationml/2006/main">
   <p:cSld>
     <p:spTree>
@@ -4303,48 +3978,6 @@
       </mc:AlternateContent>
       <p:sp>
         <p:nvSpPr>
-          <p:cNvPr id="4" name="Slide number">
-            <a:extLst>
-              <a:ext uri="{FF2B5EF4-FFF2-40B4-BE49-F238E27FC236}">
-                <a16:creationId xmlns:a16="http://schemas.microsoft.com/office/drawing/2014/main" id="{81083513-72E2-BC23-E589-D8CC1441D960}"/>
-              </a:ext>
-            </a:extLst>
-          </p:cNvPr>
-          <p:cNvSpPr txBox="1"/>
-          <p:nvPr/>
-        </p:nvSpPr>
-        <p:spPr>
-          <a:xfrm>
-            <a:off x="11723488" y="6477000"/>
-            <a:ext cx="316112" cy="246221"/>
-          </a:xfrm>
-          <a:prstGeom prst="rect">
-            <a:avLst/>
-          </a:prstGeom>
-          <a:solidFill>
-            <a:srgbClr val="FFFFFF"/>
-          </a:solidFill>
-        </p:spPr>
-        <p:txBody>
-          <a:bodyPr vert="horz" wrap="none" rtlCol="0">
-            <a:spAutoFit/>
-          </a:bodyPr>
-          <a:lstStyle/>
-          <a:p>
-            <a:pPr algn="r"/>
-            <a:r>
-              <a:rPr lang="en-US" sz="1000">
-                <a:solidFill>
-                  <a:srgbClr val="808080"/>
-                </a:solidFill>
-              </a:rPr>
-              <a:t>12</a:t>
-            </a:r>
-          </a:p>
-        </p:txBody>
-      </p:sp>
-      <p:sp>
-        <p:nvSpPr>
           <p:cNvPr id="5" name="Title rule">
             <a:extLst>
               <a:ext uri="{FF2B5EF4-FFF2-40B4-BE49-F238E27FC236}">
@@ -4411,6 +4044,35 @@
           </a:p>
         </p:txBody>
       </p:sp>
+      <p:sp>
+        <p:nvSpPr>
+          <p:cNvPr id="7" name="Slide Number Placeholder 6">
+            <a:extLst>
+              <a:ext uri="{FF2B5EF4-FFF2-40B4-BE49-F238E27FC236}">
+                <a16:creationId xmlns:a16="http://schemas.microsoft.com/office/drawing/2014/main" id="{556D7D2F-7600-F64D-8592-D5145C75B552}"/>
+              </a:ext>
+            </a:extLst>
+          </p:cNvPr>
+          <p:cNvSpPr>
+            <a:spLocks noGrp="1"/>
+          </p:cNvSpPr>
+          <p:nvPr>
+            <p:ph type="sldNum" sz="quarter" idx="12"/>
+          </p:nvPr>
+        </p:nvSpPr>
+        <p:spPr/>
+        <p:txBody>
+          <a:bodyPr/>
+          <a:lstStyle/>
+          <a:p>
+            <a:fld id="{A80A81DD-F10A-4B1C-963A-0ABBB4865886}" type="slidenum">
+              <a:rPr lang="en-US" smtClean="0"/>
+              <a:t>11</a:t>
+            </a:fld>
+            <a:endParaRPr lang="en-US"/>
+          </a:p>
+        </p:txBody>
+      </p:sp>
     </p:spTree>
     <p:extLst>
       <p:ext uri="{BB962C8B-B14F-4D97-AF65-F5344CB8AC3E}">
@@ -4424,7 +4086,7 @@
 </p:sld>
 </file>
 
-<file path=ppt/slides/slide13.xml><?xml version="1.0" encoding="utf-8"?>
+<file path=ppt/slides/slide12.xml><?xml version="1.0" encoding="utf-8"?>
 <p:sld xmlns:a="http://schemas.openxmlformats.org/drawingml/2006/main" xmlns:r="http://schemas.openxmlformats.org/officeDocument/2006/relationships" xmlns:p="http://schemas.openxmlformats.org/presentationml/2006/main">
   <p:cSld>
     <p:spTree>
@@ -4986,43 +4648,30 @@
       </p:graphicFrame>
       <p:sp>
         <p:nvSpPr>
-          <p:cNvPr id="3" name="Slide number">
+          <p:cNvPr id="6" name="Slide Number Placeholder 5">
             <a:extLst>
               <a:ext uri="{FF2B5EF4-FFF2-40B4-BE49-F238E27FC236}">
-                <a16:creationId xmlns:a16="http://schemas.microsoft.com/office/drawing/2014/main" id="{94F07727-A98D-8A04-1C7F-D7489392107A}"/>
+                <a16:creationId xmlns:a16="http://schemas.microsoft.com/office/drawing/2014/main" id="{4C9DF847-83FC-90F1-8501-B24DDDA4CBAC}"/>
               </a:ext>
             </a:extLst>
           </p:cNvPr>
-          <p:cNvSpPr txBox="1"/>
-          <p:nvPr/>
+          <p:cNvSpPr>
+            <a:spLocks noGrp="1"/>
+          </p:cNvSpPr>
+          <p:nvPr>
+            <p:ph type="sldNum" sz="quarter" idx="12"/>
+          </p:nvPr>
         </p:nvSpPr>
-        <p:spPr>
-          <a:xfrm>
-            <a:off x="11723488" y="6477000"/>
-            <a:ext cx="316112" cy="246221"/>
-          </a:xfrm>
-          <a:prstGeom prst="rect">
-            <a:avLst/>
-          </a:prstGeom>
-          <a:solidFill>
-            <a:srgbClr val="FFFFFF"/>
-          </a:solidFill>
-        </p:spPr>
+        <p:spPr/>
         <p:txBody>
-          <a:bodyPr vert="horz" wrap="none" rtlCol="0">
-            <a:spAutoFit/>
-          </a:bodyPr>
+          <a:bodyPr/>
           <a:lstStyle/>
           <a:p>
-            <a:pPr algn="r"/>
-            <a:r>
-              <a:rPr lang="en-US" sz="1000">
-                <a:solidFill>
-                  <a:srgbClr val="808080"/>
-                </a:solidFill>
-              </a:rPr>
-              <a:t>13</a:t>
-            </a:r>
+            <a:fld id="{A80A81DD-F10A-4B1C-963A-0ABBB4865886}" type="slidenum">
+              <a:rPr lang="en-US" smtClean="0"/>
+              <a:t>12</a:t>
+            </a:fld>
+            <a:endParaRPr lang="en-US"/>
           </a:p>
         </p:txBody>
       </p:sp>
@@ -5039,7 +4688,7 @@
 </p:sld>
 </file>
 
-<file path=ppt/slides/slide14.xml><?xml version="1.0" encoding="utf-8"?>
+<file path=ppt/slides/slide13.xml><?xml version="1.0" encoding="utf-8"?>
 <p:sld xmlns:a="http://schemas.openxmlformats.org/drawingml/2006/main" xmlns:r="http://schemas.openxmlformats.org/officeDocument/2006/relationships" xmlns:p="http://schemas.openxmlformats.org/presentationml/2006/main">
   <p:cSld>
     <p:spTree>
@@ -5959,43 +5608,30 @@
       </p:sp>
       <p:sp>
         <p:nvSpPr>
-          <p:cNvPr id="8" name="Slide number">
+          <p:cNvPr id="9" name="Slide Number Placeholder 8">
             <a:extLst>
               <a:ext uri="{FF2B5EF4-FFF2-40B4-BE49-F238E27FC236}">
-                <a16:creationId xmlns:a16="http://schemas.microsoft.com/office/drawing/2014/main" id="{A51E2228-E737-82A2-C013-DA659621EFB1}"/>
+                <a16:creationId xmlns:a16="http://schemas.microsoft.com/office/drawing/2014/main" id="{B70A47C1-39EB-E009-2F78-4BA894C1EE96}"/>
               </a:ext>
             </a:extLst>
           </p:cNvPr>
-          <p:cNvSpPr txBox="1"/>
-          <p:nvPr/>
+          <p:cNvSpPr>
+            <a:spLocks noGrp="1"/>
+          </p:cNvSpPr>
+          <p:nvPr>
+            <p:ph type="sldNum" sz="quarter" idx="12"/>
+          </p:nvPr>
         </p:nvSpPr>
-        <p:spPr>
-          <a:xfrm>
-            <a:off x="11723488" y="6477000"/>
-            <a:ext cx="316112" cy="246221"/>
-          </a:xfrm>
-          <a:prstGeom prst="rect">
-            <a:avLst/>
-          </a:prstGeom>
-          <a:solidFill>
-            <a:srgbClr val="FFFFFF"/>
-          </a:solidFill>
-        </p:spPr>
+        <p:spPr/>
         <p:txBody>
-          <a:bodyPr vert="horz" wrap="none" rtlCol="0">
-            <a:spAutoFit/>
-          </a:bodyPr>
+          <a:bodyPr/>
           <a:lstStyle/>
           <a:p>
-            <a:pPr algn="r"/>
-            <a:r>
-              <a:rPr lang="en-US" sz="1000">
-                <a:solidFill>
-                  <a:srgbClr val="808080"/>
-                </a:solidFill>
-              </a:rPr>
-              <a:t>14</a:t>
-            </a:r>
+            <a:fld id="{A80A81DD-F10A-4B1C-963A-0ABBB4865886}" type="slidenum">
+              <a:rPr lang="en-US" smtClean="0"/>
+              <a:t>13</a:t>
+            </a:fld>
+            <a:endParaRPr lang="en-US"/>
           </a:p>
         </p:txBody>
       </p:sp>
@@ -6012,7 +5648,7 @@
 </p:sld>
 </file>
 
-<file path=ppt/slides/slide15.xml><?xml version="1.0" encoding="utf-8"?>
+<file path=ppt/slides/slide14.xml><?xml version="1.0" encoding="utf-8"?>
 <p:sld xmlns:a="http://schemas.openxmlformats.org/drawingml/2006/main" xmlns:r="http://schemas.openxmlformats.org/officeDocument/2006/relationships" xmlns:p="http://schemas.openxmlformats.org/presentationml/2006/main">
   <p:cSld>
     <p:spTree>
@@ -6481,43 +6117,30 @@
       </p:sp>
       <p:sp>
         <p:nvSpPr>
-          <p:cNvPr id="4" name="Slide number">
+          <p:cNvPr id="6" name="Slide Number Placeholder 5">
             <a:extLst>
               <a:ext uri="{FF2B5EF4-FFF2-40B4-BE49-F238E27FC236}">
-                <a16:creationId xmlns:a16="http://schemas.microsoft.com/office/drawing/2014/main" id="{D186FE1F-50CA-EFE0-B18A-75CB7CE1AF47}"/>
+                <a16:creationId xmlns:a16="http://schemas.microsoft.com/office/drawing/2014/main" id="{87CFF810-EEDF-F310-C43C-59596B4BD712}"/>
               </a:ext>
             </a:extLst>
           </p:cNvPr>
-          <p:cNvSpPr txBox="1"/>
-          <p:nvPr/>
+          <p:cNvSpPr>
+            <a:spLocks noGrp="1"/>
+          </p:cNvSpPr>
+          <p:nvPr>
+            <p:ph type="sldNum" sz="quarter" idx="12"/>
+          </p:nvPr>
         </p:nvSpPr>
-        <p:spPr>
-          <a:xfrm>
-            <a:off x="11723488" y="6477000"/>
-            <a:ext cx="316112" cy="246221"/>
-          </a:xfrm>
-          <a:prstGeom prst="rect">
-            <a:avLst/>
-          </a:prstGeom>
-          <a:solidFill>
-            <a:srgbClr val="FFFFFF"/>
-          </a:solidFill>
-        </p:spPr>
+        <p:spPr/>
         <p:txBody>
-          <a:bodyPr vert="horz" wrap="none" rtlCol="0">
-            <a:spAutoFit/>
-          </a:bodyPr>
+          <a:bodyPr/>
           <a:lstStyle/>
           <a:p>
-            <a:pPr algn="r"/>
-            <a:r>
-              <a:rPr lang="en-US" sz="1000">
-                <a:solidFill>
-                  <a:srgbClr val="808080"/>
-                </a:solidFill>
-              </a:rPr>
-              <a:t>15</a:t>
-            </a:r>
+            <a:fld id="{A80A81DD-F10A-4B1C-963A-0ABBB4865886}" type="slidenum">
+              <a:rPr lang="en-US" smtClean="0"/>
+              <a:t>14</a:t>
+            </a:fld>
+            <a:endParaRPr lang="en-US"/>
           </a:p>
         </p:txBody>
       </p:sp>
@@ -6534,7 +6157,7 @@
 </p:sld>
 </file>
 
-<file path=ppt/slides/slide16.xml><?xml version="1.0" encoding="utf-8"?>
+<file path=ppt/slides/slide15.xml><?xml version="1.0" encoding="utf-8"?>
 <p:sld xmlns:a="http://schemas.openxmlformats.org/drawingml/2006/main" xmlns:r="http://schemas.openxmlformats.org/officeDocument/2006/relationships" xmlns:p="http://schemas.openxmlformats.org/presentationml/2006/main">
   <p:cSld>
     <p:spTree>
@@ -6639,8 +6262,8 @@
           </a:p>
         </p:txBody>
       </p:sp>
-      <mc:AlternateContent xmlns:mc="http://schemas.openxmlformats.org/markup-compatibility/2006">
-        <mc:Choice xmlns:a14="http://schemas.microsoft.com/office/drawing/2010/main" Requires="a14">
+      <mc:AlternateContent xmlns:mc="http://schemas.openxmlformats.org/markup-compatibility/2006" xmlns:a14="http://schemas.microsoft.com/office/drawing/2010/main">
+        <mc:Choice Requires="a14">
           <p:sp>
             <p:nvSpPr>
               <p:cNvPr id="3" name="Content Placeholder 2">
@@ -6885,7 +6508,7 @@
             </p:txBody>
           </p:sp>
         </mc:Choice>
-        <mc:Fallback>
+        <mc:Fallback xmlns="">
           <p:sp>
             <p:nvSpPr>
               <p:cNvPr id="3" name="Content Placeholder 2">
@@ -6925,48 +6548,6 @@
           </p:sp>
         </mc:Fallback>
       </mc:AlternateContent>
-      <p:sp>
-        <p:nvSpPr>
-          <p:cNvPr id="4" name="Slide number">
-            <a:extLst>
-              <a:ext uri="{FF2B5EF4-FFF2-40B4-BE49-F238E27FC236}">
-                <a16:creationId xmlns:a16="http://schemas.microsoft.com/office/drawing/2014/main" id="{8BC77056-A577-6FD3-8D6C-98BF965C42E1}"/>
-              </a:ext>
-            </a:extLst>
-          </p:cNvPr>
-          <p:cNvSpPr txBox="1"/>
-          <p:nvPr/>
-        </p:nvSpPr>
-        <p:spPr>
-          <a:xfrm>
-            <a:off x="11723488" y="6477000"/>
-            <a:ext cx="316112" cy="246221"/>
-          </a:xfrm>
-          <a:prstGeom prst="rect">
-            <a:avLst/>
-          </a:prstGeom>
-          <a:solidFill>
-            <a:srgbClr val="FFFFFF"/>
-          </a:solidFill>
-        </p:spPr>
-        <p:txBody>
-          <a:bodyPr vert="horz" wrap="none" rtlCol="0">
-            <a:spAutoFit/>
-          </a:bodyPr>
-          <a:lstStyle/>
-          <a:p>
-            <a:pPr algn="r"/>
-            <a:r>
-              <a:rPr lang="en-US" sz="1000">
-                <a:solidFill>
-                  <a:srgbClr val="808080"/>
-                </a:solidFill>
-              </a:rPr>
-              <a:t>16</a:t>
-            </a:r>
-          </a:p>
-        </p:txBody>
-      </p:sp>
       <p:sp>
         <p:nvSpPr>
           <p:cNvPr id="5" name="Title rule">
@@ -7035,6 +6616,35 @@
           </a:p>
         </p:txBody>
       </p:sp>
+      <p:sp>
+        <p:nvSpPr>
+          <p:cNvPr id="7" name="Slide Number Placeholder 6">
+            <a:extLst>
+              <a:ext uri="{FF2B5EF4-FFF2-40B4-BE49-F238E27FC236}">
+                <a16:creationId xmlns:a16="http://schemas.microsoft.com/office/drawing/2014/main" id="{6F221052-B2D1-3D1F-497A-439609BAF4B3}"/>
+              </a:ext>
+            </a:extLst>
+          </p:cNvPr>
+          <p:cNvSpPr>
+            <a:spLocks noGrp="1"/>
+          </p:cNvSpPr>
+          <p:nvPr>
+            <p:ph type="sldNum" sz="quarter" idx="12"/>
+          </p:nvPr>
+        </p:nvSpPr>
+        <p:spPr/>
+        <p:txBody>
+          <a:bodyPr/>
+          <a:lstStyle/>
+          <a:p>
+            <a:fld id="{A80A81DD-F10A-4B1C-963A-0ABBB4865886}" type="slidenum">
+              <a:rPr lang="en-US" smtClean="0"/>
+              <a:t>15</a:t>
+            </a:fld>
+            <a:endParaRPr lang="en-US"/>
+          </a:p>
+        </p:txBody>
+      </p:sp>
     </p:spTree>
     <p:extLst>
       <p:ext uri="{BB962C8B-B14F-4D97-AF65-F5344CB8AC3E}">
@@ -7048,7 +6658,7 @@
 </p:sld>
 </file>
 
-<file path=ppt/slides/slide17.xml><?xml version="1.0" encoding="utf-8"?>
+<file path=ppt/slides/slide16.xml><?xml version="1.0" encoding="utf-8"?>
 <p:sld xmlns:a="http://schemas.openxmlformats.org/drawingml/2006/main" xmlns:r="http://schemas.openxmlformats.org/officeDocument/2006/relationships" xmlns:p="http://schemas.openxmlformats.org/presentationml/2006/main">
   <p:cSld>
     <p:spTree>
@@ -7656,43 +7266,30 @@
       </p:sp>
       <p:sp>
         <p:nvSpPr>
-          <p:cNvPr id="3" name="Slide number">
+          <p:cNvPr id="4" name="Slide Number Placeholder 3">
             <a:extLst>
               <a:ext uri="{FF2B5EF4-FFF2-40B4-BE49-F238E27FC236}">
-                <a16:creationId xmlns:a16="http://schemas.microsoft.com/office/drawing/2014/main" id="{06B09A87-2DEB-3E20-2696-1CF5A92BEE26}"/>
+                <a16:creationId xmlns:a16="http://schemas.microsoft.com/office/drawing/2014/main" id="{CE036EB1-EA38-3E8B-8F75-65322786C3DF}"/>
               </a:ext>
             </a:extLst>
           </p:cNvPr>
-          <p:cNvSpPr txBox="1"/>
-          <p:nvPr/>
+          <p:cNvSpPr>
+            <a:spLocks noGrp="1"/>
+          </p:cNvSpPr>
+          <p:nvPr>
+            <p:ph type="sldNum" sz="quarter" idx="12"/>
+          </p:nvPr>
         </p:nvSpPr>
-        <p:spPr>
-          <a:xfrm>
-            <a:off x="11723488" y="6477000"/>
-            <a:ext cx="316112" cy="246221"/>
-          </a:xfrm>
-          <a:prstGeom prst="rect">
-            <a:avLst/>
-          </a:prstGeom>
-          <a:solidFill>
-            <a:srgbClr val="FFFFFF"/>
-          </a:solidFill>
-        </p:spPr>
+        <p:spPr/>
         <p:txBody>
-          <a:bodyPr vert="horz" wrap="none" rtlCol="0">
-            <a:spAutoFit/>
-          </a:bodyPr>
+          <a:bodyPr/>
           <a:lstStyle/>
           <a:p>
-            <a:pPr algn="r"/>
-            <a:r>
-              <a:rPr lang="en-US" sz="1000">
-                <a:solidFill>
-                  <a:srgbClr val="808080"/>
-                </a:solidFill>
-              </a:rPr>
-              <a:t>17</a:t>
-            </a:r>
+            <a:fld id="{A80A81DD-F10A-4B1C-963A-0ABBB4865886}" type="slidenum">
+              <a:rPr lang="en-US" smtClean="0"/>
+              <a:t>16</a:t>
+            </a:fld>
+            <a:endParaRPr lang="en-US"/>
           </a:p>
         </p:txBody>
       </p:sp>
@@ -7709,7 +7306,7 @@
 </p:sld>
 </file>
 
-<file path=ppt/slides/slide18.xml><?xml version="1.0" encoding="utf-8"?>
+<file path=ppt/slides/slide17.xml><?xml version="1.0" encoding="utf-8"?>
 <p:sld xmlns:a="http://schemas.openxmlformats.org/drawingml/2006/main" xmlns:r="http://schemas.openxmlformats.org/officeDocument/2006/relationships" xmlns:p="http://schemas.openxmlformats.org/presentationml/2006/main">
   <p:cSld>
     <p:spTree>
@@ -7819,8 +7416,8 @@
           </a:p>
         </p:txBody>
       </p:sp>
-      <mc:AlternateContent xmlns:mc="http://schemas.openxmlformats.org/markup-compatibility/2006">
-        <mc:Choice xmlns:a14="http://schemas.microsoft.com/office/drawing/2010/main" Requires="a14">
+      <mc:AlternateContent xmlns:mc="http://schemas.openxmlformats.org/markup-compatibility/2006" xmlns:a14="http://schemas.microsoft.com/office/drawing/2010/main">
+        <mc:Choice Requires="a14">
           <p:sp>
             <p:nvSpPr>
               <p:cNvPr id="3" name="Content Placeholder 2">
@@ -8005,7 +7602,7 @@
             </p:txBody>
           </p:sp>
         </mc:Choice>
-        <mc:Fallback>
+        <mc:Fallback xmlns="">
           <p:sp>
             <p:nvSpPr>
               <p:cNvPr id="3" name="Content Placeholder 2">
@@ -8045,48 +7642,6 @@
           </p:sp>
         </mc:Fallback>
       </mc:AlternateContent>
-      <p:sp>
-        <p:nvSpPr>
-          <p:cNvPr id="4" name="Slide number">
-            <a:extLst>
-              <a:ext uri="{FF2B5EF4-FFF2-40B4-BE49-F238E27FC236}">
-                <a16:creationId xmlns:a16="http://schemas.microsoft.com/office/drawing/2014/main" id="{526604F2-791A-0126-62A8-E73EB39ECABB}"/>
-              </a:ext>
-            </a:extLst>
-          </p:cNvPr>
-          <p:cNvSpPr txBox="1"/>
-          <p:nvPr/>
-        </p:nvSpPr>
-        <p:spPr>
-          <a:xfrm>
-            <a:off x="11723488" y="6477000"/>
-            <a:ext cx="316112" cy="246221"/>
-          </a:xfrm>
-          <a:prstGeom prst="rect">
-            <a:avLst/>
-          </a:prstGeom>
-          <a:solidFill>
-            <a:srgbClr val="FFFFFF"/>
-          </a:solidFill>
-        </p:spPr>
-        <p:txBody>
-          <a:bodyPr vert="horz" wrap="none" rtlCol="0">
-            <a:spAutoFit/>
-          </a:bodyPr>
-          <a:lstStyle/>
-          <a:p>
-            <a:pPr algn="r"/>
-            <a:r>
-              <a:rPr lang="en-US" sz="1000">
-                <a:solidFill>
-                  <a:srgbClr val="808080"/>
-                </a:solidFill>
-              </a:rPr>
-              <a:t>18</a:t>
-            </a:r>
-          </a:p>
-        </p:txBody>
-      </p:sp>
       <p:sp>
         <p:nvSpPr>
           <p:cNvPr id="5" name="Title rule">
@@ -8155,6 +7710,35 @@
           </a:p>
         </p:txBody>
       </p:sp>
+      <p:sp>
+        <p:nvSpPr>
+          <p:cNvPr id="7" name="Slide Number Placeholder 6">
+            <a:extLst>
+              <a:ext uri="{FF2B5EF4-FFF2-40B4-BE49-F238E27FC236}">
+                <a16:creationId xmlns:a16="http://schemas.microsoft.com/office/drawing/2014/main" id="{4BA91A17-B036-9BA1-8AEC-CD2B9173BBFE}"/>
+              </a:ext>
+            </a:extLst>
+          </p:cNvPr>
+          <p:cNvSpPr>
+            <a:spLocks noGrp="1"/>
+          </p:cNvSpPr>
+          <p:nvPr>
+            <p:ph type="sldNum" sz="quarter" idx="12"/>
+          </p:nvPr>
+        </p:nvSpPr>
+        <p:spPr/>
+        <p:txBody>
+          <a:bodyPr/>
+          <a:lstStyle/>
+          <a:p>
+            <a:fld id="{A80A81DD-F10A-4B1C-963A-0ABBB4865886}" type="slidenum">
+              <a:rPr lang="en-US" smtClean="0"/>
+              <a:t>17</a:t>
+            </a:fld>
+            <a:endParaRPr lang="en-US"/>
+          </a:p>
+        </p:txBody>
+      </p:sp>
     </p:spTree>
     <p:extLst>
       <p:ext uri="{BB962C8B-B14F-4D97-AF65-F5344CB8AC3E}">
@@ -8168,7 +7752,7 @@
 </p:sld>
 </file>
 
-<file path=ppt/slides/slide19.xml><?xml version="1.0" encoding="utf-8"?>
+<file path=ppt/slides/slide18.xml><?xml version="1.0" encoding="utf-8"?>
 <p:sld xmlns:a="http://schemas.openxmlformats.org/drawingml/2006/main" xmlns:r="http://schemas.openxmlformats.org/officeDocument/2006/relationships" xmlns:p="http://schemas.openxmlformats.org/presentationml/2006/main">
   <p:cSld>
     <p:spTree>
@@ -8185,8 +7769,8 @@
           <a:chExt cx="0" cy="0"/>
         </a:xfrm>
       </p:grpSpPr>
-      <mc:AlternateContent xmlns:mc="http://schemas.openxmlformats.org/markup-compatibility/2006">
-        <mc:Choice xmlns:a14="http://schemas.microsoft.com/office/drawing/2010/main" Requires="a14">
+      <mc:AlternateContent xmlns:mc="http://schemas.openxmlformats.org/markup-compatibility/2006" xmlns:a14="http://schemas.microsoft.com/office/drawing/2010/main">
+        <mc:Choice Requires="a14">
           <p:sp>
             <p:nvSpPr>
               <p:cNvPr id="4" name="Content Placeholder 2">
@@ -9382,7 +8966,7 @@
             </p:txBody>
           </p:sp>
         </mc:Choice>
-        <mc:Fallback>
+        <mc:Fallback xmlns="">
           <p:sp>
             <p:nvSpPr>
               <p:cNvPr id="4" name="Content Placeholder 2">
@@ -9649,43 +9233,30 @@
       </p:sp>
       <p:sp>
         <p:nvSpPr>
-          <p:cNvPr id="5" name="Slide number">
+          <p:cNvPr id="7" name="Slide Number Placeholder 6">
             <a:extLst>
               <a:ext uri="{FF2B5EF4-FFF2-40B4-BE49-F238E27FC236}">
-                <a16:creationId xmlns:a16="http://schemas.microsoft.com/office/drawing/2014/main" id="{20C086A4-A934-6519-25AC-E05BFF5804C8}"/>
+                <a16:creationId xmlns:a16="http://schemas.microsoft.com/office/drawing/2014/main" id="{FB64A63D-7161-3451-2513-01266EA1A628}"/>
               </a:ext>
             </a:extLst>
           </p:cNvPr>
-          <p:cNvSpPr txBox="1"/>
-          <p:nvPr/>
+          <p:cNvSpPr>
+            <a:spLocks noGrp="1"/>
+          </p:cNvSpPr>
+          <p:nvPr>
+            <p:ph type="sldNum" sz="quarter" idx="12"/>
+          </p:nvPr>
         </p:nvSpPr>
-        <p:spPr>
-          <a:xfrm>
-            <a:off x="11723488" y="6477000"/>
-            <a:ext cx="316112" cy="246221"/>
-          </a:xfrm>
-          <a:prstGeom prst="rect">
-            <a:avLst/>
-          </a:prstGeom>
-          <a:solidFill>
-            <a:srgbClr val="FFFFFF"/>
-          </a:solidFill>
-        </p:spPr>
+        <p:spPr/>
         <p:txBody>
-          <a:bodyPr vert="horz" wrap="none" rtlCol="0">
-            <a:spAutoFit/>
-          </a:bodyPr>
+          <a:bodyPr/>
           <a:lstStyle/>
           <a:p>
-            <a:pPr algn="r"/>
-            <a:r>
-              <a:rPr lang="en-US" sz="1000">
-                <a:solidFill>
-                  <a:srgbClr val="808080"/>
-                </a:solidFill>
-              </a:rPr>
-              <a:t>19</a:t>
-            </a:r>
+            <a:fld id="{A80A81DD-F10A-4B1C-963A-0ABBB4865886}" type="slidenum">
+              <a:rPr lang="en-US" smtClean="0"/>
+              <a:t>18</a:t>
+            </a:fld>
+            <a:endParaRPr lang="en-US"/>
           </a:p>
         </p:txBody>
       </p:sp>
@@ -9693,6 +9264,293 @@
     <p:extLst>
       <p:ext uri="{BB962C8B-B14F-4D97-AF65-F5344CB8AC3E}">
         <p14:creationId xmlns:p14="http://schemas.microsoft.com/office/powerpoint/2010/main" val="919873286"/>
+      </p:ext>
+    </p:extLst>
+  </p:cSld>
+  <p:clrMapOvr>
+    <a:masterClrMapping/>
+  </p:clrMapOvr>
+</p:sld>
+</file>
+
+<file path=ppt/slides/slide19.xml><?xml version="1.0" encoding="utf-8"?>
+<p:sld xmlns:a="http://schemas.openxmlformats.org/drawingml/2006/main" xmlns:r="http://schemas.openxmlformats.org/officeDocument/2006/relationships" xmlns:p="http://schemas.openxmlformats.org/presentationml/2006/main">
+  <p:cSld>
+    <p:spTree>
+      <p:nvGrpSpPr>
+        <p:cNvPr id="1" name=""/>
+        <p:cNvGrpSpPr/>
+        <p:nvPr/>
+      </p:nvGrpSpPr>
+      <p:grpSpPr>
+        <a:xfrm>
+          <a:off x="0" y="0"/>
+          <a:ext cx="0" cy="0"/>
+          <a:chOff x="0" y="0"/>
+          <a:chExt cx="0" cy="0"/>
+        </a:xfrm>
+      </p:grpSpPr>
+      <p:sp>
+        <p:nvSpPr>
+          <p:cNvPr id="6" name="Body card">
+            <a:extLst>
+              <a:ext uri="{FF2B5EF4-FFF2-40B4-BE49-F238E27FC236}">
+                <a16:creationId xmlns:a16="http://schemas.microsoft.com/office/drawing/2014/main" id="{D935A494-1C08-FCA2-A357-21200E99E193}"/>
+              </a:ext>
+            </a:extLst>
+          </p:cNvPr>
+          <p:cNvSpPr/>
+          <p:nvPr/>
+        </p:nvSpPr>
+        <p:spPr>
+          <a:xfrm>
+            <a:off x="635000" y="1676400"/>
+            <a:ext cx="10922000" cy="3263900"/>
+          </a:xfrm>
+          <a:prstGeom prst="roundRect">
+            <a:avLst>
+              <a:gd name="adj" fmla="val 3000"/>
+            </a:avLst>
+          </a:prstGeom>
+          <a:solidFill>
+            <a:srgbClr val="F2F6FC"/>
+          </a:solidFill>
+          <a:ln w="19050">
+            <a:solidFill>
+              <a:srgbClr val="4472C4"/>
+            </a:solidFill>
+          </a:ln>
+        </p:spPr>
+        <p:style>
+          <a:lnRef idx="2">
+            <a:schemeClr val="accent1">
+              <a:shade val="15000"/>
+            </a:schemeClr>
+          </a:lnRef>
+          <a:fillRef idx="1">
+            <a:schemeClr val="accent1"/>
+          </a:fillRef>
+          <a:effectRef idx="0">
+            <a:schemeClr val="accent1"/>
+          </a:effectRef>
+          <a:fontRef idx="minor">
+            <a:schemeClr val="lt1"/>
+          </a:fontRef>
+        </p:style>
+        <p:txBody>
+          <a:bodyPr rtlCol="0" anchor="ctr"/>
+          <a:lstStyle/>
+          <a:p>
+            <a:pPr algn="ctr"/>
+            <a:endParaRPr lang="en-US"/>
+          </a:p>
+        </p:txBody>
+      </p:sp>
+      <p:sp>
+        <p:nvSpPr>
+          <p:cNvPr id="2" name="Title 1">
+            <a:extLst>
+              <a:ext uri="{FF2B5EF4-FFF2-40B4-BE49-F238E27FC236}">
+                <a16:creationId xmlns:a16="http://schemas.microsoft.com/office/drawing/2014/main" id="{B589C3C6-C810-835B-54A4-E5A4037C1C25}"/>
+              </a:ext>
+            </a:extLst>
+          </p:cNvPr>
+          <p:cNvSpPr>
+            <a:spLocks noGrp="1"/>
+          </p:cNvSpPr>
+          <p:nvPr>
+            <p:ph type="title"/>
+          </p:nvPr>
+        </p:nvSpPr>
+        <p:spPr/>
+        <p:txBody>
+          <a:bodyPr/>
+          <a:lstStyle/>
+          <a:p>
+            <a:r>
+              <a:rPr lang="en-US">
+                <a:solidFill>
+                  <a:srgbClr val="1F3864"/>
+                </a:solidFill>
+              </a:rPr>
+              <a:t>Practice: Quartiles from Exam Scores</a:t>
+            </a:r>
+            <a:endParaRPr lang="en-US" dirty="0">
+              <a:solidFill>
+                <a:srgbClr val="1F3864"/>
+              </a:solidFill>
+            </a:endParaRPr>
+          </a:p>
+        </p:txBody>
+      </p:sp>
+      <p:sp>
+        <p:nvSpPr>
+          <p:cNvPr id="3" name="Content Placeholder 2">
+            <a:extLst>
+              <a:ext uri="{FF2B5EF4-FFF2-40B4-BE49-F238E27FC236}">
+                <a16:creationId xmlns:a16="http://schemas.microsoft.com/office/drawing/2014/main" id="{307FDE7D-C54C-9F70-498E-F05F62BAA59A}"/>
+              </a:ext>
+            </a:extLst>
+          </p:cNvPr>
+          <p:cNvSpPr>
+            <a:spLocks noGrp="1"/>
+          </p:cNvSpPr>
+          <p:nvPr>
+            <p:ph idx="1"/>
+          </p:nvPr>
+        </p:nvSpPr>
+        <p:spPr/>
+        <p:txBody>
+          <a:bodyPr/>
+          <a:lstStyle/>
+          <a:p>
+            <a:pPr marL="0" indent="0">
+              <a:buNone/>
+            </a:pPr>
+            <a:r>
+              <a:rPr lang="en-US" dirty="0"/>
+              <a:t>Consider the following 15 exam scores of students in a statistics course</a:t>
+            </a:r>
+          </a:p>
+          <a:p>
+            <a:pPr marL="0" indent="0">
+              <a:buNone/>
+            </a:pPr>
+            <a:endParaRPr lang="en-US" dirty="0"/>
+          </a:p>
+          <a:p>
+            <a:pPr marL="0" indent="0">
+              <a:buNone/>
+            </a:pPr>
+            <a:r>
+              <a:rPr lang="en-US" dirty="0"/>
+              <a:t>61,61,65,65,66,68,69,73,74,75,76,78,79,90,94</a:t>
+            </a:r>
+          </a:p>
+          <a:p>
+            <a:pPr marL="0" indent="0">
+              <a:buNone/>
+            </a:pPr>
+            <a:endParaRPr lang="en-US" dirty="0"/>
+          </a:p>
+          <a:p>
+            <a:pPr marL="0" indent="0">
+              <a:buNone/>
+            </a:pPr>
+            <a:endParaRPr lang="en-US" dirty="0"/>
+          </a:p>
+          <a:p>
+            <a:pPr marL="0" indent="0">
+              <a:buNone/>
+            </a:pPr>
+            <a:r>
+              <a:rPr lang="en-US" dirty="0"/>
+              <a:t>Compute the 3 quartiles Q1, Q2, and Q3</a:t>
+            </a:r>
+          </a:p>
+        </p:txBody>
+      </p:sp>
+      <p:sp>
+        <p:nvSpPr>
+          <p:cNvPr id="5" name="Title rule">
+            <a:extLst>
+              <a:ext uri="{FF2B5EF4-FFF2-40B4-BE49-F238E27FC236}">
+                <a16:creationId xmlns:a16="http://schemas.microsoft.com/office/drawing/2014/main" id="{D0E04E23-DA0F-C42C-1DFA-4ACEDB7D4532}"/>
+              </a:ext>
+            </a:extLst>
+          </p:cNvPr>
+          <p:cNvSpPr/>
+          <p:nvPr/>
+        </p:nvSpPr>
+        <p:spPr>
+          <a:xfrm>
+            <a:off x="838200" y="1600200"/>
+            <a:ext cx="10515600" cy="38100"/>
+          </a:xfrm>
+          <a:prstGeom prst="rect">
+            <a:avLst/>
+          </a:prstGeom>
+          <a:solidFill>
+            <a:srgbClr val="4472C4"/>
+          </a:solidFill>
+          <a:ln w="12700" cap="flat" cmpd="sng" algn="ctr">
+            <a:noFill/>
+            <a:prstDash val="solid"/>
+            <a:miter lim="800000"/>
+          </a:ln>
+          <a:effectLst/>
+          <a:extLst>
+            <a:ext uri="{91240B29-F687-4F45-9708-019B960494DF}">
+              <a14:hiddenLine xmlns:a14="http://schemas.microsoft.com/office/drawing/2010/main" w="12700" cap="flat" cmpd="sng" algn="ctr">
+                <a:solidFill>
+                  <a:schemeClr val="accent1">
+                    <a:shade val="15000"/>
+                  </a:schemeClr>
+                </a:solidFill>
+                <a:prstDash val="solid"/>
+                <a:miter lim="800000"/>
+              </a14:hiddenLine>
+            </a:ext>
+          </a:extLst>
+        </p:spPr>
+        <p:style>
+          <a:lnRef idx="2">
+            <a:schemeClr val="accent1">
+              <a:shade val="15000"/>
+            </a:schemeClr>
+          </a:lnRef>
+          <a:fillRef idx="1">
+            <a:schemeClr val="accent1"/>
+          </a:fillRef>
+          <a:effectRef idx="0">
+            <a:schemeClr val="accent1"/>
+          </a:effectRef>
+          <a:fontRef idx="minor">
+            <a:schemeClr val="lt1"/>
+          </a:fontRef>
+        </p:style>
+        <p:txBody>
+          <a:bodyPr rtlCol="0" anchor="ctr"/>
+          <a:lstStyle/>
+          <a:p>
+            <a:pPr algn="ctr"/>
+            <a:endParaRPr lang="en-US"/>
+          </a:p>
+        </p:txBody>
+      </p:sp>
+      <p:sp>
+        <p:nvSpPr>
+          <p:cNvPr id="7" name="Slide Number Placeholder 6">
+            <a:extLst>
+              <a:ext uri="{FF2B5EF4-FFF2-40B4-BE49-F238E27FC236}">
+                <a16:creationId xmlns:a16="http://schemas.microsoft.com/office/drawing/2014/main" id="{E30F09FE-0108-F5AC-86AE-CF43DC4344E3}"/>
+              </a:ext>
+            </a:extLst>
+          </p:cNvPr>
+          <p:cNvSpPr>
+            <a:spLocks noGrp="1"/>
+          </p:cNvSpPr>
+          <p:nvPr>
+            <p:ph type="sldNum" sz="quarter" idx="12"/>
+          </p:nvPr>
+        </p:nvSpPr>
+        <p:spPr/>
+        <p:txBody>
+          <a:bodyPr/>
+          <a:lstStyle/>
+          <a:p>
+            <a:fld id="{A80A81DD-F10A-4B1C-963A-0ABBB4865886}" type="slidenum">
+              <a:rPr lang="en-US" smtClean="0"/>
+              <a:t>19</a:t>
+            </a:fld>
+            <a:endParaRPr lang="en-US"/>
+          </a:p>
+        </p:txBody>
+      </p:sp>
+    </p:spTree>
+    <p:extLst>
+      <p:ext uri="{BB962C8B-B14F-4D97-AF65-F5344CB8AC3E}">
+        <p14:creationId xmlns:p14="http://schemas.microsoft.com/office/powerpoint/2010/main" val="4076174346"/>
       </p:ext>
     </p:extLst>
   </p:cSld>
@@ -10117,43 +9975,30 @@
       </p:sp>
       <p:sp>
         <p:nvSpPr>
-          <p:cNvPr id="11" name="Slide number">
+          <p:cNvPr id="12" name="Slide Number Placeholder 11">
             <a:extLst>
               <a:ext uri="{FF2B5EF4-FFF2-40B4-BE49-F238E27FC236}">
-                <a16:creationId xmlns:a16="http://schemas.microsoft.com/office/drawing/2014/main" id="{ADB06977-D5AF-C441-0AE4-2679EC5A1BCE}"/>
+                <a16:creationId xmlns:a16="http://schemas.microsoft.com/office/drawing/2014/main" id="{1AB60370-B6C4-186A-8D2A-A6D73B09BE8D}"/>
               </a:ext>
             </a:extLst>
           </p:cNvPr>
-          <p:cNvSpPr txBox="1"/>
-          <p:nvPr/>
+          <p:cNvSpPr>
+            <a:spLocks noGrp="1"/>
+          </p:cNvSpPr>
+          <p:nvPr>
+            <p:ph type="sldNum" sz="quarter" idx="12"/>
+          </p:nvPr>
         </p:nvSpPr>
-        <p:spPr>
-          <a:xfrm>
-            <a:off x="11789211" y="6477000"/>
-            <a:ext cx="250389" cy="246221"/>
-          </a:xfrm>
-          <a:prstGeom prst="rect">
-            <a:avLst/>
-          </a:prstGeom>
-          <a:solidFill>
-            <a:srgbClr val="FFFFFF"/>
-          </a:solidFill>
-        </p:spPr>
+        <p:spPr/>
         <p:txBody>
-          <a:bodyPr vert="horz" wrap="none" rtlCol="0">
-            <a:spAutoFit/>
-          </a:bodyPr>
+          <a:bodyPr/>
           <a:lstStyle/>
           <a:p>
-            <a:pPr algn="r"/>
-            <a:r>
-              <a:rPr lang="en-US" sz="1000">
-                <a:solidFill>
-                  <a:srgbClr val="808080"/>
-                </a:solidFill>
-              </a:rPr>
+            <a:fld id="{A80A81DD-F10A-4B1C-963A-0ABBB4865886}" type="slidenum">
+              <a:rPr lang="en-US" smtClean="0"/>
               <a:t>2</a:t>
-            </a:r>
+            </a:fld>
+            <a:endParaRPr lang="en-US"/>
           </a:p>
         </p:txBody>
       </p:sp>
@@ -10579,306 +10424,6 @@
       </p:grpSpPr>
       <p:sp>
         <p:nvSpPr>
-          <p:cNvPr id="6" name="Body card">
-            <a:extLst>
-              <a:ext uri="{FF2B5EF4-FFF2-40B4-BE49-F238E27FC236}">
-                <a16:creationId xmlns:a16="http://schemas.microsoft.com/office/drawing/2014/main" id="{D935A494-1C08-FCA2-A357-21200E99E193}"/>
-              </a:ext>
-            </a:extLst>
-          </p:cNvPr>
-          <p:cNvSpPr/>
-          <p:nvPr/>
-        </p:nvSpPr>
-        <p:spPr>
-          <a:xfrm>
-            <a:off x="635000" y="1676400"/>
-            <a:ext cx="10922000" cy="3263900"/>
-          </a:xfrm>
-          <a:prstGeom prst="roundRect">
-            <a:avLst>
-              <a:gd name="adj" fmla="val 3000"/>
-            </a:avLst>
-          </a:prstGeom>
-          <a:solidFill>
-            <a:srgbClr val="F2F6FC"/>
-          </a:solidFill>
-          <a:ln w="19050">
-            <a:solidFill>
-              <a:srgbClr val="4472C4"/>
-            </a:solidFill>
-          </a:ln>
-        </p:spPr>
-        <p:style>
-          <a:lnRef idx="2">
-            <a:schemeClr val="accent1">
-              <a:shade val="15000"/>
-            </a:schemeClr>
-          </a:lnRef>
-          <a:fillRef idx="1">
-            <a:schemeClr val="accent1"/>
-          </a:fillRef>
-          <a:effectRef idx="0">
-            <a:schemeClr val="accent1"/>
-          </a:effectRef>
-          <a:fontRef idx="minor">
-            <a:schemeClr val="lt1"/>
-          </a:fontRef>
-        </p:style>
-        <p:txBody>
-          <a:bodyPr rtlCol="0" anchor="ctr"/>
-          <a:lstStyle/>
-          <a:p>
-            <a:pPr algn="ctr"/>
-            <a:endParaRPr lang="en-US"/>
-          </a:p>
-        </p:txBody>
-      </p:sp>
-      <p:sp>
-        <p:nvSpPr>
-          <p:cNvPr id="2" name="Title 1">
-            <a:extLst>
-              <a:ext uri="{FF2B5EF4-FFF2-40B4-BE49-F238E27FC236}">
-                <a16:creationId xmlns:a16="http://schemas.microsoft.com/office/drawing/2014/main" id="{B589C3C6-C810-835B-54A4-E5A4037C1C25}"/>
-              </a:ext>
-            </a:extLst>
-          </p:cNvPr>
-          <p:cNvSpPr>
-            <a:spLocks noGrp="1"/>
-          </p:cNvSpPr>
-          <p:nvPr>
-            <p:ph type="title"/>
-          </p:nvPr>
-        </p:nvSpPr>
-        <p:spPr/>
-        <p:txBody>
-          <a:bodyPr/>
-          <a:lstStyle/>
-          <a:p>
-            <a:r>
-              <a:rPr lang="en-US">
-                <a:solidFill>
-                  <a:srgbClr val="1F3864"/>
-                </a:solidFill>
-              </a:rPr>
-              <a:t>Practice: Quartiles from Exam Scores</a:t>
-            </a:r>
-            <a:endParaRPr lang="en-US" dirty="0">
-              <a:solidFill>
-                <a:srgbClr val="1F3864"/>
-              </a:solidFill>
-            </a:endParaRPr>
-          </a:p>
-        </p:txBody>
-      </p:sp>
-      <p:sp>
-        <p:nvSpPr>
-          <p:cNvPr id="3" name="Content Placeholder 2">
-            <a:extLst>
-              <a:ext uri="{FF2B5EF4-FFF2-40B4-BE49-F238E27FC236}">
-                <a16:creationId xmlns:a16="http://schemas.microsoft.com/office/drawing/2014/main" id="{307FDE7D-C54C-9F70-498E-F05F62BAA59A}"/>
-              </a:ext>
-            </a:extLst>
-          </p:cNvPr>
-          <p:cNvSpPr>
-            <a:spLocks noGrp="1"/>
-          </p:cNvSpPr>
-          <p:nvPr>
-            <p:ph idx="1"/>
-          </p:nvPr>
-        </p:nvSpPr>
-        <p:spPr/>
-        <p:txBody>
-          <a:bodyPr/>
-          <a:lstStyle/>
-          <a:p>
-            <a:pPr marL="0" indent="0">
-              <a:buNone/>
-            </a:pPr>
-            <a:r>
-              <a:rPr lang="en-US" dirty="0"/>
-              <a:t>Consider the following 15 exam scores of students in a statistics course</a:t>
-            </a:r>
-          </a:p>
-          <a:p>
-            <a:pPr marL="0" indent="0">
-              <a:buNone/>
-            </a:pPr>
-            <a:endParaRPr lang="en-US" dirty="0"/>
-          </a:p>
-          <a:p>
-            <a:pPr marL="0" indent="0">
-              <a:buNone/>
-            </a:pPr>
-            <a:r>
-              <a:rPr lang="en-US" dirty="0"/>
-              <a:t>61,61,65,65,66,68,69,73,74,75,76,78,79,90,94</a:t>
-            </a:r>
-          </a:p>
-          <a:p>
-            <a:pPr marL="0" indent="0">
-              <a:buNone/>
-            </a:pPr>
-            <a:endParaRPr lang="en-US" dirty="0"/>
-          </a:p>
-          <a:p>
-            <a:pPr marL="0" indent="0">
-              <a:buNone/>
-            </a:pPr>
-            <a:endParaRPr lang="en-US" dirty="0"/>
-          </a:p>
-          <a:p>
-            <a:pPr marL="0" indent="0">
-              <a:buNone/>
-            </a:pPr>
-            <a:r>
-              <a:rPr lang="en-US" dirty="0"/>
-              <a:t>Compute the 3 quartiles Q1, Q2, and Q3</a:t>
-            </a:r>
-          </a:p>
-        </p:txBody>
-      </p:sp>
-      <p:sp>
-        <p:nvSpPr>
-          <p:cNvPr id="4" name="Slide number">
-            <a:extLst>
-              <a:ext uri="{FF2B5EF4-FFF2-40B4-BE49-F238E27FC236}">
-                <a16:creationId xmlns:a16="http://schemas.microsoft.com/office/drawing/2014/main" id="{08B8C9F6-95B8-3302-3E20-66BE68720CAB}"/>
-              </a:ext>
-            </a:extLst>
-          </p:cNvPr>
-          <p:cNvSpPr txBox="1"/>
-          <p:nvPr/>
-        </p:nvSpPr>
-        <p:spPr>
-          <a:xfrm>
-            <a:off x="11723488" y="6477000"/>
-            <a:ext cx="316112" cy="246221"/>
-          </a:xfrm>
-          <a:prstGeom prst="rect">
-            <a:avLst/>
-          </a:prstGeom>
-          <a:solidFill>
-            <a:srgbClr val="FFFFFF"/>
-          </a:solidFill>
-        </p:spPr>
-        <p:txBody>
-          <a:bodyPr vert="horz" wrap="none" rtlCol="0">
-            <a:spAutoFit/>
-          </a:bodyPr>
-          <a:lstStyle/>
-          <a:p>
-            <a:pPr algn="r"/>
-            <a:r>
-              <a:rPr lang="en-US" sz="1000">
-                <a:solidFill>
-                  <a:srgbClr val="808080"/>
-                </a:solidFill>
-              </a:rPr>
-              <a:t>20</a:t>
-            </a:r>
-          </a:p>
-        </p:txBody>
-      </p:sp>
-      <p:sp>
-        <p:nvSpPr>
-          <p:cNvPr id="5" name="Title rule">
-            <a:extLst>
-              <a:ext uri="{FF2B5EF4-FFF2-40B4-BE49-F238E27FC236}">
-                <a16:creationId xmlns:a16="http://schemas.microsoft.com/office/drawing/2014/main" id="{D0E04E23-DA0F-C42C-1DFA-4ACEDB7D4532}"/>
-              </a:ext>
-            </a:extLst>
-          </p:cNvPr>
-          <p:cNvSpPr/>
-          <p:nvPr/>
-        </p:nvSpPr>
-        <p:spPr>
-          <a:xfrm>
-            <a:off x="838200" y="1600200"/>
-            <a:ext cx="10515600" cy="38100"/>
-          </a:xfrm>
-          <a:prstGeom prst="rect">
-            <a:avLst/>
-          </a:prstGeom>
-          <a:solidFill>
-            <a:srgbClr val="4472C4"/>
-          </a:solidFill>
-          <a:ln w="12700" cap="flat" cmpd="sng" algn="ctr">
-            <a:noFill/>
-            <a:prstDash val="solid"/>
-            <a:miter lim="800000"/>
-          </a:ln>
-          <a:effectLst/>
-          <a:extLst>
-            <a:ext uri="{91240B29-F687-4F45-9708-019B960494DF}">
-              <a14:hiddenLine xmlns:a14="http://schemas.microsoft.com/office/drawing/2010/main" w="12700" cap="flat" cmpd="sng" algn="ctr">
-                <a:solidFill>
-                  <a:schemeClr val="accent1">
-                    <a:shade val="15000"/>
-                  </a:schemeClr>
-                </a:solidFill>
-                <a:prstDash val="solid"/>
-                <a:miter lim="800000"/>
-              </a14:hiddenLine>
-            </a:ext>
-          </a:extLst>
-        </p:spPr>
-        <p:style>
-          <a:lnRef idx="2">
-            <a:schemeClr val="accent1">
-              <a:shade val="15000"/>
-            </a:schemeClr>
-          </a:lnRef>
-          <a:fillRef idx="1">
-            <a:schemeClr val="accent1"/>
-          </a:fillRef>
-          <a:effectRef idx="0">
-            <a:schemeClr val="accent1"/>
-          </a:effectRef>
-          <a:fontRef idx="minor">
-            <a:schemeClr val="lt1"/>
-          </a:fontRef>
-        </p:style>
-        <p:txBody>
-          <a:bodyPr rtlCol="0" anchor="ctr"/>
-          <a:lstStyle/>
-          <a:p>
-            <a:pPr algn="ctr"/>
-            <a:endParaRPr lang="en-US"/>
-          </a:p>
-        </p:txBody>
-      </p:sp>
-    </p:spTree>
-    <p:extLst>
-      <p:ext uri="{BB962C8B-B14F-4D97-AF65-F5344CB8AC3E}">
-        <p14:creationId xmlns:p14="http://schemas.microsoft.com/office/powerpoint/2010/main" val="4076174346"/>
-      </p:ext>
-    </p:extLst>
-  </p:cSld>
-  <p:clrMapOvr>
-    <a:masterClrMapping/>
-  </p:clrMapOvr>
-</p:sld>
-</file>
-
-<file path=ppt/slides/slide21.xml><?xml version="1.0" encoding="utf-8"?>
-<p:sld xmlns:a="http://schemas.openxmlformats.org/drawingml/2006/main" xmlns:r="http://schemas.openxmlformats.org/officeDocument/2006/relationships" xmlns:p="http://schemas.openxmlformats.org/presentationml/2006/main">
-  <p:cSld>
-    <p:spTree>
-      <p:nvGrpSpPr>
-        <p:cNvPr id="1" name=""/>
-        <p:cNvGrpSpPr/>
-        <p:nvPr/>
-      </p:nvGrpSpPr>
-      <p:grpSpPr>
-        <a:xfrm>
-          <a:off x="0" y="0"/>
-          <a:ext cx="0" cy="0"/>
-          <a:chOff x="0" y="0"/>
-          <a:chExt cx="0" cy="0"/>
-        </a:xfrm>
-      </p:grpSpPr>
-      <p:sp>
-        <p:nvSpPr>
           <p:cNvPr id="2" name="Title 1">
             <a:extLst>
               <a:ext uri="{FF2B5EF4-FFF2-40B4-BE49-F238E27FC236}">
@@ -10941,43 +10486,30 @@
       </p:pic>
       <p:sp>
         <p:nvSpPr>
-          <p:cNvPr id="3" name="Slide number">
+          <p:cNvPr id="4" name="Slide Number Placeholder 3">
             <a:extLst>
               <a:ext uri="{FF2B5EF4-FFF2-40B4-BE49-F238E27FC236}">
-                <a16:creationId xmlns:a16="http://schemas.microsoft.com/office/drawing/2014/main" id="{74C6E1AC-A647-59A1-43D2-66F0FE0B5AB5}"/>
+                <a16:creationId xmlns:a16="http://schemas.microsoft.com/office/drawing/2014/main" id="{59E9E7FA-2DC9-8BBC-589D-A81DE31BEC10}"/>
               </a:ext>
             </a:extLst>
           </p:cNvPr>
-          <p:cNvSpPr txBox="1"/>
-          <p:nvPr/>
+          <p:cNvSpPr>
+            <a:spLocks noGrp="1"/>
+          </p:cNvSpPr>
+          <p:nvPr>
+            <p:ph type="sldNum" sz="quarter" idx="12"/>
+          </p:nvPr>
         </p:nvSpPr>
-        <p:spPr>
-          <a:xfrm>
-            <a:off x="11723488" y="6477000"/>
-            <a:ext cx="316112" cy="246221"/>
-          </a:xfrm>
-          <a:prstGeom prst="rect">
-            <a:avLst/>
-          </a:prstGeom>
-          <a:solidFill>
-            <a:srgbClr val="FFFFFF"/>
-          </a:solidFill>
-        </p:spPr>
+        <p:spPr/>
         <p:txBody>
-          <a:bodyPr vert="horz" wrap="none" rtlCol="0">
-            <a:spAutoFit/>
-          </a:bodyPr>
+          <a:bodyPr/>
           <a:lstStyle/>
           <a:p>
-            <a:pPr algn="r"/>
-            <a:r>
-              <a:rPr lang="en-US" sz="1000">
-                <a:solidFill>
-                  <a:srgbClr val="808080"/>
-                </a:solidFill>
-              </a:rPr>
-              <a:t>21</a:t>
-            </a:r>
+            <a:fld id="{A80A81DD-F10A-4B1C-963A-0ABBB4865886}" type="slidenum">
+              <a:rPr lang="en-US" smtClean="0"/>
+              <a:t>20</a:t>
+            </a:fld>
+            <a:endParaRPr lang="en-US"/>
           </a:p>
         </p:txBody>
       </p:sp>
@@ -10994,7 +10526,7 @@
 </p:sld>
 </file>
 
-<file path=ppt/slides/slide22.xml><?xml version="1.0" encoding="utf-8"?>
+<file path=ppt/slides/slide21.xml><?xml version="1.0" encoding="utf-8"?>
 <p:sld xmlns:a="http://schemas.openxmlformats.org/drawingml/2006/main" xmlns:r="http://schemas.openxmlformats.org/officeDocument/2006/relationships" xmlns:p="http://schemas.openxmlformats.org/presentationml/2006/main">
   <p:cSld>
     <p:spTree>
@@ -11207,43 +10739,30 @@
       </p:sp>
       <p:sp>
         <p:nvSpPr>
-          <p:cNvPr id="4" name="Slide number">
+          <p:cNvPr id="6" name="Slide Number Placeholder 5">
             <a:extLst>
               <a:ext uri="{FF2B5EF4-FFF2-40B4-BE49-F238E27FC236}">
-                <a16:creationId xmlns:a16="http://schemas.microsoft.com/office/drawing/2014/main" id="{AA76F1BA-B50B-9DA6-D1A9-B8016A432F67}"/>
+                <a16:creationId xmlns:a16="http://schemas.microsoft.com/office/drawing/2014/main" id="{4068512A-2CD4-85B2-1148-9534A40CDE21}"/>
               </a:ext>
             </a:extLst>
           </p:cNvPr>
-          <p:cNvSpPr txBox="1"/>
-          <p:nvPr/>
+          <p:cNvSpPr>
+            <a:spLocks noGrp="1"/>
+          </p:cNvSpPr>
+          <p:nvPr>
+            <p:ph type="sldNum" sz="quarter" idx="12"/>
+          </p:nvPr>
         </p:nvSpPr>
-        <p:spPr>
-          <a:xfrm>
-            <a:off x="11723488" y="6477000"/>
-            <a:ext cx="316112" cy="246221"/>
-          </a:xfrm>
-          <a:prstGeom prst="rect">
-            <a:avLst/>
-          </a:prstGeom>
-          <a:solidFill>
-            <a:srgbClr val="FFFFFF"/>
-          </a:solidFill>
-        </p:spPr>
+        <p:spPr/>
         <p:txBody>
-          <a:bodyPr vert="horz" wrap="none" rtlCol="0">
-            <a:spAutoFit/>
-          </a:bodyPr>
+          <a:bodyPr/>
           <a:lstStyle/>
           <a:p>
-            <a:pPr algn="r"/>
-            <a:r>
-              <a:rPr lang="en-US" sz="1000">
-                <a:solidFill>
-                  <a:srgbClr val="808080"/>
-                </a:solidFill>
-              </a:rPr>
-              <a:t>22</a:t>
-            </a:r>
+            <a:fld id="{A80A81DD-F10A-4B1C-963A-0ABBB4865886}" type="slidenum">
+              <a:rPr lang="en-US" smtClean="0"/>
+              <a:t>21</a:t>
+            </a:fld>
+            <a:endParaRPr lang="en-US"/>
           </a:p>
         </p:txBody>
       </p:sp>
@@ -11260,7 +10779,7 @@
 </p:sld>
 </file>
 
-<file path=ppt/slides/slide23.xml><?xml version="1.0" encoding="utf-8"?>
+<file path=ppt/slides/slide22.xml><?xml version="1.0" encoding="utf-8"?>
 <p:sld xmlns:a="http://schemas.openxmlformats.org/drawingml/2006/main" xmlns:r="http://schemas.openxmlformats.org/officeDocument/2006/relationships" xmlns:p="http://schemas.openxmlformats.org/presentationml/2006/main">
   <p:cSld>
     <p:spTree>
@@ -11370,8 +10889,8 @@
           </a:p>
         </p:txBody>
       </p:sp>
-      <mc:AlternateContent xmlns:mc="http://schemas.openxmlformats.org/markup-compatibility/2006">
-        <mc:Choice xmlns:a14="http://schemas.microsoft.com/office/drawing/2010/main" Requires="a14">
+      <mc:AlternateContent xmlns:mc="http://schemas.openxmlformats.org/markup-compatibility/2006" xmlns:a14="http://schemas.microsoft.com/office/drawing/2010/main">
+        <mc:Choice Requires="a14">
           <p:sp>
             <p:nvSpPr>
               <p:cNvPr id="3" name="Content Placeholder 2">
@@ -11558,7 +11077,7 @@
             </p:txBody>
           </p:sp>
         </mc:Choice>
-        <mc:Fallback>
+        <mc:Fallback xmlns="">
           <p:sp>
             <p:nvSpPr>
               <p:cNvPr id="3" name="Content Placeholder 2">
@@ -11598,48 +11117,6 @@
           </p:sp>
         </mc:Fallback>
       </mc:AlternateContent>
-      <p:sp>
-        <p:nvSpPr>
-          <p:cNvPr id="4" name="Slide number">
-            <a:extLst>
-              <a:ext uri="{FF2B5EF4-FFF2-40B4-BE49-F238E27FC236}">
-                <a16:creationId xmlns:a16="http://schemas.microsoft.com/office/drawing/2014/main" id="{437AA998-75E3-6B35-9D01-D980D7508E0E}"/>
-              </a:ext>
-            </a:extLst>
-          </p:cNvPr>
-          <p:cNvSpPr txBox="1"/>
-          <p:nvPr/>
-        </p:nvSpPr>
-        <p:spPr>
-          <a:xfrm>
-            <a:off x="11723488" y="6477000"/>
-            <a:ext cx="316112" cy="246221"/>
-          </a:xfrm>
-          <a:prstGeom prst="rect">
-            <a:avLst/>
-          </a:prstGeom>
-          <a:solidFill>
-            <a:srgbClr val="FFFFFF"/>
-          </a:solidFill>
-        </p:spPr>
-        <p:txBody>
-          <a:bodyPr vert="horz" wrap="none" rtlCol="0">
-            <a:spAutoFit/>
-          </a:bodyPr>
-          <a:lstStyle/>
-          <a:p>
-            <a:pPr algn="r"/>
-            <a:r>
-              <a:rPr lang="en-US" sz="1000">
-                <a:solidFill>
-                  <a:srgbClr val="808080"/>
-                </a:solidFill>
-              </a:rPr>
-              <a:t>23</a:t>
-            </a:r>
-          </a:p>
-        </p:txBody>
-      </p:sp>
       <p:sp>
         <p:nvSpPr>
           <p:cNvPr id="5" name="Title rule">
@@ -11708,6 +11185,35 @@
           </a:p>
         </p:txBody>
       </p:sp>
+      <p:sp>
+        <p:nvSpPr>
+          <p:cNvPr id="7" name="Slide Number Placeholder 6">
+            <a:extLst>
+              <a:ext uri="{FF2B5EF4-FFF2-40B4-BE49-F238E27FC236}">
+                <a16:creationId xmlns:a16="http://schemas.microsoft.com/office/drawing/2014/main" id="{03C18B85-91E1-C4E7-E263-C0760C312119}"/>
+              </a:ext>
+            </a:extLst>
+          </p:cNvPr>
+          <p:cNvSpPr>
+            <a:spLocks noGrp="1"/>
+          </p:cNvSpPr>
+          <p:nvPr>
+            <p:ph type="sldNum" sz="quarter" idx="12"/>
+          </p:nvPr>
+        </p:nvSpPr>
+        <p:spPr/>
+        <p:txBody>
+          <a:bodyPr/>
+          <a:lstStyle/>
+          <a:p>
+            <a:fld id="{A80A81DD-F10A-4B1C-963A-0ABBB4865886}" type="slidenum">
+              <a:rPr lang="en-US" smtClean="0"/>
+              <a:t>22</a:t>
+            </a:fld>
+            <a:endParaRPr lang="en-US"/>
+          </a:p>
+        </p:txBody>
+      </p:sp>
     </p:spTree>
     <p:extLst>
       <p:ext uri="{BB962C8B-B14F-4D97-AF65-F5344CB8AC3E}">
@@ -11721,7 +11227,7 @@
 </p:sld>
 </file>
 
-<file path=ppt/slides/slide24.xml><?xml version="1.0" encoding="utf-8"?>
+<file path=ppt/slides/slide23.xml><?xml version="1.0" encoding="utf-8"?>
 <p:sld xmlns:a="http://schemas.openxmlformats.org/drawingml/2006/main" xmlns:r="http://schemas.openxmlformats.org/officeDocument/2006/relationships" xmlns:p="http://schemas.openxmlformats.org/presentationml/2006/main">
   <p:cSld>
     <p:spTree>
@@ -11868,48 +11374,6 @@
             <a:r>
               <a:rPr lang="en-US" dirty="0"/>
               <a:t>Compute the IQR</a:t>
-            </a:r>
-          </a:p>
-        </p:txBody>
-      </p:sp>
-      <p:sp>
-        <p:nvSpPr>
-          <p:cNvPr id="4" name="Slide number">
-            <a:extLst>
-              <a:ext uri="{FF2B5EF4-FFF2-40B4-BE49-F238E27FC236}">
-                <a16:creationId xmlns:a16="http://schemas.microsoft.com/office/drawing/2014/main" id="{C2177357-AB95-55CF-DCC0-97A5F8267DE9}"/>
-              </a:ext>
-            </a:extLst>
-          </p:cNvPr>
-          <p:cNvSpPr txBox="1"/>
-          <p:nvPr/>
-        </p:nvSpPr>
-        <p:spPr>
-          <a:xfrm>
-            <a:off x="11723488" y="6477000"/>
-            <a:ext cx="316112" cy="246221"/>
-          </a:xfrm>
-          <a:prstGeom prst="rect">
-            <a:avLst/>
-          </a:prstGeom>
-          <a:solidFill>
-            <a:srgbClr val="FFFFFF"/>
-          </a:solidFill>
-        </p:spPr>
-        <p:txBody>
-          <a:bodyPr vert="horz" wrap="none" rtlCol="0">
-            <a:spAutoFit/>
-          </a:bodyPr>
-          <a:lstStyle/>
-          <a:p>
-            <a:pPr algn="r"/>
-            <a:r>
-              <a:rPr lang="en-US" sz="1000">
-                <a:solidFill>
-                  <a:srgbClr val="808080"/>
-                </a:solidFill>
-              </a:rPr>
-              <a:t>24</a:t>
             </a:r>
           </a:p>
         </p:txBody>
@@ -11982,10 +11446,252 @@
           </a:p>
         </p:txBody>
       </p:sp>
+      <p:sp>
+        <p:nvSpPr>
+          <p:cNvPr id="7" name="Slide Number Placeholder 6">
+            <a:extLst>
+              <a:ext uri="{FF2B5EF4-FFF2-40B4-BE49-F238E27FC236}">
+                <a16:creationId xmlns:a16="http://schemas.microsoft.com/office/drawing/2014/main" id="{9C1CEA17-F8A9-132C-32BC-F1E36F97BE6D}"/>
+              </a:ext>
+            </a:extLst>
+          </p:cNvPr>
+          <p:cNvSpPr>
+            <a:spLocks noGrp="1"/>
+          </p:cNvSpPr>
+          <p:nvPr>
+            <p:ph type="sldNum" sz="quarter" idx="12"/>
+          </p:nvPr>
+        </p:nvSpPr>
+        <p:spPr/>
+        <p:txBody>
+          <a:bodyPr/>
+          <a:lstStyle/>
+          <a:p>
+            <a:fld id="{A80A81DD-F10A-4B1C-963A-0ABBB4865886}" type="slidenum">
+              <a:rPr lang="en-US" smtClean="0"/>
+              <a:t>23</a:t>
+            </a:fld>
+            <a:endParaRPr lang="en-US"/>
+          </a:p>
+        </p:txBody>
+      </p:sp>
     </p:spTree>
     <p:extLst>
       <p:ext uri="{BB962C8B-B14F-4D97-AF65-F5344CB8AC3E}">
         <p14:creationId xmlns:p14="http://schemas.microsoft.com/office/powerpoint/2010/main" val="236921382"/>
+      </p:ext>
+    </p:extLst>
+  </p:cSld>
+  <p:clrMapOvr>
+    <a:masterClrMapping/>
+  </p:clrMapOvr>
+</p:sld>
+</file>
+
+<file path=ppt/slides/slide24.xml><?xml version="1.0" encoding="utf-8"?>
+<p:sld xmlns:a="http://schemas.openxmlformats.org/drawingml/2006/main" xmlns:r="http://schemas.openxmlformats.org/officeDocument/2006/relationships" xmlns:p="http://schemas.openxmlformats.org/presentationml/2006/main">
+  <p:cSld>
+    <p:spTree>
+      <p:nvGrpSpPr>
+        <p:cNvPr id="1" name=""/>
+        <p:cNvGrpSpPr/>
+        <p:nvPr/>
+      </p:nvGrpSpPr>
+      <p:grpSpPr>
+        <a:xfrm>
+          <a:off x="0" y="0"/>
+          <a:ext cx="0" cy="0"/>
+          <a:chOff x="0" y="0"/>
+          <a:chExt cx="0" cy="0"/>
+        </a:xfrm>
+      </p:grpSpPr>
+      <p:sp>
+        <p:nvSpPr>
+          <p:cNvPr id="2" name="Title 1">
+            <a:extLst>
+              <a:ext uri="{FF2B5EF4-FFF2-40B4-BE49-F238E27FC236}">
+                <a16:creationId xmlns:a16="http://schemas.microsoft.com/office/drawing/2014/main" id="{5E5AA028-A7CA-27E1-ACC7-31804B9B3860}"/>
+              </a:ext>
+            </a:extLst>
+          </p:cNvPr>
+          <p:cNvSpPr>
+            <a:spLocks noGrp="1"/>
+          </p:cNvSpPr>
+          <p:nvPr>
+            <p:ph type="title"/>
+          </p:nvPr>
+        </p:nvSpPr>
+        <p:spPr>
+          <a:xfrm>
+            <a:off x="838200" y="368300"/>
+            <a:ext cx="10515600" cy="1320800"/>
+          </a:xfrm>
+        </p:spPr>
+        <p:txBody>
+          <a:bodyPr>
+            <a:normAutofit/>
+          </a:bodyPr>
+          <a:lstStyle/>
+          <a:p>
+            <a:r>
+              <a:rPr lang="en-US" sz="3600" dirty="0">
+                <a:solidFill>
+                  <a:srgbClr val="1F3864"/>
+                </a:solidFill>
+              </a:rPr>
+              <a:t>The Boxplot (Box and Whisker Plot): A five number summary</a:t>
+            </a:r>
+          </a:p>
+        </p:txBody>
+      </p:sp>
+      <p:sp>
+        <p:nvSpPr>
+          <p:cNvPr id="3" name="Content Placeholder 2">
+            <a:extLst>
+              <a:ext uri="{FF2B5EF4-FFF2-40B4-BE49-F238E27FC236}">
+                <a16:creationId xmlns:a16="http://schemas.microsoft.com/office/drawing/2014/main" id="{00D0CDBC-1066-FD3E-EAC4-1CD68D78009C}"/>
+              </a:ext>
+            </a:extLst>
+          </p:cNvPr>
+          <p:cNvSpPr>
+            <a:spLocks noGrp="1"/>
+          </p:cNvSpPr>
+          <p:nvPr>
+            <p:ph idx="1"/>
+          </p:nvPr>
+        </p:nvSpPr>
+        <p:spPr>
+          <a:xfrm>
+            <a:off x="838200" y="1514763"/>
+            <a:ext cx="4448175" cy="4662199"/>
+          </a:xfrm>
+        </p:spPr>
+        <p:txBody>
+          <a:bodyPr>
+            <a:normAutofit fontScale="92500"/>
+          </a:bodyPr>
+          <a:lstStyle/>
+          <a:p>
+            <a:r>
+              <a:rPr lang="en-US" dirty="0"/>
+              <a:t> Pros: </a:t>
+            </a:r>
+          </a:p>
+          <a:p>
+            <a:pPr lvl="1"/>
+            <a:r>
+              <a:rPr lang="en-US" dirty="0"/>
+              <a:t>good for describing shape and location</a:t>
+            </a:r>
+          </a:p>
+          <a:p>
+            <a:pPr lvl="1"/>
+            <a:r>
+              <a:rPr lang="en-US" dirty="0"/>
+              <a:t>Can be used to identify outliers</a:t>
+            </a:r>
+          </a:p>
+          <a:p>
+            <a:pPr lvl="1"/>
+            <a:r>
+              <a:rPr lang="en-US" dirty="0"/>
+              <a:t>Length of whiskers indicates skew</a:t>
+            </a:r>
+          </a:p>
+          <a:p>
+            <a:pPr lvl="1"/>
+            <a:r>
+              <a:rPr lang="en-US" dirty="0"/>
+              <a:t>Good for comparing two distributions or across categories</a:t>
+            </a:r>
+          </a:p>
+          <a:p>
+            <a:r>
+              <a:rPr lang="en-US" dirty="0"/>
+              <a:t>Cons: </a:t>
+            </a:r>
+          </a:p>
+          <a:p>
+            <a:pPr lvl="1"/>
+            <a:r>
+              <a:rPr lang="en-US" dirty="0"/>
+              <a:t>does not show certain features like mounds, or gaps as well as a histogram</a:t>
+            </a:r>
+          </a:p>
+        </p:txBody>
+      </p:sp>
+      <p:pic>
+        <p:nvPicPr>
+          <p:cNvPr id="5" name="Picture 4" descr="A diagram of a box plot&#10;&#10;Description automatically generated">
+            <a:extLst>
+              <a:ext uri="{FF2B5EF4-FFF2-40B4-BE49-F238E27FC236}">
+                <a16:creationId xmlns:a16="http://schemas.microsoft.com/office/drawing/2014/main" id="{018FD8B2-9B43-319A-0198-F033315EADDA}"/>
+              </a:ext>
+            </a:extLst>
+          </p:cNvPr>
+          <p:cNvPicPr>
+            <a:picLocks noChangeAspect="1"/>
+          </p:cNvPicPr>
+          <p:nvPr/>
+        </p:nvPicPr>
+        <p:blipFill>
+          <a:blip r:embed="rId2">
+            <a:extLst>
+              <a:ext uri="{28A0092B-C50C-407E-A947-70E740481C1C}">
+                <a14:useLocalDpi xmlns:a14="http://schemas.microsoft.com/office/drawing/2010/main" val="0"/>
+              </a:ext>
+              <a:ext uri="{837473B0-CC2E-450A-ABE3-18F120FF3D39}">
+                <a1611:picAttrSrcUrl xmlns:a1611="http://schemas.microsoft.com/office/drawing/2016/11/main" r:id="rId3"/>
+              </a:ext>
+            </a:extLst>
+          </a:blip>
+          <a:stretch>
+            <a:fillRect/>
+          </a:stretch>
+        </p:blipFill>
+        <p:spPr>
+          <a:xfrm>
+            <a:off x="5451619" y="2368404"/>
+            <a:ext cx="6657975" cy="3667125"/>
+          </a:xfrm>
+          <a:prstGeom prst="rect">
+            <a:avLst/>
+          </a:prstGeom>
+        </p:spPr>
+      </p:pic>
+      <p:sp>
+        <p:nvSpPr>
+          <p:cNvPr id="6" name="Slide Number Placeholder 5">
+            <a:extLst>
+              <a:ext uri="{FF2B5EF4-FFF2-40B4-BE49-F238E27FC236}">
+                <a16:creationId xmlns:a16="http://schemas.microsoft.com/office/drawing/2014/main" id="{684A1B73-B875-01C8-B12D-F7849C939E7C}"/>
+              </a:ext>
+            </a:extLst>
+          </p:cNvPr>
+          <p:cNvSpPr>
+            <a:spLocks noGrp="1"/>
+          </p:cNvSpPr>
+          <p:nvPr>
+            <p:ph type="sldNum" sz="quarter" idx="12"/>
+          </p:nvPr>
+        </p:nvSpPr>
+        <p:spPr/>
+        <p:txBody>
+          <a:bodyPr/>
+          <a:lstStyle/>
+          <a:p>
+            <a:fld id="{A80A81DD-F10A-4B1C-963A-0ABBB4865886}" type="slidenum">
+              <a:rPr lang="en-US" smtClean="0"/>
+              <a:t>24</a:t>
+            </a:fld>
+            <a:endParaRPr lang="en-US"/>
+          </a:p>
+        </p:txBody>
+      </p:sp>
+    </p:spTree>
+    <p:extLst>
+      <p:ext uri="{BB962C8B-B14F-4D97-AF65-F5344CB8AC3E}">
+        <p14:creationId xmlns:p14="http://schemas.microsoft.com/office/powerpoint/2010/main" val="1386231900"/>
       </p:ext>
     </p:extLst>
   </p:cSld>
@@ -12012,127 +11718,12 @@
           <a:chExt cx="0" cy="0"/>
         </a:xfrm>
       </p:grpSpPr>
-      <p:sp>
-        <p:nvSpPr>
-          <p:cNvPr id="2" name="Title 1">
+      <p:pic>
+        <p:nvPicPr>
+          <p:cNvPr id="9" name="Picture 8">
             <a:extLst>
               <a:ext uri="{FF2B5EF4-FFF2-40B4-BE49-F238E27FC236}">
-                <a16:creationId xmlns:a16="http://schemas.microsoft.com/office/drawing/2014/main" id="{5E5AA028-A7CA-27E1-ACC7-31804B9B3860}"/>
-              </a:ext>
-            </a:extLst>
-          </p:cNvPr>
-          <p:cNvSpPr>
-            <a:spLocks noGrp="1"/>
-          </p:cNvSpPr>
-          <p:nvPr>
-            <p:ph type="title"/>
-          </p:nvPr>
-        </p:nvSpPr>
-        <p:spPr>
-          <a:xfrm>
-            <a:off x="838200" y="368300"/>
-            <a:ext cx="10515600" cy="1320800"/>
-          </a:xfrm>
-        </p:spPr>
-        <p:txBody>
-          <a:bodyPr>
-            <a:normAutofit/>
-          </a:bodyPr>
-          <a:lstStyle/>
-          <a:p>
-            <a:r>
-              <a:rPr lang="en-US" sz="3600" dirty="0">
-                <a:solidFill>
-                  <a:srgbClr val="1F3864"/>
-                </a:solidFill>
-              </a:rPr>
-              <a:t>The Boxplot (Box and Whisker Plot): A five number summary</a:t>
-            </a:r>
-          </a:p>
-        </p:txBody>
-      </p:sp>
-      <p:sp>
-        <p:nvSpPr>
-          <p:cNvPr id="3" name="Content Placeholder 2">
-            <a:extLst>
-              <a:ext uri="{FF2B5EF4-FFF2-40B4-BE49-F238E27FC236}">
-                <a16:creationId xmlns:a16="http://schemas.microsoft.com/office/drawing/2014/main" id="{00D0CDBC-1066-FD3E-EAC4-1CD68D78009C}"/>
-              </a:ext>
-            </a:extLst>
-          </p:cNvPr>
-          <p:cNvSpPr>
-            <a:spLocks noGrp="1"/>
-          </p:cNvSpPr>
-          <p:nvPr>
-            <p:ph idx="1"/>
-          </p:nvPr>
-        </p:nvSpPr>
-        <p:spPr>
-          <a:xfrm>
-            <a:off x="838200" y="1514763"/>
-            <a:ext cx="4448175" cy="4662199"/>
-          </a:xfrm>
-        </p:spPr>
-        <p:txBody>
-          <a:bodyPr>
-            <a:normAutofit fontScale="92500"/>
-          </a:bodyPr>
-          <a:lstStyle/>
-          <a:p>
-            <a:r>
-              <a:rPr lang="en-US" dirty="0"/>
-              <a:t> Pros: </a:t>
-            </a:r>
-          </a:p>
-          <a:p>
-            <a:pPr lvl="1"/>
-            <a:r>
-              <a:rPr lang="en-US" dirty="0"/>
-              <a:t>good for describing shape and location</a:t>
-            </a:r>
-          </a:p>
-          <a:p>
-            <a:pPr lvl="1"/>
-            <a:r>
-              <a:rPr lang="en-US" dirty="0"/>
-              <a:t>Can be used to identify outliers</a:t>
-            </a:r>
-          </a:p>
-          <a:p>
-            <a:pPr lvl="1"/>
-            <a:r>
-              <a:rPr lang="en-US" dirty="0"/>
-              <a:t>Length of whiskers indicates skew</a:t>
-            </a:r>
-          </a:p>
-          <a:p>
-            <a:pPr lvl="1"/>
-            <a:r>
-              <a:rPr lang="en-US" dirty="0"/>
-              <a:t>Good for comparing two distributions or across categories</a:t>
-            </a:r>
-          </a:p>
-          <a:p>
-            <a:r>
-              <a:rPr lang="en-US" dirty="0"/>
-              <a:t>Cons: </a:t>
-            </a:r>
-          </a:p>
-          <a:p>
-            <a:pPr lvl="1"/>
-            <a:r>
-              <a:rPr lang="en-US" dirty="0"/>
-              <a:t>does not show certain features like mounds, or gaps as well as a histogram</a:t>
-            </a:r>
-          </a:p>
-        </p:txBody>
-      </p:sp>
-      <p:pic>
-        <p:nvPicPr>
-          <p:cNvPr id="5" name="Picture 4" descr="A diagram of a box plot&#10;&#10;Description automatically generated">
-            <a:extLst>
-              <a:ext uri="{FF2B5EF4-FFF2-40B4-BE49-F238E27FC236}">
-                <a16:creationId xmlns:a16="http://schemas.microsoft.com/office/drawing/2014/main" id="{018FD8B2-9B43-319A-0198-F033315EADDA}"/>
+                <a16:creationId xmlns:a16="http://schemas.microsoft.com/office/drawing/2014/main" id="{056E2CDD-0BF2-1E07-E65C-54C10EEB8C54}"/>
               </a:ext>
             </a:extLst>
           </p:cNvPr>
@@ -12142,24 +11733,15 @@
           <p:nvPr/>
         </p:nvPicPr>
         <p:blipFill>
-          <a:blip r:embed="rId2">
-            <a:extLst>
-              <a:ext uri="{28A0092B-C50C-407E-A947-70E740481C1C}">
-                <a14:useLocalDpi xmlns:a14="http://schemas.microsoft.com/office/drawing/2010/main" val="0"/>
-              </a:ext>
-              <a:ext uri="{837473B0-CC2E-450A-ABE3-18F120FF3D39}">
-                <a1611:picAttrSrcUrl xmlns:a1611="http://schemas.microsoft.com/office/drawing/2016/11/main" r:id="rId3"/>
-              </a:ext>
-            </a:extLst>
-          </a:blip>
+          <a:blip r:embed="rId2"/>
           <a:stretch>
             <a:fillRect/>
           </a:stretch>
         </p:blipFill>
         <p:spPr>
           <a:xfrm>
-            <a:off x="5451619" y="2368404"/>
-            <a:ext cx="6657975" cy="3667125"/>
+            <a:off x="1521454" y="0"/>
+            <a:ext cx="9149091" cy="6858000"/>
           </a:xfrm>
           <a:prstGeom prst="rect">
             <a:avLst/>
@@ -12168,50 +11750,37 @@
       </p:pic>
       <p:sp>
         <p:nvSpPr>
-          <p:cNvPr id="4" name="Slide number">
+          <p:cNvPr id="3" name="Slide Number Placeholder 2">
             <a:extLst>
               <a:ext uri="{FF2B5EF4-FFF2-40B4-BE49-F238E27FC236}">
-                <a16:creationId xmlns:a16="http://schemas.microsoft.com/office/drawing/2014/main" id="{FFDE0401-F197-C4BD-2921-8907B3C9998A}"/>
+                <a16:creationId xmlns:a16="http://schemas.microsoft.com/office/drawing/2014/main" id="{A60BA70C-37AE-5BE5-E8BE-0544314E35FC}"/>
               </a:ext>
             </a:extLst>
           </p:cNvPr>
-          <p:cNvSpPr txBox="1"/>
-          <p:nvPr/>
+          <p:cNvSpPr>
+            <a:spLocks noGrp="1"/>
+          </p:cNvSpPr>
+          <p:nvPr>
+            <p:ph type="sldNum" sz="quarter" idx="12"/>
+          </p:nvPr>
         </p:nvSpPr>
-        <p:spPr>
-          <a:xfrm>
-            <a:off x="11723488" y="6477000"/>
-            <a:ext cx="316112" cy="246221"/>
-          </a:xfrm>
-          <a:prstGeom prst="rect">
-            <a:avLst/>
-          </a:prstGeom>
-          <a:solidFill>
-            <a:srgbClr val="FFFFFF"/>
-          </a:solidFill>
-        </p:spPr>
+        <p:spPr/>
         <p:txBody>
-          <a:bodyPr vert="horz" wrap="none" rtlCol="0">
-            <a:spAutoFit/>
-          </a:bodyPr>
+          <a:bodyPr/>
           <a:lstStyle/>
           <a:p>
-            <a:pPr algn="r"/>
-            <a:r>
-              <a:rPr lang="en-US" sz="1000">
-                <a:solidFill>
-                  <a:srgbClr val="808080"/>
-                </a:solidFill>
-              </a:rPr>
+            <a:fld id="{A80A81DD-F10A-4B1C-963A-0ABBB4865886}" type="slidenum">
+              <a:rPr lang="en-US" smtClean="0"/>
               <a:t>25</a:t>
-            </a:r>
+            </a:fld>
+            <a:endParaRPr lang="en-US"/>
           </a:p>
         </p:txBody>
       </p:sp>
     </p:spTree>
     <p:extLst>
       <p:ext uri="{BB962C8B-B14F-4D97-AF65-F5344CB8AC3E}">
-        <p14:creationId xmlns:p14="http://schemas.microsoft.com/office/powerpoint/2010/main" val="1386231900"/>
+        <p14:creationId xmlns:p14="http://schemas.microsoft.com/office/powerpoint/2010/main" val="867768209"/>
       </p:ext>
     </p:extLst>
   </p:cSld>
@@ -12238,110 +11807,8 @@
           <a:chExt cx="0" cy="0"/>
         </a:xfrm>
       </p:grpSpPr>
-      <p:pic>
-        <p:nvPicPr>
-          <p:cNvPr id="9" name="Picture 8">
-            <a:extLst>
-              <a:ext uri="{FF2B5EF4-FFF2-40B4-BE49-F238E27FC236}">
-                <a16:creationId xmlns:a16="http://schemas.microsoft.com/office/drawing/2014/main" id="{056E2CDD-0BF2-1E07-E65C-54C10EEB8C54}"/>
-              </a:ext>
-            </a:extLst>
-          </p:cNvPr>
-          <p:cNvPicPr>
-            <a:picLocks noChangeAspect="1"/>
-          </p:cNvPicPr>
-          <p:nvPr/>
-        </p:nvPicPr>
-        <p:blipFill>
-          <a:blip r:embed="rId2"/>
-          <a:stretch>
-            <a:fillRect/>
-          </a:stretch>
-        </p:blipFill>
-        <p:spPr>
-          <a:xfrm>
-            <a:off x="1521454" y="0"/>
-            <a:ext cx="9149091" cy="6858000"/>
-          </a:xfrm>
-          <a:prstGeom prst="rect">
-            <a:avLst/>
-          </a:prstGeom>
-        </p:spPr>
-      </p:pic>
-      <p:sp>
-        <p:nvSpPr>
-          <p:cNvPr id="2" name="Slide number">
-            <a:extLst>
-              <a:ext uri="{FF2B5EF4-FFF2-40B4-BE49-F238E27FC236}">
-                <a16:creationId xmlns:a16="http://schemas.microsoft.com/office/drawing/2014/main" id="{0D1E790F-83B1-95DD-74B5-57F98A712858}"/>
-              </a:ext>
-            </a:extLst>
-          </p:cNvPr>
-          <p:cNvSpPr txBox="1"/>
-          <p:nvPr/>
-        </p:nvSpPr>
-        <p:spPr>
-          <a:xfrm>
-            <a:off x="11723488" y="6477000"/>
-            <a:ext cx="316112" cy="246221"/>
-          </a:xfrm>
-          <a:prstGeom prst="rect">
-            <a:avLst/>
-          </a:prstGeom>
-          <a:solidFill>
-            <a:srgbClr val="FFFFFF"/>
-          </a:solidFill>
-        </p:spPr>
-        <p:txBody>
-          <a:bodyPr vert="horz" wrap="none" rtlCol="0">
-            <a:spAutoFit/>
-          </a:bodyPr>
-          <a:lstStyle/>
-          <a:p>
-            <a:pPr algn="r"/>
-            <a:r>
-              <a:rPr lang="en-US" sz="1000">
-                <a:solidFill>
-                  <a:srgbClr val="808080"/>
-                </a:solidFill>
-              </a:rPr>
-              <a:t>26</a:t>
-            </a:r>
-          </a:p>
-        </p:txBody>
-      </p:sp>
-    </p:spTree>
-    <p:extLst>
-      <p:ext uri="{BB962C8B-B14F-4D97-AF65-F5344CB8AC3E}">
-        <p14:creationId xmlns:p14="http://schemas.microsoft.com/office/powerpoint/2010/main" val="867768209"/>
-      </p:ext>
-    </p:extLst>
-  </p:cSld>
-  <p:clrMapOvr>
-    <a:masterClrMapping/>
-  </p:clrMapOvr>
-</p:sld>
-</file>
-
-<file path=ppt/slides/slide27.xml><?xml version="1.0" encoding="utf-8"?>
-<p:sld xmlns:a="http://schemas.openxmlformats.org/drawingml/2006/main" xmlns:r="http://schemas.openxmlformats.org/officeDocument/2006/relationships" xmlns:p="http://schemas.openxmlformats.org/presentationml/2006/main">
-  <p:cSld>
-    <p:spTree>
-      <p:nvGrpSpPr>
-        <p:cNvPr id="1" name=""/>
-        <p:cNvGrpSpPr/>
-        <p:nvPr/>
-      </p:nvGrpSpPr>
-      <p:grpSpPr>
-        <a:xfrm>
-          <a:off x="0" y="0"/>
-          <a:ext cx="0" cy="0"/>
-          <a:chOff x="0" y="0"/>
-          <a:chExt cx="0" cy="0"/>
-        </a:xfrm>
-      </p:grpSpPr>
-      <mc:AlternateContent xmlns:mc="http://schemas.openxmlformats.org/markup-compatibility/2006">
-        <mc:Choice xmlns:a14="http://schemas.microsoft.com/office/drawing/2010/main" Requires="a14">
+      <mc:AlternateContent xmlns:mc="http://schemas.openxmlformats.org/markup-compatibility/2006" xmlns:a14="http://schemas.microsoft.com/office/drawing/2010/main">
+        <mc:Choice Requires="a14">
           <p:sp>
             <p:nvSpPr>
               <p:cNvPr id="4" name="Content Placeholder 2">
@@ -13404,7 +12871,7 @@
             </p:txBody>
           </p:sp>
         </mc:Choice>
-        <mc:Fallback>
+        <mc:Fallback xmlns="">
           <p:sp>
             <p:nvSpPr>
               <p:cNvPr id="4" name="Content Placeholder 2">
@@ -13613,43 +13080,30 @@
       </p:sp>
       <p:sp>
         <p:nvSpPr>
-          <p:cNvPr id="5" name="Slide number">
+          <p:cNvPr id="7" name="Slide Number Placeholder 6">
             <a:extLst>
               <a:ext uri="{FF2B5EF4-FFF2-40B4-BE49-F238E27FC236}">
-                <a16:creationId xmlns:a16="http://schemas.microsoft.com/office/drawing/2014/main" id="{481AFD10-4976-0326-2226-4DC773162001}"/>
+                <a16:creationId xmlns:a16="http://schemas.microsoft.com/office/drawing/2014/main" id="{4599BD3C-B32B-95AD-3F78-9D6FFC07C7C6}"/>
               </a:ext>
             </a:extLst>
           </p:cNvPr>
-          <p:cNvSpPr txBox="1"/>
-          <p:nvPr/>
+          <p:cNvSpPr>
+            <a:spLocks noGrp="1"/>
+          </p:cNvSpPr>
+          <p:nvPr>
+            <p:ph type="sldNum" sz="quarter" idx="12"/>
+          </p:nvPr>
         </p:nvSpPr>
-        <p:spPr>
-          <a:xfrm>
-            <a:off x="11723488" y="6477000"/>
-            <a:ext cx="316112" cy="246221"/>
-          </a:xfrm>
-          <a:prstGeom prst="rect">
-            <a:avLst/>
-          </a:prstGeom>
-          <a:solidFill>
-            <a:srgbClr val="FFFFFF"/>
-          </a:solidFill>
-        </p:spPr>
+        <p:spPr/>
         <p:txBody>
-          <a:bodyPr vert="horz" wrap="none" rtlCol="0">
-            <a:spAutoFit/>
-          </a:bodyPr>
+          <a:bodyPr/>
           <a:lstStyle/>
           <a:p>
-            <a:pPr algn="r"/>
-            <a:r>
-              <a:rPr lang="en-US" sz="1000">
-                <a:solidFill>
-                  <a:srgbClr val="808080"/>
-                </a:solidFill>
-              </a:rPr>
-              <a:t>27</a:t>
-            </a:r>
+            <a:fld id="{A80A81DD-F10A-4B1C-963A-0ABBB4865886}" type="slidenum">
+              <a:rPr lang="en-US" smtClean="0"/>
+              <a:t>26</a:t>
+            </a:fld>
+            <a:endParaRPr lang="en-US"/>
           </a:p>
         </p:txBody>
       </p:sp>
@@ -13666,7 +13120,7 @@
 </p:sld>
 </file>
 
-<file path=ppt/slides/slide28.xml><?xml version="1.0" encoding="utf-8"?>
+<file path=ppt/slides/slide27.xml><?xml version="1.0" encoding="utf-8"?>
 <p:sld xmlns:a="http://schemas.openxmlformats.org/drawingml/2006/main" xmlns:r="http://schemas.openxmlformats.org/officeDocument/2006/relationships" xmlns:p="http://schemas.openxmlformats.org/presentationml/2006/main">
   <p:cSld>
     <p:spTree>
@@ -13825,48 +13279,6 @@
               <a:buNone/>
             </a:pPr>
             <a:endParaRPr lang="en-US" dirty="0"/>
-          </a:p>
-        </p:txBody>
-      </p:sp>
-      <p:sp>
-        <p:nvSpPr>
-          <p:cNvPr id="4" name="Slide number">
-            <a:extLst>
-              <a:ext uri="{FF2B5EF4-FFF2-40B4-BE49-F238E27FC236}">
-                <a16:creationId xmlns:a16="http://schemas.microsoft.com/office/drawing/2014/main" id="{2F7ABBA2-A147-23F1-94D6-36B2E02605C0}"/>
-              </a:ext>
-            </a:extLst>
-          </p:cNvPr>
-          <p:cNvSpPr txBox="1"/>
-          <p:nvPr/>
-        </p:nvSpPr>
-        <p:spPr>
-          <a:xfrm>
-            <a:off x="11723488" y="6477000"/>
-            <a:ext cx="316112" cy="246221"/>
-          </a:xfrm>
-          <a:prstGeom prst="rect">
-            <a:avLst/>
-          </a:prstGeom>
-          <a:solidFill>
-            <a:srgbClr val="FFFFFF"/>
-          </a:solidFill>
-        </p:spPr>
-        <p:txBody>
-          <a:bodyPr vert="horz" wrap="none" rtlCol="0">
-            <a:spAutoFit/>
-          </a:bodyPr>
-          <a:lstStyle/>
-          <a:p>
-            <a:pPr algn="r"/>
-            <a:r>
-              <a:rPr lang="en-US" sz="1000">
-                <a:solidFill>
-                  <a:srgbClr val="808080"/>
-                </a:solidFill>
-              </a:rPr>
-              <a:t>28</a:t>
-            </a:r>
           </a:p>
         </p:txBody>
       </p:sp>
@@ -13938,6 +13350,35 @@
           </a:p>
         </p:txBody>
       </p:sp>
+      <p:sp>
+        <p:nvSpPr>
+          <p:cNvPr id="7" name="Slide Number Placeholder 6">
+            <a:extLst>
+              <a:ext uri="{FF2B5EF4-FFF2-40B4-BE49-F238E27FC236}">
+                <a16:creationId xmlns:a16="http://schemas.microsoft.com/office/drawing/2014/main" id="{BFE37319-3931-A474-A793-3FC82DAAD9D2}"/>
+              </a:ext>
+            </a:extLst>
+          </p:cNvPr>
+          <p:cNvSpPr>
+            <a:spLocks noGrp="1"/>
+          </p:cNvSpPr>
+          <p:nvPr>
+            <p:ph type="sldNum" sz="quarter" idx="12"/>
+          </p:nvPr>
+        </p:nvSpPr>
+        <p:spPr/>
+        <p:txBody>
+          <a:bodyPr/>
+          <a:lstStyle/>
+          <a:p>
+            <a:fld id="{A80A81DD-F10A-4B1C-963A-0ABBB4865886}" type="slidenum">
+              <a:rPr lang="en-US" smtClean="0"/>
+              <a:t>27</a:t>
+            </a:fld>
+            <a:endParaRPr lang="en-US"/>
+          </a:p>
+        </p:txBody>
+      </p:sp>
     </p:spTree>
     <p:extLst>
       <p:ext uri="{BB962C8B-B14F-4D97-AF65-F5344CB8AC3E}">
@@ -13951,7 +13392,7 @@
 </p:sld>
 </file>
 
-<file path=ppt/slides/slide29.xml><?xml version="1.0" encoding="utf-8"?>
+<file path=ppt/slides/slide28.xml><?xml version="1.0" encoding="utf-8"?>
 <p:sld xmlns:a="http://schemas.openxmlformats.org/drawingml/2006/main" xmlns:r="http://schemas.openxmlformats.org/officeDocument/2006/relationships" xmlns:p="http://schemas.openxmlformats.org/presentationml/2006/main">
   <p:cSld>
     <p:spTree>
@@ -14138,48 +13579,6 @@
             <a:r>
               <a:rPr lang="en-US" dirty="0"/>
               <a:t>Compare the IQR with the range</a:t>
-            </a:r>
-          </a:p>
-        </p:txBody>
-      </p:sp>
-      <p:sp>
-        <p:nvSpPr>
-          <p:cNvPr id="4" name="Slide number">
-            <a:extLst>
-              <a:ext uri="{FF2B5EF4-FFF2-40B4-BE49-F238E27FC236}">
-                <a16:creationId xmlns:a16="http://schemas.microsoft.com/office/drawing/2014/main" id="{CD9FE94F-8C6D-61A0-5A58-CC806BF1EAE9}"/>
-              </a:ext>
-            </a:extLst>
-          </p:cNvPr>
-          <p:cNvSpPr txBox="1"/>
-          <p:nvPr/>
-        </p:nvSpPr>
-        <p:spPr>
-          <a:xfrm>
-            <a:off x="11723488" y="6477000"/>
-            <a:ext cx="316112" cy="246221"/>
-          </a:xfrm>
-          <a:prstGeom prst="rect">
-            <a:avLst/>
-          </a:prstGeom>
-          <a:solidFill>
-            <a:srgbClr val="FFFFFF"/>
-          </a:solidFill>
-        </p:spPr>
-        <p:txBody>
-          <a:bodyPr vert="horz" wrap="none" rtlCol="0">
-            <a:spAutoFit/>
-          </a:bodyPr>
-          <a:lstStyle/>
-          <a:p>
-            <a:pPr algn="r"/>
-            <a:r>
-              <a:rPr lang="en-US" sz="1000">
-                <a:solidFill>
-                  <a:srgbClr val="808080"/>
-                </a:solidFill>
-              </a:rPr>
-              <a:t>29</a:t>
             </a:r>
           </a:p>
         </p:txBody>
@@ -14252,6 +13651,35 @@
           </a:p>
         </p:txBody>
       </p:sp>
+      <p:sp>
+        <p:nvSpPr>
+          <p:cNvPr id="7" name="Slide Number Placeholder 6">
+            <a:extLst>
+              <a:ext uri="{FF2B5EF4-FFF2-40B4-BE49-F238E27FC236}">
+                <a16:creationId xmlns:a16="http://schemas.microsoft.com/office/drawing/2014/main" id="{B310C7CD-DF6D-C789-0D51-D8742E650FC2}"/>
+              </a:ext>
+            </a:extLst>
+          </p:cNvPr>
+          <p:cNvSpPr>
+            <a:spLocks noGrp="1"/>
+          </p:cNvSpPr>
+          <p:nvPr>
+            <p:ph type="sldNum" sz="quarter" idx="12"/>
+          </p:nvPr>
+        </p:nvSpPr>
+        <p:spPr/>
+        <p:txBody>
+          <a:bodyPr/>
+          <a:lstStyle/>
+          <a:p>
+            <a:fld id="{A80A81DD-F10A-4B1C-963A-0ABBB4865886}" type="slidenum">
+              <a:rPr lang="en-US" smtClean="0"/>
+              <a:t>28</a:t>
+            </a:fld>
+            <a:endParaRPr lang="en-US"/>
+          </a:p>
+        </p:txBody>
+      </p:sp>
     </p:spTree>
     <p:extLst>
       <p:ext uri="{BB962C8B-B14F-4D97-AF65-F5344CB8AC3E}">
@@ -14265,453 +13693,7 @@
 </p:sld>
 </file>
 
-<file path=ppt/slides/slide3.xml><?xml version="1.0" encoding="utf-8"?>
-<p:sld xmlns:a="http://schemas.openxmlformats.org/drawingml/2006/main" xmlns:r="http://schemas.openxmlformats.org/officeDocument/2006/relationships" xmlns:p="http://schemas.openxmlformats.org/presentationml/2006/main">
-  <p:cSld>
-    <p:spTree>
-      <p:nvGrpSpPr>
-        <p:cNvPr id="1" name=""/>
-        <p:cNvGrpSpPr/>
-        <p:nvPr/>
-      </p:nvGrpSpPr>
-      <p:grpSpPr>
-        <a:xfrm>
-          <a:off x="0" y="0"/>
-          <a:ext cx="0" cy="0"/>
-          <a:chOff x="0" y="0"/>
-          <a:chExt cx="0" cy="0"/>
-        </a:xfrm>
-      </p:grpSpPr>
-      <p:sp>
-        <p:nvSpPr>
-          <p:cNvPr id="2" name="Title 1">
-            <a:extLst>
-              <a:ext uri="{FF2B5EF4-FFF2-40B4-BE49-F238E27FC236}">
-                <a16:creationId xmlns:a16="http://schemas.microsoft.com/office/drawing/2014/main" id="{602EA695-3AC8-A481-E49D-28C2DE376D09}"/>
-              </a:ext>
-            </a:extLst>
-          </p:cNvPr>
-          <p:cNvSpPr>
-            <a:spLocks noGrp="1"/>
-          </p:cNvSpPr>
-          <p:nvPr>
-            <p:ph type="title"/>
-          </p:nvPr>
-        </p:nvSpPr>
-        <p:spPr/>
-        <p:txBody>
-          <a:bodyPr/>
-          <a:lstStyle/>
-          <a:p>
-            <a:r>
-              <a:rPr lang="en-US">
-                <a:solidFill>
-                  <a:srgbClr val="1F3864"/>
-                </a:solidFill>
-              </a:rPr>
-              <a:t>Review: ten video games</a:t>
-            </a:r>
-          </a:p>
-        </p:txBody>
-      </p:sp>
-      <p:sp>
-        <p:nvSpPr>
-          <p:cNvPr id="3" name="Content Placeholder 2">
-            <a:extLst>
-              <a:ext uri="{FF2B5EF4-FFF2-40B4-BE49-F238E27FC236}">
-                <a16:creationId xmlns:a16="http://schemas.microsoft.com/office/drawing/2014/main" id="{21B7095C-11DB-7936-5FB4-845A466B7D33}"/>
-              </a:ext>
-            </a:extLst>
-          </p:cNvPr>
-          <p:cNvSpPr>
-            <a:spLocks noGrp="1"/>
-          </p:cNvSpPr>
-          <p:nvPr>
-            <p:ph idx="1"/>
-          </p:nvPr>
-        </p:nvSpPr>
-        <p:spPr>
-          <a:xfrm>
-            <a:off x="762000" y="1244600"/>
-            <a:ext cx="10795000" cy="482600"/>
-          </a:xfrm>
-        </p:spPr>
-        <p:txBody>
-          <a:bodyPr>
-            <a:normAutofit/>
-          </a:bodyPr>
-          <a:lstStyle/>
-          <a:p>
-            <a:pPr marL="0" indent="0">
-              <a:buNone/>
-            </a:pPr>
-            <a:r>
-              <a:rPr lang="en-US" sz="1600" dirty="0"/>
-              <a:t>X = Metacritic critic score, for a random sample of n = 10 best-selling video games (circa 2000’s).</a:t>
-            </a:r>
-          </a:p>
-        </p:txBody>
-      </p:sp>
-      <p:sp>
-        <p:nvSpPr>
-          <p:cNvPr id="4" name="Values">
-            <a:extLst>
-              <a:ext uri="{FF2B5EF4-FFF2-40B4-BE49-F238E27FC236}">
-                <a16:creationId xmlns:a16="http://schemas.microsoft.com/office/drawing/2014/main" id="{843B934A-AF59-02EF-8995-47A653C8EF1E}"/>
-              </a:ext>
-            </a:extLst>
-          </p:cNvPr>
-          <p:cNvSpPr txBox="1"/>
-          <p:nvPr/>
-        </p:nvSpPr>
-        <p:spPr>
-          <a:xfrm>
-            <a:off x="762000" y="1752600"/>
-            <a:ext cx="10795000" cy="381000"/>
-          </a:xfrm>
-          <a:prstGeom prst="rect">
-            <a:avLst/>
-          </a:prstGeom>
-          <a:noFill/>
-        </p:spPr>
-        <p:txBody>
-          <a:bodyPr vert="horz" rtlCol="0">
-            <a:spAutoFit/>
-          </a:bodyPr>
-          <a:lstStyle/>
-          <a:p>
-            <a:r>
-              <a:rPr lang="en-US" b="1">
-                <a:latin typeface="Consolas" panose="020B0609020204030204" pitchFamily="49" charset="0"/>
-              </a:rPr>
-              <a:t>x = { 68,  72,  76,  76,  76,  83,  85,  87,  92,  95 }</a:t>
-            </a:r>
-          </a:p>
-        </p:txBody>
-      </p:sp>
-      <p:pic>
-        <p:nvPicPr>
-          <p:cNvPr id="6" name="Picture 5">
-            <a:extLst>
-              <a:ext uri="{FF2B5EF4-FFF2-40B4-BE49-F238E27FC236}">
-                <a16:creationId xmlns:a16="http://schemas.microsoft.com/office/drawing/2014/main" id="{00A12CEC-6AE4-7530-386E-A62105F9D069}"/>
-              </a:ext>
-            </a:extLst>
-          </p:cNvPr>
-          <p:cNvPicPr>
-            <a:picLocks/>
-          </p:cNvPicPr>
-          <p:nvPr/>
-        </p:nvPicPr>
-        <p:blipFill>
-          <a:blip r:embed="rId2">
-            <a:extLst>
-              <a:ext uri="{28A0092B-C50C-407E-A947-70E740481C1C}">
-                <a14:useLocalDpi xmlns:a14="http://schemas.microsoft.com/office/drawing/2010/main" val="0"/>
-              </a:ext>
-            </a:extLst>
-          </a:blip>
-          <a:stretch>
-            <a:fillRect/>
-          </a:stretch>
-        </p:blipFill>
-        <p:spPr>
-          <a:xfrm>
-            <a:off x="508000" y="2235200"/>
-            <a:ext cx="5969000" cy="3708400"/>
-          </a:xfrm>
-          <a:prstGeom prst="rect">
-            <a:avLst/>
-          </a:prstGeom>
-        </p:spPr>
-      </p:pic>
-      <p:pic>
-        <p:nvPicPr>
-          <p:cNvPr id="8" name="Picture 7">
-            <a:extLst>
-              <a:ext uri="{FF2B5EF4-FFF2-40B4-BE49-F238E27FC236}">
-                <a16:creationId xmlns:a16="http://schemas.microsoft.com/office/drawing/2014/main" id="{03F605A8-66A2-41B0-4B9F-85FA855F95A2}"/>
-              </a:ext>
-            </a:extLst>
-          </p:cNvPr>
-          <p:cNvPicPr>
-            <a:picLocks/>
-          </p:cNvPicPr>
-          <p:nvPr/>
-        </p:nvPicPr>
-        <p:blipFill>
-          <a:blip r:embed="rId3">
-            <a:extLst>
-              <a:ext uri="{28A0092B-C50C-407E-A947-70E740481C1C}">
-                <a14:useLocalDpi xmlns:a14="http://schemas.microsoft.com/office/drawing/2010/main" val="0"/>
-              </a:ext>
-            </a:extLst>
-          </a:blip>
-          <a:stretch>
-            <a:fillRect/>
-          </a:stretch>
-        </p:blipFill>
-        <p:spPr>
-          <a:xfrm>
-            <a:off x="6858000" y="2235200"/>
-            <a:ext cx="4826000" cy="2349500"/>
-          </a:xfrm>
-          <a:prstGeom prst="rect">
-            <a:avLst/>
-          </a:prstGeom>
-        </p:spPr>
-      </p:pic>
-      <p:sp>
-        <p:nvSpPr>
-          <p:cNvPr id="9" name="TextBox 8">
-            <a:extLst>
-              <a:ext uri="{FF2B5EF4-FFF2-40B4-BE49-F238E27FC236}">
-                <a16:creationId xmlns:a16="http://schemas.microsoft.com/office/drawing/2014/main" id="{CE541DD7-04E3-2643-4511-B3A7406B9876}"/>
-              </a:ext>
-            </a:extLst>
-          </p:cNvPr>
-          <p:cNvSpPr txBox="1"/>
-          <p:nvPr/>
-        </p:nvSpPr>
-        <p:spPr>
-          <a:xfrm>
-            <a:off x="6858000" y="4800600"/>
-            <a:ext cx="4826000" cy="492443"/>
-          </a:xfrm>
-          <a:prstGeom prst="rect">
-            <a:avLst/>
-          </a:prstGeom>
-          <a:noFill/>
-        </p:spPr>
-        <p:txBody>
-          <a:bodyPr vert="horz" wrap="square" rtlCol="0">
-            <a:spAutoFit/>
-          </a:bodyPr>
-          <a:lstStyle/>
-          <a:p>
-            <a:r>
-              <a:rPr lang="en-US" sz="1300" i="1"/>
-              <a:t>Four bins of width 10. Most of these games score in the 70s, with a few running up into the 90s.</a:t>
-            </a:r>
-          </a:p>
-        </p:txBody>
-      </p:sp>
-      <p:sp>
-        <p:nvSpPr>
-          <p:cNvPr id="10" name="TextBox 9">
-            <a:extLst>
-              <a:ext uri="{FF2B5EF4-FFF2-40B4-BE49-F238E27FC236}">
-                <a16:creationId xmlns:a16="http://schemas.microsoft.com/office/drawing/2014/main" id="{BD195836-C2AF-8978-1148-2171E77D2E25}"/>
-              </a:ext>
-            </a:extLst>
-          </p:cNvPr>
-          <p:cNvSpPr txBox="1"/>
-          <p:nvPr/>
-        </p:nvSpPr>
-        <p:spPr>
-          <a:xfrm>
-            <a:off x="508000" y="6451600"/>
-            <a:ext cx="11176000" cy="246221"/>
-          </a:xfrm>
-          <a:prstGeom prst="rect">
-            <a:avLst/>
-          </a:prstGeom>
-          <a:noFill/>
-        </p:spPr>
-        <p:txBody>
-          <a:bodyPr vert="horz" rtlCol="0">
-            <a:spAutoFit/>
-          </a:bodyPr>
-          <a:lstStyle/>
-          <a:p>
-            <a:r>
-              <a:rPr lang="en-US" sz="1000" i="1" dirty="0">
-                <a:solidFill>
-                  <a:srgbClr val="666666"/>
-                </a:solidFill>
-              </a:rPr>
-              <a:t>Data: </a:t>
-            </a:r>
-            <a:r>
-              <a:rPr lang="en-US" sz="1000" i="1" dirty="0" err="1">
-                <a:solidFill>
-                  <a:srgbClr val="666666"/>
-                </a:solidFill>
-              </a:rPr>
-              <a:t>VGChartz</a:t>
-            </a:r>
-            <a:r>
-              <a:rPr lang="en-US" sz="1000" i="1" dirty="0">
-                <a:solidFill>
-                  <a:srgbClr val="666666"/>
-                </a:solidFill>
-              </a:rPr>
-              <a:t> sales joined to Metacritic ratings, restricted to titles selling 5 million copies or more (127 games).</a:t>
-            </a:r>
-          </a:p>
-        </p:txBody>
-      </p:sp>
-      <p:sp>
-        <p:nvSpPr>
-          <p:cNvPr id="5" name="Slide number">
-            <a:extLst>
-              <a:ext uri="{FF2B5EF4-FFF2-40B4-BE49-F238E27FC236}">
-                <a16:creationId xmlns:a16="http://schemas.microsoft.com/office/drawing/2014/main" id="{DE23C9B1-8514-83A7-B360-E40965FBF597}"/>
-              </a:ext>
-            </a:extLst>
-          </p:cNvPr>
-          <p:cNvSpPr txBox="1"/>
-          <p:nvPr/>
-        </p:nvSpPr>
-        <p:spPr>
-          <a:xfrm>
-            <a:off x="11789211" y="6477000"/>
-            <a:ext cx="250389" cy="246221"/>
-          </a:xfrm>
-          <a:prstGeom prst="rect">
-            <a:avLst/>
-          </a:prstGeom>
-          <a:solidFill>
-            <a:srgbClr val="FFFFFF"/>
-          </a:solidFill>
-        </p:spPr>
-        <p:txBody>
-          <a:bodyPr vert="horz" wrap="none" rtlCol="0">
-            <a:spAutoFit/>
-          </a:bodyPr>
-          <a:lstStyle/>
-          <a:p>
-            <a:pPr algn="r"/>
-            <a:r>
-              <a:rPr lang="en-US" sz="1000">
-                <a:solidFill>
-                  <a:srgbClr val="808080"/>
-                </a:solidFill>
-              </a:rPr>
-              <a:t>3</a:t>
-            </a:r>
-          </a:p>
-        </p:txBody>
-      </p:sp>
-    </p:spTree>
-    <p:extLst>
-      <p:ext uri="{BB962C8B-B14F-4D97-AF65-F5344CB8AC3E}">
-        <p14:creationId xmlns:p14="http://schemas.microsoft.com/office/powerpoint/2010/main" val="3538760259"/>
-      </p:ext>
-    </p:extLst>
-  </p:cSld>
-  <p:clrMapOvr>
-    <a:masterClrMapping/>
-  </p:clrMapOvr>
-  <p:timing>
-    <p:tnLst>
-      <p:par>
-        <p:cTn id="1" dur="indefinite" restart="never" nodeType="tmRoot">
-          <p:childTnLst>
-            <p:seq concurrent="1" nextAc="seek">
-              <p:cTn id="2" dur="indefinite" nodeType="mainSeq">
-                <p:childTnLst>
-                  <p:par>
-                    <p:cTn id="3" fill="hold">
-                      <p:stCondLst>
-                        <p:cond delay="indefinite"/>
-                      </p:stCondLst>
-                      <p:childTnLst>
-                        <p:par>
-                          <p:cTn id="4" fill="hold">
-                            <p:stCondLst>
-                              <p:cond delay="0"/>
-                            </p:stCondLst>
-                            <p:childTnLst>
-                              <p:par>
-                                <p:cTn id="5" presetID="1" presetClass="entr" presetSubtype="0" fill="hold" nodeType="clickEffect">
-                                  <p:stCondLst>
-                                    <p:cond delay="0"/>
-                                  </p:stCondLst>
-                                  <p:childTnLst>
-                                    <p:set>
-                                      <p:cBhvr>
-                                        <p:cTn id="6" dur="1" fill="hold">
-                                          <p:stCondLst>
-                                            <p:cond delay="0"/>
-                                          </p:stCondLst>
-                                        </p:cTn>
-                                        <p:tgtEl>
-                                          <p:spTgt spid="8"/>
-                                        </p:tgtEl>
-                                        <p:attrNameLst>
-                                          <p:attrName>style.visibility</p:attrName>
-                                        </p:attrNameLst>
-                                      </p:cBhvr>
-                                      <p:to>
-                                        <p:strVal val="visible"/>
-                                      </p:to>
-                                    </p:set>
-                                  </p:childTnLst>
-                                </p:cTn>
-                              </p:par>
-                              <p:par>
-                                <p:cTn id="7" presetID="1" presetClass="entr" presetSubtype="0" fill="hold" grpId="0" nodeType="withEffect">
-                                  <p:stCondLst>
-                                    <p:cond delay="0"/>
-                                  </p:stCondLst>
-                                  <p:childTnLst>
-                                    <p:set>
-                                      <p:cBhvr>
-                                        <p:cTn id="8" dur="1" fill="hold">
-                                          <p:stCondLst>
-                                            <p:cond delay="0"/>
-                                          </p:stCondLst>
-                                        </p:cTn>
-                                        <p:tgtEl>
-                                          <p:spTgt spid="9"/>
-                                        </p:tgtEl>
-                                        <p:attrNameLst>
-                                          <p:attrName>style.visibility</p:attrName>
-                                        </p:attrNameLst>
-                                      </p:cBhvr>
-                                      <p:to>
-                                        <p:strVal val="visible"/>
-                                      </p:to>
-                                    </p:set>
-                                  </p:childTnLst>
-                                </p:cTn>
-                              </p:par>
-                            </p:childTnLst>
-                          </p:cTn>
-                        </p:par>
-                      </p:childTnLst>
-                    </p:cTn>
-                  </p:par>
-                </p:childTnLst>
-              </p:cTn>
-              <p:prevCondLst>
-                <p:cond evt="onPrev" delay="0">
-                  <p:tgtEl>
-                    <p:sldTgt/>
-                  </p:tgtEl>
-                </p:cond>
-              </p:prevCondLst>
-              <p:nextCondLst>
-                <p:cond evt="onNext" delay="0">
-                  <p:tgtEl>
-                    <p:sldTgt/>
-                  </p:tgtEl>
-                </p:cond>
-              </p:nextCondLst>
-            </p:seq>
-          </p:childTnLst>
-        </p:cTn>
-      </p:par>
-    </p:tnLst>
-    <p:bldLst>
-      <p:bldP spid="9" grpId="0"/>
-    </p:bldLst>
-  </p:timing>
-</p:sld>
-</file>
-
-<file path=ppt/slides/slide30.xml><?xml version="1.0" encoding="utf-8"?>
+<file path=ppt/slides/slide29.xml><?xml version="1.0" encoding="utf-8"?>
 <p:sld xmlns:a="http://schemas.openxmlformats.org/drawingml/2006/main" xmlns:r="http://schemas.openxmlformats.org/officeDocument/2006/relationships" xmlns:p="http://schemas.openxmlformats.org/presentationml/2006/main">
   <p:cSld>
     <p:spTree>
@@ -14821,8 +13803,8 @@
           </a:p>
         </p:txBody>
       </p:sp>
-      <mc:AlternateContent xmlns:mc="http://schemas.openxmlformats.org/markup-compatibility/2006">
-        <mc:Choice xmlns:a14="http://schemas.microsoft.com/office/drawing/2010/main" Requires="a14">
+      <mc:AlternateContent xmlns:mc="http://schemas.openxmlformats.org/markup-compatibility/2006" xmlns:a14="http://schemas.microsoft.com/office/drawing/2010/main">
+        <mc:Choice Requires="a14">
           <p:sp>
             <p:nvSpPr>
               <p:cNvPr id="3" name="Content Placeholder 2">
@@ -15035,7 +14017,7 @@
             </p:txBody>
           </p:sp>
         </mc:Choice>
-        <mc:Fallback>
+        <mc:Fallback xmlns="">
           <p:sp>
             <p:nvSpPr>
               <p:cNvPr id="3" name="Content Placeholder 2">
@@ -15079,48 +14061,6 @@
           </p:sp>
         </mc:Fallback>
       </mc:AlternateContent>
-      <p:sp>
-        <p:nvSpPr>
-          <p:cNvPr id="4" name="Slide number">
-            <a:extLst>
-              <a:ext uri="{FF2B5EF4-FFF2-40B4-BE49-F238E27FC236}">
-                <a16:creationId xmlns:a16="http://schemas.microsoft.com/office/drawing/2014/main" id="{48459415-56DA-C5A0-0A0D-D9C94591E830}"/>
-              </a:ext>
-            </a:extLst>
-          </p:cNvPr>
-          <p:cNvSpPr txBox="1"/>
-          <p:nvPr/>
-        </p:nvSpPr>
-        <p:spPr>
-          <a:xfrm>
-            <a:off x="11723488" y="6477000"/>
-            <a:ext cx="316112" cy="246221"/>
-          </a:xfrm>
-          <a:prstGeom prst="rect">
-            <a:avLst/>
-          </a:prstGeom>
-          <a:solidFill>
-            <a:srgbClr val="FFFFFF"/>
-          </a:solidFill>
-        </p:spPr>
-        <p:txBody>
-          <a:bodyPr vert="horz" wrap="none" rtlCol="0">
-            <a:spAutoFit/>
-          </a:bodyPr>
-          <a:lstStyle/>
-          <a:p>
-            <a:pPr algn="r"/>
-            <a:r>
-              <a:rPr lang="en-US" sz="1000">
-                <a:solidFill>
-                  <a:srgbClr val="808080"/>
-                </a:solidFill>
-              </a:rPr>
-              <a:t>30</a:t>
-            </a:r>
-          </a:p>
-        </p:txBody>
-      </p:sp>
       <p:sp>
         <p:nvSpPr>
           <p:cNvPr id="5" name="Title rule">
@@ -15189,6 +14129,35 @@
           </a:p>
         </p:txBody>
       </p:sp>
+      <p:sp>
+        <p:nvSpPr>
+          <p:cNvPr id="7" name="Slide Number Placeholder 6">
+            <a:extLst>
+              <a:ext uri="{FF2B5EF4-FFF2-40B4-BE49-F238E27FC236}">
+                <a16:creationId xmlns:a16="http://schemas.microsoft.com/office/drawing/2014/main" id="{FE3C5AEB-747B-D52A-8B0D-317F17D152A6}"/>
+              </a:ext>
+            </a:extLst>
+          </p:cNvPr>
+          <p:cNvSpPr>
+            <a:spLocks noGrp="1"/>
+          </p:cNvSpPr>
+          <p:nvPr>
+            <p:ph type="sldNum" sz="quarter" idx="12"/>
+          </p:nvPr>
+        </p:nvSpPr>
+        <p:spPr/>
+        <p:txBody>
+          <a:bodyPr/>
+          <a:lstStyle/>
+          <a:p>
+            <a:fld id="{A80A81DD-F10A-4B1C-963A-0ABBB4865886}" type="slidenum">
+              <a:rPr lang="en-US" smtClean="0"/>
+              <a:t>29</a:t>
+            </a:fld>
+            <a:endParaRPr lang="en-US"/>
+          </a:p>
+        </p:txBody>
+      </p:sp>
     </p:spTree>
     <p:extLst>
       <p:ext uri="{BB962C8B-B14F-4D97-AF65-F5344CB8AC3E}">
@@ -15202,7 +14171,440 @@
 </p:sld>
 </file>
 
-<file path=ppt/slides/slide31.xml><?xml version="1.0" encoding="utf-8"?>
+<file path=ppt/slides/slide3.xml><?xml version="1.0" encoding="utf-8"?>
+<p:sld xmlns:a="http://schemas.openxmlformats.org/drawingml/2006/main" xmlns:r="http://schemas.openxmlformats.org/officeDocument/2006/relationships" xmlns:p="http://schemas.openxmlformats.org/presentationml/2006/main">
+  <p:cSld>
+    <p:spTree>
+      <p:nvGrpSpPr>
+        <p:cNvPr id="1" name=""/>
+        <p:cNvGrpSpPr/>
+        <p:nvPr/>
+      </p:nvGrpSpPr>
+      <p:grpSpPr>
+        <a:xfrm>
+          <a:off x="0" y="0"/>
+          <a:ext cx="0" cy="0"/>
+          <a:chOff x="0" y="0"/>
+          <a:chExt cx="0" cy="0"/>
+        </a:xfrm>
+      </p:grpSpPr>
+      <p:sp>
+        <p:nvSpPr>
+          <p:cNvPr id="2" name="Title 1">
+            <a:extLst>
+              <a:ext uri="{FF2B5EF4-FFF2-40B4-BE49-F238E27FC236}">
+                <a16:creationId xmlns:a16="http://schemas.microsoft.com/office/drawing/2014/main" id="{602EA695-3AC8-A481-E49D-28C2DE376D09}"/>
+              </a:ext>
+            </a:extLst>
+          </p:cNvPr>
+          <p:cNvSpPr>
+            <a:spLocks noGrp="1"/>
+          </p:cNvSpPr>
+          <p:nvPr>
+            <p:ph type="title"/>
+          </p:nvPr>
+        </p:nvSpPr>
+        <p:spPr/>
+        <p:txBody>
+          <a:bodyPr/>
+          <a:lstStyle/>
+          <a:p>
+            <a:r>
+              <a:rPr lang="en-US">
+                <a:solidFill>
+                  <a:srgbClr val="1F3864"/>
+                </a:solidFill>
+              </a:rPr>
+              <a:t>Review: ten video games</a:t>
+            </a:r>
+          </a:p>
+        </p:txBody>
+      </p:sp>
+      <p:sp>
+        <p:nvSpPr>
+          <p:cNvPr id="3" name="Content Placeholder 2">
+            <a:extLst>
+              <a:ext uri="{FF2B5EF4-FFF2-40B4-BE49-F238E27FC236}">
+                <a16:creationId xmlns:a16="http://schemas.microsoft.com/office/drawing/2014/main" id="{21B7095C-11DB-7936-5FB4-845A466B7D33}"/>
+              </a:ext>
+            </a:extLst>
+          </p:cNvPr>
+          <p:cNvSpPr>
+            <a:spLocks noGrp="1"/>
+          </p:cNvSpPr>
+          <p:nvPr>
+            <p:ph idx="1"/>
+          </p:nvPr>
+        </p:nvSpPr>
+        <p:spPr>
+          <a:xfrm>
+            <a:off x="762000" y="1244600"/>
+            <a:ext cx="10795000" cy="482600"/>
+          </a:xfrm>
+        </p:spPr>
+        <p:txBody>
+          <a:bodyPr>
+            <a:normAutofit/>
+          </a:bodyPr>
+          <a:lstStyle/>
+          <a:p>
+            <a:pPr marL="0" indent="0">
+              <a:buNone/>
+            </a:pPr>
+            <a:r>
+              <a:rPr lang="en-US" sz="1600" dirty="0"/>
+              <a:t>X = Metacritic critic score, for a random sample of n = 10 best-selling video games (circa 2000’s).</a:t>
+            </a:r>
+          </a:p>
+        </p:txBody>
+      </p:sp>
+      <p:sp>
+        <p:nvSpPr>
+          <p:cNvPr id="4" name="Values">
+            <a:extLst>
+              <a:ext uri="{FF2B5EF4-FFF2-40B4-BE49-F238E27FC236}">
+                <a16:creationId xmlns:a16="http://schemas.microsoft.com/office/drawing/2014/main" id="{843B934A-AF59-02EF-8995-47A653C8EF1E}"/>
+              </a:ext>
+            </a:extLst>
+          </p:cNvPr>
+          <p:cNvSpPr txBox="1"/>
+          <p:nvPr/>
+        </p:nvSpPr>
+        <p:spPr>
+          <a:xfrm>
+            <a:off x="762000" y="1752600"/>
+            <a:ext cx="10795000" cy="381000"/>
+          </a:xfrm>
+          <a:prstGeom prst="rect">
+            <a:avLst/>
+          </a:prstGeom>
+          <a:noFill/>
+        </p:spPr>
+        <p:txBody>
+          <a:bodyPr vert="horz" rtlCol="0">
+            <a:spAutoFit/>
+          </a:bodyPr>
+          <a:lstStyle/>
+          <a:p>
+            <a:r>
+              <a:rPr lang="en-US" b="1">
+                <a:latin typeface="Consolas" panose="020B0609020204030204" pitchFamily="49" charset="0"/>
+              </a:rPr>
+              <a:t>x = { 68,  72,  76,  76,  76,  83,  85,  87,  92,  95 }</a:t>
+            </a:r>
+          </a:p>
+        </p:txBody>
+      </p:sp>
+      <p:pic>
+        <p:nvPicPr>
+          <p:cNvPr id="6" name="Picture 5">
+            <a:extLst>
+              <a:ext uri="{FF2B5EF4-FFF2-40B4-BE49-F238E27FC236}">
+                <a16:creationId xmlns:a16="http://schemas.microsoft.com/office/drawing/2014/main" id="{00A12CEC-6AE4-7530-386E-A62105F9D069}"/>
+              </a:ext>
+            </a:extLst>
+          </p:cNvPr>
+          <p:cNvPicPr>
+            <a:picLocks/>
+          </p:cNvPicPr>
+          <p:nvPr/>
+        </p:nvPicPr>
+        <p:blipFill>
+          <a:blip r:embed="rId2">
+            <a:extLst>
+              <a:ext uri="{28A0092B-C50C-407E-A947-70E740481C1C}">
+                <a14:useLocalDpi xmlns:a14="http://schemas.microsoft.com/office/drawing/2010/main" val="0"/>
+              </a:ext>
+            </a:extLst>
+          </a:blip>
+          <a:stretch>
+            <a:fillRect/>
+          </a:stretch>
+        </p:blipFill>
+        <p:spPr>
+          <a:xfrm>
+            <a:off x="508000" y="2235200"/>
+            <a:ext cx="5969000" cy="3708400"/>
+          </a:xfrm>
+          <a:prstGeom prst="rect">
+            <a:avLst/>
+          </a:prstGeom>
+        </p:spPr>
+      </p:pic>
+      <p:pic>
+        <p:nvPicPr>
+          <p:cNvPr id="8" name="Picture 7">
+            <a:extLst>
+              <a:ext uri="{FF2B5EF4-FFF2-40B4-BE49-F238E27FC236}">
+                <a16:creationId xmlns:a16="http://schemas.microsoft.com/office/drawing/2014/main" id="{03F605A8-66A2-41B0-4B9F-85FA855F95A2}"/>
+              </a:ext>
+            </a:extLst>
+          </p:cNvPr>
+          <p:cNvPicPr>
+            <a:picLocks/>
+          </p:cNvPicPr>
+          <p:nvPr/>
+        </p:nvPicPr>
+        <p:blipFill>
+          <a:blip r:embed="rId3">
+            <a:extLst>
+              <a:ext uri="{28A0092B-C50C-407E-A947-70E740481C1C}">
+                <a14:useLocalDpi xmlns:a14="http://schemas.microsoft.com/office/drawing/2010/main" val="0"/>
+              </a:ext>
+            </a:extLst>
+          </a:blip>
+          <a:stretch>
+            <a:fillRect/>
+          </a:stretch>
+        </p:blipFill>
+        <p:spPr>
+          <a:xfrm>
+            <a:off x="6858000" y="2235200"/>
+            <a:ext cx="4826000" cy="2349500"/>
+          </a:xfrm>
+          <a:prstGeom prst="rect">
+            <a:avLst/>
+          </a:prstGeom>
+        </p:spPr>
+      </p:pic>
+      <p:sp>
+        <p:nvSpPr>
+          <p:cNvPr id="9" name="TextBox 8">
+            <a:extLst>
+              <a:ext uri="{FF2B5EF4-FFF2-40B4-BE49-F238E27FC236}">
+                <a16:creationId xmlns:a16="http://schemas.microsoft.com/office/drawing/2014/main" id="{CE541DD7-04E3-2643-4511-B3A7406B9876}"/>
+              </a:ext>
+            </a:extLst>
+          </p:cNvPr>
+          <p:cNvSpPr txBox="1"/>
+          <p:nvPr/>
+        </p:nvSpPr>
+        <p:spPr>
+          <a:xfrm>
+            <a:off x="6858000" y="4800600"/>
+            <a:ext cx="4826000" cy="492443"/>
+          </a:xfrm>
+          <a:prstGeom prst="rect">
+            <a:avLst/>
+          </a:prstGeom>
+          <a:noFill/>
+        </p:spPr>
+        <p:txBody>
+          <a:bodyPr vert="horz" wrap="square" rtlCol="0">
+            <a:spAutoFit/>
+          </a:bodyPr>
+          <a:lstStyle/>
+          <a:p>
+            <a:r>
+              <a:rPr lang="en-US" sz="1300" i="1"/>
+              <a:t>Four bins of width 10. Most of these games score in the 70s, with a few running up into the 90s.</a:t>
+            </a:r>
+          </a:p>
+        </p:txBody>
+      </p:sp>
+      <p:sp>
+        <p:nvSpPr>
+          <p:cNvPr id="10" name="TextBox 9">
+            <a:extLst>
+              <a:ext uri="{FF2B5EF4-FFF2-40B4-BE49-F238E27FC236}">
+                <a16:creationId xmlns:a16="http://schemas.microsoft.com/office/drawing/2014/main" id="{BD195836-C2AF-8978-1148-2171E77D2E25}"/>
+              </a:ext>
+            </a:extLst>
+          </p:cNvPr>
+          <p:cNvSpPr txBox="1"/>
+          <p:nvPr/>
+        </p:nvSpPr>
+        <p:spPr>
+          <a:xfrm>
+            <a:off x="508000" y="6451600"/>
+            <a:ext cx="11176000" cy="246221"/>
+          </a:xfrm>
+          <a:prstGeom prst="rect">
+            <a:avLst/>
+          </a:prstGeom>
+          <a:noFill/>
+        </p:spPr>
+        <p:txBody>
+          <a:bodyPr vert="horz" rtlCol="0">
+            <a:spAutoFit/>
+          </a:bodyPr>
+          <a:lstStyle/>
+          <a:p>
+            <a:r>
+              <a:rPr lang="en-US" sz="1000" i="1" dirty="0">
+                <a:solidFill>
+                  <a:srgbClr val="666666"/>
+                </a:solidFill>
+              </a:rPr>
+              <a:t>Data: </a:t>
+            </a:r>
+            <a:r>
+              <a:rPr lang="en-US" sz="1000" i="1" dirty="0" err="1">
+                <a:solidFill>
+                  <a:srgbClr val="666666"/>
+                </a:solidFill>
+              </a:rPr>
+              <a:t>VGChartz</a:t>
+            </a:r>
+            <a:r>
+              <a:rPr lang="en-US" sz="1000" i="1" dirty="0">
+                <a:solidFill>
+                  <a:srgbClr val="666666"/>
+                </a:solidFill>
+              </a:rPr>
+              <a:t> sales joined to Metacritic ratings, restricted to titles selling 5 million copies or more (127 games).</a:t>
+            </a:r>
+          </a:p>
+        </p:txBody>
+      </p:sp>
+      <p:sp>
+        <p:nvSpPr>
+          <p:cNvPr id="7" name="Slide Number Placeholder 6">
+            <a:extLst>
+              <a:ext uri="{FF2B5EF4-FFF2-40B4-BE49-F238E27FC236}">
+                <a16:creationId xmlns:a16="http://schemas.microsoft.com/office/drawing/2014/main" id="{F02A0954-A3CA-A9F9-71CC-3DA6AB018825}"/>
+              </a:ext>
+            </a:extLst>
+          </p:cNvPr>
+          <p:cNvSpPr>
+            <a:spLocks noGrp="1"/>
+          </p:cNvSpPr>
+          <p:nvPr>
+            <p:ph type="sldNum" sz="quarter" idx="12"/>
+          </p:nvPr>
+        </p:nvSpPr>
+        <p:spPr/>
+        <p:txBody>
+          <a:bodyPr/>
+          <a:lstStyle/>
+          <a:p>
+            <a:fld id="{A80A81DD-F10A-4B1C-963A-0ABBB4865886}" type="slidenum">
+              <a:rPr lang="en-US" smtClean="0"/>
+              <a:t>3</a:t>
+            </a:fld>
+            <a:endParaRPr lang="en-US"/>
+          </a:p>
+        </p:txBody>
+      </p:sp>
+    </p:spTree>
+    <p:extLst>
+      <p:ext uri="{BB962C8B-B14F-4D97-AF65-F5344CB8AC3E}">
+        <p14:creationId xmlns:p14="http://schemas.microsoft.com/office/powerpoint/2010/main" val="3538760259"/>
+      </p:ext>
+    </p:extLst>
+  </p:cSld>
+  <p:clrMapOvr>
+    <a:masterClrMapping/>
+  </p:clrMapOvr>
+  <p:timing>
+    <p:tnLst>
+      <p:par>
+        <p:cTn id="1" dur="indefinite" restart="never" nodeType="tmRoot">
+          <p:childTnLst>
+            <p:seq concurrent="1" nextAc="seek">
+              <p:cTn id="2" dur="indefinite" nodeType="mainSeq">
+                <p:childTnLst>
+                  <p:par>
+                    <p:cTn id="3" fill="hold">
+                      <p:stCondLst>
+                        <p:cond delay="indefinite"/>
+                      </p:stCondLst>
+                      <p:childTnLst>
+                        <p:par>
+                          <p:cTn id="4" fill="hold">
+                            <p:stCondLst>
+                              <p:cond delay="0"/>
+                            </p:stCondLst>
+                            <p:childTnLst>
+                              <p:par>
+                                <p:cTn id="5" presetID="1" presetClass="entr" presetSubtype="0" fill="hold" nodeType="clickEffect">
+                                  <p:stCondLst>
+                                    <p:cond delay="0"/>
+                                  </p:stCondLst>
+                                  <p:childTnLst>
+                                    <p:set>
+                                      <p:cBhvr>
+                                        <p:cTn id="6" dur="1" fill="hold">
+                                          <p:stCondLst>
+                                            <p:cond delay="0"/>
+                                          </p:stCondLst>
+                                        </p:cTn>
+                                        <p:tgtEl>
+                                          <p:spTgt spid="8"/>
+                                        </p:tgtEl>
+                                        <p:attrNameLst>
+                                          <p:attrName>style.visibility</p:attrName>
+                                        </p:attrNameLst>
+                                      </p:cBhvr>
+                                      <p:to>
+                                        <p:strVal val="visible"/>
+                                      </p:to>
+                                    </p:set>
+                                  </p:childTnLst>
+                                </p:cTn>
+                              </p:par>
+                              <p:par>
+                                <p:cTn id="7" presetID="1" presetClass="entr" presetSubtype="0" fill="hold" grpId="0" nodeType="withEffect">
+                                  <p:stCondLst>
+                                    <p:cond delay="0"/>
+                                  </p:stCondLst>
+                                  <p:childTnLst>
+                                    <p:set>
+                                      <p:cBhvr>
+                                        <p:cTn id="8" dur="1" fill="hold">
+                                          <p:stCondLst>
+                                            <p:cond delay="0"/>
+                                          </p:stCondLst>
+                                        </p:cTn>
+                                        <p:tgtEl>
+                                          <p:spTgt spid="9"/>
+                                        </p:tgtEl>
+                                        <p:attrNameLst>
+                                          <p:attrName>style.visibility</p:attrName>
+                                        </p:attrNameLst>
+                                      </p:cBhvr>
+                                      <p:to>
+                                        <p:strVal val="visible"/>
+                                      </p:to>
+                                    </p:set>
+                                  </p:childTnLst>
+                                </p:cTn>
+                              </p:par>
+                            </p:childTnLst>
+                          </p:cTn>
+                        </p:par>
+                      </p:childTnLst>
+                    </p:cTn>
+                  </p:par>
+                </p:childTnLst>
+              </p:cTn>
+              <p:prevCondLst>
+                <p:cond evt="onPrev" delay="0">
+                  <p:tgtEl>
+                    <p:sldTgt/>
+                  </p:tgtEl>
+                </p:cond>
+              </p:prevCondLst>
+              <p:nextCondLst>
+                <p:cond evt="onNext" delay="0">
+                  <p:tgtEl>
+                    <p:sldTgt/>
+                  </p:tgtEl>
+                </p:cond>
+              </p:nextCondLst>
+            </p:seq>
+          </p:childTnLst>
+        </p:cTn>
+      </p:par>
+    </p:tnLst>
+    <p:bldLst>
+      <p:bldP spid="9" grpId="0"/>
+    </p:bldLst>
+  </p:timing>
+</p:sld>
+</file>
+
+<file path=ppt/slides/slide30.xml><?xml version="1.0" encoding="utf-8"?>
 <p:sld xmlns:a="http://schemas.openxmlformats.org/drawingml/2006/main" xmlns:r="http://schemas.openxmlformats.org/officeDocument/2006/relationships" xmlns:p="http://schemas.openxmlformats.org/presentationml/2006/main">
   <p:cSld>
     <p:spTree>
@@ -15774,43 +15176,30 @@
       </mc:AlternateContent>
       <p:sp>
         <p:nvSpPr>
-          <p:cNvPr id="2" name="Slide number">
+          <p:cNvPr id="3" name="Slide Number Placeholder 2">
             <a:extLst>
               <a:ext uri="{FF2B5EF4-FFF2-40B4-BE49-F238E27FC236}">
-                <a16:creationId xmlns:a16="http://schemas.microsoft.com/office/drawing/2014/main" id="{B9EA5AA7-13ED-1755-C52C-28ADD124044E}"/>
+                <a16:creationId xmlns:a16="http://schemas.microsoft.com/office/drawing/2014/main" id="{D9672764-92F4-B2E6-8D45-DFFD4C705BFB}"/>
               </a:ext>
             </a:extLst>
           </p:cNvPr>
-          <p:cNvSpPr txBox="1"/>
-          <p:nvPr/>
+          <p:cNvSpPr>
+            <a:spLocks noGrp="1"/>
+          </p:cNvSpPr>
+          <p:nvPr>
+            <p:ph type="sldNum" sz="quarter" idx="12"/>
+          </p:nvPr>
         </p:nvSpPr>
-        <p:spPr>
-          <a:xfrm>
-            <a:off x="11723488" y="6477000"/>
-            <a:ext cx="316112" cy="246221"/>
-          </a:xfrm>
-          <a:prstGeom prst="rect">
-            <a:avLst/>
-          </a:prstGeom>
-          <a:solidFill>
-            <a:srgbClr val="FFFFFF"/>
-          </a:solidFill>
-        </p:spPr>
+        <p:spPr/>
         <p:txBody>
-          <a:bodyPr vert="horz" wrap="none" rtlCol="0">
-            <a:spAutoFit/>
-          </a:bodyPr>
+          <a:bodyPr/>
           <a:lstStyle/>
           <a:p>
-            <a:pPr algn="r"/>
-            <a:r>
-              <a:rPr lang="en-US" sz="1000">
-                <a:solidFill>
-                  <a:srgbClr val="808080"/>
-                </a:solidFill>
-              </a:rPr>
-              <a:t>31</a:t>
-            </a:r>
+            <a:fld id="{A80A81DD-F10A-4B1C-963A-0ABBB4865886}" type="slidenum">
+              <a:rPr lang="en-US" smtClean="0"/>
+              <a:t>30</a:t>
+            </a:fld>
+            <a:endParaRPr lang="en-US"/>
           </a:p>
         </p:txBody>
       </p:sp>
@@ -15827,7 +15216,7 @@
 </p:sld>
 </file>
 
-<file path=ppt/slides/slide32.xml><?xml version="1.0" encoding="utf-8"?>
+<file path=ppt/slides/slide31.xml><?xml version="1.0" encoding="utf-8"?>
 <p:sld xmlns:a="http://schemas.openxmlformats.org/drawingml/2006/main" xmlns:r="http://schemas.openxmlformats.org/officeDocument/2006/relationships" xmlns:p="http://schemas.openxmlformats.org/presentationml/2006/main">
   <p:cSld>
     <p:spTree>
@@ -15932,8 +15321,8 @@
           </a:p>
         </p:txBody>
       </p:sp>
-      <mc:AlternateContent xmlns:mc="http://schemas.openxmlformats.org/markup-compatibility/2006">
-        <mc:Choice xmlns:a14="http://schemas.microsoft.com/office/drawing/2010/main" Requires="a14">
+      <mc:AlternateContent xmlns:mc="http://schemas.openxmlformats.org/markup-compatibility/2006" xmlns:a14="http://schemas.microsoft.com/office/drawing/2010/main">
+        <mc:Choice Requires="a14">
           <p:sp>
             <p:nvSpPr>
               <p:cNvPr id="3" name="Content Placeholder 2">
@@ -16592,7 +15981,7 @@
             </p:txBody>
           </p:sp>
         </mc:Choice>
-        <mc:Fallback>
+        <mc:Fallback xmlns="">
           <p:sp>
             <p:nvSpPr>
               <p:cNvPr id="3" name="Content Placeholder 2">
@@ -16632,48 +16021,6 @@
           </p:sp>
         </mc:Fallback>
       </mc:AlternateContent>
-      <p:sp>
-        <p:nvSpPr>
-          <p:cNvPr id="4" name="Slide number">
-            <a:extLst>
-              <a:ext uri="{FF2B5EF4-FFF2-40B4-BE49-F238E27FC236}">
-                <a16:creationId xmlns:a16="http://schemas.microsoft.com/office/drawing/2014/main" id="{00CB238D-419A-B497-5008-44959F96C5A3}"/>
-              </a:ext>
-            </a:extLst>
-          </p:cNvPr>
-          <p:cNvSpPr txBox="1"/>
-          <p:nvPr/>
-        </p:nvSpPr>
-        <p:spPr>
-          <a:xfrm>
-            <a:off x="11723488" y="6477000"/>
-            <a:ext cx="316112" cy="246221"/>
-          </a:xfrm>
-          <a:prstGeom prst="rect">
-            <a:avLst/>
-          </a:prstGeom>
-          <a:solidFill>
-            <a:srgbClr val="FFFFFF"/>
-          </a:solidFill>
-        </p:spPr>
-        <p:txBody>
-          <a:bodyPr vert="horz" wrap="none" rtlCol="0">
-            <a:spAutoFit/>
-          </a:bodyPr>
-          <a:lstStyle/>
-          <a:p>
-            <a:pPr algn="r"/>
-            <a:r>
-              <a:rPr lang="en-US" sz="1000">
-                <a:solidFill>
-                  <a:srgbClr val="808080"/>
-                </a:solidFill>
-              </a:rPr>
-              <a:t>32</a:t>
-            </a:r>
-          </a:p>
-        </p:txBody>
-      </p:sp>
       <p:sp>
         <p:nvSpPr>
           <p:cNvPr id="5" name="Title rule">
@@ -16742,6 +16089,35 @@
           </a:p>
         </p:txBody>
       </p:sp>
+      <p:sp>
+        <p:nvSpPr>
+          <p:cNvPr id="7" name="Slide Number Placeholder 6">
+            <a:extLst>
+              <a:ext uri="{FF2B5EF4-FFF2-40B4-BE49-F238E27FC236}">
+                <a16:creationId xmlns:a16="http://schemas.microsoft.com/office/drawing/2014/main" id="{53F1C7D0-95C2-F646-8BF1-0DBF7FC6B81A}"/>
+              </a:ext>
+            </a:extLst>
+          </p:cNvPr>
+          <p:cNvSpPr>
+            <a:spLocks noGrp="1"/>
+          </p:cNvSpPr>
+          <p:nvPr>
+            <p:ph type="sldNum" sz="quarter" idx="12"/>
+          </p:nvPr>
+        </p:nvSpPr>
+        <p:spPr/>
+        <p:txBody>
+          <a:bodyPr/>
+          <a:lstStyle/>
+          <a:p>
+            <a:fld id="{A80A81DD-F10A-4B1C-963A-0ABBB4865886}" type="slidenum">
+              <a:rPr lang="en-US" smtClean="0"/>
+              <a:t>31</a:t>
+            </a:fld>
+            <a:endParaRPr lang="en-US"/>
+          </a:p>
+        </p:txBody>
+      </p:sp>
     </p:spTree>
     <p:extLst>
       <p:ext uri="{BB962C8B-B14F-4D97-AF65-F5344CB8AC3E}">
@@ -16755,7 +16131,7 @@
 </p:sld>
 </file>
 
-<file path=ppt/slides/slide33.xml><?xml version="1.0" encoding="utf-8"?>
+<file path=ppt/slides/slide32.xml><?xml version="1.0" encoding="utf-8"?>
 <p:sld xmlns:a="http://schemas.openxmlformats.org/drawingml/2006/main" xmlns:r="http://schemas.openxmlformats.org/officeDocument/2006/relationships" xmlns:p="http://schemas.openxmlformats.org/presentationml/2006/main">
   <p:cSld>
     <p:spTree>
@@ -16865,8 +16241,8 @@
           </a:p>
         </p:txBody>
       </p:sp>
-      <mc:AlternateContent xmlns:mc="http://schemas.openxmlformats.org/markup-compatibility/2006">
-        <mc:Choice xmlns:a14="http://schemas.microsoft.com/office/drawing/2010/main" Requires="a14">
+      <mc:AlternateContent xmlns:mc="http://schemas.openxmlformats.org/markup-compatibility/2006" xmlns:a14="http://schemas.microsoft.com/office/drawing/2010/main">
+        <mc:Choice Requires="a14">
           <p:sp>
             <p:nvSpPr>
               <p:cNvPr id="3" name="Content Placeholder 2">
@@ -17237,7 +16613,7 @@
             </p:txBody>
           </p:sp>
         </mc:Choice>
-        <mc:Fallback>
+        <mc:Fallback xmlns="">
           <p:sp>
             <p:nvSpPr>
               <p:cNvPr id="3" name="Content Placeholder 2">
@@ -17283,43 +16659,30 @@
       </mc:AlternateContent>
       <p:sp>
         <p:nvSpPr>
-          <p:cNvPr id="4" name="Slide number">
+          <p:cNvPr id="6" name="Slide Number Placeholder 5">
             <a:extLst>
               <a:ext uri="{FF2B5EF4-FFF2-40B4-BE49-F238E27FC236}">
-                <a16:creationId xmlns:a16="http://schemas.microsoft.com/office/drawing/2014/main" id="{841D5395-47BC-27F6-60DC-2244753117BE}"/>
+                <a16:creationId xmlns:a16="http://schemas.microsoft.com/office/drawing/2014/main" id="{5161AD7D-65E6-1D5C-0898-AB36F6686A53}"/>
               </a:ext>
             </a:extLst>
           </p:cNvPr>
-          <p:cNvSpPr txBox="1"/>
-          <p:nvPr/>
+          <p:cNvSpPr>
+            <a:spLocks noGrp="1"/>
+          </p:cNvSpPr>
+          <p:nvPr>
+            <p:ph type="sldNum" sz="quarter" idx="12"/>
+          </p:nvPr>
         </p:nvSpPr>
-        <p:spPr>
-          <a:xfrm>
-            <a:off x="11723488" y="6477000"/>
-            <a:ext cx="316112" cy="246221"/>
-          </a:xfrm>
-          <a:prstGeom prst="rect">
-            <a:avLst/>
-          </a:prstGeom>
-          <a:solidFill>
-            <a:srgbClr val="FFFFFF"/>
-          </a:solidFill>
-        </p:spPr>
+        <p:spPr/>
         <p:txBody>
-          <a:bodyPr vert="horz" wrap="none" rtlCol="0">
-            <a:spAutoFit/>
-          </a:bodyPr>
+          <a:bodyPr/>
           <a:lstStyle/>
           <a:p>
-            <a:pPr algn="r"/>
-            <a:r>
-              <a:rPr lang="en-US" sz="1000">
-                <a:solidFill>
-                  <a:srgbClr val="808080"/>
-                </a:solidFill>
-              </a:rPr>
-              <a:t>33</a:t>
-            </a:r>
+            <a:fld id="{A80A81DD-F10A-4B1C-963A-0ABBB4865886}" type="slidenum">
+              <a:rPr lang="en-US" smtClean="0"/>
+              <a:t>32</a:t>
+            </a:fld>
+            <a:endParaRPr lang="en-US"/>
           </a:p>
         </p:txBody>
       </p:sp>
@@ -17336,7 +16699,7 @@
 </p:sld>
 </file>
 
-<file path=ppt/slides/slide34.xml><?xml version="1.0" encoding="utf-8"?>
+<file path=ppt/slides/slide33.xml><?xml version="1.0" encoding="utf-8"?>
 <p:sld xmlns:a="http://schemas.openxmlformats.org/drawingml/2006/main" xmlns:r="http://schemas.openxmlformats.org/officeDocument/2006/relationships" xmlns:p="http://schemas.openxmlformats.org/presentationml/2006/main">
   <p:cSld>
     <p:spTree>
@@ -17409,8 +16772,8 @@
           </a:p>
         </p:txBody>
       </p:sp>
-      <mc:AlternateContent xmlns:mc="http://schemas.openxmlformats.org/markup-compatibility/2006">
-        <mc:Choice xmlns:a14="http://schemas.microsoft.com/office/drawing/2010/main" Requires="a14">
+      <mc:AlternateContent xmlns:mc="http://schemas.openxmlformats.org/markup-compatibility/2006" xmlns:a14="http://schemas.microsoft.com/office/drawing/2010/main">
+        <mc:Choice Requires="a14">
           <p:sp>
             <p:nvSpPr>
               <p:cNvPr id="2" name="Title 1">
@@ -17474,7 +16837,7 @@
             </p:txBody>
           </p:sp>
         </mc:Choice>
-        <mc:Fallback>
+        <mc:Fallback xmlns="">
           <p:sp>
             <p:nvSpPr>
               <p:cNvPr id="2" name="Title 1">
@@ -17759,48 +17122,6 @@
       </mc:AlternateContent>
       <p:sp>
         <p:nvSpPr>
-          <p:cNvPr id="4" name="Slide number">
-            <a:extLst>
-              <a:ext uri="{FF2B5EF4-FFF2-40B4-BE49-F238E27FC236}">
-                <a16:creationId xmlns:a16="http://schemas.microsoft.com/office/drawing/2014/main" id="{1A9C7E72-AD16-DF59-248A-180BFB9E6F32}"/>
-              </a:ext>
-            </a:extLst>
-          </p:cNvPr>
-          <p:cNvSpPr txBox="1"/>
-          <p:nvPr/>
-        </p:nvSpPr>
-        <p:spPr>
-          <a:xfrm>
-            <a:off x="11723488" y="6477000"/>
-            <a:ext cx="316112" cy="246221"/>
-          </a:xfrm>
-          <a:prstGeom prst="rect">
-            <a:avLst/>
-          </a:prstGeom>
-          <a:solidFill>
-            <a:srgbClr val="FFFFFF"/>
-          </a:solidFill>
-        </p:spPr>
-        <p:txBody>
-          <a:bodyPr vert="horz" wrap="none" rtlCol="0">
-            <a:spAutoFit/>
-          </a:bodyPr>
-          <a:lstStyle/>
-          <a:p>
-            <a:pPr algn="r"/>
-            <a:r>
-              <a:rPr lang="en-US" sz="1000">
-                <a:solidFill>
-                  <a:srgbClr val="808080"/>
-                </a:solidFill>
-              </a:rPr>
-              <a:t>34</a:t>
-            </a:r>
-          </a:p>
-        </p:txBody>
-      </p:sp>
-      <p:sp>
-        <p:nvSpPr>
           <p:cNvPr id="5" name="Title rule">
             <a:extLst>
               <a:ext uri="{FF2B5EF4-FFF2-40B4-BE49-F238E27FC236}">
@@ -17867,6 +17188,35 @@
           </a:p>
         </p:txBody>
       </p:sp>
+      <p:sp>
+        <p:nvSpPr>
+          <p:cNvPr id="7" name="Slide Number Placeholder 6">
+            <a:extLst>
+              <a:ext uri="{FF2B5EF4-FFF2-40B4-BE49-F238E27FC236}">
+                <a16:creationId xmlns:a16="http://schemas.microsoft.com/office/drawing/2014/main" id="{6A27840F-FFF8-58F3-D124-DB40E51A4394}"/>
+              </a:ext>
+            </a:extLst>
+          </p:cNvPr>
+          <p:cNvSpPr>
+            <a:spLocks noGrp="1"/>
+          </p:cNvSpPr>
+          <p:nvPr>
+            <p:ph type="sldNum" sz="quarter" idx="12"/>
+          </p:nvPr>
+        </p:nvSpPr>
+        <p:spPr/>
+        <p:txBody>
+          <a:bodyPr/>
+          <a:lstStyle/>
+          <a:p>
+            <a:fld id="{A80A81DD-F10A-4B1C-963A-0ABBB4865886}" type="slidenum">
+              <a:rPr lang="en-US" smtClean="0"/>
+              <a:t>33</a:t>
+            </a:fld>
+            <a:endParaRPr lang="en-US"/>
+          </a:p>
+        </p:txBody>
+      </p:sp>
     </p:spTree>
     <p:extLst>
       <p:ext uri="{BB962C8B-B14F-4D97-AF65-F5344CB8AC3E}">
@@ -17880,7 +17230,7 @@
 </p:sld>
 </file>
 
-<file path=ppt/slides/slide35.xml><?xml version="1.0" encoding="utf-8"?>
+<file path=ppt/slides/slide34.xml><?xml version="1.0" encoding="utf-8"?>
 <p:sld xmlns:a="http://schemas.openxmlformats.org/drawingml/2006/main" xmlns:r="http://schemas.openxmlformats.org/officeDocument/2006/relationships" xmlns:p="http://schemas.openxmlformats.org/presentationml/2006/main">
   <p:cSld>
     <p:spTree>
@@ -18706,43 +18056,30 @@
       </p:pic>
       <p:sp>
         <p:nvSpPr>
-          <p:cNvPr id="3" name="Slide number">
+          <p:cNvPr id="6" name="Slide Number Placeholder 5">
             <a:extLst>
               <a:ext uri="{FF2B5EF4-FFF2-40B4-BE49-F238E27FC236}">
-                <a16:creationId xmlns:a16="http://schemas.microsoft.com/office/drawing/2014/main" id="{CDB1AEFA-49B6-098B-1F32-8EC0CC1D3363}"/>
+                <a16:creationId xmlns:a16="http://schemas.microsoft.com/office/drawing/2014/main" id="{05542756-14D4-326B-210D-D53701762B02}"/>
               </a:ext>
             </a:extLst>
           </p:cNvPr>
-          <p:cNvSpPr txBox="1"/>
-          <p:nvPr/>
+          <p:cNvSpPr>
+            <a:spLocks noGrp="1"/>
+          </p:cNvSpPr>
+          <p:nvPr>
+            <p:ph type="sldNum" sz="quarter" idx="12"/>
+          </p:nvPr>
         </p:nvSpPr>
-        <p:spPr>
-          <a:xfrm>
-            <a:off x="11723488" y="6477000"/>
-            <a:ext cx="316112" cy="246221"/>
-          </a:xfrm>
-          <a:prstGeom prst="rect">
-            <a:avLst/>
-          </a:prstGeom>
-          <a:solidFill>
-            <a:srgbClr val="FFFFFF"/>
-          </a:solidFill>
-        </p:spPr>
+        <p:spPr/>
         <p:txBody>
-          <a:bodyPr vert="horz" wrap="none" rtlCol="0">
-            <a:spAutoFit/>
-          </a:bodyPr>
+          <a:bodyPr/>
           <a:lstStyle/>
           <a:p>
-            <a:pPr algn="r"/>
-            <a:r>
-              <a:rPr lang="en-US" sz="1000">
-                <a:solidFill>
-                  <a:srgbClr val="808080"/>
-                </a:solidFill>
-              </a:rPr>
-              <a:t>35</a:t>
-            </a:r>
+            <a:fld id="{A80A81DD-F10A-4B1C-963A-0ABBB4865886}" type="slidenum">
+              <a:rPr lang="en-US" smtClean="0"/>
+              <a:t>34</a:t>
+            </a:fld>
+            <a:endParaRPr lang="en-US"/>
           </a:p>
         </p:txBody>
       </p:sp>
@@ -18778,303 +18115,6 @@
       </p:grpSpPr>
       <p:sp>
         <p:nvSpPr>
-          <p:cNvPr id="6" name="Body card">
-            <a:extLst>
-              <a:ext uri="{FF2B5EF4-FFF2-40B4-BE49-F238E27FC236}">
-                <a16:creationId xmlns:a16="http://schemas.microsoft.com/office/drawing/2014/main" id="{C82B21D3-8A17-AE06-2004-FF24D89726EA}"/>
-              </a:ext>
-            </a:extLst>
-          </p:cNvPr>
-          <p:cNvSpPr/>
-          <p:nvPr/>
-        </p:nvSpPr>
-        <p:spPr>
-          <a:xfrm>
-            <a:off x="635000" y="1676400"/>
-            <a:ext cx="10922000" cy="2540000"/>
-          </a:xfrm>
-          <a:prstGeom prst="roundRect">
-            <a:avLst>
-              <a:gd name="adj" fmla="val 3000"/>
-            </a:avLst>
-          </a:prstGeom>
-          <a:solidFill>
-            <a:srgbClr val="F2F6FC"/>
-          </a:solidFill>
-          <a:ln w="19050">
-            <a:solidFill>
-              <a:srgbClr val="4472C4"/>
-            </a:solidFill>
-          </a:ln>
-        </p:spPr>
-        <p:style>
-          <a:lnRef idx="2">
-            <a:schemeClr val="accent1">
-              <a:shade val="15000"/>
-            </a:schemeClr>
-          </a:lnRef>
-          <a:fillRef idx="1">
-            <a:schemeClr val="accent1"/>
-          </a:fillRef>
-          <a:effectRef idx="0">
-            <a:schemeClr val="accent1"/>
-          </a:effectRef>
-          <a:fontRef idx="minor">
-            <a:schemeClr val="lt1"/>
-          </a:fontRef>
-        </p:style>
-        <p:txBody>
-          <a:bodyPr rtlCol="0" anchor="ctr"/>
-          <a:lstStyle/>
-          <a:p>
-            <a:pPr algn="ctr"/>
-            <a:endParaRPr lang="en-US"/>
-          </a:p>
-        </p:txBody>
-      </p:sp>
-      <p:sp>
-        <p:nvSpPr>
-          <p:cNvPr id="2" name="Title 1">
-            <a:extLst>
-              <a:ext uri="{FF2B5EF4-FFF2-40B4-BE49-F238E27FC236}">
-                <a16:creationId xmlns:a16="http://schemas.microsoft.com/office/drawing/2014/main" id="{001C9DB3-F6DF-A637-1E82-3A0AEC330394}"/>
-              </a:ext>
-            </a:extLst>
-          </p:cNvPr>
-          <p:cNvSpPr>
-            <a:spLocks noGrp="1"/>
-          </p:cNvSpPr>
-          <p:nvPr>
-            <p:ph type="title"/>
-          </p:nvPr>
-        </p:nvSpPr>
-        <p:spPr/>
-        <p:txBody>
-          <a:bodyPr/>
-          <a:lstStyle/>
-          <a:p>
-            <a:r>
-              <a:rPr lang="en-US">
-                <a:solidFill>
-                  <a:srgbClr val="1F3864"/>
-                </a:solidFill>
-              </a:rPr>
-              <a:t>What the three plots agree on</a:t>
-            </a:r>
-          </a:p>
-        </p:txBody>
-      </p:sp>
-      <p:sp>
-        <p:nvSpPr>
-          <p:cNvPr id="3" name="Content Placeholder 2">
-            <a:extLst>
-              <a:ext uri="{FF2B5EF4-FFF2-40B4-BE49-F238E27FC236}">
-                <a16:creationId xmlns:a16="http://schemas.microsoft.com/office/drawing/2014/main" id="{C651B011-D291-C98B-272F-10A4905F450D}"/>
-              </a:ext>
-            </a:extLst>
-          </p:cNvPr>
-          <p:cNvSpPr>
-            <a:spLocks noGrp="1"/>
-          </p:cNvSpPr>
-          <p:nvPr>
-            <p:ph idx="1"/>
-          </p:nvPr>
-        </p:nvSpPr>
-        <p:spPr/>
-        <p:txBody>
-          <a:bodyPr>
-            <a:normAutofit/>
-          </a:bodyPr>
-          <a:lstStyle/>
-          <a:p>
-            <a:r>
-              <a:rPr lang="en-US" sz="1700"/>
-              <a:t>All three show the same shape: a peak in the 70s with a tail running up into the 90s</a:t>
-            </a:r>
-          </a:p>
-          <a:p>
-            <a:pPr lvl="1"/>
-            <a:r>
-              <a:rPr lang="en-US" sz="1700"/>
-              <a:t>That is skewed right, the shape we met on Wednesday</a:t>
-            </a:r>
-          </a:p>
-          <a:p>
-            <a:r>
-              <a:rPr lang="en-US" sz="1700"/>
-              <a:t>Three games tie at 76, so the plots have a clear tallest point</a:t>
-            </a:r>
-          </a:p>
-          <a:p>
-            <a:r>
-              <a:rPr lang="en-US" sz="1700"/>
-              <a:t>But how skewed? Where exactly is the center? The picture will not say</a:t>
-            </a:r>
-          </a:p>
-          <a:p>
-            <a:r>
-              <a:rPr lang="en-US" sz="1700"/>
-              <a:t>Eyeballing a plot gets us the shape. Numbers make it precise</a:t>
-            </a:r>
-          </a:p>
-          <a:p>
-            <a:pPr lvl="1"/>
-            <a:r>
-              <a:rPr lang="en-US" sz="1700"/>
-              <a:t>Measures of location: where is the center?</a:t>
-            </a:r>
-          </a:p>
-          <a:p>
-            <a:pPr lvl="1"/>
-            <a:r>
-              <a:rPr lang="en-US" sz="1700"/>
-              <a:t>Measures of position: where does one observation sit relative to the rest?</a:t>
-            </a:r>
-          </a:p>
-        </p:txBody>
-      </p:sp>
-      <p:sp>
-        <p:nvSpPr>
-          <p:cNvPr id="4" name="Slide number">
-            <a:extLst>
-              <a:ext uri="{FF2B5EF4-FFF2-40B4-BE49-F238E27FC236}">
-                <a16:creationId xmlns:a16="http://schemas.microsoft.com/office/drawing/2014/main" id="{42E20DCC-AAAF-7E4C-B811-BF192B607943}"/>
-              </a:ext>
-            </a:extLst>
-          </p:cNvPr>
-          <p:cNvSpPr txBox="1"/>
-          <p:nvPr/>
-        </p:nvSpPr>
-        <p:spPr>
-          <a:xfrm>
-            <a:off x="11789211" y="6477000"/>
-            <a:ext cx="250389" cy="246221"/>
-          </a:xfrm>
-          <a:prstGeom prst="rect">
-            <a:avLst/>
-          </a:prstGeom>
-          <a:solidFill>
-            <a:srgbClr val="FFFFFF"/>
-          </a:solidFill>
-        </p:spPr>
-        <p:txBody>
-          <a:bodyPr vert="horz" wrap="none" rtlCol="0">
-            <a:spAutoFit/>
-          </a:bodyPr>
-          <a:lstStyle/>
-          <a:p>
-            <a:pPr algn="r"/>
-            <a:r>
-              <a:rPr lang="en-US" sz="1000">
-                <a:solidFill>
-                  <a:srgbClr val="808080"/>
-                </a:solidFill>
-              </a:rPr>
-              <a:t>4</a:t>
-            </a:r>
-          </a:p>
-        </p:txBody>
-      </p:sp>
-      <p:sp>
-        <p:nvSpPr>
-          <p:cNvPr id="5" name="Title rule">
-            <a:extLst>
-              <a:ext uri="{FF2B5EF4-FFF2-40B4-BE49-F238E27FC236}">
-                <a16:creationId xmlns:a16="http://schemas.microsoft.com/office/drawing/2014/main" id="{1BAF7B54-8883-C29F-0151-9A8E52D2E131}"/>
-              </a:ext>
-            </a:extLst>
-          </p:cNvPr>
-          <p:cNvSpPr/>
-          <p:nvPr/>
-        </p:nvSpPr>
-        <p:spPr>
-          <a:xfrm>
-            <a:off x="838200" y="1600200"/>
-            <a:ext cx="10515600" cy="38100"/>
-          </a:xfrm>
-          <a:prstGeom prst="rect">
-            <a:avLst/>
-          </a:prstGeom>
-          <a:solidFill>
-            <a:srgbClr val="4472C4"/>
-          </a:solidFill>
-          <a:ln w="12700" cap="flat" cmpd="sng" algn="ctr">
-            <a:noFill/>
-            <a:prstDash val="solid"/>
-            <a:miter lim="800000"/>
-          </a:ln>
-          <a:effectLst/>
-          <a:extLst>
-            <a:ext uri="{91240B29-F687-4F45-9708-019B960494DF}">
-              <a14:hiddenLine xmlns:a14="http://schemas.microsoft.com/office/drawing/2010/main" w="12700" cap="flat" cmpd="sng" algn="ctr">
-                <a:solidFill>
-                  <a:schemeClr val="accent1">
-                    <a:shade val="15000"/>
-                  </a:schemeClr>
-                </a:solidFill>
-                <a:prstDash val="solid"/>
-                <a:miter lim="800000"/>
-              </a14:hiddenLine>
-            </a:ext>
-          </a:extLst>
-        </p:spPr>
-        <p:style>
-          <a:lnRef idx="2">
-            <a:schemeClr val="accent1">
-              <a:shade val="15000"/>
-            </a:schemeClr>
-          </a:lnRef>
-          <a:fillRef idx="1">
-            <a:schemeClr val="accent1"/>
-          </a:fillRef>
-          <a:effectRef idx="0">
-            <a:schemeClr val="accent1"/>
-          </a:effectRef>
-          <a:fontRef idx="minor">
-            <a:schemeClr val="lt1"/>
-          </a:fontRef>
-        </p:style>
-        <p:txBody>
-          <a:bodyPr rtlCol="0" anchor="ctr"/>
-          <a:lstStyle/>
-          <a:p>
-            <a:pPr algn="ctr"/>
-            <a:endParaRPr lang="en-US"/>
-          </a:p>
-        </p:txBody>
-      </p:sp>
-    </p:spTree>
-    <p:extLst>
-      <p:ext uri="{BB962C8B-B14F-4D97-AF65-F5344CB8AC3E}">
-        <p14:creationId xmlns:p14="http://schemas.microsoft.com/office/powerpoint/2010/main" val="2260463354"/>
-      </p:ext>
-    </p:extLst>
-  </p:cSld>
-  <p:clrMapOvr>
-    <a:masterClrMapping/>
-  </p:clrMapOvr>
-</p:sld>
-</file>
-
-<file path=ppt/slides/slide5.xml><?xml version="1.0" encoding="utf-8"?>
-<p:sld xmlns:a="http://schemas.openxmlformats.org/drawingml/2006/main" xmlns:r="http://schemas.openxmlformats.org/officeDocument/2006/relationships" xmlns:p="http://schemas.openxmlformats.org/presentationml/2006/main">
-  <p:cSld>
-    <p:spTree>
-      <p:nvGrpSpPr>
-        <p:cNvPr id="1" name=""/>
-        <p:cNvGrpSpPr/>
-        <p:nvPr/>
-      </p:nvGrpSpPr>
-      <p:grpSpPr>
-        <a:xfrm>
-          <a:off x="0" y="0"/>
-          <a:ext cx="0" cy="0"/>
-          <a:chOff x="0" y="0"/>
-          <a:chExt cx="0" cy="0"/>
-        </a:xfrm>
-      </p:grpSpPr>
-      <p:sp>
-        <p:nvSpPr>
           <p:cNvPr id="5" name="Body card">
             <a:extLst>
               <a:ext uri="{FF2B5EF4-FFF2-40B4-BE49-F238E27FC236}">
@@ -19088,7 +18128,7 @@
         <p:spPr>
           <a:xfrm>
             <a:off x="635000" y="1346200"/>
-            <a:ext cx="10922000" cy="3619500"/>
+            <a:ext cx="10922000" cy="4406900"/>
           </a:xfrm>
           <a:prstGeom prst="roundRect">
             <a:avLst>
@@ -19480,13 +18520,42 @@
                 <a:endParaRPr lang="en-US" sz="2400" dirty="0"/>
               </a:p>
               <a:p>
+                <a:r>
+                  <a:rPr lang="en-US" sz="2400"/>
+                  <a:t>The population mean is also called the </a:t>
+                </a:r>
+                <a:r>
+                  <a:rPr lang="en-US" sz="2400" b="1">
+                    <a:solidFill>
+                      <a:srgbClr val="C00000"/>
+                    </a:solidFill>
+                  </a:rPr>
+                  <a:t>expected value</a:t>
+                </a:r>
+                <a:r>
+                  <a:rPr lang="en-US" sz="2400"/>
+                  <a:t>, written E(X) or μ</a:t>
+                </a:r>
+              </a:p>
+              <a:p>
+                <a:pPr lvl="1"/>
+                <a:r>
+                  <a:rPr lang="en-US" sz="2000"/>
+                  <a:t>the long-run average of the variable; the sample mean is our estimate of it</a:t>
+                </a:r>
+              </a:p>
+              <a:p>
                 <a:pPr>
                   <a:buFont typeface="Arial" panose="020B0604020202020204" pitchFamily="34" charset="0"/>
                   <a:buChar char="•"/>
                 </a:pPr>
                 <a:r>
+                  <a:rPr lang="en-US" sz="2400"/>
+                  <a:t>the </a:t>
+                </a:r>
+                <a:r>
                   <a:rPr lang="en-US" sz="2400" dirty="0"/>
-                  <a:t>the mean is usually not equal to any of the values observed in the sample</a:t>
+                  <a:t>mean is usually not equal to any of the values observed in the sample</a:t>
                 </a:r>
               </a:p>
               <a:p>
@@ -19561,43 +18630,30 @@
       </mc:AlternateContent>
       <p:sp>
         <p:nvSpPr>
-          <p:cNvPr id="4" name="Slide number">
+          <p:cNvPr id="6" name="Slide Number Placeholder 5">
             <a:extLst>
               <a:ext uri="{FF2B5EF4-FFF2-40B4-BE49-F238E27FC236}">
-                <a16:creationId xmlns:a16="http://schemas.microsoft.com/office/drawing/2014/main" id="{17E0C985-12F3-48AE-441F-943E9A6657A3}"/>
+                <a16:creationId xmlns:a16="http://schemas.microsoft.com/office/drawing/2014/main" id="{B827860F-B872-DC71-1A25-946F032DCB2C}"/>
               </a:ext>
             </a:extLst>
           </p:cNvPr>
-          <p:cNvSpPr txBox="1"/>
-          <p:nvPr/>
+          <p:cNvSpPr>
+            <a:spLocks noGrp="1"/>
+          </p:cNvSpPr>
+          <p:nvPr>
+            <p:ph type="sldNum" sz="quarter" idx="12"/>
+          </p:nvPr>
         </p:nvSpPr>
-        <p:spPr>
-          <a:xfrm>
-            <a:off x="11789211" y="6477000"/>
-            <a:ext cx="250389" cy="246221"/>
-          </a:xfrm>
-          <a:prstGeom prst="rect">
-            <a:avLst/>
-          </a:prstGeom>
-          <a:solidFill>
-            <a:srgbClr val="FFFFFF"/>
-          </a:solidFill>
-        </p:spPr>
+        <p:spPr/>
         <p:txBody>
-          <a:bodyPr vert="horz" wrap="none" rtlCol="0">
-            <a:spAutoFit/>
-          </a:bodyPr>
+          <a:bodyPr/>
           <a:lstStyle/>
           <a:p>
-            <a:pPr algn="r"/>
-            <a:r>
-              <a:rPr lang="en-US" sz="1000">
-                <a:solidFill>
-                  <a:srgbClr val="808080"/>
-                </a:solidFill>
-              </a:rPr>
-              <a:t>5</a:t>
-            </a:r>
+            <a:fld id="{A80A81DD-F10A-4B1C-963A-0ABBB4865886}" type="slidenum">
+              <a:rPr lang="en-US" smtClean="0"/>
+              <a:t>4</a:t>
+            </a:fld>
+            <a:endParaRPr lang="en-US"/>
           </a:p>
         </p:txBody>
       </p:sp>
@@ -19614,7 +18670,7 @@
 </p:sld>
 </file>
 
-<file path=ppt/slides/slide6.xml><?xml version="1.0" encoding="utf-8"?>
+<file path=ppt/slides/slide5.xml><?xml version="1.0" encoding="utf-8"?>
 <p:sld xmlns:a="http://schemas.openxmlformats.org/drawingml/2006/main" xmlns:r="http://schemas.openxmlformats.org/officeDocument/2006/relationships" xmlns:p="http://schemas.openxmlformats.org/presentationml/2006/main">
   <p:cSld>
     <p:spTree>
@@ -19819,48 +18875,6 @@
       </mc:AlternateContent>
       <p:sp>
         <p:nvSpPr>
-          <p:cNvPr id="4" name="Slide number">
-            <a:extLst>
-              <a:ext uri="{FF2B5EF4-FFF2-40B4-BE49-F238E27FC236}">
-                <a16:creationId xmlns:a16="http://schemas.microsoft.com/office/drawing/2014/main" id="{5A68570A-C852-6E76-DE23-0FDED702F2E7}"/>
-              </a:ext>
-            </a:extLst>
-          </p:cNvPr>
-          <p:cNvSpPr txBox="1"/>
-          <p:nvPr/>
-        </p:nvSpPr>
-        <p:spPr>
-          <a:xfrm>
-            <a:off x="11789211" y="6477000"/>
-            <a:ext cx="250389" cy="246221"/>
-          </a:xfrm>
-          <a:prstGeom prst="rect">
-            <a:avLst/>
-          </a:prstGeom>
-          <a:solidFill>
-            <a:srgbClr val="FFFFFF"/>
-          </a:solidFill>
-        </p:spPr>
-        <p:txBody>
-          <a:bodyPr vert="horz" wrap="none" rtlCol="0">
-            <a:spAutoFit/>
-          </a:bodyPr>
-          <a:lstStyle/>
-          <a:p>
-            <a:pPr algn="r"/>
-            <a:r>
-              <a:rPr lang="en-US" sz="1000">
-                <a:solidFill>
-                  <a:srgbClr val="808080"/>
-                </a:solidFill>
-              </a:rPr>
-              <a:t>6</a:t>
-            </a:r>
-          </a:p>
-        </p:txBody>
-      </p:sp>
-      <p:sp>
-        <p:nvSpPr>
           <p:cNvPr id="5" name="Title rule">
             <a:extLst>
               <a:ext uri="{FF2B5EF4-FFF2-40B4-BE49-F238E27FC236}">
@@ -19927,6 +18941,35 @@
           </a:p>
         </p:txBody>
       </p:sp>
+      <p:sp>
+        <p:nvSpPr>
+          <p:cNvPr id="7" name="Slide Number Placeholder 6">
+            <a:extLst>
+              <a:ext uri="{FF2B5EF4-FFF2-40B4-BE49-F238E27FC236}">
+                <a16:creationId xmlns:a16="http://schemas.microsoft.com/office/drawing/2014/main" id="{92C1641E-F100-DDA0-2502-B7D828402335}"/>
+              </a:ext>
+            </a:extLst>
+          </p:cNvPr>
+          <p:cNvSpPr>
+            <a:spLocks noGrp="1"/>
+          </p:cNvSpPr>
+          <p:nvPr>
+            <p:ph type="sldNum" sz="quarter" idx="12"/>
+          </p:nvPr>
+        </p:nvSpPr>
+        <p:spPr/>
+        <p:txBody>
+          <a:bodyPr/>
+          <a:lstStyle/>
+          <a:p>
+            <a:fld id="{A80A81DD-F10A-4B1C-963A-0ABBB4865886}" type="slidenum">
+              <a:rPr lang="en-US" smtClean="0"/>
+              <a:t>5</a:t>
+            </a:fld>
+            <a:endParaRPr lang="en-US"/>
+          </a:p>
+        </p:txBody>
+      </p:sp>
     </p:spTree>
     <p:extLst>
       <p:ext uri="{BB962C8B-B14F-4D97-AF65-F5344CB8AC3E}">
@@ -19940,7 +18983,7 @@
 </p:sld>
 </file>
 
-<file path=ppt/slides/slide7.xml><?xml version="1.0" encoding="utf-8"?>
+<file path=ppt/slides/slide6.xml><?xml version="1.0" encoding="utf-8"?>
 <p:sld xmlns:a="http://schemas.openxmlformats.org/drawingml/2006/main" xmlns:r="http://schemas.openxmlformats.org/officeDocument/2006/relationships" xmlns:p="http://schemas.openxmlformats.org/presentationml/2006/main">
   <p:cSld>
     <p:spTree>
@@ -20050,8 +19093,8 @@
           </a:p>
         </p:txBody>
       </p:sp>
-      <mc:AlternateContent xmlns:mc="http://schemas.openxmlformats.org/markup-compatibility/2006">
-        <mc:Choice xmlns:a14="http://schemas.microsoft.com/office/drawing/2010/main" Requires="a14">
+      <mc:AlternateContent xmlns:mc="http://schemas.openxmlformats.org/markup-compatibility/2006" xmlns:a14="http://schemas.microsoft.com/office/drawing/2010/main">
+        <mc:Choice Requires="a14">
           <p:sp>
             <p:nvSpPr>
               <p:cNvPr id="3" name="Content Placeholder 2">
@@ -20179,7 +19222,7 @@
             </p:txBody>
           </p:sp>
         </mc:Choice>
-        <mc:Fallback>
+        <mc:Fallback xmlns="">
           <p:sp>
             <p:nvSpPr>
               <p:cNvPr id="3" name="Content Placeholder 2">
@@ -20223,48 +19266,6 @@
           </p:sp>
         </mc:Fallback>
       </mc:AlternateContent>
-      <p:sp>
-        <p:nvSpPr>
-          <p:cNvPr id="4" name="Slide number">
-            <a:extLst>
-              <a:ext uri="{FF2B5EF4-FFF2-40B4-BE49-F238E27FC236}">
-                <a16:creationId xmlns:a16="http://schemas.microsoft.com/office/drawing/2014/main" id="{320E5D8C-D953-129E-4366-E3E77E7E9814}"/>
-              </a:ext>
-            </a:extLst>
-          </p:cNvPr>
-          <p:cNvSpPr txBox="1"/>
-          <p:nvPr/>
-        </p:nvSpPr>
-        <p:spPr>
-          <a:xfrm>
-            <a:off x="11789211" y="6477000"/>
-            <a:ext cx="250389" cy="246221"/>
-          </a:xfrm>
-          <a:prstGeom prst="rect">
-            <a:avLst/>
-          </a:prstGeom>
-          <a:solidFill>
-            <a:srgbClr val="FFFFFF"/>
-          </a:solidFill>
-        </p:spPr>
-        <p:txBody>
-          <a:bodyPr vert="horz" wrap="none" rtlCol="0">
-            <a:spAutoFit/>
-          </a:bodyPr>
-          <a:lstStyle/>
-          <a:p>
-            <a:pPr algn="r"/>
-            <a:r>
-              <a:rPr lang="en-US" sz="1000">
-                <a:solidFill>
-                  <a:srgbClr val="808080"/>
-                </a:solidFill>
-              </a:rPr>
-              <a:t>7</a:t>
-            </a:r>
-          </a:p>
-        </p:txBody>
-      </p:sp>
       <p:sp>
         <p:nvSpPr>
           <p:cNvPr id="5" name="Title rule">
@@ -20333,6 +19334,35 @@
           </a:p>
         </p:txBody>
       </p:sp>
+      <p:sp>
+        <p:nvSpPr>
+          <p:cNvPr id="7" name="Slide Number Placeholder 6">
+            <a:extLst>
+              <a:ext uri="{FF2B5EF4-FFF2-40B4-BE49-F238E27FC236}">
+                <a16:creationId xmlns:a16="http://schemas.microsoft.com/office/drawing/2014/main" id="{FBDF5ED5-E881-C05B-7B77-4787CBD84EC6}"/>
+              </a:ext>
+            </a:extLst>
+          </p:cNvPr>
+          <p:cNvSpPr>
+            <a:spLocks noGrp="1"/>
+          </p:cNvSpPr>
+          <p:nvPr>
+            <p:ph type="sldNum" sz="quarter" idx="12"/>
+          </p:nvPr>
+        </p:nvSpPr>
+        <p:spPr/>
+        <p:txBody>
+          <a:bodyPr/>
+          <a:lstStyle/>
+          <a:p>
+            <a:fld id="{A80A81DD-F10A-4B1C-963A-0ABBB4865886}" type="slidenum">
+              <a:rPr lang="en-US" smtClean="0"/>
+              <a:t>6</a:t>
+            </a:fld>
+            <a:endParaRPr lang="en-US"/>
+          </a:p>
+        </p:txBody>
+      </p:sp>
     </p:spTree>
     <p:extLst>
       <p:ext uri="{BB962C8B-B14F-4D97-AF65-F5344CB8AC3E}">
@@ -20346,7 +19376,7 @@
 </p:sld>
 </file>
 
-<file path=ppt/slides/slide8.xml><?xml version="1.0" encoding="utf-8"?>
+<file path=ppt/slides/slide7.xml><?xml version="1.0" encoding="utf-8"?>
 <p:sld xmlns:a="http://schemas.openxmlformats.org/drawingml/2006/main" xmlns:r="http://schemas.openxmlformats.org/officeDocument/2006/relationships" xmlns:p="http://schemas.openxmlformats.org/presentationml/2006/main">
   <p:cSld>
     <p:spTree>
@@ -20543,48 +19573,6 @@
       </mc:AlternateContent>
       <p:sp>
         <p:nvSpPr>
-          <p:cNvPr id="4" name="Slide number">
-            <a:extLst>
-              <a:ext uri="{FF2B5EF4-FFF2-40B4-BE49-F238E27FC236}">
-                <a16:creationId xmlns:a16="http://schemas.microsoft.com/office/drawing/2014/main" id="{6DE908F3-DD81-AA14-24A9-07EADEBE2DF6}"/>
-              </a:ext>
-            </a:extLst>
-          </p:cNvPr>
-          <p:cNvSpPr txBox="1"/>
-          <p:nvPr/>
-        </p:nvSpPr>
-        <p:spPr>
-          <a:xfrm>
-            <a:off x="11789211" y="6477000"/>
-            <a:ext cx="250389" cy="246221"/>
-          </a:xfrm>
-          <a:prstGeom prst="rect">
-            <a:avLst/>
-          </a:prstGeom>
-          <a:solidFill>
-            <a:srgbClr val="FFFFFF"/>
-          </a:solidFill>
-        </p:spPr>
-        <p:txBody>
-          <a:bodyPr vert="horz" wrap="none" rtlCol="0">
-            <a:spAutoFit/>
-          </a:bodyPr>
-          <a:lstStyle/>
-          <a:p>
-            <a:pPr algn="r"/>
-            <a:r>
-              <a:rPr lang="en-US" sz="1000">
-                <a:solidFill>
-                  <a:srgbClr val="808080"/>
-                </a:solidFill>
-              </a:rPr>
-              <a:t>8</a:t>
-            </a:r>
-          </a:p>
-        </p:txBody>
-      </p:sp>
-      <p:sp>
-        <p:nvSpPr>
           <p:cNvPr id="5" name="Title rule">
             <a:extLst>
               <a:ext uri="{FF2B5EF4-FFF2-40B4-BE49-F238E27FC236}">
@@ -20651,6 +19639,35 @@
           </a:p>
         </p:txBody>
       </p:sp>
+      <p:sp>
+        <p:nvSpPr>
+          <p:cNvPr id="7" name="Slide Number Placeholder 6">
+            <a:extLst>
+              <a:ext uri="{FF2B5EF4-FFF2-40B4-BE49-F238E27FC236}">
+                <a16:creationId xmlns:a16="http://schemas.microsoft.com/office/drawing/2014/main" id="{DB251F61-8316-541F-71E7-1B259E35FBFD}"/>
+              </a:ext>
+            </a:extLst>
+          </p:cNvPr>
+          <p:cNvSpPr>
+            <a:spLocks noGrp="1"/>
+          </p:cNvSpPr>
+          <p:nvPr>
+            <p:ph type="sldNum" sz="quarter" idx="12"/>
+          </p:nvPr>
+        </p:nvSpPr>
+        <p:spPr/>
+        <p:txBody>
+          <a:bodyPr/>
+          <a:lstStyle/>
+          <a:p>
+            <a:fld id="{A80A81DD-F10A-4B1C-963A-0ABBB4865886}" type="slidenum">
+              <a:rPr lang="en-US" smtClean="0"/>
+              <a:t>7</a:t>
+            </a:fld>
+            <a:endParaRPr lang="en-US"/>
+          </a:p>
+        </p:txBody>
+      </p:sp>
     </p:spTree>
     <p:extLst>
       <p:ext uri="{BB962C8B-B14F-4D97-AF65-F5344CB8AC3E}">
@@ -20664,7 +19681,7 @@
 </p:sld>
 </file>
 
-<file path=ppt/slides/slide9.xml><?xml version="1.0" encoding="utf-8"?>
+<file path=ppt/slides/slide8.xml><?xml version="1.0" encoding="utf-8"?>
 <p:sld xmlns:a="http://schemas.openxmlformats.org/drawingml/2006/main" xmlns:r="http://schemas.openxmlformats.org/officeDocument/2006/relationships" xmlns:p="http://schemas.openxmlformats.org/presentationml/2006/main">
   <p:cSld>
     <p:spTree>
@@ -21685,43 +20702,30 @@
       </p:sp>
       <p:sp>
         <p:nvSpPr>
-          <p:cNvPr id="2" name="Slide number">
+          <p:cNvPr id="3" name="Slide Number Placeholder 2">
             <a:extLst>
               <a:ext uri="{FF2B5EF4-FFF2-40B4-BE49-F238E27FC236}">
-                <a16:creationId xmlns:a16="http://schemas.microsoft.com/office/drawing/2014/main" id="{254DFF7C-278E-D7FC-E1DF-D0D68AEC8E9E}"/>
+                <a16:creationId xmlns:a16="http://schemas.microsoft.com/office/drawing/2014/main" id="{CFE70CB8-8AAF-3A18-2BD2-8D3807463BD1}"/>
               </a:ext>
             </a:extLst>
           </p:cNvPr>
-          <p:cNvSpPr txBox="1"/>
-          <p:nvPr/>
+          <p:cNvSpPr>
+            <a:spLocks noGrp="1"/>
+          </p:cNvSpPr>
+          <p:nvPr>
+            <p:ph type="sldNum" sz="quarter" idx="12"/>
+          </p:nvPr>
         </p:nvSpPr>
-        <p:spPr>
-          <a:xfrm>
-            <a:off x="11789211" y="6477000"/>
-            <a:ext cx="250389" cy="246221"/>
-          </a:xfrm>
-          <a:prstGeom prst="rect">
-            <a:avLst/>
-          </a:prstGeom>
-          <a:solidFill>
-            <a:srgbClr val="FFFFFF"/>
-          </a:solidFill>
-        </p:spPr>
+        <p:spPr/>
         <p:txBody>
-          <a:bodyPr vert="horz" wrap="none" rtlCol="0">
-            <a:spAutoFit/>
-          </a:bodyPr>
+          <a:bodyPr/>
           <a:lstStyle/>
           <a:p>
-            <a:pPr algn="r"/>
-            <a:r>
-              <a:rPr lang="en-US" sz="1000">
-                <a:solidFill>
-                  <a:srgbClr val="808080"/>
-                </a:solidFill>
-              </a:rPr>
-              <a:t>9</a:t>
-            </a:r>
+            <a:fld id="{A80A81DD-F10A-4B1C-963A-0ABBB4865886}" type="slidenum">
+              <a:rPr lang="en-US" smtClean="0"/>
+              <a:t>8</a:t>
+            </a:fld>
+            <a:endParaRPr lang="en-US"/>
           </a:p>
         </p:txBody>
       </p:sp>
@@ -21729,6 +20733,305 @@
     <p:extLst>
       <p:ext uri="{BB962C8B-B14F-4D97-AF65-F5344CB8AC3E}">
         <p14:creationId xmlns:p14="http://schemas.microsoft.com/office/powerpoint/2010/main" val="165304605"/>
+      </p:ext>
+    </p:extLst>
+  </p:cSld>
+  <p:clrMapOvr>
+    <a:masterClrMapping/>
+  </p:clrMapOvr>
+</p:sld>
+</file>
+
+<file path=ppt/slides/slide9.xml><?xml version="1.0" encoding="utf-8"?>
+<p:sld xmlns:a="http://schemas.openxmlformats.org/drawingml/2006/main" xmlns:r="http://schemas.openxmlformats.org/officeDocument/2006/relationships" xmlns:p="http://schemas.openxmlformats.org/presentationml/2006/main">
+  <p:cSld>
+    <p:spTree>
+      <p:nvGrpSpPr>
+        <p:cNvPr id="1" name=""/>
+        <p:cNvGrpSpPr/>
+        <p:nvPr/>
+      </p:nvGrpSpPr>
+      <p:grpSpPr>
+        <a:xfrm>
+          <a:off x="0" y="0"/>
+          <a:ext cx="0" cy="0"/>
+          <a:chOff x="0" y="0"/>
+          <a:chExt cx="0" cy="0"/>
+        </a:xfrm>
+      </p:grpSpPr>
+      <p:sp>
+        <p:nvSpPr>
+          <p:cNvPr id="6" name="Body card">
+            <a:extLst>
+              <a:ext uri="{FF2B5EF4-FFF2-40B4-BE49-F238E27FC236}">
+                <a16:creationId xmlns:a16="http://schemas.microsoft.com/office/drawing/2014/main" id="{EA41BED6-3730-9ED7-AB86-789C45DD3A32}"/>
+              </a:ext>
+            </a:extLst>
+          </p:cNvPr>
+          <p:cNvSpPr/>
+          <p:nvPr/>
+        </p:nvSpPr>
+        <p:spPr>
+          <a:xfrm>
+            <a:off x="635000" y="1676400"/>
+            <a:ext cx="10922000" cy="711200"/>
+          </a:xfrm>
+          <a:prstGeom prst="roundRect">
+            <a:avLst>
+              <a:gd name="adj" fmla="val 3000"/>
+            </a:avLst>
+          </a:prstGeom>
+          <a:solidFill>
+            <a:srgbClr val="F2F6FC"/>
+          </a:solidFill>
+          <a:ln w="19050">
+            <a:solidFill>
+              <a:srgbClr val="4472C4"/>
+            </a:solidFill>
+          </a:ln>
+        </p:spPr>
+        <p:style>
+          <a:lnRef idx="2">
+            <a:schemeClr val="accent1">
+              <a:shade val="15000"/>
+            </a:schemeClr>
+          </a:lnRef>
+          <a:fillRef idx="1">
+            <a:schemeClr val="accent1"/>
+          </a:fillRef>
+          <a:effectRef idx="0">
+            <a:schemeClr val="accent1"/>
+          </a:effectRef>
+          <a:fontRef idx="minor">
+            <a:schemeClr val="lt1"/>
+          </a:fontRef>
+        </p:style>
+        <p:txBody>
+          <a:bodyPr rtlCol="0" anchor="ctr"/>
+          <a:lstStyle/>
+          <a:p>
+            <a:pPr algn="ctr"/>
+            <a:endParaRPr lang="en-US"/>
+          </a:p>
+        </p:txBody>
+      </p:sp>
+      <p:sp>
+        <p:nvSpPr>
+          <p:cNvPr id="2" name="Title 1">
+            <a:extLst>
+              <a:ext uri="{FF2B5EF4-FFF2-40B4-BE49-F238E27FC236}">
+                <a16:creationId xmlns:a16="http://schemas.microsoft.com/office/drawing/2014/main" id="{CE84DE6C-08A1-E5FC-FBD2-2A6CFB14937F}"/>
+              </a:ext>
+            </a:extLst>
+          </p:cNvPr>
+          <p:cNvSpPr>
+            <a:spLocks noGrp="1"/>
+          </p:cNvSpPr>
+          <p:nvPr>
+            <p:ph type="title"/>
+          </p:nvPr>
+        </p:nvSpPr>
+        <p:spPr/>
+        <p:txBody>
+          <a:bodyPr/>
+          <a:lstStyle/>
+          <a:p>
+            <a:r>
+              <a:rPr lang="en-US" dirty="0">
+                <a:solidFill>
+                  <a:srgbClr val="1F3864"/>
+                </a:solidFill>
+              </a:rPr>
+              <a:t>Mean and median treat outliers differently</a:t>
+            </a:r>
+          </a:p>
+        </p:txBody>
+      </p:sp>
+      <mc:AlternateContent xmlns:mc="http://schemas.openxmlformats.org/markup-compatibility/2006" xmlns:a14="http://schemas.microsoft.com/office/drawing/2010/main">
+        <mc:Choice Requires="a14">
+          <p:sp>
+            <p:nvSpPr>
+              <p:cNvPr id="3" name="Content Placeholder 2">
+                <a:extLst>
+                  <a:ext uri="{FF2B5EF4-FFF2-40B4-BE49-F238E27FC236}">
+                    <a16:creationId xmlns:a16="http://schemas.microsoft.com/office/drawing/2014/main" id="{D0FE07D2-A170-60BA-CCDC-92189FF4B0D1}"/>
+                  </a:ext>
+                </a:extLst>
+              </p:cNvPr>
+              <p:cNvSpPr>
+                <a:spLocks noGrp="1"/>
+              </p:cNvSpPr>
+              <p:nvPr>
+                <p:ph idx="1"/>
+              </p:nvPr>
+            </p:nvSpPr>
+            <p:spPr/>
+            <p:txBody>
+              <a:bodyPr/>
+              <a:lstStyle/>
+              <a:p>
+                <a14:m>
+                  <m:oMath xmlns:m="http://schemas.openxmlformats.org/officeDocument/2006/math">
+                    <m:r>
+                      <a:rPr lang="en-US" b="0" i="1" smtClean="0">
+                        <a:latin typeface="Cambria Math" panose="02040503050406030204" pitchFamily="18" charset="0"/>
+                      </a:rPr>
+                      <m:t>𝑋</m:t>
+                    </m:r>
+                    <m:r>
+                      <a:rPr lang="en-US" b="0" i="1" smtClean="0">
+                        <a:latin typeface="Cambria Math" panose="02040503050406030204" pitchFamily="18" charset="0"/>
+                      </a:rPr>
+                      <m:t>={1, 3, 5, 5, 6, 7, 7, 8, 32}</m:t>
+                    </m:r>
+                  </m:oMath>
+                </a14:m>
+                <a:endParaRPr lang="en-US" dirty="0"/>
+              </a:p>
+            </p:txBody>
+          </p:sp>
+        </mc:Choice>
+        <mc:Fallback xmlns="">
+          <p:sp>
+            <p:nvSpPr>
+              <p:cNvPr id="3" name="Content Placeholder 2">
+                <a:extLst>
+                  <a:ext uri="{FF2B5EF4-FFF2-40B4-BE49-F238E27FC236}">
+                    <a16:creationId xmlns:a16="http://schemas.microsoft.com/office/drawing/2014/main" id="{D0FE07D2-A170-60BA-CCDC-92189FF4B0D1}"/>
+                  </a:ext>
+                </a:extLst>
+              </p:cNvPr>
+              <p:cNvSpPr>
+                <a:spLocks noGrp="1" noRot="1" noChangeAspect="1" noMove="1" noResize="1" noEditPoints="1" noAdjustHandles="1" noChangeArrowheads="1" noChangeShapeType="1" noTextEdit="1"/>
+              </p:cNvSpPr>
+              <p:nvPr>
+                <p:ph idx="1"/>
+              </p:nvPr>
+            </p:nvSpPr>
+            <p:spPr>
+              <a:blipFill>
+                <a:blip r:embed="rId2"/>
+                <a:stretch>
+                  <a:fillRect/>
+                </a:stretch>
+              </a:blipFill>
+            </p:spPr>
+            <p:txBody>
+              <a:bodyPr/>
+              <a:lstStyle/>
+              <a:p>
+                <a:r>
+                  <a:rPr lang="en-US">
+                    <a:noFill/>
+                  </a:rPr>
+                  <a:t> </a:t>
+                </a:r>
+              </a:p>
+            </p:txBody>
+          </p:sp>
+        </mc:Fallback>
+      </mc:AlternateContent>
+      <p:sp>
+        <p:nvSpPr>
+          <p:cNvPr id="5" name="Title rule">
+            <a:extLst>
+              <a:ext uri="{FF2B5EF4-FFF2-40B4-BE49-F238E27FC236}">
+                <a16:creationId xmlns:a16="http://schemas.microsoft.com/office/drawing/2014/main" id="{597A61AE-23D2-053C-1636-4C88BF5E0D4D}"/>
+              </a:ext>
+            </a:extLst>
+          </p:cNvPr>
+          <p:cNvSpPr/>
+          <p:nvPr/>
+        </p:nvSpPr>
+        <p:spPr>
+          <a:xfrm>
+            <a:off x="838200" y="1600200"/>
+            <a:ext cx="10515600" cy="38100"/>
+          </a:xfrm>
+          <a:prstGeom prst="rect">
+            <a:avLst/>
+          </a:prstGeom>
+          <a:solidFill>
+            <a:srgbClr val="4472C4"/>
+          </a:solidFill>
+          <a:ln w="12700" cap="flat" cmpd="sng" algn="ctr">
+            <a:noFill/>
+            <a:prstDash val="solid"/>
+            <a:miter lim="800000"/>
+          </a:ln>
+          <a:effectLst/>
+          <a:extLst>
+            <a:ext uri="{91240B29-F687-4F45-9708-019B960494DF}">
+              <a14:hiddenLine xmlns:a14="http://schemas.microsoft.com/office/drawing/2010/main" w="12700" cap="flat" cmpd="sng" algn="ctr">
+                <a:solidFill>
+                  <a:schemeClr val="accent1">
+                    <a:shade val="15000"/>
+                  </a:schemeClr>
+                </a:solidFill>
+                <a:prstDash val="solid"/>
+                <a:miter lim="800000"/>
+              </a14:hiddenLine>
+            </a:ext>
+          </a:extLst>
+        </p:spPr>
+        <p:style>
+          <a:lnRef idx="2">
+            <a:schemeClr val="accent1">
+              <a:shade val="15000"/>
+            </a:schemeClr>
+          </a:lnRef>
+          <a:fillRef idx="1">
+            <a:schemeClr val="accent1"/>
+          </a:fillRef>
+          <a:effectRef idx="0">
+            <a:schemeClr val="accent1"/>
+          </a:effectRef>
+          <a:fontRef idx="minor">
+            <a:schemeClr val="lt1"/>
+          </a:fontRef>
+        </p:style>
+        <p:txBody>
+          <a:bodyPr rtlCol="0" anchor="ctr"/>
+          <a:lstStyle/>
+          <a:p>
+            <a:pPr algn="ctr"/>
+            <a:endParaRPr lang="en-US"/>
+          </a:p>
+        </p:txBody>
+      </p:sp>
+      <p:sp>
+        <p:nvSpPr>
+          <p:cNvPr id="7" name="Slide Number Placeholder 6">
+            <a:extLst>
+              <a:ext uri="{FF2B5EF4-FFF2-40B4-BE49-F238E27FC236}">
+                <a16:creationId xmlns:a16="http://schemas.microsoft.com/office/drawing/2014/main" id="{054414B4-228D-CA95-EDBC-492AA6A4F024}"/>
+              </a:ext>
+            </a:extLst>
+          </p:cNvPr>
+          <p:cNvSpPr>
+            <a:spLocks noGrp="1"/>
+          </p:cNvSpPr>
+          <p:nvPr>
+            <p:ph type="sldNum" sz="quarter" idx="12"/>
+          </p:nvPr>
+        </p:nvSpPr>
+        <p:spPr/>
+        <p:txBody>
+          <a:bodyPr/>
+          <a:lstStyle/>
+          <a:p>
+            <a:fld id="{A80A81DD-F10A-4B1C-963A-0ABBB4865886}" type="slidenum">
+              <a:rPr lang="en-US" smtClean="0"/>
+              <a:t>9</a:t>
+            </a:fld>
+            <a:endParaRPr lang="en-US"/>
+          </a:p>
+        </p:txBody>
+      </p:sp>
+    </p:spTree>
+    <p:extLst>
+      <p:ext uri="{BB962C8B-B14F-4D97-AF65-F5344CB8AC3E}">
+        <p14:creationId xmlns:p14="http://schemas.microsoft.com/office/powerpoint/2010/main" val="2940681080"/>
       </p:ext>
     </p:extLst>
   </p:cSld>

--- a/docs/lecture_slides/Week 2/Week2_Lecture5_slides_1_19_2024.pptx
+++ b/docs/lecture_slides/Week 2/Week2_Lecture5_slides_1_19_2024.pptx
@@ -10,13 +10,13 @@
     <p:sldId id="332" r:id="rId4"/>
     <p:sldId id="304" r:id="rId5"/>
     <p:sldId id="330" r:id="rId6"/>
-    <p:sldId id="307" r:id="rId7"/>
-    <p:sldId id="337" r:id="rId8"/>
-    <p:sldId id="305" r:id="rId9"/>
-    <p:sldId id="338" r:id="rId10"/>
-    <p:sldId id="340" r:id="rId11"/>
-    <p:sldId id="341" r:id="rId12"/>
-    <p:sldId id="339" r:id="rId13"/>
+    <p:sldId id="338" r:id="rId7"/>
+    <p:sldId id="339" r:id="rId8"/>
+    <p:sldId id="307" r:id="rId9"/>
+    <p:sldId id="336" r:id="rId10"/>
+    <p:sldId id="305" r:id="rId11"/>
+    <p:sldId id="337" r:id="rId12"/>
+    <p:sldId id="340" r:id="rId13"/>
     <p:sldId id="309" r:id="rId14"/>
     <p:sldId id="308" r:id="rId15"/>
     <p:sldId id="321" r:id="rId16"/>
@@ -29,9 +29,9 @@
     <p:sldId id="325" r:id="rId23"/>
     <p:sldId id="346" r:id="rId24"/>
     <p:sldId id="349" r:id="rId25"/>
-    <p:sldId id="350" r:id="rId26"/>
-    <p:sldId id="351" r:id="rId27"/>
-    <p:sldId id="352" r:id="rId28"/>
+    <p:sldId id="341" r:id="rId26"/>
+    <p:sldId id="350" r:id="rId27"/>
+    <p:sldId id="351" r:id="rId28"/>
     <p:sldId id="345" r:id="rId29"/>
     <p:sldId id="313" r:id="rId30"/>
     <p:sldId id="314" r:id="rId31"/>
@@ -3449,42 +3449,1014 @@
           <a:chExt cx="0" cy="0"/>
         </a:xfrm>
       </p:grpSpPr>
-      <p:pic>
-        <p:nvPicPr>
-          <p:cNvPr id="5" name="Picture 4">
+      <p:grpSp>
+        <p:nvGrpSpPr>
+          <p:cNvPr id="28" name="Group 27">
             <a:extLst>
               <a:ext uri="{FF2B5EF4-FFF2-40B4-BE49-F238E27FC236}">
-                <a16:creationId xmlns:a16="http://schemas.microsoft.com/office/drawing/2014/main" id="{C3B45CB9-38D1-C6A4-DC41-174772C7945E}"/>
+                <a16:creationId xmlns:a16="http://schemas.microsoft.com/office/drawing/2014/main" id="{7AA1FB4F-B4C0-19FC-F8A6-80F1019CDA1B}"/>
               </a:ext>
             </a:extLst>
           </p:cNvPr>
-          <p:cNvPicPr>
-            <a:picLocks noChangeAspect="1"/>
-          </p:cNvPicPr>
+          <p:cNvGrpSpPr/>
           <p:nvPr/>
-        </p:nvPicPr>
-        <p:blipFill>
-          <a:blip r:embed="rId2"/>
-          <a:stretch>
-            <a:fillRect/>
-          </a:stretch>
-        </p:blipFill>
+        </p:nvGrpSpPr>
+        <p:grpSpPr>
+          <a:xfrm>
+            <a:off x="281345" y="2185532"/>
+            <a:ext cx="11223178" cy="3231099"/>
+            <a:chOff x="170508" y="2213128"/>
+            <a:chExt cx="11223178" cy="3231099"/>
+          </a:xfrm>
+        </p:grpSpPr>
+        <mc:AlternateContent xmlns:mc="http://schemas.openxmlformats.org/markup-compatibility/2006" xmlns:a14="http://schemas.microsoft.com/office/drawing/2010/main">
+          <mc:Choice Requires="a14">
+            <p:sp>
+              <p:nvSpPr>
+                <p:cNvPr id="19" name="TextBox 18">
+                  <a:extLst>
+                    <a:ext uri="{FF2B5EF4-FFF2-40B4-BE49-F238E27FC236}">
+                      <a16:creationId xmlns:a16="http://schemas.microsoft.com/office/drawing/2014/main" id="{0D94D794-5780-EB94-1BF2-FE234895A4DE}"/>
+                    </a:ext>
+                  </a:extLst>
+                </p:cNvPr>
+                <p:cNvSpPr txBox="1"/>
+                <p:nvPr/>
+              </p:nvSpPr>
+              <p:spPr>
+                <a:xfrm>
+                  <a:off x="2051669" y="5058295"/>
+                  <a:ext cx="789255" cy="276999"/>
+                </a:xfrm>
+                <a:prstGeom prst="rect">
+                  <a:avLst/>
+                </a:prstGeom>
+                <a:noFill/>
+              </p:spPr>
+              <p:txBody>
+                <a:bodyPr wrap="none" lIns="0" tIns="0" rIns="0" bIns="0" rtlCol="0">
+                  <a:spAutoFit/>
+                </a:bodyPr>
+                <a:lstStyle/>
+                <a:p>
+                  <a:pPr marL="0" marR="0" lvl="0" indent="0" algn="l" defTabSz="914400" rtl="0" eaLnBrk="1" fontAlgn="auto" latinLnBrk="0" hangingPunct="1">
+                    <a:lnSpc>
+                      <a:spcPct val="100000"/>
+                    </a:lnSpc>
+                    <a:spcBef>
+                      <a:spcPts val="0"/>
+                    </a:spcBef>
+                    <a:spcAft>
+                      <a:spcPts val="0"/>
+                    </a:spcAft>
+                    <a:buClrTx/>
+                    <a:buSzTx/>
+                    <a:buFontTx/>
+                    <a:buNone/>
+                    <a:tabLst/>
+                    <a:defRPr/>
+                  </a:pPr>
+                  <a14:m>
+                    <m:oMathPara xmlns:m="http://schemas.openxmlformats.org/officeDocument/2006/math">
+                      <m:oMath>
+                        <m:acc>
+                          <m:accPr>
+                            <m:chr m:val="̅"/>
+                            <m:ctrlPr>
+                              <a:rPr kumimoji="0" lang="en-US" sz="1800" b="0" i="1" u="none" strike="noStrike" kern="1200" cap="none" spc="0" normalizeH="0" baseline="0" noProof="0" smtClean="0">
+                                <a:ln>
+                                  <a:noFill/>
+                                </a:ln>
+                                <a:solidFill>
+                                  <a:prstClr val="black"/>
+                                </a:solidFill>
+                                <a:effectLst/>
+                                <a:uLnTx/>
+                                <a:uFillTx/>
+                                <a:latin typeface="Cambria Math" panose="02040503050406030204" pitchFamily="18" charset="0"/>
+                                <a:ea typeface="+mn-ea"/>
+                                <a:cs typeface="+mn-cs"/>
+                              </a:rPr>
+                            </m:ctrlPr>
+                          </m:accPr>
+                          <m:e>
+                            <m:r>
+                              <a:rPr kumimoji="0" lang="en-US" sz="1800" b="0" i="1" u="none" strike="noStrike" kern="1200" cap="none" spc="0" normalizeH="0" baseline="0" noProof="0" smtClean="0">
+                                <a:ln>
+                                  <a:noFill/>
+                                </a:ln>
+                                <a:solidFill>
+                                  <a:prstClr val="black"/>
+                                </a:solidFill>
+                                <a:effectLst/>
+                                <a:uLnTx/>
+                                <a:uFillTx/>
+                                <a:latin typeface="Cambria Math" panose="02040503050406030204" pitchFamily="18" charset="0"/>
+                                <a:ea typeface="+mn-ea"/>
+                                <a:cs typeface="+mn-cs"/>
+                              </a:rPr>
+                              <m:t>𝑥</m:t>
+                            </m:r>
+                          </m:e>
+                        </m:acc>
+                        <m:r>
+                          <a:rPr kumimoji="0" lang="en-US" sz="1800" b="0" i="1" u="none" strike="noStrike" kern="1200" cap="none" spc="0" normalizeH="0" baseline="0" noProof="0" smtClean="0">
+                            <a:ln>
+                              <a:noFill/>
+                            </a:ln>
+                            <a:solidFill>
+                              <a:prstClr val="black"/>
+                            </a:solidFill>
+                            <a:effectLst/>
+                            <a:uLnTx/>
+                            <a:uFillTx/>
+                            <a:latin typeface="Cambria Math" panose="02040503050406030204" pitchFamily="18" charset="0"/>
+                            <a:ea typeface="+mn-ea"/>
+                            <a:cs typeface="+mn-cs"/>
+                          </a:rPr>
+                          <m:t>=9.2</m:t>
+                        </m:r>
+                      </m:oMath>
+                    </m:oMathPara>
+                  </a14:m>
+                  <a:endParaRPr kumimoji="0" lang="en-US" sz="1800" b="0" i="0" u="none" strike="noStrike" kern="1200" cap="none" spc="0" normalizeH="0" baseline="0" noProof="0" dirty="0">
+                    <a:ln>
+                      <a:noFill/>
+                    </a:ln>
+                    <a:solidFill>
+                      <a:prstClr val="black"/>
+                    </a:solidFill>
+                    <a:effectLst/>
+                    <a:uLnTx/>
+                    <a:uFillTx/>
+                    <a:latin typeface="Calibri" panose="020F0502020204030204"/>
+                    <a:ea typeface="+mn-ea"/>
+                    <a:cs typeface="+mn-cs"/>
+                  </a:endParaRPr>
+                </a:p>
+              </p:txBody>
+            </p:sp>
+          </mc:Choice>
+          <mc:Fallback xmlns="">
+            <p:sp>
+              <p:nvSpPr>
+                <p:cNvPr id="19" name="TextBox 18">
+                  <a:extLst>
+                    <a:ext uri="{FF2B5EF4-FFF2-40B4-BE49-F238E27FC236}">
+                      <a16:creationId xmlns:a16="http://schemas.microsoft.com/office/drawing/2014/main" id="{0D94D794-5780-EB94-1BF2-FE234895A4DE}"/>
+                    </a:ext>
+                  </a:extLst>
+                </p:cNvPr>
+                <p:cNvSpPr txBox="1">
+                  <a:spLocks noRot="1" noChangeAspect="1" noMove="1" noResize="1" noEditPoints="1" noAdjustHandles="1" noChangeArrowheads="1" noChangeShapeType="1" noTextEdit="1"/>
+                </p:cNvSpPr>
+                <p:nvPr/>
+              </p:nvSpPr>
+              <p:spPr>
+                <a:xfrm>
+                  <a:off x="2051669" y="5058295"/>
+                  <a:ext cx="789255" cy="276999"/>
+                </a:xfrm>
+                <a:prstGeom prst="rect">
+                  <a:avLst/>
+                </a:prstGeom>
+                <a:blipFill>
+                  <a:blip r:embed="rId2"/>
+                  <a:stretch>
+                    <a:fillRect l="-3876" r="-6977" b="-6522"/>
+                  </a:stretch>
+                </a:blipFill>
+              </p:spPr>
+              <p:txBody>
+                <a:bodyPr/>
+                <a:lstStyle/>
+                <a:p>
+                  <a:r>
+                    <a:rPr lang="en-US">
+                      <a:noFill/>
+                    </a:rPr>
+                    <a:t> </a:t>
+                  </a:r>
+                </a:p>
+              </p:txBody>
+            </p:sp>
+          </mc:Fallback>
+        </mc:AlternateContent>
+        <p:pic>
+          <p:nvPicPr>
+            <p:cNvPr id="22" name="Picture 21">
+              <a:extLst>
+                <a:ext uri="{FF2B5EF4-FFF2-40B4-BE49-F238E27FC236}">
+                  <a16:creationId xmlns:a16="http://schemas.microsoft.com/office/drawing/2014/main" id="{5EB56406-5F22-DCCD-EA7F-C958F3D21101}"/>
+                </a:ext>
+              </a:extLst>
+            </p:cNvPr>
+            <p:cNvPicPr>
+              <a:picLocks noChangeAspect="1"/>
+            </p:cNvPicPr>
+            <p:nvPr/>
+          </p:nvPicPr>
+          <p:blipFill>
+            <a:blip r:embed="rId3"/>
+            <a:stretch>
+              <a:fillRect/>
+            </a:stretch>
+          </p:blipFill>
+          <p:spPr>
+            <a:xfrm>
+              <a:off x="170508" y="2213128"/>
+              <a:ext cx="5170726" cy="2494353"/>
+            </a:xfrm>
+            <a:prstGeom prst="rect">
+              <a:avLst/>
+            </a:prstGeom>
+          </p:spPr>
+        </p:pic>
+        <p:pic>
+          <p:nvPicPr>
+            <p:cNvPr id="23" name="Picture 22">
+              <a:extLst>
+                <a:ext uri="{FF2B5EF4-FFF2-40B4-BE49-F238E27FC236}">
+                  <a16:creationId xmlns:a16="http://schemas.microsoft.com/office/drawing/2014/main" id="{E8AA625E-81C5-ECCB-6AEA-588CF86FBBE0}"/>
+                </a:ext>
+              </a:extLst>
+            </p:cNvPr>
+            <p:cNvPicPr>
+              <a:picLocks noChangeAspect="1"/>
+            </p:cNvPicPr>
+            <p:nvPr/>
+          </p:nvPicPr>
+          <p:blipFill>
+            <a:blip r:embed="rId3"/>
+            <a:stretch>
+              <a:fillRect/>
+            </a:stretch>
+          </p:blipFill>
+          <p:spPr>
+            <a:xfrm rot="604632">
+              <a:off x="6222960" y="2269308"/>
+              <a:ext cx="5170726" cy="2494353"/>
+            </a:xfrm>
+            <a:prstGeom prst="rect">
+              <a:avLst/>
+            </a:prstGeom>
+          </p:spPr>
+        </p:pic>
+        <p:sp>
+          <p:nvSpPr>
+            <p:cNvPr id="20" name="Isosceles Triangle 19">
+              <a:extLst>
+                <a:ext uri="{FF2B5EF4-FFF2-40B4-BE49-F238E27FC236}">
+                  <a16:creationId xmlns:a16="http://schemas.microsoft.com/office/drawing/2014/main" id="{B2F214C2-1D86-F2C7-F495-1D8DF5707C70}"/>
+                </a:ext>
+              </a:extLst>
+            </p:cNvPr>
+            <p:cNvSpPr/>
+            <p:nvPr/>
+          </p:nvSpPr>
+          <p:spPr>
+            <a:xfrm>
+              <a:off x="7678880" y="4258680"/>
+              <a:ext cx="259773" cy="586392"/>
+            </a:xfrm>
+            <a:prstGeom prst="triangle">
+              <a:avLst/>
+            </a:prstGeom>
+          </p:spPr>
+          <p:style>
+            <a:lnRef idx="2">
+              <a:schemeClr val="dk1">
+                <a:shade val="15000"/>
+              </a:schemeClr>
+            </a:lnRef>
+            <a:fillRef idx="1">
+              <a:schemeClr val="dk1"/>
+            </a:fillRef>
+            <a:effectRef idx="0">
+              <a:schemeClr val="dk1"/>
+            </a:effectRef>
+            <a:fontRef idx="minor">
+              <a:schemeClr val="lt1"/>
+            </a:fontRef>
+          </p:style>
+          <p:txBody>
+            <a:bodyPr rtlCol="0" anchor="ctr"/>
+            <a:lstStyle/>
+            <a:p>
+              <a:pPr marL="0" marR="0" lvl="0" indent="0" algn="ctr" defTabSz="914400" rtl="0" eaLnBrk="1" fontAlgn="auto" latinLnBrk="0" hangingPunct="1">
+                <a:lnSpc>
+                  <a:spcPct val="100000"/>
+                </a:lnSpc>
+                <a:spcBef>
+                  <a:spcPts val="0"/>
+                </a:spcBef>
+                <a:spcAft>
+                  <a:spcPts val="0"/>
+                </a:spcAft>
+                <a:buClrTx/>
+                <a:buSzTx/>
+                <a:buFontTx/>
+                <a:buNone/>
+                <a:tabLst/>
+                <a:defRPr/>
+              </a:pPr>
+              <a:endParaRPr kumimoji="0" lang="en-US" sz="1800" b="0" i="0" u="none" strike="noStrike" kern="1200" cap="none" spc="0" normalizeH="0" baseline="0" noProof="0">
+                <a:ln>
+                  <a:noFill/>
+                </a:ln>
+                <a:solidFill>
+                  <a:prstClr val="white"/>
+                </a:solidFill>
+                <a:effectLst/>
+                <a:uLnTx/>
+                <a:uFillTx/>
+                <a:latin typeface="Calibri" panose="020F0502020204030204"/>
+                <a:ea typeface="+mn-ea"/>
+                <a:cs typeface="+mn-cs"/>
+              </a:endParaRPr>
+            </a:p>
+          </p:txBody>
+        </p:sp>
+        <p:sp>
+          <p:nvSpPr>
+            <p:cNvPr id="24" name="Isosceles Triangle 23">
+              <a:extLst>
+                <a:ext uri="{FF2B5EF4-FFF2-40B4-BE49-F238E27FC236}">
+                  <a16:creationId xmlns:a16="http://schemas.microsoft.com/office/drawing/2014/main" id="{216A7137-8C55-1EF5-CC3D-BFDC40D635C1}"/>
+                </a:ext>
+              </a:extLst>
+            </p:cNvPr>
+            <p:cNvSpPr/>
+            <p:nvPr/>
+          </p:nvSpPr>
+          <p:spPr>
+            <a:xfrm>
+              <a:off x="2123207" y="4296496"/>
+              <a:ext cx="259773" cy="586392"/>
+            </a:xfrm>
+            <a:prstGeom prst="triangle">
+              <a:avLst/>
+            </a:prstGeom>
+          </p:spPr>
+          <p:style>
+            <a:lnRef idx="2">
+              <a:schemeClr val="dk1">
+                <a:shade val="15000"/>
+              </a:schemeClr>
+            </a:lnRef>
+            <a:fillRef idx="1">
+              <a:schemeClr val="dk1"/>
+            </a:fillRef>
+            <a:effectRef idx="0">
+              <a:schemeClr val="dk1"/>
+            </a:effectRef>
+            <a:fontRef idx="minor">
+              <a:schemeClr val="lt1"/>
+            </a:fontRef>
+          </p:style>
+          <p:txBody>
+            <a:bodyPr rtlCol="0" anchor="ctr"/>
+            <a:lstStyle/>
+            <a:p>
+              <a:pPr marL="0" marR="0" lvl="0" indent="0" algn="ctr" defTabSz="914400" rtl="0" eaLnBrk="1" fontAlgn="auto" latinLnBrk="0" hangingPunct="1">
+                <a:lnSpc>
+                  <a:spcPct val="100000"/>
+                </a:lnSpc>
+                <a:spcBef>
+                  <a:spcPts val="0"/>
+                </a:spcBef>
+                <a:spcAft>
+                  <a:spcPts val="0"/>
+                </a:spcAft>
+                <a:buClrTx/>
+                <a:buSzTx/>
+                <a:buFontTx/>
+                <a:buNone/>
+                <a:tabLst/>
+                <a:defRPr/>
+              </a:pPr>
+              <a:endParaRPr kumimoji="0" lang="en-US" sz="1800" b="0" i="0" u="none" strike="noStrike" kern="1200" cap="none" spc="0" normalizeH="0" baseline="0" noProof="0">
+                <a:ln>
+                  <a:noFill/>
+                </a:ln>
+                <a:solidFill>
+                  <a:prstClr val="white"/>
+                </a:solidFill>
+                <a:effectLst/>
+                <a:uLnTx/>
+                <a:uFillTx/>
+                <a:latin typeface="Calibri" panose="020F0502020204030204"/>
+                <a:ea typeface="+mn-ea"/>
+                <a:cs typeface="+mn-cs"/>
+              </a:endParaRPr>
+            </a:p>
+          </p:txBody>
+        </p:sp>
+        <mc:AlternateContent xmlns:mc="http://schemas.openxmlformats.org/markup-compatibility/2006" xmlns:a14="http://schemas.microsoft.com/office/drawing/2010/main">
+          <mc:Choice Requires="a14">
+            <p:sp>
+              <p:nvSpPr>
+                <p:cNvPr id="25" name="TextBox 24">
+                  <a:extLst>
+                    <a:ext uri="{FF2B5EF4-FFF2-40B4-BE49-F238E27FC236}">
+                      <a16:creationId xmlns:a16="http://schemas.microsoft.com/office/drawing/2014/main" id="{49FE77AA-7C50-0F7E-C479-3A2E60163D35}"/>
+                    </a:ext>
+                  </a:extLst>
+                </p:cNvPr>
+                <p:cNvSpPr txBox="1"/>
+                <p:nvPr/>
+              </p:nvSpPr>
+              <p:spPr>
+                <a:xfrm>
+                  <a:off x="7414138" y="4925623"/>
+                  <a:ext cx="2095895" cy="518604"/>
+                </a:xfrm>
+                <a:prstGeom prst="rect">
+                  <a:avLst/>
+                </a:prstGeom>
+                <a:noFill/>
+              </p:spPr>
+              <p:txBody>
+                <a:bodyPr wrap="none" lIns="0" tIns="0" rIns="0" bIns="0" rtlCol="0">
+                  <a:spAutoFit/>
+                </a:bodyPr>
+                <a:lstStyle/>
+                <a:p>
+                  <a:pPr marL="0" marR="0" lvl="0" indent="0" algn="l" defTabSz="914400" rtl="0" eaLnBrk="1" fontAlgn="auto" latinLnBrk="0" hangingPunct="1">
+                    <a:lnSpc>
+                      <a:spcPct val="100000"/>
+                    </a:lnSpc>
+                    <a:spcBef>
+                      <a:spcPts val="0"/>
+                    </a:spcBef>
+                    <a:spcAft>
+                      <a:spcPts val="0"/>
+                    </a:spcAft>
+                    <a:buClrTx/>
+                    <a:buSzTx/>
+                    <a:buFontTx/>
+                    <a:buNone/>
+                    <a:tabLst/>
+                    <a:defRPr/>
+                  </a:pPr>
+                  <a14:m>
+                    <m:oMathPara xmlns:m="http://schemas.openxmlformats.org/officeDocument/2006/math">
+                      <m:oMath>
+                        <m:r>
+                          <a:rPr kumimoji="0" lang="en-US" sz="1800" b="0" i="1" u="none" strike="noStrike" kern="1200" cap="none" spc="0" normalizeH="0" baseline="0" noProof="0" smtClean="0">
+                            <a:ln>
+                              <a:noFill/>
+                            </a:ln>
+                            <a:solidFill>
+                              <a:prstClr val="black"/>
+                            </a:solidFill>
+                            <a:effectLst/>
+                            <a:uLnTx/>
+                            <a:uFillTx/>
+                            <a:latin typeface="Cambria Math" panose="02040503050406030204" pitchFamily="18" charset="0"/>
+                            <a:ea typeface="+mn-ea"/>
+                            <a:cs typeface="+mn-cs"/>
+                          </a:rPr>
+                          <m:t>𝑚𝑒𝑑𝑖𝑎𝑛</m:t>
+                        </m:r>
+                        <m:r>
+                          <a:rPr kumimoji="0" lang="en-US" sz="1800" b="0" i="1" u="none" strike="noStrike" kern="1200" cap="none" spc="0" normalizeH="0" baseline="0" noProof="0" smtClean="0">
+                            <a:ln>
+                              <a:noFill/>
+                            </a:ln>
+                            <a:solidFill>
+                              <a:prstClr val="black"/>
+                            </a:solidFill>
+                            <a:effectLst/>
+                            <a:uLnTx/>
+                            <a:uFillTx/>
+                            <a:latin typeface="Cambria Math" panose="02040503050406030204" pitchFamily="18" charset="0"/>
+                            <a:ea typeface="+mn-ea"/>
+                            <a:cs typeface="+mn-cs"/>
+                          </a:rPr>
+                          <m:t>=</m:t>
+                        </m:r>
+                        <m:f>
+                          <m:fPr>
+                            <m:ctrlPr>
+                              <a:rPr kumimoji="0" lang="en-US" sz="1800" b="0" i="1" u="none" strike="noStrike" kern="1200" cap="none" spc="0" normalizeH="0" baseline="0" noProof="0" smtClean="0">
+                                <a:ln>
+                                  <a:noFill/>
+                                </a:ln>
+                                <a:solidFill>
+                                  <a:srgbClr val="FF0000"/>
+                                </a:solidFill>
+                                <a:effectLst/>
+                                <a:uLnTx/>
+                                <a:uFillTx/>
+                                <a:latin typeface="Cambria Math" panose="02040503050406030204" pitchFamily="18" charset="0"/>
+                                <a:ea typeface="+mn-ea"/>
+                                <a:cs typeface="+mn-cs"/>
+                              </a:rPr>
+                            </m:ctrlPr>
+                          </m:fPr>
+                          <m:num>
+                            <m:r>
+                              <a:rPr kumimoji="0" lang="en-US" sz="1800" b="0" i="1" u="none" strike="noStrike" kern="1200" cap="none" spc="0" normalizeH="0" baseline="0" noProof="0" smtClean="0">
+                                <a:ln>
+                                  <a:noFill/>
+                                </a:ln>
+                                <a:solidFill>
+                                  <a:srgbClr val="FF0000"/>
+                                </a:solidFill>
+                                <a:effectLst/>
+                                <a:uLnTx/>
+                                <a:uFillTx/>
+                                <a:latin typeface="Cambria Math" panose="02040503050406030204" pitchFamily="18" charset="0"/>
+                                <a:ea typeface="+mn-ea"/>
+                                <a:cs typeface="+mn-cs"/>
+                              </a:rPr>
+                              <m:t>8+8</m:t>
+                            </m:r>
+                          </m:num>
+                          <m:den>
+                            <m:r>
+                              <a:rPr kumimoji="0" lang="en-US" sz="1800" b="0" i="1" u="none" strike="noStrike" kern="1200" cap="none" spc="0" normalizeH="0" baseline="0" noProof="0" smtClean="0">
+                                <a:ln>
+                                  <a:noFill/>
+                                </a:ln>
+                                <a:solidFill>
+                                  <a:prstClr val="black"/>
+                                </a:solidFill>
+                                <a:effectLst/>
+                                <a:uLnTx/>
+                                <a:uFillTx/>
+                                <a:latin typeface="Cambria Math" panose="02040503050406030204" pitchFamily="18" charset="0"/>
+                                <a:ea typeface="+mn-ea"/>
+                                <a:cs typeface="+mn-cs"/>
+                              </a:rPr>
+                              <m:t>2</m:t>
+                            </m:r>
+                          </m:den>
+                        </m:f>
+                        <m:r>
+                          <a:rPr kumimoji="0" lang="en-US" sz="1800" b="0" i="1" u="none" strike="noStrike" kern="1200" cap="none" spc="0" normalizeH="0" baseline="0" noProof="0" smtClean="0">
+                            <a:ln>
+                              <a:noFill/>
+                            </a:ln>
+                            <a:solidFill>
+                              <a:prstClr val="black"/>
+                            </a:solidFill>
+                            <a:effectLst/>
+                            <a:uLnTx/>
+                            <a:uFillTx/>
+                            <a:latin typeface="Cambria Math" panose="02040503050406030204" pitchFamily="18" charset="0"/>
+                            <a:ea typeface="+mn-ea"/>
+                            <a:cs typeface="+mn-cs"/>
+                          </a:rPr>
+                          <m:t>=8</m:t>
+                        </m:r>
+                      </m:oMath>
+                    </m:oMathPara>
+                  </a14:m>
+                  <a:endParaRPr kumimoji="0" lang="en-US" sz="1800" b="0" i="0" u="none" strike="noStrike" kern="1200" cap="none" spc="0" normalizeH="0" baseline="0" noProof="0" dirty="0">
+                    <a:ln>
+                      <a:noFill/>
+                    </a:ln>
+                    <a:solidFill>
+                      <a:prstClr val="black"/>
+                    </a:solidFill>
+                    <a:effectLst/>
+                    <a:uLnTx/>
+                    <a:uFillTx/>
+                    <a:latin typeface="Calibri" panose="020F0502020204030204"/>
+                    <a:ea typeface="+mn-ea"/>
+                    <a:cs typeface="+mn-cs"/>
+                  </a:endParaRPr>
+                </a:p>
+              </p:txBody>
+            </p:sp>
+          </mc:Choice>
+          <mc:Fallback xmlns="">
+            <p:sp>
+              <p:nvSpPr>
+                <p:cNvPr id="25" name="TextBox 24">
+                  <a:extLst>
+                    <a:ext uri="{FF2B5EF4-FFF2-40B4-BE49-F238E27FC236}">
+                      <a16:creationId xmlns:a16="http://schemas.microsoft.com/office/drawing/2014/main" id="{49FE77AA-7C50-0F7E-C479-3A2E60163D35}"/>
+                    </a:ext>
+                  </a:extLst>
+                </p:cNvPr>
+                <p:cNvSpPr txBox="1">
+                  <a:spLocks noRot="1" noChangeAspect="1" noMove="1" noResize="1" noEditPoints="1" noAdjustHandles="1" noChangeArrowheads="1" noChangeShapeType="1" noTextEdit="1"/>
+                </p:cNvSpPr>
+                <p:nvPr/>
+              </p:nvSpPr>
+              <p:spPr>
+                <a:xfrm>
+                  <a:off x="7414138" y="4925623"/>
+                  <a:ext cx="2095895" cy="518604"/>
+                </a:xfrm>
+                <a:prstGeom prst="rect">
+                  <a:avLst/>
+                </a:prstGeom>
+                <a:blipFill>
+                  <a:blip r:embed="rId4"/>
+                  <a:stretch>
+                    <a:fillRect/>
+                  </a:stretch>
+                </a:blipFill>
+              </p:spPr>
+              <p:txBody>
+                <a:bodyPr/>
+                <a:lstStyle/>
+                <a:p>
+                  <a:r>
+                    <a:rPr lang="en-US">
+                      <a:noFill/>
+                    </a:rPr>
+                    <a:t> </a:t>
+                  </a:r>
+                </a:p>
+              </p:txBody>
+            </p:sp>
+          </mc:Fallback>
+        </mc:AlternateContent>
+      </p:grpSp>
+      <p:sp>
+        <p:nvSpPr>
+          <p:cNvPr id="26" name="TextBox 25">
+            <a:extLst>
+              <a:ext uri="{FF2B5EF4-FFF2-40B4-BE49-F238E27FC236}">
+                <a16:creationId xmlns:a16="http://schemas.microsoft.com/office/drawing/2014/main" id="{0AB15456-BDE7-CB11-8743-884D2B7E62B6}"/>
+              </a:ext>
+            </a:extLst>
+          </p:cNvPr>
+          <p:cNvSpPr txBox="1"/>
+          <p:nvPr/>
+        </p:nvSpPr>
         <p:spPr>
           <a:xfrm>
-            <a:off x="1070502" y="0"/>
-            <a:ext cx="10050996" cy="6858000"/>
+            <a:off x="594017" y="5686108"/>
+            <a:ext cx="3605282" cy="400110"/>
           </a:xfrm>
           <a:prstGeom prst="rect">
             <a:avLst/>
           </a:prstGeom>
+          <a:noFill/>
         </p:spPr>
-      </p:pic>
+        <p:txBody>
+          <a:bodyPr wrap="none" rtlCol="0">
+            <a:spAutoFit/>
+          </a:bodyPr>
+          <a:lstStyle/>
+          <a:p>
+            <a:pPr marL="0" marR="0" lvl="0" indent="0" algn="l" defTabSz="914400" rtl="0" eaLnBrk="1" fontAlgn="auto" latinLnBrk="0" hangingPunct="1">
+              <a:lnSpc>
+                <a:spcPct val="100000"/>
+              </a:lnSpc>
+              <a:spcBef>
+                <a:spcPts val="0"/>
+              </a:spcBef>
+              <a:spcAft>
+                <a:spcPts val="0"/>
+              </a:spcAft>
+              <a:buClrTx/>
+              <a:buSzTx/>
+              <a:buFontTx/>
+              <a:buNone/>
+              <a:tabLst/>
+              <a:defRPr/>
+            </a:pPr>
+            <a:r>
+              <a:rPr kumimoji="0" lang="en-US" sz="2000" b="0" i="0" u="none" strike="noStrike" kern="1200" cap="none" spc="0" normalizeH="0" baseline="0" noProof="0" dirty="0">
+                <a:ln>
+                  <a:noFill/>
+                </a:ln>
+                <a:solidFill>
+                  <a:prstClr val="black"/>
+                </a:solidFill>
+                <a:effectLst/>
+                <a:uLnTx/>
+                <a:uFillTx/>
+                <a:latin typeface="Calibri" panose="020F0502020204030204"/>
+                <a:ea typeface="+mn-ea"/>
+                <a:cs typeface="+mn-cs"/>
+              </a:rPr>
+              <a:t>The mean is the center of gravity</a:t>
+            </a:r>
+          </a:p>
+        </p:txBody>
+      </p:sp>
       <p:sp>
         <p:nvSpPr>
-          <p:cNvPr id="3" name="Slide Number Placeholder 2">
+          <p:cNvPr id="27" name="TextBox 26">
             <a:extLst>
               <a:ext uri="{FF2B5EF4-FFF2-40B4-BE49-F238E27FC236}">
-                <a16:creationId xmlns:a16="http://schemas.microsoft.com/office/drawing/2014/main" id="{C161064D-98E5-E20F-9F3D-A4057B5CB2B5}"/>
+                <a16:creationId xmlns:a16="http://schemas.microsoft.com/office/drawing/2014/main" id="{733A6C0A-C879-8A3D-A8EE-96D4E66E3A74}"/>
+              </a:ext>
+            </a:extLst>
+          </p:cNvPr>
+          <p:cNvSpPr txBox="1"/>
+          <p:nvPr/>
+        </p:nvSpPr>
+        <p:spPr>
+          <a:xfrm>
+            <a:off x="6325923" y="5810799"/>
+            <a:ext cx="3438762" cy="400110"/>
+          </a:xfrm>
+          <a:prstGeom prst="rect">
+            <a:avLst/>
+          </a:prstGeom>
+          <a:noFill/>
+        </p:spPr>
+        <p:txBody>
+          <a:bodyPr wrap="none" rtlCol="0">
+            <a:spAutoFit/>
+          </a:bodyPr>
+          <a:lstStyle/>
+          <a:p>
+            <a:pPr marL="0" marR="0" lvl="0" indent="0" algn="l" defTabSz="914400" rtl="0" eaLnBrk="1" fontAlgn="auto" latinLnBrk="0" hangingPunct="1">
+              <a:lnSpc>
+                <a:spcPct val="100000"/>
+              </a:lnSpc>
+              <a:spcBef>
+                <a:spcPts val="0"/>
+              </a:spcBef>
+              <a:spcAft>
+                <a:spcPts val="0"/>
+              </a:spcAft>
+              <a:buClrTx/>
+              <a:buSzTx/>
+              <a:buFontTx/>
+              <a:buNone/>
+              <a:tabLst/>
+              <a:defRPr/>
+            </a:pPr>
+            <a:r>
+              <a:rPr kumimoji="0" lang="en-US" sz="2000" b="0" i="0" u="none" strike="noStrike" kern="1200" cap="none" spc="0" normalizeH="0" baseline="0" noProof="0" dirty="0">
+                <a:ln>
+                  <a:noFill/>
+                </a:ln>
+                <a:solidFill>
+                  <a:prstClr val="black"/>
+                </a:solidFill>
+                <a:effectLst/>
+                <a:uLnTx/>
+                <a:uFillTx/>
+                <a:latin typeface="Calibri" panose="020F0502020204030204"/>
+                <a:ea typeface="+mn-ea"/>
+                <a:cs typeface="+mn-cs"/>
+              </a:rPr>
+              <a:t>The median is the middle value</a:t>
+            </a:r>
+          </a:p>
+        </p:txBody>
+      </p:sp>
+      <p:sp>
+        <p:nvSpPr>
+          <p:cNvPr id="34" name="TextBox 33">
+            <a:extLst>
+              <a:ext uri="{FF2B5EF4-FFF2-40B4-BE49-F238E27FC236}">
+                <a16:creationId xmlns:a16="http://schemas.microsoft.com/office/drawing/2014/main" id="{8CC585F4-2355-392B-9E1E-5B47162BF9BA}"/>
+              </a:ext>
+            </a:extLst>
+          </p:cNvPr>
+          <p:cNvSpPr txBox="1"/>
+          <p:nvPr/>
+        </p:nvSpPr>
+        <p:spPr>
+          <a:xfrm>
+            <a:off x="1320800" y="314036"/>
+            <a:ext cx="8002512" cy="1477328"/>
+          </a:xfrm>
+          <a:prstGeom prst="rect">
+            <a:avLst/>
+          </a:prstGeom>
+          <a:noFill/>
+        </p:spPr>
+        <p:txBody>
+          <a:bodyPr wrap="none" rtlCol="0">
+            <a:spAutoFit/>
+          </a:bodyPr>
+          <a:lstStyle/>
+          <a:p>
+            <a:pPr marL="0" marR="0" lvl="0" indent="0" algn="l" defTabSz="914400" rtl="0" eaLnBrk="1" fontAlgn="auto" latinLnBrk="0" hangingPunct="1">
+              <a:lnSpc>
+                <a:spcPct val="100000"/>
+              </a:lnSpc>
+              <a:spcBef>
+                <a:spcPts val="0"/>
+              </a:spcBef>
+              <a:spcAft>
+                <a:spcPts val="0"/>
+              </a:spcAft>
+              <a:buClrTx/>
+              <a:buSzTx/>
+              <a:buFontTx/>
+              <a:buNone/>
+              <a:tabLst/>
+              <a:defRPr/>
+            </a:pPr>
+            <a:r>
+              <a:rPr kumimoji="0" lang="en-US" sz="1800" b="0" i="0" u="none" strike="noStrike" kern="1200" cap="none" spc="0" normalizeH="0" baseline="0" noProof="0" dirty="0">
+                <a:ln>
+                  <a:noFill/>
+                </a:ln>
+                <a:solidFill>
+                  <a:prstClr val="black"/>
+                </a:solidFill>
+                <a:effectLst/>
+                <a:uLnTx/>
+                <a:uFillTx/>
+                <a:latin typeface="Calibri" panose="020F0502020204030204"/>
+                <a:ea typeface="+mn-ea"/>
+                <a:cs typeface="+mn-cs"/>
+              </a:rPr>
+              <a:t>Data: 3  3  3  3  3  3  3  4  4  4  4  4  4  4  4  4  4  5  5  5  5  5  5  5  5  5  5</a:t>
+            </a:r>
+          </a:p>
+          <a:p>
+            <a:pPr marL="0" marR="0" lvl="0" indent="0" algn="l" defTabSz="914400" rtl="0" eaLnBrk="1" fontAlgn="auto" latinLnBrk="0" hangingPunct="1">
+              <a:lnSpc>
+                <a:spcPct val="100000"/>
+              </a:lnSpc>
+              <a:spcBef>
+                <a:spcPts val="0"/>
+              </a:spcBef>
+              <a:spcAft>
+                <a:spcPts val="0"/>
+              </a:spcAft>
+              <a:buClrTx/>
+              <a:buSzTx/>
+              <a:buFontTx/>
+              <a:buNone/>
+              <a:tabLst/>
+              <a:defRPr/>
+            </a:pPr>
+            <a:r>
+              <a:rPr kumimoji="0" lang="en-US" sz="1800" b="0" i="0" u="none" strike="noStrike" kern="1200" cap="none" spc="0" normalizeH="0" baseline="0" noProof="0" dirty="0">
+                <a:ln>
+                  <a:noFill/>
+                </a:ln>
+                <a:solidFill>
+                  <a:prstClr val="black"/>
+                </a:solidFill>
+                <a:effectLst/>
+                <a:uLnTx/>
+                <a:uFillTx/>
+                <a:latin typeface="Calibri" panose="020F0502020204030204"/>
+                <a:ea typeface="+mn-ea"/>
+                <a:cs typeface="+mn-cs"/>
+              </a:rPr>
+              <a:t> 5  5  5  5  5  5  5  5  5  6  6  6  6  6  6  6  6  6  6  7  7  7  7  7  7  7  7</a:t>
+            </a:r>
+          </a:p>
+          <a:p>
+            <a:pPr marL="0" marR="0" lvl="0" indent="0" algn="l" defTabSz="914400" rtl="0" eaLnBrk="1" fontAlgn="auto" latinLnBrk="0" hangingPunct="1">
+              <a:lnSpc>
+                <a:spcPct val="100000"/>
+              </a:lnSpc>
+              <a:spcBef>
+                <a:spcPts val="0"/>
+              </a:spcBef>
+              <a:spcAft>
+                <a:spcPts val="0"/>
+              </a:spcAft>
+              <a:buClrTx/>
+              <a:buSzTx/>
+              <a:buFontTx/>
+              <a:buNone/>
+              <a:tabLst/>
+              <a:defRPr/>
+            </a:pPr>
+            <a:r>
+              <a:rPr kumimoji="0" lang="en-US" sz="1800" b="0" i="0" u="none" strike="noStrike" kern="1200" cap="none" spc="0" normalizeH="0" baseline="0" noProof="0" dirty="0">
+                <a:ln>
+                  <a:noFill/>
+                </a:ln>
+                <a:solidFill>
+                  <a:prstClr val="black"/>
+                </a:solidFill>
+                <a:effectLst/>
+                <a:uLnTx/>
+                <a:uFillTx/>
+                <a:latin typeface="Calibri" panose="020F0502020204030204"/>
+                <a:ea typeface="+mn-ea"/>
+                <a:cs typeface="+mn-cs"/>
+              </a:rPr>
+              <a:t> 7  8  </a:t>
+            </a:r>
+            <a:r>
+              <a:rPr kumimoji="0" lang="en-US" sz="1800" b="0" i="0" u="none" strike="noStrike" kern="1200" cap="none" spc="0" normalizeH="0" baseline="0" noProof="0" dirty="0">
+                <a:ln>
+                  <a:noFill/>
+                </a:ln>
+                <a:solidFill>
+                  <a:srgbClr val="FF0000"/>
+                </a:solidFill>
+                <a:effectLst/>
+                <a:uLnTx/>
+                <a:uFillTx/>
+                <a:latin typeface="Calibri" panose="020F0502020204030204"/>
+                <a:ea typeface="+mn-ea"/>
+                <a:cs typeface="+mn-cs"/>
+              </a:rPr>
+              <a:t>8  8</a:t>
+            </a:r>
+            <a:r>
+              <a:rPr kumimoji="0" lang="en-US" sz="1800" b="0" i="0" u="none" strike="noStrike" kern="1200" cap="none" spc="0" normalizeH="0" baseline="0" noProof="0" dirty="0">
+                <a:ln>
+                  <a:noFill/>
+                </a:ln>
+                <a:solidFill>
+                  <a:prstClr val="black"/>
+                </a:solidFill>
+                <a:effectLst/>
+                <a:uLnTx/>
+                <a:uFillTx/>
+                <a:latin typeface="Calibri" panose="020F0502020204030204"/>
+                <a:ea typeface="+mn-ea"/>
+                <a:cs typeface="+mn-cs"/>
+              </a:rPr>
+              <a:t>  8  8  8  9  9  9  9  9  9  9 10 10 10 10 10 10 10 11 11 11 11 11 12</a:t>
+            </a:r>
+          </a:p>
+          <a:p>
+            <a:pPr marL="0" marR="0" lvl="0" indent="0" algn="l" defTabSz="914400" rtl="0" eaLnBrk="1" fontAlgn="auto" latinLnBrk="0" hangingPunct="1">
+              <a:lnSpc>
+                <a:spcPct val="100000"/>
+              </a:lnSpc>
+              <a:spcBef>
+                <a:spcPts val="0"/>
+              </a:spcBef>
+              <a:spcAft>
+                <a:spcPts val="0"/>
+              </a:spcAft>
+              <a:buClrTx/>
+              <a:buSzTx/>
+              <a:buFontTx/>
+              <a:buNone/>
+              <a:tabLst/>
+              <a:defRPr/>
+            </a:pPr>
+            <a:r>
+              <a:rPr kumimoji="0" lang="en-US" sz="1800" b="0" i="0" u="none" strike="noStrike" kern="1200" cap="none" spc="0" normalizeH="0" baseline="0" noProof="0" dirty="0">
+                <a:ln>
+                  <a:noFill/>
+                </a:ln>
+                <a:solidFill>
+                  <a:prstClr val="black"/>
+                </a:solidFill>
+                <a:effectLst/>
+                <a:uLnTx/>
+                <a:uFillTx/>
+                <a:latin typeface="Calibri" panose="020F0502020204030204"/>
+                <a:ea typeface="+mn-ea"/>
+                <a:cs typeface="+mn-cs"/>
+              </a:rPr>
+              <a:t> 12 12 12 12 12 12 12 13 13 13 14 14 14 14 14 14 15 15 15 16 16 16 16 17 17 17 18</a:t>
+            </a:r>
+          </a:p>
+          <a:p>
+            <a:pPr marL="0" marR="0" lvl="0" indent="0" algn="l" defTabSz="914400" rtl="0" eaLnBrk="1" fontAlgn="auto" latinLnBrk="0" hangingPunct="1">
+              <a:lnSpc>
+                <a:spcPct val="100000"/>
+              </a:lnSpc>
+              <a:spcBef>
+                <a:spcPts val="0"/>
+              </a:spcBef>
+              <a:spcAft>
+                <a:spcPts val="0"/>
+              </a:spcAft>
+              <a:buClrTx/>
+              <a:buSzTx/>
+              <a:buFontTx/>
+              <a:buNone/>
+              <a:tabLst/>
+              <a:defRPr/>
+            </a:pPr>
+            <a:r>
+              <a:rPr kumimoji="0" lang="en-US" sz="1800" b="0" i="0" u="none" strike="noStrike" kern="1200" cap="none" spc="0" normalizeH="0" baseline="0" noProof="0" dirty="0">
+                <a:ln>
+                  <a:noFill/>
+                </a:ln>
+                <a:solidFill>
+                  <a:prstClr val="black"/>
+                </a:solidFill>
+                <a:effectLst/>
+                <a:uLnTx/>
+                <a:uFillTx/>
+                <a:latin typeface="Calibri" panose="020F0502020204030204"/>
+                <a:ea typeface="+mn-ea"/>
+                <a:cs typeface="+mn-cs"/>
+              </a:rPr>
+              <a:t>18 20 20 20 20 20</a:t>
+            </a:r>
+          </a:p>
+        </p:txBody>
+      </p:sp>
+      <p:sp>
+        <p:nvSpPr>
+          <p:cNvPr id="2" name="Slide Number Placeholder 1">
+            <a:extLst>
+              <a:ext uri="{FF2B5EF4-FFF2-40B4-BE49-F238E27FC236}">
+                <a16:creationId xmlns:a16="http://schemas.microsoft.com/office/drawing/2014/main" id="{BE122782-7D4F-0CC8-EFD1-F6ACBC48B114}"/>
               </a:ext>
             </a:extLst>
           </p:cNvPr>
@@ -3511,7 +4483,7 @@
     </p:spTree>
     <p:extLst>
       <p:ext uri="{BB962C8B-B14F-4D97-AF65-F5344CB8AC3E}">
-        <p14:creationId xmlns:p14="http://schemas.microsoft.com/office/powerpoint/2010/main" val="2134092552"/>
+        <p14:creationId xmlns:p14="http://schemas.microsoft.com/office/powerpoint/2010/main" val="931765416"/>
       </p:ext>
     </p:extLst>
   </p:cSld>
@@ -3543,7 +4515,7 @@
           <p:cNvPr id="6" name="Body card">
             <a:extLst>
               <a:ext uri="{FF2B5EF4-FFF2-40B4-BE49-F238E27FC236}">
-                <a16:creationId xmlns:a16="http://schemas.microsoft.com/office/drawing/2014/main" id="{67764CF5-673D-B4D9-A1D6-C5DA04FD5E23}"/>
+                <a16:creationId xmlns:a16="http://schemas.microsoft.com/office/drawing/2014/main" id="{C7210D85-88ED-C93F-3769-77E99841AC8D}"/>
               </a:ext>
             </a:extLst>
           </p:cNvPr>
@@ -3553,7 +4525,7 @@
         <p:spPr>
           <a:xfrm>
             <a:off x="635000" y="1676400"/>
-            <a:ext cx="10922000" cy="3568700"/>
+            <a:ext cx="10922000" cy="711200"/>
           </a:xfrm>
           <a:prstGeom prst="roundRect">
             <a:avLst>
@@ -3599,7 +4571,7 @@
           <p:cNvPr id="2" name="Title 1">
             <a:extLst>
               <a:ext uri="{FF2B5EF4-FFF2-40B4-BE49-F238E27FC236}">
-                <a16:creationId xmlns:a16="http://schemas.microsoft.com/office/drawing/2014/main" id="{D57F5637-759B-CDC6-A079-01615378933B}"/>
+                <a16:creationId xmlns:a16="http://schemas.microsoft.com/office/drawing/2014/main" id="{CE84DE6C-08A1-E5FC-FBD2-2A6CFB14937F}"/>
               </a:ext>
             </a:extLst>
           </p:cNvPr>
@@ -3621,7 +4593,7 @@
                   <a:srgbClr val="1F3864"/>
                 </a:solidFill>
               </a:rPr>
-              <a:t>Alternative formulas for the mean</a:t>
+              <a:t>Mean and median treat outliers differently</a:t>
             </a:r>
           </a:p>
         </p:txBody>
@@ -3633,7 +4605,7 @@
               <p:cNvPr id="3" name="Content Placeholder 2">
                 <a:extLst>
                   <a:ext uri="{FF2B5EF4-FFF2-40B4-BE49-F238E27FC236}">
-                    <a16:creationId xmlns:a16="http://schemas.microsoft.com/office/drawing/2014/main" id="{1F86C35F-87BF-000B-FFF1-FA6B4C96E0A5}"/>
+                    <a16:creationId xmlns:a16="http://schemas.microsoft.com/office/drawing/2014/main" id="{D0FE07D2-A170-60BA-CCDC-92189FF4B0D1}"/>
                   </a:ext>
                 </a:extLst>
               </p:cNvPr>
@@ -3649,288 +4621,22 @@
               <a:bodyPr/>
               <a:lstStyle/>
               <a:p>
-                <a:r>
-                  <a:rPr lang="en-US" sz="2800" dirty="0"/>
-                  <a:t>We can also express the mean in terms of the frequency </a:t>
-                </a:r>
                 <a14:m>
                   <m:oMath xmlns:m="http://schemas.openxmlformats.org/officeDocument/2006/math">
                     <m:r>
-                      <a:rPr lang="en-US" sz="2800" b="0" i="1" smtClean="0">
+                      <a:rPr lang="en-US" b="0" i="1" smtClean="0">
                         <a:latin typeface="Cambria Math" panose="02040503050406030204" pitchFamily="18" charset="0"/>
                       </a:rPr>
-                      <m:t>𝐹</m:t>
+                      <m:t>𝑋</m:t>
+                    </m:r>
+                    <m:r>
+                      <a:rPr lang="en-US" b="0" i="1" smtClean="0">
+                        <a:latin typeface="Cambria Math" panose="02040503050406030204" pitchFamily="18" charset="0"/>
+                      </a:rPr>
+                      <m:t>={1, 3, 5, 5, 6, 7, 7, 8, 32}</m:t>
                     </m:r>
                   </m:oMath>
                 </a14:m>
-                <a:r>
-                  <a:rPr lang="en-US" sz="2800" dirty="0"/>
-                  <a:t> or the relative frequency </a:t>
-                </a:r>
-                <a14:m>
-                  <m:oMath xmlns:m="http://schemas.openxmlformats.org/officeDocument/2006/math">
-                    <m:r>
-                      <a:rPr lang="en-US" sz="2800" b="0" i="1" smtClean="0">
-                        <a:latin typeface="Cambria Math" panose="02040503050406030204" pitchFamily="18" charset="0"/>
-                      </a:rPr>
-                      <m:t>𝑅𝐹</m:t>
-                    </m:r>
-                  </m:oMath>
-                </a14:m>
-                <a:endParaRPr lang="en-US" sz="2800" dirty="0"/>
-              </a:p>
-              <a:p>
-                <a:endParaRPr lang="en-US" sz="2800" dirty="0"/>
-              </a:p>
-              <a:p>
-                <a:pPr marL="0" indent="0">
-                  <a:buNone/>
-                </a:pPr>
-                <a14:m>
-                  <m:oMathPara xmlns:m="http://schemas.openxmlformats.org/officeDocument/2006/math">
-                    <m:oMath>
-                      <m:acc>
-                        <m:accPr>
-                          <m:chr m:val="̅"/>
-                          <m:ctrlPr>
-                            <a:rPr lang="en-US" sz="2800" b="0" i="1" smtClean="0">
-                              <a:latin typeface="Cambria Math" panose="02040503050406030204" pitchFamily="18" charset="0"/>
-                            </a:rPr>
-                          </m:ctrlPr>
-                        </m:accPr>
-                        <m:e>
-                          <m:r>
-                            <a:rPr lang="en-US" sz="2800" b="0" i="1" smtClean="0">
-                              <a:latin typeface="Cambria Math" panose="02040503050406030204" pitchFamily="18" charset="0"/>
-                            </a:rPr>
-                            <m:t>𝑥</m:t>
-                          </m:r>
-                        </m:e>
-                      </m:acc>
-                      <m:r>
-                        <a:rPr lang="en-US" sz="2800" b="0" i="1" smtClean="0">
-                          <a:latin typeface="Cambria Math" panose="02040503050406030204" pitchFamily="18" charset="0"/>
-                        </a:rPr>
-                        <m:t>=</m:t>
-                      </m:r>
-                      <m:f>
-                        <m:fPr>
-                          <m:ctrlPr>
-                            <a:rPr lang="en-US" sz="2800" b="0" i="1" smtClean="0">
-                              <a:latin typeface="Cambria Math" panose="02040503050406030204" pitchFamily="18" charset="0"/>
-                            </a:rPr>
-                          </m:ctrlPr>
-                        </m:fPr>
-                        <m:num>
-                          <m:r>
-                            <a:rPr lang="en-US" sz="2800" b="0" i="1" smtClean="0">
-                              <a:latin typeface="Cambria Math" panose="02040503050406030204" pitchFamily="18" charset="0"/>
-                            </a:rPr>
-                            <m:t>1</m:t>
-                          </m:r>
-                        </m:num>
-                        <m:den>
-                          <m:r>
-                            <a:rPr lang="en-US" sz="2800" b="0" i="1" smtClean="0">
-                              <a:latin typeface="Cambria Math" panose="02040503050406030204" pitchFamily="18" charset="0"/>
-                            </a:rPr>
-                            <m:t>𝑛</m:t>
-                          </m:r>
-                        </m:den>
-                      </m:f>
-                      <m:nary>
-                        <m:naryPr>
-                          <m:chr m:val="∑"/>
-                          <m:supHide m:val="on"/>
-                          <m:ctrlPr>
-                            <a:rPr lang="en-US" sz="2800" b="0" i="1" smtClean="0">
-                              <a:latin typeface="Cambria Math" panose="02040503050406030204" pitchFamily="18" charset="0"/>
-                            </a:rPr>
-                          </m:ctrlPr>
-                        </m:naryPr>
-                        <m:sub>
-                          <m:r>
-                            <m:rPr>
-                              <m:brk m:alnAt="7"/>
-                            </m:rPr>
-                            <a:rPr lang="en-US" sz="2800" b="0" i="1" smtClean="0">
-                              <a:latin typeface="Cambria Math" panose="02040503050406030204" pitchFamily="18" charset="0"/>
-                            </a:rPr>
-                            <m:t>𝑥</m:t>
-                          </m:r>
-                        </m:sub>
-                        <m:sup/>
-                        <m:e>
-                          <m:r>
-                            <a:rPr lang="en-US" sz="2800" b="0" i="1" smtClean="0">
-                              <a:latin typeface="Cambria Math" panose="02040503050406030204" pitchFamily="18" charset="0"/>
-                            </a:rPr>
-                            <m:t>𝑥</m:t>
-                          </m:r>
-                          <m:r>
-                            <a:rPr lang="en-US" sz="2800" b="0" i="1" smtClean="0">
-                              <a:latin typeface="Cambria Math" panose="02040503050406030204" pitchFamily="18" charset="0"/>
-                            </a:rPr>
-                            <m:t> </m:t>
-                          </m:r>
-                          <m:r>
-                            <a:rPr lang="en-US" sz="2800" b="0" i="1" smtClean="0">
-                              <a:latin typeface="Cambria Math" panose="02040503050406030204" pitchFamily="18" charset="0"/>
-                            </a:rPr>
-                            <m:t>𝐹</m:t>
-                          </m:r>
-                          <m:r>
-                            <a:rPr lang="en-US" sz="2800" b="0" i="1" smtClean="0">
-                              <a:latin typeface="Cambria Math" panose="02040503050406030204" pitchFamily="18" charset="0"/>
-                            </a:rPr>
-                            <m:t>(</m:t>
-                          </m:r>
-                          <m:r>
-                            <a:rPr lang="en-US" sz="2800" b="0" i="1" smtClean="0">
-                              <a:latin typeface="Cambria Math" panose="02040503050406030204" pitchFamily="18" charset="0"/>
-                            </a:rPr>
-                            <m:t>𝑥</m:t>
-                          </m:r>
-                          <m:r>
-                            <a:rPr lang="en-US" sz="2800" b="0" i="1" smtClean="0">
-                              <a:latin typeface="Cambria Math" panose="02040503050406030204" pitchFamily="18" charset="0"/>
-                            </a:rPr>
-                            <m:t>)</m:t>
-                          </m:r>
-                        </m:e>
-                      </m:nary>
-                      <m:r>
-                        <a:rPr lang="en-US" sz="2800" b="0" i="1" smtClean="0">
-                          <a:latin typeface="Cambria Math" panose="02040503050406030204" pitchFamily="18" charset="0"/>
-                        </a:rPr>
-                        <m:t>      </m:t>
-                      </m:r>
-                      <m:r>
-                        <m:rPr>
-                          <m:sty m:val="p"/>
-                        </m:rPr>
-                        <a:rPr lang="en-US" sz="2800" b="0" i="0" smtClean="0">
-                          <a:latin typeface="Cambria Math" panose="02040503050406030204" pitchFamily="18" charset="0"/>
-                        </a:rPr>
-                        <m:t>or</m:t>
-                      </m:r>
-                      <m:r>
-                        <a:rPr lang="en-US" sz="2800" b="0" i="1" smtClean="0">
-                          <a:latin typeface="Cambria Math" panose="02040503050406030204" pitchFamily="18" charset="0"/>
-                        </a:rPr>
-                        <m:t>      </m:t>
-                      </m:r>
-                      <m:acc>
-                        <m:accPr>
-                          <m:chr m:val="̅"/>
-                          <m:ctrlPr>
-                            <a:rPr lang="en-US" sz="2800" b="0" i="1" smtClean="0">
-                              <a:latin typeface="Cambria Math" panose="02040503050406030204" pitchFamily="18" charset="0"/>
-                            </a:rPr>
-                          </m:ctrlPr>
-                        </m:accPr>
-                        <m:e>
-                          <m:r>
-                            <a:rPr lang="en-US" sz="2800" b="0" i="1" smtClean="0">
-                              <a:latin typeface="Cambria Math" panose="02040503050406030204" pitchFamily="18" charset="0"/>
-                            </a:rPr>
-                            <m:t>𝑥</m:t>
-                          </m:r>
-                        </m:e>
-                      </m:acc>
-                      <m:r>
-                        <a:rPr lang="en-US" sz="2800" b="0" i="1" smtClean="0">
-                          <a:latin typeface="Cambria Math" panose="02040503050406030204" pitchFamily="18" charset="0"/>
-                        </a:rPr>
-                        <m:t>=</m:t>
-                      </m:r>
-                      <m:nary>
-                        <m:naryPr>
-                          <m:chr m:val="∑"/>
-                          <m:supHide m:val="on"/>
-                          <m:ctrlPr>
-                            <a:rPr lang="en-US" sz="2800" b="0" i="1" smtClean="0">
-                              <a:latin typeface="Cambria Math" panose="02040503050406030204" pitchFamily="18" charset="0"/>
-                            </a:rPr>
-                          </m:ctrlPr>
-                        </m:naryPr>
-                        <m:sub>
-                          <m:r>
-                            <m:rPr>
-                              <m:brk m:alnAt="7"/>
-                            </m:rPr>
-                            <a:rPr lang="en-US" sz="2800" b="0" i="1" smtClean="0">
-                              <a:latin typeface="Cambria Math" panose="02040503050406030204" pitchFamily="18" charset="0"/>
-                            </a:rPr>
-                            <m:t>𝑥</m:t>
-                          </m:r>
-                        </m:sub>
-                        <m:sup/>
-                        <m:e>
-                          <m:r>
-                            <a:rPr lang="en-US" sz="2800" b="0" i="1" smtClean="0">
-                              <a:latin typeface="Cambria Math" panose="02040503050406030204" pitchFamily="18" charset="0"/>
-                            </a:rPr>
-                            <m:t>𝑥</m:t>
-                          </m:r>
-                          <m:r>
-                            <a:rPr lang="en-US" sz="2800" b="0" i="1" smtClean="0">
-                              <a:latin typeface="Cambria Math" panose="02040503050406030204" pitchFamily="18" charset="0"/>
-                            </a:rPr>
-                            <m:t> </m:t>
-                          </m:r>
-                          <m:r>
-                            <a:rPr lang="en-US" sz="2800" b="0" i="1" smtClean="0">
-                              <a:latin typeface="Cambria Math" panose="02040503050406030204" pitchFamily="18" charset="0"/>
-                            </a:rPr>
-                            <m:t>𝑅𝐹</m:t>
-                          </m:r>
-                          <m:r>
-                            <a:rPr lang="en-US" sz="2800" b="0" i="1" smtClean="0">
-                              <a:latin typeface="Cambria Math" panose="02040503050406030204" pitchFamily="18" charset="0"/>
-                            </a:rPr>
-                            <m:t>(</m:t>
-                          </m:r>
-                          <m:r>
-                            <a:rPr lang="en-US" sz="2800" b="0" i="1" smtClean="0">
-                              <a:latin typeface="Cambria Math" panose="02040503050406030204" pitchFamily="18" charset="0"/>
-                            </a:rPr>
-                            <m:t>𝑥</m:t>
-                          </m:r>
-                          <m:r>
-                            <a:rPr lang="en-US" sz="2800" b="0" i="1" smtClean="0">
-                              <a:latin typeface="Cambria Math" panose="02040503050406030204" pitchFamily="18" charset="0"/>
-                            </a:rPr>
-                            <m:t>)</m:t>
-                          </m:r>
-                        </m:e>
-                      </m:nary>
-                    </m:oMath>
-                  </m:oMathPara>
-                </a14:m>
-                <a:endParaRPr lang="en-US" sz="2800" dirty="0"/>
-              </a:p>
-              <a:p>
-                <a:pPr marL="0" indent="0">
-                  <a:buNone/>
-                </a:pPr>
-                <a:r>
-                  <a:rPr lang="en-US" sz="2800" dirty="0"/>
-                  <a:t>Where the sum is over all distinct values of the variable </a:t>
-                </a:r>
-                <a14:m>
-                  <m:oMath xmlns:m="http://schemas.openxmlformats.org/officeDocument/2006/math">
-                    <m:r>
-                      <a:rPr lang="en-US" sz="2800" b="0" i="1" smtClean="0">
-                        <a:latin typeface="Cambria Math" panose="02040503050406030204" pitchFamily="18" charset="0"/>
-                      </a:rPr>
-                      <m:t>𝑥</m:t>
-                    </m:r>
-                  </m:oMath>
-                </a14:m>
-                <a:endParaRPr lang="en-US" sz="2800" dirty="0"/>
-              </a:p>
-              <a:p>
                 <a:endParaRPr lang="en-US" dirty="0"/>
               </a:p>
             </p:txBody>
@@ -3942,7 +4648,7 @@
               <p:cNvPr id="3" name="Content Placeholder 2">
                 <a:extLst>
                   <a:ext uri="{FF2B5EF4-FFF2-40B4-BE49-F238E27FC236}">
-                    <a16:creationId xmlns:a16="http://schemas.microsoft.com/office/drawing/2014/main" id="{1F86C35F-87BF-000B-FFF1-FA6B4C96E0A5}"/>
+                    <a16:creationId xmlns:a16="http://schemas.microsoft.com/office/drawing/2014/main" id="{D0FE07D2-A170-60BA-CCDC-92189FF4B0D1}"/>
                   </a:ext>
                 </a:extLst>
               </p:cNvPr>
@@ -3957,7 +4663,7 @@
               <a:blipFill>
                 <a:blip r:embed="rId2"/>
                 <a:stretch>
-                  <a:fillRect l="-1217" t="-2241"/>
+                  <a:fillRect/>
                 </a:stretch>
               </a:blipFill>
             </p:spPr>
@@ -3978,10 +4684,39 @@
       </mc:AlternateContent>
       <p:sp>
         <p:nvSpPr>
+          <p:cNvPr id="4" name="Slide Number Placeholder 3">
+            <a:extLst>
+              <a:ext uri="{FF2B5EF4-FFF2-40B4-BE49-F238E27FC236}">
+                <a16:creationId xmlns:a16="http://schemas.microsoft.com/office/drawing/2014/main" id="{E97F3D0D-BC18-BDB0-3CCC-5708B0185E7D}"/>
+              </a:ext>
+            </a:extLst>
+          </p:cNvPr>
+          <p:cNvSpPr>
+            <a:spLocks noGrp="1"/>
+          </p:cNvSpPr>
+          <p:nvPr>
+            <p:ph type="sldNum" sz="quarter" idx="12"/>
+          </p:nvPr>
+        </p:nvSpPr>
+        <p:spPr/>
+        <p:txBody>
+          <a:bodyPr/>
+          <a:lstStyle/>
+          <a:p>
+            <a:fld id="{A80A81DD-F10A-4B1C-963A-0ABBB4865886}" type="slidenum">
+              <a:rPr lang="en-US" smtClean="0"/>
+              <a:t>11</a:t>
+            </a:fld>
+            <a:endParaRPr lang="en-US"/>
+          </a:p>
+        </p:txBody>
+      </p:sp>
+      <p:sp>
+        <p:nvSpPr>
           <p:cNvPr id="5" name="Title rule">
             <a:extLst>
               <a:ext uri="{FF2B5EF4-FFF2-40B4-BE49-F238E27FC236}">
-                <a16:creationId xmlns:a16="http://schemas.microsoft.com/office/drawing/2014/main" id="{0AF00A67-D92B-7391-ADED-86AED46870B9}"/>
+                <a16:creationId xmlns:a16="http://schemas.microsoft.com/office/drawing/2014/main" id="{B6D210A3-C845-1B3C-F43D-4DEA7387FF1A}"/>
               </a:ext>
             </a:extLst>
           </p:cNvPr>
@@ -4044,39 +4779,10 @@
           </a:p>
         </p:txBody>
       </p:sp>
-      <p:sp>
-        <p:nvSpPr>
-          <p:cNvPr id="7" name="Slide Number Placeholder 6">
-            <a:extLst>
-              <a:ext uri="{FF2B5EF4-FFF2-40B4-BE49-F238E27FC236}">
-                <a16:creationId xmlns:a16="http://schemas.microsoft.com/office/drawing/2014/main" id="{556D7D2F-7600-F64D-8592-D5145C75B552}"/>
-              </a:ext>
-            </a:extLst>
-          </p:cNvPr>
-          <p:cNvSpPr>
-            <a:spLocks noGrp="1"/>
-          </p:cNvSpPr>
-          <p:nvPr>
-            <p:ph type="sldNum" sz="quarter" idx="12"/>
-          </p:nvPr>
-        </p:nvSpPr>
-        <p:spPr/>
-        <p:txBody>
-          <a:bodyPr/>
-          <a:lstStyle/>
-          <a:p>
-            <a:fld id="{A80A81DD-F10A-4B1C-963A-0ABBB4865886}" type="slidenum">
-              <a:rPr lang="en-US" smtClean="0"/>
-              <a:t>11</a:t>
-            </a:fld>
-            <a:endParaRPr lang="en-US"/>
-          </a:p>
-        </p:txBody>
-      </p:sp>
     </p:spTree>
     <p:extLst>
       <p:ext uri="{BB962C8B-B14F-4D97-AF65-F5344CB8AC3E}">
-        <p14:creationId xmlns:p14="http://schemas.microsoft.com/office/powerpoint/2010/main" val="1672991489"/>
+        <p14:creationId xmlns:p14="http://schemas.microsoft.com/office/powerpoint/2010/main" val="1271310440"/>
       </p:ext>
     </p:extLst>
   </p:cSld>
@@ -4103,555 +4809,42 @@
           <a:chExt cx="0" cy="0"/>
         </a:xfrm>
       </p:grpSpPr>
-      <p:sp>
-        <p:nvSpPr>
-          <p:cNvPr id="2" name="Title 1">
+      <p:pic>
+        <p:nvPicPr>
+          <p:cNvPr id="5" name="Picture 4">
             <a:extLst>
               <a:ext uri="{FF2B5EF4-FFF2-40B4-BE49-F238E27FC236}">
-                <a16:creationId xmlns:a16="http://schemas.microsoft.com/office/drawing/2014/main" id="{30704281-A2B3-E169-D64B-55C4B2F0F2E8}"/>
+                <a16:creationId xmlns:a16="http://schemas.microsoft.com/office/drawing/2014/main" id="{C3B45CB9-38D1-C6A4-DC41-174772C7945E}"/>
               </a:ext>
             </a:extLst>
           </p:cNvPr>
-          <p:cNvSpPr>
-            <a:spLocks noGrp="1"/>
-          </p:cNvSpPr>
-          <p:nvPr>
-            <p:ph type="title"/>
-          </p:nvPr>
-        </p:nvSpPr>
-        <p:spPr/>
-        <p:txBody>
-          <a:bodyPr/>
-          <a:lstStyle/>
-          <a:p>
-            <a:r>
-              <a:rPr lang="en-US" dirty="0">
-                <a:solidFill>
-                  <a:srgbClr val="1F3864"/>
-                </a:solidFill>
-              </a:rPr>
-              <a:t>Example: Computing the mean from a frequency table</a:t>
-            </a:r>
-          </a:p>
-        </p:txBody>
-      </p:sp>
-      <mc:AlternateContent xmlns:mc="http://schemas.openxmlformats.org/markup-compatibility/2006" xmlns:a14="http://schemas.microsoft.com/office/drawing/2010/main">
-        <mc:Choice Requires="a14">
-          <p:sp>
-            <p:nvSpPr>
-              <p:cNvPr id="4" name="TextBox 3">
-                <a:extLst>
-                  <a:ext uri="{FF2B5EF4-FFF2-40B4-BE49-F238E27FC236}">
-                    <a16:creationId xmlns:a16="http://schemas.microsoft.com/office/drawing/2014/main" id="{3CB2C17F-8867-4F95-3EA4-C71E0B623A8C}"/>
-                  </a:ext>
-                </a:extLst>
-              </p:cNvPr>
-              <p:cNvSpPr txBox="1"/>
-              <p:nvPr/>
-            </p:nvSpPr>
-            <p:spPr>
-              <a:xfrm>
-                <a:off x="932873" y="1985818"/>
-                <a:ext cx="10797309" cy="1477328"/>
-              </a:xfrm>
-              <a:prstGeom prst="rect">
-                <a:avLst/>
-              </a:prstGeom>
-              <a:noFill/>
-            </p:spPr>
-            <p:txBody>
-              <a:bodyPr wrap="square" rtlCol="0">
-                <a:spAutoFit/>
-              </a:bodyPr>
-              <a:lstStyle/>
-              <a:p>
-                <a:pPr/>
-                <a14:m>
-                  <m:oMathPara xmlns:m="http://schemas.openxmlformats.org/officeDocument/2006/math">
-                    <m:oMathParaPr>
-                      <m:jc m:val="left"/>
-                    </m:oMathParaPr>
-                    <m:oMath>
-                      <m:r>
-                        <a:rPr lang="en-US" sz="2400" b="0" i="1" smtClean="0">
-                          <a:latin typeface="Cambria Math" panose="02040503050406030204" pitchFamily="18" charset="0"/>
-                        </a:rPr>
-                        <m:t>𝑋</m:t>
-                      </m:r>
-                      <m:r>
-                        <a:rPr lang="en-US" sz="2400" b="0" i="1" smtClean="0">
-                          <a:latin typeface="Cambria Math" panose="02040503050406030204" pitchFamily="18" charset="0"/>
-                        </a:rPr>
-                        <m:t>={1, 3, 5, 5, 6, 7, 7, 8}</m:t>
-                      </m:r>
-                    </m:oMath>
-                  </m:oMathPara>
-                </a14:m>
-                <a:endParaRPr lang="en-US" sz="2400" dirty="0"/>
-              </a:p>
-              <a:p>
-                <a:endParaRPr lang="en-US" sz="2400" dirty="0"/>
-              </a:p>
-              <a:p>
-                <a:endParaRPr lang="en-US" sz="2400" dirty="0"/>
-              </a:p>
-              <a:p>
-                <a:endParaRPr lang="en-US" dirty="0"/>
-              </a:p>
-            </p:txBody>
-          </p:sp>
-        </mc:Choice>
-        <mc:Fallback xmlns="">
-          <p:sp>
-            <p:nvSpPr>
-              <p:cNvPr id="4" name="TextBox 3">
-                <a:extLst>
-                  <a:ext uri="{FF2B5EF4-FFF2-40B4-BE49-F238E27FC236}">
-                    <a16:creationId xmlns:a16="http://schemas.microsoft.com/office/drawing/2014/main" id="{3CB2C17F-8867-4F95-3EA4-C71E0B623A8C}"/>
-                  </a:ext>
-                </a:extLst>
-              </p:cNvPr>
-              <p:cNvSpPr txBox="1">
-                <a:spLocks noRot="1" noChangeAspect="1" noMove="1" noResize="1" noEditPoints="1" noAdjustHandles="1" noChangeArrowheads="1" noChangeShapeType="1" noTextEdit="1"/>
-              </p:cNvSpPr>
-              <p:nvPr/>
-            </p:nvSpPr>
-            <p:spPr>
-              <a:xfrm>
-                <a:off x="932873" y="1985818"/>
-                <a:ext cx="10797309" cy="1477328"/>
-              </a:xfrm>
-              <a:prstGeom prst="rect">
-                <a:avLst/>
-              </a:prstGeom>
-              <a:blipFill>
-                <a:blip r:embed="rId2"/>
-                <a:stretch>
-                  <a:fillRect l="-113"/>
-                </a:stretch>
-              </a:blipFill>
-            </p:spPr>
-            <p:txBody>
-              <a:bodyPr/>
-              <a:lstStyle/>
-              <a:p>
-                <a:r>
-                  <a:rPr lang="en-US">
-                    <a:noFill/>
-                  </a:rPr>
-                  <a:t> </a:t>
-                </a:r>
-              </a:p>
-            </p:txBody>
-          </p:sp>
-        </mc:Fallback>
-      </mc:AlternateContent>
-      <p:graphicFrame>
-        <p:nvGraphicFramePr>
-          <p:cNvPr id="5" name="Table 4">
+          <p:cNvPicPr>
+            <a:picLocks noChangeAspect="1"/>
+          </p:cNvPicPr>
+          <p:nvPr/>
+        </p:nvPicPr>
+        <p:blipFill>
+          <a:blip r:embed="rId2"/>
+          <a:stretch>
+            <a:fillRect/>
+          </a:stretch>
+        </p:blipFill>
+        <p:spPr>
+          <a:xfrm>
+            <a:off x="1070502" y="0"/>
+            <a:ext cx="10050996" cy="6858000"/>
+          </a:xfrm>
+          <a:prstGeom prst="rect">
+            <a:avLst/>
+          </a:prstGeom>
+        </p:spPr>
+      </p:pic>
+      <p:sp>
+        <p:nvSpPr>
+          <p:cNvPr id="2" name="Slide Number Placeholder 1">
             <a:extLst>
               <a:ext uri="{FF2B5EF4-FFF2-40B4-BE49-F238E27FC236}">
-                <a16:creationId xmlns:a16="http://schemas.microsoft.com/office/drawing/2014/main" id="{ABED149D-C46B-66BE-11B4-97A112E7553B}"/>
-              </a:ext>
-            </a:extLst>
-          </p:cNvPr>
-          <p:cNvGraphicFramePr>
-            <a:graphicFrameLocks noGrp="1"/>
-          </p:cNvGraphicFramePr>
-          <p:nvPr>
-            <p:extLst>
-              <p:ext uri="{D42A27DB-BD31-4B8C-83A1-F6EECF244321}">
-                <p14:modId xmlns:p14="http://schemas.microsoft.com/office/powerpoint/2010/main" val="3061566213"/>
-              </p:ext>
-            </p:extLst>
-          </p:nvPr>
-        </p:nvGraphicFramePr>
-        <p:xfrm>
-          <a:off x="7389092" y="1421340"/>
-          <a:ext cx="4341090" cy="3200400"/>
-        </p:xfrm>
-        <a:graphic>
-          <a:graphicData uri="http://schemas.openxmlformats.org/drawingml/2006/table">
-            <a:tbl>
-              <a:tblPr firstRow="1" bandRow="1">
-                <a:tableStyleId>{5C22544A-7EE6-4342-B048-85BDC9FD1C3A}</a:tableStyleId>
-              </a:tblPr>
-              <a:tblGrid>
-                <a:gridCol w="1447030">
-                  <a:extLst>
-                    <a:ext uri="{9D8B030D-6E8A-4147-A177-3AD203B41FA5}">
-                      <a16:colId xmlns:a16="http://schemas.microsoft.com/office/drawing/2014/main" val="2635967006"/>
-                    </a:ext>
-                  </a:extLst>
-                </a:gridCol>
-                <a:gridCol w="1447030">
-                  <a:extLst>
-                    <a:ext uri="{9D8B030D-6E8A-4147-A177-3AD203B41FA5}">
-                      <a16:colId xmlns:a16="http://schemas.microsoft.com/office/drawing/2014/main" val="3005329175"/>
-                    </a:ext>
-                  </a:extLst>
-                </a:gridCol>
-                <a:gridCol w="1447030">
-                  <a:extLst>
-                    <a:ext uri="{9D8B030D-6E8A-4147-A177-3AD203B41FA5}">
-                      <a16:colId xmlns:a16="http://schemas.microsoft.com/office/drawing/2014/main" val="1816929551"/>
-                    </a:ext>
-                  </a:extLst>
-                </a:gridCol>
-              </a:tblGrid>
-              <a:tr h="440858">
-                <a:tc>
-                  <a:txBody>
-                    <a:bodyPr/>
-                    <a:lstStyle/>
-                    <a:p>
-                      <a:pPr algn="ctr"/>
-                      <a:r>
-                        <a:rPr lang="en-US" sz="2400" dirty="0"/>
-                        <a:t>X</a:t>
-                      </a:r>
-                    </a:p>
-                  </a:txBody>
-                  <a:tcPr/>
-                </a:tc>
-                <a:tc>
-                  <a:txBody>
-                    <a:bodyPr/>
-                    <a:lstStyle/>
-                    <a:p>
-                      <a:pPr algn="ctr"/>
-                      <a:r>
-                        <a:rPr lang="en-US" sz="2400" dirty="0"/>
-                        <a:t>Freq.</a:t>
-                      </a:r>
-                    </a:p>
-                  </a:txBody>
-                  <a:tcPr/>
-                </a:tc>
-                <a:tc>
-                  <a:txBody>
-                    <a:bodyPr/>
-                    <a:lstStyle/>
-                    <a:p>
-                      <a:pPr algn="ctr"/>
-                      <a:r>
-                        <a:rPr lang="en-US" sz="2400" dirty="0"/>
-                        <a:t>Rel. Freq</a:t>
-                      </a:r>
-                    </a:p>
-                  </a:txBody>
-                  <a:tcPr/>
-                </a:tc>
-                <a:extLst>
-                  <a:ext uri="{0D108BD9-81ED-4DB2-BD59-A6C34878D82A}">
-                    <a16:rowId xmlns:a16="http://schemas.microsoft.com/office/drawing/2014/main" val="2359691844"/>
-                  </a:ext>
-                </a:extLst>
-              </a:tr>
-              <a:tr h="440858">
-                <a:tc>
-                  <a:txBody>
-                    <a:bodyPr/>
-                    <a:lstStyle/>
-                    <a:p>
-                      <a:pPr algn="ctr"/>
-                      <a:r>
-                        <a:rPr lang="en-US" sz="2400" dirty="0"/>
-                        <a:t>1</a:t>
-                      </a:r>
-                    </a:p>
-                  </a:txBody>
-                  <a:tcPr/>
-                </a:tc>
-                <a:tc>
-                  <a:txBody>
-                    <a:bodyPr/>
-                    <a:lstStyle/>
-                    <a:p>
-                      <a:pPr algn="ctr"/>
-                      <a:r>
-                        <a:rPr lang="en-US" sz="2400" dirty="0"/>
-                        <a:t>1</a:t>
-                      </a:r>
-                    </a:p>
-                  </a:txBody>
-                  <a:tcPr/>
-                </a:tc>
-                <a:tc>
-                  <a:txBody>
-                    <a:bodyPr/>
-                    <a:lstStyle/>
-                    <a:p>
-                      <a:pPr algn="ctr"/>
-                      <a:r>
-                        <a:rPr lang="en-US" sz="2400" dirty="0"/>
-                        <a:t>0.125</a:t>
-                      </a:r>
-                    </a:p>
-                  </a:txBody>
-                  <a:tcPr/>
-                </a:tc>
-                <a:extLst>
-                  <a:ext uri="{0D108BD9-81ED-4DB2-BD59-A6C34878D82A}">
-                    <a16:rowId xmlns:a16="http://schemas.microsoft.com/office/drawing/2014/main" val="792206646"/>
-                  </a:ext>
-                </a:extLst>
-              </a:tr>
-              <a:tr h="440858">
-                <a:tc>
-                  <a:txBody>
-                    <a:bodyPr/>
-                    <a:lstStyle/>
-                    <a:p>
-                      <a:pPr algn="ctr"/>
-                      <a:r>
-                        <a:rPr lang="en-US" sz="2400" dirty="0"/>
-                        <a:t>3</a:t>
-                      </a:r>
-                    </a:p>
-                  </a:txBody>
-                  <a:tcPr/>
-                </a:tc>
-                <a:tc>
-                  <a:txBody>
-                    <a:bodyPr/>
-                    <a:lstStyle/>
-                    <a:p>
-                      <a:pPr algn="ctr"/>
-                      <a:r>
-                        <a:rPr lang="en-US" sz="2400" dirty="0"/>
-                        <a:t>1</a:t>
-                      </a:r>
-                    </a:p>
-                  </a:txBody>
-                  <a:tcPr/>
-                </a:tc>
-                <a:tc>
-                  <a:txBody>
-                    <a:bodyPr/>
-                    <a:lstStyle/>
-                    <a:p>
-                      <a:pPr algn="ctr"/>
-                      <a:r>
-                        <a:rPr lang="en-US" sz="2400" dirty="0"/>
-                        <a:t>0.125</a:t>
-                      </a:r>
-                    </a:p>
-                  </a:txBody>
-                  <a:tcPr/>
-                </a:tc>
-                <a:extLst>
-                  <a:ext uri="{0D108BD9-81ED-4DB2-BD59-A6C34878D82A}">
-                    <a16:rowId xmlns:a16="http://schemas.microsoft.com/office/drawing/2014/main" val="1708416178"/>
-                  </a:ext>
-                </a:extLst>
-              </a:tr>
-              <a:tr h="440858">
-                <a:tc>
-                  <a:txBody>
-                    <a:bodyPr/>
-                    <a:lstStyle/>
-                    <a:p>
-                      <a:pPr algn="ctr"/>
-                      <a:r>
-                        <a:rPr lang="en-US" sz="2400" dirty="0"/>
-                        <a:t>5</a:t>
-                      </a:r>
-                    </a:p>
-                  </a:txBody>
-                  <a:tcPr/>
-                </a:tc>
-                <a:tc>
-                  <a:txBody>
-                    <a:bodyPr/>
-                    <a:lstStyle/>
-                    <a:p>
-                      <a:pPr algn="ctr"/>
-                      <a:r>
-                        <a:rPr lang="en-US" sz="2400" dirty="0"/>
-                        <a:t>2</a:t>
-                      </a:r>
-                    </a:p>
-                  </a:txBody>
-                  <a:tcPr/>
-                </a:tc>
-                <a:tc>
-                  <a:txBody>
-                    <a:bodyPr/>
-                    <a:lstStyle/>
-                    <a:p>
-                      <a:pPr algn="ctr"/>
-                      <a:r>
-                        <a:rPr lang="en-US" sz="2400" dirty="0"/>
-                        <a:t>0.250</a:t>
-                      </a:r>
-                    </a:p>
-                  </a:txBody>
-                  <a:tcPr/>
-                </a:tc>
-                <a:extLst>
-                  <a:ext uri="{0D108BD9-81ED-4DB2-BD59-A6C34878D82A}">
-                    <a16:rowId xmlns:a16="http://schemas.microsoft.com/office/drawing/2014/main" val="3979562944"/>
-                  </a:ext>
-                </a:extLst>
-              </a:tr>
-              <a:tr h="440858">
-                <a:tc>
-                  <a:txBody>
-                    <a:bodyPr/>
-                    <a:lstStyle/>
-                    <a:p>
-                      <a:pPr algn="ctr"/>
-                      <a:r>
-                        <a:rPr lang="en-US" sz="2400" dirty="0"/>
-                        <a:t>6</a:t>
-                      </a:r>
-                    </a:p>
-                  </a:txBody>
-                  <a:tcPr/>
-                </a:tc>
-                <a:tc>
-                  <a:txBody>
-                    <a:bodyPr/>
-                    <a:lstStyle/>
-                    <a:p>
-                      <a:pPr algn="ctr"/>
-                      <a:r>
-                        <a:rPr lang="en-US" sz="2400" dirty="0"/>
-                        <a:t>1</a:t>
-                      </a:r>
-                    </a:p>
-                  </a:txBody>
-                  <a:tcPr/>
-                </a:tc>
-                <a:tc>
-                  <a:txBody>
-                    <a:bodyPr/>
-                    <a:lstStyle/>
-                    <a:p>
-                      <a:pPr algn="ctr"/>
-                      <a:r>
-                        <a:rPr lang="en-US" sz="2400" dirty="0"/>
-                        <a:t>0.125</a:t>
-                      </a:r>
-                    </a:p>
-                  </a:txBody>
-                  <a:tcPr/>
-                </a:tc>
-                <a:extLst>
-                  <a:ext uri="{0D108BD9-81ED-4DB2-BD59-A6C34878D82A}">
-                    <a16:rowId xmlns:a16="http://schemas.microsoft.com/office/drawing/2014/main" val="2737024317"/>
-                  </a:ext>
-                </a:extLst>
-              </a:tr>
-              <a:tr h="440858">
-                <a:tc>
-                  <a:txBody>
-                    <a:bodyPr/>
-                    <a:lstStyle/>
-                    <a:p>
-                      <a:pPr algn="ctr"/>
-                      <a:r>
-                        <a:rPr lang="en-US" sz="2400" dirty="0"/>
-                        <a:t>7</a:t>
-                      </a:r>
-                    </a:p>
-                  </a:txBody>
-                  <a:tcPr/>
-                </a:tc>
-                <a:tc>
-                  <a:txBody>
-                    <a:bodyPr/>
-                    <a:lstStyle/>
-                    <a:p>
-                      <a:pPr algn="ctr"/>
-                      <a:r>
-                        <a:rPr lang="en-US" sz="2400" dirty="0"/>
-                        <a:t>2</a:t>
-                      </a:r>
-                    </a:p>
-                  </a:txBody>
-                  <a:tcPr/>
-                </a:tc>
-                <a:tc>
-                  <a:txBody>
-                    <a:bodyPr/>
-                    <a:lstStyle/>
-                    <a:p>
-                      <a:pPr algn="ctr"/>
-                      <a:r>
-                        <a:rPr lang="en-US" sz="2400" dirty="0"/>
-                        <a:t>0.250</a:t>
-                      </a:r>
-                    </a:p>
-                  </a:txBody>
-                  <a:tcPr/>
-                </a:tc>
-                <a:extLst>
-                  <a:ext uri="{0D108BD9-81ED-4DB2-BD59-A6C34878D82A}">
-                    <a16:rowId xmlns:a16="http://schemas.microsoft.com/office/drawing/2014/main" val="105989846"/>
-                  </a:ext>
-                </a:extLst>
-              </a:tr>
-              <a:tr h="440858">
-                <a:tc>
-                  <a:txBody>
-                    <a:bodyPr/>
-                    <a:lstStyle/>
-                    <a:p>
-                      <a:pPr algn="ctr"/>
-                      <a:r>
-                        <a:rPr lang="en-US" sz="2400" dirty="0"/>
-                        <a:t>8</a:t>
-                      </a:r>
-                    </a:p>
-                  </a:txBody>
-                  <a:tcPr/>
-                </a:tc>
-                <a:tc>
-                  <a:txBody>
-                    <a:bodyPr/>
-                    <a:lstStyle/>
-                    <a:p>
-                      <a:pPr algn="ctr"/>
-                      <a:r>
-                        <a:rPr lang="en-US" sz="2400" dirty="0"/>
-                        <a:t>1</a:t>
-                      </a:r>
-                    </a:p>
-                  </a:txBody>
-                  <a:tcPr/>
-                </a:tc>
-                <a:tc>
-                  <a:txBody>
-                    <a:bodyPr/>
-                    <a:lstStyle/>
-                    <a:p>
-                      <a:pPr algn="ctr"/>
-                      <a:r>
-                        <a:rPr lang="en-US" sz="2400" dirty="0"/>
-                        <a:t>0.125</a:t>
-                      </a:r>
-                    </a:p>
-                  </a:txBody>
-                  <a:tcPr/>
-                </a:tc>
-                <a:extLst>
-                  <a:ext uri="{0D108BD9-81ED-4DB2-BD59-A6C34878D82A}">
-                    <a16:rowId xmlns:a16="http://schemas.microsoft.com/office/drawing/2014/main" val="2567081470"/>
-                  </a:ext>
-                </a:extLst>
-              </a:tr>
-            </a:tbl>
-          </a:graphicData>
-        </a:graphic>
-      </p:graphicFrame>
-      <p:sp>
-        <p:nvSpPr>
-          <p:cNvPr id="6" name="Slide Number Placeholder 5">
-            <a:extLst>
-              <a:ext uri="{FF2B5EF4-FFF2-40B4-BE49-F238E27FC236}">
-                <a16:creationId xmlns:a16="http://schemas.microsoft.com/office/drawing/2014/main" id="{4C9DF847-83FC-90F1-8501-B24DDDA4CBAC}"/>
+                <a16:creationId xmlns:a16="http://schemas.microsoft.com/office/drawing/2014/main" id="{ADC702EB-D9FA-3EC0-6F36-A5777F16BEDB}"/>
               </a:ext>
             </a:extLst>
           </p:cNvPr>
@@ -4678,7 +4871,7 @@
     </p:spTree>
     <p:extLst>
       <p:ext uri="{BB962C8B-B14F-4D97-AF65-F5344CB8AC3E}">
-        <p14:creationId xmlns:p14="http://schemas.microsoft.com/office/powerpoint/2010/main" val="1737068264"/>
+        <p14:creationId xmlns:p14="http://schemas.microsoft.com/office/powerpoint/2010/main" val="813996772"/>
       </p:ext>
     </p:extLst>
   </p:cSld>
@@ -5608,10 +5801,10 @@
       </p:sp>
       <p:sp>
         <p:nvSpPr>
-          <p:cNvPr id="9" name="Slide Number Placeholder 8">
+          <p:cNvPr id="8" name="Slide Number Placeholder 7">
             <a:extLst>
               <a:ext uri="{FF2B5EF4-FFF2-40B4-BE49-F238E27FC236}">
-                <a16:creationId xmlns:a16="http://schemas.microsoft.com/office/drawing/2014/main" id="{B70A47C1-39EB-E009-2F78-4BA894C1EE96}"/>
+                <a16:creationId xmlns:a16="http://schemas.microsoft.com/office/drawing/2014/main" id="{F45BB9B5-AB93-ECDE-E73E-F393ED3E046B}"/>
               </a:ext>
             </a:extLst>
           </p:cNvPr>
@@ -5638,7 +5831,7 @@
     </p:spTree>
     <p:extLst>
       <p:ext uri="{BB962C8B-B14F-4D97-AF65-F5344CB8AC3E}">
-        <p14:creationId xmlns:p14="http://schemas.microsoft.com/office/powerpoint/2010/main" val="2465021212"/>
+        <p14:creationId xmlns:p14="http://schemas.microsoft.com/office/powerpoint/2010/main" val="2057956012"/>
       </p:ext>
     </p:extLst>
   </p:cSld>
@@ -5858,8 +6051,8 @@
         </p:nvSpPr>
         <p:spPr>
           <a:xfrm>
-            <a:off x="6363855" y="3030426"/>
-            <a:ext cx="5311262" cy="1938992"/>
+            <a:off x="6363855" y="1727200"/>
+            <a:ext cx="3819059" cy="1400383"/>
           </a:xfrm>
           <a:prstGeom prst="rect">
             <a:avLst/>
@@ -5890,7 +6083,7 @@
               <a:defRPr/>
             </a:pPr>
             <a:r>
-              <a:rPr kumimoji="0" lang="en-US" sz="2400" b="0" i="0" u="none" strike="noStrike" kern="1200" cap="none" spc="0" normalizeH="0" baseline="0" noProof="0" dirty="0">
+              <a:rPr kumimoji="0" lang="en-US" sz="1700" b="0" i="0" u="none" strike="noStrike" kern="1200" cap="none" spc="0" normalizeH="0" baseline="0" noProof="0" dirty="0">
                 <a:ln>
                   <a:noFill/>
                 </a:ln>
@@ -5907,7 +6100,7 @@
               <a:t>Compute the </a:t>
             </a:r>
             <a:r>
-              <a:rPr kumimoji="0" lang="en-US" sz="2400" b="1" i="0" u="none" strike="noStrike" kern="1200" cap="none" spc="0" normalizeH="0" baseline="0" noProof="0" dirty="0">
+              <a:rPr kumimoji="0" lang="en-US" sz="1700" b="1" i="0" u="none" strike="noStrike" kern="1200" cap="none" spc="0" normalizeH="0" baseline="0" noProof="0" dirty="0">
                 <a:ln>
                   <a:noFill/>
                 </a:ln>
@@ -5924,7 +6117,7 @@
               <a:t>mean</a:t>
             </a:r>
             <a:r>
-              <a:rPr kumimoji="0" lang="en-US" sz="2400" b="0" i="0" u="none" strike="noStrike" kern="1200" cap="none" spc="0" normalizeH="0" baseline="0" noProof="0" dirty="0">
+              <a:rPr kumimoji="0" lang="en-US" sz="1700" b="0" i="0" u="none" strike="noStrike" kern="1200" cap="none" spc="0" normalizeH="0" baseline="0" noProof="0" dirty="0">
                 <a:ln>
                   <a:noFill/>
                 </a:ln>
@@ -5959,7 +6152,7 @@
               <a:tabLst/>
               <a:defRPr/>
             </a:pPr>
-            <a:endParaRPr kumimoji="0" lang="en-US" sz="2400" b="0" i="0" u="none" strike="noStrike" kern="1200" cap="none" spc="0" normalizeH="0" baseline="0" noProof="0" dirty="0">
+            <a:endParaRPr kumimoji="0" lang="en-US" sz="1700" b="0" i="0" u="none" strike="noStrike" kern="1200" cap="none" spc="0" normalizeH="0" baseline="0" noProof="0" dirty="0">
               <a:ln>
                 <a:noFill/>
               </a:ln>
@@ -5993,7 +6186,7 @@
               <a:defRPr/>
             </a:pPr>
             <a:r>
-              <a:rPr kumimoji="0" lang="en-US" sz="2400" b="0" i="0" u="none" strike="noStrike" kern="1200" cap="none" spc="0" normalizeH="0" baseline="0" noProof="0" dirty="0">
+              <a:rPr kumimoji="0" lang="en-US" sz="1700" b="0" i="0" u="none" strike="noStrike" kern="1200" cap="none" spc="0" normalizeH="0" baseline="0" noProof="0" dirty="0">
                 <a:ln>
                   <a:noFill/>
                 </a:ln>
@@ -6010,7 +6203,7 @@
               <a:t>Compute the </a:t>
             </a:r>
             <a:r>
-              <a:rPr kumimoji="0" lang="en-US" sz="2400" b="1" i="0" u="none" strike="noStrike" kern="1200" cap="none" spc="0" normalizeH="0" baseline="0" noProof="0" dirty="0">
+              <a:rPr kumimoji="0" lang="en-US" sz="1700" b="1" i="0" u="none" strike="noStrike" kern="1200" cap="none" spc="0" normalizeH="0" baseline="0" noProof="0" dirty="0">
                 <a:ln>
                   <a:noFill/>
                 </a:ln>
@@ -6045,7 +6238,7 @@
               <a:tabLst/>
               <a:defRPr/>
             </a:pPr>
-            <a:endParaRPr kumimoji="0" lang="en-US" sz="2400" b="0" i="0" u="none" strike="noStrike" kern="1200" cap="none" spc="0" normalizeH="0" baseline="0" noProof="0" dirty="0">
+            <a:endParaRPr kumimoji="0" lang="en-US" sz="1700" b="0" i="0" u="none" strike="noStrike" kern="1200" cap="none" spc="0" normalizeH="0" baseline="0" noProof="0" dirty="0">
               <a:ln>
                 <a:noFill/>
               </a:ln>
@@ -6079,7 +6272,7 @@
               <a:defRPr/>
             </a:pPr>
             <a:r>
-              <a:rPr kumimoji="0" lang="en-US" sz="2400" b="0" i="0" u="none" strike="noStrike" kern="1200" cap="none" spc="0" normalizeH="0" baseline="0" noProof="0" dirty="0">
+              <a:rPr kumimoji="0" lang="en-US" sz="1700" b="0" i="0" u="none" strike="noStrike" kern="1200" cap="none" spc="0" normalizeH="0" baseline="0" noProof="0" dirty="0">
                 <a:ln>
                   <a:noFill/>
                 </a:ln>
@@ -6096,7 +6289,7 @@
               <a:t>Compute the </a:t>
             </a:r>
             <a:r>
-              <a:rPr kumimoji="0" lang="en-US" sz="2400" b="1" i="0" u="none" strike="noStrike" kern="1200" cap="none" spc="0" normalizeH="0" baseline="0" noProof="0" dirty="0">
+              <a:rPr kumimoji="0" lang="en-US" sz="1700" b="1" i="0" u="none" strike="noStrike" kern="1200" cap="none" spc="0" normalizeH="0" baseline="0" noProof="0" dirty="0">
                 <a:ln>
                   <a:noFill/>
                 </a:ln>
@@ -6117,10 +6310,296 @@
       </p:sp>
       <p:sp>
         <p:nvSpPr>
-          <p:cNvPr id="6" name="Slide Number Placeholder 5">
+          <p:cNvPr id="4" name="Rectangle: Rounded Corners 3">
             <a:extLst>
               <a:ext uri="{FF2B5EF4-FFF2-40B4-BE49-F238E27FC236}">
-                <a16:creationId xmlns:a16="http://schemas.microsoft.com/office/drawing/2014/main" id="{87CFF810-EEDF-F310-C43C-59596B4BD712}"/>
+                <a16:creationId xmlns:a16="http://schemas.microsoft.com/office/drawing/2014/main" id="{C3546ADF-01F7-0E71-707E-5406D1469A69}"/>
+              </a:ext>
+            </a:extLst>
+          </p:cNvPr>
+          <p:cNvSpPr/>
+          <p:nvPr/>
+        </p:nvSpPr>
+        <p:spPr>
+          <a:xfrm>
+            <a:off x="5969000" y="3124200"/>
+            <a:ext cx="5842000" cy="1092200"/>
+          </a:xfrm>
+          <a:prstGeom prst="roundRect">
+            <a:avLst>
+              <a:gd name="adj" fmla="val 4000"/>
+            </a:avLst>
+          </a:prstGeom>
+          <a:solidFill>
+            <a:srgbClr val="F2F6FC"/>
+          </a:solidFill>
+          <a:ln w="15875">
+            <a:solidFill>
+              <a:srgbClr val="4472C4"/>
+            </a:solidFill>
+          </a:ln>
+        </p:spPr>
+        <p:style>
+          <a:lnRef idx="2">
+            <a:schemeClr val="accent1">
+              <a:shade val="15000"/>
+            </a:schemeClr>
+          </a:lnRef>
+          <a:fillRef idx="1">
+            <a:schemeClr val="accent1"/>
+          </a:fillRef>
+          <a:effectRef idx="0">
+            <a:schemeClr val="accent1"/>
+          </a:effectRef>
+          <a:fontRef idx="minor">
+            <a:schemeClr val="lt1"/>
+          </a:fontRef>
+        </p:style>
+        <p:txBody>
+          <a:bodyPr wrap="square" lIns="101600" tIns="50800" rIns="101600" bIns="50800" rtlCol="0" anchor="ctr"/>
+          <a:lstStyle/>
+          <a:p>
+            <a:r>
+              <a:rPr lang="en-US" sz="1200" b="1">
+                <a:solidFill>
+                  <a:srgbClr val="000000"/>
+                </a:solidFill>
+              </a:rPr>
+              <a:t>Mean, three ways:</a:t>
+            </a:r>
+          </a:p>
+          <a:p>
+            <a:r>
+              <a:rPr lang="en-US" sz="1200">
+                <a:solidFill>
+                  <a:srgbClr val="000000"/>
+                </a:solidFill>
+              </a:rPr>
+              <a:t>  Σ x / n  =  38 / 10  </a:t>
+            </a:r>
+            <a:r>
+              <a:rPr lang="en-US" sz="1200" b="1">
+                <a:solidFill>
+                  <a:srgbClr val="C00000"/>
+                </a:solidFill>
+              </a:rPr>
+              <a:t>=  3.8</a:t>
+            </a:r>
+          </a:p>
+          <a:p>
+            <a:r>
+              <a:rPr lang="en-US" sz="1200">
+                <a:solidFill>
+                  <a:srgbClr val="000000"/>
+                </a:solidFill>
+              </a:rPr>
+              <a:t>  (1/n) Σ x· F(x)  =  (1· 1 + 2· 1 + 3· 2 + 4· 3 + 5· 1 + 6· 2) / 10  =  38 / 10  </a:t>
+            </a:r>
+            <a:r>
+              <a:rPr lang="en-US" sz="1200" b="1">
+                <a:solidFill>
+                  <a:srgbClr val="C00000"/>
+                </a:solidFill>
+              </a:rPr>
+              <a:t>=  3.8</a:t>
+            </a:r>
+          </a:p>
+          <a:p>
+            <a:r>
+              <a:rPr lang="en-US" sz="1200">
+                <a:solidFill>
+                  <a:srgbClr val="000000"/>
+                </a:solidFill>
+              </a:rPr>
+              <a:t>  Σ x· RF(x)  =  1(.1) + 2(.1) + 3(.2) + 4(.3) + 5(.1) + 6(.2)  </a:t>
+            </a:r>
+            <a:r>
+              <a:rPr lang="en-US" sz="1200" b="1">
+                <a:solidFill>
+                  <a:srgbClr val="C00000"/>
+                </a:solidFill>
+              </a:rPr>
+              <a:t>=  3.8</a:t>
+            </a:r>
+          </a:p>
+        </p:txBody>
+      </p:sp>
+      <p:sp>
+        <p:nvSpPr>
+          <p:cNvPr id="6" name="Rectangle: Rounded Corners 5">
+            <a:extLst>
+              <a:ext uri="{FF2B5EF4-FFF2-40B4-BE49-F238E27FC236}">
+                <a16:creationId xmlns:a16="http://schemas.microsoft.com/office/drawing/2014/main" id="{6B815928-7CFA-DF09-CA97-C0E1C809997B}"/>
+              </a:ext>
+            </a:extLst>
+          </p:cNvPr>
+          <p:cNvSpPr/>
+          <p:nvPr/>
+        </p:nvSpPr>
+        <p:spPr>
+          <a:xfrm>
+            <a:off x="5969000" y="4318000"/>
+            <a:ext cx="5842000" cy="787400"/>
+          </a:xfrm>
+          <a:prstGeom prst="roundRect">
+            <a:avLst>
+              <a:gd name="adj" fmla="val 4000"/>
+            </a:avLst>
+          </a:prstGeom>
+          <a:solidFill>
+            <a:srgbClr val="F2F6FC"/>
+          </a:solidFill>
+          <a:ln w="15875">
+            <a:solidFill>
+              <a:srgbClr val="4472C4"/>
+            </a:solidFill>
+          </a:ln>
+        </p:spPr>
+        <p:style>
+          <a:lnRef idx="2">
+            <a:schemeClr val="accent1">
+              <a:shade val="15000"/>
+            </a:schemeClr>
+          </a:lnRef>
+          <a:fillRef idx="1">
+            <a:schemeClr val="accent1"/>
+          </a:fillRef>
+          <a:effectRef idx="0">
+            <a:schemeClr val="accent1"/>
+          </a:effectRef>
+          <a:fontRef idx="minor">
+            <a:schemeClr val="lt1"/>
+          </a:fontRef>
+        </p:style>
+        <p:txBody>
+          <a:bodyPr wrap="square" lIns="101600" tIns="50800" rIns="101600" bIns="50800" rtlCol="0" anchor="ctr"/>
+          <a:lstStyle/>
+          <a:p>
+            <a:r>
+              <a:rPr lang="en-US" sz="1200" b="1">
+                <a:solidFill>
+                  <a:srgbClr val="000000"/>
+                </a:solidFill>
+              </a:rPr>
+              <a:t>Median:</a:t>
+            </a:r>
+          </a:p>
+          <a:p>
+            <a:r>
+              <a:rPr lang="en-US" sz="1200">
+                <a:solidFill>
+                  <a:srgbClr val="000000"/>
+                </a:solidFill>
+              </a:rPr>
+              <a:t>  ordered  1 2 3 3 4 4 4 5 6 6</a:t>
+            </a:r>
+          </a:p>
+          <a:p>
+            <a:r>
+              <a:rPr lang="en-US" sz="1200">
+                <a:solidFill>
+                  <a:srgbClr val="000000"/>
+                </a:solidFill>
+              </a:rPr>
+              <a:t>  n is even, so median = (4 + 4) / 2 </a:t>
+            </a:r>
+            <a:r>
+              <a:rPr lang="en-US" sz="1200" b="1">
+                <a:solidFill>
+                  <a:srgbClr val="C00000"/>
+                </a:solidFill>
+              </a:rPr>
+              <a:t>= 4</a:t>
+            </a:r>
+          </a:p>
+        </p:txBody>
+      </p:sp>
+      <p:sp>
+        <p:nvSpPr>
+          <p:cNvPr id="7" name="Rectangle: Rounded Corners 6">
+            <a:extLst>
+              <a:ext uri="{FF2B5EF4-FFF2-40B4-BE49-F238E27FC236}">
+                <a16:creationId xmlns:a16="http://schemas.microsoft.com/office/drawing/2014/main" id="{0880D6D6-B247-FA77-3261-C48E045D928F}"/>
+              </a:ext>
+            </a:extLst>
+          </p:cNvPr>
+          <p:cNvSpPr/>
+          <p:nvPr/>
+        </p:nvSpPr>
+        <p:spPr>
+          <a:xfrm>
+            <a:off x="5969000" y="5207000"/>
+            <a:ext cx="5842000" cy="685800"/>
+          </a:xfrm>
+          <a:prstGeom prst="roundRect">
+            <a:avLst>
+              <a:gd name="adj" fmla="val 4000"/>
+            </a:avLst>
+          </a:prstGeom>
+          <a:solidFill>
+            <a:srgbClr val="F2F6FC"/>
+          </a:solidFill>
+          <a:ln w="15875">
+            <a:solidFill>
+              <a:srgbClr val="4472C4"/>
+            </a:solidFill>
+          </a:ln>
+        </p:spPr>
+        <p:style>
+          <a:lnRef idx="2">
+            <a:schemeClr val="accent1">
+              <a:shade val="15000"/>
+            </a:schemeClr>
+          </a:lnRef>
+          <a:fillRef idx="1">
+            <a:schemeClr val="accent1"/>
+          </a:fillRef>
+          <a:effectRef idx="0">
+            <a:schemeClr val="accent1"/>
+          </a:effectRef>
+          <a:fontRef idx="minor">
+            <a:schemeClr val="lt1"/>
+          </a:fontRef>
+        </p:style>
+        <p:txBody>
+          <a:bodyPr wrap="square" lIns="101600" tIns="50800" rIns="101600" bIns="50800" rtlCol="0" anchor="ctr"/>
+          <a:lstStyle/>
+          <a:p>
+            <a:r>
+              <a:rPr lang="en-US" sz="1200" b="1">
+                <a:solidFill>
+                  <a:srgbClr val="000000"/>
+                </a:solidFill>
+              </a:rPr>
+              <a:t>Mode:</a:t>
+            </a:r>
+          </a:p>
+          <a:p>
+            <a:r>
+              <a:rPr lang="en-US" sz="1200">
+                <a:solidFill>
+                  <a:srgbClr val="000000"/>
+                </a:solidFill>
+              </a:rPr>
+              <a:t>  4 appears three times, more than any other value → mode </a:t>
+            </a:r>
+            <a:r>
+              <a:rPr lang="en-US" sz="1200" b="1">
+                <a:solidFill>
+                  <a:srgbClr val="C00000"/>
+                </a:solidFill>
+              </a:rPr>
+              <a:t>= 4</a:t>
+            </a:r>
+          </a:p>
+        </p:txBody>
+      </p:sp>
+      <p:sp>
+        <p:nvSpPr>
+          <p:cNvPr id="9" name="Slide Number Placeholder 8">
+            <a:extLst>
+              <a:ext uri="{FF2B5EF4-FFF2-40B4-BE49-F238E27FC236}">
+                <a16:creationId xmlns:a16="http://schemas.microsoft.com/office/drawing/2014/main" id="{748BBFC0-967C-6B69-0AAD-0B17C6D04D00}"/>
               </a:ext>
             </a:extLst>
           </p:cNvPr>
@@ -6147,13 +6626,360 @@
     </p:spTree>
     <p:extLst>
       <p:ext uri="{BB962C8B-B14F-4D97-AF65-F5344CB8AC3E}">
-        <p14:creationId xmlns:p14="http://schemas.microsoft.com/office/powerpoint/2010/main" val="2075252588"/>
+        <p14:creationId xmlns:p14="http://schemas.microsoft.com/office/powerpoint/2010/main" val="3871000626"/>
       </p:ext>
     </p:extLst>
   </p:cSld>
   <p:clrMapOvr>
     <a:masterClrMapping/>
   </p:clrMapOvr>
+  <p:timing>
+    <p:tnLst>
+      <p:par>
+        <p:cTn id="1" dur="indefinite" restart="never" nodeType="tmRoot">
+          <p:childTnLst>
+            <p:seq concurrent="1" nextAc="seek">
+              <p:cTn id="2" dur="indefinite" nodeType="mainSeq">
+                <p:childTnLst>
+                  <p:par>
+                    <p:cTn id="3" fill="hold">
+                      <p:stCondLst>
+                        <p:cond delay="indefinite"/>
+                      </p:stCondLst>
+                      <p:childTnLst>
+                        <p:par>
+                          <p:cTn id="4" fill="hold">
+                            <p:stCondLst>
+                              <p:cond delay="0"/>
+                            </p:stCondLst>
+                            <p:childTnLst>
+                              <p:par>
+                                <p:cTn id="5" presetID="34" presetClass="entr" presetSubtype="0" fill="hold" grpId="0" nodeType="clickEffect">
+                                  <p:stCondLst>
+                                    <p:cond delay="0"/>
+                                  </p:stCondLst>
+                                  <p:childTnLst>
+                                    <p:set>
+                                      <p:cBhvr>
+                                        <p:cTn id="6" dur="1" fill="hold">
+                                          <p:stCondLst>
+                                            <p:cond delay="0"/>
+                                          </p:stCondLst>
+                                        </p:cTn>
+                                        <p:tgtEl>
+                                          <p:spTgt spid="4"/>
+                                        </p:tgtEl>
+                                        <p:attrNameLst>
+                                          <p:attrName>style.visibility</p:attrName>
+                                        </p:attrNameLst>
+                                      </p:cBhvr>
+                                      <p:to>
+                                        <p:strVal val="visible"/>
+                                      </p:to>
+                                    </p:set>
+                                    <p:anim from="(-#ppt_w/2)" to="(#ppt_x)" calcmode="lin" valueType="num">
+                                      <p:cBhvr>
+                                        <p:cTn id="7" dur="600" fill="hold">
+                                          <p:stCondLst>
+                                            <p:cond delay="0"/>
+                                          </p:stCondLst>
+                                        </p:cTn>
+                                        <p:tgtEl>
+                                          <p:spTgt spid="4"/>
+                                        </p:tgtEl>
+                                        <p:attrNameLst>
+                                          <p:attrName>ppt_x</p:attrName>
+                                        </p:attrNameLst>
+                                      </p:cBhvr>
+                                    </p:anim>
+                                    <p:anim from="0" to="-1.0" calcmode="lin" valueType="num">
+                                      <p:cBhvr>
+                                        <p:cTn id="8" dur="200" decel="50000" autoRev="1" fill="hold">
+                                          <p:stCondLst>
+                                            <p:cond delay="600"/>
+                                          </p:stCondLst>
+                                        </p:cTn>
+                                        <p:tgtEl>
+                                          <p:spTgt spid="4"/>
+                                        </p:tgtEl>
+                                        <p:attrNameLst>
+                                          <p:attrName>xshear</p:attrName>
+                                        </p:attrNameLst>
+                                      </p:cBhvr>
+                                    </p:anim>
+                                    <p:animScale>
+                                      <p:cBhvr>
+                                        <p:cTn id="9" dur="200" decel="100000" autoRev="1" fill="hold">
+                                          <p:stCondLst>
+                                            <p:cond delay="600"/>
+                                          </p:stCondLst>
+                                        </p:cTn>
+                                        <p:tgtEl>
+                                          <p:spTgt spid="4"/>
+                                        </p:tgtEl>
+                                      </p:cBhvr>
+                                      <p:from x="100000" y="100000"/>
+                                      <p:to x="80000" y="100000"/>
+                                    </p:animScale>
+                                    <p:anim by="(#ppt_h/3+#ppt_w*0.1)" calcmode="lin" valueType="num">
+                                      <p:cBhvr additive="sum">
+                                        <p:cTn id="10" dur="200" decel="100000" autoRev="1" fill="hold">
+                                          <p:stCondLst>
+                                            <p:cond delay="600"/>
+                                          </p:stCondLst>
+                                        </p:cTn>
+                                        <p:tgtEl>
+                                          <p:spTgt spid="4"/>
+                                        </p:tgtEl>
+                                        <p:attrNameLst>
+                                          <p:attrName>ppt_x</p:attrName>
+                                        </p:attrNameLst>
+                                      </p:cBhvr>
+                                    </p:anim>
+                                  </p:childTnLst>
+                                </p:cTn>
+                              </p:par>
+                            </p:childTnLst>
+                          </p:cTn>
+                        </p:par>
+                      </p:childTnLst>
+                    </p:cTn>
+                  </p:par>
+                  <p:par>
+                    <p:cTn id="11" fill="hold">
+                      <p:stCondLst>
+                        <p:cond delay="indefinite"/>
+                      </p:stCondLst>
+                      <p:childTnLst>
+                        <p:par>
+                          <p:cTn id="12" fill="hold">
+                            <p:stCondLst>
+                              <p:cond delay="0"/>
+                            </p:stCondLst>
+                            <p:childTnLst>
+                              <p:par>
+                                <p:cTn id="13" presetID="34" presetClass="entr" presetSubtype="0" fill="hold" grpId="0" nodeType="clickEffect">
+                                  <p:stCondLst>
+                                    <p:cond delay="0"/>
+                                  </p:stCondLst>
+                                  <p:childTnLst>
+                                    <p:set>
+                                      <p:cBhvr>
+                                        <p:cTn id="14" dur="1" fill="hold">
+                                          <p:stCondLst>
+                                            <p:cond delay="0"/>
+                                          </p:stCondLst>
+                                        </p:cTn>
+                                        <p:tgtEl>
+                                          <p:spTgt spid="6"/>
+                                        </p:tgtEl>
+                                        <p:attrNameLst>
+                                          <p:attrName>style.visibility</p:attrName>
+                                        </p:attrNameLst>
+                                      </p:cBhvr>
+                                      <p:to>
+                                        <p:strVal val="visible"/>
+                                      </p:to>
+                                    </p:set>
+                                    <p:anim from="(-#ppt_w/2)" to="(#ppt_x)" calcmode="lin" valueType="num">
+                                      <p:cBhvr>
+                                        <p:cTn id="15" dur="600" fill="hold">
+                                          <p:stCondLst>
+                                            <p:cond delay="0"/>
+                                          </p:stCondLst>
+                                        </p:cTn>
+                                        <p:tgtEl>
+                                          <p:spTgt spid="6"/>
+                                        </p:tgtEl>
+                                        <p:attrNameLst>
+                                          <p:attrName>ppt_x</p:attrName>
+                                        </p:attrNameLst>
+                                      </p:cBhvr>
+                                    </p:anim>
+                                    <p:anim from="0" to="-1.0" calcmode="lin" valueType="num">
+                                      <p:cBhvr>
+                                        <p:cTn id="16" dur="200" decel="50000" autoRev="1" fill="hold">
+                                          <p:stCondLst>
+                                            <p:cond delay="600"/>
+                                          </p:stCondLst>
+                                        </p:cTn>
+                                        <p:tgtEl>
+                                          <p:spTgt spid="6"/>
+                                        </p:tgtEl>
+                                        <p:attrNameLst>
+                                          <p:attrName>xshear</p:attrName>
+                                        </p:attrNameLst>
+                                      </p:cBhvr>
+                                    </p:anim>
+                                    <p:animScale>
+                                      <p:cBhvr>
+                                        <p:cTn id="17" dur="200" decel="100000" autoRev="1" fill="hold">
+                                          <p:stCondLst>
+                                            <p:cond delay="600"/>
+                                          </p:stCondLst>
+                                        </p:cTn>
+                                        <p:tgtEl>
+                                          <p:spTgt spid="6"/>
+                                        </p:tgtEl>
+                                      </p:cBhvr>
+                                      <p:from x="100000" y="100000"/>
+                                      <p:to x="80000" y="100000"/>
+                                    </p:animScale>
+                                    <p:anim by="(#ppt_h/3+#ppt_w*0.1)" calcmode="lin" valueType="num">
+                                      <p:cBhvr additive="sum">
+                                        <p:cTn id="18" dur="200" decel="100000" autoRev="1" fill="hold">
+                                          <p:stCondLst>
+                                            <p:cond delay="600"/>
+                                          </p:stCondLst>
+                                        </p:cTn>
+                                        <p:tgtEl>
+                                          <p:spTgt spid="6"/>
+                                        </p:tgtEl>
+                                        <p:attrNameLst>
+                                          <p:attrName>ppt_x</p:attrName>
+                                        </p:attrNameLst>
+                                      </p:cBhvr>
+                                    </p:anim>
+                                  </p:childTnLst>
+                                </p:cTn>
+                              </p:par>
+                            </p:childTnLst>
+                          </p:cTn>
+                        </p:par>
+                      </p:childTnLst>
+                    </p:cTn>
+                  </p:par>
+                  <p:par>
+                    <p:cTn id="19" fill="hold">
+                      <p:stCondLst>
+                        <p:cond delay="indefinite"/>
+                      </p:stCondLst>
+                      <p:childTnLst>
+                        <p:par>
+                          <p:cTn id="20" fill="hold">
+                            <p:stCondLst>
+                              <p:cond delay="0"/>
+                            </p:stCondLst>
+                            <p:childTnLst>
+                              <p:par>
+                                <p:cTn id="21" presetID="34" presetClass="entr" presetSubtype="0" fill="hold" grpId="0" nodeType="clickEffect">
+                                  <p:stCondLst>
+                                    <p:cond delay="0"/>
+                                  </p:stCondLst>
+                                  <p:childTnLst>
+                                    <p:set>
+                                      <p:cBhvr>
+                                        <p:cTn id="22" dur="1" fill="hold">
+                                          <p:stCondLst>
+                                            <p:cond delay="0"/>
+                                          </p:stCondLst>
+                                        </p:cTn>
+                                        <p:tgtEl>
+                                          <p:spTgt spid="7"/>
+                                        </p:tgtEl>
+                                        <p:attrNameLst>
+                                          <p:attrName>style.visibility</p:attrName>
+                                        </p:attrNameLst>
+                                      </p:cBhvr>
+                                      <p:to>
+                                        <p:strVal val="visible"/>
+                                      </p:to>
+                                    </p:set>
+                                    <p:anim from="(-#ppt_w/2)" to="(#ppt_x)" calcmode="lin" valueType="num">
+                                      <p:cBhvr>
+                                        <p:cTn id="23" dur="600" fill="hold">
+                                          <p:stCondLst>
+                                            <p:cond delay="0"/>
+                                          </p:stCondLst>
+                                        </p:cTn>
+                                        <p:tgtEl>
+                                          <p:spTgt spid="7"/>
+                                        </p:tgtEl>
+                                        <p:attrNameLst>
+                                          <p:attrName>ppt_x</p:attrName>
+                                        </p:attrNameLst>
+                                      </p:cBhvr>
+                                    </p:anim>
+                                    <p:anim from="0" to="-1.0" calcmode="lin" valueType="num">
+                                      <p:cBhvr>
+                                        <p:cTn id="24" dur="200" decel="50000" autoRev="1" fill="hold">
+                                          <p:stCondLst>
+                                            <p:cond delay="600"/>
+                                          </p:stCondLst>
+                                        </p:cTn>
+                                        <p:tgtEl>
+                                          <p:spTgt spid="7"/>
+                                        </p:tgtEl>
+                                        <p:attrNameLst>
+                                          <p:attrName>xshear</p:attrName>
+                                        </p:attrNameLst>
+                                      </p:cBhvr>
+                                    </p:anim>
+                                    <p:animScale>
+                                      <p:cBhvr>
+                                        <p:cTn id="25" dur="200" decel="100000" autoRev="1" fill="hold">
+                                          <p:stCondLst>
+                                            <p:cond delay="600"/>
+                                          </p:stCondLst>
+                                        </p:cTn>
+                                        <p:tgtEl>
+                                          <p:spTgt spid="7"/>
+                                        </p:tgtEl>
+                                      </p:cBhvr>
+                                      <p:from x="100000" y="100000"/>
+                                      <p:to x="80000" y="100000"/>
+                                    </p:animScale>
+                                    <p:anim by="(#ppt_h/3+#ppt_w*0.1)" calcmode="lin" valueType="num">
+                                      <p:cBhvr additive="sum">
+                                        <p:cTn id="26" dur="200" decel="100000" autoRev="1" fill="hold">
+                                          <p:stCondLst>
+                                            <p:cond delay="600"/>
+                                          </p:stCondLst>
+                                        </p:cTn>
+                                        <p:tgtEl>
+                                          <p:spTgt spid="7"/>
+                                        </p:tgtEl>
+                                        <p:attrNameLst>
+                                          <p:attrName>ppt_x</p:attrName>
+                                        </p:attrNameLst>
+                                      </p:cBhvr>
+                                    </p:anim>
+                                  </p:childTnLst>
+                                </p:cTn>
+                              </p:par>
+                            </p:childTnLst>
+                          </p:cTn>
+                        </p:par>
+                      </p:childTnLst>
+                    </p:cTn>
+                  </p:par>
+                </p:childTnLst>
+              </p:cTn>
+              <p:prevCondLst>
+                <p:cond evt="onPrev" delay="0">
+                  <p:tgtEl>
+                    <p:sldTgt/>
+                  </p:tgtEl>
+                </p:cond>
+              </p:prevCondLst>
+              <p:nextCondLst>
+                <p:cond evt="onNext" delay="0">
+                  <p:tgtEl>
+                    <p:sldTgt/>
+                  </p:tgtEl>
+                </p:cond>
+              </p:nextCondLst>
+            </p:seq>
+          </p:childTnLst>
+        </p:cTn>
+      </p:par>
+    </p:tnLst>
+    <p:bldLst>
+      <p:bldP spid="4" grpId="0" animBg="1"/>
+      <p:bldP spid="6" grpId="0" animBg="1"/>
+      <p:bldP spid="7" grpId="0" animBg="1"/>
+    </p:bldLst>
+  </p:timing>
 </p:sld>
 </file>
 
@@ -6179,7 +7005,7 @@
           <p:cNvPr id="6" name="Body card">
             <a:extLst>
               <a:ext uri="{FF2B5EF4-FFF2-40B4-BE49-F238E27FC236}">
-                <a16:creationId xmlns:a16="http://schemas.microsoft.com/office/drawing/2014/main" id="{BFDC15B0-F248-059B-2E64-BAD285BCB86B}"/>
+                <a16:creationId xmlns:a16="http://schemas.microsoft.com/office/drawing/2014/main" id="{6F4D945F-8F81-A95F-3508-B8EFF7877FFB}"/>
               </a:ext>
             </a:extLst>
           </p:cNvPr>
@@ -6262,8 +7088,8 @@
           </a:p>
         </p:txBody>
       </p:sp>
-      <mc:AlternateContent xmlns:mc="http://schemas.openxmlformats.org/markup-compatibility/2006" xmlns:a14="http://schemas.microsoft.com/office/drawing/2010/main">
-        <mc:Choice Requires="a14">
+      <mc:AlternateContent xmlns:mc="http://schemas.openxmlformats.org/markup-compatibility/2006">
+        <mc:Choice xmlns:a14="http://schemas.microsoft.com/office/drawing/2010/main" Requires="a14">
           <p:sp>
             <p:nvSpPr>
               <p:cNvPr id="3" name="Content Placeholder 2">
@@ -6508,7 +7334,7 @@
             </p:txBody>
           </p:sp>
         </mc:Choice>
-        <mc:Fallback xmlns="">
+        <mc:Fallback>
           <p:sp>
             <p:nvSpPr>
               <p:cNvPr id="3" name="Content Placeholder 2">
@@ -6550,10 +7376,39 @@
       </mc:AlternateContent>
       <p:sp>
         <p:nvSpPr>
+          <p:cNvPr id="4" name="Slide Number Placeholder 3">
+            <a:extLst>
+              <a:ext uri="{FF2B5EF4-FFF2-40B4-BE49-F238E27FC236}">
+                <a16:creationId xmlns:a16="http://schemas.microsoft.com/office/drawing/2014/main" id="{B60ECAA3-E93A-3D18-874C-B151D88A2496}"/>
+              </a:ext>
+            </a:extLst>
+          </p:cNvPr>
+          <p:cNvSpPr>
+            <a:spLocks noGrp="1"/>
+          </p:cNvSpPr>
+          <p:nvPr>
+            <p:ph type="sldNum" sz="quarter" idx="12"/>
+          </p:nvPr>
+        </p:nvSpPr>
+        <p:spPr/>
+        <p:txBody>
+          <a:bodyPr/>
+          <a:lstStyle/>
+          <a:p>
+            <a:fld id="{A80A81DD-F10A-4B1C-963A-0ABBB4865886}" type="slidenum">
+              <a:rPr lang="en-US" smtClean="0"/>
+              <a:t>15</a:t>
+            </a:fld>
+            <a:endParaRPr lang="en-US"/>
+          </a:p>
+        </p:txBody>
+      </p:sp>
+      <p:sp>
+        <p:nvSpPr>
           <p:cNvPr id="5" name="Title rule">
             <a:extLst>
               <a:ext uri="{FF2B5EF4-FFF2-40B4-BE49-F238E27FC236}">
-                <a16:creationId xmlns:a16="http://schemas.microsoft.com/office/drawing/2014/main" id="{99ADE643-B8DE-21EE-2CB0-00E87D4D3FB5}"/>
+                <a16:creationId xmlns:a16="http://schemas.microsoft.com/office/drawing/2014/main" id="{15DB3FE6-2408-CD98-4899-B108AB01C198}"/>
               </a:ext>
             </a:extLst>
           </p:cNvPr>
@@ -6616,39 +7471,10 @@
           </a:p>
         </p:txBody>
       </p:sp>
-      <p:sp>
-        <p:nvSpPr>
-          <p:cNvPr id="7" name="Slide Number Placeholder 6">
-            <a:extLst>
-              <a:ext uri="{FF2B5EF4-FFF2-40B4-BE49-F238E27FC236}">
-                <a16:creationId xmlns:a16="http://schemas.microsoft.com/office/drawing/2014/main" id="{6F221052-B2D1-3D1F-497A-439609BAF4B3}"/>
-              </a:ext>
-            </a:extLst>
-          </p:cNvPr>
-          <p:cNvSpPr>
-            <a:spLocks noGrp="1"/>
-          </p:cNvSpPr>
-          <p:nvPr>
-            <p:ph type="sldNum" sz="quarter" idx="12"/>
-          </p:nvPr>
-        </p:nvSpPr>
-        <p:spPr/>
-        <p:txBody>
-          <a:bodyPr/>
-          <a:lstStyle/>
-          <a:p>
-            <a:fld id="{A80A81DD-F10A-4B1C-963A-0ABBB4865886}" type="slidenum">
-              <a:rPr lang="en-US" smtClean="0"/>
-              <a:t>15</a:t>
-            </a:fld>
-            <a:endParaRPr lang="en-US"/>
-          </a:p>
-        </p:txBody>
-      </p:sp>
     </p:spTree>
     <p:extLst>
       <p:ext uri="{BB962C8B-B14F-4D97-AF65-F5344CB8AC3E}">
-        <p14:creationId xmlns:p14="http://schemas.microsoft.com/office/powerpoint/2010/main" val="3043135837"/>
+        <p14:creationId xmlns:p14="http://schemas.microsoft.com/office/powerpoint/2010/main" val="718087012"/>
       </p:ext>
     </p:extLst>
   </p:cSld>
@@ -7266,10 +8092,10 @@
       </p:sp>
       <p:sp>
         <p:nvSpPr>
-          <p:cNvPr id="4" name="Slide Number Placeholder 3">
+          <p:cNvPr id="3" name="Slide Number Placeholder 2">
             <a:extLst>
               <a:ext uri="{FF2B5EF4-FFF2-40B4-BE49-F238E27FC236}">
-                <a16:creationId xmlns:a16="http://schemas.microsoft.com/office/drawing/2014/main" id="{CE036EB1-EA38-3E8B-8F75-65322786C3DF}"/>
+                <a16:creationId xmlns:a16="http://schemas.microsoft.com/office/drawing/2014/main" id="{5BFFF40A-6FCE-6C5F-98F1-8FA729ABC56C}"/>
               </a:ext>
             </a:extLst>
           </p:cNvPr>
@@ -7296,7 +8122,7 @@
     </p:spTree>
     <p:extLst>
       <p:ext uri="{BB962C8B-B14F-4D97-AF65-F5344CB8AC3E}">
-        <p14:creationId xmlns:p14="http://schemas.microsoft.com/office/powerpoint/2010/main" val="1339374432"/>
+        <p14:creationId xmlns:p14="http://schemas.microsoft.com/office/powerpoint/2010/main" val="298368178"/>
       </p:ext>
     </p:extLst>
   </p:cSld>
@@ -7328,7 +8154,7 @@
           <p:cNvPr id="6" name="Body card">
             <a:extLst>
               <a:ext uri="{FF2B5EF4-FFF2-40B4-BE49-F238E27FC236}">
-                <a16:creationId xmlns:a16="http://schemas.microsoft.com/office/drawing/2014/main" id="{71ABEA1F-4E8C-BA6B-A550-FEB9A48B8922}"/>
+                <a16:creationId xmlns:a16="http://schemas.microsoft.com/office/drawing/2014/main" id="{3B6E6B2B-5E08-F821-6300-CFB9707ED027}"/>
               </a:ext>
             </a:extLst>
           </p:cNvPr>
@@ -7416,8 +8242,8 @@
           </a:p>
         </p:txBody>
       </p:sp>
-      <mc:AlternateContent xmlns:mc="http://schemas.openxmlformats.org/markup-compatibility/2006" xmlns:a14="http://schemas.microsoft.com/office/drawing/2010/main">
-        <mc:Choice Requires="a14">
+      <mc:AlternateContent xmlns:mc="http://schemas.openxmlformats.org/markup-compatibility/2006">
+        <mc:Choice xmlns:a14="http://schemas.microsoft.com/office/drawing/2010/main" Requires="a14">
           <p:sp>
             <p:nvSpPr>
               <p:cNvPr id="3" name="Content Placeholder 2">
@@ -7602,7 +8428,7 @@
             </p:txBody>
           </p:sp>
         </mc:Choice>
-        <mc:Fallback xmlns="">
+        <mc:Fallback>
           <p:sp>
             <p:nvSpPr>
               <p:cNvPr id="3" name="Content Placeholder 2">
@@ -7644,10 +8470,39 @@
       </mc:AlternateContent>
       <p:sp>
         <p:nvSpPr>
+          <p:cNvPr id="4" name="Slide Number Placeholder 3">
+            <a:extLst>
+              <a:ext uri="{FF2B5EF4-FFF2-40B4-BE49-F238E27FC236}">
+                <a16:creationId xmlns:a16="http://schemas.microsoft.com/office/drawing/2014/main" id="{11E24CD5-EE78-FCBA-7520-EFD37A81FD15}"/>
+              </a:ext>
+            </a:extLst>
+          </p:cNvPr>
+          <p:cNvSpPr>
+            <a:spLocks noGrp="1"/>
+          </p:cNvSpPr>
+          <p:nvPr>
+            <p:ph type="sldNum" sz="quarter" idx="12"/>
+          </p:nvPr>
+        </p:nvSpPr>
+        <p:spPr/>
+        <p:txBody>
+          <a:bodyPr/>
+          <a:lstStyle/>
+          <a:p>
+            <a:fld id="{A80A81DD-F10A-4B1C-963A-0ABBB4865886}" type="slidenum">
+              <a:rPr lang="en-US" smtClean="0"/>
+              <a:t>17</a:t>
+            </a:fld>
+            <a:endParaRPr lang="en-US"/>
+          </a:p>
+        </p:txBody>
+      </p:sp>
+      <p:sp>
+        <p:nvSpPr>
           <p:cNvPr id="5" name="Title rule">
             <a:extLst>
               <a:ext uri="{FF2B5EF4-FFF2-40B4-BE49-F238E27FC236}">
-                <a16:creationId xmlns:a16="http://schemas.microsoft.com/office/drawing/2014/main" id="{ACC5E83D-BF76-1F6C-5444-AAF5B79079EA}"/>
+                <a16:creationId xmlns:a16="http://schemas.microsoft.com/office/drawing/2014/main" id="{88691142-76AF-83ED-4371-268C761ED815}"/>
               </a:ext>
             </a:extLst>
           </p:cNvPr>
@@ -7710,39 +8565,10 @@
           </a:p>
         </p:txBody>
       </p:sp>
-      <p:sp>
-        <p:nvSpPr>
-          <p:cNvPr id="7" name="Slide Number Placeholder 6">
-            <a:extLst>
-              <a:ext uri="{FF2B5EF4-FFF2-40B4-BE49-F238E27FC236}">
-                <a16:creationId xmlns:a16="http://schemas.microsoft.com/office/drawing/2014/main" id="{4BA91A17-B036-9BA1-8AEC-CD2B9173BBFE}"/>
-              </a:ext>
-            </a:extLst>
-          </p:cNvPr>
-          <p:cNvSpPr>
-            <a:spLocks noGrp="1"/>
-          </p:cNvSpPr>
-          <p:nvPr>
-            <p:ph type="sldNum" sz="quarter" idx="12"/>
-          </p:nvPr>
-        </p:nvSpPr>
-        <p:spPr/>
-        <p:txBody>
-          <a:bodyPr/>
-          <a:lstStyle/>
-          <a:p>
-            <a:fld id="{A80A81DD-F10A-4B1C-963A-0ABBB4865886}" type="slidenum">
-              <a:rPr lang="en-US" smtClean="0"/>
-              <a:t>17</a:t>
-            </a:fld>
-            <a:endParaRPr lang="en-US"/>
-          </a:p>
-        </p:txBody>
-      </p:sp>
     </p:spTree>
     <p:extLst>
       <p:ext uri="{BB962C8B-B14F-4D97-AF65-F5344CB8AC3E}">
-        <p14:creationId xmlns:p14="http://schemas.microsoft.com/office/powerpoint/2010/main" val="1025040394"/>
+        <p14:creationId xmlns:p14="http://schemas.microsoft.com/office/powerpoint/2010/main" val="3721658517"/>
       </p:ext>
     </p:extLst>
   </p:cSld>
@@ -7769,8 +8595,8 @@
           <a:chExt cx="0" cy="0"/>
         </a:xfrm>
       </p:grpSpPr>
-      <mc:AlternateContent xmlns:mc="http://schemas.openxmlformats.org/markup-compatibility/2006" xmlns:a14="http://schemas.microsoft.com/office/drawing/2010/main">
-        <mc:Choice Requires="a14">
+      <mc:AlternateContent xmlns:mc="http://schemas.openxmlformats.org/markup-compatibility/2006">
+        <mc:Choice xmlns:a14="http://schemas.microsoft.com/office/drawing/2010/main" Requires="a14">
           <p:sp>
             <p:nvSpPr>
               <p:cNvPr id="4" name="Content Placeholder 2">
@@ -8966,7 +9792,7 @@
             </p:txBody>
           </p:sp>
         </mc:Choice>
-        <mc:Fallback xmlns="">
+        <mc:Fallback>
           <p:sp>
             <p:nvSpPr>
               <p:cNvPr id="4" name="Content Placeholder 2">
@@ -9233,10 +10059,10 @@
       </p:sp>
       <p:sp>
         <p:nvSpPr>
-          <p:cNvPr id="7" name="Slide Number Placeholder 6">
+          <p:cNvPr id="5" name="Slide Number Placeholder 4">
             <a:extLst>
               <a:ext uri="{FF2B5EF4-FFF2-40B4-BE49-F238E27FC236}">
-                <a16:creationId xmlns:a16="http://schemas.microsoft.com/office/drawing/2014/main" id="{FB64A63D-7161-3451-2513-01266EA1A628}"/>
+                <a16:creationId xmlns:a16="http://schemas.microsoft.com/office/drawing/2014/main" id="{AA13168D-4729-8373-5046-00678BC92CCB}"/>
               </a:ext>
             </a:extLst>
           </p:cNvPr>
@@ -9263,7 +10089,7 @@
     </p:spTree>
     <p:extLst>
       <p:ext uri="{BB962C8B-B14F-4D97-AF65-F5344CB8AC3E}">
-        <p14:creationId xmlns:p14="http://schemas.microsoft.com/office/powerpoint/2010/main" val="919873286"/>
+        <p14:creationId xmlns:p14="http://schemas.microsoft.com/office/powerpoint/2010/main" val="3347046242"/>
       </p:ext>
     </p:extLst>
   </p:cSld>
@@ -9295,7 +10121,7 @@
           <p:cNvPr id="6" name="Body card">
             <a:extLst>
               <a:ext uri="{FF2B5EF4-FFF2-40B4-BE49-F238E27FC236}">
-                <a16:creationId xmlns:a16="http://schemas.microsoft.com/office/drawing/2014/main" id="{D935A494-1C08-FCA2-A357-21200E99E193}"/>
+                <a16:creationId xmlns:a16="http://schemas.microsoft.com/office/drawing/2014/main" id="{9DE8458D-EF86-6DE3-388E-4314D18D3770}"/>
               </a:ext>
             </a:extLst>
           </p:cNvPr>
@@ -9452,10 +10278,39 @@
       </p:sp>
       <p:sp>
         <p:nvSpPr>
+          <p:cNvPr id="4" name="Slide Number Placeholder 3">
+            <a:extLst>
+              <a:ext uri="{FF2B5EF4-FFF2-40B4-BE49-F238E27FC236}">
+                <a16:creationId xmlns:a16="http://schemas.microsoft.com/office/drawing/2014/main" id="{09CAF408-2725-6604-C6F0-A9875FC4F75A}"/>
+              </a:ext>
+            </a:extLst>
+          </p:cNvPr>
+          <p:cNvSpPr>
+            <a:spLocks noGrp="1"/>
+          </p:cNvSpPr>
+          <p:nvPr>
+            <p:ph type="sldNum" sz="quarter" idx="12"/>
+          </p:nvPr>
+        </p:nvSpPr>
+        <p:spPr/>
+        <p:txBody>
+          <a:bodyPr/>
+          <a:lstStyle/>
+          <a:p>
+            <a:fld id="{A80A81DD-F10A-4B1C-963A-0ABBB4865886}" type="slidenum">
+              <a:rPr lang="en-US" smtClean="0"/>
+              <a:t>19</a:t>
+            </a:fld>
+            <a:endParaRPr lang="en-US"/>
+          </a:p>
+        </p:txBody>
+      </p:sp>
+      <p:sp>
+        <p:nvSpPr>
           <p:cNvPr id="5" name="Title rule">
             <a:extLst>
               <a:ext uri="{FF2B5EF4-FFF2-40B4-BE49-F238E27FC236}">
-                <a16:creationId xmlns:a16="http://schemas.microsoft.com/office/drawing/2014/main" id="{D0E04E23-DA0F-C42C-1DFA-4ACEDB7D4532}"/>
+                <a16:creationId xmlns:a16="http://schemas.microsoft.com/office/drawing/2014/main" id="{EE5267E6-92FB-5EAC-4854-9C10F0FA53D4}"/>
               </a:ext>
             </a:extLst>
           </p:cNvPr>
@@ -9518,39 +10373,10 @@
           </a:p>
         </p:txBody>
       </p:sp>
-      <p:sp>
-        <p:nvSpPr>
-          <p:cNvPr id="7" name="Slide Number Placeholder 6">
-            <a:extLst>
-              <a:ext uri="{FF2B5EF4-FFF2-40B4-BE49-F238E27FC236}">
-                <a16:creationId xmlns:a16="http://schemas.microsoft.com/office/drawing/2014/main" id="{E30F09FE-0108-F5AC-86AE-CF43DC4344E3}"/>
-              </a:ext>
-            </a:extLst>
-          </p:cNvPr>
-          <p:cNvSpPr>
-            <a:spLocks noGrp="1"/>
-          </p:cNvSpPr>
-          <p:nvPr>
-            <p:ph type="sldNum" sz="quarter" idx="12"/>
-          </p:nvPr>
-        </p:nvSpPr>
-        <p:spPr/>
-        <p:txBody>
-          <a:bodyPr/>
-          <a:lstStyle/>
-          <a:p>
-            <a:fld id="{A80A81DD-F10A-4B1C-963A-0ABBB4865886}" type="slidenum">
-              <a:rPr lang="en-US" smtClean="0"/>
-              <a:t>19</a:t>
-            </a:fld>
-            <a:endParaRPr lang="en-US"/>
-          </a:p>
-        </p:txBody>
-      </p:sp>
     </p:spTree>
     <p:extLst>
       <p:ext uri="{BB962C8B-B14F-4D97-AF65-F5344CB8AC3E}">
-        <p14:creationId xmlns:p14="http://schemas.microsoft.com/office/powerpoint/2010/main" val="4076174346"/>
+        <p14:creationId xmlns:p14="http://schemas.microsoft.com/office/powerpoint/2010/main" val="1252389845"/>
       </p:ext>
     </p:extLst>
   </p:cSld>
@@ -9923,7 +10749,7 @@
               <a:buNone/>
             </a:pPr>
             <a:r>
-              <a:rPr lang="en-US" b="1" dirty="0">
+              <a:rPr lang="en-US" b="1">
                 <a:solidFill>
                   <a:srgbClr val="C00000"/>
                 </a:solidFill>
@@ -9931,9 +10757,10 @@
               <a:t>4   </a:t>
             </a:r>
             <a:r>
-              <a:rPr lang="en-US" b="1" dirty="0"/>
+              <a:rPr lang="en-US" b="1"/>
               <a:t>Which plot(s) are best for large sample sizes, and which one(s) keep the actual data values?</a:t>
             </a:r>
+            <a:endParaRPr lang="en-US" b="1" dirty="0"/>
           </a:p>
         </p:txBody>
       </p:sp>
@@ -9963,22 +10790,27 @@
               <a:buNone/>
             </a:pPr>
             <a:r>
-              <a:rPr lang="en-US" sz="1600" dirty="0">
+              <a:rPr lang="en-US" sz="1600">
                 <a:solidFill>
                   <a:srgbClr val="C00000"/>
                 </a:solidFill>
               </a:rPr>
-              <a:t>The histogram for large n. The stem and leaf plot keeps the original values. Dot plot also – when applied to discrete data. </a:t>
+              <a:t>The histogram for large n. The stem and leaf plot keeps the original values. Dot plot also – when applied to discrete data.</a:t>
             </a:r>
+            <a:endParaRPr lang="en-US" sz="1600" dirty="0">
+              <a:solidFill>
+                <a:srgbClr val="C00000"/>
+              </a:solidFill>
+            </a:endParaRPr>
           </a:p>
         </p:txBody>
       </p:sp>
       <p:sp>
         <p:nvSpPr>
-          <p:cNvPr id="12" name="Slide Number Placeholder 11">
+          <p:cNvPr id="11" name="Slide Number Placeholder 10">
             <a:extLst>
               <a:ext uri="{FF2B5EF4-FFF2-40B4-BE49-F238E27FC236}">
-                <a16:creationId xmlns:a16="http://schemas.microsoft.com/office/drawing/2014/main" id="{1AB60370-B6C4-186A-8D2A-A6D73B09BE8D}"/>
+                <a16:creationId xmlns:a16="http://schemas.microsoft.com/office/drawing/2014/main" id="{FE501316-DDC8-C3F8-4EC6-46B3A131BC85}"/>
               </a:ext>
             </a:extLst>
           </p:cNvPr>
@@ -10486,10 +11318,10 @@
       </p:pic>
       <p:sp>
         <p:nvSpPr>
-          <p:cNvPr id="4" name="Slide Number Placeholder 3">
+          <p:cNvPr id="3" name="Slide Number Placeholder 2">
             <a:extLst>
               <a:ext uri="{FF2B5EF4-FFF2-40B4-BE49-F238E27FC236}">
-                <a16:creationId xmlns:a16="http://schemas.microsoft.com/office/drawing/2014/main" id="{59E9E7FA-2DC9-8BBC-589D-A81DE31BEC10}"/>
+                <a16:creationId xmlns:a16="http://schemas.microsoft.com/office/drawing/2014/main" id="{80242620-7E47-0E40-4234-EBA519D37A81}"/>
               </a:ext>
             </a:extLst>
           </p:cNvPr>
@@ -10516,7 +11348,7 @@
     </p:spTree>
     <p:extLst>
       <p:ext uri="{BB962C8B-B14F-4D97-AF65-F5344CB8AC3E}">
-        <p14:creationId xmlns:p14="http://schemas.microsoft.com/office/powerpoint/2010/main" val="1917626945"/>
+        <p14:creationId xmlns:p14="http://schemas.microsoft.com/office/powerpoint/2010/main" val="3283936003"/>
       </p:ext>
     </p:extLst>
   </p:cSld>
@@ -10739,10 +11571,10 @@
       </p:sp>
       <p:sp>
         <p:nvSpPr>
-          <p:cNvPr id="6" name="Slide Number Placeholder 5">
+          <p:cNvPr id="4" name="Slide Number Placeholder 3">
             <a:extLst>
               <a:ext uri="{FF2B5EF4-FFF2-40B4-BE49-F238E27FC236}">
-                <a16:creationId xmlns:a16="http://schemas.microsoft.com/office/drawing/2014/main" id="{4068512A-2CD4-85B2-1148-9534A40CDE21}"/>
+                <a16:creationId xmlns:a16="http://schemas.microsoft.com/office/drawing/2014/main" id="{0C269772-F593-1AB5-BE8D-F2B3CAE3BC04}"/>
               </a:ext>
             </a:extLst>
           </p:cNvPr>
@@ -10769,7 +11601,7 @@
     </p:spTree>
     <p:extLst>
       <p:ext uri="{BB962C8B-B14F-4D97-AF65-F5344CB8AC3E}">
-        <p14:creationId xmlns:p14="http://schemas.microsoft.com/office/powerpoint/2010/main" val="3336169193"/>
+        <p14:creationId xmlns:p14="http://schemas.microsoft.com/office/powerpoint/2010/main" val="2489692700"/>
       </p:ext>
     </p:extLst>
   </p:cSld>
@@ -10801,7 +11633,7 @@
           <p:cNvPr id="6" name="Body card">
             <a:extLst>
               <a:ext uri="{FF2B5EF4-FFF2-40B4-BE49-F238E27FC236}">
-                <a16:creationId xmlns:a16="http://schemas.microsoft.com/office/drawing/2014/main" id="{EBDF4BC2-B488-2708-F9FE-81DA208D9DF3}"/>
+                <a16:creationId xmlns:a16="http://schemas.microsoft.com/office/drawing/2014/main" id="{97C9600F-4BA8-C9BF-F926-12F7AC5521DD}"/>
               </a:ext>
             </a:extLst>
           </p:cNvPr>
@@ -10889,8 +11721,8 @@
           </a:p>
         </p:txBody>
       </p:sp>
-      <mc:AlternateContent xmlns:mc="http://schemas.openxmlformats.org/markup-compatibility/2006" xmlns:a14="http://schemas.microsoft.com/office/drawing/2010/main">
-        <mc:Choice Requires="a14">
+      <mc:AlternateContent xmlns:mc="http://schemas.openxmlformats.org/markup-compatibility/2006">
+        <mc:Choice xmlns:a14="http://schemas.microsoft.com/office/drawing/2010/main" Requires="a14">
           <p:sp>
             <p:nvSpPr>
               <p:cNvPr id="3" name="Content Placeholder 2">
@@ -11077,7 +11909,7 @@
             </p:txBody>
           </p:sp>
         </mc:Choice>
-        <mc:Fallback xmlns="">
+        <mc:Fallback>
           <p:sp>
             <p:nvSpPr>
               <p:cNvPr id="3" name="Content Placeholder 2">
@@ -11119,10 +11951,39 @@
       </mc:AlternateContent>
       <p:sp>
         <p:nvSpPr>
+          <p:cNvPr id="4" name="Slide Number Placeholder 3">
+            <a:extLst>
+              <a:ext uri="{FF2B5EF4-FFF2-40B4-BE49-F238E27FC236}">
+                <a16:creationId xmlns:a16="http://schemas.microsoft.com/office/drawing/2014/main" id="{2065AFB9-F9A3-7D77-47C3-3A158CB4DEA5}"/>
+              </a:ext>
+            </a:extLst>
+          </p:cNvPr>
+          <p:cNvSpPr>
+            <a:spLocks noGrp="1"/>
+          </p:cNvSpPr>
+          <p:nvPr>
+            <p:ph type="sldNum" sz="quarter" idx="12"/>
+          </p:nvPr>
+        </p:nvSpPr>
+        <p:spPr/>
+        <p:txBody>
+          <a:bodyPr/>
+          <a:lstStyle/>
+          <a:p>
+            <a:fld id="{A80A81DD-F10A-4B1C-963A-0ABBB4865886}" type="slidenum">
+              <a:rPr lang="en-US" smtClean="0"/>
+              <a:t>22</a:t>
+            </a:fld>
+            <a:endParaRPr lang="en-US"/>
+          </a:p>
+        </p:txBody>
+      </p:sp>
+      <p:sp>
+        <p:nvSpPr>
           <p:cNvPr id="5" name="Title rule">
             <a:extLst>
               <a:ext uri="{FF2B5EF4-FFF2-40B4-BE49-F238E27FC236}">
-                <a16:creationId xmlns:a16="http://schemas.microsoft.com/office/drawing/2014/main" id="{40A52C12-63FB-46E7-3B70-6BB936DF0FA1}"/>
+                <a16:creationId xmlns:a16="http://schemas.microsoft.com/office/drawing/2014/main" id="{D4A4C70D-0C64-041D-849E-55844D1ADFCF}"/>
               </a:ext>
             </a:extLst>
           </p:cNvPr>
@@ -11185,39 +12046,10 @@
           </a:p>
         </p:txBody>
       </p:sp>
-      <p:sp>
-        <p:nvSpPr>
-          <p:cNvPr id="7" name="Slide Number Placeholder 6">
-            <a:extLst>
-              <a:ext uri="{FF2B5EF4-FFF2-40B4-BE49-F238E27FC236}">
-                <a16:creationId xmlns:a16="http://schemas.microsoft.com/office/drawing/2014/main" id="{03C18B85-91E1-C4E7-E263-C0760C312119}"/>
-              </a:ext>
-            </a:extLst>
-          </p:cNvPr>
-          <p:cNvSpPr>
-            <a:spLocks noGrp="1"/>
-          </p:cNvSpPr>
-          <p:nvPr>
-            <p:ph type="sldNum" sz="quarter" idx="12"/>
-          </p:nvPr>
-        </p:nvSpPr>
-        <p:spPr/>
-        <p:txBody>
-          <a:bodyPr/>
-          <a:lstStyle/>
-          <a:p>
-            <a:fld id="{A80A81DD-F10A-4B1C-963A-0ABBB4865886}" type="slidenum">
-              <a:rPr lang="en-US" smtClean="0"/>
-              <a:t>22</a:t>
-            </a:fld>
-            <a:endParaRPr lang="en-US"/>
-          </a:p>
-        </p:txBody>
-      </p:sp>
     </p:spTree>
     <p:extLst>
       <p:ext uri="{BB962C8B-B14F-4D97-AF65-F5344CB8AC3E}">
-        <p14:creationId xmlns:p14="http://schemas.microsoft.com/office/powerpoint/2010/main" val="3939556708"/>
+        <p14:creationId xmlns:p14="http://schemas.microsoft.com/office/powerpoint/2010/main" val="1585609933"/>
       </p:ext>
     </p:extLst>
   </p:cSld>
@@ -11249,7 +12081,7 @@
           <p:cNvPr id="6" name="Body card">
             <a:extLst>
               <a:ext uri="{FF2B5EF4-FFF2-40B4-BE49-F238E27FC236}">
-                <a16:creationId xmlns:a16="http://schemas.microsoft.com/office/drawing/2014/main" id="{18488ADD-7491-CBBF-E2B2-A0EF2956441B}"/>
+                <a16:creationId xmlns:a16="http://schemas.microsoft.com/office/drawing/2014/main" id="{D08938E1-E997-0A4D-8D04-99C4AF1E15D9}"/>
               </a:ext>
             </a:extLst>
           </p:cNvPr>
@@ -11380,10 +12212,39 @@
       </p:sp>
       <p:sp>
         <p:nvSpPr>
+          <p:cNvPr id="4" name="Slide Number Placeholder 3">
+            <a:extLst>
+              <a:ext uri="{FF2B5EF4-FFF2-40B4-BE49-F238E27FC236}">
+                <a16:creationId xmlns:a16="http://schemas.microsoft.com/office/drawing/2014/main" id="{E8130587-F8C2-FA53-1B54-7B3564BC6A1B}"/>
+              </a:ext>
+            </a:extLst>
+          </p:cNvPr>
+          <p:cNvSpPr>
+            <a:spLocks noGrp="1"/>
+          </p:cNvSpPr>
+          <p:nvPr>
+            <p:ph type="sldNum" sz="quarter" idx="12"/>
+          </p:nvPr>
+        </p:nvSpPr>
+        <p:spPr/>
+        <p:txBody>
+          <a:bodyPr/>
+          <a:lstStyle/>
+          <a:p>
+            <a:fld id="{A80A81DD-F10A-4B1C-963A-0ABBB4865886}" type="slidenum">
+              <a:rPr lang="en-US" smtClean="0"/>
+              <a:t>23</a:t>
+            </a:fld>
+            <a:endParaRPr lang="en-US"/>
+          </a:p>
+        </p:txBody>
+      </p:sp>
+      <p:sp>
+        <p:nvSpPr>
           <p:cNvPr id="5" name="Title rule">
             <a:extLst>
               <a:ext uri="{FF2B5EF4-FFF2-40B4-BE49-F238E27FC236}">
-                <a16:creationId xmlns:a16="http://schemas.microsoft.com/office/drawing/2014/main" id="{4C5B1C5B-C835-B511-E765-C1270FA1C592}"/>
+                <a16:creationId xmlns:a16="http://schemas.microsoft.com/office/drawing/2014/main" id="{AC557E61-2104-4B3A-5989-E870066DE594}"/>
               </a:ext>
             </a:extLst>
           </p:cNvPr>
@@ -11446,39 +12307,10 @@
           </a:p>
         </p:txBody>
       </p:sp>
-      <p:sp>
-        <p:nvSpPr>
-          <p:cNvPr id="7" name="Slide Number Placeholder 6">
-            <a:extLst>
-              <a:ext uri="{FF2B5EF4-FFF2-40B4-BE49-F238E27FC236}">
-                <a16:creationId xmlns:a16="http://schemas.microsoft.com/office/drawing/2014/main" id="{9C1CEA17-F8A9-132C-32BC-F1E36F97BE6D}"/>
-              </a:ext>
-            </a:extLst>
-          </p:cNvPr>
-          <p:cNvSpPr>
-            <a:spLocks noGrp="1"/>
-          </p:cNvSpPr>
-          <p:nvPr>
-            <p:ph type="sldNum" sz="quarter" idx="12"/>
-          </p:nvPr>
-        </p:nvSpPr>
-        <p:spPr/>
-        <p:txBody>
-          <a:bodyPr/>
-          <a:lstStyle/>
-          <a:p>
-            <a:fld id="{A80A81DD-F10A-4B1C-963A-0ABBB4865886}" type="slidenum">
-              <a:rPr lang="en-US" smtClean="0"/>
-              <a:t>23</a:t>
-            </a:fld>
-            <a:endParaRPr lang="en-US"/>
-          </a:p>
-        </p:txBody>
-      </p:sp>
     </p:spTree>
     <p:extLst>
       <p:ext uri="{BB962C8B-B14F-4D97-AF65-F5344CB8AC3E}">
-        <p14:creationId xmlns:p14="http://schemas.microsoft.com/office/powerpoint/2010/main" val="236921382"/>
+        <p14:creationId xmlns:p14="http://schemas.microsoft.com/office/powerpoint/2010/main" val="2313567103"/>
       </p:ext>
     </p:extLst>
   </p:cSld>
@@ -11661,10 +12493,10 @@
       </p:pic>
       <p:sp>
         <p:nvSpPr>
-          <p:cNvPr id="6" name="Slide Number Placeholder 5">
+          <p:cNvPr id="4" name="Slide Number Placeholder 3">
             <a:extLst>
               <a:ext uri="{FF2B5EF4-FFF2-40B4-BE49-F238E27FC236}">
-                <a16:creationId xmlns:a16="http://schemas.microsoft.com/office/drawing/2014/main" id="{684A1B73-B875-01C8-B12D-F7849C939E7C}"/>
+                <a16:creationId xmlns:a16="http://schemas.microsoft.com/office/drawing/2014/main" id="{CB38F117-BE47-82C8-D249-5A7F6005ADF3}"/>
               </a:ext>
             </a:extLst>
           </p:cNvPr>
@@ -11691,7 +12523,7 @@
     </p:spTree>
     <p:extLst>
       <p:ext uri="{BB962C8B-B14F-4D97-AF65-F5344CB8AC3E}">
-        <p14:creationId xmlns:p14="http://schemas.microsoft.com/office/powerpoint/2010/main" val="1386231900"/>
+        <p14:creationId xmlns:p14="http://schemas.microsoft.com/office/powerpoint/2010/main" val="3636445063"/>
       </p:ext>
     </p:extLst>
   </p:cSld>
@@ -11750,10 +12582,10 @@
       </p:pic>
       <p:sp>
         <p:nvSpPr>
-          <p:cNvPr id="3" name="Slide Number Placeholder 2">
+          <p:cNvPr id="2" name="Slide Number Placeholder 1">
             <a:extLst>
               <a:ext uri="{FF2B5EF4-FFF2-40B4-BE49-F238E27FC236}">
-                <a16:creationId xmlns:a16="http://schemas.microsoft.com/office/drawing/2014/main" id="{A60BA70C-37AE-5BE5-E8BE-0544314E35FC}"/>
+                <a16:creationId xmlns:a16="http://schemas.microsoft.com/office/drawing/2014/main" id="{205F4F78-4DAB-E100-21EF-E2514CD6E59F}"/>
               </a:ext>
             </a:extLst>
           </p:cNvPr>
@@ -11780,7 +12612,7 @@
     </p:spTree>
     <p:extLst>
       <p:ext uri="{BB962C8B-B14F-4D97-AF65-F5344CB8AC3E}">
-        <p14:creationId xmlns:p14="http://schemas.microsoft.com/office/powerpoint/2010/main" val="867768209"/>
+        <p14:creationId xmlns:p14="http://schemas.microsoft.com/office/powerpoint/2010/main" val="2555247259"/>
       </p:ext>
     </p:extLst>
   </p:cSld>
@@ -11807,8 +12639,8 @@
           <a:chExt cx="0" cy="0"/>
         </a:xfrm>
       </p:grpSpPr>
-      <mc:AlternateContent xmlns:mc="http://schemas.openxmlformats.org/markup-compatibility/2006" xmlns:a14="http://schemas.microsoft.com/office/drawing/2010/main">
-        <mc:Choice Requires="a14">
+      <mc:AlternateContent xmlns:mc="http://schemas.openxmlformats.org/markup-compatibility/2006">
+        <mc:Choice xmlns:a14="http://schemas.microsoft.com/office/drawing/2010/main" Requires="a14">
           <p:sp>
             <p:nvSpPr>
               <p:cNvPr id="4" name="Content Placeholder 2">
@@ -12871,7 +13703,7 @@
             </p:txBody>
           </p:sp>
         </mc:Choice>
-        <mc:Fallback xmlns="">
+        <mc:Fallback>
           <p:sp>
             <p:nvSpPr>
               <p:cNvPr id="4" name="Content Placeholder 2">
@@ -13080,10 +13912,10 @@
       </p:sp>
       <p:sp>
         <p:nvSpPr>
-          <p:cNvPr id="7" name="Slide Number Placeholder 6">
+          <p:cNvPr id="5" name="Slide Number Placeholder 4">
             <a:extLst>
               <a:ext uri="{FF2B5EF4-FFF2-40B4-BE49-F238E27FC236}">
-                <a16:creationId xmlns:a16="http://schemas.microsoft.com/office/drawing/2014/main" id="{4599BD3C-B32B-95AD-3F78-9D6FFC07C7C6}"/>
+                <a16:creationId xmlns:a16="http://schemas.microsoft.com/office/drawing/2014/main" id="{76C89A57-46EC-A13A-E843-1340E7C3C122}"/>
               </a:ext>
             </a:extLst>
           </p:cNvPr>
@@ -13110,7 +13942,7 @@
     </p:spTree>
     <p:extLst>
       <p:ext uri="{BB962C8B-B14F-4D97-AF65-F5344CB8AC3E}">
-        <p14:creationId xmlns:p14="http://schemas.microsoft.com/office/powerpoint/2010/main" val="1205830479"/>
+        <p14:creationId xmlns:p14="http://schemas.microsoft.com/office/powerpoint/2010/main" val="3908283755"/>
       </p:ext>
     </p:extLst>
   </p:cSld>
@@ -13142,7 +13974,7 @@
           <p:cNvPr id="6" name="Body card">
             <a:extLst>
               <a:ext uri="{FF2B5EF4-FFF2-40B4-BE49-F238E27FC236}">
-                <a16:creationId xmlns:a16="http://schemas.microsoft.com/office/drawing/2014/main" id="{D444BFDE-9A10-99BC-F1E7-5EED67EFC337}"/>
+                <a16:creationId xmlns:a16="http://schemas.microsoft.com/office/drawing/2014/main" id="{61E28556-D128-8A1C-D52F-3BCD1FD0A554}"/>
               </a:ext>
             </a:extLst>
           </p:cNvPr>
@@ -13284,10 +14116,39 @@
       </p:sp>
       <p:sp>
         <p:nvSpPr>
+          <p:cNvPr id="4" name="Slide Number Placeholder 3">
+            <a:extLst>
+              <a:ext uri="{FF2B5EF4-FFF2-40B4-BE49-F238E27FC236}">
+                <a16:creationId xmlns:a16="http://schemas.microsoft.com/office/drawing/2014/main" id="{892E6F10-008B-1435-637D-8823EBFE6A6C}"/>
+              </a:ext>
+            </a:extLst>
+          </p:cNvPr>
+          <p:cNvSpPr>
+            <a:spLocks noGrp="1"/>
+          </p:cNvSpPr>
+          <p:nvPr>
+            <p:ph type="sldNum" sz="quarter" idx="12"/>
+          </p:nvPr>
+        </p:nvSpPr>
+        <p:spPr/>
+        <p:txBody>
+          <a:bodyPr/>
+          <a:lstStyle/>
+          <a:p>
+            <a:fld id="{A80A81DD-F10A-4B1C-963A-0ABBB4865886}" type="slidenum">
+              <a:rPr lang="en-US" smtClean="0"/>
+              <a:t>27</a:t>
+            </a:fld>
+            <a:endParaRPr lang="en-US"/>
+          </a:p>
+        </p:txBody>
+      </p:sp>
+      <p:sp>
+        <p:nvSpPr>
           <p:cNvPr id="5" name="Title rule">
             <a:extLst>
               <a:ext uri="{FF2B5EF4-FFF2-40B4-BE49-F238E27FC236}">
-                <a16:creationId xmlns:a16="http://schemas.microsoft.com/office/drawing/2014/main" id="{BD3E631D-BE03-DE2C-9485-81E80D527BC1}"/>
+                <a16:creationId xmlns:a16="http://schemas.microsoft.com/office/drawing/2014/main" id="{D680C8AB-7AA9-CB8F-2E52-A254941DBB02}"/>
               </a:ext>
             </a:extLst>
           </p:cNvPr>
@@ -13350,39 +14211,10 @@
           </a:p>
         </p:txBody>
       </p:sp>
-      <p:sp>
-        <p:nvSpPr>
-          <p:cNvPr id="7" name="Slide Number Placeholder 6">
-            <a:extLst>
-              <a:ext uri="{FF2B5EF4-FFF2-40B4-BE49-F238E27FC236}">
-                <a16:creationId xmlns:a16="http://schemas.microsoft.com/office/drawing/2014/main" id="{BFE37319-3931-A474-A793-3FC82DAAD9D2}"/>
-              </a:ext>
-            </a:extLst>
-          </p:cNvPr>
-          <p:cNvSpPr>
-            <a:spLocks noGrp="1"/>
-          </p:cNvSpPr>
-          <p:nvPr>
-            <p:ph type="sldNum" sz="quarter" idx="12"/>
-          </p:nvPr>
-        </p:nvSpPr>
-        <p:spPr/>
-        <p:txBody>
-          <a:bodyPr/>
-          <a:lstStyle/>
-          <a:p>
-            <a:fld id="{A80A81DD-F10A-4B1C-963A-0ABBB4865886}" type="slidenum">
-              <a:rPr lang="en-US" smtClean="0"/>
-              <a:t>27</a:t>
-            </a:fld>
-            <a:endParaRPr lang="en-US"/>
-          </a:p>
-        </p:txBody>
-      </p:sp>
     </p:spTree>
     <p:extLst>
       <p:ext uri="{BB962C8B-B14F-4D97-AF65-F5344CB8AC3E}">
-        <p14:creationId xmlns:p14="http://schemas.microsoft.com/office/powerpoint/2010/main" val="722022185"/>
+        <p14:creationId xmlns:p14="http://schemas.microsoft.com/office/powerpoint/2010/main" val="571935057"/>
       </p:ext>
     </p:extLst>
   </p:cSld>
@@ -13414,7 +14246,7 @@
           <p:cNvPr id="6" name="Body card">
             <a:extLst>
               <a:ext uri="{FF2B5EF4-FFF2-40B4-BE49-F238E27FC236}">
-                <a16:creationId xmlns:a16="http://schemas.microsoft.com/office/drawing/2014/main" id="{B5373BF0-14E3-0C8F-5CE8-377A28DD7039}"/>
+                <a16:creationId xmlns:a16="http://schemas.microsoft.com/office/drawing/2014/main" id="{89913AC6-9059-5C75-9701-15C71A9836B8}"/>
               </a:ext>
             </a:extLst>
           </p:cNvPr>
@@ -13585,10 +14417,39 @@
       </p:sp>
       <p:sp>
         <p:nvSpPr>
+          <p:cNvPr id="4" name="Slide Number Placeholder 3">
+            <a:extLst>
+              <a:ext uri="{FF2B5EF4-FFF2-40B4-BE49-F238E27FC236}">
+                <a16:creationId xmlns:a16="http://schemas.microsoft.com/office/drawing/2014/main" id="{4EF4E9B3-3B9A-0E81-F2E4-AD75DCC1AE87}"/>
+              </a:ext>
+            </a:extLst>
+          </p:cNvPr>
+          <p:cNvSpPr>
+            <a:spLocks noGrp="1"/>
+          </p:cNvSpPr>
+          <p:nvPr>
+            <p:ph type="sldNum" sz="quarter" idx="12"/>
+          </p:nvPr>
+        </p:nvSpPr>
+        <p:spPr/>
+        <p:txBody>
+          <a:bodyPr/>
+          <a:lstStyle/>
+          <a:p>
+            <a:fld id="{A80A81DD-F10A-4B1C-963A-0ABBB4865886}" type="slidenum">
+              <a:rPr lang="en-US" smtClean="0"/>
+              <a:t>28</a:t>
+            </a:fld>
+            <a:endParaRPr lang="en-US"/>
+          </a:p>
+        </p:txBody>
+      </p:sp>
+      <p:sp>
+        <p:nvSpPr>
           <p:cNvPr id="5" name="Title rule">
             <a:extLst>
               <a:ext uri="{FF2B5EF4-FFF2-40B4-BE49-F238E27FC236}">
-                <a16:creationId xmlns:a16="http://schemas.microsoft.com/office/drawing/2014/main" id="{A56509F8-2582-ADAA-5966-6F55A540488E}"/>
+                <a16:creationId xmlns:a16="http://schemas.microsoft.com/office/drawing/2014/main" id="{BCA78F2D-47EC-C8DB-EE1D-184FB5573C76}"/>
               </a:ext>
             </a:extLst>
           </p:cNvPr>
@@ -13651,39 +14512,10 @@
           </a:p>
         </p:txBody>
       </p:sp>
-      <p:sp>
-        <p:nvSpPr>
-          <p:cNvPr id="7" name="Slide Number Placeholder 6">
-            <a:extLst>
-              <a:ext uri="{FF2B5EF4-FFF2-40B4-BE49-F238E27FC236}">
-                <a16:creationId xmlns:a16="http://schemas.microsoft.com/office/drawing/2014/main" id="{B310C7CD-DF6D-C789-0D51-D8742E650FC2}"/>
-              </a:ext>
-            </a:extLst>
-          </p:cNvPr>
-          <p:cNvSpPr>
-            <a:spLocks noGrp="1"/>
-          </p:cNvSpPr>
-          <p:nvPr>
-            <p:ph type="sldNum" sz="quarter" idx="12"/>
-          </p:nvPr>
-        </p:nvSpPr>
-        <p:spPr/>
-        <p:txBody>
-          <a:bodyPr/>
-          <a:lstStyle/>
-          <a:p>
-            <a:fld id="{A80A81DD-F10A-4B1C-963A-0ABBB4865886}" type="slidenum">
-              <a:rPr lang="en-US" smtClean="0"/>
-              <a:t>28</a:t>
-            </a:fld>
-            <a:endParaRPr lang="en-US"/>
-          </a:p>
-        </p:txBody>
-      </p:sp>
     </p:spTree>
     <p:extLst>
       <p:ext uri="{BB962C8B-B14F-4D97-AF65-F5344CB8AC3E}">
-        <p14:creationId xmlns:p14="http://schemas.microsoft.com/office/powerpoint/2010/main" val="461962410"/>
+        <p14:creationId xmlns:p14="http://schemas.microsoft.com/office/powerpoint/2010/main" val="3472261879"/>
       </p:ext>
     </p:extLst>
   </p:cSld>
@@ -13715,7 +14547,7 @@
           <p:cNvPr id="6" name="Body card">
             <a:extLst>
               <a:ext uri="{FF2B5EF4-FFF2-40B4-BE49-F238E27FC236}">
-                <a16:creationId xmlns:a16="http://schemas.microsoft.com/office/drawing/2014/main" id="{D6441F0C-5663-C97A-1315-64251549A2F4}"/>
+                <a16:creationId xmlns:a16="http://schemas.microsoft.com/office/drawing/2014/main" id="{2B9D4374-5CD4-5E54-84E3-2CD1B73BF2C2}"/>
               </a:ext>
             </a:extLst>
           </p:cNvPr>
@@ -13803,8 +14635,8 @@
           </a:p>
         </p:txBody>
       </p:sp>
-      <mc:AlternateContent xmlns:mc="http://schemas.openxmlformats.org/markup-compatibility/2006" xmlns:a14="http://schemas.microsoft.com/office/drawing/2010/main">
-        <mc:Choice Requires="a14">
+      <mc:AlternateContent xmlns:mc="http://schemas.openxmlformats.org/markup-compatibility/2006">
+        <mc:Choice xmlns:a14="http://schemas.microsoft.com/office/drawing/2010/main" Requires="a14">
           <p:sp>
             <p:nvSpPr>
               <p:cNvPr id="3" name="Content Placeholder 2">
@@ -14017,7 +14849,7 @@
             </p:txBody>
           </p:sp>
         </mc:Choice>
-        <mc:Fallback xmlns="">
+        <mc:Fallback>
           <p:sp>
             <p:nvSpPr>
               <p:cNvPr id="3" name="Content Placeholder 2">
@@ -14063,10 +14895,39 @@
       </mc:AlternateContent>
       <p:sp>
         <p:nvSpPr>
+          <p:cNvPr id="4" name="Slide Number Placeholder 3">
+            <a:extLst>
+              <a:ext uri="{FF2B5EF4-FFF2-40B4-BE49-F238E27FC236}">
+                <a16:creationId xmlns:a16="http://schemas.microsoft.com/office/drawing/2014/main" id="{FD7AEA17-F58C-0106-82CE-E04CE8DA1449}"/>
+              </a:ext>
+            </a:extLst>
+          </p:cNvPr>
+          <p:cNvSpPr>
+            <a:spLocks noGrp="1"/>
+          </p:cNvSpPr>
+          <p:nvPr>
+            <p:ph type="sldNum" sz="quarter" idx="12"/>
+          </p:nvPr>
+        </p:nvSpPr>
+        <p:spPr/>
+        <p:txBody>
+          <a:bodyPr/>
+          <a:lstStyle/>
+          <a:p>
+            <a:fld id="{A80A81DD-F10A-4B1C-963A-0ABBB4865886}" type="slidenum">
+              <a:rPr lang="en-US" smtClean="0"/>
+              <a:t>29</a:t>
+            </a:fld>
+            <a:endParaRPr lang="en-US"/>
+          </a:p>
+        </p:txBody>
+      </p:sp>
+      <p:sp>
+        <p:nvSpPr>
           <p:cNvPr id="5" name="Title rule">
             <a:extLst>
               <a:ext uri="{FF2B5EF4-FFF2-40B4-BE49-F238E27FC236}">
-                <a16:creationId xmlns:a16="http://schemas.microsoft.com/office/drawing/2014/main" id="{F62DD0DD-6CDE-AD93-910D-D0C308E4FF64}"/>
+                <a16:creationId xmlns:a16="http://schemas.microsoft.com/office/drawing/2014/main" id="{BBF2D9A2-5586-794E-ADF7-E7FE1CCF6990}"/>
               </a:ext>
             </a:extLst>
           </p:cNvPr>
@@ -14129,39 +14990,10 @@
           </a:p>
         </p:txBody>
       </p:sp>
-      <p:sp>
-        <p:nvSpPr>
-          <p:cNvPr id="7" name="Slide Number Placeholder 6">
-            <a:extLst>
-              <a:ext uri="{FF2B5EF4-FFF2-40B4-BE49-F238E27FC236}">
-                <a16:creationId xmlns:a16="http://schemas.microsoft.com/office/drawing/2014/main" id="{FE3C5AEB-747B-D52A-8B0D-317F17D152A6}"/>
-              </a:ext>
-            </a:extLst>
-          </p:cNvPr>
-          <p:cNvSpPr>
-            <a:spLocks noGrp="1"/>
-          </p:cNvSpPr>
-          <p:nvPr>
-            <p:ph type="sldNum" sz="quarter" idx="12"/>
-          </p:nvPr>
-        </p:nvSpPr>
-        <p:spPr/>
-        <p:txBody>
-          <a:bodyPr/>
-          <a:lstStyle/>
-          <a:p>
-            <a:fld id="{A80A81DD-F10A-4B1C-963A-0ABBB4865886}" type="slidenum">
-              <a:rPr lang="en-US" smtClean="0"/>
-              <a:t>29</a:t>
-            </a:fld>
-            <a:endParaRPr lang="en-US"/>
-          </a:p>
-        </p:txBody>
-      </p:sp>
     </p:spTree>
     <p:extLst>
       <p:ext uri="{BB962C8B-B14F-4D97-AF65-F5344CB8AC3E}">
-        <p14:creationId xmlns:p14="http://schemas.microsoft.com/office/powerpoint/2010/main" val="1347518694"/>
+        <p14:creationId xmlns:p14="http://schemas.microsoft.com/office/powerpoint/2010/main" val="3278469664"/>
       </p:ext>
     </p:extLst>
   </p:cSld>
@@ -14193,7 +15025,7 @@
           <p:cNvPr id="2" name="Title 1">
             <a:extLst>
               <a:ext uri="{FF2B5EF4-FFF2-40B4-BE49-F238E27FC236}">
-                <a16:creationId xmlns:a16="http://schemas.microsoft.com/office/drawing/2014/main" id="{602EA695-3AC8-A481-E49D-28C2DE376D09}"/>
+                <a16:creationId xmlns:a16="http://schemas.microsoft.com/office/drawing/2014/main" id="{F0397BD2-3E69-09B1-CF9D-FE074A56028B}"/>
               </a:ext>
             </a:extLst>
           </p:cNvPr>
@@ -14225,7 +15057,7 @@
           <p:cNvPr id="3" name="Content Placeholder 2">
             <a:extLst>
               <a:ext uri="{FF2B5EF4-FFF2-40B4-BE49-F238E27FC236}">
-                <a16:creationId xmlns:a16="http://schemas.microsoft.com/office/drawing/2014/main" id="{21B7095C-11DB-7936-5FB4-845A466B7D33}"/>
+                <a16:creationId xmlns:a16="http://schemas.microsoft.com/office/drawing/2014/main" id="{176ACD31-D9C2-BE69-C43E-8A371C40BF60}"/>
               </a:ext>
             </a:extLst>
           </p:cNvPr>
@@ -14252,7 +15084,7 @@
               <a:buNone/>
             </a:pPr>
             <a:r>
-              <a:rPr lang="en-US" sz="1600" dirty="0"/>
+              <a:rPr lang="en-US" sz="1600"/>
               <a:t>X = Metacritic critic score, for a random sample of n = 10 best-selling video games (circa 2000’s).</a:t>
             </a:r>
           </a:p>
@@ -14263,7 +15095,7 @@
           <p:cNvPr id="4" name="Values">
             <a:extLst>
               <a:ext uri="{FF2B5EF4-FFF2-40B4-BE49-F238E27FC236}">
-                <a16:creationId xmlns:a16="http://schemas.microsoft.com/office/drawing/2014/main" id="{843B934A-AF59-02EF-8995-47A653C8EF1E}"/>
+                <a16:creationId xmlns:a16="http://schemas.microsoft.com/office/drawing/2014/main" id="{4076BA5B-CC15-D5FB-6171-EBCDD5292691}"/>
               </a:ext>
             </a:extLst>
           </p:cNvPr>
@@ -14300,7 +15132,7 @@
           <p:cNvPr id="6" name="Picture 5">
             <a:extLst>
               <a:ext uri="{FF2B5EF4-FFF2-40B4-BE49-F238E27FC236}">
-                <a16:creationId xmlns:a16="http://schemas.microsoft.com/office/drawing/2014/main" id="{00A12CEC-6AE4-7530-386E-A62105F9D069}"/>
+                <a16:creationId xmlns:a16="http://schemas.microsoft.com/office/drawing/2014/main" id="{FCA763E1-14B6-123F-FB9B-F4459D5F3F03}"/>
               </a:ext>
             </a:extLst>
           </p:cNvPr>
@@ -14336,7 +15168,7 @@
           <p:cNvPr id="8" name="Picture 7">
             <a:extLst>
               <a:ext uri="{FF2B5EF4-FFF2-40B4-BE49-F238E27FC236}">
-                <a16:creationId xmlns:a16="http://schemas.microsoft.com/office/drawing/2014/main" id="{03F605A8-66A2-41B0-4B9F-85FA855F95A2}"/>
+                <a16:creationId xmlns:a16="http://schemas.microsoft.com/office/drawing/2014/main" id="{E57175DA-3644-5E12-91CA-A6798A080AD4}"/>
               </a:ext>
             </a:extLst>
           </p:cNvPr>
@@ -14372,7 +15204,7 @@
           <p:cNvPr id="9" name="TextBox 8">
             <a:extLst>
               <a:ext uri="{FF2B5EF4-FFF2-40B4-BE49-F238E27FC236}">
-                <a16:creationId xmlns:a16="http://schemas.microsoft.com/office/drawing/2014/main" id="{CE541DD7-04E3-2643-4511-B3A7406B9876}"/>
+                <a16:creationId xmlns:a16="http://schemas.microsoft.com/office/drawing/2014/main" id="{511D597D-F53F-D750-9E4D-0DF5E1C5EE3A}"/>
               </a:ext>
             </a:extLst>
           </p:cNvPr>
@@ -14407,7 +15239,7 @@
           <p:cNvPr id="10" name="TextBox 9">
             <a:extLst>
               <a:ext uri="{FF2B5EF4-FFF2-40B4-BE49-F238E27FC236}">
-                <a16:creationId xmlns:a16="http://schemas.microsoft.com/office/drawing/2014/main" id="{BD195836-C2AF-8978-1148-2171E77D2E25}"/>
+                <a16:creationId xmlns:a16="http://schemas.microsoft.com/office/drawing/2014/main" id="{4E4E3D7E-E59E-E845-F6BE-AE97DAF3FCD4}"/>
               </a:ext>
             </a:extLst>
           </p:cNvPr>
@@ -14431,38 +15263,22 @@
           <a:lstStyle/>
           <a:p>
             <a:r>
-              <a:rPr lang="en-US" sz="1000" i="1" dirty="0">
+              <a:rPr lang="en-US" sz="1000" i="1">
                 <a:solidFill>
                   <a:srgbClr val="666666"/>
                 </a:solidFill>
               </a:rPr>
-              <a:t>Data: </a:t>
-            </a:r>
-            <a:r>
-              <a:rPr lang="en-US" sz="1000" i="1" dirty="0" err="1">
-                <a:solidFill>
-                  <a:srgbClr val="666666"/>
-                </a:solidFill>
-              </a:rPr>
-              <a:t>VGChartz</a:t>
-            </a:r>
-            <a:r>
-              <a:rPr lang="en-US" sz="1000" i="1" dirty="0">
-                <a:solidFill>
-                  <a:srgbClr val="666666"/>
-                </a:solidFill>
-              </a:rPr>
-              <a:t> sales joined to Metacritic ratings, restricted to titles selling 5 million copies or more (127 games).</a:t>
+              <a:t>Data: VGChartz sales joined to Metacritic ratings, restricted to titles selling 5 million copies or more (127 games).</a:t>
             </a:r>
           </a:p>
         </p:txBody>
       </p:sp>
       <p:sp>
         <p:nvSpPr>
-          <p:cNvPr id="7" name="Slide Number Placeholder 6">
+          <p:cNvPr id="5" name="Slide Number Placeholder 4">
             <a:extLst>
               <a:ext uri="{FF2B5EF4-FFF2-40B4-BE49-F238E27FC236}">
-                <a16:creationId xmlns:a16="http://schemas.microsoft.com/office/drawing/2014/main" id="{F02A0954-A3CA-A9F9-71CC-3DA6AB018825}"/>
+                <a16:creationId xmlns:a16="http://schemas.microsoft.com/office/drawing/2014/main" id="{E9BA02EC-4E87-7B75-81B8-9E186E693895}"/>
               </a:ext>
             </a:extLst>
           </p:cNvPr>
@@ -14489,7 +15305,7 @@
     </p:spTree>
     <p:extLst>
       <p:ext uri="{BB962C8B-B14F-4D97-AF65-F5344CB8AC3E}">
-        <p14:creationId xmlns:p14="http://schemas.microsoft.com/office/powerpoint/2010/main" val="3538760259"/>
+        <p14:creationId xmlns:p14="http://schemas.microsoft.com/office/powerpoint/2010/main" val="2904286793"/>
       </p:ext>
     </p:extLst>
   </p:cSld>
@@ -14517,7 +15333,7 @@
                             </p:stCondLst>
                             <p:childTnLst>
                               <p:par>
-                                <p:cTn id="5" presetID="1" presetClass="entr" presetSubtype="0" fill="hold" nodeType="clickEffect">
+                                <p:cTn id="5" presetID="34" presetClass="entr" presetSubtype="0" fill="hold" nodeType="clickEffect">
                                   <p:stCondLst>
                                     <p:cond delay="0"/>
                                   </p:stCondLst>
@@ -14540,18 +15356,77 @@
                                         <p:strVal val="visible"/>
                                       </p:to>
                                     </p:set>
+                                    <p:anim from="(-#ppt_w/2)" to="(#ppt_x)" calcmode="lin" valueType="num">
+                                      <p:cBhvr>
+                                        <p:cTn id="7" dur="600" fill="hold">
+                                          <p:stCondLst>
+                                            <p:cond delay="0"/>
+                                          </p:stCondLst>
+                                        </p:cTn>
+                                        <p:tgtEl>
+                                          <p:spTgt spid="8"/>
+                                        </p:tgtEl>
+                                        <p:attrNameLst>
+                                          <p:attrName>ppt_x</p:attrName>
+                                        </p:attrNameLst>
+                                      </p:cBhvr>
+                                    </p:anim>
+                                    <p:anim from="0" to="-1.0" calcmode="lin" valueType="num">
+                                      <p:cBhvr>
+                                        <p:cTn id="8" dur="200" decel="50000" autoRev="1" fill="hold">
+                                          <p:stCondLst>
+                                            <p:cond delay="600"/>
+                                          </p:stCondLst>
+                                        </p:cTn>
+                                        <p:tgtEl>
+                                          <p:spTgt spid="8"/>
+                                        </p:tgtEl>
+                                        <p:attrNameLst>
+                                          <p:attrName>xshear</p:attrName>
+                                        </p:attrNameLst>
+                                      </p:cBhvr>
+                                    </p:anim>
+                                    <p:animScale>
+                                      <p:cBhvr>
+                                        <p:cTn id="9" dur="200" decel="100000" autoRev="1" fill="hold">
+                                          <p:stCondLst>
+                                            <p:cond delay="600"/>
+                                          </p:stCondLst>
+                                        </p:cTn>
+                                        <p:tgtEl>
+                                          <p:spTgt spid="8"/>
+                                        </p:tgtEl>
+                                      </p:cBhvr>
+                                      <p:from x="100000" y="100000"/>
+                                      <p:to x="80000" y="100000"/>
+                                    </p:animScale>
+                                    <p:anim by="(#ppt_h/3+#ppt_w*0.1)" calcmode="lin" valueType="num">
+                                      <p:cBhvr additive="sum">
+                                        <p:cTn id="10" dur="200" decel="100000" autoRev="1" fill="hold">
+                                          <p:stCondLst>
+                                            <p:cond delay="600"/>
+                                          </p:stCondLst>
+                                        </p:cTn>
+                                        <p:tgtEl>
+                                          <p:spTgt spid="8"/>
+                                        </p:tgtEl>
+                                        <p:attrNameLst>
+                                          <p:attrName>ppt_x</p:attrName>
+                                        </p:attrNameLst>
+                                      </p:cBhvr>
+                                    </p:anim>
                                   </p:childTnLst>
                                 </p:cTn>
                               </p:par>
                               <p:par>
-                                <p:cTn id="7" presetID="1" presetClass="entr" presetSubtype="0" fill="hold" grpId="0" nodeType="withEffect">
+                                <p:cTn id="11" presetID="34" presetClass="entr" presetSubtype="0" fill="hold" grpId="0" nodeType="withEffect">
                                   <p:stCondLst>
                                     <p:cond delay="0"/>
                                   </p:stCondLst>
                                   <p:childTnLst>
                                     <p:set>
                                       <p:cBhvr>
-                                        <p:cTn id="8" dur="1" fill="hold">
+                                        <p:cTn id="12" dur="1" fill="hold">
                                           <p:stCondLst>
                                             <p:cond delay="0"/>
                                           </p:stCondLst>
@@ -14567,6 +15442,65 @@
                                         <p:strVal val="visible"/>
                                       </p:to>
                                     </p:set>
+                                    <p:anim from="(-#ppt_w/2)" to="(#ppt_x)" calcmode="lin" valueType="num">
+                                      <p:cBhvr>
+                                        <p:cTn id="13" dur="600" fill="hold">
+                                          <p:stCondLst>
+                                            <p:cond delay="0"/>
+                                          </p:stCondLst>
+                                        </p:cTn>
+                                        <p:tgtEl>
+                                          <p:spTgt spid="9"/>
+                                        </p:tgtEl>
+                                        <p:attrNameLst>
+                                          <p:attrName>ppt_x</p:attrName>
+                                        </p:attrNameLst>
+                                      </p:cBhvr>
+                                    </p:anim>
+                                    <p:anim from="0" to="-1.0" calcmode="lin" valueType="num">
+                                      <p:cBhvr>
+                                        <p:cTn id="14" dur="200" decel="50000" autoRev="1" fill="hold">
+                                          <p:stCondLst>
+                                            <p:cond delay="600"/>
+                                          </p:stCondLst>
+                                        </p:cTn>
+                                        <p:tgtEl>
+                                          <p:spTgt spid="9"/>
+                                        </p:tgtEl>
+                                        <p:attrNameLst>
+                                          <p:attrName>xshear</p:attrName>
+                                        </p:attrNameLst>
+                                      </p:cBhvr>
+                                    </p:anim>
+                                    <p:animScale>
+                                      <p:cBhvr>
+                                        <p:cTn id="15" dur="200" decel="100000" autoRev="1" fill="hold">
+                                          <p:stCondLst>
+                                            <p:cond delay="600"/>
+                                          </p:stCondLst>
+                                        </p:cTn>
+                                        <p:tgtEl>
+                                          <p:spTgt spid="9"/>
+                                        </p:tgtEl>
+                                      </p:cBhvr>
+                                      <p:from x="100000" y="100000"/>
+                                      <p:to x="80000" y="100000"/>
+                                    </p:animScale>
+                                    <p:anim by="(#ppt_h/3+#ppt_w*0.1)" calcmode="lin" valueType="num">
+                                      <p:cBhvr additive="sum">
+                                        <p:cTn id="16" dur="200" decel="100000" autoRev="1" fill="hold">
+                                          <p:stCondLst>
+                                            <p:cond delay="600"/>
+                                          </p:stCondLst>
+                                        </p:cTn>
+                                        <p:tgtEl>
+                                          <p:spTgt spid="9"/>
+                                        </p:tgtEl>
+                                        <p:attrNameLst>
+                                          <p:attrName>ppt_x</p:attrName>
+                                        </p:attrNameLst>
+                                      </p:cBhvr>
+                                    </p:anim>
                                   </p:childTnLst>
                                 </p:cTn>
                               </p:par>
@@ -15176,10 +16110,10 @@
       </mc:AlternateContent>
       <p:sp>
         <p:nvSpPr>
-          <p:cNvPr id="3" name="Slide Number Placeholder 2">
+          <p:cNvPr id="2" name="Slide Number Placeholder 1">
             <a:extLst>
               <a:ext uri="{FF2B5EF4-FFF2-40B4-BE49-F238E27FC236}">
-                <a16:creationId xmlns:a16="http://schemas.microsoft.com/office/drawing/2014/main" id="{D9672764-92F4-B2E6-8D45-DFFD4C705BFB}"/>
+                <a16:creationId xmlns:a16="http://schemas.microsoft.com/office/drawing/2014/main" id="{0F0B1D7F-9CE8-CDCC-6AA9-06552BFB9B80}"/>
               </a:ext>
             </a:extLst>
           </p:cNvPr>
@@ -15206,7 +16140,7 @@
     </p:spTree>
     <p:extLst>
       <p:ext uri="{BB962C8B-B14F-4D97-AF65-F5344CB8AC3E}">
-        <p14:creationId xmlns:p14="http://schemas.microsoft.com/office/powerpoint/2010/main" val="745170016"/>
+        <p14:creationId xmlns:p14="http://schemas.microsoft.com/office/powerpoint/2010/main" val="1486699210"/>
       </p:ext>
     </p:extLst>
   </p:cSld>
@@ -15238,7 +16172,7 @@
           <p:cNvPr id="6" name="Body card">
             <a:extLst>
               <a:ext uri="{FF2B5EF4-FFF2-40B4-BE49-F238E27FC236}">
-                <a16:creationId xmlns:a16="http://schemas.microsoft.com/office/drawing/2014/main" id="{D600EDA2-4870-D849-328B-26FC00312278}"/>
+                <a16:creationId xmlns:a16="http://schemas.microsoft.com/office/drawing/2014/main" id="{AEA18A98-9255-6B2F-DC5C-B3D4AF3C2EBF}"/>
               </a:ext>
             </a:extLst>
           </p:cNvPr>
@@ -15321,8 +16255,8 @@
           </a:p>
         </p:txBody>
       </p:sp>
-      <mc:AlternateContent xmlns:mc="http://schemas.openxmlformats.org/markup-compatibility/2006" xmlns:a14="http://schemas.microsoft.com/office/drawing/2010/main">
-        <mc:Choice Requires="a14">
+      <mc:AlternateContent xmlns:mc="http://schemas.openxmlformats.org/markup-compatibility/2006">
+        <mc:Choice xmlns:a14="http://schemas.microsoft.com/office/drawing/2010/main" Requires="a14">
           <p:sp>
             <p:nvSpPr>
               <p:cNvPr id="3" name="Content Placeholder 2">
@@ -15540,7 +16474,7 @@
                     <m:sSup>
                       <m:sSupPr>
                         <m:ctrlPr>
-                          <a:rPr lang="en-US" sz="2400" b="0" i="1" smtClean="0">
+                          <a:rPr lang="en-US" sz="2400" i="1" smtClean="0">
                             <a:latin typeface="Cambria Math" panose="02040503050406030204" pitchFamily="18" charset="0"/>
                           </a:rPr>
                         </m:ctrlPr>
@@ -15759,6 +16693,9 @@
                             <m:sSupPr>
                               <m:ctrlPr>
                                 <a:rPr lang="en-US" sz="2400" i="1" smtClean="0">
+                                  <a:solidFill>
+                                    <a:srgbClr val="836967"/>
+                                  </a:solidFill>
                                   <a:latin typeface="Cambria Math" panose="02040503050406030204" pitchFamily="18" charset="0"/>
                                 </a:rPr>
                               </m:ctrlPr>
@@ -15894,6 +16831,9 @@
                           <m:sSupPr>
                             <m:ctrlPr>
                               <a:rPr lang="en-US" sz="2600" i="1" smtClean="0">
+                                <a:solidFill>
+                                  <a:srgbClr val="836967"/>
+                                </a:solidFill>
                                 <a:latin typeface="Cambria Math" panose="02040503050406030204" pitchFamily="18" charset="0"/>
                               </a:rPr>
                             </m:ctrlPr>
@@ -15981,7 +16921,7 @@
             </p:txBody>
           </p:sp>
         </mc:Choice>
-        <mc:Fallback xmlns="">
+        <mc:Fallback>
           <p:sp>
             <p:nvSpPr>
               <p:cNvPr id="3" name="Content Placeholder 2">
@@ -16023,10 +16963,39 @@
       </mc:AlternateContent>
       <p:sp>
         <p:nvSpPr>
+          <p:cNvPr id="4" name="Slide Number Placeholder 3">
+            <a:extLst>
+              <a:ext uri="{FF2B5EF4-FFF2-40B4-BE49-F238E27FC236}">
+                <a16:creationId xmlns:a16="http://schemas.microsoft.com/office/drawing/2014/main" id="{99232755-E65C-4F91-865D-E91E24B18A2B}"/>
+              </a:ext>
+            </a:extLst>
+          </p:cNvPr>
+          <p:cNvSpPr>
+            <a:spLocks noGrp="1"/>
+          </p:cNvSpPr>
+          <p:nvPr>
+            <p:ph type="sldNum" sz="quarter" idx="12"/>
+          </p:nvPr>
+        </p:nvSpPr>
+        <p:spPr/>
+        <p:txBody>
+          <a:bodyPr/>
+          <a:lstStyle/>
+          <a:p>
+            <a:fld id="{A80A81DD-F10A-4B1C-963A-0ABBB4865886}" type="slidenum">
+              <a:rPr lang="en-US" smtClean="0"/>
+              <a:t>31</a:t>
+            </a:fld>
+            <a:endParaRPr lang="en-US"/>
+          </a:p>
+        </p:txBody>
+      </p:sp>
+      <p:sp>
+        <p:nvSpPr>
           <p:cNvPr id="5" name="Title rule">
             <a:extLst>
               <a:ext uri="{FF2B5EF4-FFF2-40B4-BE49-F238E27FC236}">
-                <a16:creationId xmlns:a16="http://schemas.microsoft.com/office/drawing/2014/main" id="{634162C4-DF46-14FE-BC00-82B9FF16B1D8}"/>
+                <a16:creationId xmlns:a16="http://schemas.microsoft.com/office/drawing/2014/main" id="{488F3408-E2E2-4C60-2B11-A9ABE9134AF7}"/>
               </a:ext>
             </a:extLst>
           </p:cNvPr>
@@ -16089,39 +17058,10 @@
           </a:p>
         </p:txBody>
       </p:sp>
-      <p:sp>
-        <p:nvSpPr>
-          <p:cNvPr id="7" name="Slide Number Placeholder 6">
-            <a:extLst>
-              <a:ext uri="{FF2B5EF4-FFF2-40B4-BE49-F238E27FC236}">
-                <a16:creationId xmlns:a16="http://schemas.microsoft.com/office/drawing/2014/main" id="{53F1C7D0-95C2-F646-8BF1-0DBF7FC6B81A}"/>
-              </a:ext>
-            </a:extLst>
-          </p:cNvPr>
-          <p:cNvSpPr>
-            <a:spLocks noGrp="1"/>
-          </p:cNvSpPr>
-          <p:nvPr>
-            <p:ph type="sldNum" sz="quarter" idx="12"/>
-          </p:nvPr>
-        </p:nvSpPr>
-        <p:spPr/>
-        <p:txBody>
-          <a:bodyPr/>
-          <a:lstStyle/>
-          <a:p>
-            <a:fld id="{A80A81DD-F10A-4B1C-963A-0ABBB4865886}" type="slidenum">
-              <a:rPr lang="en-US" smtClean="0"/>
-              <a:t>31</a:t>
-            </a:fld>
-            <a:endParaRPr lang="en-US"/>
-          </a:p>
-        </p:txBody>
-      </p:sp>
     </p:spTree>
     <p:extLst>
       <p:ext uri="{BB962C8B-B14F-4D97-AF65-F5344CB8AC3E}">
-        <p14:creationId xmlns:p14="http://schemas.microsoft.com/office/powerpoint/2010/main" val="3613932169"/>
+        <p14:creationId xmlns:p14="http://schemas.microsoft.com/office/powerpoint/2010/main" val="2980383690"/>
       </p:ext>
     </p:extLst>
   </p:cSld>
@@ -16153,7 +17093,7 @@
           <p:cNvPr id="5" name="Body card">
             <a:extLst>
               <a:ext uri="{FF2B5EF4-FFF2-40B4-BE49-F238E27FC236}">
-                <a16:creationId xmlns:a16="http://schemas.microsoft.com/office/drawing/2014/main" id="{0B840953-89A8-DB92-995F-75AD32DCED89}"/>
+                <a16:creationId xmlns:a16="http://schemas.microsoft.com/office/drawing/2014/main" id="{765AC099-F3A9-FDAE-94E1-CAFDCD032907}"/>
               </a:ext>
             </a:extLst>
           </p:cNvPr>
@@ -16241,8 +17181,8 @@
           </a:p>
         </p:txBody>
       </p:sp>
-      <mc:AlternateContent xmlns:mc="http://schemas.openxmlformats.org/markup-compatibility/2006" xmlns:a14="http://schemas.microsoft.com/office/drawing/2010/main">
-        <mc:Choice Requires="a14">
+      <mc:AlternateContent xmlns:mc="http://schemas.openxmlformats.org/markup-compatibility/2006">
+        <mc:Choice xmlns:a14="http://schemas.microsoft.com/office/drawing/2010/main" Requires="a14">
           <p:sp>
             <p:nvSpPr>
               <p:cNvPr id="3" name="Content Placeholder 2">
@@ -16613,7 +17553,7 @@
             </p:txBody>
           </p:sp>
         </mc:Choice>
-        <mc:Fallback xmlns="">
+        <mc:Fallback>
           <p:sp>
             <p:nvSpPr>
               <p:cNvPr id="3" name="Content Placeholder 2">
@@ -16659,10 +17599,10 @@
       </mc:AlternateContent>
       <p:sp>
         <p:nvSpPr>
-          <p:cNvPr id="6" name="Slide Number Placeholder 5">
+          <p:cNvPr id="4" name="Slide Number Placeholder 3">
             <a:extLst>
               <a:ext uri="{FF2B5EF4-FFF2-40B4-BE49-F238E27FC236}">
-                <a16:creationId xmlns:a16="http://schemas.microsoft.com/office/drawing/2014/main" id="{5161AD7D-65E6-1D5C-0898-AB36F6686A53}"/>
+                <a16:creationId xmlns:a16="http://schemas.microsoft.com/office/drawing/2014/main" id="{3D698D2E-2A6B-6F70-02DF-32251992B63D}"/>
               </a:ext>
             </a:extLst>
           </p:cNvPr>
@@ -16689,7 +17629,7 @@
     </p:spTree>
     <p:extLst>
       <p:ext uri="{BB962C8B-B14F-4D97-AF65-F5344CB8AC3E}">
-        <p14:creationId xmlns:p14="http://schemas.microsoft.com/office/powerpoint/2010/main" val="2779751728"/>
+        <p14:creationId xmlns:p14="http://schemas.microsoft.com/office/powerpoint/2010/main" val="3865379911"/>
       </p:ext>
     </p:extLst>
   </p:cSld>
@@ -16721,7 +17661,7 @@
           <p:cNvPr id="6" name="Body card">
             <a:extLst>
               <a:ext uri="{FF2B5EF4-FFF2-40B4-BE49-F238E27FC236}">
-                <a16:creationId xmlns:a16="http://schemas.microsoft.com/office/drawing/2014/main" id="{F5C654FF-C1B2-3D28-217E-9923A2DCDE9F}"/>
+                <a16:creationId xmlns:a16="http://schemas.microsoft.com/office/drawing/2014/main" id="{16455F31-DABA-78F8-239F-A2CA0E170524}"/>
               </a:ext>
             </a:extLst>
           </p:cNvPr>
@@ -16772,8 +17712,8 @@
           </a:p>
         </p:txBody>
       </p:sp>
-      <mc:AlternateContent xmlns:mc="http://schemas.openxmlformats.org/markup-compatibility/2006" xmlns:a14="http://schemas.microsoft.com/office/drawing/2010/main">
-        <mc:Choice Requires="a14">
+      <mc:AlternateContent xmlns:mc="http://schemas.openxmlformats.org/markup-compatibility/2006">
+        <mc:Choice xmlns:a14="http://schemas.microsoft.com/office/drawing/2010/main" Requires="a14">
           <p:sp>
             <p:nvSpPr>
               <p:cNvPr id="2" name="Title 1">
@@ -16837,7 +17777,7 @@
             </p:txBody>
           </p:sp>
         </mc:Choice>
-        <mc:Fallback xmlns="">
+        <mc:Fallback>
           <p:sp>
             <p:nvSpPr>
               <p:cNvPr id="2" name="Title 1">
@@ -17122,10 +18062,39 @@
       </mc:AlternateContent>
       <p:sp>
         <p:nvSpPr>
+          <p:cNvPr id="4" name="Slide Number Placeholder 3">
+            <a:extLst>
+              <a:ext uri="{FF2B5EF4-FFF2-40B4-BE49-F238E27FC236}">
+                <a16:creationId xmlns:a16="http://schemas.microsoft.com/office/drawing/2014/main" id="{BC4AD742-39B0-0A87-4DA3-A3684590EFE6}"/>
+              </a:ext>
+            </a:extLst>
+          </p:cNvPr>
+          <p:cNvSpPr>
+            <a:spLocks noGrp="1"/>
+          </p:cNvSpPr>
+          <p:nvPr>
+            <p:ph type="sldNum" sz="quarter" idx="12"/>
+          </p:nvPr>
+        </p:nvSpPr>
+        <p:spPr/>
+        <p:txBody>
+          <a:bodyPr/>
+          <a:lstStyle/>
+          <a:p>
+            <a:fld id="{A80A81DD-F10A-4B1C-963A-0ABBB4865886}" type="slidenum">
+              <a:rPr lang="en-US" smtClean="0"/>
+              <a:t>33</a:t>
+            </a:fld>
+            <a:endParaRPr lang="en-US"/>
+          </a:p>
+        </p:txBody>
+      </p:sp>
+      <p:sp>
+        <p:nvSpPr>
           <p:cNvPr id="5" name="Title rule">
             <a:extLst>
               <a:ext uri="{FF2B5EF4-FFF2-40B4-BE49-F238E27FC236}">
-                <a16:creationId xmlns:a16="http://schemas.microsoft.com/office/drawing/2014/main" id="{E9673873-2725-1205-38FE-C01569CCA26B}"/>
+                <a16:creationId xmlns:a16="http://schemas.microsoft.com/office/drawing/2014/main" id="{5FA94503-5511-3114-0AFF-03C01E5D3B8B}"/>
               </a:ext>
             </a:extLst>
           </p:cNvPr>
@@ -17188,39 +18157,10 @@
           </a:p>
         </p:txBody>
       </p:sp>
-      <p:sp>
-        <p:nvSpPr>
-          <p:cNvPr id="7" name="Slide Number Placeholder 6">
-            <a:extLst>
-              <a:ext uri="{FF2B5EF4-FFF2-40B4-BE49-F238E27FC236}">
-                <a16:creationId xmlns:a16="http://schemas.microsoft.com/office/drawing/2014/main" id="{6A27840F-FFF8-58F3-D124-DB40E51A4394}"/>
-              </a:ext>
-            </a:extLst>
-          </p:cNvPr>
-          <p:cNvSpPr>
-            <a:spLocks noGrp="1"/>
-          </p:cNvSpPr>
-          <p:nvPr>
-            <p:ph type="sldNum" sz="quarter" idx="12"/>
-          </p:nvPr>
-        </p:nvSpPr>
-        <p:spPr/>
-        <p:txBody>
-          <a:bodyPr/>
-          <a:lstStyle/>
-          <a:p>
-            <a:fld id="{A80A81DD-F10A-4B1C-963A-0ABBB4865886}" type="slidenum">
-              <a:rPr lang="en-US" smtClean="0"/>
-              <a:t>33</a:t>
-            </a:fld>
-            <a:endParaRPr lang="en-US"/>
-          </a:p>
-        </p:txBody>
-      </p:sp>
     </p:spTree>
     <p:extLst>
       <p:ext uri="{BB962C8B-B14F-4D97-AF65-F5344CB8AC3E}">
-        <p14:creationId xmlns:p14="http://schemas.microsoft.com/office/powerpoint/2010/main" val="253553745"/>
+        <p14:creationId xmlns:p14="http://schemas.microsoft.com/office/powerpoint/2010/main" val="2217923380"/>
       </p:ext>
     </p:extLst>
   </p:cSld>
@@ -18056,10 +18996,10 @@
       </p:pic>
       <p:sp>
         <p:nvSpPr>
-          <p:cNvPr id="6" name="Slide Number Placeholder 5">
+          <p:cNvPr id="3" name="Slide Number Placeholder 2">
             <a:extLst>
               <a:ext uri="{FF2B5EF4-FFF2-40B4-BE49-F238E27FC236}">
-                <a16:creationId xmlns:a16="http://schemas.microsoft.com/office/drawing/2014/main" id="{05542756-14D4-326B-210D-D53701762B02}"/>
+                <a16:creationId xmlns:a16="http://schemas.microsoft.com/office/drawing/2014/main" id="{BBDF3FBF-842A-4DA6-A393-3BF8367173DF}"/>
               </a:ext>
             </a:extLst>
           </p:cNvPr>
@@ -18086,7 +19026,7 @@
     </p:spTree>
     <p:extLst>
       <p:ext uri="{BB962C8B-B14F-4D97-AF65-F5344CB8AC3E}">
-        <p14:creationId xmlns:p14="http://schemas.microsoft.com/office/powerpoint/2010/main" val="3275667608"/>
+        <p14:creationId xmlns:p14="http://schemas.microsoft.com/office/powerpoint/2010/main" val="3137584146"/>
       </p:ext>
     </p:extLst>
   </p:cSld>
@@ -18118,7 +19058,7 @@
           <p:cNvPr id="5" name="Body card">
             <a:extLst>
               <a:ext uri="{FF2B5EF4-FFF2-40B4-BE49-F238E27FC236}">
-                <a16:creationId xmlns:a16="http://schemas.microsoft.com/office/drawing/2014/main" id="{0AD5B6EA-D120-3ADF-A9DD-BFE96DC3D41C}"/>
+                <a16:creationId xmlns:a16="http://schemas.microsoft.com/office/drawing/2014/main" id="{60B693AA-B795-09D1-561A-F1DFA2E3A887}"/>
               </a:ext>
             </a:extLst>
           </p:cNvPr>
@@ -18520,6 +19460,10 @@
                 <a:endParaRPr lang="en-US" sz="2400" dirty="0"/>
               </a:p>
               <a:p>
+                <a:pPr>
+                  <a:buFont typeface="Arial" panose="020B0604020202020204" pitchFamily="34" charset="0"/>
+                  <a:buChar char="•"/>
+                </a:pPr>
                 <a:r>
                   <a:rPr lang="en-US" sz="2400"/>
                   <a:t>The population mean is also called the </a:t>
@@ -18538,7 +19482,10 @@
                 </a:r>
               </a:p>
               <a:p>
-                <a:pPr lvl="1"/>
+                <a:pPr lvl="1">
+                  <a:buFont typeface="Arial" panose="020B0604020202020204" pitchFamily="34" charset="0"/>
+                  <a:buChar char="•"/>
+                </a:pPr>
                 <a:r>
                   <a:rPr lang="en-US" sz="2000"/>
                   <a:t>the long-run average of the variable; the sample mean is our estimate of it</a:t>
@@ -18630,10 +19577,10 @@
       </mc:AlternateContent>
       <p:sp>
         <p:nvSpPr>
-          <p:cNvPr id="6" name="Slide Number Placeholder 5">
+          <p:cNvPr id="4" name="Slide Number Placeholder 3">
             <a:extLst>
               <a:ext uri="{FF2B5EF4-FFF2-40B4-BE49-F238E27FC236}">
-                <a16:creationId xmlns:a16="http://schemas.microsoft.com/office/drawing/2014/main" id="{B827860F-B872-DC71-1A25-946F032DCB2C}"/>
+                <a16:creationId xmlns:a16="http://schemas.microsoft.com/office/drawing/2014/main" id="{B716F0C3-F795-ED02-0D89-50C2F39D2ABF}"/>
               </a:ext>
             </a:extLst>
           </p:cNvPr>
@@ -18660,7 +19607,7 @@
     </p:spTree>
     <p:extLst>
       <p:ext uri="{BB962C8B-B14F-4D97-AF65-F5344CB8AC3E}">
-        <p14:creationId xmlns:p14="http://schemas.microsoft.com/office/powerpoint/2010/main" val="955869114"/>
+        <p14:creationId xmlns:p14="http://schemas.microsoft.com/office/powerpoint/2010/main" val="3501822374"/>
       </p:ext>
     </p:extLst>
   </p:cSld>
@@ -18692,7 +19639,7 @@
           <p:cNvPr id="6" name="Body card">
             <a:extLst>
               <a:ext uri="{FF2B5EF4-FFF2-40B4-BE49-F238E27FC236}">
-                <a16:creationId xmlns:a16="http://schemas.microsoft.com/office/drawing/2014/main" id="{5C94FCB2-F4CB-9919-ECAA-514B3D121410}"/>
+                <a16:creationId xmlns:a16="http://schemas.microsoft.com/office/drawing/2014/main" id="{AB4E1F0C-58F0-D934-F99F-431133FC6551}"/>
               </a:ext>
             </a:extLst>
           </p:cNvPr>
@@ -18875,10 +19822,39 @@
       </mc:AlternateContent>
       <p:sp>
         <p:nvSpPr>
+          <p:cNvPr id="4" name="Slide Number Placeholder 3">
+            <a:extLst>
+              <a:ext uri="{FF2B5EF4-FFF2-40B4-BE49-F238E27FC236}">
+                <a16:creationId xmlns:a16="http://schemas.microsoft.com/office/drawing/2014/main" id="{8F10B18D-494A-BFC6-1871-5CEF67E5B091}"/>
+              </a:ext>
+            </a:extLst>
+          </p:cNvPr>
+          <p:cNvSpPr>
+            <a:spLocks noGrp="1"/>
+          </p:cNvSpPr>
+          <p:nvPr>
+            <p:ph type="sldNum" sz="quarter" idx="12"/>
+          </p:nvPr>
+        </p:nvSpPr>
+        <p:spPr/>
+        <p:txBody>
+          <a:bodyPr/>
+          <a:lstStyle/>
+          <a:p>
+            <a:fld id="{A80A81DD-F10A-4B1C-963A-0ABBB4865886}" type="slidenum">
+              <a:rPr lang="en-US" smtClean="0"/>
+              <a:t>5</a:t>
+            </a:fld>
+            <a:endParaRPr lang="en-US"/>
+          </a:p>
+        </p:txBody>
+      </p:sp>
+      <p:sp>
+        <p:nvSpPr>
           <p:cNvPr id="5" name="Title rule">
             <a:extLst>
               <a:ext uri="{FF2B5EF4-FFF2-40B4-BE49-F238E27FC236}">
-                <a16:creationId xmlns:a16="http://schemas.microsoft.com/office/drawing/2014/main" id="{1A423A2C-039C-F861-9B4E-CB61370CE99E}"/>
+                <a16:creationId xmlns:a16="http://schemas.microsoft.com/office/drawing/2014/main" id="{D3BDC226-52F1-34F6-5C2F-0F20133D41EA}"/>
               </a:ext>
             </a:extLst>
           </p:cNvPr>
@@ -18941,39 +19917,10 @@
           </a:p>
         </p:txBody>
       </p:sp>
-      <p:sp>
-        <p:nvSpPr>
-          <p:cNvPr id="7" name="Slide Number Placeholder 6">
-            <a:extLst>
-              <a:ext uri="{FF2B5EF4-FFF2-40B4-BE49-F238E27FC236}">
-                <a16:creationId xmlns:a16="http://schemas.microsoft.com/office/drawing/2014/main" id="{92C1641E-F100-DDA0-2502-B7D828402335}"/>
-              </a:ext>
-            </a:extLst>
-          </p:cNvPr>
-          <p:cNvSpPr>
-            <a:spLocks noGrp="1"/>
-          </p:cNvSpPr>
-          <p:nvPr>
-            <p:ph type="sldNum" sz="quarter" idx="12"/>
-          </p:nvPr>
-        </p:nvSpPr>
-        <p:spPr/>
-        <p:txBody>
-          <a:bodyPr/>
-          <a:lstStyle/>
-          <a:p>
-            <a:fld id="{A80A81DD-F10A-4B1C-963A-0ABBB4865886}" type="slidenum">
-              <a:rPr lang="en-US" smtClean="0"/>
-              <a:t>5</a:t>
-            </a:fld>
-            <a:endParaRPr lang="en-US"/>
-          </a:p>
-        </p:txBody>
-      </p:sp>
     </p:spTree>
     <p:extLst>
       <p:ext uri="{BB962C8B-B14F-4D97-AF65-F5344CB8AC3E}">
-        <p14:creationId xmlns:p14="http://schemas.microsoft.com/office/powerpoint/2010/main" val="828261146"/>
+        <p14:creationId xmlns:p14="http://schemas.microsoft.com/office/powerpoint/2010/main" val="4205329341"/>
       </p:ext>
     </p:extLst>
   </p:cSld>
@@ -19005,7 +19952,1174 @@
           <p:cNvPr id="6" name="Body card">
             <a:extLst>
               <a:ext uri="{FF2B5EF4-FFF2-40B4-BE49-F238E27FC236}">
-                <a16:creationId xmlns:a16="http://schemas.microsoft.com/office/drawing/2014/main" id="{0C05D080-6164-F1E9-3AEA-C9666BCBE748}"/>
+                <a16:creationId xmlns:a16="http://schemas.microsoft.com/office/drawing/2014/main" id="{E78E8DCF-ACC6-0256-A398-2BA4EAD8207A}"/>
+              </a:ext>
+            </a:extLst>
+          </p:cNvPr>
+          <p:cNvSpPr/>
+          <p:nvPr/>
+        </p:nvSpPr>
+        <p:spPr>
+          <a:xfrm>
+            <a:off x="635000" y="1676400"/>
+            <a:ext cx="10922000" cy="3568700"/>
+          </a:xfrm>
+          <a:prstGeom prst="roundRect">
+            <a:avLst>
+              <a:gd name="adj" fmla="val 3000"/>
+            </a:avLst>
+          </a:prstGeom>
+          <a:solidFill>
+            <a:srgbClr val="F2F6FC"/>
+          </a:solidFill>
+          <a:ln w="19050">
+            <a:solidFill>
+              <a:srgbClr val="4472C4"/>
+            </a:solidFill>
+          </a:ln>
+        </p:spPr>
+        <p:style>
+          <a:lnRef idx="2">
+            <a:schemeClr val="accent1">
+              <a:shade val="15000"/>
+            </a:schemeClr>
+          </a:lnRef>
+          <a:fillRef idx="1">
+            <a:schemeClr val="accent1"/>
+          </a:fillRef>
+          <a:effectRef idx="0">
+            <a:schemeClr val="accent1"/>
+          </a:effectRef>
+          <a:fontRef idx="minor">
+            <a:schemeClr val="lt1"/>
+          </a:fontRef>
+        </p:style>
+        <p:txBody>
+          <a:bodyPr rtlCol="0" anchor="ctr"/>
+          <a:lstStyle/>
+          <a:p>
+            <a:pPr algn="ctr"/>
+            <a:endParaRPr lang="en-US"/>
+          </a:p>
+        </p:txBody>
+      </p:sp>
+      <p:sp>
+        <p:nvSpPr>
+          <p:cNvPr id="2" name="Title 1">
+            <a:extLst>
+              <a:ext uri="{FF2B5EF4-FFF2-40B4-BE49-F238E27FC236}">
+                <a16:creationId xmlns:a16="http://schemas.microsoft.com/office/drawing/2014/main" id="{D57F5637-759B-CDC6-A079-01615378933B}"/>
+              </a:ext>
+            </a:extLst>
+          </p:cNvPr>
+          <p:cNvSpPr>
+            <a:spLocks noGrp="1"/>
+          </p:cNvSpPr>
+          <p:nvPr>
+            <p:ph type="title"/>
+          </p:nvPr>
+        </p:nvSpPr>
+        <p:spPr/>
+        <p:txBody>
+          <a:bodyPr/>
+          <a:lstStyle/>
+          <a:p>
+            <a:r>
+              <a:rPr lang="en-US" dirty="0">
+                <a:solidFill>
+                  <a:srgbClr val="1F3864"/>
+                </a:solidFill>
+              </a:rPr>
+              <a:t>Alternative formulas for the mean</a:t>
+            </a:r>
+          </a:p>
+        </p:txBody>
+      </p:sp>
+      <mc:AlternateContent xmlns:mc="http://schemas.openxmlformats.org/markup-compatibility/2006" xmlns:a14="http://schemas.microsoft.com/office/drawing/2010/main">
+        <mc:Choice Requires="a14">
+          <p:sp>
+            <p:nvSpPr>
+              <p:cNvPr id="3" name="Content Placeholder 2">
+                <a:extLst>
+                  <a:ext uri="{FF2B5EF4-FFF2-40B4-BE49-F238E27FC236}">
+                    <a16:creationId xmlns:a16="http://schemas.microsoft.com/office/drawing/2014/main" id="{1F86C35F-87BF-000B-FFF1-FA6B4C96E0A5}"/>
+                  </a:ext>
+                </a:extLst>
+              </p:cNvPr>
+              <p:cNvSpPr>
+                <a:spLocks noGrp="1"/>
+              </p:cNvSpPr>
+              <p:nvPr>
+                <p:ph idx="1"/>
+              </p:nvPr>
+            </p:nvSpPr>
+            <p:spPr/>
+            <p:txBody>
+              <a:bodyPr/>
+              <a:lstStyle/>
+              <a:p>
+                <a:r>
+                  <a:rPr lang="en-US" sz="2800" dirty="0"/>
+                  <a:t>We can also express the mean in terms of the frequency </a:t>
+                </a:r>
+                <a14:m>
+                  <m:oMath xmlns:m="http://schemas.openxmlformats.org/officeDocument/2006/math">
+                    <m:r>
+                      <a:rPr lang="en-US" sz="2800" b="0" i="1" smtClean="0">
+                        <a:latin typeface="Cambria Math" panose="02040503050406030204" pitchFamily="18" charset="0"/>
+                      </a:rPr>
+                      <m:t>𝐹</m:t>
+                    </m:r>
+                  </m:oMath>
+                </a14:m>
+                <a:r>
+                  <a:rPr lang="en-US" sz="2800" dirty="0"/>
+                  <a:t> or the relative frequency </a:t>
+                </a:r>
+                <a14:m>
+                  <m:oMath xmlns:m="http://schemas.openxmlformats.org/officeDocument/2006/math">
+                    <m:r>
+                      <a:rPr lang="en-US" sz="2800" b="0" i="1" smtClean="0">
+                        <a:latin typeface="Cambria Math" panose="02040503050406030204" pitchFamily="18" charset="0"/>
+                      </a:rPr>
+                      <m:t>𝑅𝐹</m:t>
+                    </m:r>
+                  </m:oMath>
+                </a14:m>
+                <a:endParaRPr lang="en-US" sz="2800" dirty="0"/>
+              </a:p>
+              <a:p>
+                <a:endParaRPr lang="en-US" sz="2800" dirty="0"/>
+              </a:p>
+              <a:p>
+                <a:pPr marL="0" indent="0">
+                  <a:buNone/>
+                </a:pPr>
+                <a14:m>
+                  <m:oMathPara xmlns:m="http://schemas.openxmlformats.org/officeDocument/2006/math">
+                    <m:oMath>
+                      <m:acc>
+                        <m:accPr>
+                          <m:chr m:val="̅"/>
+                          <m:ctrlPr>
+                            <a:rPr lang="en-US" sz="2800" b="0" i="1" smtClean="0">
+                              <a:latin typeface="Cambria Math" panose="02040503050406030204" pitchFamily="18" charset="0"/>
+                            </a:rPr>
+                          </m:ctrlPr>
+                        </m:accPr>
+                        <m:e>
+                          <m:r>
+                            <a:rPr lang="en-US" sz="2800" b="0" i="1" smtClean="0">
+                              <a:latin typeface="Cambria Math" panose="02040503050406030204" pitchFamily="18" charset="0"/>
+                            </a:rPr>
+                            <m:t>𝑥</m:t>
+                          </m:r>
+                        </m:e>
+                      </m:acc>
+                      <m:r>
+                        <a:rPr lang="en-US" sz="2800" b="0" i="1" smtClean="0">
+                          <a:latin typeface="Cambria Math" panose="02040503050406030204" pitchFamily="18" charset="0"/>
+                        </a:rPr>
+                        <m:t>=</m:t>
+                      </m:r>
+                      <m:f>
+                        <m:fPr>
+                          <m:ctrlPr>
+                            <a:rPr lang="en-US" sz="2800" b="0" i="1" smtClean="0">
+                              <a:latin typeface="Cambria Math" panose="02040503050406030204" pitchFamily="18" charset="0"/>
+                            </a:rPr>
+                          </m:ctrlPr>
+                        </m:fPr>
+                        <m:num>
+                          <m:r>
+                            <a:rPr lang="en-US" sz="2800" b="0" i="1" smtClean="0">
+                              <a:latin typeface="Cambria Math" panose="02040503050406030204" pitchFamily="18" charset="0"/>
+                            </a:rPr>
+                            <m:t>1</m:t>
+                          </m:r>
+                        </m:num>
+                        <m:den>
+                          <m:r>
+                            <a:rPr lang="en-US" sz="2800" b="0" i="1" smtClean="0">
+                              <a:latin typeface="Cambria Math" panose="02040503050406030204" pitchFamily="18" charset="0"/>
+                            </a:rPr>
+                            <m:t>𝑛</m:t>
+                          </m:r>
+                        </m:den>
+                      </m:f>
+                      <m:nary>
+                        <m:naryPr>
+                          <m:chr m:val="∑"/>
+                          <m:supHide m:val="on"/>
+                          <m:ctrlPr>
+                            <a:rPr lang="en-US" sz="2800" b="0" i="1" smtClean="0">
+                              <a:latin typeface="Cambria Math" panose="02040503050406030204" pitchFamily="18" charset="0"/>
+                            </a:rPr>
+                          </m:ctrlPr>
+                        </m:naryPr>
+                        <m:sub>
+                          <m:r>
+                            <m:rPr>
+                              <m:brk m:alnAt="7"/>
+                            </m:rPr>
+                            <a:rPr lang="en-US" sz="2800" b="0" i="1" smtClean="0">
+                              <a:latin typeface="Cambria Math" panose="02040503050406030204" pitchFamily="18" charset="0"/>
+                            </a:rPr>
+                            <m:t>𝑥</m:t>
+                          </m:r>
+                        </m:sub>
+                        <m:sup/>
+                        <m:e>
+                          <m:r>
+                            <a:rPr lang="en-US" sz="2800" b="0" i="1" smtClean="0">
+                              <a:latin typeface="Cambria Math" panose="02040503050406030204" pitchFamily="18" charset="0"/>
+                            </a:rPr>
+                            <m:t>𝑥</m:t>
+                          </m:r>
+                          <m:r>
+                            <a:rPr lang="en-US" sz="2800" b="0" i="1" smtClean="0">
+                              <a:latin typeface="Cambria Math" panose="02040503050406030204" pitchFamily="18" charset="0"/>
+                            </a:rPr>
+                            <m:t> </m:t>
+                          </m:r>
+                          <m:r>
+                            <a:rPr lang="en-US" sz="2800" b="0" i="1" smtClean="0">
+                              <a:latin typeface="Cambria Math" panose="02040503050406030204" pitchFamily="18" charset="0"/>
+                            </a:rPr>
+                            <m:t>𝐹</m:t>
+                          </m:r>
+                          <m:r>
+                            <a:rPr lang="en-US" sz="2800" b="0" i="1" smtClean="0">
+                              <a:latin typeface="Cambria Math" panose="02040503050406030204" pitchFamily="18" charset="0"/>
+                            </a:rPr>
+                            <m:t>(</m:t>
+                          </m:r>
+                          <m:r>
+                            <a:rPr lang="en-US" sz="2800" b="0" i="1" smtClean="0">
+                              <a:latin typeface="Cambria Math" panose="02040503050406030204" pitchFamily="18" charset="0"/>
+                            </a:rPr>
+                            <m:t>𝑥</m:t>
+                          </m:r>
+                          <m:r>
+                            <a:rPr lang="en-US" sz="2800" b="0" i="1" smtClean="0">
+                              <a:latin typeface="Cambria Math" panose="02040503050406030204" pitchFamily="18" charset="0"/>
+                            </a:rPr>
+                            <m:t>)</m:t>
+                          </m:r>
+                        </m:e>
+                      </m:nary>
+                      <m:r>
+                        <a:rPr lang="en-US" sz="2800" b="0" i="1" smtClean="0">
+                          <a:latin typeface="Cambria Math" panose="02040503050406030204" pitchFamily="18" charset="0"/>
+                        </a:rPr>
+                        <m:t>      </m:t>
+                      </m:r>
+                      <m:r>
+                        <m:rPr>
+                          <m:sty m:val="p"/>
+                        </m:rPr>
+                        <a:rPr lang="en-US" sz="2800" b="0" i="0" smtClean="0">
+                          <a:latin typeface="Cambria Math" panose="02040503050406030204" pitchFamily="18" charset="0"/>
+                        </a:rPr>
+                        <m:t>or</m:t>
+                      </m:r>
+                      <m:r>
+                        <a:rPr lang="en-US" sz="2800" b="0" i="1" smtClean="0">
+                          <a:latin typeface="Cambria Math" panose="02040503050406030204" pitchFamily="18" charset="0"/>
+                        </a:rPr>
+                        <m:t>      </m:t>
+                      </m:r>
+                      <m:acc>
+                        <m:accPr>
+                          <m:chr m:val="̅"/>
+                          <m:ctrlPr>
+                            <a:rPr lang="en-US" sz="2800" b="0" i="1" smtClean="0">
+                              <a:latin typeface="Cambria Math" panose="02040503050406030204" pitchFamily="18" charset="0"/>
+                            </a:rPr>
+                          </m:ctrlPr>
+                        </m:accPr>
+                        <m:e>
+                          <m:r>
+                            <a:rPr lang="en-US" sz="2800" b="0" i="1" smtClean="0">
+                              <a:latin typeface="Cambria Math" panose="02040503050406030204" pitchFamily="18" charset="0"/>
+                            </a:rPr>
+                            <m:t>𝑥</m:t>
+                          </m:r>
+                        </m:e>
+                      </m:acc>
+                      <m:r>
+                        <a:rPr lang="en-US" sz="2800" b="0" i="1" smtClean="0">
+                          <a:latin typeface="Cambria Math" panose="02040503050406030204" pitchFamily="18" charset="0"/>
+                        </a:rPr>
+                        <m:t>=</m:t>
+                      </m:r>
+                      <m:nary>
+                        <m:naryPr>
+                          <m:chr m:val="∑"/>
+                          <m:supHide m:val="on"/>
+                          <m:ctrlPr>
+                            <a:rPr lang="en-US" sz="2800" b="0" i="1" smtClean="0">
+                              <a:latin typeface="Cambria Math" panose="02040503050406030204" pitchFamily="18" charset="0"/>
+                            </a:rPr>
+                          </m:ctrlPr>
+                        </m:naryPr>
+                        <m:sub>
+                          <m:r>
+                            <m:rPr>
+                              <m:brk m:alnAt="7"/>
+                            </m:rPr>
+                            <a:rPr lang="en-US" sz="2800" b="0" i="1" smtClean="0">
+                              <a:latin typeface="Cambria Math" panose="02040503050406030204" pitchFamily="18" charset="0"/>
+                            </a:rPr>
+                            <m:t>𝑥</m:t>
+                          </m:r>
+                        </m:sub>
+                        <m:sup/>
+                        <m:e>
+                          <m:r>
+                            <a:rPr lang="en-US" sz="2800" b="0" i="1" smtClean="0">
+                              <a:latin typeface="Cambria Math" panose="02040503050406030204" pitchFamily="18" charset="0"/>
+                            </a:rPr>
+                            <m:t>𝑥</m:t>
+                          </m:r>
+                          <m:r>
+                            <a:rPr lang="en-US" sz="2800" b="0" i="1" smtClean="0">
+                              <a:latin typeface="Cambria Math" panose="02040503050406030204" pitchFamily="18" charset="0"/>
+                            </a:rPr>
+                            <m:t> </m:t>
+                          </m:r>
+                          <m:r>
+                            <a:rPr lang="en-US" sz="2800" b="0" i="1" smtClean="0">
+                              <a:latin typeface="Cambria Math" panose="02040503050406030204" pitchFamily="18" charset="0"/>
+                            </a:rPr>
+                            <m:t>𝑅𝐹</m:t>
+                          </m:r>
+                          <m:r>
+                            <a:rPr lang="en-US" sz="2800" b="0" i="1" smtClean="0">
+                              <a:latin typeface="Cambria Math" panose="02040503050406030204" pitchFamily="18" charset="0"/>
+                            </a:rPr>
+                            <m:t>(</m:t>
+                          </m:r>
+                          <m:r>
+                            <a:rPr lang="en-US" sz="2800" b="0" i="1" smtClean="0">
+                              <a:latin typeface="Cambria Math" panose="02040503050406030204" pitchFamily="18" charset="0"/>
+                            </a:rPr>
+                            <m:t>𝑥</m:t>
+                          </m:r>
+                          <m:r>
+                            <a:rPr lang="en-US" sz="2800" b="0" i="1" smtClean="0">
+                              <a:latin typeface="Cambria Math" panose="02040503050406030204" pitchFamily="18" charset="0"/>
+                            </a:rPr>
+                            <m:t>)</m:t>
+                          </m:r>
+                        </m:e>
+                      </m:nary>
+                    </m:oMath>
+                  </m:oMathPara>
+                </a14:m>
+                <a:endParaRPr lang="en-US" sz="2800" dirty="0"/>
+              </a:p>
+              <a:p>
+                <a:pPr marL="0" indent="0">
+                  <a:buNone/>
+                </a:pPr>
+                <a:r>
+                  <a:rPr lang="en-US" sz="2800" dirty="0"/>
+                  <a:t>Where the sum is over all distinct values of the variable </a:t>
+                </a:r>
+                <a14:m>
+                  <m:oMath xmlns:m="http://schemas.openxmlformats.org/officeDocument/2006/math">
+                    <m:r>
+                      <a:rPr lang="en-US" sz="2800" b="0" i="1" smtClean="0">
+                        <a:latin typeface="Cambria Math" panose="02040503050406030204" pitchFamily="18" charset="0"/>
+                      </a:rPr>
+                      <m:t>𝑥</m:t>
+                    </m:r>
+                  </m:oMath>
+                </a14:m>
+                <a:endParaRPr lang="en-US" sz="2800" dirty="0"/>
+              </a:p>
+              <a:p>
+                <a:endParaRPr lang="en-US" dirty="0"/>
+              </a:p>
+            </p:txBody>
+          </p:sp>
+        </mc:Choice>
+        <mc:Fallback xmlns="">
+          <p:sp>
+            <p:nvSpPr>
+              <p:cNvPr id="3" name="Content Placeholder 2">
+                <a:extLst>
+                  <a:ext uri="{FF2B5EF4-FFF2-40B4-BE49-F238E27FC236}">
+                    <a16:creationId xmlns:a16="http://schemas.microsoft.com/office/drawing/2014/main" id="{1F86C35F-87BF-000B-FFF1-FA6B4C96E0A5}"/>
+                  </a:ext>
+                </a:extLst>
+              </p:cNvPr>
+              <p:cNvSpPr>
+                <a:spLocks noGrp="1" noRot="1" noChangeAspect="1" noMove="1" noResize="1" noEditPoints="1" noAdjustHandles="1" noChangeArrowheads="1" noChangeShapeType="1" noTextEdit="1"/>
+              </p:cNvSpPr>
+              <p:nvPr>
+                <p:ph idx="1"/>
+              </p:nvPr>
+            </p:nvSpPr>
+            <p:spPr>
+              <a:blipFill>
+                <a:blip r:embed="rId2"/>
+                <a:stretch>
+                  <a:fillRect l="-1217" t="-2241"/>
+                </a:stretch>
+              </a:blipFill>
+            </p:spPr>
+            <p:txBody>
+              <a:bodyPr/>
+              <a:lstStyle/>
+              <a:p>
+                <a:r>
+                  <a:rPr lang="en-US">
+                    <a:noFill/>
+                  </a:rPr>
+                  <a:t> </a:t>
+                </a:r>
+              </a:p>
+            </p:txBody>
+          </p:sp>
+        </mc:Fallback>
+      </mc:AlternateContent>
+      <p:sp>
+        <p:nvSpPr>
+          <p:cNvPr id="4" name="Slide Number Placeholder 3">
+            <a:extLst>
+              <a:ext uri="{FF2B5EF4-FFF2-40B4-BE49-F238E27FC236}">
+                <a16:creationId xmlns:a16="http://schemas.microsoft.com/office/drawing/2014/main" id="{4C563B39-2CF4-9F0E-65F8-8946308E2AEA}"/>
+              </a:ext>
+            </a:extLst>
+          </p:cNvPr>
+          <p:cNvSpPr>
+            <a:spLocks noGrp="1"/>
+          </p:cNvSpPr>
+          <p:nvPr>
+            <p:ph type="sldNum" sz="quarter" idx="12"/>
+          </p:nvPr>
+        </p:nvSpPr>
+        <p:spPr/>
+        <p:txBody>
+          <a:bodyPr/>
+          <a:lstStyle/>
+          <a:p>
+            <a:fld id="{A80A81DD-F10A-4B1C-963A-0ABBB4865886}" type="slidenum">
+              <a:rPr lang="en-US" smtClean="0"/>
+              <a:t>6</a:t>
+            </a:fld>
+            <a:endParaRPr lang="en-US"/>
+          </a:p>
+        </p:txBody>
+      </p:sp>
+      <p:sp>
+        <p:nvSpPr>
+          <p:cNvPr id="5" name="Title rule">
+            <a:extLst>
+              <a:ext uri="{FF2B5EF4-FFF2-40B4-BE49-F238E27FC236}">
+                <a16:creationId xmlns:a16="http://schemas.microsoft.com/office/drawing/2014/main" id="{10A07C2C-EE41-9C47-B0C7-44CFD9AFA541}"/>
+              </a:ext>
+            </a:extLst>
+          </p:cNvPr>
+          <p:cNvSpPr/>
+          <p:nvPr/>
+        </p:nvSpPr>
+        <p:spPr>
+          <a:xfrm>
+            <a:off x="838200" y="1600200"/>
+            <a:ext cx="10515600" cy="38100"/>
+          </a:xfrm>
+          <a:prstGeom prst="rect">
+            <a:avLst/>
+          </a:prstGeom>
+          <a:solidFill>
+            <a:srgbClr val="4472C4"/>
+          </a:solidFill>
+          <a:ln w="12700" cap="flat" cmpd="sng" algn="ctr">
+            <a:noFill/>
+            <a:prstDash val="solid"/>
+            <a:miter lim="800000"/>
+          </a:ln>
+          <a:effectLst/>
+          <a:extLst>
+            <a:ext uri="{91240B29-F687-4F45-9708-019B960494DF}">
+              <a14:hiddenLine xmlns:a14="http://schemas.microsoft.com/office/drawing/2010/main" w="12700" cap="flat" cmpd="sng" algn="ctr">
+                <a:solidFill>
+                  <a:schemeClr val="accent1">
+                    <a:shade val="15000"/>
+                  </a:schemeClr>
+                </a:solidFill>
+                <a:prstDash val="solid"/>
+                <a:miter lim="800000"/>
+              </a14:hiddenLine>
+            </a:ext>
+          </a:extLst>
+        </p:spPr>
+        <p:style>
+          <a:lnRef idx="2">
+            <a:schemeClr val="accent1">
+              <a:shade val="15000"/>
+            </a:schemeClr>
+          </a:lnRef>
+          <a:fillRef idx="1">
+            <a:schemeClr val="accent1"/>
+          </a:fillRef>
+          <a:effectRef idx="0">
+            <a:schemeClr val="accent1"/>
+          </a:effectRef>
+          <a:fontRef idx="minor">
+            <a:schemeClr val="lt1"/>
+          </a:fontRef>
+        </p:style>
+        <p:txBody>
+          <a:bodyPr rtlCol="0" anchor="ctr"/>
+          <a:lstStyle/>
+          <a:p>
+            <a:pPr algn="ctr"/>
+            <a:endParaRPr lang="en-US"/>
+          </a:p>
+        </p:txBody>
+      </p:sp>
+    </p:spTree>
+    <p:extLst>
+      <p:ext uri="{BB962C8B-B14F-4D97-AF65-F5344CB8AC3E}">
+        <p14:creationId xmlns:p14="http://schemas.microsoft.com/office/powerpoint/2010/main" val="4185167999"/>
+      </p:ext>
+    </p:extLst>
+  </p:cSld>
+  <p:clrMapOvr>
+    <a:masterClrMapping/>
+  </p:clrMapOvr>
+</p:sld>
+</file>
+
+<file path=ppt/slides/slide7.xml><?xml version="1.0" encoding="utf-8"?>
+<p:sld xmlns:a="http://schemas.openxmlformats.org/drawingml/2006/main" xmlns:r="http://schemas.openxmlformats.org/officeDocument/2006/relationships" xmlns:p="http://schemas.openxmlformats.org/presentationml/2006/main">
+  <p:cSld>
+    <p:spTree>
+      <p:nvGrpSpPr>
+        <p:cNvPr id="1" name=""/>
+        <p:cNvGrpSpPr/>
+        <p:nvPr/>
+      </p:nvGrpSpPr>
+      <p:grpSpPr>
+        <a:xfrm>
+          <a:off x="0" y="0"/>
+          <a:ext cx="0" cy="0"/>
+          <a:chOff x="0" y="0"/>
+          <a:chExt cx="0" cy="0"/>
+        </a:xfrm>
+      </p:grpSpPr>
+      <p:sp>
+        <p:nvSpPr>
+          <p:cNvPr id="2" name="Title 1">
+            <a:extLst>
+              <a:ext uri="{FF2B5EF4-FFF2-40B4-BE49-F238E27FC236}">
+                <a16:creationId xmlns:a16="http://schemas.microsoft.com/office/drawing/2014/main" id="{30704281-A2B3-E169-D64B-55C4B2F0F2E8}"/>
+              </a:ext>
+            </a:extLst>
+          </p:cNvPr>
+          <p:cNvSpPr>
+            <a:spLocks noGrp="1"/>
+          </p:cNvSpPr>
+          <p:nvPr>
+            <p:ph type="title"/>
+          </p:nvPr>
+        </p:nvSpPr>
+        <p:spPr/>
+        <p:txBody>
+          <a:bodyPr/>
+          <a:lstStyle/>
+          <a:p>
+            <a:r>
+              <a:rPr lang="en-US" dirty="0">
+                <a:solidFill>
+                  <a:srgbClr val="1F3864"/>
+                </a:solidFill>
+              </a:rPr>
+              <a:t>Example: Computing the mean from a frequency table</a:t>
+            </a:r>
+          </a:p>
+        </p:txBody>
+      </p:sp>
+      <mc:AlternateContent xmlns:mc="http://schemas.openxmlformats.org/markup-compatibility/2006" xmlns:a14="http://schemas.microsoft.com/office/drawing/2010/main">
+        <mc:Choice Requires="a14">
+          <p:sp>
+            <p:nvSpPr>
+              <p:cNvPr id="4" name="TextBox 3">
+                <a:extLst>
+                  <a:ext uri="{FF2B5EF4-FFF2-40B4-BE49-F238E27FC236}">
+                    <a16:creationId xmlns:a16="http://schemas.microsoft.com/office/drawing/2014/main" id="{3CB2C17F-8867-4F95-3EA4-C71E0B623A8C}"/>
+                  </a:ext>
+                </a:extLst>
+              </p:cNvPr>
+              <p:cNvSpPr txBox="1"/>
+              <p:nvPr/>
+            </p:nvSpPr>
+            <p:spPr>
+              <a:xfrm>
+                <a:off x="932873" y="1985818"/>
+                <a:ext cx="10797309" cy="1477328"/>
+              </a:xfrm>
+              <a:prstGeom prst="rect">
+                <a:avLst/>
+              </a:prstGeom>
+              <a:noFill/>
+            </p:spPr>
+            <p:txBody>
+              <a:bodyPr wrap="square" rtlCol="0">
+                <a:spAutoFit/>
+              </a:bodyPr>
+              <a:lstStyle/>
+              <a:p>
+                <a:pPr/>
+                <a14:m>
+                  <m:oMathPara xmlns:m="http://schemas.openxmlformats.org/officeDocument/2006/math">
+                    <m:oMathParaPr>
+                      <m:jc m:val="left"/>
+                    </m:oMathParaPr>
+                    <m:oMath>
+                      <m:r>
+                        <a:rPr lang="en-US" sz="2400" b="0" i="1" smtClean="0">
+                          <a:latin typeface="Cambria Math" panose="02040503050406030204" pitchFamily="18" charset="0"/>
+                        </a:rPr>
+                        <m:t>𝑋</m:t>
+                      </m:r>
+                      <m:r>
+                        <a:rPr lang="en-US" sz="2400" b="0" i="1" smtClean="0">
+                          <a:latin typeface="Cambria Math" panose="02040503050406030204" pitchFamily="18" charset="0"/>
+                        </a:rPr>
+                        <m:t>={1, 3, 5, 5, 6, 7, 7, 8}</m:t>
+                      </m:r>
+                    </m:oMath>
+                  </m:oMathPara>
+                </a14:m>
+                <a:endParaRPr lang="en-US" sz="2400" dirty="0"/>
+              </a:p>
+              <a:p>
+                <a:endParaRPr lang="en-US" sz="2400" dirty="0"/>
+              </a:p>
+              <a:p>
+                <a:endParaRPr lang="en-US" sz="2400" dirty="0"/>
+              </a:p>
+              <a:p>
+                <a:endParaRPr lang="en-US" dirty="0"/>
+              </a:p>
+            </p:txBody>
+          </p:sp>
+        </mc:Choice>
+        <mc:Fallback xmlns="">
+          <p:sp>
+            <p:nvSpPr>
+              <p:cNvPr id="4" name="TextBox 3">
+                <a:extLst>
+                  <a:ext uri="{FF2B5EF4-FFF2-40B4-BE49-F238E27FC236}">
+                    <a16:creationId xmlns:a16="http://schemas.microsoft.com/office/drawing/2014/main" id="{3CB2C17F-8867-4F95-3EA4-C71E0B623A8C}"/>
+                  </a:ext>
+                </a:extLst>
+              </p:cNvPr>
+              <p:cNvSpPr txBox="1">
+                <a:spLocks noRot="1" noChangeAspect="1" noMove="1" noResize="1" noEditPoints="1" noAdjustHandles="1" noChangeArrowheads="1" noChangeShapeType="1" noTextEdit="1"/>
+              </p:cNvSpPr>
+              <p:nvPr/>
+            </p:nvSpPr>
+            <p:spPr>
+              <a:xfrm>
+                <a:off x="932873" y="1985818"/>
+                <a:ext cx="10797309" cy="1477328"/>
+              </a:xfrm>
+              <a:prstGeom prst="rect">
+                <a:avLst/>
+              </a:prstGeom>
+              <a:blipFill>
+                <a:blip r:embed="rId2"/>
+                <a:stretch>
+                  <a:fillRect l="-113"/>
+                </a:stretch>
+              </a:blipFill>
+            </p:spPr>
+            <p:txBody>
+              <a:bodyPr/>
+              <a:lstStyle/>
+              <a:p>
+                <a:r>
+                  <a:rPr lang="en-US">
+                    <a:noFill/>
+                  </a:rPr>
+                  <a:t> </a:t>
+                </a:r>
+              </a:p>
+            </p:txBody>
+          </p:sp>
+        </mc:Fallback>
+      </mc:AlternateContent>
+      <p:graphicFrame>
+        <p:nvGraphicFramePr>
+          <p:cNvPr id="5" name="Table 4">
+            <a:extLst>
+              <a:ext uri="{FF2B5EF4-FFF2-40B4-BE49-F238E27FC236}">
+                <a16:creationId xmlns:a16="http://schemas.microsoft.com/office/drawing/2014/main" id="{ABED149D-C46B-66BE-11B4-97A112E7553B}"/>
+              </a:ext>
+            </a:extLst>
+          </p:cNvPr>
+          <p:cNvGraphicFramePr>
+            <a:graphicFrameLocks noGrp="1"/>
+          </p:cNvGraphicFramePr>
+          <p:nvPr>
+            <p:extLst>
+              <p:ext uri="{D42A27DB-BD31-4B8C-83A1-F6EECF244321}">
+                <p14:modId xmlns:p14="http://schemas.microsoft.com/office/powerpoint/2010/main" val="3061566213"/>
+              </p:ext>
+            </p:extLst>
+          </p:nvPr>
+        </p:nvGraphicFramePr>
+        <p:xfrm>
+          <a:off x="7389092" y="1421340"/>
+          <a:ext cx="4341090" cy="3200400"/>
+        </p:xfrm>
+        <a:graphic>
+          <a:graphicData uri="http://schemas.openxmlformats.org/drawingml/2006/table">
+            <a:tbl>
+              <a:tblPr firstRow="1" bandRow="1">
+                <a:tableStyleId>{5C22544A-7EE6-4342-B048-85BDC9FD1C3A}</a:tableStyleId>
+              </a:tblPr>
+              <a:tblGrid>
+                <a:gridCol w="1447030">
+                  <a:extLst>
+                    <a:ext uri="{9D8B030D-6E8A-4147-A177-3AD203B41FA5}">
+                      <a16:colId xmlns:a16="http://schemas.microsoft.com/office/drawing/2014/main" val="2635967006"/>
+                    </a:ext>
+                  </a:extLst>
+                </a:gridCol>
+                <a:gridCol w="1447030">
+                  <a:extLst>
+                    <a:ext uri="{9D8B030D-6E8A-4147-A177-3AD203B41FA5}">
+                      <a16:colId xmlns:a16="http://schemas.microsoft.com/office/drawing/2014/main" val="3005329175"/>
+                    </a:ext>
+                  </a:extLst>
+                </a:gridCol>
+                <a:gridCol w="1447030">
+                  <a:extLst>
+                    <a:ext uri="{9D8B030D-6E8A-4147-A177-3AD203B41FA5}">
+                      <a16:colId xmlns:a16="http://schemas.microsoft.com/office/drawing/2014/main" val="1816929551"/>
+                    </a:ext>
+                  </a:extLst>
+                </a:gridCol>
+              </a:tblGrid>
+              <a:tr h="440858">
+                <a:tc>
+                  <a:txBody>
+                    <a:bodyPr/>
+                    <a:lstStyle/>
+                    <a:p>
+                      <a:pPr algn="ctr"/>
+                      <a:r>
+                        <a:rPr lang="en-US" sz="2400" dirty="0"/>
+                        <a:t>X</a:t>
+                      </a:r>
+                    </a:p>
+                  </a:txBody>
+                  <a:tcPr/>
+                </a:tc>
+                <a:tc>
+                  <a:txBody>
+                    <a:bodyPr/>
+                    <a:lstStyle/>
+                    <a:p>
+                      <a:pPr algn="ctr"/>
+                      <a:r>
+                        <a:rPr lang="en-US" sz="2400" dirty="0"/>
+                        <a:t>Freq.</a:t>
+                      </a:r>
+                    </a:p>
+                  </a:txBody>
+                  <a:tcPr/>
+                </a:tc>
+                <a:tc>
+                  <a:txBody>
+                    <a:bodyPr/>
+                    <a:lstStyle/>
+                    <a:p>
+                      <a:pPr algn="ctr"/>
+                      <a:r>
+                        <a:rPr lang="en-US" sz="2400" dirty="0"/>
+                        <a:t>Rel. Freq</a:t>
+                      </a:r>
+                    </a:p>
+                  </a:txBody>
+                  <a:tcPr/>
+                </a:tc>
+                <a:extLst>
+                  <a:ext uri="{0D108BD9-81ED-4DB2-BD59-A6C34878D82A}">
+                    <a16:rowId xmlns:a16="http://schemas.microsoft.com/office/drawing/2014/main" val="2359691844"/>
+                  </a:ext>
+                </a:extLst>
+              </a:tr>
+              <a:tr h="440858">
+                <a:tc>
+                  <a:txBody>
+                    <a:bodyPr/>
+                    <a:lstStyle/>
+                    <a:p>
+                      <a:pPr algn="ctr"/>
+                      <a:r>
+                        <a:rPr lang="en-US" sz="2400" dirty="0"/>
+                        <a:t>1</a:t>
+                      </a:r>
+                    </a:p>
+                  </a:txBody>
+                  <a:tcPr/>
+                </a:tc>
+                <a:tc>
+                  <a:txBody>
+                    <a:bodyPr/>
+                    <a:lstStyle/>
+                    <a:p>
+                      <a:pPr algn="ctr"/>
+                      <a:r>
+                        <a:rPr lang="en-US" sz="2400" dirty="0"/>
+                        <a:t>1</a:t>
+                      </a:r>
+                    </a:p>
+                  </a:txBody>
+                  <a:tcPr/>
+                </a:tc>
+                <a:tc>
+                  <a:txBody>
+                    <a:bodyPr/>
+                    <a:lstStyle/>
+                    <a:p>
+                      <a:pPr algn="ctr"/>
+                      <a:r>
+                        <a:rPr lang="en-US" sz="2400" dirty="0"/>
+                        <a:t>0.125</a:t>
+                      </a:r>
+                    </a:p>
+                  </a:txBody>
+                  <a:tcPr/>
+                </a:tc>
+                <a:extLst>
+                  <a:ext uri="{0D108BD9-81ED-4DB2-BD59-A6C34878D82A}">
+                    <a16:rowId xmlns:a16="http://schemas.microsoft.com/office/drawing/2014/main" val="792206646"/>
+                  </a:ext>
+                </a:extLst>
+              </a:tr>
+              <a:tr h="440858">
+                <a:tc>
+                  <a:txBody>
+                    <a:bodyPr/>
+                    <a:lstStyle/>
+                    <a:p>
+                      <a:pPr algn="ctr"/>
+                      <a:r>
+                        <a:rPr lang="en-US" sz="2400" dirty="0"/>
+                        <a:t>3</a:t>
+                      </a:r>
+                    </a:p>
+                  </a:txBody>
+                  <a:tcPr/>
+                </a:tc>
+                <a:tc>
+                  <a:txBody>
+                    <a:bodyPr/>
+                    <a:lstStyle/>
+                    <a:p>
+                      <a:pPr algn="ctr"/>
+                      <a:r>
+                        <a:rPr lang="en-US" sz="2400" dirty="0"/>
+                        <a:t>1</a:t>
+                      </a:r>
+                    </a:p>
+                  </a:txBody>
+                  <a:tcPr/>
+                </a:tc>
+                <a:tc>
+                  <a:txBody>
+                    <a:bodyPr/>
+                    <a:lstStyle/>
+                    <a:p>
+                      <a:pPr algn="ctr"/>
+                      <a:r>
+                        <a:rPr lang="en-US" sz="2400" dirty="0"/>
+                        <a:t>0.125</a:t>
+                      </a:r>
+                    </a:p>
+                  </a:txBody>
+                  <a:tcPr/>
+                </a:tc>
+                <a:extLst>
+                  <a:ext uri="{0D108BD9-81ED-4DB2-BD59-A6C34878D82A}">
+                    <a16:rowId xmlns:a16="http://schemas.microsoft.com/office/drawing/2014/main" val="1708416178"/>
+                  </a:ext>
+                </a:extLst>
+              </a:tr>
+              <a:tr h="440858">
+                <a:tc>
+                  <a:txBody>
+                    <a:bodyPr/>
+                    <a:lstStyle/>
+                    <a:p>
+                      <a:pPr algn="ctr"/>
+                      <a:r>
+                        <a:rPr lang="en-US" sz="2400" dirty="0"/>
+                        <a:t>5</a:t>
+                      </a:r>
+                    </a:p>
+                  </a:txBody>
+                  <a:tcPr/>
+                </a:tc>
+                <a:tc>
+                  <a:txBody>
+                    <a:bodyPr/>
+                    <a:lstStyle/>
+                    <a:p>
+                      <a:pPr algn="ctr"/>
+                      <a:r>
+                        <a:rPr lang="en-US" sz="2400" dirty="0"/>
+                        <a:t>2</a:t>
+                      </a:r>
+                    </a:p>
+                  </a:txBody>
+                  <a:tcPr/>
+                </a:tc>
+                <a:tc>
+                  <a:txBody>
+                    <a:bodyPr/>
+                    <a:lstStyle/>
+                    <a:p>
+                      <a:pPr algn="ctr"/>
+                      <a:r>
+                        <a:rPr lang="en-US" sz="2400" dirty="0"/>
+                        <a:t>0.250</a:t>
+                      </a:r>
+                    </a:p>
+                  </a:txBody>
+                  <a:tcPr/>
+                </a:tc>
+                <a:extLst>
+                  <a:ext uri="{0D108BD9-81ED-4DB2-BD59-A6C34878D82A}">
+                    <a16:rowId xmlns:a16="http://schemas.microsoft.com/office/drawing/2014/main" val="3979562944"/>
+                  </a:ext>
+                </a:extLst>
+              </a:tr>
+              <a:tr h="440858">
+                <a:tc>
+                  <a:txBody>
+                    <a:bodyPr/>
+                    <a:lstStyle/>
+                    <a:p>
+                      <a:pPr algn="ctr"/>
+                      <a:r>
+                        <a:rPr lang="en-US" sz="2400" dirty="0"/>
+                        <a:t>6</a:t>
+                      </a:r>
+                    </a:p>
+                  </a:txBody>
+                  <a:tcPr/>
+                </a:tc>
+                <a:tc>
+                  <a:txBody>
+                    <a:bodyPr/>
+                    <a:lstStyle/>
+                    <a:p>
+                      <a:pPr algn="ctr"/>
+                      <a:r>
+                        <a:rPr lang="en-US" sz="2400" dirty="0"/>
+                        <a:t>1</a:t>
+                      </a:r>
+                    </a:p>
+                  </a:txBody>
+                  <a:tcPr/>
+                </a:tc>
+                <a:tc>
+                  <a:txBody>
+                    <a:bodyPr/>
+                    <a:lstStyle/>
+                    <a:p>
+                      <a:pPr algn="ctr"/>
+                      <a:r>
+                        <a:rPr lang="en-US" sz="2400" dirty="0"/>
+                        <a:t>0.125</a:t>
+                      </a:r>
+                    </a:p>
+                  </a:txBody>
+                  <a:tcPr/>
+                </a:tc>
+                <a:extLst>
+                  <a:ext uri="{0D108BD9-81ED-4DB2-BD59-A6C34878D82A}">
+                    <a16:rowId xmlns:a16="http://schemas.microsoft.com/office/drawing/2014/main" val="2737024317"/>
+                  </a:ext>
+                </a:extLst>
+              </a:tr>
+              <a:tr h="440858">
+                <a:tc>
+                  <a:txBody>
+                    <a:bodyPr/>
+                    <a:lstStyle/>
+                    <a:p>
+                      <a:pPr algn="ctr"/>
+                      <a:r>
+                        <a:rPr lang="en-US" sz="2400" dirty="0"/>
+                        <a:t>7</a:t>
+                      </a:r>
+                    </a:p>
+                  </a:txBody>
+                  <a:tcPr/>
+                </a:tc>
+                <a:tc>
+                  <a:txBody>
+                    <a:bodyPr/>
+                    <a:lstStyle/>
+                    <a:p>
+                      <a:pPr algn="ctr"/>
+                      <a:r>
+                        <a:rPr lang="en-US" sz="2400" dirty="0"/>
+                        <a:t>2</a:t>
+                      </a:r>
+                    </a:p>
+                  </a:txBody>
+                  <a:tcPr/>
+                </a:tc>
+                <a:tc>
+                  <a:txBody>
+                    <a:bodyPr/>
+                    <a:lstStyle/>
+                    <a:p>
+                      <a:pPr algn="ctr"/>
+                      <a:r>
+                        <a:rPr lang="en-US" sz="2400" dirty="0"/>
+                        <a:t>0.250</a:t>
+                      </a:r>
+                    </a:p>
+                  </a:txBody>
+                  <a:tcPr/>
+                </a:tc>
+                <a:extLst>
+                  <a:ext uri="{0D108BD9-81ED-4DB2-BD59-A6C34878D82A}">
+                    <a16:rowId xmlns:a16="http://schemas.microsoft.com/office/drawing/2014/main" val="105989846"/>
+                  </a:ext>
+                </a:extLst>
+              </a:tr>
+              <a:tr h="440858">
+                <a:tc>
+                  <a:txBody>
+                    <a:bodyPr/>
+                    <a:lstStyle/>
+                    <a:p>
+                      <a:pPr algn="ctr"/>
+                      <a:r>
+                        <a:rPr lang="en-US" sz="2400" dirty="0"/>
+                        <a:t>8</a:t>
+                      </a:r>
+                    </a:p>
+                  </a:txBody>
+                  <a:tcPr/>
+                </a:tc>
+                <a:tc>
+                  <a:txBody>
+                    <a:bodyPr/>
+                    <a:lstStyle/>
+                    <a:p>
+                      <a:pPr algn="ctr"/>
+                      <a:r>
+                        <a:rPr lang="en-US" sz="2400" dirty="0"/>
+                        <a:t>1</a:t>
+                      </a:r>
+                    </a:p>
+                  </a:txBody>
+                  <a:tcPr/>
+                </a:tc>
+                <a:tc>
+                  <a:txBody>
+                    <a:bodyPr/>
+                    <a:lstStyle/>
+                    <a:p>
+                      <a:pPr algn="ctr"/>
+                      <a:r>
+                        <a:rPr lang="en-US" sz="2400" dirty="0"/>
+                        <a:t>0.125</a:t>
+                      </a:r>
+                    </a:p>
+                  </a:txBody>
+                  <a:tcPr/>
+                </a:tc>
+                <a:extLst>
+                  <a:ext uri="{0D108BD9-81ED-4DB2-BD59-A6C34878D82A}">
+                    <a16:rowId xmlns:a16="http://schemas.microsoft.com/office/drawing/2014/main" val="2567081470"/>
+                  </a:ext>
+                </a:extLst>
+              </a:tr>
+            </a:tbl>
+          </a:graphicData>
+        </a:graphic>
+      </p:graphicFrame>
+      <p:sp>
+        <p:nvSpPr>
+          <p:cNvPr id="3" name="Slide Number Placeholder 2">
+            <a:extLst>
+              <a:ext uri="{FF2B5EF4-FFF2-40B4-BE49-F238E27FC236}">
+                <a16:creationId xmlns:a16="http://schemas.microsoft.com/office/drawing/2014/main" id="{D8D51BDB-48DC-255C-974A-276B133060F2}"/>
+              </a:ext>
+            </a:extLst>
+          </p:cNvPr>
+          <p:cNvSpPr>
+            <a:spLocks noGrp="1"/>
+          </p:cNvSpPr>
+          <p:nvPr>
+            <p:ph type="sldNum" sz="quarter" idx="12"/>
+          </p:nvPr>
+        </p:nvSpPr>
+        <p:spPr/>
+        <p:txBody>
+          <a:bodyPr/>
+          <a:lstStyle/>
+          <a:p>
+            <a:fld id="{A80A81DD-F10A-4B1C-963A-0ABBB4865886}" type="slidenum">
+              <a:rPr lang="en-US" smtClean="0"/>
+              <a:t>7</a:t>
+            </a:fld>
+            <a:endParaRPr lang="en-US"/>
+          </a:p>
+        </p:txBody>
+      </p:sp>
+    </p:spTree>
+    <p:extLst>
+      <p:ext uri="{BB962C8B-B14F-4D97-AF65-F5344CB8AC3E}">
+        <p14:creationId xmlns:p14="http://schemas.microsoft.com/office/powerpoint/2010/main" val="3824685737"/>
+      </p:ext>
+    </p:extLst>
+  </p:cSld>
+  <p:clrMapOvr>
+    <a:masterClrMapping/>
+  </p:clrMapOvr>
+</p:sld>
+</file>
+
+<file path=ppt/slides/slide8.xml><?xml version="1.0" encoding="utf-8"?>
+<p:sld xmlns:a="http://schemas.openxmlformats.org/drawingml/2006/main" xmlns:r="http://schemas.openxmlformats.org/officeDocument/2006/relationships" xmlns:p="http://schemas.openxmlformats.org/presentationml/2006/main">
+  <p:cSld>
+    <p:spTree>
+      <p:nvGrpSpPr>
+        <p:cNvPr id="1" name=""/>
+        <p:cNvGrpSpPr/>
+        <p:nvPr/>
+      </p:nvGrpSpPr>
+      <p:grpSpPr>
+        <a:xfrm>
+          <a:off x="0" y="0"/>
+          <a:ext cx="0" cy="0"/>
+          <a:chOff x="0" y="0"/>
+          <a:chExt cx="0" cy="0"/>
+        </a:xfrm>
+      </p:grpSpPr>
+      <p:sp>
+        <p:nvSpPr>
+          <p:cNvPr id="6" name="Body card">
+            <a:extLst>
+              <a:ext uri="{FF2B5EF4-FFF2-40B4-BE49-F238E27FC236}">
+                <a16:creationId xmlns:a16="http://schemas.microsoft.com/office/drawing/2014/main" id="{B11AC56F-EA5B-340A-A360-19C752E6E072}"/>
               </a:ext>
             </a:extLst>
           </p:cNvPr>
@@ -19093,8 +21207,8 @@
           </a:p>
         </p:txBody>
       </p:sp>
-      <mc:AlternateContent xmlns:mc="http://schemas.openxmlformats.org/markup-compatibility/2006" xmlns:a14="http://schemas.microsoft.com/office/drawing/2010/main">
-        <mc:Choice Requires="a14">
+      <mc:AlternateContent xmlns:mc="http://schemas.openxmlformats.org/markup-compatibility/2006">
+        <mc:Choice xmlns:a14="http://schemas.microsoft.com/office/drawing/2010/main" Requires="a14">
           <p:sp>
             <p:nvSpPr>
               <p:cNvPr id="3" name="Content Placeholder 2">
@@ -19222,7 +21336,7 @@
             </p:txBody>
           </p:sp>
         </mc:Choice>
-        <mc:Fallback xmlns="">
+        <mc:Fallback>
           <p:sp>
             <p:nvSpPr>
               <p:cNvPr id="3" name="Content Placeholder 2">
@@ -19268,10 +21382,39 @@
       </mc:AlternateContent>
       <p:sp>
         <p:nvSpPr>
+          <p:cNvPr id="4" name="Slide Number Placeholder 3">
+            <a:extLst>
+              <a:ext uri="{FF2B5EF4-FFF2-40B4-BE49-F238E27FC236}">
+                <a16:creationId xmlns:a16="http://schemas.microsoft.com/office/drawing/2014/main" id="{A8A3D05C-39E8-C803-B86A-BDFEEC258D61}"/>
+              </a:ext>
+            </a:extLst>
+          </p:cNvPr>
+          <p:cNvSpPr>
+            <a:spLocks noGrp="1"/>
+          </p:cNvSpPr>
+          <p:nvPr>
+            <p:ph type="sldNum" sz="quarter" idx="12"/>
+          </p:nvPr>
+        </p:nvSpPr>
+        <p:spPr/>
+        <p:txBody>
+          <a:bodyPr/>
+          <a:lstStyle/>
+          <a:p>
+            <a:fld id="{A80A81DD-F10A-4B1C-963A-0ABBB4865886}" type="slidenum">
+              <a:rPr lang="en-US" smtClean="0"/>
+              <a:t>8</a:t>
+            </a:fld>
+            <a:endParaRPr lang="en-US"/>
+          </a:p>
+        </p:txBody>
+      </p:sp>
+      <p:sp>
+        <p:nvSpPr>
           <p:cNvPr id="5" name="Title rule">
             <a:extLst>
               <a:ext uri="{FF2B5EF4-FFF2-40B4-BE49-F238E27FC236}">
-                <a16:creationId xmlns:a16="http://schemas.microsoft.com/office/drawing/2014/main" id="{B37FE770-0FA2-564A-6CFC-6255068EFCB8}"/>
+                <a16:creationId xmlns:a16="http://schemas.microsoft.com/office/drawing/2014/main" id="{24354336-7175-FDD0-7D51-94E004DA9D24}"/>
               </a:ext>
             </a:extLst>
           </p:cNvPr>
@@ -19334,39 +21477,10 @@
           </a:p>
         </p:txBody>
       </p:sp>
-      <p:sp>
-        <p:nvSpPr>
-          <p:cNvPr id="7" name="Slide Number Placeholder 6">
-            <a:extLst>
-              <a:ext uri="{FF2B5EF4-FFF2-40B4-BE49-F238E27FC236}">
-                <a16:creationId xmlns:a16="http://schemas.microsoft.com/office/drawing/2014/main" id="{FBDF5ED5-E881-C05B-7B77-4787CBD84EC6}"/>
-              </a:ext>
-            </a:extLst>
-          </p:cNvPr>
-          <p:cNvSpPr>
-            <a:spLocks noGrp="1"/>
-          </p:cNvSpPr>
-          <p:nvPr>
-            <p:ph type="sldNum" sz="quarter" idx="12"/>
-          </p:nvPr>
-        </p:nvSpPr>
-        <p:spPr/>
-        <p:txBody>
-          <a:bodyPr/>
-          <a:lstStyle/>
-          <a:p>
-            <a:fld id="{A80A81DD-F10A-4B1C-963A-0ABBB4865886}" type="slidenum">
-              <a:rPr lang="en-US" smtClean="0"/>
-              <a:t>6</a:t>
-            </a:fld>
-            <a:endParaRPr lang="en-US"/>
-          </a:p>
-        </p:txBody>
-      </p:sp>
     </p:spTree>
     <p:extLst>
       <p:ext uri="{BB962C8B-B14F-4D97-AF65-F5344CB8AC3E}">
-        <p14:creationId xmlns:p14="http://schemas.microsoft.com/office/powerpoint/2010/main" val="1872709583"/>
+        <p14:creationId xmlns:p14="http://schemas.microsoft.com/office/powerpoint/2010/main" val="2973861821"/>
       </p:ext>
     </p:extLst>
   </p:cSld>
@@ -19376,7 +21490,7 @@
 </p:sld>
 </file>
 
-<file path=ppt/slides/slide7.xml><?xml version="1.0" encoding="utf-8"?>
+<file path=ppt/slides/slide9.xml><?xml version="1.0" encoding="utf-8"?>
 <p:sld xmlns:a="http://schemas.openxmlformats.org/drawingml/2006/main" xmlns:r="http://schemas.openxmlformats.org/officeDocument/2006/relationships" xmlns:p="http://schemas.openxmlformats.org/presentationml/2006/main">
   <p:cSld>
     <p:spTree>
@@ -19398,7 +21512,7 @@
           <p:cNvPr id="6" name="Body card">
             <a:extLst>
               <a:ext uri="{FF2B5EF4-FFF2-40B4-BE49-F238E27FC236}">
-                <a16:creationId xmlns:a16="http://schemas.microsoft.com/office/drawing/2014/main" id="{7FC159BE-A334-7155-F914-910EA569873B}"/>
+                <a16:creationId xmlns:a16="http://schemas.microsoft.com/office/drawing/2014/main" id="{C85810FD-CE8C-D49A-A2CD-1C6F895F21C8}"/>
               </a:ext>
             </a:extLst>
           </p:cNvPr>
@@ -19573,10 +21687,39 @@
       </mc:AlternateContent>
       <p:sp>
         <p:nvSpPr>
+          <p:cNvPr id="4" name="Slide Number Placeholder 3">
+            <a:extLst>
+              <a:ext uri="{FF2B5EF4-FFF2-40B4-BE49-F238E27FC236}">
+                <a16:creationId xmlns:a16="http://schemas.microsoft.com/office/drawing/2014/main" id="{D4009F1A-7437-061A-A4F8-AAD9164E973A}"/>
+              </a:ext>
+            </a:extLst>
+          </p:cNvPr>
+          <p:cNvSpPr>
+            <a:spLocks noGrp="1"/>
+          </p:cNvSpPr>
+          <p:nvPr>
+            <p:ph type="sldNum" sz="quarter" idx="12"/>
+          </p:nvPr>
+        </p:nvSpPr>
+        <p:spPr/>
+        <p:txBody>
+          <a:bodyPr/>
+          <a:lstStyle/>
+          <a:p>
+            <a:fld id="{A80A81DD-F10A-4B1C-963A-0ABBB4865886}" type="slidenum">
+              <a:rPr lang="en-US" smtClean="0"/>
+              <a:t>9</a:t>
+            </a:fld>
+            <a:endParaRPr lang="en-US"/>
+          </a:p>
+        </p:txBody>
+      </p:sp>
+      <p:sp>
+        <p:nvSpPr>
           <p:cNvPr id="5" name="Title rule">
             <a:extLst>
               <a:ext uri="{FF2B5EF4-FFF2-40B4-BE49-F238E27FC236}">
-                <a16:creationId xmlns:a16="http://schemas.microsoft.com/office/drawing/2014/main" id="{45724276-28DD-B612-D968-43514A3D20B7}"/>
+                <a16:creationId xmlns:a16="http://schemas.microsoft.com/office/drawing/2014/main" id="{F8E13CEA-2DC3-005E-76CA-650F5FFE1F6C}"/>
               </a:ext>
             </a:extLst>
           </p:cNvPr>
@@ -19639,1399 +21782,10 @@
           </a:p>
         </p:txBody>
       </p:sp>
-      <p:sp>
-        <p:nvSpPr>
-          <p:cNvPr id="7" name="Slide Number Placeholder 6">
-            <a:extLst>
-              <a:ext uri="{FF2B5EF4-FFF2-40B4-BE49-F238E27FC236}">
-                <a16:creationId xmlns:a16="http://schemas.microsoft.com/office/drawing/2014/main" id="{DB251F61-8316-541F-71E7-1B259E35FBFD}"/>
-              </a:ext>
-            </a:extLst>
-          </p:cNvPr>
-          <p:cNvSpPr>
-            <a:spLocks noGrp="1"/>
-          </p:cNvSpPr>
-          <p:nvPr>
-            <p:ph type="sldNum" sz="quarter" idx="12"/>
-          </p:nvPr>
-        </p:nvSpPr>
-        <p:spPr/>
-        <p:txBody>
-          <a:bodyPr/>
-          <a:lstStyle/>
-          <a:p>
-            <a:fld id="{A80A81DD-F10A-4B1C-963A-0ABBB4865886}" type="slidenum">
-              <a:rPr lang="en-US" smtClean="0"/>
-              <a:t>7</a:t>
-            </a:fld>
-            <a:endParaRPr lang="en-US"/>
-          </a:p>
-        </p:txBody>
-      </p:sp>
     </p:spTree>
     <p:extLst>
       <p:ext uri="{BB962C8B-B14F-4D97-AF65-F5344CB8AC3E}">
-        <p14:creationId xmlns:p14="http://schemas.microsoft.com/office/powerpoint/2010/main" val="1462869705"/>
-      </p:ext>
-    </p:extLst>
-  </p:cSld>
-  <p:clrMapOvr>
-    <a:masterClrMapping/>
-  </p:clrMapOvr>
-</p:sld>
-</file>
-
-<file path=ppt/slides/slide8.xml><?xml version="1.0" encoding="utf-8"?>
-<p:sld xmlns:a="http://schemas.openxmlformats.org/drawingml/2006/main" xmlns:r="http://schemas.openxmlformats.org/officeDocument/2006/relationships" xmlns:p="http://schemas.openxmlformats.org/presentationml/2006/main">
-  <p:cSld>
-    <p:spTree>
-      <p:nvGrpSpPr>
-        <p:cNvPr id="1" name=""/>
-        <p:cNvGrpSpPr/>
-        <p:nvPr/>
-      </p:nvGrpSpPr>
-      <p:grpSpPr>
-        <a:xfrm>
-          <a:off x="0" y="0"/>
-          <a:ext cx="0" cy="0"/>
-          <a:chOff x="0" y="0"/>
-          <a:chExt cx="0" cy="0"/>
-        </a:xfrm>
-      </p:grpSpPr>
-      <p:grpSp>
-        <p:nvGrpSpPr>
-          <p:cNvPr id="28" name="Group 27">
-            <a:extLst>
-              <a:ext uri="{FF2B5EF4-FFF2-40B4-BE49-F238E27FC236}">
-                <a16:creationId xmlns:a16="http://schemas.microsoft.com/office/drawing/2014/main" id="{7AA1FB4F-B4C0-19FC-F8A6-80F1019CDA1B}"/>
-              </a:ext>
-            </a:extLst>
-          </p:cNvPr>
-          <p:cNvGrpSpPr/>
-          <p:nvPr/>
-        </p:nvGrpSpPr>
-        <p:grpSpPr>
-          <a:xfrm>
-            <a:off x="281345" y="2185532"/>
-            <a:ext cx="11223178" cy="3231099"/>
-            <a:chOff x="170508" y="2213128"/>
-            <a:chExt cx="11223178" cy="3231099"/>
-          </a:xfrm>
-        </p:grpSpPr>
-        <mc:AlternateContent xmlns:mc="http://schemas.openxmlformats.org/markup-compatibility/2006" xmlns:a14="http://schemas.microsoft.com/office/drawing/2010/main">
-          <mc:Choice Requires="a14">
-            <p:sp>
-              <p:nvSpPr>
-                <p:cNvPr id="19" name="TextBox 18">
-                  <a:extLst>
-                    <a:ext uri="{FF2B5EF4-FFF2-40B4-BE49-F238E27FC236}">
-                      <a16:creationId xmlns:a16="http://schemas.microsoft.com/office/drawing/2014/main" id="{0D94D794-5780-EB94-1BF2-FE234895A4DE}"/>
-                    </a:ext>
-                  </a:extLst>
-                </p:cNvPr>
-                <p:cNvSpPr txBox="1"/>
-                <p:nvPr/>
-              </p:nvSpPr>
-              <p:spPr>
-                <a:xfrm>
-                  <a:off x="2051669" y="5058295"/>
-                  <a:ext cx="789255" cy="276999"/>
-                </a:xfrm>
-                <a:prstGeom prst="rect">
-                  <a:avLst/>
-                </a:prstGeom>
-                <a:noFill/>
-              </p:spPr>
-              <p:txBody>
-                <a:bodyPr wrap="none" lIns="0" tIns="0" rIns="0" bIns="0" rtlCol="0">
-                  <a:spAutoFit/>
-                </a:bodyPr>
-                <a:lstStyle/>
-                <a:p>
-                  <a:pPr marL="0" marR="0" lvl="0" indent="0" algn="l" defTabSz="914400" rtl="0" eaLnBrk="1" fontAlgn="auto" latinLnBrk="0" hangingPunct="1">
-                    <a:lnSpc>
-                      <a:spcPct val="100000"/>
-                    </a:lnSpc>
-                    <a:spcBef>
-                      <a:spcPts val="0"/>
-                    </a:spcBef>
-                    <a:spcAft>
-                      <a:spcPts val="0"/>
-                    </a:spcAft>
-                    <a:buClrTx/>
-                    <a:buSzTx/>
-                    <a:buFontTx/>
-                    <a:buNone/>
-                    <a:tabLst/>
-                    <a:defRPr/>
-                  </a:pPr>
-                  <a14:m>
-                    <m:oMathPara xmlns:m="http://schemas.openxmlformats.org/officeDocument/2006/math">
-                      <m:oMath>
-                        <m:acc>
-                          <m:accPr>
-                            <m:chr m:val="̅"/>
-                            <m:ctrlPr>
-                              <a:rPr kumimoji="0" lang="en-US" sz="1800" b="0" i="1" u="none" strike="noStrike" kern="1200" cap="none" spc="0" normalizeH="0" baseline="0" noProof="0" smtClean="0">
-                                <a:ln>
-                                  <a:noFill/>
-                                </a:ln>
-                                <a:solidFill>
-                                  <a:prstClr val="black"/>
-                                </a:solidFill>
-                                <a:effectLst/>
-                                <a:uLnTx/>
-                                <a:uFillTx/>
-                                <a:latin typeface="Cambria Math" panose="02040503050406030204" pitchFamily="18" charset="0"/>
-                                <a:ea typeface="+mn-ea"/>
-                                <a:cs typeface="+mn-cs"/>
-                              </a:rPr>
-                            </m:ctrlPr>
-                          </m:accPr>
-                          <m:e>
-                            <m:r>
-                              <a:rPr kumimoji="0" lang="en-US" sz="1800" b="0" i="1" u="none" strike="noStrike" kern="1200" cap="none" spc="0" normalizeH="0" baseline="0" noProof="0" smtClean="0">
-                                <a:ln>
-                                  <a:noFill/>
-                                </a:ln>
-                                <a:solidFill>
-                                  <a:prstClr val="black"/>
-                                </a:solidFill>
-                                <a:effectLst/>
-                                <a:uLnTx/>
-                                <a:uFillTx/>
-                                <a:latin typeface="Cambria Math" panose="02040503050406030204" pitchFamily="18" charset="0"/>
-                                <a:ea typeface="+mn-ea"/>
-                                <a:cs typeface="+mn-cs"/>
-                              </a:rPr>
-                              <m:t>𝑥</m:t>
-                            </m:r>
-                          </m:e>
-                        </m:acc>
-                        <m:r>
-                          <a:rPr kumimoji="0" lang="en-US" sz="1800" b="0" i="1" u="none" strike="noStrike" kern="1200" cap="none" spc="0" normalizeH="0" baseline="0" noProof="0" smtClean="0">
-                            <a:ln>
-                              <a:noFill/>
-                            </a:ln>
-                            <a:solidFill>
-                              <a:prstClr val="black"/>
-                            </a:solidFill>
-                            <a:effectLst/>
-                            <a:uLnTx/>
-                            <a:uFillTx/>
-                            <a:latin typeface="Cambria Math" panose="02040503050406030204" pitchFamily="18" charset="0"/>
-                            <a:ea typeface="+mn-ea"/>
-                            <a:cs typeface="+mn-cs"/>
-                          </a:rPr>
-                          <m:t>=9.2</m:t>
-                        </m:r>
-                      </m:oMath>
-                    </m:oMathPara>
-                  </a14:m>
-                  <a:endParaRPr kumimoji="0" lang="en-US" sz="1800" b="0" i="0" u="none" strike="noStrike" kern="1200" cap="none" spc="0" normalizeH="0" baseline="0" noProof="0" dirty="0">
-                    <a:ln>
-                      <a:noFill/>
-                    </a:ln>
-                    <a:solidFill>
-                      <a:prstClr val="black"/>
-                    </a:solidFill>
-                    <a:effectLst/>
-                    <a:uLnTx/>
-                    <a:uFillTx/>
-                    <a:latin typeface="Calibri" panose="020F0502020204030204"/>
-                    <a:ea typeface="+mn-ea"/>
-                    <a:cs typeface="+mn-cs"/>
-                  </a:endParaRPr>
-                </a:p>
-              </p:txBody>
-            </p:sp>
-          </mc:Choice>
-          <mc:Fallback xmlns="">
-            <p:sp>
-              <p:nvSpPr>
-                <p:cNvPr id="19" name="TextBox 18">
-                  <a:extLst>
-                    <a:ext uri="{FF2B5EF4-FFF2-40B4-BE49-F238E27FC236}">
-                      <a16:creationId xmlns:a16="http://schemas.microsoft.com/office/drawing/2014/main" id="{0D94D794-5780-EB94-1BF2-FE234895A4DE}"/>
-                    </a:ext>
-                  </a:extLst>
-                </p:cNvPr>
-                <p:cNvSpPr txBox="1">
-                  <a:spLocks noRot="1" noChangeAspect="1" noMove="1" noResize="1" noEditPoints="1" noAdjustHandles="1" noChangeArrowheads="1" noChangeShapeType="1" noTextEdit="1"/>
-                </p:cNvSpPr>
-                <p:nvPr/>
-              </p:nvSpPr>
-              <p:spPr>
-                <a:xfrm>
-                  <a:off x="2051669" y="5058295"/>
-                  <a:ext cx="789255" cy="276999"/>
-                </a:xfrm>
-                <a:prstGeom prst="rect">
-                  <a:avLst/>
-                </a:prstGeom>
-                <a:blipFill>
-                  <a:blip r:embed="rId2"/>
-                  <a:stretch>
-                    <a:fillRect l="-3876" r="-6977" b="-6522"/>
-                  </a:stretch>
-                </a:blipFill>
-              </p:spPr>
-              <p:txBody>
-                <a:bodyPr/>
-                <a:lstStyle/>
-                <a:p>
-                  <a:r>
-                    <a:rPr lang="en-US">
-                      <a:noFill/>
-                    </a:rPr>
-                    <a:t> </a:t>
-                  </a:r>
-                </a:p>
-              </p:txBody>
-            </p:sp>
-          </mc:Fallback>
-        </mc:AlternateContent>
-        <p:pic>
-          <p:nvPicPr>
-            <p:cNvPr id="22" name="Picture 21">
-              <a:extLst>
-                <a:ext uri="{FF2B5EF4-FFF2-40B4-BE49-F238E27FC236}">
-                  <a16:creationId xmlns:a16="http://schemas.microsoft.com/office/drawing/2014/main" id="{5EB56406-5F22-DCCD-EA7F-C958F3D21101}"/>
-                </a:ext>
-              </a:extLst>
-            </p:cNvPr>
-            <p:cNvPicPr>
-              <a:picLocks noChangeAspect="1"/>
-            </p:cNvPicPr>
-            <p:nvPr/>
-          </p:nvPicPr>
-          <p:blipFill>
-            <a:blip r:embed="rId3"/>
-            <a:stretch>
-              <a:fillRect/>
-            </a:stretch>
-          </p:blipFill>
-          <p:spPr>
-            <a:xfrm>
-              <a:off x="170508" y="2213128"/>
-              <a:ext cx="5170726" cy="2494353"/>
-            </a:xfrm>
-            <a:prstGeom prst="rect">
-              <a:avLst/>
-            </a:prstGeom>
-          </p:spPr>
-        </p:pic>
-        <p:pic>
-          <p:nvPicPr>
-            <p:cNvPr id="23" name="Picture 22">
-              <a:extLst>
-                <a:ext uri="{FF2B5EF4-FFF2-40B4-BE49-F238E27FC236}">
-                  <a16:creationId xmlns:a16="http://schemas.microsoft.com/office/drawing/2014/main" id="{E8AA625E-81C5-ECCB-6AEA-588CF86FBBE0}"/>
-                </a:ext>
-              </a:extLst>
-            </p:cNvPr>
-            <p:cNvPicPr>
-              <a:picLocks noChangeAspect="1"/>
-            </p:cNvPicPr>
-            <p:nvPr/>
-          </p:nvPicPr>
-          <p:blipFill>
-            <a:blip r:embed="rId3"/>
-            <a:stretch>
-              <a:fillRect/>
-            </a:stretch>
-          </p:blipFill>
-          <p:spPr>
-            <a:xfrm rot="604632">
-              <a:off x="6222960" y="2269308"/>
-              <a:ext cx="5170726" cy="2494353"/>
-            </a:xfrm>
-            <a:prstGeom prst="rect">
-              <a:avLst/>
-            </a:prstGeom>
-          </p:spPr>
-        </p:pic>
-        <p:sp>
-          <p:nvSpPr>
-            <p:cNvPr id="20" name="Isosceles Triangle 19">
-              <a:extLst>
-                <a:ext uri="{FF2B5EF4-FFF2-40B4-BE49-F238E27FC236}">
-                  <a16:creationId xmlns:a16="http://schemas.microsoft.com/office/drawing/2014/main" id="{B2F214C2-1D86-F2C7-F495-1D8DF5707C70}"/>
-                </a:ext>
-              </a:extLst>
-            </p:cNvPr>
-            <p:cNvSpPr/>
-            <p:nvPr/>
-          </p:nvSpPr>
-          <p:spPr>
-            <a:xfrm>
-              <a:off x="7678880" y="4258680"/>
-              <a:ext cx="259773" cy="586392"/>
-            </a:xfrm>
-            <a:prstGeom prst="triangle">
-              <a:avLst/>
-            </a:prstGeom>
-          </p:spPr>
-          <p:style>
-            <a:lnRef idx="2">
-              <a:schemeClr val="dk1">
-                <a:shade val="15000"/>
-              </a:schemeClr>
-            </a:lnRef>
-            <a:fillRef idx="1">
-              <a:schemeClr val="dk1"/>
-            </a:fillRef>
-            <a:effectRef idx="0">
-              <a:schemeClr val="dk1"/>
-            </a:effectRef>
-            <a:fontRef idx="minor">
-              <a:schemeClr val="lt1"/>
-            </a:fontRef>
-          </p:style>
-          <p:txBody>
-            <a:bodyPr rtlCol="0" anchor="ctr"/>
-            <a:lstStyle/>
-            <a:p>
-              <a:pPr marL="0" marR="0" lvl="0" indent="0" algn="ctr" defTabSz="914400" rtl="0" eaLnBrk="1" fontAlgn="auto" latinLnBrk="0" hangingPunct="1">
-                <a:lnSpc>
-                  <a:spcPct val="100000"/>
-                </a:lnSpc>
-                <a:spcBef>
-                  <a:spcPts val="0"/>
-                </a:spcBef>
-                <a:spcAft>
-                  <a:spcPts val="0"/>
-                </a:spcAft>
-                <a:buClrTx/>
-                <a:buSzTx/>
-                <a:buFontTx/>
-                <a:buNone/>
-                <a:tabLst/>
-                <a:defRPr/>
-              </a:pPr>
-              <a:endParaRPr kumimoji="0" lang="en-US" sz="1800" b="0" i="0" u="none" strike="noStrike" kern="1200" cap="none" spc="0" normalizeH="0" baseline="0" noProof="0">
-                <a:ln>
-                  <a:noFill/>
-                </a:ln>
-                <a:solidFill>
-                  <a:prstClr val="white"/>
-                </a:solidFill>
-                <a:effectLst/>
-                <a:uLnTx/>
-                <a:uFillTx/>
-                <a:latin typeface="Calibri" panose="020F0502020204030204"/>
-                <a:ea typeface="+mn-ea"/>
-                <a:cs typeface="+mn-cs"/>
-              </a:endParaRPr>
-            </a:p>
-          </p:txBody>
-        </p:sp>
-        <p:sp>
-          <p:nvSpPr>
-            <p:cNvPr id="24" name="Isosceles Triangle 23">
-              <a:extLst>
-                <a:ext uri="{FF2B5EF4-FFF2-40B4-BE49-F238E27FC236}">
-                  <a16:creationId xmlns:a16="http://schemas.microsoft.com/office/drawing/2014/main" id="{216A7137-8C55-1EF5-CC3D-BFDC40D635C1}"/>
-                </a:ext>
-              </a:extLst>
-            </p:cNvPr>
-            <p:cNvSpPr/>
-            <p:nvPr/>
-          </p:nvSpPr>
-          <p:spPr>
-            <a:xfrm>
-              <a:off x="2123207" y="4296496"/>
-              <a:ext cx="259773" cy="586392"/>
-            </a:xfrm>
-            <a:prstGeom prst="triangle">
-              <a:avLst/>
-            </a:prstGeom>
-          </p:spPr>
-          <p:style>
-            <a:lnRef idx="2">
-              <a:schemeClr val="dk1">
-                <a:shade val="15000"/>
-              </a:schemeClr>
-            </a:lnRef>
-            <a:fillRef idx="1">
-              <a:schemeClr val="dk1"/>
-            </a:fillRef>
-            <a:effectRef idx="0">
-              <a:schemeClr val="dk1"/>
-            </a:effectRef>
-            <a:fontRef idx="minor">
-              <a:schemeClr val="lt1"/>
-            </a:fontRef>
-          </p:style>
-          <p:txBody>
-            <a:bodyPr rtlCol="0" anchor="ctr"/>
-            <a:lstStyle/>
-            <a:p>
-              <a:pPr marL="0" marR="0" lvl="0" indent="0" algn="ctr" defTabSz="914400" rtl="0" eaLnBrk="1" fontAlgn="auto" latinLnBrk="0" hangingPunct="1">
-                <a:lnSpc>
-                  <a:spcPct val="100000"/>
-                </a:lnSpc>
-                <a:spcBef>
-                  <a:spcPts val="0"/>
-                </a:spcBef>
-                <a:spcAft>
-                  <a:spcPts val="0"/>
-                </a:spcAft>
-                <a:buClrTx/>
-                <a:buSzTx/>
-                <a:buFontTx/>
-                <a:buNone/>
-                <a:tabLst/>
-                <a:defRPr/>
-              </a:pPr>
-              <a:endParaRPr kumimoji="0" lang="en-US" sz="1800" b="0" i="0" u="none" strike="noStrike" kern="1200" cap="none" spc="0" normalizeH="0" baseline="0" noProof="0">
-                <a:ln>
-                  <a:noFill/>
-                </a:ln>
-                <a:solidFill>
-                  <a:prstClr val="white"/>
-                </a:solidFill>
-                <a:effectLst/>
-                <a:uLnTx/>
-                <a:uFillTx/>
-                <a:latin typeface="Calibri" panose="020F0502020204030204"/>
-                <a:ea typeface="+mn-ea"/>
-                <a:cs typeface="+mn-cs"/>
-              </a:endParaRPr>
-            </a:p>
-          </p:txBody>
-        </p:sp>
-        <mc:AlternateContent xmlns:mc="http://schemas.openxmlformats.org/markup-compatibility/2006" xmlns:a14="http://schemas.microsoft.com/office/drawing/2010/main">
-          <mc:Choice Requires="a14">
-            <p:sp>
-              <p:nvSpPr>
-                <p:cNvPr id="25" name="TextBox 24">
-                  <a:extLst>
-                    <a:ext uri="{FF2B5EF4-FFF2-40B4-BE49-F238E27FC236}">
-                      <a16:creationId xmlns:a16="http://schemas.microsoft.com/office/drawing/2014/main" id="{49FE77AA-7C50-0F7E-C479-3A2E60163D35}"/>
-                    </a:ext>
-                  </a:extLst>
-                </p:cNvPr>
-                <p:cNvSpPr txBox="1"/>
-                <p:nvPr/>
-              </p:nvSpPr>
-              <p:spPr>
-                <a:xfrm>
-                  <a:off x="7414138" y="4925623"/>
-                  <a:ext cx="2095895" cy="518604"/>
-                </a:xfrm>
-                <a:prstGeom prst="rect">
-                  <a:avLst/>
-                </a:prstGeom>
-                <a:noFill/>
-              </p:spPr>
-              <p:txBody>
-                <a:bodyPr wrap="none" lIns="0" tIns="0" rIns="0" bIns="0" rtlCol="0">
-                  <a:spAutoFit/>
-                </a:bodyPr>
-                <a:lstStyle/>
-                <a:p>
-                  <a:pPr marL="0" marR="0" lvl="0" indent="0" algn="l" defTabSz="914400" rtl="0" eaLnBrk="1" fontAlgn="auto" latinLnBrk="0" hangingPunct="1">
-                    <a:lnSpc>
-                      <a:spcPct val="100000"/>
-                    </a:lnSpc>
-                    <a:spcBef>
-                      <a:spcPts val="0"/>
-                    </a:spcBef>
-                    <a:spcAft>
-                      <a:spcPts val="0"/>
-                    </a:spcAft>
-                    <a:buClrTx/>
-                    <a:buSzTx/>
-                    <a:buFontTx/>
-                    <a:buNone/>
-                    <a:tabLst/>
-                    <a:defRPr/>
-                  </a:pPr>
-                  <a14:m>
-                    <m:oMathPara xmlns:m="http://schemas.openxmlformats.org/officeDocument/2006/math">
-                      <m:oMath>
-                        <m:r>
-                          <a:rPr kumimoji="0" lang="en-US" sz="1800" b="0" i="1" u="none" strike="noStrike" kern="1200" cap="none" spc="0" normalizeH="0" baseline="0" noProof="0" smtClean="0">
-                            <a:ln>
-                              <a:noFill/>
-                            </a:ln>
-                            <a:solidFill>
-                              <a:prstClr val="black"/>
-                            </a:solidFill>
-                            <a:effectLst/>
-                            <a:uLnTx/>
-                            <a:uFillTx/>
-                            <a:latin typeface="Cambria Math" panose="02040503050406030204" pitchFamily="18" charset="0"/>
-                            <a:ea typeface="+mn-ea"/>
-                            <a:cs typeface="+mn-cs"/>
-                          </a:rPr>
-                          <m:t>𝑚𝑒𝑑𝑖𝑎𝑛</m:t>
-                        </m:r>
-                        <m:r>
-                          <a:rPr kumimoji="0" lang="en-US" sz="1800" b="0" i="1" u="none" strike="noStrike" kern="1200" cap="none" spc="0" normalizeH="0" baseline="0" noProof="0" smtClean="0">
-                            <a:ln>
-                              <a:noFill/>
-                            </a:ln>
-                            <a:solidFill>
-                              <a:prstClr val="black"/>
-                            </a:solidFill>
-                            <a:effectLst/>
-                            <a:uLnTx/>
-                            <a:uFillTx/>
-                            <a:latin typeface="Cambria Math" panose="02040503050406030204" pitchFamily="18" charset="0"/>
-                            <a:ea typeface="+mn-ea"/>
-                            <a:cs typeface="+mn-cs"/>
-                          </a:rPr>
-                          <m:t>=</m:t>
-                        </m:r>
-                        <m:f>
-                          <m:fPr>
-                            <m:ctrlPr>
-                              <a:rPr kumimoji="0" lang="en-US" sz="1800" b="0" i="1" u="none" strike="noStrike" kern="1200" cap="none" spc="0" normalizeH="0" baseline="0" noProof="0" smtClean="0">
-                                <a:ln>
-                                  <a:noFill/>
-                                </a:ln>
-                                <a:solidFill>
-                                  <a:srgbClr val="FF0000"/>
-                                </a:solidFill>
-                                <a:effectLst/>
-                                <a:uLnTx/>
-                                <a:uFillTx/>
-                                <a:latin typeface="Cambria Math" panose="02040503050406030204" pitchFamily="18" charset="0"/>
-                                <a:ea typeface="+mn-ea"/>
-                                <a:cs typeface="+mn-cs"/>
-                              </a:rPr>
-                            </m:ctrlPr>
-                          </m:fPr>
-                          <m:num>
-                            <m:r>
-                              <a:rPr kumimoji="0" lang="en-US" sz="1800" b="0" i="1" u="none" strike="noStrike" kern="1200" cap="none" spc="0" normalizeH="0" baseline="0" noProof="0" smtClean="0">
-                                <a:ln>
-                                  <a:noFill/>
-                                </a:ln>
-                                <a:solidFill>
-                                  <a:srgbClr val="FF0000"/>
-                                </a:solidFill>
-                                <a:effectLst/>
-                                <a:uLnTx/>
-                                <a:uFillTx/>
-                                <a:latin typeface="Cambria Math" panose="02040503050406030204" pitchFamily="18" charset="0"/>
-                                <a:ea typeface="+mn-ea"/>
-                                <a:cs typeface="+mn-cs"/>
-                              </a:rPr>
-                              <m:t>8+8</m:t>
-                            </m:r>
-                          </m:num>
-                          <m:den>
-                            <m:r>
-                              <a:rPr kumimoji="0" lang="en-US" sz="1800" b="0" i="1" u="none" strike="noStrike" kern="1200" cap="none" spc="0" normalizeH="0" baseline="0" noProof="0" smtClean="0">
-                                <a:ln>
-                                  <a:noFill/>
-                                </a:ln>
-                                <a:solidFill>
-                                  <a:prstClr val="black"/>
-                                </a:solidFill>
-                                <a:effectLst/>
-                                <a:uLnTx/>
-                                <a:uFillTx/>
-                                <a:latin typeface="Cambria Math" panose="02040503050406030204" pitchFamily="18" charset="0"/>
-                                <a:ea typeface="+mn-ea"/>
-                                <a:cs typeface="+mn-cs"/>
-                              </a:rPr>
-                              <m:t>2</m:t>
-                            </m:r>
-                          </m:den>
-                        </m:f>
-                        <m:r>
-                          <a:rPr kumimoji="0" lang="en-US" sz="1800" b="0" i="1" u="none" strike="noStrike" kern="1200" cap="none" spc="0" normalizeH="0" baseline="0" noProof="0" smtClean="0">
-                            <a:ln>
-                              <a:noFill/>
-                            </a:ln>
-                            <a:solidFill>
-                              <a:prstClr val="black"/>
-                            </a:solidFill>
-                            <a:effectLst/>
-                            <a:uLnTx/>
-                            <a:uFillTx/>
-                            <a:latin typeface="Cambria Math" panose="02040503050406030204" pitchFamily="18" charset="0"/>
-                            <a:ea typeface="+mn-ea"/>
-                            <a:cs typeface="+mn-cs"/>
-                          </a:rPr>
-                          <m:t>=8</m:t>
-                        </m:r>
-                      </m:oMath>
-                    </m:oMathPara>
-                  </a14:m>
-                  <a:endParaRPr kumimoji="0" lang="en-US" sz="1800" b="0" i="0" u="none" strike="noStrike" kern="1200" cap="none" spc="0" normalizeH="0" baseline="0" noProof="0" dirty="0">
-                    <a:ln>
-                      <a:noFill/>
-                    </a:ln>
-                    <a:solidFill>
-                      <a:prstClr val="black"/>
-                    </a:solidFill>
-                    <a:effectLst/>
-                    <a:uLnTx/>
-                    <a:uFillTx/>
-                    <a:latin typeface="Calibri" panose="020F0502020204030204"/>
-                    <a:ea typeface="+mn-ea"/>
-                    <a:cs typeface="+mn-cs"/>
-                  </a:endParaRPr>
-                </a:p>
-              </p:txBody>
-            </p:sp>
-          </mc:Choice>
-          <mc:Fallback xmlns="">
-            <p:sp>
-              <p:nvSpPr>
-                <p:cNvPr id="25" name="TextBox 24">
-                  <a:extLst>
-                    <a:ext uri="{FF2B5EF4-FFF2-40B4-BE49-F238E27FC236}">
-                      <a16:creationId xmlns:a16="http://schemas.microsoft.com/office/drawing/2014/main" id="{49FE77AA-7C50-0F7E-C479-3A2E60163D35}"/>
-                    </a:ext>
-                  </a:extLst>
-                </p:cNvPr>
-                <p:cNvSpPr txBox="1">
-                  <a:spLocks noRot="1" noChangeAspect="1" noMove="1" noResize="1" noEditPoints="1" noAdjustHandles="1" noChangeArrowheads="1" noChangeShapeType="1" noTextEdit="1"/>
-                </p:cNvSpPr>
-                <p:nvPr/>
-              </p:nvSpPr>
-              <p:spPr>
-                <a:xfrm>
-                  <a:off x="7414138" y="4925623"/>
-                  <a:ext cx="2095895" cy="518604"/>
-                </a:xfrm>
-                <a:prstGeom prst="rect">
-                  <a:avLst/>
-                </a:prstGeom>
-                <a:blipFill>
-                  <a:blip r:embed="rId4"/>
-                  <a:stretch>
-                    <a:fillRect/>
-                  </a:stretch>
-                </a:blipFill>
-              </p:spPr>
-              <p:txBody>
-                <a:bodyPr/>
-                <a:lstStyle/>
-                <a:p>
-                  <a:r>
-                    <a:rPr lang="en-US">
-                      <a:noFill/>
-                    </a:rPr>
-                    <a:t> </a:t>
-                  </a:r>
-                </a:p>
-              </p:txBody>
-            </p:sp>
-          </mc:Fallback>
-        </mc:AlternateContent>
-      </p:grpSp>
-      <p:sp>
-        <p:nvSpPr>
-          <p:cNvPr id="26" name="TextBox 25">
-            <a:extLst>
-              <a:ext uri="{FF2B5EF4-FFF2-40B4-BE49-F238E27FC236}">
-                <a16:creationId xmlns:a16="http://schemas.microsoft.com/office/drawing/2014/main" id="{0AB15456-BDE7-CB11-8743-884D2B7E62B6}"/>
-              </a:ext>
-            </a:extLst>
-          </p:cNvPr>
-          <p:cNvSpPr txBox="1"/>
-          <p:nvPr/>
-        </p:nvSpPr>
-        <p:spPr>
-          <a:xfrm>
-            <a:off x="594017" y="5686108"/>
-            <a:ext cx="3605282" cy="400110"/>
-          </a:xfrm>
-          <a:prstGeom prst="rect">
-            <a:avLst/>
-          </a:prstGeom>
-          <a:noFill/>
-        </p:spPr>
-        <p:txBody>
-          <a:bodyPr wrap="none" rtlCol="0">
-            <a:spAutoFit/>
-          </a:bodyPr>
-          <a:lstStyle/>
-          <a:p>
-            <a:pPr marL="0" marR="0" lvl="0" indent="0" algn="l" defTabSz="914400" rtl="0" eaLnBrk="1" fontAlgn="auto" latinLnBrk="0" hangingPunct="1">
-              <a:lnSpc>
-                <a:spcPct val="100000"/>
-              </a:lnSpc>
-              <a:spcBef>
-                <a:spcPts val="0"/>
-              </a:spcBef>
-              <a:spcAft>
-                <a:spcPts val="0"/>
-              </a:spcAft>
-              <a:buClrTx/>
-              <a:buSzTx/>
-              <a:buFontTx/>
-              <a:buNone/>
-              <a:tabLst/>
-              <a:defRPr/>
-            </a:pPr>
-            <a:r>
-              <a:rPr kumimoji="0" lang="en-US" sz="2000" b="0" i="0" u="none" strike="noStrike" kern="1200" cap="none" spc="0" normalizeH="0" baseline="0" noProof="0" dirty="0">
-                <a:ln>
-                  <a:noFill/>
-                </a:ln>
-                <a:solidFill>
-                  <a:prstClr val="black"/>
-                </a:solidFill>
-                <a:effectLst/>
-                <a:uLnTx/>
-                <a:uFillTx/>
-                <a:latin typeface="Calibri" panose="020F0502020204030204"/>
-                <a:ea typeface="+mn-ea"/>
-                <a:cs typeface="+mn-cs"/>
-              </a:rPr>
-              <a:t>The mean is the center of gravity</a:t>
-            </a:r>
-          </a:p>
-        </p:txBody>
-      </p:sp>
-      <p:sp>
-        <p:nvSpPr>
-          <p:cNvPr id="27" name="TextBox 26">
-            <a:extLst>
-              <a:ext uri="{FF2B5EF4-FFF2-40B4-BE49-F238E27FC236}">
-                <a16:creationId xmlns:a16="http://schemas.microsoft.com/office/drawing/2014/main" id="{733A6C0A-C879-8A3D-A8EE-96D4E66E3A74}"/>
-              </a:ext>
-            </a:extLst>
-          </p:cNvPr>
-          <p:cNvSpPr txBox="1"/>
-          <p:nvPr/>
-        </p:nvSpPr>
-        <p:spPr>
-          <a:xfrm>
-            <a:off x="6325923" y="5810799"/>
-            <a:ext cx="3438762" cy="400110"/>
-          </a:xfrm>
-          <a:prstGeom prst="rect">
-            <a:avLst/>
-          </a:prstGeom>
-          <a:noFill/>
-        </p:spPr>
-        <p:txBody>
-          <a:bodyPr wrap="none" rtlCol="0">
-            <a:spAutoFit/>
-          </a:bodyPr>
-          <a:lstStyle/>
-          <a:p>
-            <a:pPr marL="0" marR="0" lvl="0" indent="0" algn="l" defTabSz="914400" rtl="0" eaLnBrk="1" fontAlgn="auto" latinLnBrk="0" hangingPunct="1">
-              <a:lnSpc>
-                <a:spcPct val="100000"/>
-              </a:lnSpc>
-              <a:spcBef>
-                <a:spcPts val="0"/>
-              </a:spcBef>
-              <a:spcAft>
-                <a:spcPts val="0"/>
-              </a:spcAft>
-              <a:buClrTx/>
-              <a:buSzTx/>
-              <a:buFontTx/>
-              <a:buNone/>
-              <a:tabLst/>
-              <a:defRPr/>
-            </a:pPr>
-            <a:r>
-              <a:rPr kumimoji="0" lang="en-US" sz="2000" b="0" i="0" u="none" strike="noStrike" kern="1200" cap="none" spc="0" normalizeH="0" baseline="0" noProof="0" dirty="0">
-                <a:ln>
-                  <a:noFill/>
-                </a:ln>
-                <a:solidFill>
-                  <a:prstClr val="black"/>
-                </a:solidFill>
-                <a:effectLst/>
-                <a:uLnTx/>
-                <a:uFillTx/>
-                <a:latin typeface="Calibri" panose="020F0502020204030204"/>
-                <a:ea typeface="+mn-ea"/>
-                <a:cs typeface="+mn-cs"/>
-              </a:rPr>
-              <a:t>The median is the middle value</a:t>
-            </a:r>
-          </a:p>
-        </p:txBody>
-      </p:sp>
-      <p:sp>
-        <p:nvSpPr>
-          <p:cNvPr id="34" name="TextBox 33">
-            <a:extLst>
-              <a:ext uri="{FF2B5EF4-FFF2-40B4-BE49-F238E27FC236}">
-                <a16:creationId xmlns:a16="http://schemas.microsoft.com/office/drawing/2014/main" id="{8CC585F4-2355-392B-9E1E-5B47162BF9BA}"/>
-              </a:ext>
-            </a:extLst>
-          </p:cNvPr>
-          <p:cNvSpPr txBox="1"/>
-          <p:nvPr/>
-        </p:nvSpPr>
-        <p:spPr>
-          <a:xfrm>
-            <a:off x="1320800" y="314036"/>
-            <a:ext cx="8002512" cy="1477328"/>
-          </a:xfrm>
-          <a:prstGeom prst="rect">
-            <a:avLst/>
-          </a:prstGeom>
-          <a:noFill/>
-        </p:spPr>
-        <p:txBody>
-          <a:bodyPr wrap="none" rtlCol="0">
-            <a:spAutoFit/>
-          </a:bodyPr>
-          <a:lstStyle/>
-          <a:p>
-            <a:pPr marL="0" marR="0" lvl="0" indent="0" algn="l" defTabSz="914400" rtl="0" eaLnBrk="1" fontAlgn="auto" latinLnBrk="0" hangingPunct="1">
-              <a:lnSpc>
-                <a:spcPct val="100000"/>
-              </a:lnSpc>
-              <a:spcBef>
-                <a:spcPts val="0"/>
-              </a:spcBef>
-              <a:spcAft>
-                <a:spcPts val="0"/>
-              </a:spcAft>
-              <a:buClrTx/>
-              <a:buSzTx/>
-              <a:buFontTx/>
-              <a:buNone/>
-              <a:tabLst/>
-              <a:defRPr/>
-            </a:pPr>
-            <a:r>
-              <a:rPr kumimoji="0" lang="en-US" sz="1800" b="0" i="0" u="none" strike="noStrike" kern="1200" cap="none" spc="0" normalizeH="0" baseline="0" noProof="0" dirty="0">
-                <a:ln>
-                  <a:noFill/>
-                </a:ln>
-                <a:solidFill>
-                  <a:prstClr val="black"/>
-                </a:solidFill>
-                <a:effectLst/>
-                <a:uLnTx/>
-                <a:uFillTx/>
-                <a:latin typeface="Calibri" panose="020F0502020204030204"/>
-                <a:ea typeface="+mn-ea"/>
-                <a:cs typeface="+mn-cs"/>
-              </a:rPr>
-              <a:t>Data: 3  3  3  3  3  3  3  4  4  4  4  4  4  4  4  4  4  5  5  5  5  5  5  5  5  5  5</a:t>
-            </a:r>
-          </a:p>
-          <a:p>
-            <a:pPr marL="0" marR="0" lvl="0" indent="0" algn="l" defTabSz="914400" rtl="0" eaLnBrk="1" fontAlgn="auto" latinLnBrk="0" hangingPunct="1">
-              <a:lnSpc>
-                <a:spcPct val="100000"/>
-              </a:lnSpc>
-              <a:spcBef>
-                <a:spcPts val="0"/>
-              </a:spcBef>
-              <a:spcAft>
-                <a:spcPts val="0"/>
-              </a:spcAft>
-              <a:buClrTx/>
-              <a:buSzTx/>
-              <a:buFontTx/>
-              <a:buNone/>
-              <a:tabLst/>
-              <a:defRPr/>
-            </a:pPr>
-            <a:r>
-              <a:rPr kumimoji="0" lang="en-US" sz="1800" b="0" i="0" u="none" strike="noStrike" kern="1200" cap="none" spc="0" normalizeH="0" baseline="0" noProof="0" dirty="0">
-                <a:ln>
-                  <a:noFill/>
-                </a:ln>
-                <a:solidFill>
-                  <a:prstClr val="black"/>
-                </a:solidFill>
-                <a:effectLst/>
-                <a:uLnTx/>
-                <a:uFillTx/>
-                <a:latin typeface="Calibri" panose="020F0502020204030204"/>
-                <a:ea typeface="+mn-ea"/>
-                <a:cs typeface="+mn-cs"/>
-              </a:rPr>
-              <a:t> 5  5  5  5  5  5  5  5  5  6  6  6  6  6  6  6  6  6  6  7  7  7  7  7  7  7  7</a:t>
-            </a:r>
-          </a:p>
-          <a:p>
-            <a:pPr marL="0" marR="0" lvl="0" indent="0" algn="l" defTabSz="914400" rtl="0" eaLnBrk="1" fontAlgn="auto" latinLnBrk="0" hangingPunct="1">
-              <a:lnSpc>
-                <a:spcPct val="100000"/>
-              </a:lnSpc>
-              <a:spcBef>
-                <a:spcPts val="0"/>
-              </a:spcBef>
-              <a:spcAft>
-                <a:spcPts val="0"/>
-              </a:spcAft>
-              <a:buClrTx/>
-              <a:buSzTx/>
-              <a:buFontTx/>
-              <a:buNone/>
-              <a:tabLst/>
-              <a:defRPr/>
-            </a:pPr>
-            <a:r>
-              <a:rPr kumimoji="0" lang="en-US" sz="1800" b="0" i="0" u="none" strike="noStrike" kern="1200" cap="none" spc="0" normalizeH="0" baseline="0" noProof="0" dirty="0">
-                <a:ln>
-                  <a:noFill/>
-                </a:ln>
-                <a:solidFill>
-                  <a:prstClr val="black"/>
-                </a:solidFill>
-                <a:effectLst/>
-                <a:uLnTx/>
-                <a:uFillTx/>
-                <a:latin typeface="Calibri" panose="020F0502020204030204"/>
-                <a:ea typeface="+mn-ea"/>
-                <a:cs typeface="+mn-cs"/>
-              </a:rPr>
-              <a:t> 7  8  </a:t>
-            </a:r>
-            <a:r>
-              <a:rPr kumimoji="0" lang="en-US" sz="1800" b="0" i="0" u="none" strike="noStrike" kern="1200" cap="none" spc="0" normalizeH="0" baseline="0" noProof="0" dirty="0">
-                <a:ln>
-                  <a:noFill/>
-                </a:ln>
-                <a:solidFill>
-                  <a:srgbClr val="FF0000"/>
-                </a:solidFill>
-                <a:effectLst/>
-                <a:uLnTx/>
-                <a:uFillTx/>
-                <a:latin typeface="Calibri" panose="020F0502020204030204"/>
-                <a:ea typeface="+mn-ea"/>
-                <a:cs typeface="+mn-cs"/>
-              </a:rPr>
-              <a:t>8  8</a:t>
-            </a:r>
-            <a:r>
-              <a:rPr kumimoji="0" lang="en-US" sz="1800" b="0" i="0" u="none" strike="noStrike" kern="1200" cap="none" spc="0" normalizeH="0" baseline="0" noProof="0" dirty="0">
-                <a:ln>
-                  <a:noFill/>
-                </a:ln>
-                <a:solidFill>
-                  <a:prstClr val="black"/>
-                </a:solidFill>
-                <a:effectLst/>
-                <a:uLnTx/>
-                <a:uFillTx/>
-                <a:latin typeface="Calibri" panose="020F0502020204030204"/>
-                <a:ea typeface="+mn-ea"/>
-                <a:cs typeface="+mn-cs"/>
-              </a:rPr>
-              <a:t>  8  8  8  9  9  9  9  9  9  9 10 10 10 10 10 10 10 11 11 11 11 11 12</a:t>
-            </a:r>
-          </a:p>
-          <a:p>
-            <a:pPr marL="0" marR="0" lvl="0" indent="0" algn="l" defTabSz="914400" rtl="0" eaLnBrk="1" fontAlgn="auto" latinLnBrk="0" hangingPunct="1">
-              <a:lnSpc>
-                <a:spcPct val="100000"/>
-              </a:lnSpc>
-              <a:spcBef>
-                <a:spcPts val="0"/>
-              </a:spcBef>
-              <a:spcAft>
-                <a:spcPts val="0"/>
-              </a:spcAft>
-              <a:buClrTx/>
-              <a:buSzTx/>
-              <a:buFontTx/>
-              <a:buNone/>
-              <a:tabLst/>
-              <a:defRPr/>
-            </a:pPr>
-            <a:r>
-              <a:rPr kumimoji="0" lang="en-US" sz="1800" b="0" i="0" u="none" strike="noStrike" kern="1200" cap="none" spc="0" normalizeH="0" baseline="0" noProof="0" dirty="0">
-                <a:ln>
-                  <a:noFill/>
-                </a:ln>
-                <a:solidFill>
-                  <a:prstClr val="black"/>
-                </a:solidFill>
-                <a:effectLst/>
-                <a:uLnTx/>
-                <a:uFillTx/>
-                <a:latin typeface="Calibri" panose="020F0502020204030204"/>
-                <a:ea typeface="+mn-ea"/>
-                <a:cs typeface="+mn-cs"/>
-              </a:rPr>
-              <a:t> 12 12 12 12 12 12 12 13 13 13 14 14 14 14 14 14 15 15 15 16 16 16 16 17 17 17 18</a:t>
-            </a:r>
-          </a:p>
-          <a:p>
-            <a:pPr marL="0" marR="0" lvl="0" indent="0" algn="l" defTabSz="914400" rtl="0" eaLnBrk="1" fontAlgn="auto" latinLnBrk="0" hangingPunct="1">
-              <a:lnSpc>
-                <a:spcPct val="100000"/>
-              </a:lnSpc>
-              <a:spcBef>
-                <a:spcPts val="0"/>
-              </a:spcBef>
-              <a:spcAft>
-                <a:spcPts val="0"/>
-              </a:spcAft>
-              <a:buClrTx/>
-              <a:buSzTx/>
-              <a:buFontTx/>
-              <a:buNone/>
-              <a:tabLst/>
-              <a:defRPr/>
-            </a:pPr>
-            <a:r>
-              <a:rPr kumimoji="0" lang="en-US" sz="1800" b="0" i="0" u="none" strike="noStrike" kern="1200" cap="none" spc="0" normalizeH="0" baseline="0" noProof="0" dirty="0">
-                <a:ln>
-                  <a:noFill/>
-                </a:ln>
-                <a:solidFill>
-                  <a:prstClr val="black"/>
-                </a:solidFill>
-                <a:effectLst/>
-                <a:uLnTx/>
-                <a:uFillTx/>
-                <a:latin typeface="Calibri" panose="020F0502020204030204"/>
-                <a:ea typeface="+mn-ea"/>
-                <a:cs typeface="+mn-cs"/>
-              </a:rPr>
-              <a:t>18 20 20 20 20 20</a:t>
-            </a:r>
-          </a:p>
-        </p:txBody>
-      </p:sp>
-      <p:sp>
-        <p:nvSpPr>
-          <p:cNvPr id="3" name="Slide Number Placeholder 2">
-            <a:extLst>
-              <a:ext uri="{FF2B5EF4-FFF2-40B4-BE49-F238E27FC236}">
-                <a16:creationId xmlns:a16="http://schemas.microsoft.com/office/drawing/2014/main" id="{CFE70CB8-8AAF-3A18-2BD2-8D3807463BD1}"/>
-              </a:ext>
-            </a:extLst>
-          </p:cNvPr>
-          <p:cNvSpPr>
-            <a:spLocks noGrp="1"/>
-          </p:cNvSpPr>
-          <p:nvPr>
-            <p:ph type="sldNum" sz="quarter" idx="12"/>
-          </p:nvPr>
-        </p:nvSpPr>
-        <p:spPr/>
-        <p:txBody>
-          <a:bodyPr/>
-          <a:lstStyle/>
-          <a:p>
-            <a:fld id="{A80A81DD-F10A-4B1C-963A-0ABBB4865886}" type="slidenum">
-              <a:rPr lang="en-US" smtClean="0"/>
-              <a:t>8</a:t>
-            </a:fld>
-            <a:endParaRPr lang="en-US"/>
-          </a:p>
-        </p:txBody>
-      </p:sp>
-    </p:spTree>
-    <p:extLst>
-      <p:ext uri="{BB962C8B-B14F-4D97-AF65-F5344CB8AC3E}">
-        <p14:creationId xmlns:p14="http://schemas.microsoft.com/office/powerpoint/2010/main" val="165304605"/>
-      </p:ext>
-    </p:extLst>
-  </p:cSld>
-  <p:clrMapOvr>
-    <a:masterClrMapping/>
-  </p:clrMapOvr>
-</p:sld>
-</file>
-
-<file path=ppt/slides/slide9.xml><?xml version="1.0" encoding="utf-8"?>
-<p:sld xmlns:a="http://schemas.openxmlformats.org/drawingml/2006/main" xmlns:r="http://schemas.openxmlformats.org/officeDocument/2006/relationships" xmlns:p="http://schemas.openxmlformats.org/presentationml/2006/main">
-  <p:cSld>
-    <p:spTree>
-      <p:nvGrpSpPr>
-        <p:cNvPr id="1" name=""/>
-        <p:cNvGrpSpPr/>
-        <p:nvPr/>
-      </p:nvGrpSpPr>
-      <p:grpSpPr>
-        <a:xfrm>
-          <a:off x="0" y="0"/>
-          <a:ext cx="0" cy="0"/>
-          <a:chOff x="0" y="0"/>
-          <a:chExt cx="0" cy="0"/>
-        </a:xfrm>
-      </p:grpSpPr>
-      <p:sp>
-        <p:nvSpPr>
-          <p:cNvPr id="6" name="Body card">
-            <a:extLst>
-              <a:ext uri="{FF2B5EF4-FFF2-40B4-BE49-F238E27FC236}">
-                <a16:creationId xmlns:a16="http://schemas.microsoft.com/office/drawing/2014/main" id="{EA41BED6-3730-9ED7-AB86-789C45DD3A32}"/>
-              </a:ext>
-            </a:extLst>
-          </p:cNvPr>
-          <p:cNvSpPr/>
-          <p:nvPr/>
-        </p:nvSpPr>
-        <p:spPr>
-          <a:xfrm>
-            <a:off x="635000" y="1676400"/>
-            <a:ext cx="10922000" cy="711200"/>
-          </a:xfrm>
-          <a:prstGeom prst="roundRect">
-            <a:avLst>
-              <a:gd name="adj" fmla="val 3000"/>
-            </a:avLst>
-          </a:prstGeom>
-          <a:solidFill>
-            <a:srgbClr val="F2F6FC"/>
-          </a:solidFill>
-          <a:ln w="19050">
-            <a:solidFill>
-              <a:srgbClr val="4472C4"/>
-            </a:solidFill>
-          </a:ln>
-        </p:spPr>
-        <p:style>
-          <a:lnRef idx="2">
-            <a:schemeClr val="accent1">
-              <a:shade val="15000"/>
-            </a:schemeClr>
-          </a:lnRef>
-          <a:fillRef idx="1">
-            <a:schemeClr val="accent1"/>
-          </a:fillRef>
-          <a:effectRef idx="0">
-            <a:schemeClr val="accent1"/>
-          </a:effectRef>
-          <a:fontRef idx="minor">
-            <a:schemeClr val="lt1"/>
-          </a:fontRef>
-        </p:style>
-        <p:txBody>
-          <a:bodyPr rtlCol="0" anchor="ctr"/>
-          <a:lstStyle/>
-          <a:p>
-            <a:pPr algn="ctr"/>
-            <a:endParaRPr lang="en-US"/>
-          </a:p>
-        </p:txBody>
-      </p:sp>
-      <p:sp>
-        <p:nvSpPr>
-          <p:cNvPr id="2" name="Title 1">
-            <a:extLst>
-              <a:ext uri="{FF2B5EF4-FFF2-40B4-BE49-F238E27FC236}">
-                <a16:creationId xmlns:a16="http://schemas.microsoft.com/office/drawing/2014/main" id="{CE84DE6C-08A1-E5FC-FBD2-2A6CFB14937F}"/>
-              </a:ext>
-            </a:extLst>
-          </p:cNvPr>
-          <p:cNvSpPr>
-            <a:spLocks noGrp="1"/>
-          </p:cNvSpPr>
-          <p:nvPr>
-            <p:ph type="title"/>
-          </p:nvPr>
-        </p:nvSpPr>
-        <p:spPr/>
-        <p:txBody>
-          <a:bodyPr/>
-          <a:lstStyle/>
-          <a:p>
-            <a:r>
-              <a:rPr lang="en-US" dirty="0">
-                <a:solidFill>
-                  <a:srgbClr val="1F3864"/>
-                </a:solidFill>
-              </a:rPr>
-              <a:t>Mean and median treat outliers differently</a:t>
-            </a:r>
-          </a:p>
-        </p:txBody>
-      </p:sp>
-      <mc:AlternateContent xmlns:mc="http://schemas.openxmlformats.org/markup-compatibility/2006" xmlns:a14="http://schemas.microsoft.com/office/drawing/2010/main">
-        <mc:Choice Requires="a14">
-          <p:sp>
-            <p:nvSpPr>
-              <p:cNvPr id="3" name="Content Placeholder 2">
-                <a:extLst>
-                  <a:ext uri="{FF2B5EF4-FFF2-40B4-BE49-F238E27FC236}">
-                    <a16:creationId xmlns:a16="http://schemas.microsoft.com/office/drawing/2014/main" id="{D0FE07D2-A170-60BA-CCDC-92189FF4B0D1}"/>
-                  </a:ext>
-                </a:extLst>
-              </p:cNvPr>
-              <p:cNvSpPr>
-                <a:spLocks noGrp="1"/>
-              </p:cNvSpPr>
-              <p:nvPr>
-                <p:ph idx="1"/>
-              </p:nvPr>
-            </p:nvSpPr>
-            <p:spPr/>
-            <p:txBody>
-              <a:bodyPr/>
-              <a:lstStyle/>
-              <a:p>
-                <a14:m>
-                  <m:oMath xmlns:m="http://schemas.openxmlformats.org/officeDocument/2006/math">
-                    <m:r>
-                      <a:rPr lang="en-US" b="0" i="1" smtClean="0">
-                        <a:latin typeface="Cambria Math" panose="02040503050406030204" pitchFamily="18" charset="0"/>
-                      </a:rPr>
-                      <m:t>𝑋</m:t>
-                    </m:r>
-                    <m:r>
-                      <a:rPr lang="en-US" b="0" i="1" smtClean="0">
-                        <a:latin typeface="Cambria Math" panose="02040503050406030204" pitchFamily="18" charset="0"/>
-                      </a:rPr>
-                      <m:t>={1, 3, 5, 5, 6, 7, 7, 8, 32}</m:t>
-                    </m:r>
-                  </m:oMath>
-                </a14:m>
-                <a:endParaRPr lang="en-US" dirty="0"/>
-              </a:p>
-            </p:txBody>
-          </p:sp>
-        </mc:Choice>
-        <mc:Fallback xmlns="">
-          <p:sp>
-            <p:nvSpPr>
-              <p:cNvPr id="3" name="Content Placeholder 2">
-                <a:extLst>
-                  <a:ext uri="{FF2B5EF4-FFF2-40B4-BE49-F238E27FC236}">
-                    <a16:creationId xmlns:a16="http://schemas.microsoft.com/office/drawing/2014/main" id="{D0FE07D2-A170-60BA-CCDC-92189FF4B0D1}"/>
-                  </a:ext>
-                </a:extLst>
-              </p:cNvPr>
-              <p:cNvSpPr>
-                <a:spLocks noGrp="1" noRot="1" noChangeAspect="1" noMove="1" noResize="1" noEditPoints="1" noAdjustHandles="1" noChangeArrowheads="1" noChangeShapeType="1" noTextEdit="1"/>
-              </p:cNvSpPr>
-              <p:nvPr>
-                <p:ph idx="1"/>
-              </p:nvPr>
-            </p:nvSpPr>
-            <p:spPr>
-              <a:blipFill>
-                <a:blip r:embed="rId2"/>
-                <a:stretch>
-                  <a:fillRect/>
-                </a:stretch>
-              </a:blipFill>
-            </p:spPr>
-            <p:txBody>
-              <a:bodyPr/>
-              <a:lstStyle/>
-              <a:p>
-                <a:r>
-                  <a:rPr lang="en-US">
-                    <a:noFill/>
-                  </a:rPr>
-                  <a:t> </a:t>
-                </a:r>
-              </a:p>
-            </p:txBody>
-          </p:sp>
-        </mc:Fallback>
-      </mc:AlternateContent>
-      <p:sp>
-        <p:nvSpPr>
-          <p:cNvPr id="5" name="Title rule">
-            <a:extLst>
-              <a:ext uri="{FF2B5EF4-FFF2-40B4-BE49-F238E27FC236}">
-                <a16:creationId xmlns:a16="http://schemas.microsoft.com/office/drawing/2014/main" id="{597A61AE-23D2-053C-1636-4C88BF5E0D4D}"/>
-              </a:ext>
-            </a:extLst>
-          </p:cNvPr>
-          <p:cNvSpPr/>
-          <p:nvPr/>
-        </p:nvSpPr>
-        <p:spPr>
-          <a:xfrm>
-            <a:off x="838200" y="1600200"/>
-            <a:ext cx="10515600" cy="38100"/>
-          </a:xfrm>
-          <a:prstGeom prst="rect">
-            <a:avLst/>
-          </a:prstGeom>
-          <a:solidFill>
-            <a:srgbClr val="4472C4"/>
-          </a:solidFill>
-          <a:ln w="12700" cap="flat" cmpd="sng" algn="ctr">
-            <a:noFill/>
-            <a:prstDash val="solid"/>
-            <a:miter lim="800000"/>
-          </a:ln>
-          <a:effectLst/>
-          <a:extLst>
-            <a:ext uri="{91240B29-F687-4F45-9708-019B960494DF}">
-              <a14:hiddenLine xmlns:a14="http://schemas.microsoft.com/office/drawing/2010/main" w="12700" cap="flat" cmpd="sng" algn="ctr">
-                <a:solidFill>
-                  <a:schemeClr val="accent1">
-                    <a:shade val="15000"/>
-                  </a:schemeClr>
-                </a:solidFill>
-                <a:prstDash val="solid"/>
-                <a:miter lim="800000"/>
-              </a14:hiddenLine>
-            </a:ext>
-          </a:extLst>
-        </p:spPr>
-        <p:style>
-          <a:lnRef idx="2">
-            <a:schemeClr val="accent1">
-              <a:shade val="15000"/>
-            </a:schemeClr>
-          </a:lnRef>
-          <a:fillRef idx="1">
-            <a:schemeClr val="accent1"/>
-          </a:fillRef>
-          <a:effectRef idx="0">
-            <a:schemeClr val="accent1"/>
-          </a:effectRef>
-          <a:fontRef idx="minor">
-            <a:schemeClr val="lt1"/>
-          </a:fontRef>
-        </p:style>
-        <p:txBody>
-          <a:bodyPr rtlCol="0" anchor="ctr"/>
-          <a:lstStyle/>
-          <a:p>
-            <a:pPr algn="ctr"/>
-            <a:endParaRPr lang="en-US"/>
-          </a:p>
-        </p:txBody>
-      </p:sp>
-      <p:sp>
-        <p:nvSpPr>
-          <p:cNvPr id="7" name="Slide Number Placeholder 6">
-            <a:extLst>
-              <a:ext uri="{FF2B5EF4-FFF2-40B4-BE49-F238E27FC236}">
-                <a16:creationId xmlns:a16="http://schemas.microsoft.com/office/drawing/2014/main" id="{054414B4-228D-CA95-EDBC-492AA6A4F024}"/>
-              </a:ext>
-            </a:extLst>
-          </p:cNvPr>
-          <p:cNvSpPr>
-            <a:spLocks noGrp="1"/>
-          </p:cNvSpPr>
-          <p:nvPr>
-            <p:ph type="sldNum" sz="quarter" idx="12"/>
-          </p:nvPr>
-        </p:nvSpPr>
-        <p:spPr/>
-        <p:txBody>
-          <a:bodyPr/>
-          <a:lstStyle/>
-          <a:p>
-            <a:fld id="{A80A81DD-F10A-4B1C-963A-0ABBB4865886}" type="slidenum">
-              <a:rPr lang="en-US" smtClean="0"/>
-              <a:t>9</a:t>
-            </a:fld>
-            <a:endParaRPr lang="en-US"/>
-          </a:p>
-        </p:txBody>
-      </p:sp>
-    </p:spTree>
-    <p:extLst>
-      <p:ext uri="{BB962C8B-B14F-4D97-AF65-F5344CB8AC3E}">
-        <p14:creationId xmlns:p14="http://schemas.microsoft.com/office/powerpoint/2010/main" val="2940681080"/>
+        <p14:creationId xmlns:p14="http://schemas.microsoft.com/office/powerpoint/2010/main" val="3922171624"/>
       </p:ext>
     </p:extLst>
   </p:cSld>

--- a/docs/lecture_slides/Week 2/Week2_Lecture5_slides_1_19_2024.pptx
+++ b/docs/lecture_slides/Week 2/Week2_Lecture5_slides_1_19_2024.pptx
@@ -23,22 +23,23 @@
     <p:sldId id="320" r:id="rId17"/>
     <p:sldId id="322" r:id="rId18"/>
     <p:sldId id="324" r:id="rId19"/>
-    <p:sldId id="348" r:id="rId20"/>
-    <p:sldId id="303" r:id="rId21"/>
-    <p:sldId id="259" r:id="rId22"/>
-    <p:sldId id="325" r:id="rId23"/>
-    <p:sldId id="346" r:id="rId24"/>
-    <p:sldId id="349" r:id="rId25"/>
-    <p:sldId id="341" r:id="rId26"/>
-    <p:sldId id="350" r:id="rId27"/>
-    <p:sldId id="351" r:id="rId28"/>
-    <p:sldId id="345" r:id="rId29"/>
-    <p:sldId id="313" r:id="rId30"/>
-    <p:sldId id="314" r:id="rId31"/>
-    <p:sldId id="315" r:id="rId32"/>
-    <p:sldId id="316" r:id="rId33"/>
-    <p:sldId id="317" r:id="rId34"/>
-    <p:sldId id="283" r:id="rId35"/>
+    <p:sldId id="352" r:id="rId20"/>
+    <p:sldId id="348" r:id="rId21"/>
+    <p:sldId id="303" r:id="rId22"/>
+    <p:sldId id="259" r:id="rId23"/>
+    <p:sldId id="325" r:id="rId24"/>
+    <p:sldId id="346" r:id="rId25"/>
+    <p:sldId id="349" r:id="rId26"/>
+    <p:sldId id="341" r:id="rId27"/>
+    <p:sldId id="350" r:id="rId28"/>
+    <p:sldId id="351" r:id="rId29"/>
+    <p:sldId id="345" r:id="rId30"/>
+    <p:sldId id="313" r:id="rId31"/>
+    <p:sldId id="314" r:id="rId32"/>
+    <p:sldId id="315" r:id="rId33"/>
+    <p:sldId id="316" r:id="rId34"/>
+    <p:sldId id="317" r:id="rId35"/>
+    <p:sldId id="283" r:id="rId36"/>
   </p:sldIdLst>
   <p:sldSz cx="12192000" cy="6858000"/>
   <p:notesSz cx="6858000" cy="9144000"/>
@@ -4456,7 +4457,7 @@
           <p:cNvPr id="2" name="Slide Number Placeholder 1">
             <a:extLst>
               <a:ext uri="{FF2B5EF4-FFF2-40B4-BE49-F238E27FC236}">
-                <a16:creationId xmlns:a16="http://schemas.microsoft.com/office/drawing/2014/main" id="{BE122782-7D4F-0CC8-EFD1-F6ACBC48B114}"/>
+                <a16:creationId xmlns:a16="http://schemas.microsoft.com/office/drawing/2014/main" id="{59E5A262-6BA4-80DC-E617-E503A246A5BF}"/>
               </a:ext>
             </a:extLst>
           </p:cNvPr>
@@ -4483,7 +4484,7 @@
     </p:spTree>
     <p:extLst>
       <p:ext uri="{BB962C8B-B14F-4D97-AF65-F5344CB8AC3E}">
-        <p14:creationId xmlns:p14="http://schemas.microsoft.com/office/powerpoint/2010/main" val="931765416"/>
+        <p14:creationId xmlns:p14="http://schemas.microsoft.com/office/powerpoint/2010/main" val="3545065768"/>
       </p:ext>
     </p:extLst>
   </p:cSld>
@@ -4515,7 +4516,7 @@
           <p:cNvPr id="6" name="Body card">
             <a:extLst>
               <a:ext uri="{FF2B5EF4-FFF2-40B4-BE49-F238E27FC236}">
-                <a16:creationId xmlns:a16="http://schemas.microsoft.com/office/drawing/2014/main" id="{C7210D85-88ED-C93F-3769-77E99841AC8D}"/>
+                <a16:creationId xmlns:a16="http://schemas.microsoft.com/office/drawing/2014/main" id="{00D816A4-B3F0-B160-DCEC-10AB25333721}"/>
               </a:ext>
             </a:extLst>
           </p:cNvPr>
@@ -4687,7 +4688,7 @@
           <p:cNvPr id="4" name="Slide Number Placeholder 3">
             <a:extLst>
               <a:ext uri="{FF2B5EF4-FFF2-40B4-BE49-F238E27FC236}">
-                <a16:creationId xmlns:a16="http://schemas.microsoft.com/office/drawing/2014/main" id="{E97F3D0D-BC18-BDB0-3CCC-5708B0185E7D}"/>
+                <a16:creationId xmlns:a16="http://schemas.microsoft.com/office/drawing/2014/main" id="{F44C1134-D6F8-B04D-3603-E49C4669548A}"/>
               </a:ext>
             </a:extLst>
           </p:cNvPr>
@@ -4716,7 +4717,7 @@
           <p:cNvPr id="5" name="Title rule">
             <a:extLst>
               <a:ext uri="{FF2B5EF4-FFF2-40B4-BE49-F238E27FC236}">
-                <a16:creationId xmlns:a16="http://schemas.microsoft.com/office/drawing/2014/main" id="{B6D210A3-C845-1B3C-F43D-4DEA7387FF1A}"/>
+                <a16:creationId xmlns:a16="http://schemas.microsoft.com/office/drawing/2014/main" id="{2ABA5085-7455-2642-D4BB-C6BC88E46333}"/>
               </a:ext>
             </a:extLst>
           </p:cNvPr>
@@ -4782,7 +4783,7 @@
     </p:spTree>
     <p:extLst>
       <p:ext uri="{BB962C8B-B14F-4D97-AF65-F5344CB8AC3E}">
-        <p14:creationId xmlns:p14="http://schemas.microsoft.com/office/powerpoint/2010/main" val="1271310440"/>
+        <p14:creationId xmlns:p14="http://schemas.microsoft.com/office/powerpoint/2010/main" val="584148158"/>
       </p:ext>
     </p:extLst>
   </p:cSld>
@@ -4844,7 +4845,7 @@
           <p:cNvPr id="2" name="Slide Number Placeholder 1">
             <a:extLst>
               <a:ext uri="{FF2B5EF4-FFF2-40B4-BE49-F238E27FC236}">
-                <a16:creationId xmlns:a16="http://schemas.microsoft.com/office/drawing/2014/main" id="{ADC702EB-D9FA-3EC0-6F36-A5777F16BEDB}"/>
+                <a16:creationId xmlns:a16="http://schemas.microsoft.com/office/drawing/2014/main" id="{81CA4DA7-DBD9-3674-EC49-E9E914B7FF90}"/>
               </a:ext>
             </a:extLst>
           </p:cNvPr>
@@ -4871,7 +4872,7 @@
     </p:spTree>
     <p:extLst>
       <p:ext uri="{BB962C8B-B14F-4D97-AF65-F5344CB8AC3E}">
-        <p14:creationId xmlns:p14="http://schemas.microsoft.com/office/powerpoint/2010/main" val="813996772"/>
+        <p14:creationId xmlns:p14="http://schemas.microsoft.com/office/powerpoint/2010/main" val="3635228475"/>
       </p:ext>
     </p:extLst>
   </p:cSld>
@@ -5804,7 +5805,7 @@
           <p:cNvPr id="8" name="Slide Number Placeholder 7">
             <a:extLst>
               <a:ext uri="{FF2B5EF4-FFF2-40B4-BE49-F238E27FC236}">
-                <a16:creationId xmlns:a16="http://schemas.microsoft.com/office/drawing/2014/main" id="{F45BB9B5-AB93-ECDE-E73E-F393ED3E046B}"/>
+                <a16:creationId xmlns:a16="http://schemas.microsoft.com/office/drawing/2014/main" id="{579E75AB-A549-02EA-22FF-6A0B8294C18B}"/>
               </a:ext>
             </a:extLst>
           </p:cNvPr>
@@ -5831,7 +5832,7 @@
     </p:spTree>
     <p:extLst>
       <p:ext uri="{BB962C8B-B14F-4D97-AF65-F5344CB8AC3E}">
-        <p14:creationId xmlns:p14="http://schemas.microsoft.com/office/powerpoint/2010/main" val="2057956012"/>
+        <p14:creationId xmlns:p14="http://schemas.microsoft.com/office/powerpoint/2010/main" val="3023639689"/>
       </p:ext>
     </p:extLst>
   </p:cSld>
@@ -5880,13 +5881,18 @@
           <a:lstStyle/>
           <a:p>
             <a:r>
-              <a:rPr lang="en-US" dirty="0">
+              <a:rPr lang="en-US">
                 <a:solidFill>
                   <a:srgbClr val="1F3864"/>
                 </a:solidFill>
               </a:rPr>
-              <a:t>Practice:</a:t>
+              <a:t>Practice 2:</a:t>
             </a:r>
+            <a:endParaRPr lang="en-US" dirty="0">
+              <a:solidFill>
+                <a:srgbClr val="1F3864"/>
+              </a:solidFill>
+            </a:endParaRPr>
           </a:p>
         </p:txBody>
       </p:sp>
@@ -6313,7 +6319,7 @@
           <p:cNvPr id="4" name="Rectangle: Rounded Corners 3">
             <a:extLst>
               <a:ext uri="{FF2B5EF4-FFF2-40B4-BE49-F238E27FC236}">
-                <a16:creationId xmlns:a16="http://schemas.microsoft.com/office/drawing/2014/main" id="{C3546ADF-01F7-0E71-707E-5406D1469A69}"/>
+                <a16:creationId xmlns:a16="http://schemas.microsoft.com/office/drawing/2014/main" id="{FAB8DB7E-A628-DBDD-A692-1EBB10B2F294}"/>
               </a:ext>
             </a:extLst>
           </p:cNvPr>
@@ -6429,7 +6435,7 @@
           <p:cNvPr id="6" name="Rectangle: Rounded Corners 5">
             <a:extLst>
               <a:ext uri="{FF2B5EF4-FFF2-40B4-BE49-F238E27FC236}">
-                <a16:creationId xmlns:a16="http://schemas.microsoft.com/office/drawing/2014/main" id="{6B815928-7CFA-DF09-CA97-C0E1C809997B}"/>
+                <a16:creationId xmlns:a16="http://schemas.microsoft.com/office/drawing/2014/main" id="{C2CA2118-A966-BB27-8331-0E54805E2F59}"/>
               </a:ext>
             </a:extLst>
           </p:cNvPr>
@@ -6519,7 +6525,7 @@
           <p:cNvPr id="7" name="Rectangle: Rounded Corners 6">
             <a:extLst>
               <a:ext uri="{FF2B5EF4-FFF2-40B4-BE49-F238E27FC236}">
-                <a16:creationId xmlns:a16="http://schemas.microsoft.com/office/drawing/2014/main" id="{0880D6D6-B247-FA77-3261-C48E045D928F}"/>
+                <a16:creationId xmlns:a16="http://schemas.microsoft.com/office/drawing/2014/main" id="{DF93389C-6502-BFBB-60C7-E80672F9A6EF}"/>
               </a:ext>
             </a:extLst>
           </p:cNvPr>
@@ -6599,7 +6605,7 @@
           <p:cNvPr id="9" name="Slide Number Placeholder 8">
             <a:extLst>
               <a:ext uri="{FF2B5EF4-FFF2-40B4-BE49-F238E27FC236}">
-                <a16:creationId xmlns:a16="http://schemas.microsoft.com/office/drawing/2014/main" id="{748BBFC0-967C-6B69-0AAD-0B17C6D04D00}"/>
+                <a16:creationId xmlns:a16="http://schemas.microsoft.com/office/drawing/2014/main" id="{C7CFAB61-889A-B303-F401-6368885AB37A}"/>
               </a:ext>
             </a:extLst>
           </p:cNvPr>
@@ -6626,7 +6632,7 @@
     </p:spTree>
     <p:extLst>
       <p:ext uri="{BB962C8B-B14F-4D97-AF65-F5344CB8AC3E}">
-        <p14:creationId xmlns:p14="http://schemas.microsoft.com/office/powerpoint/2010/main" val="3871000626"/>
+        <p14:creationId xmlns:p14="http://schemas.microsoft.com/office/powerpoint/2010/main" val="3095156788"/>
       </p:ext>
     </p:extLst>
   </p:cSld>
@@ -7005,7 +7011,7 @@
           <p:cNvPr id="6" name="Body card">
             <a:extLst>
               <a:ext uri="{FF2B5EF4-FFF2-40B4-BE49-F238E27FC236}">
-                <a16:creationId xmlns:a16="http://schemas.microsoft.com/office/drawing/2014/main" id="{6F4D945F-8F81-A95F-3508-B8EFF7877FFB}"/>
+                <a16:creationId xmlns:a16="http://schemas.microsoft.com/office/drawing/2014/main" id="{312522C8-F82C-F1B1-661D-A84147B7BF4A}"/>
               </a:ext>
             </a:extLst>
           </p:cNvPr>
@@ -7379,7 +7385,7 @@
           <p:cNvPr id="4" name="Slide Number Placeholder 3">
             <a:extLst>
               <a:ext uri="{FF2B5EF4-FFF2-40B4-BE49-F238E27FC236}">
-                <a16:creationId xmlns:a16="http://schemas.microsoft.com/office/drawing/2014/main" id="{B60ECAA3-E93A-3D18-874C-B151D88A2496}"/>
+                <a16:creationId xmlns:a16="http://schemas.microsoft.com/office/drawing/2014/main" id="{6E189C34-90E0-B6D3-9341-EE353FF1AD1F}"/>
               </a:ext>
             </a:extLst>
           </p:cNvPr>
@@ -7408,7 +7414,7 @@
           <p:cNvPr id="5" name="Title rule">
             <a:extLst>
               <a:ext uri="{FF2B5EF4-FFF2-40B4-BE49-F238E27FC236}">
-                <a16:creationId xmlns:a16="http://schemas.microsoft.com/office/drawing/2014/main" id="{15DB3FE6-2408-CD98-4899-B108AB01C198}"/>
+                <a16:creationId xmlns:a16="http://schemas.microsoft.com/office/drawing/2014/main" id="{ED9EF298-909D-5D9D-52F8-8B793436934A}"/>
               </a:ext>
             </a:extLst>
           </p:cNvPr>
@@ -7474,7 +7480,7 @@
     </p:spTree>
     <p:extLst>
       <p:ext uri="{BB962C8B-B14F-4D97-AF65-F5344CB8AC3E}">
-        <p14:creationId xmlns:p14="http://schemas.microsoft.com/office/powerpoint/2010/main" val="718087012"/>
+        <p14:creationId xmlns:p14="http://schemas.microsoft.com/office/powerpoint/2010/main" val="3932384555"/>
       </p:ext>
     </p:extLst>
   </p:cSld>
@@ -8095,7 +8101,7 @@
           <p:cNvPr id="3" name="Slide Number Placeholder 2">
             <a:extLst>
               <a:ext uri="{FF2B5EF4-FFF2-40B4-BE49-F238E27FC236}">
-                <a16:creationId xmlns:a16="http://schemas.microsoft.com/office/drawing/2014/main" id="{5BFFF40A-6FCE-6C5F-98F1-8FA729ABC56C}"/>
+                <a16:creationId xmlns:a16="http://schemas.microsoft.com/office/drawing/2014/main" id="{A964F246-5AC2-C460-5DB1-D0754A925387}"/>
               </a:ext>
             </a:extLst>
           </p:cNvPr>
@@ -8122,7 +8128,7 @@
     </p:spTree>
     <p:extLst>
       <p:ext uri="{BB962C8B-B14F-4D97-AF65-F5344CB8AC3E}">
-        <p14:creationId xmlns:p14="http://schemas.microsoft.com/office/powerpoint/2010/main" val="298368178"/>
+        <p14:creationId xmlns:p14="http://schemas.microsoft.com/office/powerpoint/2010/main" val="1549740611"/>
       </p:ext>
     </p:extLst>
   </p:cSld>
@@ -8154,7 +8160,7 @@
           <p:cNvPr id="6" name="Body card">
             <a:extLst>
               <a:ext uri="{FF2B5EF4-FFF2-40B4-BE49-F238E27FC236}">
-                <a16:creationId xmlns:a16="http://schemas.microsoft.com/office/drawing/2014/main" id="{3B6E6B2B-5E08-F821-6300-CFB9707ED027}"/>
+                <a16:creationId xmlns:a16="http://schemas.microsoft.com/office/drawing/2014/main" id="{44A9729B-13C9-6E88-5FC7-D2B3D011B4A5}"/>
               </a:ext>
             </a:extLst>
           </p:cNvPr>
@@ -8473,7 +8479,7 @@
           <p:cNvPr id="4" name="Slide Number Placeholder 3">
             <a:extLst>
               <a:ext uri="{FF2B5EF4-FFF2-40B4-BE49-F238E27FC236}">
-                <a16:creationId xmlns:a16="http://schemas.microsoft.com/office/drawing/2014/main" id="{11E24CD5-EE78-FCBA-7520-EFD37A81FD15}"/>
+                <a16:creationId xmlns:a16="http://schemas.microsoft.com/office/drawing/2014/main" id="{20EB8A3C-62AA-1C35-C849-13F4C208FE09}"/>
               </a:ext>
             </a:extLst>
           </p:cNvPr>
@@ -8502,7 +8508,7 @@
           <p:cNvPr id="5" name="Title rule">
             <a:extLst>
               <a:ext uri="{FF2B5EF4-FFF2-40B4-BE49-F238E27FC236}">
-                <a16:creationId xmlns:a16="http://schemas.microsoft.com/office/drawing/2014/main" id="{88691142-76AF-83ED-4371-268C761ED815}"/>
+                <a16:creationId xmlns:a16="http://schemas.microsoft.com/office/drawing/2014/main" id="{ADB5BFF9-1BCC-26C3-331E-415A99490D0D}"/>
               </a:ext>
             </a:extLst>
           </p:cNvPr>
@@ -8568,7 +8574,7 @@
     </p:spTree>
     <p:extLst>
       <p:ext uri="{BB962C8B-B14F-4D97-AF65-F5344CB8AC3E}">
-        <p14:creationId xmlns:p14="http://schemas.microsoft.com/office/powerpoint/2010/main" val="3721658517"/>
+        <p14:creationId xmlns:p14="http://schemas.microsoft.com/office/powerpoint/2010/main" val="4118197625"/>
       </p:ext>
     </p:extLst>
   </p:cSld>
@@ -10062,7 +10068,7 @@
           <p:cNvPr id="5" name="Slide Number Placeholder 4">
             <a:extLst>
               <a:ext uri="{FF2B5EF4-FFF2-40B4-BE49-F238E27FC236}">
-                <a16:creationId xmlns:a16="http://schemas.microsoft.com/office/drawing/2014/main" id="{AA13168D-4729-8373-5046-00678BC92CCB}"/>
+                <a16:creationId xmlns:a16="http://schemas.microsoft.com/office/drawing/2014/main" id="{CADC5D79-F5C2-F6DE-CEB4-6150C85D697E}"/>
               </a:ext>
             </a:extLst>
           </p:cNvPr>
@@ -10089,7 +10095,7 @@
     </p:spTree>
     <p:extLst>
       <p:ext uri="{BB962C8B-B14F-4D97-AF65-F5344CB8AC3E}">
-        <p14:creationId xmlns:p14="http://schemas.microsoft.com/office/powerpoint/2010/main" val="3347046242"/>
+        <p14:creationId xmlns:p14="http://schemas.microsoft.com/office/powerpoint/2010/main" val="1179503030"/>
       </p:ext>
     </p:extLst>
   </p:cSld>
@@ -10118,66 +10124,10 @@
       </p:grpSpPr>
       <p:sp>
         <p:nvSpPr>
-          <p:cNvPr id="6" name="Body card">
-            <a:extLst>
-              <a:ext uri="{FF2B5EF4-FFF2-40B4-BE49-F238E27FC236}">
-                <a16:creationId xmlns:a16="http://schemas.microsoft.com/office/drawing/2014/main" id="{9DE8458D-EF86-6DE3-388E-4314D18D3770}"/>
-              </a:ext>
-            </a:extLst>
-          </p:cNvPr>
-          <p:cNvSpPr/>
-          <p:nvPr/>
-        </p:nvSpPr>
-        <p:spPr>
-          <a:xfrm>
-            <a:off x="635000" y="1676400"/>
-            <a:ext cx="10922000" cy="3263900"/>
-          </a:xfrm>
-          <a:prstGeom prst="roundRect">
-            <a:avLst>
-              <a:gd name="adj" fmla="val 3000"/>
-            </a:avLst>
-          </a:prstGeom>
-          <a:solidFill>
-            <a:srgbClr val="F2F6FC"/>
-          </a:solidFill>
-          <a:ln w="19050">
-            <a:solidFill>
-              <a:srgbClr val="4472C4"/>
-            </a:solidFill>
-          </a:ln>
-        </p:spPr>
-        <p:style>
-          <a:lnRef idx="2">
-            <a:schemeClr val="accent1">
-              <a:shade val="15000"/>
-            </a:schemeClr>
-          </a:lnRef>
-          <a:fillRef idx="1">
-            <a:schemeClr val="accent1"/>
-          </a:fillRef>
-          <a:effectRef idx="0">
-            <a:schemeClr val="accent1"/>
-          </a:effectRef>
-          <a:fontRef idx="minor">
-            <a:schemeClr val="lt1"/>
-          </a:fontRef>
-        </p:style>
-        <p:txBody>
-          <a:bodyPr rtlCol="0" anchor="ctr"/>
-          <a:lstStyle/>
-          <a:p>
-            <a:pPr algn="ctr"/>
-            <a:endParaRPr lang="en-US"/>
-          </a:p>
-        </p:txBody>
-      </p:sp>
-      <p:sp>
-        <p:nvSpPr>
           <p:cNvPr id="2" name="Title 1">
             <a:extLst>
               <a:ext uri="{FF2B5EF4-FFF2-40B4-BE49-F238E27FC236}">
-                <a16:creationId xmlns:a16="http://schemas.microsoft.com/office/drawing/2014/main" id="{B589C3C6-C810-835B-54A4-E5A4037C1C25}"/>
+                <a16:creationId xmlns:a16="http://schemas.microsoft.com/office/drawing/2014/main" id="{693DEF69-32E0-75BE-12DF-06323FC38950}"/>
               </a:ext>
             </a:extLst>
           </p:cNvPr>
@@ -10199,13 +10149,8 @@
                   <a:srgbClr val="1F3864"/>
                 </a:solidFill>
               </a:rPr>
-              <a:t>Practice: Quartiles from Exam Scores</a:t>
+              <a:t>Quartiles from the cumulative relative frequency</a:t>
             </a:r>
-            <a:endParaRPr lang="en-US" dirty="0">
-              <a:solidFill>
-                <a:srgbClr val="1F3864"/>
-              </a:solidFill>
-            </a:endParaRPr>
           </a:p>
         </p:txBody>
       </p:sp>
@@ -10214,7 +10159,7 @@
           <p:cNvPr id="3" name="Content Placeholder 2">
             <a:extLst>
               <a:ext uri="{FF2B5EF4-FFF2-40B4-BE49-F238E27FC236}">
-                <a16:creationId xmlns:a16="http://schemas.microsoft.com/office/drawing/2014/main" id="{307FDE7D-C54C-9F70-498E-F05F62BAA59A}"/>
+                <a16:creationId xmlns:a16="http://schemas.microsoft.com/office/drawing/2014/main" id="{1EC3EB1C-6CB9-BA32-AEB6-4F2CEDBBD17D}"/>
               </a:ext>
             </a:extLst>
           </p:cNvPr>
@@ -10225,53 +10170,129 @@
             <p:ph idx="1"/>
           </p:nvPr>
         </p:nvSpPr>
-        <p:spPr/>
+        <p:spPr>
+          <a:xfrm>
+            <a:off x="508000" y="1778000"/>
+            <a:ext cx="5334000" cy="4191000"/>
+          </a:xfrm>
+        </p:spPr>
         <p:txBody>
-          <a:bodyPr/>
+          <a:bodyPr>
+            <a:normAutofit/>
+          </a:bodyPr>
           <a:lstStyle/>
           <a:p>
-            <a:pPr marL="0" indent="0">
-              <a:buNone/>
-            </a:pPr>
             <a:r>
-              <a:rPr lang="en-US" dirty="0"/>
-              <a:t>Consider the following 15 exam scores of students in a statistics course</a:t>
+              <a:rPr lang="en-US" sz="1500"/>
+              <a:t>The crf column says what fraction of the data falls at or below each value</a:t>
             </a:r>
           </a:p>
           <a:p>
-            <a:pPr marL="0" indent="0">
-              <a:buNone/>
-            </a:pPr>
-            <a:endParaRPr lang="en-US" dirty="0"/>
-          </a:p>
-          <a:p>
-            <a:pPr marL="0" indent="0">
-              <a:buNone/>
-            </a:pPr>
             <a:r>
-              <a:rPr lang="en-US" dirty="0"/>
-              <a:t>61,61,65,65,66,68,69,73,74,75,76,78,79,90,94</a:t>
+              <a:rPr lang="en-US" sz="1500"/>
+              <a:t>So the percentiles can be read straight off the table</a:t>
             </a:r>
           </a:p>
           <a:p>
-            <a:pPr marL="0" indent="0">
-              <a:buNone/>
-            </a:pPr>
-            <a:endParaRPr lang="en-US" dirty="0"/>
-          </a:p>
-          <a:p>
-            <a:pPr marL="0" indent="0">
-              <a:buNone/>
-            </a:pPr>
-            <a:endParaRPr lang="en-US" dirty="0"/>
-          </a:p>
-          <a:p>
-            <a:pPr marL="0" indent="0">
-              <a:buNone/>
-            </a:pPr>
+            <a:pPr lvl="1"/>
             <a:r>
-              <a:rPr lang="en-US" dirty="0"/>
-              <a:t>Compute the 3 quartiles Q1, Q2, and Q3</a:t>
+              <a:rPr lang="en-US" sz="1500"/>
+              <a:t>the pth percentile is the first value whose crf reaches p/100</a:t>
+            </a:r>
+          </a:p>
+          <a:p>
+            <a:r>
+              <a:rPr lang="en-US" sz="1500"/>
+              <a:t>Q1: first crf at or above 0.25   gives x = 3</a:t>
+            </a:r>
+          </a:p>
+          <a:p>
+            <a:r>
+              <a:rPr lang="en-US" sz="1500"/>
+              <a:t>Q2: first crf at or above 0.50   gives x = 4</a:t>
+            </a:r>
+          </a:p>
+          <a:p>
+            <a:r>
+              <a:rPr lang="en-US" sz="1500"/>
+              <a:t>Q3: first crf at or above 0.75   gives x = 5</a:t>
+            </a:r>
+          </a:p>
+          <a:p>
+            <a:r>
+              <a:rPr lang="en-US" sz="1500"/>
+              <a:t>The same Q1, Q2 and Q3 the halving method gave us</a:t>
+            </a:r>
+          </a:p>
+        </p:txBody>
+      </p:sp>
+      <p:pic>
+        <p:nvPicPr>
+          <p:cNvPr id="5" name="Picture 4">
+            <a:extLst>
+              <a:ext uri="{FF2B5EF4-FFF2-40B4-BE49-F238E27FC236}">
+                <a16:creationId xmlns:a16="http://schemas.microsoft.com/office/drawing/2014/main" id="{0424F549-AAD8-5F9A-5ACE-6D53AA8606D2}"/>
+              </a:ext>
+            </a:extLst>
+          </p:cNvPr>
+          <p:cNvPicPr>
+            <a:picLocks/>
+          </p:cNvPicPr>
+          <p:nvPr/>
+        </p:nvPicPr>
+        <p:blipFill>
+          <a:blip r:embed="rId2">
+            <a:extLst>
+              <a:ext uri="{28A0092B-C50C-407E-A947-70E740481C1C}">
+                <a14:useLocalDpi xmlns:a14="http://schemas.microsoft.com/office/drawing/2010/main" val="0"/>
+              </a:ext>
+            </a:extLst>
+          </a:blip>
+          <a:stretch>
+            <a:fillRect/>
+          </a:stretch>
+        </p:blipFill>
+        <p:spPr>
+          <a:xfrm>
+            <a:off x="6172200" y="1905000"/>
+            <a:ext cx="5511800" cy="3048000"/>
+          </a:xfrm>
+          <a:prstGeom prst="rect">
+            <a:avLst/>
+          </a:prstGeom>
+        </p:spPr>
+      </p:pic>
+      <p:sp>
+        <p:nvSpPr>
+          <p:cNvPr id="6" name="TextBox 5">
+            <a:extLst>
+              <a:ext uri="{FF2B5EF4-FFF2-40B4-BE49-F238E27FC236}">
+                <a16:creationId xmlns:a16="http://schemas.microsoft.com/office/drawing/2014/main" id="{DAD81BF8-8E96-4D07-03B3-A9FAD528F326}"/>
+              </a:ext>
+            </a:extLst>
+          </p:cNvPr>
+          <p:cNvSpPr txBox="1"/>
+          <p:nvPr/>
+        </p:nvSpPr>
+        <p:spPr>
+          <a:xfrm>
+            <a:off x="6172200" y="5130800"/>
+            <a:ext cx="5511800" cy="646331"/>
+          </a:xfrm>
+          <a:prstGeom prst="rect">
+            <a:avLst/>
+          </a:prstGeom>
+          <a:noFill/>
+        </p:spPr>
+        <p:txBody>
+          <a:bodyPr vert="horz" wrap="square" rtlCol="0">
+            <a:spAutoFit/>
+          </a:bodyPr>
+          <a:lstStyle/>
+          <a:p>
+            <a:r>
+              <a:rPr lang="en-US" sz="1200" i="1"/>
+              <a:t>One caution: when a crf lands exactly on 0.25, 0.50 or 0.75, the two methods can differ by one step. Keep using the halving method as the definition; read the table to check yourself.</a:t>
             </a:r>
           </a:p>
         </p:txBody>
@@ -10281,7 +10302,7 @@
           <p:cNvPr id="4" name="Slide Number Placeholder 3">
             <a:extLst>
               <a:ext uri="{FF2B5EF4-FFF2-40B4-BE49-F238E27FC236}">
-                <a16:creationId xmlns:a16="http://schemas.microsoft.com/office/drawing/2014/main" id="{09CAF408-2725-6604-C6F0-A9875FC4F75A}"/>
+                <a16:creationId xmlns:a16="http://schemas.microsoft.com/office/drawing/2014/main" id="{6B1F11F6-54C5-E223-975D-74844E3B1D8B}"/>
               </a:ext>
             </a:extLst>
           </p:cNvPr>
@@ -10307,10 +10328,10 @@
       </p:sp>
       <p:sp>
         <p:nvSpPr>
-          <p:cNvPr id="5" name="Title rule">
+          <p:cNvPr id="7" name="Title rule">
             <a:extLst>
               <a:ext uri="{FF2B5EF4-FFF2-40B4-BE49-F238E27FC236}">
-                <a16:creationId xmlns:a16="http://schemas.microsoft.com/office/drawing/2014/main" id="{EE5267E6-92FB-5EAC-4854-9C10F0FA53D4}"/>
+                <a16:creationId xmlns:a16="http://schemas.microsoft.com/office/drawing/2014/main" id="{9A16F97E-3607-2F14-5FD3-965BB54FB2CF}"/>
               </a:ext>
             </a:extLst>
           </p:cNvPr>
@@ -10376,7 +10397,7 @@
     </p:spTree>
     <p:extLst>
       <p:ext uri="{BB962C8B-B14F-4D97-AF65-F5344CB8AC3E}">
-        <p14:creationId xmlns:p14="http://schemas.microsoft.com/office/powerpoint/2010/main" val="1252389845"/>
+        <p14:creationId xmlns:p14="http://schemas.microsoft.com/office/powerpoint/2010/main" val="2218183594"/>
       </p:ext>
     </p:extLst>
   </p:cSld>
@@ -10810,7 +10831,7 @@
           <p:cNvPr id="11" name="Slide Number Placeholder 10">
             <a:extLst>
               <a:ext uri="{FF2B5EF4-FFF2-40B4-BE49-F238E27FC236}">
-                <a16:creationId xmlns:a16="http://schemas.microsoft.com/office/drawing/2014/main" id="{FE501316-DDC8-C3F8-4EC6-46B3A131BC85}"/>
+                <a16:creationId xmlns:a16="http://schemas.microsoft.com/office/drawing/2014/main" id="{266091C9-B7EB-6BBE-A602-1479CDF9719E}"/>
               </a:ext>
             </a:extLst>
           </p:cNvPr>
@@ -11256,6 +11277,293 @@
       </p:grpSpPr>
       <p:sp>
         <p:nvSpPr>
+          <p:cNvPr id="6" name="Body card">
+            <a:extLst>
+              <a:ext uri="{FF2B5EF4-FFF2-40B4-BE49-F238E27FC236}">
+                <a16:creationId xmlns:a16="http://schemas.microsoft.com/office/drawing/2014/main" id="{4A9B47AF-A64F-D46D-799F-562257440635}"/>
+              </a:ext>
+            </a:extLst>
+          </p:cNvPr>
+          <p:cNvSpPr/>
+          <p:nvPr/>
+        </p:nvSpPr>
+        <p:spPr>
+          <a:xfrm>
+            <a:off x="635000" y="1676400"/>
+            <a:ext cx="10922000" cy="3263900"/>
+          </a:xfrm>
+          <a:prstGeom prst="roundRect">
+            <a:avLst>
+              <a:gd name="adj" fmla="val 3000"/>
+            </a:avLst>
+          </a:prstGeom>
+          <a:solidFill>
+            <a:srgbClr val="F2F6FC"/>
+          </a:solidFill>
+          <a:ln w="19050">
+            <a:solidFill>
+              <a:srgbClr val="4472C4"/>
+            </a:solidFill>
+          </a:ln>
+        </p:spPr>
+        <p:style>
+          <a:lnRef idx="2">
+            <a:schemeClr val="accent1">
+              <a:shade val="15000"/>
+            </a:schemeClr>
+          </a:lnRef>
+          <a:fillRef idx="1">
+            <a:schemeClr val="accent1"/>
+          </a:fillRef>
+          <a:effectRef idx="0">
+            <a:schemeClr val="accent1"/>
+          </a:effectRef>
+          <a:fontRef idx="minor">
+            <a:schemeClr val="lt1"/>
+          </a:fontRef>
+        </p:style>
+        <p:txBody>
+          <a:bodyPr rtlCol="0" anchor="ctr"/>
+          <a:lstStyle/>
+          <a:p>
+            <a:pPr algn="ctr"/>
+            <a:endParaRPr lang="en-US"/>
+          </a:p>
+        </p:txBody>
+      </p:sp>
+      <p:sp>
+        <p:nvSpPr>
+          <p:cNvPr id="2" name="Title 1">
+            <a:extLst>
+              <a:ext uri="{FF2B5EF4-FFF2-40B4-BE49-F238E27FC236}">
+                <a16:creationId xmlns:a16="http://schemas.microsoft.com/office/drawing/2014/main" id="{B589C3C6-C810-835B-54A4-E5A4037C1C25}"/>
+              </a:ext>
+            </a:extLst>
+          </p:cNvPr>
+          <p:cNvSpPr>
+            <a:spLocks noGrp="1"/>
+          </p:cNvSpPr>
+          <p:nvPr>
+            <p:ph type="title"/>
+          </p:nvPr>
+        </p:nvSpPr>
+        <p:spPr/>
+        <p:txBody>
+          <a:bodyPr/>
+          <a:lstStyle/>
+          <a:p>
+            <a:r>
+              <a:rPr lang="en-US">
+                <a:solidFill>
+                  <a:srgbClr val="1F3864"/>
+                </a:solidFill>
+              </a:rPr>
+              <a:t>Practice: Quartiles from Exam Scores</a:t>
+            </a:r>
+            <a:endParaRPr lang="en-US" dirty="0">
+              <a:solidFill>
+                <a:srgbClr val="1F3864"/>
+              </a:solidFill>
+            </a:endParaRPr>
+          </a:p>
+        </p:txBody>
+      </p:sp>
+      <p:sp>
+        <p:nvSpPr>
+          <p:cNvPr id="3" name="Content Placeholder 2">
+            <a:extLst>
+              <a:ext uri="{FF2B5EF4-FFF2-40B4-BE49-F238E27FC236}">
+                <a16:creationId xmlns:a16="http://schemas.microsoft.com/office/drawing/2014/main" id="{307FDE7D-C54C-9F70-498E-F05F62BAA59A}"/>
+              </a:ext>
+            </a:extLst>
+          </p:cNvPr>
+          <p:cNvSpPr>
+            <a:spLocks noGrp="1"/>
+          </p:cNvSpPr>
+          <p:nvPr>
+            <p:ph idx="1"/>
+          </p:nvPr>
+        </p:nvSpPr>
+        <p:spPr/>
+        <p:txBody>
+          <a:bodyPr/>
+          <a:lstStyle/>
+          <a:p>
+            <a:pPr marL="0" indent="0">
+              <a:buNone/>
+            </a:pPr>
+            <a:r>
+              <a:rPr lang="en-US" dirty="0"/>
+              <a:t>Consider the following 15 exam scores of students in a statistics course</a:t>
+            </a:r>
+          </a:p>
+          <a:p>
+            <a:pPr marL="0" indent="0">
+              <a:buNone/>
+            </a:pPr>
+            <a:endParaRPr lang="en-US" dirty="0"/>
+          </a:p>
+          <a:p>
+            <a:pPr marL="0" indent="0">
+              <a:buNone/>
+            </a:pPr>
+            <a:r>
+              <a:rPr lang="en-US" dirty="0"/>
+              <a:t>61,61,65,65,66,68,69,73,74,75,76,78,79,90,94</a:t>
+            </a:r>
+          </a:p>
+          <a:p>
+            <a:pPr marL="0" indent="0">
+              <a:buNone/>
+            </a:pPr>
+            <a:endParaRPr lang="en-US" dirty="0"/>
+          </a:p>
+          <a:p>
+            <a:pPr marL="0" indent="0">
+              <a:buNone/>
+            </a:pPr>
+            <a:endParaRPr lang="en-US" dirty="0"/>
+          </a:p>
+          <a:p>
+            <a:pPr marL="0" indent="0">
+              <a:buNone/>
+            </a:pPr>
+            <a:r>
+              <a:rPr lang="en-US" dirty="0"/>
+              <a:t>Compute the 3 quartiles Q1, Q2, and Q3</a:t>
+            </a:r>
+          </a:p>
+        </p:txBody>
+      </p:sp>
+      <p:sp>
+        <p:nvSpPr>
+          <p:cNvPr id="4" name="Slide Number Placeholder 3">
+            <a:extLst>
+              <a:ext uri="{FF2B5EF4-FFF2-40B4-BE49-F238E27FC236}">
+                <a16:creationId xmlns:a16="http://schemas.microsoft.com/office/drawing/2014/main" id="{9AEE19E6-64D1-F26C-FB1D-51B158B9BB86}"/>
+              </a:ext>
+            </a:extLst>
+          </p:cNvPr>
+          <p:cNvSpPr>
+            <a:spLocks noGrp="1"/>
+          </p:cNvSpPr>
+          <p:nvPr>
+            <p:ph type="sldNum" sz="quarter" idx="12"/>
+          </p:nvPr>
+        </p:nvSpPr>
+        <p:spPr/>
+        <p:txBody>
+          <a:bodyPr/>
+          <a:lstStyle/>
+          <a:p>
+            <a:fld id="{A80A81DD-F10A-4B1C-963A-0ABBB4865886}" type="slidenum">
+              <a:rPr lang="en-US" smtClean="0"/>
+              <a:t>20</a:t>
+            </a:fld>
+            <a:endParaRPr lang="en-US"/>
+          </a:p>
+        </p:txBody>
+      </p:sp>
+      <p:sp>
+        <p:nvSpPr>
+          <p:cNvPr id="5" name="Title rule">
+            <a:extLst>
+              <a:ext uri="{FF2B5EF4-FFF2-40B4-BE49-F238E27FC236}">
+                <a16:creationId xmlns:a16="http://schemas.microsoft.com/office/drawing/2014/main" id="{2EB0C8EA-315D-031B-189D-F018E26D8B74}"/>
+              </a:ext>
+            </a:extLst>
+          </p:cNvPr>
+          <p:cNvSpPr/>
+          <p:nvPr/>
+        </p:nvSpPr>
+        <p:spPr>
+          <a:xfrm>
+            <a:off x="838200" y="1600200"/>
+            <a:ext cx="10515600" cy="38100"/>
+          </a:xfrm>
+          <a:prstGeom prst="rect">
+            <a:avLst/>
+          </a:prstGeom>
+          <a:solidFill>
+            <a:srgbClr val="4472C4"/>
+          </a:solidFill>
+          <a:ln w="12700" cap="flat" cmpd="sng" algn="ctr">
+            <a:noFill/>
+            <a:prstDash val="solid"/>
+            <a:miter lim="800000"/>
+          </a:ln>
+          <a:effectLst/>
+          <a:extLst>
+            <a:ext uri="{91240B29-F687-4F45-9708-019B960494DF}">
+              <a14:hiddenLine xmlns:a14="http://schemas.microsoft.com/office/drawing/2010/main" w="12700" cap="flat" cmpd="sng" algn="ctr">
+                <a:solidFill>
+                  <a:schemeClr val="accent1">
+                    <a:shade val="15000"/>
+                  </a:schemeClr>
+                </a:solidFill>
+                <a:prstDash val="solid"/>
+                <a:miter lim="800000"/>
+              </a14:hiddenLine>
+            </a:ext>
+          </a:extLst>
+        </p:spPr>
+        <p:style>
+          <a:lnRef idx="2">
+            <a:schemeClr val="accent1">
+              <a:shade val="15000"/>
+            </a:schemeClr>
+          </a:lnRef>
+          <a:fillRef idx="1">
+            <a:schemeClr val="accent1"/>
+          </a:fillRef>
+          <a:effectRef idx="0">
+            <a:schemeClr val="accent1"/>
+          </a:effectRef>
+          <a:fontRef idx="minor">
+            <a:schemeClr val="lt1"/>
+          </a:fontRef>
+        </p:style>
+        <p:txBody>
+          <a:bodyPr rtlCol="0" anchor="ctr"/>
+          <a:lstStyle/>
+          <a:p>
+            <a:pPr algn="ctr"/>
+            <a:endParaRPr lang="en-US"/>
+          </a:p>
+        </p:txBody>
+      </p:sp>
+    </p:spTree>
+    <p:extLst>
+      <p:ext uri="{BB962C8B-B14F-4D97-AF65-F5344CB8AC3E}">
+        <p14:creationId xmlns:p14="http://schemas.microsoft.com/office/powerpoint/2010/main" val="2046458860"/>
+      </p:ext>
+    </p:extLst>
+  </p:cSld>
+  <p:clrMapOvr>
+    <a:masterClrMapping/>
+  </p:clrMapOvr>
+</p:sld>
+</file>
+
+<file path=ppt/slides/slide21.xml><?xml version="1.0" encoding="utf-8"?>
+<p:sld xmlns:a="http://schemas.openxmlformats.org/drawingml/2006/main" xmlns:r="http://schemas.openxmlformats.org/officeDocument/2006/relationships" xmlns:p="http://schemas.openxmlformats.org/presentationml/2006/main">
+  <p:cSld>
+    <p:spTree>
+      <p:nvGrpSpPr>
+        <p:cNvPr id="1" name=""/>
+        <p:cNvGrpSpPr/>
+        <p:nvPr/>
+      </p:nvGrpSpPr>
+      <p:grpSpPr>
+        <a:xfrm>
+          <a:off x="0" y="0"/>
+          <a:ext cx="0" cy="0"/>
+          <a:chOff x="0" y="0"/>
+          <a:chExt cx="0" cy="0"/>
+        </a:xfrm>
+      </p:grpSpPr>
+      <p:sp>
+        <p:nvSpPr>
           <p:cNvPr id="2" name="Title 1">
             <a:extLst>
               <a:ext uri="{FF2B5EF4-FFF2-40B4-BE49-F238E27FC236}">
@@ -11321,7 +11629,7 @@
           <p:cNvPr id="3" name="Slide Number Placeholder 2">
             <a:extLst>
               <a:ext uri="{FF2B5EF4-FFF2-40B4-BE49-F238E27FC236}">
-                <a16:creationId xmlns:a16="http://schemas.microsoft.com/office/drawing/2014/main" id="{80242620-7E47-0E40-4234-EBA519D37A81}"/>
+                <a16:creationId xmlns:a16="http://schemas.microsoft.com/office/drawing/2014/main" id="{3B38AD11-2CC4-2AB6-9CE5-DCCB89DAAB7C}"/>
               </a:ext>
             </a:extLst>
           </p:cNvPr>
@@ -11339,7 +11647,7 @@
           <a:p>
             <a:fld id="{A80A81DD-F10A-4B1C-963A-0ABBB4865886}" type="slidenum">
               <a:rPr lang="en-US" smtClean="0"/>
-              <a:t>20</a:t>
+              <a:t>21</a:t>
             </a:fld>
             <a:endParaRPr lang="en-US"/>
           </a:p>
@@ -11348,7 +11656,7 @@
     </p:spTree>
     <p:extLst>
       <p:ext uri="{BB962C8B-B14F-4D97-AF65-F5344CB8AC3E}">
-        <p14:creationId xmlns:p14="http://schemas.microsoft.com/office/powerpoint/2010/main" val="3283936003"/>
+        <p14:creationId xmlns:p14="http://schemas.microsoft.com/office/powerpoint/2010/main" val="165904137"/>
       </p:ext>
     </p:extLst>
   </p:cSld>
@@ -11358,7 +11666,7 @@
 </p:sld>
 </file>
 
-<file path=ppt/slides/slide21.xml><?xml version="1.0" encoding="utf-8"?>
+<file path=ppt/slides/slide22.xml><?xml version="1.0" encoding="utf-8"?>
 <p:sld xmlns:a="http://schemas.openxmlformats.org/drawingml/2006/main" xmlns:r="http://schemas.openxmlformats.org/officeDocument/2006/relationships" xmlns:p="http://schemas.openxmlformats.org/presentationml/2006/main">
   <p:cSld>
     <p:spTree>
@@ -11574,7 +11882,7 @@
           <p:cNvPr id="4" name="Slide Number Placeholder 3">
             <a:extLst>
               <a:ext uri="{FF2B5EF4-FFF2-40B4-BE49-F238E27FC236}">
-                <a16:creationId xmlns:a16="http://schemas.microsoft.com/office/drawing/2014/main" id="{0C269772-F593-1AB5-BE8D-F2B3CAE3BC04}"/>
+                <a16:creationId xmlns:a16="http://schemas.microsoft.com/office/drawing/2014/main" id="{08203966-5407-94DA-479C-BB9A9F8F2CAF}"/>
               </a:ext>
             </a:extLst>
           </p:cNvPr>
@@ -11592,7 +11900,7 @@
           <a:p>
             <a:fld id="{A80A81DD-F10A-4B1C-963A-0ABBB4865886}" type="slidenum">
               <a:rPr lang="en-US" smtClean="0"/>
-              <a:t>21</a:t>
+              <a:t>22</a:t>
             </a:fld>
             <a:endParaRPr lang="en-US"/>
           </a:p>
@@ -11601,7 +11909,7 @@
     </p:spTree>
     <p:extLst>
       <p:ext uri="{BB962C8B-B14F-4D97-AF65-F5344CB8AC3E}">
-        <p14:creationId xmlns:p14="http://schemas.microsoft.com/office/powerpoint/2010/main" val="2489692700"/>
+        <p14:creationId xmlns:p14="http://schemas.microsoft.com/office/powerpoint/2010/main" val="2200598851"/>
       </p:ext>
     </p:extLst>
   </p:cSld>
@@ -11611,7 +11919,7 @@
 </p:sld>
 </file>
 
-<file path=ppt/slides/slide22.xml><?xml version="1.0" encoding="utf-8"?>
+<file path=ppt/slides/slide23.xml><?xml version="1.0" encoding="utf-8"?>
 <p:sld xmlns:a="http://schemas.openxmlformats.org/drawingml/2006/main" xmlns:r="http://schemas.openxmlformats.org/officeDocument/2006/relationships" xmlns:p="http://schemas.openxmlformats.org/presentationml/2006/main">
   <p:cSld>
     <p:spTree>
@@ -11633,7 +11941,7 @@
           <p:cNvPr id="6" name="Body card">
             <a:extLst>
               <a:ext uri="{FF2B5EF4-FFF2-40B4-BE49-F238E27FC236}">
-                <a16:creationId xmlns:a16="http://schemas.microsoft.com/office/drawing/2014/main" id="{97C9600F-4BA8-C9BF-F926-12F7AC5521DD}"/>
+                <a16:creationId xmlns:a16="http://schemas.microsoft.com/office/drawing/2014/main" id="{BE8495F7-FD8E-CE47-6FF5-9B67FDC5FFCF}"/>
               </a:ext>
             </a:extLst>
           </p:cNvPr>
@@ -11954,7 +12262,7 @@
           <p:cNvPr id="4" name="Slide Number Placeholder 3">
             <a:extLst>
               <a:ext uri="{FF2B5EF4-FFF2-40B4-BE49-F238E27FC236}">
-                <a16:creationId xmlns:a16="http://schemas.microsoft.com/office/drawing/2014/main" id="{2065AFB9-F9A3-7D77-47C3-3A158CB4DEA5}"/>
+                <a16:creationId xmlns:a16="http://schemas.microsoft.com/office/drawing/2014/main" id="{7C8AED4B-7D0B-B025-EFFA-10727BEB6974}"/>
               </a:ext>
             </a:extLst>
           </p:cNvPr>
@@ -11972,7 +12280,7 @@
           <a:p>
             <a:fld id="{A80A81DD-F10A-4B1C-963A-0ABBB4865886}" type="slidenum">
               <a:rPr lang="en-US" smtClean="0"/>
-              <a:t>22</a:t>
+              <a:t>23</a:t>
             </a:fld>
             <a:endParaRPr lang="en-US"/>
           </a:p>
@@ -11983,7 +12291,7 @@
           <p:cNvPr id="5" name="Title rule">
             <a:extLst>
               <a:ext uri="{FF2B5EF4-FFF2-40B4-BE49-F238E27FC236}">
-                <a16:creationId xmlns:a16="http://schemas.microsoft.com/office/drawing/2014/main" id="{D4A4C70D-0C64-041D-849E-55844D1ADFCF}"/>
+                <a16:creationId xmlns:a16="http://schemas.microsoft.com/office/drawing/2014/main" id="{6C59B7F6-6EC8-75C4-2EBA-7F43BFA74F95}"/>
               </a:ext>
             </a:extLst>
           </p:cNvPr>
@@ -12049,7 +12357,7 @@
     </p:spTree>
     <p:extLst>
       <p:ext uri="{BB962C8B-B14F-4D97-AF65-F5344CB8AC3E}">
-        <p14:creationId xmlns:p14="http://schemas.microsoft.com/office/powerpoint/2010/main" val="1585609933"/>
+        <p14:creationId xmlns:p14="http://schemas.microsoft.com/office/powerpoint/2010/main" val="984771053"/>
       </p:ext>
     </p:extLst>
   </p:cSld>
@@ -12059,7 +12367,7 @@
 </p:sld>
 </file>
 
-<file path=ppt/slides/slide23.xml><?xml version="1.0" encoding="utf-8"?>
+<file path=ppt/slides/slide24.xml><?xml version="1.0" encoding="utf-8"?>
 <p:sld xmlns:a="http://schemas.openxmlformats.org/drawingml/2006/main" xmlns:r="http://schemas.openxmlformats.org/officeDocument/2006/relationships" xmlns:p="http://schemas.openxmlformats.org/presentationml/2006/main">
   <p:cSld>
     <p:spTree>
@@ -12081,7 +12389,7 @@
           <p:cNvPr id="6" name="Body card">
             <a:extLst>
               <a:ext uri="{FF2B5EF4-FFF2-40B4-BE49-F238E27FC236}">
-                <a16:creationId xmlns:a16="http://schemas.microsoft.com/office/drawing/2014/main" id="{D08938E1-E997-0A4D-8D04-99C4AF1E15D9}"/>
+                <a16:creationId xmlns:a16="http://schemas.microsoft.com/office/drawing/2014/main" id="{02C0B440-F91E-6F7A-3DFC-2793BD9D70C0}"/>
               </a:ext>
             </a:extLst>
           </p:cNvPr>
@@ -12215,7 +12523,7 @@
           <p:cNvPr id="4" name="Slide Number Placeholder 3">
             <a:extLst>
               <a:ext uri="{FF2B5EF4-FFF2-40B4-BE49-F238E27FC236}">
-                <a16:creationId xmlns:a16="http://schemas.microsoft.com/office/drawing/2014/main" id="{E8130587-F8C2-FA53-1B54-7B3564BC6A1B}"/>
+                <a16:creationId xmlns:a16="http://schemas.microsoft.com/office/drawing/2014/main" id="{48B69AC6-F494-838D-32D6-9D4046F5E8A8}"/>
               </a:ext>
             </a:extLst>
           </p:cNvPr>
@@ -12233,7 +12541,7 @@
           <a:p>
             <a:fld id="{A80A81DD-F10A-4B1C-963A-0ABBB4865886}" type="slidenum">
               <a:rPr lang="en-US" smtClean="0"/>
-              <a:t>23</a:t>
+              <a:t>24</a:t>
             </a:fld>
             <a:endParaRPr lang="en-US"/>
           </a:p>
@@ -12244,7 +12552,7 @@
           <p:cNvPr id="5" name="Title rule">
             <a:extLst>
               <a:ext uri="{FF2B5EF4-FFF2-40B4-BE49-F238E27FC236}">
-                <a16:creationId xmlns:a16="http://schemas.microsoft.com/office/drawing/2014/main" id="{AC557E61-2104-4B3A-5989-E870066DE594}"/>
+                <a16:creationId xmlns:a16="http://schemas.microsoft.com/office/drawing/2014/main" id="{5E310728-7EBB-3282-A6DF-A2124C2A2A94}"/>
               </a:ext>
             </a:extLst>
           </p:cNvPr>
@@ -12310,7 +12618,7 @@
     </p:spTree>
     <p:extLst>
       <p:ext uri="{BB962C8B-B14F-4D97-AF65-F5344CB8AC3E}">
-        <p14:creationId xmlns:p14="http://schemas.microsoft.com/office/powerpoint/2010/main" val="2313567103"/>
+        <p14:creationId xmlns:p14="http://schemas.microsoft.com/office/powerpoint/2010/main" val="1769097806"/>
       </p:ext>
     </p:extLst>
   </p:cSld>
@@ -12320,7 +12628,7 @@
 </p:sld>
 </file>
 
-<file path=ppt/slides/slide24.xml><?xml version="1.0" encoding="utf-8"?>
+<file path=ppt/slides/slide25.xml><?xml version="1.0" encoding="utf-8"?>
 <p:sld xmlns:a="http://schemas.openxmlformats.org/drawingml/2006/main" xmlns:r="http://schemas.openxmlformats.org/officeDocument/2006/relationships" xmlns:p="http://schemas.openxmlformats.org/presentationml/2006/main">
   <p:cSld>
     <p:spTree>
@@ -12496,7 +12804,7 @@
           <p:cNvPr id="4" name="Slide Number Placeholder 3">
             <a:extLst>
               <a:ext uri="{FF2B5EF4-FFF2-40B4-BE49-F238E27FC236}">
-                <a16:creationId xmlns:a16="http://schemas.microsoft.com/office/drawing/2014/main" id="{CB38F117-BE47-82C8-D249-5A7F6005ADF3}"/>
+                <a16:creationId xmlns:a16="http://schemas.microsoft.com/office/drawing/2014/main" id="{E1735FB2-D8B7-AAF8-DAEA-A410B5774503}"/>
               </a:ext>
             </a:extLst>
           </p:cNvPr>
@@ -12514,7 +12822,7 @@
           <a:p>
             <a:fld id="{A80A81DD-F10A-4B1C-963A-0ABBB4865886}" type="slidenum">
               <a:rPr lang="en-US" smtClean="0"/>
-              <a:t>24</a:t>
+              <a:t>25</a:t>
             </a:fld>
             <a:endParaRPr lang="en-US"/>
           </a:p>
@@ -12523,7 +12831,7 @@
     </p:spTree>
     <p:extLst>
       <p:ext uri="{BB962C8B-B14F-4D97-AF65-F5344CB8AC3E}">
-        <p14:creationId xmlns:p14="http://schemas.microsoft.com/office/powerpoint/2010/main" val="3636445063"/>
+        <p14:creationId xmlns:p14="http://schemas.microsoft.com/office/powerpoint/2010/main" val="3576401033"/>
       </p:ext>
     </p:extLst>
   </p:cSld>
@@ -12533,7 +12841,7 @@
 </p:sld>
 </file>
 
-<file path=ppt/slides/slide25.xml><?xml version="1.0" encoding="utf-8"?>
+<file path=ppt/slides/slide26.xml><?xml version="1.0" encoding="utf-8"?>
 <p:sld xmlns:a="http://schemas.openxmlformats.org/drawingml/2006/main" xmlns:r="http://schemas.openxmlformats.org/officeDocument/2006/relationships" xmlns:p="http://schemas.openxmlformats.org/presentationml/2006/main">
   <p:cSld>
     <p:spTree>
@@ -12585,7 +12893,7 @@
           <p:cNvPr id="2" name="Slide Number Placeholder 1">
             <a:extLst>
               <a:ext uri="{FF2B5EF4-FFF2-40B4-BE49-F238E27FC236}">
-                <a16:creationId xmlns:a16="http://schemas.microsoft.com/office/drawing/2014/main" id="{205F4F78-4DAB-E100-21EF-E2514CD6E59F}"/>
+                <a16:creationId xmlns:a16="http://schemas.microsoft.com/office/drawing/2014/main" id="{3F2A178C-85BE-9C3D-8880-ADF68CEC94D4}"/>
               </a:ext>
             </a:extLst>
           </p:cNvPr>
@@ -12603,7 +12911,7 @@
           <a:p>
             <a:fld id="{A80A81DD-F10A-4B1C-963A-0ABBB4865886}" type="slidenum">
               <a:rPr lang="en-US" smtClean="0"/>
-              <a:t>25</a:t>
+              <a:t>26</a:t>
             </a:fld>
             <a:endParaRPr lang="en-US"/>
           </a:p>
@@ -12612,7 +12920,7 @@
     </p:spTree>
     <p:extLst>
       <p:ext uri="{BB962C8B-B14F-4D97-AF65-F5344CB8AC3E}">
-        <p14:creationId xmlns:p14="http://schemas.microsoft.com/office/powerpoint/2010/main" val="2555247259"/>
+        <p14:creationId xmlns:p14="http://schemas.microsoft.com/office/powerpoint/2010/main" val="1961021952"/>
       </p:ext>
     </p:extLst>
   </p:cSld>
@@ -12622,7 +12930,7 @@
 </p:sld>
 </file>
 
-<file path=ppt/slides/slide26.xml><?xml version="1.0" encoding="utf-8"?>
+<file path=ppt/slides/slide27.xml><?xml version="1.0" encoding="utf-8"?>
 <p:sld xmlns:a="http://schemas.openxmlformats.org/drawingml/2006/main" xmlns:r="http://schemas.openxmlformats.org/officeDocument/2006/relationships" xmlns:p="http://schemas.openxmlformats.org/presentationml/2006/main">
   <p:cSld>
     <p:spTree>
@@ -13915,7 +14223,7 @@
           <p:cNvPr id="5" name="Slide Number Placeholder 4">
             <a:extLst>
               <a:ext uri="{FF2B5EF4-FFF2-40B4-BE49-F238E27FC236}">
-                <a16:creationId xmlns:a16="http://schemas.microsoft.com/office/drawing/2014/main" id="{76C89A57-46EC-A13A-E843-1340E7C3C122}"/>
+                <a16:creationId xmlns:a16="http://schemas.microsoft.com/office/drawing/2014/main" id="{986C7B98-5A0C-A4DC-7715-7487860F35ED}"/>
               </a:ext>
             </a:extLst>
           </p:cNvPr>
@@ -13933,7 +14241,7 @@
           <a:p>
             <a:fld id="{A80A81DD-F10A-4B1C-963A-0ABBB4865886}" type="slidenum">
               <a:rPr lang="en-US" smtClean="0"/>
-              <a:t>26</a:t>
+              <a:t>27</a:t>
             </a:fld>
             <a:endParaRPr lang="en-US"/>
           </a:p>
@@ -13942,7 +14250,7 @@
     </p:spTree>
     <p:extLst>
       <p:ext uri="{BB962C8B-B14F-4D97-AF65-F5344CB8AC3E}">
-        <p14:creationId xmlns:p14="http://schemas.microsoft.com/office/powerpoint/2010/main" val="3908283755"/>
+        <p14:creationId xmlns:p14="http://schemas.microsoft.com/office/powerpoint/2010/main" val="815618924"/>
       </p:ext>
     </p:extLst>
   </p:cSld>
@@ -13952,7 +14260,7 @@
 </p:sld>
 </file>
 
-<file path=ppt/slides/slide27.xml><?xml version="1.0" encoding="utf-8"?>
+<file path=ppt/slides/slide28.xml><?xml version="1.0" encoding="utf-8"?>
 <p:sld xmlns:a="http://schemas.openxmlformats.org/drawingml/2006/main" xmlns:r="http://schemas.openxmlformats.org/officeDocument/2006/relationships" xmlns:p="http://schemas.openxmlformats.org/presentationml/2006/main">
   <p:cSld>
     <p:spTree>
@@ -13974,7 +14282,7 @@
           <p:cNvPr id="6" name="Body card">
             <a:extLst>
               <a:ext uri="{FF2B5EF4-FFF2-40B4-BE49-F238E27FC236}">
-                <a16:creationId xmlns:a16="http://schemas.microsoft.com/office/drawing/2014/main" id="{61E28556-D128-8A1C-D52F-3BCD1FD0A554}"/>
+                <a16:creationId xmlns:a16="http://schemas.microsoft.com/office/drawing/2014/main" id="{CB4BA65E-42BC-C3E0-8EF0-D373FC1C12C5}"/>
               </a:ext>
             </a:extLst>
           </p:cNvPr>
@@ -14119,7 +14427,7 @@
           <p:cNvPr id="4" name="Slide Number Placeholder 3">
             <a:extLst>
               <a:ext uri="{FF2B5EF4-FFF2-40B4-BE49-F238E27FC236}">
-                <a16:creationId xmlns:a16="http://schemas.microsoft.com/office/drawing/2014/main" id="{892E6F10-008B-1435-637D-8823EBFE6A6C}"/>
+                <a16:creationId xmlns:a16="http://schemas.microsoft.com/office/drawing/2014/main" id="{13554BA3-3EE4-E355-6CEC-1440F70977B6}"/>
               </a:ext>
             </a:extLst>
           </p:cNvPr>
@@ -14137,7 +14445,7 @@
           <a:p>
             <a:fld id="{A80A81DD-F10A-4B1C-963A-0ABBB4865886}" type="slidenum">
               <a:rPr lang="en-US" smtClean="0"/>
-              <a:t>27</a:t>
+              <a:t>28</a:t>
             </a:fld>
             <a:endParaRPr lang="en-US"/>
           </a:p>
@@ -14148,7 +14456,7 @@
           <p:cNvPr id="5" name="Title rule">
             <a:extLst>
               <a:ext uri="{FF2B5EF4-FFF2-40B4-BE49-F238E27FC236}">
-                <a16:creationId xmlns:a16="http://schemas.microsoft.com/office/drawing/2014/main" id="{D680C8AB-7AA9-CB8F-2E52-A254941DBB02}"/>
+                <a16:creationId xmlns:a16="http://schemas.microsoft.com/office/drawing/2014/main" id="{3C8EF96B-2D5B-6F64-9249-6A4C511401A7}"/>
               </a:ext>
             </a:extLst>
           </p:cNvPr>
@@ -14214,7 +14522,7 @@
     </p:spTree>
     <p:extLst>
       <p:ext uri="{BB962C8B-B14F-4D97-AF65-F5344CB8AC3E}">
-        <p14:creationId xmlns:p14="http://schemas.microsoft.com/office/powerpoint/2010/main" val="571935057"/>
+        <p14:creationId xmlns:p14="http://schemas.microsoft.com/office/powerpoint/2010/main" val="2460109712"/>
       </p:ext>
     </p:extLst>
   </p:cSld>
@@ -14224,7 +14532,7 @@
 </p:sld>
 </file>
 
-<file path=ppt/slides/slide28.xml><?xml version="1.0" encoding="utf-8"?>
+<file path=ppt/slides/slide29.xml><?xml version="1.0" encoding="utf-8"?>
 <p:sld xmlns:a="http://schemas.openxmlformats.org/drawingml/2006/main" xmlns:r="http://schemas.openxmlformats.org/officeDocument/2006/relationships" xmlns:p="http://schemas.openxmlformats.org/presentationml/2006/main">
   <p:cSld>
     <p:spTree>
@@ -14246,7 +14554,7 @@
           <p:cNvPr id="6" name="Body card">
             <a:extLst>
               <a:ext uri="{FF2B5EF4-FFF2-40B4-BE49-F238E27FC236}">
-                <a16:creationId xmlns:a16="http://schemas.microsoft.com/office/drawing/2014/main" id="{89913AC6-9059-5C75-9701-15C71A9836B8}"/>
+                <a16:creationId xmlns:a16="http://schemas.microsoft.com/office/drawing/2014/main" id="{CC926376-94AB-9179-7369-7C7C6CDBBBFE}"/>
               </a:ext>
             </a:extLst>
           </p:cNvPr>
@@ -14420,7 +14728,7 @@
           <p:cNvPr id="4" name="Slide Number Placeholder 3">
             <a:extLst>
               <a:ext uri="{FF2B5EF4-FFF2-40B4-BE49-F238E27FC236}">
-                <a16:creationId xmlns:a16="http://schemas.microsoft.com/office/drawing/2014/main" id="{4EF4E9B3-3B9A-0E81-F2E4-AD75DCC1AE87}"/>
+                <a16:creationId xmlns:a16="http://schemas.microsoft.com/office/drawing/2014/main" id="{4C126FC2-D9C8-EF57-1C53-B6A7F00F7C10}"/>
               </a:ext>
             </a:extLst>
           </p:cNvPr>
@@ -14438,7 +14746,7 @@
           <a:p>
             <a:fld id="{A80A81DD-F10A-4B1C-963A-0ABBB4865886}" type="slidenum">
               <a:rPr lang="en-US" smtClean="0"/>
-              <a:t>28</a:t>
+              <a:t>29</a:t>
             </a:fld>
             <a:endParaRPr lang="en-US"/>
           </a:p>
@@ -14449,7 +14757,7 @@
           <p:cNvPr id="5" name="Title rule">
             <a:extLst>
               <a:ext uri="{FF2B5EF4-FFF2-40B4-BE49-F238E27FC236}">
-                <a16:creationId xmlns:a16="http://schemas.microsoft.com/office/drawing/2014/main" id="{BCA78F2D-47EC-C8DB-EE1D-184FB5573C76}"/>
+                <a16:creationId xmlns:a16="http://schemas.microsoft.com/office/drawing/2014/main" id="{3CE34886-97D6-4A80-E40A-362CCC47BE2B}"/>
               </a:ext>
             </a:extLst>
           </p:cNvPr>
@@ -14515,7 +14823,7 @@
     </p:spTree>
     <p:extLst>
       <p:ext uri="{BB962C8B-B14F-4D97-AF65-F5344CB8AC3E}">
-        <p14:creationId xmlns:p14="http://schemas.microsoft.com/office/powerpoint/2010/main" val="3472261879"/>
+        <p14:creationId xmlns:p14="http://schemas.microsoft.com/office/powerpoint/2010/main" val="2450354495"/>
       </p:ext>
     </p:extLst>
   </p:cSld>
@@ -14525,7 +14833,542 @@
 </p:sld>
 </file>
 
-<file path=ppt/slides/slide29.xml><?xml version="1.0" encoding="utf-8"?>
+<file path=ppt/slides/slide3.xml><?xml version="1.0" encoding="utf-8"?>
+<p:sld xmlns:a="http://schemas.openxmlformats.org/drawingml/2006/main" xmlns:r="http://schemas.openxmlformats.org/officeDocument/2006/relationships" xmlns:p="http://schemas.openxmlformats.org/presentationml/2006/main">
+  <p:cSld>
+    <p:spTree>
+      <p:nvGrpSpPr>
+        <p:cNvPr id="1" name=""/>
+        <p:cNvGrpSpPr/>
+        <p:nvPr/>
+      </p:nvGrpSpPr>
+      <p:grpSpPr>
+        <a:xfrm>
+          <a:off x="0" y="0"/>
+          <a:ext cx="0" cy="0"/>
+          <a:chOff x="0" y="0"/>
+          <a:chExt cx="0" cy="0"/>
+        </a:xfrm>
+      </p:grpSpPr>
+      <p:sp>
+        <p:nvSpPr>
+          <p:cNvPr id="2" name="Title 1">
+            <a:extLst>
+              <a:ext uri="{FF2B5EF4-FFF2-40B4-BE49-F238E27FC236}">
+                <a16:creationId xmlns:a16="http://schemas.microsoft.com/office/drawing/2014/main" id="{49CCDB72-E5D0-6EBA-C0D0-5DEFEBF44027}"/>
+              </a:ext>
+            </a:extLst>
+          </p:cNvPr>
+          <p:cNvSpPr>
+            <a:spLocks noGrp="1"/>
+          </p:cNvSpPr>
+          <p:nvPr>
+            <p:ph type="title"/>
+          </p:nvPr>
+        </p:nvSpPr>
+        <p:spPr/>
+        <p:txBody>
+          <a:bodyPr/>
+          <a:lstStyle/>
+          <a:p>
+            <a:r>
+              <a:rPr lang="en-US">
+                <a:solidFill>
+                  <a:srgbClr val="1F3864"/>
+                </a:solidFill>
+              </a:rPr>
+              <a:t>Review: ten video games</a:t>
+            </a:r>
+          </a:p>
+        </p:txBody>
+      </p:sp>
+      <p:sp>
+        <p:nvSpPr>
+          <p:cNvPr id="3" name="Content Placeholder 2">
+            <a:extLst>
+              <a:ext uri="{FF2B5EF4-FFF2-40B4-BE49-F238E27FC236}">
+                <a16:creationId xmlns:a16="http://schemas.microsoft.com/office/drawing/2014/main" id="{41498626-D1B4-2C98-5F0C-66A81FA7CC70}"/>
+              </a:ext>
+            </a:extLst>
+          </p:cNvPr>
+          <p:cNvSpPr>
+            <a:spLocks noGrp="1"/>
+          </p:cNvSpPr>
+          <p:nvPr>
+            <p:ph idx="1"/>
+          </p:nvPr>
+        </p:nvSpPr>
+        <p:spPr>
+          <a:xfrm>
+            <a:off x="762000" y="1244600"/>
+            <a:ext cx="10795000" cy="482600"/>
+          </a:xfrm>
+        </p:spPr>
+        <p:txBody>
+          <a:bodyPr>
+            <a:normAutofit/>
+          </a:bodyPr>
+          <a:lstStyle/>
+          <a:p>
+            <a:pPr marL="0" indent="0">
+              <a:buNone/>
+            </a:pPr>
+            <a:r>
+              <a:rPr lang="en-US" sz="1600"/>
+              <a:t>X = Metacritic critic score, for a random sample of n = 10 best-selling video games (circa 2000’s).</a:t>
+            </a:r>
+          </a:p>
+        </p:txBody>
+      </p:sp>
+      <p:sp>
+        <p:nvSpPr>
+          <p:cNvPr id="4" name="Values">
+            <a:extLst>
+              <a:ext uri="{FF2B5EF4-FFF2-40B4-BE49-F238E27FC236}">
+                <a16:creationId xmlns:a16="http://schemas.microsoft.com/office/drawing/2014/main" id="{2121E118-D7CD-D36B-8A0A-3AE9CFBC7F97}"/>
+              </a:ext>
+            </a:extLst>
+          </p:cNvPr>
+          <p:cNvSpPr txBox="1"/>
+          <p:nvPr/>
+        </p:nvSpPr>
+        <p:spPr>
+          <a:xfrm>
+            <a:off x="762000" y="1752600"/>
+            <a:ext cx="10795000" cy="381000"/>
+          </a:xfrm>
+          <a:prstGeom prst="rect">
+            <a:avLst/>
+          </a:prstGeom>
+          <a:noFill/>
+        </p:spPr>
+        <p:txBody>
+          <a:bodyPr vert="horz" rtlCol="0">
+            <a:spAutoFit/>
+          </a:bodyPr>
+          <a:lstStyle/>
+          <a:p>
+            <a:r>
+              <a:rPr lang="en-US" b="1">
+                <a:latin typeface="Consolas" panose="020B0609020204030204" pitchFamily="49" charset="0"/>
+              </a:rPr>
+              <a:t>x = { 68,  72,  76,  76,  76,  83,  85,  87,  92,  95 }</a:t>
+            </a:r>
+          </a:p>
+        </p:txBody>
+      </p:sp>
+      <p:pic>
+        <p:nvPicPr>
+          <p:cNvPr id="6" name="Picture 5">
+            <a:extLst>
+              <a:ext uri="{FF2B5EF4-FFF2-40B4-BE49-F238E27FC236}">
+                <a16:creationId xmlns:a16="http://schemas.microsoft.com/office/drawing/2014/main" id="{BAD30E05-FA21-0086-E1BF-CAB22FEB0628}"/>
+              </a:ext>
+            </a:extLst>
+          </p:cNvPr>
+          <p:cNvPicPr>
+            <a:picLocks/>
+          </p:cNvPicPr>
+          <p:nvPr/>
+        </p:nvPicPr>
+        <p:blipFill>
+          <a:blip r:embed="rId2">
+            <a:extLst>
+              <a:ext uri="{28A0092B-C50C-407E-A947-70E740481C1C}">
+                <a14:useLocalDpi xmlns:a14="http://schemas.microsoft.com/office/drawing/2010/main" val="0"/>
+              </a:ext>
+            </a:extLst>
+          </a:blip>
+          <a:stretch>
+            <a:fillRect/>
+          </a:stretch>
+        </p:blipFill>
+        <p:spPr>
+          <a:xfrm>
+            <a:off x="508000" y="2235200"/>
+            <a:ext cx="5969000" cy="3708400"/>
+          </a:xfrm>
+          <a:prstGeom prst="rect">
+            <a:avLst/>
+          </a:prstGeom>
+        </p:spPr>
+      </p:pic>
+      <p:pic>
+        <p:nvPicPr>
+          <p:cNvPr id="8" name="Picture 7">
+            <a:extLst>
+              <a:ext uri="{FF2B5EF4-FFF2-40B4-BE49-F238E27FC236}">
+                <a16:creationId xmlns:a16="http://schemas.microsoft.com/office/drawing/2014/main" id="{0D1CA0DC-0DE2-2969-FE79-A5D3F4FDF176}"/>
+              </a:ext>
+            </a:extLst>
+          </p:cNvPr>
+          <p:cNvPicPr>
+            <a:picLocks/>
+          </p:cNvPicPr>
+          <p:nvPr/>
+        </p:nvPicPr>
+        <p:blipFill>
+          <a:blip r:embed="rId3">
+            <a:extLst>
+              <a:ext uri="{28A0092B-C50C-407E-A947-70E740481C1C}">
+                <a14:useLocalDpi xmlns:a14="http://schemas.microsoft.com/office/drawing/2010/main" val="0"/>
+              </a:ext>
+            </a:extLst>
+          </a:blip>
+          <a:stretch>
+            <a:fillRect/>
+          </a:stretch>
+        </p:blipFill>
+        <p:spPr>
+          <a:xfrm>
+            <a:off x="6858000" y="2235200"/>
+            <a:ext cx="4826000" cy="2349500"/>
+          </a:xfrm>
+          <a:prstGeom prst="rect">
+            <a:avLst/>
+          </a:prstGeom>
+        </p:spPr>
+      </p:pic>
+      <p:sp>
+        <p:nvSpPr>
+          <p:cNvPr id="9" name="TextBox 8">
+            <a:extLst>
+              <a:ext uri="{FF2B5EF4-FFF2-40B4-BE49-F238E27FC236}">
+                <a16:creationId xmlns:a16="http://schemas.microsoft.com/office/drawing/2014/main" id="{F46B2299-A507-489C-02DB-EAF355847EEC}"/>
+              </a:ext>
+            </a:extLst>
+          </p:cNvPr>
+          <p:cNvSpPr txBox="1"/>
+          <p:nvPr/>
+        </p:nvSpPr>
+        <p:spPr>
+          <a:xfrm>
+            <a:off x="6858000" y="4800600"/>
+            <a:ext cx="4826000" cy="492443"/>
+          </a:xfrm>
+          <a:prstGeom prst="rect">
+            <a:avLst/>
+          </a:prstGeom>
+          <a:noFill/>
+        </p:spPr>
+        <p:txBody>
+          <a:bodyPr vert="horz" wrap="square" rtlCol="0">
+            <a:spAutoFit/>
+          </a:bodyPr>
+          <a:lstStyle/>
+          <a:p>
+            <a:r>
+              <a:rPr lang="en-US" sz="1300" i="1"/>
+              <a:t>Four bins of width 10. Most of these games score in the 70s, with a few running up into the 90s.</a:t>
+            </a:r>
+          </a:p>
+        </p:txBody>
+      </p:sp>
+      <p:sp>
+        <p:nvSpPr>
+          <p:cNvPr id="10" name="TextBox 9">
+            <a:extLst>
+              <a:ext uri="{FF2B5EF4-FFF2-40B4-BE49-F238E27FC236}">
+                <a16:creationId xmlns:a16="http://schemas.microsoft.com/office/drawing/2014/main" id="{CE722DF1-F8EB-F9A0-C853-F023E25A5D6A}"/>
+              </a:ext>
+            </a:extLst>
+          </p:cNvPr>
+          <p:cNvSpPr txBox="1"/>
+          <p:nvPr/>
+        </p:nvSpPr>
+        <p:spPr>
+          <a:xfrm>
+            <a:off x="508000" y="6451600"/>
+            <a:ext cx="11176000" cy="246221"/>
+          </a:xfrm>
+          <a:prstGeom prst="rect">
+            <a:avLst/>
+          </a:prstGeom>
+          <a:noFill/>
+        </p:spPr>
+        <p:txBody>
+          <a:bodyPr vert="horz" rtlCol="0">
+            <a:spAutoFit/>
+          </a:bodyPr>
+          <a:lstStyle/>
+          <a:p>
+            <a:r>
+              <a:rPr lang="en-US" sz="1000" i="1">
+                <a:solidFill>
+                  <a:srgbClr val="666666"/>
+                </a:solidFill>
+              </a:rPr>
+              <a:t>Data: VGChartz sales joined to Metacritic ratings, restricted to titles selling 5 million copies or more (127 games).</a:t>
+            </a:r>
+          </a:p>
+        </p:txBody>
+      </p:sp>
+      <p:sp>
+        <p:nvSpPr>
+          <p:cNvPr id="5" name="Slide Number Placeholder 4">
+            <a:extLst>
+              <a:ext uri="{FF2B5EF4-FFF2-40B4-BE49-F238E27FC236}">
+                <a16:creationId xmlns:a16="http://schemas.microsoft.com/office/drawing/2014/main" id="{BD59FE74-6B0E-C314-8794-38709A7C9788}"/>
+              </a:ext>
+            </a:extLst>
+          </p:cNvPr>
+          <p:cNvSpPr>
+            <a:spLocks noGrp="1"/>
+          </p:cNvSpPr>
+          <p:nvPr>
+            <p:ph type="sldNum" sz="quarter" idx="12"/>
+          </p:nvPr>
+        </p:nvSpPr>
+        <p:spPr/>
+        <p:txBody>
+          <a:bodyPr/>
+          <a:lstStyle/>
+          <a:p>
+            <a:fld id="{A80A81DD-F10A-4B1C-963A-0ABBB4865886}" type="slidenum">
+              <a:rPr lang="en-US" smtClean="0"/>
+              <a:t>3</a:t>
+            </a:fld>
+            <a:endParaRPr lang="en-US"/>
+          </a:p>
+        </p:txBody>
+      </p:sp>
+    </p:spTree>
+    <p:extLst>
+      <p:ext uri="{BB962C8B-B14F-4D97-AF65-F5344CB8AC3E}">
+        <p14:creationId xmlns:p14="http://schemas.microsoft.com/office/powerpoint/2010/main" val="2330435607"/>
+      </p:ext>
+    </p:extLst>
+  </p:cSld>
+  <p:clrMapOvr>
+    <a:masterClrMapping/>
+  </p:clrMapOvr>
+  <p:timing>
+    <p:tnLst>
+      <p:par>
+        <p:cTn id="1" dur="indefinite" restart="never" nodeType="tmRoot">
+          <p:childTnLst>
+            <p:seq concurrent="1" nextAc="seek">
+              <p:cTn id="2" dur="indefinite" nodeType="mainSeq">
+                <p:childTnLst>
+                  <p:par>
+                    <p:cTn id="3" fill="hold">
+                      <p:stCondLst>
+                        <p:cond delay="indefinite"/>
+                      </p:stCondLst>
+                      <p:childTnLst>
+                        <p:par>
+                          <p:cTn id="4" fill="hold">
+                            <p:stCondLst>
+                              <p:cond delay="0"/>
+                            </p:stCondLst>
+                            <p:childTnLst>
+                              <p:par>
+                                <p:cTn id="5" presetID="34" presetClass="entr" presetSubtype="0" fill="hold" nodeType="clickEffect">
+                                  <p:stCondLst>
+                                    <p:cond delay="0"/>
+                                  </p:stCondLst>
+                                  <p:childTnLst>
+                                    <p:set>
+                                      <p:cBhvr>
+                                        <p:cTn id="6" dur="1" fill="hold">
+                                          <p:stCondLst>
+                                            <p:cond delay="0"/>
+                                          </p:stCondLst>
+                                        </p:cTn>
+                                        <p:tgtEl>
+                                          <p:spTgt spid="8"/>
+                                        </p:tgtEl>
+                                        <p:attrNameLst>
+                                          <p:attrName>style.visibility</p:attrName>
+                                        </p:attrNameLst>
+                                      </p:cBhvr>
+                                      <p:to>
+                                        <p:strVal val="visible"/>
+                                      </p:to>
+                                    </p:set>
+                                    <p:anim from="(-#ppt_w/2)" to="(#ppt_x)" calcmode="lin" valueType="num">
+                                      <p:cBhvr>
+                                        <p:cTn id="7" dur="600" fill="hold">
+                                          <p:stCondLst>
+                                            <p:cond delay="0"/>
+                                          </p:stCondLst>
+                                        </p:cTn>
+                                        <p:tgtEl>
+                                          <p:spTgt spid="8"/>
+                                        </p:tgtEl>
+                                        <p:attrNameLst>
+                                          <p:attrName>ppt_x</p:attrName>
+                                        </p:attrNameLst>
+                                      </p:cBhvr>
+                                    </p:anim>
+                                    <p:anim from="0" to="-1.0" calcmode="lin" valueType="num">
+                                      <p:cBhvr>
+                                        <p:cTn id="8" dur="200" decel="50000" autoRev="1" fill="hold">
+                                          <p:stCondLst>
+                                            <p:cond delay="600"/>
+                                          </p:stCondLst>
+                                        </p:cTn>
+                                        <p:tgtEl>
+                                          <p:spTgt spid="8"/>
+                                        </p:tgtEl>
+                                        <p:attrNameLst>
+                                          <p:attrName>xshear</p:attrName>
+                                        </p:attrNameLst>
+                                      </p:cBhvr>
+                                    </p:anim>
+                                    <p:animScale>
+                                      <p:cBhvr>
+                                        <p:cTn id="9" dur="200" decel="100000" autoRev="1" fill="hold">
+                                          <p:stCondLst>
+                                            <p:cond delay="600"/>
+                                          </p:stCondLst>
+                                        </p:cTn>
+                                        <p:tgtEl>
+                                          <p:spTgt spid="8"/>
+                                        </p:tgtEl>
+                                      </p:cBhvr>
+                                      <p:from x="100000" y="100000"/>
+                                      <p:to x="80000" y="100000"/>
+                                    </p:animScale>
+                                    <p:anim by="(#ppt_h/3+#ppt_w*0.1)" calcmode="lin" valueType="num">
+                                      <p:cBhvr additive="sum">
+                                        <p:cTn id="10" dur="200" decel="100000" autoRev="1" fill="hold">
+                                          <p:stCondLst>
+                                            <p:cond delay="600"/>
+                                          </p:stCondLst>
+                                        </p:cTn>
+                                        <p:tgtEl>
+                                          <p:spTgt spid="8"/>
+                                        </p:tgtEl>
+                                        <p:attrNameLst>
+                                          <p:attrName>ppt_x</p:attrName>
+                                        </p:attrNameLst>
+                                      </p:cBhvr>
+                                    </p:anim>
+                                  </p:childTnLst>
+                                </p:cTn>
+                              </p:par>
+                              <p:par>
+                                <p:cTn id="11" presetID="34" presetClass="entr" presetSubtype="0" fill="hold" grpId="0" nodeType="withEffect">
+                                  <p:stCondLst>
+                                    <p:cond delay="0"/>
+                                  </p:stCondLst>
+                                  <p:childTnLst>
+                                    <p:set>
+                                      <p:cBhvr>
+                                        <p:cTn id="12" dur="1" fill="hold">
+                                          <p:stCondLst>
+                                            <p:cond delay="0"/>
+                                          </p:stCondLst>
+                                        </p:cTn>
+                                        <p:tgtEl>
+                                          <p:spTgt spid="9"/>
+                                        </p:tgtEl>
+                                        <p:attrNameLst>
+                                          <p:attrName>style.visibility</p:attrName>
+                                        </p:attrNameLst>
+                                      </p:cBhvr>
+                                      <p:to>
+                                        <p:strVal val="visible"/>
+                                      </p:to>
+                                    </p:set>
+                                    <p:anim from="(-#ppt_w/2)" to="(#ppt_x)" calcmode="lin" valueType="num">
+                                      <p:cBhvr>
+                                        <p:cTn id="13" dur="600" fill="hold">
+                                          <p:stCondLst>
+                                            <p:cond delay="0"/>
+                                          </p:stCondLst>
+                                        </p:cTn>
+                                        <p:tgtEl>
+                                          <p:spTgt spid="9"/>
+                                        </p:tgtEl>
+                                        <p:attrNameLst>
+                                          <p:attrName>ppt_x</p:attrName>
+                                        </p:attrNameLst>
+                                      </p:cBhvr>
+                                    </p:anim>
+                                    <p:anim from="0" to="-1.0" calcmode="lin" valueType="num">
+                                      <p:cBhvr>
+                                        <p:cTn id="14" dur="200" decel="50000" autoRev="1" fill="hold">
+                                          <p:stCondLst>
+                                            <p:cond delay="600"/>
+                                          </p:stCondLst>
+                                        </p:cTn>
+                                        <p:tgtEl>
+                                          <p:spTgt spid="9"/>
+                                        </p:tgtEl>
+                                        <p:attrNameLst>
+                                          <p:attrName>xshear</p:attrName>
+                                        </p:attrNameLst>
+                                      </p:cBhvr>
+                                    </p:anim>
+                                    <p:animScale>
+                                      <p:cBhvr>
+                                        <p:cTn id="15" dur="200" decel="100000" autoRev="1" fill="hold">
+                                          <p:stCondLst>
+                                            <p:cond delay="600"/>
+                                          </p:stCondLst>
+                                        </p:cTn>
+                                        <p:tgtEl>
+                                          <p:spTgt spid="9"/>
+                                        </p:tgtEl>
+                                      </p:cBhvr>
+                                      <p:from x="100000" y="100000"/>
+                                      <p:to x="80000" y="100000"/>
+                                    </p:animScale>
+                                    <p:anim by="(#ppt_h/3+#ppt_w*0.1)" calcmode="lin" valueType="num">
+                                      <p:cBhvr additive="sum">
+                                        <p:cTn id="16" dur="200" decel="100000" autoRev="1" fill="hold">
+                                          <p:stCondLst>
+                                            <p:cond delay="600"/>
+                                          </p:stCondLst>
+                                        </p:cTn>
+                                        <p:tgtEl>
+                                          <p:spTgt spid="9"/>
+                                        </p:tgtEl>
+                                        <p:attrNameLst>
+                                          <p:attrName>ppt_x</p:attrName>
+                                        </p:attrNameLst>
+                                      </p:cBhvr>
+                                    </p:anim>
+                                  </p:childTnLst>
+                                </p:cTn>
+                              </p:par>
+                            </p:childTnLst>
+                          </p:cTn>
+                        </p:par>
+                      </p:childTnLst>
+                    </p:cTn>
+                  </p:par>
+                </p:childTnLst>
+              </p:cTn>
+              <p:prevCondLst>
+                <p:cond evt="onPrev" delay="0">
+                  <p:tgtEl>
+                    <p:sldTgt/>
+                  </p:tgtEl>
+                </p:cond>
+              </p:prevCondLst>
+              <p:nextCondLst>
+                <p:cond evt="onNext" delay="0">
+                  <p:tgtEl>
+                    <p:sldTgt/>
+                  </p:tgtEl>
+                </p:cond>
+              </p:nextCondLst>
+            </p:seq>
+          </p:childTnLst>
+        </p:cTn>
+      </p:par>
+    </p:tnLst>
+    <p:bldLst>
+      <p:bldP spid="9" grpId="0"/>
+    </p:bldLst>
+  </p:timing>
+</p:sld>
+</file>
+
+<file path=ppt/slides/slide30.xml><?xml version="1.0" encoding="utf-8"?>
 <p:sld xmlns:a="http://schemas.openxmlformats.org/drawingml/2006/main" xmlns:r="http://schemas.openxmlformats.org/officeDocument/2006/relationships" xmlns:p="http://schemas.openxmlformats.org/presentationml/2006/main">
   <p:cSld>
     <p:spTree>
@@ -14547,7 +15390,7 @@
           <p:cNvPr id="6" name="Body card">
             <a:extLst>
               <a:ext uri="{FF2B5EF4-FFF2-40B4-BE49-F238E27FC236}">
-                <a16:creationId xmlns:a16="http://schemas.microsoft.com/office/drawing/2014/main" id="{2B9D4374-5CD4-5E54-84E3-2CD1B73BF2C2}"/>
+                <a16:creationId xmlns:a16="http://schemas.microsoft.com/office/drawing/2014/main" id="{2BAC071F-BA2C-5E2E-0CAD-1A176EFD288F}"/>
               </a:ext>
             </a:extLst>
           </p:cNvPr>
@@ -14898,7 +15741,7 @@
           <p:cNvPr id="4" name="Slide Number Placeholder 3">
             <a:extLst>
               <a:ext uri="{FF2B5EF4-FFF2-40B4-BE49-F238E27FC236}">
-                <a16:creationId xmlns:a16="http://schemas.microsoft.com/office/drawing/2014/main" id="{FD7AEA17-F58C-0106-82CE-E04CE8DA1449}"/>
+                <a16:creationId xmlns:a16="http://schemas.microsoft.com/office/drawing/2014/main" id="{D8EC464D-2F8C-3618-EE3E-5E66E88619B0}"/>
               </a:ext>
             </a:extLst>
           </p:cNvPr>
@@ -14916,7 +15759,7 @@
           <a:p>
             <a:fld id="{A80A81DD-F10A-4B1C-963A-0ABBB4865886}" type="slidenum">
               <a:rPr lang="en-US" smtClean="0"/>
-              <a:t>29</a:t>
+              <a:t>30</a:t>
             </a:fld>
             <a:endParaRPr lang="en-US"/>
           </a:p>
@@ -14927,7 +15770,7 @@
           <p:cNvPr id="5" name="Title rule">
             <a:extLst>
               <a:ext uri="{FF2B5EF4-FFF2-40B4-BE49-F238E27FC236}">
-                <a16:creationId xmlns:a16="http://schemas.microsoft.com/office/drawing/2014/main" id="{BBF2D9A2-5586-794E-ADF7-E7FE1CCF6990}"/>
+                <a16:creationId xmlns:a16="http://schemas.microsoft.com/office/drawing/2014/main" id="{6BA83F57-FB71-D7DE-CCA6-B27182313D0D}"/>
               </a:ext>
             </a:extLst>
           </p:cNvPr>
@@ -14993,7 +15836,7 @@
     </p:spTree>
     <p:extLst>
       <p:ext uri="{BB962C8B-B14F-4D97-AF65-F5344CB8AC3E}">
-        <p14:creationId xmlns:p14="http://schemas.microsoft.com/office/powerpoint/2010/main" val="3278469664"/>
+        <p14:creationId xmlns:p14="http://schemas.microsoft.com/office/powerpoint/2010/main" val="3444028199"/>
       </p:ext>
     </p:extLst>
   </p:cSld>
@@ -15003,542 +15846,7 @@
 </p:sld>
 </file>
 
-<file path=ppt/slides/slide3.xml><?xml version="1.0" encoding="utf-8"?>
-<p:sld xmlns:a="http://schemas.openxmlformats.org/drawingml/2006/main" xmlns:r="http://schemas.openxmlformats.org/officeDocument/2006/relationships" xmlns:p="http://schemas.openxmlformats.org/presentationml/2006/main">
-  <p:cSld>
-    <p:spTree>
-      <p:nvGrpSpPr>
-        <p:cNvPr id="1" name=""/>
-        <p:cNvGrpSpPr/>
-        <p:nvPr/>
-      </p:nvGrpSpPr>
-      <p:grpSpPr>
-        <a:xfrm>
-          <a:off x="0" y="0"/>
-          <a:ext cx="0" cy="0"/>
-          <a:chOff x="0" y="0"/>
-          <a:chExt cx="0" cy="0"/>
-        </a:xfrm>
-      </p:grpSpPr>
-      <p:sp>
-        <p:nvSpPr>
-          <p:cNvPr id="2" name="Title 1">
-            <a:extLst>
-              <a:ext uri="{FF2B5EF4-FFF2-40B4-BE49-F238E27FC236}">
-                <a16:creationId xmlns:a16="http://schemas.microsoft.com/office/drawing/2014/main" id="{F0397BD2-3E69-09B1-CF9D-FE074A56028B}"/>
-              </a:ext>
-            </a:extLst>
-          </p:cNvPr>
-          <p:cNvSpPr>
-            <a:spLocks noGrp="1"/>
-          </p:cNvSpPr>
-          <p:nvPr>
-            <p:ph type="title"/>
-          </p:nvPr>
-        </p:nvSpPr>
-        <p:spPr/>
-        <p:txBody>
-          <a:bodyPr/>
-          <a:lstStyle/>
-          <a:p>
-            <a:r>
-              <a:rPr lang="en-US">
-                <a:solidFill>
-                  <a:srgbClr val="1F3864"/>
-                </a:solidFill>
-              </a:rPr>
-              <a:t>Review: ten video games</a:t>
-            </a:r>
-          </a:p>
-        </p:txBody>
-      </p:sp>
-      <p:sp>
-        <p:nvSpPr>
-          <p:cNvPr id="3" name="Content Placeholder 2">
-            <a:extLst>
-              <a:ext uri="{FF2B5EF4-FFF2-40B4-BE49-F238E27FC236}">
-                <a16:creationId xmlns:a16="http://schemas.microsoft.com/office/drawing/2014/main" id="{176ACD31-D9C2-BE69-C43E-8A371C40BF60}"/>
-              </a:ext>
-            </a:extLst>
-          </p:cNvPr>
-          <p:cNvSpPr>
-            <a:spLocks noGrp="1"/>
-          </p:cNvSpPr>
-          <p:nvPr>
-            <p:ph idx="1"/>
-          </p:nvPr>
-        </p:nvSpPr>
-        <p:spPr>
-          <a:xfrm>
-            <a:off x="762000" y="1244600"/>
-            <a:ext cx="10795000" cy="482600"/>
-          </a:xfrm>
-        </p:spPr>
-        <p:txBody>
-          <a:bodyPr>
-            <a:normAutofit/>
-          </a:bodyPr>
-          <a:lstStyle/>
-          <a:p>
-            <a:pPr marL="0" indent="0">
-              <a:buNone/>
-            </a:pPr>
-            <a:r>
-              <a:rPr lang="en-US" sz="1600"/>
-              <a:t>X = Metacritic critic score, for a random sample of n = 10 best-selling video games (circa 2000’s).</a:t>
-            </a:r>
-          </a:p>
-        </p:txBody>
-      </p:sp>
-      <p:sp>
-        <p:nvSpPr>
-          <p:cNvPr id="4" name="Values">
-            <a:extLst>
-              <a:ext uri="{FF2B5EF4-FFF2-40B4-BE49-F238E27FC236}">
-                <a16:creationId xmlns:a16="http://schemas.microsoft.com/office/drawing/2014/main" id="{4076BA5B-CC15-D5FB-6171-EBCDD5292691}"/>
-              </a:ext>
-            </a:extLst>
-          </p:cNvPr>
-          <p:cNvSpPr txBox="1"/>
-          <p:nvPr/>
-        </p:nvSpPr>
-        <p:spPr>
-          <a:xfrm>
-            <a:off x="762000" y="1752600"/>
-            <a:ext cx="10795000" cy="381000"/>
-          </a:xfrm>
-          <a:prstGeom prst="rect">
-            <a:avLst/>
-          </a:prstGeom>
-          <a:noFill/>
-        </p:spPr>
-        <p:txBody>
-          <a:bodyPr vert="horz" rtlCol="0">
-            <a:spAutoFit/>
-          </a:bodyPr>
-          <a:lstStyle/>
-          <a:p>
-            <a:r>
-              <a:rPr lang="en-US" b="1">
-                <a:latin typeface="Consolas" panose="020B0609020204030204" pitchFamily="49" charset="0"/>
-              </a:rPr>
-              <a:t>x = { 68,  72,  76,  76,  76,  83,  85,  87,  92,  95 }</a:t>
-            </a:r>
-          </a:p>
-        </p:txBody>
-      </p:sp>
-      <p:pic>
-        <p:nvPicPr>
-          <p:cNvPr id="6" name="Picture 5">
-            <a:extLst>
-              <a:ext uri="{FF2B5EF4-FFF2-40B4-BE49-F238E27FC236}">
-                <a16:creationId xmlns:a16="http://schemas.microsoft.com/office/drawing/2014/main" id="{FCA763E1-14B6-123F-FB9B-F4459D5F3F03}"/>
-              </a:ext>
-            </a:extLst>
-          </p:cNvPr>
-          <p:cNvPicPr>
-            <a:picLocks/>
-          </p:cNvPicPr>
-          <p:nvPr/>
-        </p:nvPicPr>
-        <p:blipFill>
-          <a:blip r:embed="rId2">
-            <a:extLst>
-              <a:ext uri="{28A0092B-C50C-407E-A947-70E740481C1C}">
-                <a14:useLocalDpi xmlns:a14="http://schemas.microsoft.com/office/drawing/2010/main" val="0"/>
-              </a:ext>
-            </a:extLst>
-          </a:blip>
-          <a:stretch>
-            <a:fillRect/>
-          </a:stretch>
-        </p:blipFill>
-        <p:spPr>
-          <a:xfrm>
-            <a:off x="508000" y="2235200"/>
-            <a:ext cx="5969000" cy="3708400"/>
-          </a:xfrm>
-          <a:prstGeom prst="rect">
-            <a:avLst/>
-          </a:prstGeom>
-        </p:spPr>
-      </p:pic>
-      <p:pic>
-        <p:nvPicPr>
-          <p:cNvPr id="8" name="Picture 7">
-            <a:extLst>
-              <a:ext uri="{FF2B5EF4-FFF2-40B4-BE49-F238E27FC236}">
-                <a16:creationId xmlns:a16="http://schemas.microsoft.com/office/drawing/2014/main" id="{E57175DA-3644-5E12-91CA-A6798A080AD4}"/>
-              </a:ext>
-            </a:extLst>
-          </p:cNvPr>
-          <p:cNvPicPr>
-            <a:picLocks/>
-          </p:cNvPicPr>
-          <p:nvPr/>
-        </p:nvPicPr>
-        <p:blipFill>
-          <a:blip r:embed="rId3">
-            <a:extLst>
-              <a:ext uri="{28A0092B-C50C-407E-A947-70E740481C1C}">
-                <a14:useLocalDpi xmlns:a14="http://schemas.microsoft.com/office/drawing/2010/main" val="0"/>
-              </a:ext>
-            </a:extLst>
-          </a:blip>
-          <a:stretch>
-            <a:fillRect/>
-          </a:stretch>
-        </p:blipFill>
-        <p:spPr>
-          <a:xfrm>
-            <a:off x="6858000" y="2235200"/>
-            <a:ext cx="4826000" cy="2349500"/>
-          </a:xfrm>
-          <a:prstGeom prst="rect">
-            <a:avLst/>
-          </a:prstGeom>
-        </p:spPr>
-      </p:pic>
-      <p:sp>
-        <p:nvSpPr>
-          <p:cNvPr id="9" name="TextBox 8">
-            <a:extLst>
-              <a:ext uri="{FF2B5EF4-FFF2-40B4-BE49-F238E27FC236}">
-                <a16:creationId xmlns:a16="http://schemas.microsoft.com/office/drawing/2014/main" id="{511D597D-F53F-D750-9E4D-0DF5E1C5EE3A}"/>
-              </a:ext>
-            </a:extLst>
-          </p:cNvPr>
-          <p:cNvSpPr txBox="1"/>
-          <p:nvPr/>
-        </p:nvSpPr>
-        <p:spPr>
-          <a:xfrm>
-            <a:off x="6858000" y="4800600"/>
-            <a:ext cx="4826000" cy="492443"/>
-          </a:xfrm>
-          <a:prstGeom prst="rect">
-            <a:avLst/>
-          </a:prstGeom>
-          <a:noFill/>
-        </p:spPr>
-        <p:txBody>
-          <a:bodyPr vert="horz" wrap="square" rtlCol="0">
-            <a:spAutoFit/>
-          </a:bodyPr>
-          <a:lstStyle/>
-          <a:p>
-            <a:r>
-              <a:rPr lang="en-US" sz="1300" i="1"/>
-              <a:t>Four bins of width 10. Most of these games score in the 70s, with a few running up into the 90s.</a:t>
-            </a:r>
-          </a:p>
-        </p:txBody>
-      </p:sp>
-      <p:sp>
-        <p:nvSpPr>
-          <p:cNvPr id="10" name="TextBox 9">
-            <a:extLst>
-              <a:ext uri="{FF2B5EF4-FFF2-40B4-BE49-F238E27FC236}">
-                <a16:creationId xmlns:a16="http://schemas.microsoft.com/office/drawing/2014/main" id="{4E4E3D7E-E59E-E845-F6BE-AE97DAF3FCD4}"/>
-              </a:ext>
-            </a:extLst>
-          </p:cNvPr>
-          <p:cNvSpPr txBox="1"/>
-          <p:nvPr/>
-        </p:nvSpPr>
-        <p:spPr>
-          <a:xfrm>
-            <a:off x="508000" y="6451600"/>
-            <a:ext cx="11176000" cy="246221"/>
-          </a:xfrm>
-          <a:prstGeom prst="rect">
-            <a:avLst/>
-          </a:prstGeom>
-          <a:noFill/>
-        </p:spPr>
-        <p:txBody>
-          <a:bodyPr vert="horz" rtlCol="0">
-            <a:spAutoFit/>
-          </a:bodyPr>
-          <a:lstStyle/>
-          <a:p>
-            <a:r>
-              <a:rPr lang="en-US" sz="1000" i="1">
-                <a:solidFill>
-                  <a:srgbClr val="666666"/>
-                </a:solidFill>
-              </a:rPr>
-              <a:t>Data: VGChartz sales joined to Metacritic ratings, restricted to titles selling 5 million copies or more (127 games).</a:t>
-            </a:r>
-          </a:p>
-        </p:txBody>
-      </p:sp>
-      <p:sp>
-        <p:nvSpPr>
-          <p:cNvPr id="5" name="Slide Number Placeholder 4">
-            <a:extLst>
-              <a:ext uri="{FF2B5EF4-FFF2-40B4-BE49-F238E27FC236}">
-                <a16:creationId xmlns:a16="http://schemas.microsoft.com/office/drawing/2014/main" id="{E9BA02EC-4E87-7B75-81B8-9E186E693895}"/>
-              </a:ext>
-            </a:extLst>
-          </p:cNvPr>
-          <p:cNvSpPr>
-            <a:spLocks noGrp="1"/>
-          </p:cNvSpPr>
-          <p:nvPr>
-            <p:ph type="sldNum" sz="quarter" idx="12"/>
-          </p:nvPr>
-        </p:nvSpPr>
-        <p:spPr/>
-        <p:txBody>
-          <a:bodyPr/>
-          <a:lstStyle/>
-          <a:p>
-            <a:fld id="{A80A81DD-F10A-4B1C-963A-0ABBB4865886}" type="slidenum">
-              <a:rPr lang="en-US" smtClean="0"/>
-              <a:t>3</a:t>
-            </a:fld>
-            <a:endParaRPr lang="en-US"/>
-          </a:p>
-        </p:txBody>
-      </p:sp>
-    </p:spTree>
-    <p:extLst>
-      <p:ext uri="{BB962C8B-B14F-4D97-AF65-F5344CB8AC3E}">
-        <p14:creationId xmlns:p14="http://schemas.microsoft.com/office/powerpoint/2010/main" val="2904286793"/>
-      </p:ext>
-    </p:extLst>
-  </p:cSld>
-  <p:clrMapOvr>
-    <a:masterClrMapping/>
-  </p:clrMapOvr>
-  <p:timing>
-    <p:tnLst>
-      <p:par>
-        <p:cTn id="1" dur="indefinite" restart="never" nodeType="tmRoot">
-          <p:childTnLst>
-            <p:seq concurrent="1" nextAc="seek">
-              <p:cTn id="2" dur="indefinite" nodeType="mainSeq">
-                <p:childTnLst>
-                  <p:par>
-                    <p:cTn id="3" fill="hold">
-                      <p:stCondLst>
-                        <p:cond delay="indefinite"/>
-                      </p:stCondLst>
-                      <p:childTnLst>
-                        <p:par>
-                          <p:cTn id="4" fill="hold">
-                            <p:stCondLst>
-                              <p:cond delay="0"/>
-                            </p:stCondLst>
-                            <p:childTnLst>
-                              <p:par>
-                                <p:cTn id="5" presetID="34" presetClass="entr" presetSubtype="0" fill="hold" nodeType="clickEffect">
-                                  <p:stCondLst>
-                                    <p:cond delay="0"/>
-                                  </p:stCondLst>
-                                  <p:childTnLst>
-                                    <p:set>
-                                      <p:cBhvr>
-                                        <p:cTn id="6" dur="1" fill="hold">
-                                          <p:stCondLst>
-                                            <p:cond delay="0"/>
-                                          </p:stCondLst>
-                                        </p:cTn>
-                                        <p:tgtEl>
-                                          <p:spTgt spid="8"/>
-                                        </p:tgtEl>
-                                        <p:attrNameLst>
-                                          <p:attrName>style.visibility</p:attrName>
-                                        </p:attrNameLst>
-                                      </p:cBhvr>
-                                      <p:to>
-                                        <p:strVal val="visible"/>
-                                      </p:to>
-                                    </p:set>
-                                    <p:anim from="(-#ppt_w/2)" to="(#ppt_x)" calcmode="lin" valueType="num">
-                                      <p:cBhvr>
-                                        <p:cTn id="7" dur="600" fill="hold">
-                                          <p:stCondLst>
-                                            <p:cond delay="0"/>
-                                          </p:stCondLst>
-                                        </p:cTn>
-                                        <p:tgtEl>
-                                          <p:spTgt spid="8"/>
-                                        </p:tgtEl>
-                                        <p:attrNameLst>
-                                          <p:attrName>ppt_x</p:attrName>
-                                        </p:attrNameLst>
-                                      </p:cBhvr>
-                                    </p:anim>
-                                    <p:anim from="0" to="-1.0" calcmode="lin" valueType="num">
-                                      <p:cBhvr>
-                                        <p:cTn id="8" dur="200" decel="50000" autoRev="1" fill="hold">
-                                          <p:stCondLst>
-                                            <p:cond delay="600"/>
-                                          </p:stCondLst>
-                                        </p:cTn>
-                                        <p:tgtEl>
-                                          <p:spTgt spid="8"/>
-                                        </p:tgtEl>
-                                        <p:attrNameLst>
-                                          <p:attrName>xshear</p:attrName>
-                                        </p:attrNameLst>
-                                      </p:cBhvr>
-                                    </p:anim>
-                                    <p:animScale>
-                                      <p:cBhvr>
-                                        <p:cTn id="9" dur="200" decel="100000" autoRev="1" fill="hold">
-                                          <p:stCondLst>
-                                            <p:cond delay="600"/>
-                                          </p:stCondLst>
-                                        </p:cTn>
-                                        <p:tgtEl>
-                                          <p:spTgt spid="8"/>
-                                        </p:tgtEl>
-                                      </p:cBhvr>
-                                      <p:from x="100000" y="100000"/>
-                                      <p:to x="80000" y="100000"/>
-                                    </p:animScale>
-                                    <p:anim by="(#ppt_h/3+#ppt_w*0.1)" calcmode="lin" valueType="num">
-                                      <p:cBhvr additive="sum">
-                                        <p:cTn id="10" dur="200" decel="100000" autoRev="1" fill="hold">
-                                          <p:stCondLst>
-                                            <p:cond delay="600"/>
-                                          </p:stCondLst>
-                                        </p:cTn>
-                                        <p:tgtEl>
-                                          <p:spTgt spid="8"/>
-                                        </p:tgtEl>
-                                        <p:attrNameLst>
-                                          <p:attrName>ppt_x</p:attrName>
-                                        </p:attrNameLst>
-                                      </p:cBhvr>
-                                    </p:anim>
-                                  </p:childTnLst>
-                                </p:cTn>
-                              </p:par>
-                              <p:par>
-                                <p:cTn id="11" presetID="34" presetClass="entr" presetSubtype="0" fill="hold" grpId="0" nodeType="withEffect">
-                                  <p:stCondLst>
-                                    <p:cond delay="0"/>
-                                  </p:stCondLst>
-                                  <p:childTnLst>
-                                    <p:set>
-                                      <p:cBhvr>
-                                        <p:cTn id="12" dur="1" fill="hold">
-                                          <p:stCondLst>
-                                            <p:cond delay="0"/>
-                                          </p:stCondLst>
-                                        </p:cTn>
-                                        <p:tgtEl>
-                                          <p:spTgt spid="9"/>
-                                        </p:tgtEl>
-                                        <p:attrNameLst>
-                                          <p:attrName>style.visibility</p:attrName>
-                                        </p:attrNameLst>
-                                      </p:cBhvr>
-                                      <p:to>
-                                        <p:strVal val="visible"/>
-                                      </p:to>
-                                    </p:set>
-                                    <p:anim from="(-#ppt_w/2)" to="(#ppt_x)" calcmode="lin" valueType="num">
-                                      <p:cBhvr>
-                                        <p:cTn id="13" dur="600" fill="hold">
-                                          <p:stCondLst>
-                                            <p:cond delay="0"/>
-                                          </p:stCondLst>
-                                        </p:cTn>
-                                        <p:tgtEl>
-                                          <p:spTgt spid="9"/>
-                                        </p:tgtEl>
-                                        <p:attrNameLst>
-                                          <p:attrName>ppt_x</p:attrName>
-                                        </p:attrNameLst>
-                                      </p:cBhvr>
-                                    </p:anim>
-                                    <p:anim from="0" to="-1.0" calcmode="lin" valueType="num">
-                                      <p:cBhvr>
-                                        <p:cTn id="14" dur="200" decel="50000" autoRev="1" fill="hold">
-                                          <p:stCondLst>
-                                            <p:cond delay="600"/>
-                                          </p:stCondLst>
-                                        </p:cTn>
-                                        <p:tgtEl>
-                                          <p:spTgt spid="9"/>
-                                        </p:tgtEl>
-                                        <p:attrNameLst>
-                                          <p:attrName>xshear</p:attrName>
-                                        </p:attrNameLst>
-                                      </p:cBhvr>
-                                    </p:anim>
-                                    <p:animScale>
-                                      <p:cBhvr>
-                                        <p:cTn id="15" dur="200" decel="100000" autoRev="1" fill="hold">
-                                          <p:stCondLst>
-                                            <p:cond delay="600"/>
-                                          </p:stCondLst>
-                                        </p:cTn>
-                                        <p:tgtEl>
-                                          <p:spTgt spid="9"/>
-                                        </p:tgtEl>
-                                      </p:cBhvr>
-                                      <p:from x="100000" y="100000"/>
-                                      <p:to x="80000" y="100000"/>
-                                    </p:animScale>
-                                    <p:anim by="(#ppt_h/3+#ppt_w*0.1)" calcmode="lin" valueType="num">
-                                      <p:cBhvr additive="sum">
-                                        <p:cTn id="16" dur="200" decel="100000" autoRev="1" fill="hold">
-                                          <p:stCondLst>
-                                            <p:cond delay="600"/>
-                                          </p:stCondLst>
-                                        </p:cTn>
-                                        <p:tgtEl>
-                                          <p:spTgt spid="9"/>
-                                        </p:tgtEl>
-                                        <p:attrNameLst>
-                                          <p:attrName>ppt_x</p:attrName>
-                                        </p:attrNameLst>
-                                      </p:cBhvr>
-                                    </p:anim>
-                                  </p:childTnLst>
-                                </p:cTn>
-                              </p:par>
-                            </p:childTnLst>
-                          </p:cTn>
-                        </p:par>
-                      </p:childTnLst>
-                    </p:cTn>
-                  </p:par>
-                </p:childTnLst>
-              </p:cTn>
-              <p:prevCondLst>
-                <p:cond evt="onPrev" delay="0">
-                  <p:tgtEl>
-                    <p:sldTgt/>
-                  </p:tgtEl>
-                </p:cond>
-              </p:prevCondLst>
-              <p:nextCondLst>
-                <p:cond evt="onNext" delay="0">
-                  <p:tgtEl>
-                    <p:sldTgt/>
-                  </p:tgtEl>
-                </p:cond>
-              </p:nextCondLst>
-            </p:seq>
-          </p:childTnLst>
-        </p:cTn>
-      </p:par>
-    </p:tnLst>
-    <p:bldLst>
-      <p:bldP spid="9" grpId="0"/>
-    </p:bldLst>
-  </p:timing>
-</p:sld>
-</file>
-
-<file path=ppt/slides/slide30.xml><?xml version="1.0" encoding="utf-8"?>
+<file path=ppt/slides/slide31.xml><?xml version="1.0" encoding="utf-8"?>
 <p:sld xmlns:a="http://schemas.openxmlformats.org/drawingml/2006/main" xmlns:r="http://schemas.openxmlformats.org/officeDocument/2006/relationships" xmlns:p="http://schemas.openxmlformats.org/presentationml/2006/main">
   <p:cSld>
     <p:spTree>
@@ -16113,7 +16421,7 @@
           <p:cNvPr id="2" name="Slide Number Placeholder 1">
             <a:extLst>
               <a:ext uri="{FF2B5EF4-FFF2-40B4-BE49-F238E27FC236}">
-                <a16:creationId xmlns:a16="http://schemas.microsoft.com/office/drawing/2014/main" id="{0F0B1D7F-9CE8-CDCC-6AA9-06552BFB9B80}"/>
+                <a16:creationId xmlns:a16="http://schemas.microsoft.com/office/drawing/2014/main" id="{5E1622FF-13C1-B17C-CD0D-D92F5A2438BA}"/>
               </a:ext>
             </a:extLst>
           </p:cNvPr>
@@ -16131,7 +16439,7 @@
           <a:p>
             <a:fld id="{A80A81DD-F10A-4B1C-963A-0ABBB4865886}" type="slidenum">
               <a:rPr lang="en-US" smtClean="0"/>
-              <a:t>30</a:t>
+              <a:t>31</a:t>
             </a:fld>
             <a:endParaRPr lang="en-US"/>
           </a:p>
@@ -16140,7 +16448,7 @@
     </p:spTree>
     <p:extLst>
       <p:ext uri="{BB962C8B-B14F-4D97-AF65-F5344CB8AC3E}">
-        <p14:creationId xmlns:p14="http://schemas.microsoft.com/office/powerpoint/2010/main" val="1486699210"/>
+        <p14:creationId xmlns:p14="http://schemas.microsoft.com/office/powerpoint/2010/main" val="4153340645"/>
       </p:ext>
     </p:extLst>
   </p:cSld>
@@ -16150,7 +16458,7 @@
 </p:sld>
 </file>
 
-<file path=ppt/slides/slide31.xml><?xml version="1.0" encoding="utf-8"?>
+<file path=ppt/slides/slide32.xml><?xml version="1.0" encoding="utf-8"?>
 <p:sld xmlns:a="http://schemas.openxmlformats.org/drawingml/2006/main" xmlns:r="http://schemas.openxmlformats.org/officeDocument/2006/relationships" xmlns:p="http://schemas.openxmlformats.org/presentationml/2006/main">
   <p:cSld>
     <p:spTree>
@@ -16172,7 +16480,7 @@
           <p:cNvPr id="6" name="Body card">
             <a:extLst>
               <a:ext uri="{FF2B5EF4-FFF2-40B4-BE49-F238E27FC236}">
-                <a16:creationId xmlns:a16="http://schemas.microsoft.com/office/drawing/2014/main" id="{AEA18A98-9255-6B2F-DC5C-B3D4AF3C2EBF}"/>
+                <a16:creationId xmlns:a16="http://schemas.microsoft.com/office/drawing/2014/main" id="{ADA239E0-422E-62C2-D03D-DCFDFA55E2C8}"/>
               </a:ext>
             </a:extLst>
           </p:cNvPr>
@@ -16966,7 +17274,7 @@
           <p:cNvPr id="4" name="Slide Number Placeholder 3">
             <a:extLst>
               <a:ext uri="{FF2B5EF4-FFF2-40B4-BE49-F238E27FC236}">
-                <a16:creationId xmlns:a16="http://schemas.microsoft.com/office/drawing/2014/main" id="{99232755-E65C-4F91-865D-E91E24B18A2B}"/>
+                <a16:creationId xmlns:a16="http://schemas.microsoft.com/office/drawing/2014/main" id="{30A80644-5A7D-5117-2E8F-7FDCB0896244}"/>
               </a:ext>
             </a:extLst>
           </p:cNvPr>
@@ -16984,7 +17292,7 @@
           <a:p>
             <a:fld id="{A80A81DD-F10A-4B1C-963A-0ABBB4865886}" type="slidenum">
               <a:rPr lang="en-US" smtClean="0"/>
-              <a:t>31</a:t>
+              <a:t>32</a:t>
             </a:fld>
             <a:endParaRPr lang="en-US"/>
           </a:p>
@@ -16995,7 +17303,7 @@
           <p:cNvPr id="5" name="Title rule">
             <a:extLst>
               <a:ext uri="{FF2B5EF4-FFF2-40B4-BE49-F238E27FC236}">
-                <a16:creationId xmlns:a16="http://schemas.microsoft.com/office/drawing/2014/main" id="{488F3408-E2E2-4C60-2B11-A9ABE9134AF7}"/>
+                <a16:creationId xmlns:a16="http://schemas.microsoft.com/office/drawing/2014/main" id="{23D7432A-DD44-AE9D-5929-8975DDC7167A}"/>
               </a:ext>
             </a:extLst>
           </p:cNvPr>
@@ -17061,7 +17369,7 @@
     </p:spTree>
     <p:extLst>
       <p:ext uri="{BB962C8B-B14F-4D97-AF65-F5344CB8AC3E}">
-        <p14:creationId xmlns:p14="http://schemas.microsoft.com/office/powerpoint/2010/main" val="2980383690"/>
+        <p14:creationId xmlns:p14="http://schemas.microsoft.com/office/powerpoint/2010/main" val="1350088637"/>
       </p:ext>
     </p:extLst>
   </p:cSld>
@@ -17071,7 +17379,7 @@
 </p:sld>
 </file>
 
-<file path=ppt/slides/slide32.xml><?xml version="1.0" encoding="utf-8"?>
+<file path=ppt/slides/slide33.xml><?xml version="1.0" encoding="utf-8"?>
 <p:sld xmlns:a="http://schemas.openxmlformats.org/drawingml/2006/main" xmlns:r="http://schemas.openxmlformats.org/officeDocument/2006/relationships" xmlns:p="http://schemas.openxmlformats.org/presentationml/2006/main">
   <p:cSld>
     <p:spTree>
@@ -17093,7 +17401,7 @@
           <p:cNvPr id="5" name="Body card">
             <a:extLst>
               <a:ext uri="{FF2B5EF4-FFF2-40B4-BE49-F238E27FC236}">
-                <a16:creationId xmlns:a16="http://schemas.microsoft.com/office/drawing/2014/main" id="{765AC099-F3A9-FDAE-94E1-CAFDCD032907}"/>
+                <a16:creationId xmlns:a16="http://schemas.microsoft.com/office/drawing/2014/main" id="{32716F67-54E6-4EF2-C210-3CB90EEDFEBB}"/>
               </a:ext>
             </a:extLst>
           </p:cNvPr>
@@ -17602,7 +17910,7 @@
           <p:cNvPr id="4" name="Slide Number Placeholder 3">
             <a:extLst>
               <a:ext uri="{FF2B5EF4-FFF2-40B4-BE49-F238E27FC236}">
-                <a16:creationId xmlns:a16="http://schemas.microsoft.com/office/drawing/2014/main" id="{3D698D2E-2A6B-6F70-02DF-32251992B63D}"/>
+                <a16:creationId xmlns:a16="http://schemas.microsoft.com/office/drawing/2014/main" id="{0379AC86-B215-32AD-CECC-47522CC450F0}"/>
               </a:ext>
             </a:extLst>
           </p:cNvPr>
@@ -17620,7 +17928,7 @@
           <a:p>
             <a:fld id="{A80A81DD-F10A-4B1C-963A-0ABBB4865886}" type="slidenum">
               <a:rPr lang="en-US" smtClean="0"/>
-              <a:t>32</a:t>
+              <a:t>33</a:t>
             </a:fld>
             <a:endParaRPr lang="en-US"/>
           </a:p>
@@ -17629,7 +17937,7 @@
     </p:spTree>
     <p:extLst>
       <p:ext uri="{BB962C8B-B14F-4D97-AF65-F5344CB8AC3E}">
-        <p14:creationId xmlns:p14="http://schemas.microsoft.com/office/powerpoint/2010/main" val="3865379911"/>
+        <p14:creationId xmlns:p14="http://schemas.microsoft.com/office/powerpoint/2010/main" val="3453358537"/>
       </p:ext>
     </p:extLst>
   </p:cSld>
@@ -17639,7 +17947,7 @@
 </p:sld>
 </file>
 
-<file path=ppt/slides/slide33.xml><?xml version="1.0" encoding="utf-8"?>
+<file path=ppt/slides/slide34.xml><?xml version="1.0" encoding="utf-8"?>
 <p:sld xmlns:a="http://schemas.openxmlformats.org/drawingml/2006/main" xmlns:r="http://schemas.openxmlformats.org/officeDocument/2006/relationships" xmlns:p="http://schemas.openxmlformats.org/presentationml/2006/main">
   <p:cSld>
     <p:spTree>
@@ -17661,7 +17969,7 @@
           <p:cNvPr id="6" name="Body card">
             <a:extLst>
               <a:ext uri="{FF2B5EF4-FFF2-40B4-BE49-F238E27FC236}">
-                <a16:creationId xmlns:a16="http://schemas.microsoft.com/office/drawing/2014/main" id="{16455F31-DABA-78F8-239F-A2CA0E170524}"/>
+                <a16:creationId xmlns:a16="http://schemas.microsoft.com/office/drawing/2014/main" id="{7E7EEE50-9936-2C88-2AE4-3B761902A19A}"/>
               </a:ext>
             </a:extLst>
           </p:cNvPr>
@@ -18065,7 +18373,7 @@
           <p:cNvPr id="4" name="Slide Number Placeholder 3">
             <a:extLst>
               <a:ext uri="{FF2B5EF4-FFF2-40B4-BE49-F238E27FC236}">
-                <a16:creationId xmlns:a16="http://schemas.microsoft.com/office/drawing/2014/main" id="{BC4AD742-39B0-0A87-4DA3-A3684590EFE6}"/>
+                <a16:creationId xmlns:a16="http://schemas.microsoft.com/office/drawing/2014/main" id="{3C60D4E2-DF09-B131-AB19-D6E73490E800}"/>
               </a:ext>
             </a:extLst>
           </p:cNvPr>
@@ -18083,7 +18391,7 @@
           <a:p>
             <a:fld id="{A80A81DD-F10A-4B1C-963A-0ABBB4865886}" type="slidenum">
               <a:rPr lang="en-US" smtClean="0"/>
-              <a:t>33</a:t>
+              <a:t>34</a:t>
             </a:fld>
             <a:endParaRPr lang="en-US"/>
           </a:p>
@@ -18094,7 +18402,7 @@
           <p:cNvPr id="5" name="Title rule">
             <a:extLst>
               <a:ext uri="{FF2B5EF4-FFF2-40B4-BE49-F238E27FC236}">
-                <a16:creationId xmlns:a16="http://schemas.microsoft.com/office/drawing/2014/main" id="{5FA94503-5511-3114-0AFF-03C01E5D3B8B}"/>
+                <a16:creationId xmlns:a16="http://schemas.microsoft.com/office/drawing/2014/main" id="{E4346553-408C-AAA9-A308-0A74A79B30F4}"/>
               </a:ext>
             </a:extLst>
           </p:cNvPr>
@@ -18160,7 +18468,7 @@
     </p:spTree>
     <p:extLst>
       <p:ext uri="{BB962C8B-B14F-4D97-AF65-F5344CB8AC3E}">
-        <p14:creationId xmlns:p14="http://schemas.microsoft.com/office/powerpoint/2010/main" val="2217923380"/>
+        <p14:creationId xmlns:p14="http://schemas.microsoft.com/office/powerpoint/2010/main" val="515702394"/>
       </p:ext>
     </p:extLst>
   </p:cSld>
@@ -18170,7 +18478,7 @@
 </p:sld>
 </file>
 
-<file path=ppt/slides/slide34.xml><?xml version="1.0" encoding="utf-8"?>
+<file path=ppt/slides/slide35.xml><?xml version="1.0" encoding="utf-8"?>
 <p:sld xmlns:a="http://schemas.openxmlformats.org/drawingml/2006/main" xmlns:r="http://schemas.openxmlformats.org/officeDocument/2006/relationships" xmlns:p="http://schemas.openxmlformats.org/presentationml/2006/main">
   <p:cSld>
     <p:spTree>
@@ -18999,7 +19307,7 @@
           <p:cNvPr id="3" name="Slide Number Placeholder 2">
             <a:extLst>
               <a:ext uri="{FF2B5EF4-FFF2-40B4-BE49-F238E27FC236}">
-                <a16:creationId xmlns:a16="http://schemas.microsoft.com/office/drawing/2014/main" id="{BBDF3FBF-842A-4DA6-A393-3BF8367173DF}"/>
+                <a16:creationId xmlns:a16="http://schemas.microsoft.com/office/drawing/2014/main" id="{90818292-3AE6-B7AB-CA1F-D0F516426F68}"/>
               </a:ext>
             </a:extLst>
           </p:cNvPr>
@@ -19017,7 +19325,7 @@
           <a:p>
             <a:fld id="{A80A81DD-F10A-4B1C-963A-0ABBB4865886}" type="slidenum">
               <a:rPr lang="en-US" smtClean="0"/>
-              <a:t>34</a:t>
+              <a:t>35</a:t>
             </a:fld>
             <a:endParaRPr lang="en-US"/>
           </a:p>
@@ -19026,7 +19334,7 @@
     </p:spTree>
     <p:extLst>
       <p:ext uri="{BB962C8B-B14F-4D97-AF65-F5344CB8AC3E}">
-        <p14:creationId xmlns:p14="http://schemas.microsoft.com/office/powerpoint/2010/main" val="3137584146"/>
+        <p14:creationId xmlns:p14="http://schemas.microsoft.com/office/powerpoint/2010/main" val="3583992808"/>
       </p:ext>
     </p:extLst>
   </p:cSld>
@@ -19058,7 +19366,7 @@
           <p:cNvPr id="5" name="Body card">
             <a:extLst>
               <a:ext uri="{FF2B5EF4-FFF2-40B4-BE49-F238E27FC236}">
-                <a16:creationId xmlns:a16="http://schemas.microsoft.com/office/drawing/2014/main" id="{60B693AA-B795-09D1-561A-F1DFA2E3A887}"/>
+                <a16:creationId xmlns:a16="http://schemas.microsoft.com/office/drawing/2014/main" id="{92237A1F-3E90-6556-1E03-548FEED58994}"/>
               </a:ext>
             </a:extLst>
           </p:cNvPr>
@@ -19580,7 +19888,7 @@
           <p:cNvPr id="4" name="Slide Number Placeholder 3">
             <a:extLst>
               <a:ext uri="{FF2B5EF4-FFF2-40B4-BE49-F238E27FC236}">
-                <a16:creationId xmlns:a16="http://schemas.microsoft.com/office/drawing/2014/main" id="{B716F0C3-F795-ED02-0D89-50C2F39D2ABF}"/>
+                <a16:creationId xmlns:a16="http://schemas.microsoft.com/office/drawing/2014/main" id="{81B3C1E3-915E-DFCD-DA35-E26A55B1100C}"/>
               </a:ext>
             </a:extLst>
           </p:cNvPr>
@@ -19607,7 +19915,7 @@
     </p:spTree>
     <p:extLst>
       <p:ext uri="{BB962C8B-B14F-4D97-AF65-F5344CB8AC3E}">
-        <p14:creationId xmlns:p14="http://schemas.microsoft.com/office/powerpoint/2010/main" val="3501822374"/>
+        <p14:creationId xmlns:p14="http://schemas.microsoft.com/office/powerpoint/2010/main" val="506009389"/>
       </p:ext>
     </p:extLst>
   </p:cSld>
@@ -19639,7 +19947,7 @@
           <p:cNvPr id="6" name="Body card">
             <a:extLst>
               <a:ext uri="{FF2B5EF4-FFF2-40B4-BE49-F238E27FC236}">
-                <a16:creationId xmlns:a16="http://schemas.microsoft.com/office/drawing/2014/main" id="{AB4E1F0C-58F0-D934-F99F-431133FC6551}"/>
+                <a16:creationId xmlns:a16="http://schemas.microsoft.com/office/drawing/2014/main" id="{939A5A2C-D627-C557-2636-A2EABAC4268F}"/>
               </a:ext>
             </a:extLst>
           </p:cNvPr>
@@ -19825,7 +20133,7 @@
           <p:cNvPr id="4" name="Slide Number Placeholder 3">
             <a:extLst>
               <a:ext uri="{FF2B5EF4-FFF2-40B4-BE49-F238E27FC236}">
-                <a16:creationId xmlns:a16="http://schemas.microsoft.com/office/drawing/2014/main" id="{8F10B18D-494A-BFC6-1871-5CEF67E5B091}"/>
+                <a16:creationId xmlns:a16="http://schemas.microsoft.com/office/drawing/2014/main" id="{D259E4CE-329E-787F-6F4B-4FA86A071115}"/>
               </a:ext>
             </a:extLst>
           </p:cNvPr>
@@ -19854,7 +20162,7 @@
           <p:cNvPr id="5" name="Title rule">
             <a:extLst>
               <a:ext uri="{FF2B5EF4-FFF2-40B4-BE49-F238E27FC236}">
-                <a16:creationId xmlns:a16="http://schemas.microsoft.com/office/drawing/2014/main" id="{D3BDC226-52F1-34F6-5C2F-0F20133D41EA}"/>
+                <a16:creationId xmlns:a16="http://schemas.microsoft.com/office/drawing/2014/main" id="{0BB0F928-116D-81E8-2332-DEE26E784939}"/>
               </a:ext>
             </a:extLst>
           </p:cNvPr>
@@ -19920,7 +20228,7 @@
     </p:spTree>
     <p:extLst>
       <p:ext uri="{BB962C8B-B14F-4D97-AF65-F5344CB8AC3E}">
-        <p14:creationId xmlns:p14="http://schemas.microsoft.com/office/powerpoint/2010/main" val="4205329341"/>
+        <p14:creationId xmlns:p14="http://schemas.microsoft.com/office/powerpoint/2010/main" val="1594317263"/>
       </p:ext>
     </p:extLst>
   </p:cSld>
@@ -19952,7 +20260,7 @@
           <p:cNvPr id="6" name="Body card">
             <a:extLst>
               <a:ext uri="{FF2B5EF4-FFF2-40B4-BE49-F238E27FC236}">
-                <a16:creationId xmlns:a16="http://schemas.microsoft.com/office/drawing/2014/main" id="{E78E8DCF-ACC6-0256-A398-2BA4EAD8207A}"/>
+                <a16:creationId xmlns:a16="http://schemas.microsoft.com/office/drawing/2014/main" id="{D8063161-C473-F00C-5B63-263462EC7427}"/>
               </a:ext>
             </a:extLst>
           </p:cNvPr>
@@ -20390,7 +20698,7 @@
           <p:cNvPr id="4" name="Slide Number Placeholder 3">
             <a:extLst>
               <a:ext uri="{FF2B5EF4-FFF2-40B4-BE49-F238E27FC236}">
-                <a16:creationId xmlns:a16="http://schemas.microsoft.com/office/drawing/2014/main" id="{4C563B39-2CF4-9F0E-65F8-8946308E2AEA}"/>
+                <a16:creationId xmlns:a16="http://schemas.microsoft.com/office/drawing/2014/main" id="{673884A8-DEBB-AF09-F355-C31CA06DDEFD}"/>
               </a:ext>
             </a:extLst>
           </p:cNvPr>
@@ -20419,7 +20727,7 @@
           <p:cNvPr id="5" name="Title rule">
             <a:extLst>
               <a:ext uri="{FF2B5EF4-FFF2-40B4-BE49-F238E27FC236}">
-                <a16:creationId xmlns:a16="http://schemas.microsoft.com/office/drawing/2014/main" id="{10A07C2C-EE41-9C47-B0C7-44CFD9AFA541}"/>
+                <a16:creationId xmlns:a16="http://schemas.microsoft.com/office/drawing/2014/main" id="{4964A124-FA69-D344-BAB7-7B08ACE44429}"/>
               </a:ext>
             </a:extLst>
           </p:cNvPr>
@@ -20485,7 +20793,7 @@
     </p:spTree>
     <p:extLst>
       <p:ext uri="{BB962C8B-B14F-4D97-AF65-F5344CB8AC3E}">
-        <p14:creationId xmlns:p14="http://schemas.microsoft.com/office/powerpoint/2010/main" val="4185167999"/>
+        <p14:creationId xmlns:p14="http://schemas.microsoft.com/office/powerpoint/2010/main" val="1828866161"/>
       </p:ext>
     </p:extLst>
   </p:cSld>
@@ -21060,7 +21368,7 @@
           <p:cNvPr id="3" name="Slide Number Placeholder 2">
             <a:extLst>
               <a:ext uri="{FF2B5EF4-FFF2-40B4-BE49-F238E27FC236}">
-                <a16:creationId xmlns:a16="http://schemas.microsoft.com/office/drawing/2014/main" id="{D8D51BDB-48DC-255C-974A-276B133060F2}"/>
+                <a16:creationId xmlns:a16="http://schemas.microsoft.com/office/drawing/2014/main" id="{F77C2D55-A2CD-7F99-32CD-D478F9663ED0}"/>
               </a:ext>
             </a:extLst>
           </p:cNvPr>
@@ -21087,7 +21395,7 @@
     </p:spTree>
     <p:extLst>
       <p:ext uri="{BB962C8B-B14F-4D97-AF65-F5344CB8AC3E}">
-        <p14:creationId xmlns:p14="http://schemas.microsoft.com/office/powerpoint/2010/main" val="3824685737"/>
+        <p14:creationId xmlns:p14="http://schemas.microsoft.com/office/powerpoint/2010/main" val="392340722"/>
       </p:ext>
     </p:extLst>
   </p:cSld>
@@ -21119,7 +21427,7 @@
           <p:cNvPr id="6" name="Body card">
             <a:extLst>
               <a:ext uri="{FF2B5EF4-FFF2-40B4-BE49-F238E27FC236}">
-                <a16:creationId xmlns:a16="http://schemas.microsoft.com/office/drawing/2014/main" id="{B11AC56F-EA5B-340A-A360-19C752E6E072}"/>
+                <a16:creationId xmlns:a16="http://schemas.microsoft.com/office/drawing/2014/main" id="{E330F862-AE9C-EE58-E03B-B824433D306D}"/>
               </a:ext>
             </a:extLst>
           </p:cNvPr>
@@ -21385,7 +21693,7 @@
           <p:cNvPr id="4" name="Slide Number Placeholder 3">
             <a:extLst>
               <a:ext uri="{FF2B5EF4-FFF2-40B4-BE49-F238E27FC236}">
-                <a16:creationId xmlns:a16="http://schemas.microsoft.com/office/drawing/2014/main" id="{A8A3D05C-39E8-C803-B86A-BDFEEC258D61}"/>
+                <a16:creationId xmlns:a16="http://schemas.microsoft.com/office/drawing/2014/main" id="{E847B86B-CF4F-5004-F564-F3E9776DFFF7}"/>
               </a:ext>
             </a:extLst>
           </p:cNvPr>
@@ -21414,7 +21722,7 @@
           <p:cNvPr id="5" name="Title rule">
             <a:extLst>
               <a:ext uri="{FF2B5EF4-FFF2-40B4-BE49-F238E27FC236}">
-                <a16:creationId xmlns:a16="http://schemas.microsoft.com/office/drawing/2014/main" id="{24354336-7175-FDD0-7D51-94E004DA9D24}"/>
+                <a16:creationId xmlns:a16="http://schemas.microsoft.com/office/drawing/2014/main" id="{49A69466-6FC3-D6E2-2672-5534F332484E}"/>
               </a:ext>
             </a:extLst>
           </p:cNvPr>
@@ -21480,7 +21788,7 @@
     </p:spTree>
     <p:extLst>
       <p:ext uri="{BB962C8B-B14F-4D97-AF65-F5344CB8AC3E}">
-        <p14:creationId xmlns:p14="http://schemas.microsoft.com/office/powerpoint/2010/main" val="2973861821"/>
+        <p14:creationId xmlns:p14="http://schemas.microsoft.com/office/powerpoint/2010/main" val="109095720"/>
       </p:ext>
     </p:extLst>
   </p:cSld>
@@ -21512,7 +21820,7 @@
           <p:cNvPr id="6" name="Body card">
             <a:extLst>
               <a:ext uri="{FF2B5EF4-FFF2-40B4-BE49-F238E27FC236}">
-                <a16:creationId xmlns:a16="http://schemas.microsoft.com/office/drawing/2014/main" id="{C85810FD-CE8C-D49A-A2CD-1C6F895F21C8}"/>
+                <a16:creationId xmlns:a16="http://schemas.microsoft.com/office/drawing/2014/main" id="{9CC7A5F4-AA0B-5409-20AF-B081E05EC2AE}"/>
               </a:ext>
             </a:extLst>
           </p:cNvPr>
@@ -21690,7 +21998,7 @@
           <p:cNvPr id="4" name="Slide Number Placeholder 3">
             <a:extLst>
               <a:ext uri="{FF2B5EF4-FFF2-40B4-BE49-F238E27FC236}">
-                <a16:creationId xmlns:a16="http://schemas.microsoft.com/office/drawing/2014/main" id="{D4009F1A-7437-061A-A4F8-AAD9164E973A}"/>
+                <a16:creationId xmlns:a16="http://schemas.microsoft.com/office/drawing/2014/main" id="{E83D15A0-7C29-649F-9A4C-AD1A8688885D}"/>
               </a:ext>
             </a:extLst>
           </p:cNvPr>
@@ -21719,7 +22027,7 @@
           <p:cNvPr id="5" name="Title rule">
             <a:extLst>
               <a:ext uri="{FF2B5EF4-FFF2-40B4-BE49-F238E27FC236}">
-                <a16:creationId xmlns:a16="http://schemas.microsoft.com/office/drawing/2014/main" id="{F8E13CEA-2DC3-005E-76CA-650F5FFE1F6C}"/>
+                <a16:creationId xmlns:a16="http://schemas.microsoft.com/office/drawing/2014/main" id="{F46819D0-BC49-93EF-995D-6024DFEF6A6C}"/>
               </a:ext>
             </a:extLst>
           </p:cNvPr>
@@ -21785,7 +22093,7 @@
     </p:spTree>
     <p:extLst>
       <p:ext uri="{BB962C8B-B14F-4D97-AF65-F5344CB8AC3E}">
-        <p14:creationId xmlns:p14="http://schemas.microsoft.com/office/powerpoint/2010/main" val="3922171624"/>
+        <p14:creationId xmlns:p14="http://schemas.microsoft.com/office/powerpoint/2010/main" val="165540836"/>
       </p:ext>
     </p:extLst>
   </p:cSld>
